--- a/納品レポート/ホテル別レポート/comfort_yokohama_kannai_口コミ分析レポート.pptx
+++ b/納品レポート/ホテル別レポート/comfort_yokohama_kannai_口コミ分析レポート.pptx
@@ -186,10 +186,10 @@
                     <c:v>楽天トラベル</c:v>
                   </c:pt>
                   <c:pt idx="2">
-                    <c:v>Booking.com</c:v>
+                    <c:v>Agoda</c:v>
                   </c:pt>
                   <c:pt idx="3">
-                    <c:v>Agoda</c:v>
+                    <c:v>Booking.com</c:v>
                   </c:pt>
                   <c:pt idx="4">
                     <c:v>じゃらん</c:v>
@@ -208,22 +208,22 @@
                 <c:formatCode>General</c:formatCode>
                 <c:ptCount val="6"/>
                 <c:pt idx="0">
-                  <c:v>8.67</c:v>
+                  <c:v>8.68</c:v>
                 </c:pt>
                 <c:pt idx="1">
                   <c:v>7.9</c:v>
                 </c:pt>
                 <c:pt idx="2">
-                  <c:v>7.5</c:v>
+                  <c:v>7.43</c:v>
                 </c:pt>
                 <c:pt idx="3">
                   <c:v>7.43</c:v>
                 </c:pt>
                 <c:pt idx="4">
-                  <c:v>7.16</c:v>
+                  <c:v>7.2</c:v>
                 </c:pt>
                 <c:pt idx="5">
-                  <c:v>7</c:v>
+                  <c:v>6.62</c:v>
                 </c:pt>
               </c:numCache>
             </c:numRef>
@@ -569,10 +569,10 @@
                   <c:v>100</c:v>
                 </c:pt>
                 <c:pt idx="1">
-                  <c:v>23</c:v>
+                  <c:v>22</c:v>
                 </c:pt>
                 <c:pt idx="2">
-                  <c:v>15</c:v>
+                  <c:v>16</c:v>
                 </c:pt>
               </c:numCache>
             </c:numRef>
@@ -823,19 +823,19 @@
                 <c:formatCode>General</c:formatCode>
                 <c:ptCount val="9"/>
                 <c:pt idx="0">
-                  <c:v>35</c:v>
+                  <c:v>33</c:v>
                 </c:pt>
                 <c:pt idx="1">
-                  <c:v>8</c:v>
+                  <c:v>9</c:v>
                 </c:pt>
                 <c:pt idx="2">
-                  <c:v>57</c:v>
+                  <c:v>58</c:v>
                 </c:pt>
                 <c:pt idx="3">
                   <c:v>4</c:v>
                 </c:pt>
                 <c:pt idx="4">
-                  <c:v>13</c:v>
+                  <c:v>12</c:v>
                 </c:pt>
                 <c:pt idx="5">
                   <c:v>6</c:v>
@@ -847,7 +847,7 @@
                   <c:v>1</c:v>
                 </c:pt>
                 <c:pt idx="8">
-                  <c:v>5</c:v>
+                  <c:v>6</c:v>
                 </c:pt>
               </c:numCache>
             </c:numRef>
@@ -2818,7 +2818,7 @@
                 <a:ea typeface="Arial" pitchFamily="34" charset="-122"/>
                 <a:cs typeface="Arial" pitchFamily="34" charset="-120"/>
               </a:rPr>
-              <a:t>作成日：2026年3月17日</a:t>
+              <a:t>作成日：2026年3月18日</a:t>
             </a:r>
             <a:endParaRPr lang="en-US" sz="1000" dirty="0"/>
           </a:p>
@@ -3364,7 +3364,7 @@
                           <a:ea typeface="Arial" pitchFamily="34" charset="-122"/>
                           <a:cs typeface="Arial" pitchFamily="34" charset="-120"/>
                         </a:rPr>
-                        <a:t>7.70点</a:t>
+                        <a:t>7.65点</a:t>
                       </a:r>
                       <a:endParaRPr lang="en-US" sz="1000" dirty="0">
                         <a:latin typeface="Arial" charset="0"/>
@@ -3912,7 +3912,7 @@
                           <a:ea typeface="Arial" pitchFamily="34" charset="-122"/>
                           <a:cs typeface="Arial" pitchFamily="34" charset="-120"/>
                         </a:rPr>
-                        <a:t>10.9%</a:t>
+                        <a:t>11.6%</a:t>
                       </a:r>
                       <a:endParaRPr lang="en-US" sz="1000" dirty="0">
                         <a:latin typeface="Arial" charset="0"/>
@@ -3980,7 +3980,7 @@
                           <a:ea typeface="Arial" pitchFamily="34" charset="-122"/>
                           <a:cs typeface="Arial" pitchFamily="34" charset="-120"/>
                         </a:rPr>
-                        <a:t>6%以下</a:t>
+                        <a:t>7%以下</a:t>
                       </a:r>
                       <a:endParaRPr lang="en-US" sz="1000" dirty="0">
                         <a:latin typeface="Arial" charset="0"/>
@@ -4186,7 +4186,7 @@
                           <a:ea typeface="Arial" pitchFamily="34" charset="-122"/>
                           <a:cs typeface="Arial" pitchFamily="34" charset="-120"/>
                         </a:rPr>
-                        <a:t>7.0点</a:t>
+                        <a:t>6.6点</a:t>
                       </a:r>
                       <a:endParaRPr lang="en-US" sz="1000" dirty="0">
                         <a:latin typeface="Arial" charset="0"/>
@@ -4254,7 +4254,7 @@
                           <a:ea typeface="Arial" pitchFamily="34" charset="-122"/>
                           <a:cs typeface="Arial" pitchFamily="34" charset="-120"/>
                         </a:rPr>
-                        <a:t>8.0点以上</a:t>
+                        <a:t>7.6点以上</a:t>
                       </a:r>
                       <a:endParaRPr lang="en-US" sz="1000" dirty="0">
                         <a:latin typeface="Arial" charset="0"/>
@@ -4734,7 +4734,7 @@
                           <a:ea typeface="Arial" pitchFamily="34" charset="-122"/>
                           <a:cs typeface="Arial" pitchFamily="34" charset="-120"/>
                         </a:rPr>
-                        <a:t>約21件/期間</a:t>
+                        <a:t>約22件/期間</a:t>
                       </a:r>
                       <a:endParaRPr lang="en-US" sz="1000" dirty="0">
                         <a:latin typeface="Arial" charset="0"/>
@@ -4802,7 +4802,7 @@
                           <a:ea typeface="Arial" pitchFamily="34" charset="-122"/>
                           <a:cs typeface="Arial" pitchFamily="34" charset="-120"/>
                         </a:rPr>
-                        <a:t>10件以下</a:t>
+                        <a:t>11件以下</a:t>
                       </a:r>
                       <a:endParaRPr lang="en-US" sz="1000" dirty="0">
                         <a:latin typeface="Arial" charset="0"/>
@@ -5373,7 +5373,7 @@
                 <a:ea typeface="Arial" pitchFamily="34" charset="-122"/>
                 <a:cs typeface="Arial" pitchFamily="34" charset="-120"/>
               </a:rPr>
-              <a:t>7.70</a:t>
+              <a:t>7.65</a:t>
             </a:r>
             <a:endParaRPr lang="en-US" sz="3200" dirty="0"/>
           </a:p>
@@ -5623,7 +5623,7 @@
                 <a:ea typeface="Arial" pitchFamily="34" charset="-122"/>
                 <a:cs typeface="Arial" pitchFamily="34" charset="-120"/>
               </a:rPr>
-              <a:t>10.9%</a:t>
+              <a:t>11.6%</a:t>
             </a:r>
             <a:endParaRPr lang="en-US" sz="3200" dirty="0"/>
           </a:p>
@@ -5896,7 +5896,7 @@
                 <a:ea typeface="Arial" pitchFamily="34" charset="-122"/>
                 <a:cs typeface="Arial" pitchFamily="34" charset="-120"/>
               </a:rPr>
-              <a:t>  残念ながら改装工事中で、通常の朝食は提供されていませんでした</a:t>
+              <a:t>  が改装中で提供された朝ごはん（お弁当）が残念でした</a:t>
             </a:r>
             <a:endParaRPr lang="en-US" sz="1100" dirty="0"/>
           </a:p>
@@ -5936,7 +5936,7 @@
                 <a:ea typeface="Arial" pitchFamily="34" charset="-122"/>
                 <a:cs typeface="Arial" pitchFamily="34" charset="-120"/>
               </a:rPr>
-              <a:t>  電車に乗ってラーメン博物館もあり、観光にも便利な立地でした</a:t>
+              <a:t>  立地だけのホテル 朝食ブュッフェが楽しめるというから選んだのに、改装工事ということでクッソ不味い弁当であしらわれた</a:t>
             </a:r>
             <a:endParaRPr lang="en-US" sz="1100" dirty="0"/>
           </a:p>
@@ -5976,7 +5976,7 @@
                 <a:ea typeface="Arial" pitchFamily="34" charset="-122"/>
                 <a:cs typeface="Arial" pitchFamily="34" charset="-120"/>
               </a:rPr>
-              <a:t>  7時半のチェックアウトのとき、改装中の朝食のお弁当受け渡し業務のスタッフが5人ほどいましたが、完全にシカトで、感じ...</a:t>
+              <a:t>  施設を良くするためのリニューアル工事は仕方ないにしても、対応が残念</a:t>
             </a:r>
             <a:endParaRPr lang="en-US" sz="1100" dirty="0"/>
           </a:p>
@@ -6124,7 +6124,47 @@
                 <a:ea typeface="Arial" pitchFamily="34" charset="-122"/>
                 <a:cs typeface="Arial" pitchFamily="34" charset="-120"/>
               </a:rPr>
-              <a:t>  残念ながら改装工事中で、通常の朝食は提供されていませんでした</a:t>
+              <a:t>  が改装中で提供された朝ごはん（お弁当）が残念でした</a:t>
+            </a:r>
+            <a:endParaRPr lang="en-US" sz="1100" dirty="0"/>
+          </a:p>
+          <a:p>
+            <a:pPr indent="0" marL="0">
+              <a:spcAft>
+                <a:spcPts val="200"/>
+              </a:spcAft>
+              <a:buNone/>
+            </a:pPr>
+            <a:r>
+              <a:rPr lang="en-US" sz="1100" b="1" dirty="0">
+                <a:solidFill>
+                  <a:srgbClr val="334155"/>
+                </a:solidFill>
+                <a:latin typeface="Arial" pitchFamily="34" charset="0"/>
+                <a:ea typeface="Arial" pitchFamily="34" charset="-122"/>
+                <a:cs typeface="Arial" pitchFamily="34" charset="-120"/>
+              </a:rPr>
+              <a:t>部屋の狭さ </a:t>
+            </a:r>
+            <a:endParaRPr lang="en-US" sz="1100" dirty="0"/>
+          </a:p>
+          <a:p>
+            <a:pPr indent="0" marL="0">
+              <a:spcAft>
+                <a:spcPts val="200"/>
+              </a:spcAft>
+              <a:buNone/>
+            </a:pPr>
+            <a:r>
+              <a:rPr lang="en-US" sz="900" dirty="0">
+                <a:solidFill>
+                  <a:srgbClr val="64748B"/>
+                </a:solidFill>
+                <a:latin typeface="Arial" pitchFamily="34" charset="0"/>
+                <a:ea typeface="Arial" pitchFamily="34" charset="-122"/>
+                <a:cs typeface="Arial" pitchFamily="34" charset="-120"/>
+              </a:rPr>
+              <a:t>  部屋は、少し狭いですが、清潔にされていました</a:t>
             </a:r>
             <a:endParaRPr lang="en-US" sz="1100" dirty="0"/>
           </a:p>
@@ -6165,46 +6205,6 @@
                 <a:cs typeface="Arial" pitchFamily="34" charset="-120"/>
               </a:rPr>
               <a:t>  部屋着（バスローブ）はエレベーター前にあるのでそれを取って行くスタイルです</a:t>
-            </a:r>
-            <a:endParaRPr lang="en-US" sz="1100" dirty="0"/>
-          </a:p>
-          <a:p>
-            <a:pPr indent="0" marL="0">
-              <a:spcAft>
-                <a:spcPts val="200"/>
-              </a:spcAft>
-              <a:buNone/>
-            </a:pPr>
-            <a:r>
-              <a:rPr lang="en-US" sz="1100" b="1" dirty="0">
-                <a:solidFill>
-                  <a:srgbClr val="334155"/>
-                </a:solidFill>
-                <a:latin typeface="Arial" pitchFamily="34" charset="0"/>
-                <a:ea typeface="Arial" pitchFamily="34" charset="-122"/>
-                <a:cs typeface="Arial" pitchFamily="34" charset="-120"/>
-              </a:rPr>
-              <a:t>部屋の狭さ </a:t>
-            </a:r>
-            <a:endParaRPr lang="en-US" sz="1100" dirty="0"/>
-          </a:p>
-          <a:p>
-            <a:pPr indent="0" marL="0">
-              <a:spcAft>
-                <a:spcPts val="200"/>
-              </a:spcAft>
-              <a:buNone/>
-            </a:pPr>
-            <a:r>
-              <a:rPr lang="en-US" sz="900" dirty="0">
-                <a:solidFill>
-                  <a:srgbClr val="64748B"/>
-                </a:solidFill>
-                <a:latin typeface="Arial" pitchFamily="34" charset="0"/>
-                <a:ea typeface="Arial" pitchFamily="34" charset="-122"/>
-                <a:cs typeface="Arial" pitchFamily="34" charset="-120"/>
-              </a:rPr>
-              <a:t>  部屋は、少し狭いですが、清潔にされていました</a:t>
             </a:r>
             <a:endParaRPr lang="en-US" sz="1100" dirty="0"/>
           </a:p>
@@ -6557,7 +6557,7 @@
                 <a:ea typeface="Arial" pitchFamily="34" charset="-122"/>
                 <a:cs typeface="Arial" pitchFamily="34" charset="-120"/>
               </a:rPr>
-              <a:t>7.70</a:t>
+              <a:t>7.65</a:t>
             </a:r>
             <a:endParaRPr lang="en-US" sz="3200" dirty="0"/>
           </a:p>
@@ -6807,7 +6807,7 @@
                 <a:ea typeface="Arial" pitchFamily="34" charset="-122"/>
                 <a:cs typeface="Arial" pitchFamily="34" charset="-120"/>
               </a:rPr>
-              <a:t>10.9%</a:t>
+              <a:t>11.6%</a:t>
             </a:r>
             <a:endParaRPr lang="en-US" sz="3200" dirty="0"/>
           </a:p>
@@ -7353,7 +7353,7 @@
                 <a:ea typeface="Arial" pitchFamily="34" charset="-122"/>
                 <a:cs typeface="Arial" pitchFamily="34" charset="-120"/>
               </a:rPr>
-              <a:t>Trip.com(8.67)が最高スコア。</a:t>
+              <a:t>Trip.com(8.68)が最高スコア。</a:t>
             </a:r>
             <a:endParaRPr lang="en-US" sz="1100" dirty="0"/>
           </a:p>
@@ -7402,7 +7402,7 @@
                 <a:ea typeface="Arial" pitchFamily="34" charset="-122"/>
                 <a:cs typeface="Arial" pitchFamily="34" charset="-120"/>
               </a:rPr>
-              <a:t>Google(7.0)が相対的に低い。口コミ返信の強化が急務</a:t>
+              <a:t>Google(6.6)が相対的に低い。口コミ返信の強化が急務</a:t>
             </a:r>
             <a:endParaRPr lang="en-US" sz="1100" dirty="0"/>
           </a:p>
@@ -7911,7 +7911,7 @@
                           <a:ea typeface="Arial" pitchFamily="34" charset="-122"/>
                           <a:cs typeface="Arial" pitchFamily="34" charset="-120"/>
                         </a:rPr>
-                        <a:t>21</a:t>
+                        <a:t>22</a:t>
                       </a:r>
                       <a:endParaRPr lang="en-US" sz="900" dirty="0">
                         <a:latin typeface="Arial" charset="0"/>
@@ -7979,7 +7979,7 @@
                           <a:ea typeface="Arial" pitchFamily="34" charset="-122"/>
                           <a:cs typeface="Arial" pitchFamily="34" charset="-120"/>
                         </a:rPr>
-                        <a:t>8.67</a:t>
+                        <a:t>8.68</a:t>
                       </a:r>
                       <a:endParaRPr lang="en-US" sz="900" dirty="0">
                         <a:latin typeface="Arial" charset="0"/>
@@ -8115,7 +8115,7 @@
                           <a:ea typeface="Arial" pitchFamily="34" charset="-122"/>
                           <a:cs typeface="Arial" pitchFamily="34" charset="-120"/>
                         </a:rPr>
-                        <a:t>8.67</a:t>
+                        <a:t>8.68</a:t>
                       </a:r>
                       <a:endParaRPr lang="en-US" sz="900" dirty="0">
                         <a:latin typeface="Arial" charset="0"/>
@@ -8253,7 +8253,7 @@
                           <a:ea typeface="Arial" pitchFamily="34" charset="-122"/>
                           <a:cs typeface="Arial" pitchFamily="34" charset="-120"/>
                         </a:rPr>
-                        <a:t>42</a:t>
+                        <a:t>39</a:t>
                       </a:r>
                       <a:endParaRPr lang="en-US" sz="900" dirty="0">
                         <a:latin typeface="Arial" charset="0"/>
@@ -8527,7 +8527,7 @@
                           <a:ea typeface="Arial" pitchFamily="34" charset="-122"/>
                           <a:cs typeface="Arial" pitchFamily="34" charset="-120"/>
                         </a:rPr>
-                        <a:t>Booking.com</a:t>
+                        <a:t>Agoda</a:t>
                       </a:r>
                       <a:endParaRPr lang="en-US" sz="900" dirty="0">
                         <a:latin typeface="Arial" charset="0"/>
@@ -8595,7 +8595,7 @@
                           <a:ea typeface="Arial" pitchFamily="34" charset="-122"/>
                           <a:cs typeface="Arial" pitchFamily="34" charset="-120"/>
                         </a:rPr>
-                        <a:t>30</a:t>
+                        <a:t>14</a:t>
                       </a:r>
                       <a:endParaRPr lang="en-US" sz="900" dirty="0">
                         <a:latin typeface="Arial" charset="0"/>
@@ -8663,7 +8663,7 @@
                           <a:ea typeface="Arial" pitchFamily="34" charset="-122"/>
                           <a:cs typeface="Arial" pitchFamily="34" charset="-120"/>
                         </a:rPr>
-                        <a:t>7.5</a:t>
+                        <a:t>7.43</a:t>
                       </a:r>
                       <a:endParaRPr lang="en-US" sz="900" dirty="0">
                         <a:latin typeface="Arial" charset="0"/>
@@ -8799,7 +8799,7 @@
                           <a:ea typeface="Arial" pitchFamily="34" charset="-122"/>
                           <a:cs typeface="Arial" pitchFamily="34" charset="-120"/>
                         </a:rPr>
-                        <a:t>7.5</a:t>
+                        <a:t>7.43</a:t>
                       </a:r>
                       <a:endParaRPr lang="en-US" sz="900" dirty="0">
                         <a:latin typeface="Arial" charset="0"/>
@@ -8869,7 +8869,7 @@
                           <a:ea typeface="Arial" pitchFamily="34" charset="-122"/>
                           <a:cs typeface="Arial" pitchFamily="34" charset="-120"/>
                         </a:rPr>
-                        <a:t>Agoda</a:t>
+                        <a:t>Booking.com</a:t>
                       </a:r>
                       <a:endParaRPr lang="en-US" sz="900" dirty="0">
                         <a:latin typeface="Arial" charset="0"/>
@@ -8937,7 +8937,7 @@
                           <a:ea typeface="Arial" pitchFamily="34" charset="-122"/>
                           <a:cs typeface="Arial" pitchFamily="34" charset="-120"/>
                         </a:rPr>
-                        <a:t>14</a:t>
+                        <a:t>30</a:t>
                       </a:r>
                       <a:endParaRPr lang="en-US" sz="900" dirty="0">
                         <a:latin typeface="Arial" charset="0"/>
@@ -9279,7 +9279,7 @@
                           <a:ea typeface="Arial" pitchFamily="34" charset="-122"/>
                           <a:cs typeface="Arial" pitchFamily="34" charset="-120"/>
                         </a:rPr>
-                        <a:t>19</a:t>
+                        <a:t>20</a:t>
                       </a:r>
                       <a:endParaRPr lang="en-US" sz="900" dirty="0">
                         <a:latin typeface="Arial" charset="0"/>
@@ -9347,7 +9347,7 @@
                           <a:ea typeface="Arial" pitchFamily="34" charset="-122"/>
                           <a:cs typeface="Arial" pitchFamily="34" charset="-120"/>
                         </a:rPr>
-                        <a:t>3.58</a:t>
+                        <a:t>3.6</a:t>
                       </a:r>
                       <a:endParaRPr lang="en-US" sz="900" dirty="0">
                         <a:latin typeface="Arial" charset="0"/>
@@ -9483,7 +9483,7 @@
                           <a:ea typeface="Arial" pitchFamily="34" charset="-122"/>
                           <a:cs typeface="Arial" pitchFamily="34" charset="-120"/>
                         </a:rPr>
-                        <a:t>7.16</a:t>
+                        <a:t>7.2</a:t>
                       </a:r>
                       <a:endParaRPr lang="en-US" sz="900" dirty="0">
                         <a:latin typeface="Arial" charset="0"/>
@@ -9621,7 +9621,7 @@
                           <a:ea typeface="Arial" pitchFamily="34" charset="-122"/>
                           <a:cs typeface="Arial" pitchFamily="34" charset="-120"/>
                         </a:rPr>
-                        <a:t>12</a:t>
+                        <a:t>13</a:t>
                       </a:r>
                       <a:endParaRPr lang="en-US" sz="900" dirty="0">
                         <a:latin typeface="Arial" charset="0"/>
@@ -9689,7 +9689,7 @@
                           <a:ea typeface="Arial" pitchFamily="34" charset="-122"/>
                           <a:cs typeface="Arial" pitchFamily="34" charset="-120"/>
                         </a:rPr>
-                        <a:t>3.5</a:t>
+                        <a:t>3.31</a:t>
                       </a:r>
                       <a:endParaRPr lang="en-US" sz="900" dirty="0">
                         <a:latin typeface="Arial" charset="0"/>
@@ -9825,7 +9825,7 @@
                           <a:ea typeface="Arial" pitchFamily="34" charset="-122"/>
                           <a:cs typeface="Arial" pitchFamily="34" charset="-120"/>
                         </a:rPr>
-                        <a:t>7</a:t>
+                        <a:t>6.62</a:t>
                       </a:r>
                       <a:endParaRPr lang="en-US" sz="900" dirty="0">
                         <a:latin typeface="Arial" charset="0"/>
@@ -10331,7 +10331,7 @@
                 <a:ea typeface="Arial" pitchFamily="34" charset="-122"/>
                 <a:cs typeface="Arial" pitchFamily="34" charset="-120"/>
               </a:rPr>
-              <a:t>23件（16.7%）</a:t>
+              <a:t>22件（15.9%）</a:t>
             </a:r>
             <a:endParaRPr lang="en-US" sz="1100" dirty="0"/>
           </a:p>
@@ -10429,7 +10429,7 @@
                 <a:ea typeface="Arial" pitchFamily="34" charset="-122"/>
                 <a:cs typeface="Arial" pitchFamily="34" charset="-120"/>
               </a:rPr>
-              <a:t>15件（10.9%）</a:t>
+              <a:t>16件（11.6%）</a:t>
             </a:r>
             <a:endParaRPr lang="en-US" sz="1100" dirty="0"/>
           </a:p>
@@ -10841,7 +10841,7 @@
                 <a:ea typeface="Arial" pitchFamily="34" charset="-122"/>
                 <a:cs typeface="Arial" pitchFamily="34" charset="-120"/>
               </a:rPr>
-              <a:t>残念ながら改装工事中で、通常の朝食は提供されていませんでした</a:t>
+              <a:t>が改装中で提供された朝ごはん（お弁当）が残念でした</a:t>
             </a:r>
             <a:endParaRPr lang="en-US" sz="900" dirty="0"/>
           </a:p>
@@ -10880,7 +10880,7 @@
                 <a:ea typeface="Arial" pitchFamily="34" charset="-122"/>
                 <a:cs typeface="Arial" pitchFamily="34" charset="-120"/>
               </a:rPr>
-              <a:t>「ホテルが改装しているのを知らないで 宿泊をしたので、楽しみにしていた朝食のスムージーが飲めなくて残念でした」</a:t>
+              <a:t>「立地だけのホテル 朝食ブュッフェが楽しめるというから選んだのに、改装工事ということでクッソ不味い弁当であしらわれた」</a:t>
             </a:r>
             <a:endParaRPr lang="en-US" sz="900" dirty="0"/>
           </a:p>
@@ -11064,7 +11064,7 @@
                 <a:ea typeface="Arial" pitchFamily="34" charset="-122"/>
                 <a:cs typeface="Arial" pitchFamily="34" charset="-120"/>
               </a:rPr>
-              <a:t>電車に乗ってラーメン博物館もあり、観光にも便利な立地でした</a:t>
+              <a:t>立地だけのホテル 朝食ブュッフェが楽しめるというから選んだのに、改装工事ということでクッソ不味い弁当であしらわれた</a:t>
             </a:r>
             <a:endParaRPr lang="en-US" sz="900" dirty="0"/>
           </a:p>
@@ -11103,7 +11103,7 @@
                 <a:ea typeface="Arial" pitchFamily="34" charset="-122"/>
                 <a:cs typeface="Arial" pitchFamily="34" charset="-120"/>
               </a:rPr>
-              <a:t>「駅からとても近くて、歩いていろいろなところにいける良いホテルだと」</a:t>
+              <a:t>「２泊しましたが立地もよくご飯に困りませんでした」</a:t>
             </a:r>
             <a:endParaRPr lang="en-US" sz="900" dirty="0"/>
           </a:p>
@@ -11287,7 +11287,7 @@
                 <a:ea typeface="Arial" pitchFamily="34" charset="-122"/>
                 <a:cs typeface="Arial" pitchFamily="34" charset="-120"/>
               </a:rPr>
-              <a:t>7時半のチェックアウトのとき、改装中の朝食のお弁当受け渡し業務のスタッフが5人ほどいましたが、完全にシカトで、感じ...</a:t>
+              <a:t>施設を良くするためのリニューアル工事は仕方ないにしても、対応が残念</a:t>
             </a:r>
             <a:endParaRPr lang="en-US" sz="900" dirty="0"/>
           </a:p>
@@ -11326,7 +11326,7 @@
                 <a:ea typeface="Arial" pitchFamily="34" charset="-122"/>
                 <a:cs typeface="Arial" pitchFamily="34" charset="-120"/>
               </a:rPr>
-              <a:t>「低価格なのに、ホテル内、お部屋共にどこも清潔でフロントの方の接客もとても丁寧で安心でした」</a:t>
+              <a:t>「7時半のチェックアウトのとき、改装中の朝食のお弁当受け渡し業務のスタッフが5人ほどいましたが、完全にシカトで、感じ...」</a:t>
             </a:r>
             <a:endParaRPr lang="en-US" sz="900" dirty="0"/>
           </a:p>
@@ -11510,7 +11510,7 @@
                 <a:ea typeface="Arial" pitchFamily="34" charset="-122"/>
                 <a:cs typeface="Arial" pitchFamily="34" charset="-120"/>
               </a:rPr>
-              <a:t>低価格なのに、ホテル内、お部屋共にどこも清潔でフロントの方の接客もとても丁寧で安心でした</a:t>
+              <a:t>連泊なのにお部屋の清掃入られたことに驚きました</a:t>
             </a:r>
             <a:endParaRPr lang="en-US" sz="900" dirty="0"/>
           </a:p>
@@ -11549,7 +11549,7 @@
                 <a:ea typeface="Arial" pitchFamily="34" charset="-122"/>
                 <a:cs typeface="Arial" pitchFamily="34" charset="-120"/>
               </a:rPr>
-              <a:t>「部屋は、少し狭いですが、清潔にされていました」</a:t>
+              <a:t>「ただリニューアル中なのでお部屋も綺麗になりつつあり好感」</a:t>
             </a:r>
             <a:endParaRPr lang="en-US" sz="900" dirty="0"/>
           </a:p>
@@ -11956,7 +11956,7 @@
                 <a:ea typeface="Arial" pitchFamily="34" charset="-122"/>
                 <a:cs typeface="Arial" pitchFamily="34" charset="-120"/>
               </a:rPr>
-              <a:t>レストランの改装中にあたってしまい残念でしたが、お弁当の朝食サービスもあり立地と価格を考えるとかなりお得だったと思います</a:t>
+              <a:t>m(_ _)m レストラン</a:t>
             </a:r>
             <a:endParaRPr lang="en-US" sz="900" dirty="0"/>
           </a:p>
@@ -11995,7 +11995,7 @@
                 <a:ea typeface="Arial" pitchFamily="34" charset="-122"/>
                 <a:cs typeface="Arial" pitchFamily="34" charset="-120"/>
               </a:rPr>
-              <a:t>「子連れで添い寝無料はとても助かるので、朝食レストランが復活したらまた利用したいと思います」</a:t>
+              <a:t>「レストラン工事でお弁当だったのが残念」</a:t>
             </a:r>
             <a:endParaRPr lang="en-US" sz="900" dirty="0"/>
           </a:p>
@@ -12685,7 +12685,7 @@
                           <a:ea typeface="Arial" pitchFamily="34" charset="-122"/>
                           <a:cs typeface="Arial" pitchFamily="34" charset="-120"/>
                         </a:rPr>
-                        <a:t>残念ながら改装工事中で、通常の朝食は提供されていませんでした</a:t>
+                        <a:t>が改装中で提供された朝ごはん（お弁当）が残念でした</a:t>
                       </a:r>
                       <a:endParaRPr lang="en-US" sz="900" dirty="0">
                         <a:latin typeface="Arial" charset="0"/>
@@ -12753,7 +12753,7 @@
                           <a:ea typeface="Arial" pitchFamily="34" charset="-122"/>
                           <a:cs typeface="Arial" pitchFamily="34" charset="-120"/>
                         </a:rPr>
-                        <a:t>21件</a:t>
+                        <a:t>22件</a:t>
                       </a:r>
                       <a:endParaRPr lang="en-US" sz="900" dirty="0">
                         <a:latin typeface="Arial" charset="0"/>
@@ -12891,7 +12891,7 @@
                           <a:ea typeface="Arial" pitchFamily="34" charset="-122"/>
                           <a:cs typeface="Arial" pitchFamily="34" charset="-120"/>
                         </a:rPr>
-                        <a:t>浴室・水回り</a:t>
+                        <a:t>部屋の狭さ</a:t>
                       </a:r>
                       <a:endParaRPr lang="en-US" sz="900" dirty="0">
                         <a:latin typeface="Arial" charset="0"/>
@@ -12959,7 +12959,7 @@
                           <a:ea typeface="Arial" pitchFamily="34" charset="-122"/>
                           <a:cs typeface="Arial" pitchFamily="34" charset="-120"/>
                         </a:rPr>
-                        <a:t>部屋着（バスローブ）はエレベーター前にあるのでそれを取って行くスタイルです</a:t>
+                        <a:t>部屋は、少し狭いですが、清潔にされていました</a:t>
                       </a:r>
                       <a:endParaRPr lang="en-US" sz="900" dirty="0">
                         <a:latin typeface="Arial" charset="0"/>
@@ -13027,7 +13027,7 @@
                           <a:ea typeface="Arial" pitchFamily="34" charset="-122"/>
                           <a:cs typeface="Arial" pitchFamily="34" charset="-120"/>
                         </a:rPr>
-                        <a:t>9件</a:t>
+                        <a:t>8件</a:t>
                       </a:r>
                       <a:endParaRPr lang="en-US" sz="900" dirty="0">
                         <a:latin typeface="Arial" charset="0"/>
@@ -13165,7 +13165,7 @@
                           <a:ea typeface="Arial" pitchFamily="34" charset="-122"/>
                           <a:cs typeface="Arial" pitchFamily="34" charset="-120"/>
                         </a:rPr>
-                        <a:t>部屋の狭さ</a:t>
+                        <a:t>浴室・水回り</a:t>
                       </a:r>
                       <a:endParaRPr lang="en-US" sz="900" dirty="0">
                         <a:latin typeface="Arial" charset="0"/>
@@ -13233,7 +13233,7 @@
                           <a:ea typeface="Arial" pitchFamily="34" charset="-122"/>
                           <a:cs typeface="Arial" pitchFamily="34" charset="-120"/>
                         </a:rPr>
-                        <a:t>部屋は、少し狭いですが、清潔にされていました</a:t>
+                        <a:t>部屋着（バスローブ）はエレベーター前にあるのでそれを取って行くスタイルです</a:t>
                       </a:r>
                       <a:endParaRPr lang="en-US" sz="900" dirty="0">
                         <a:latin typeface="Arial" charset="0"/>
@@ -13301,7 +13301,7 @@
                           <a:ea typeface="Arial" pitchFamily="34" charset="-122"/>
                           <a:cs typeface="Arial" pitchFamily="34" charset="-120"/>
                         </a:rPr>
-                        <a:t>8件</a:t>
+                        <a:t>7件</a:t>
                       </a:r>
                       <a:endParaRPr lang="en-US" sz="900" dirty="0">
                         <a:latin typeface="Arial" charset="0"/>
@@ -13713,7 +13713,7 @@
                           <a:ea typeface="Arial" pitchFamily="34" charset="-122"/>
                           <a:cs typeface="Arial" pitchFamily="34" charset="-120"/>
                         </a:rPr>
-                        <a:t>臭い・匂い</a:t>
+                        <a:t>エアコン・空調</a:t>
                       </a:r>
                       <a:endParaRPr lang="en-US" sz="900" dirty="0">
                         <a:latin typeface="Arial" charset="0"/>
@@ -13781,7 +13781,7 @@
                           <a:ea typeface="Arial" pitchFamily="34" charset="-122"/>
                           <a:cs typeface="Arial" pitchFamily="34" charset="-120"/>
                         </a:rPr>
-                        <a:t>改修中ということで朝食は弁当でしたが、美味しくなかった、 部屋が薬品のような臭いが強くて、しばらく寝られなかった ...</a:t>
+                        <a:t>La struttura è il classico business hotel con stanze picc...</a:t>
                       </a:r>
                       <a:endParaRPr lang="en-US" sz="900" dirty="0">
                         <a:latin typeface="Arial" charset="0"/>
@@ -13987,7 +13987,7 @@
                           <a:ea typeface="Arial" pitchFamily="34" charset="-122"/>
                           <a:cs typeface="Arial" pitchFamily="34" charset="-120"/>
                         </a:rPr>
-                        <a:t>朝食の改善要望</a:t>
+                        <a:t>設備の老朽化</a:t>
                       </a:r>
                       <a:endParaRPr lang="en-US" sz="900" dirty="0">
                         <a:latin typeface="Arial" charset="0"/>
@@ -14055,7 +14055,7 @@
                           <a:ea typeface="Arial" pitchFamily="34" charset="-122"/>
                           <a:cs typeface="Arial" pitchFamily="34" charset="-120"/>
                         </a:rPr>
-                        <a:t>ビュッフェスタイルの朝食は廃止され、代わりに弁当とおにぎりが提供されるようになりました。改装工事中で、一部は工事現...</a:t>
+                        <a:t>ただホテル自体が年数が経ってるせいかちょっと古さ加減があったけど全然気にならない程度でした</a:t>
                       </a:r>
                       <a:endParaRPr lang="en-US" sz="900" dirty="0">
                         <a:latin typeface="Arial" charset="0"/>
@@ -14123,7 +14123,7 @@
                           <a:ea typeface="Arial" pitchFamily="34" charset="-122"/>
                           <a:cs typeface="Arial" pitchFamily="34" charset="-120"/>
                         </a:rPr>
-                        <a:t>4件</a:t>
+                        <a:t>3件</a:t>
                       </a:r>
                       <a:endParaRPr lang="en-US" sz="900" dirty="0">
                         <a:latin typeface="Arial" charset="0"/>
@@ -14261,7 +14261,7 @@
                           <a:ea typeface="Arial" pitchFamily="34" charset="-122"/>
                           <a:cs typeface="Arial" pitchFamily="34" charset="-120"/>
                         </a:rPr>
-                        <a:t>エアコン・空調</a:t>
+                        <a:t>朝食の改善要望</a:t>
                       </a:r>
                       <a:endParaRPr lang="en-US" sz="900" dirty="0">
                         <a:latin typeface="Arial" charset="0"/>
@@ -14329,7 +14329,7 @@
                           <a:ea typeface="Arial" pitchFamily="34" charset="-122"/>
                           <a:cs typeface="Arial" pitchFamily="34" charset="-120"/>
                         </a:rPr>
-                        <a:t>La struttura è il classico business hotel con stanze picc...</a:t>
+                        <a:t>The breakfast was also very delicious. I booked and check...</a:t>
                       </a:r>
                       <a:endParaRPr lang="en-US" sz="900" dirty="0">
                         <a:latin typeface="Arial" charset="0"/>
@@ -14397,7 +14397,7 @@
                           <a:ea typeface="Arial" pitchFamily="34" charset="-122"/>
                           <a:cs typeface="Arial" pitchFamily="34" charset="-120"/>
                         </a:rPr>
-                        <a:t>4件</a:t>
+                        <a:t>3件</a:t>
                       </a:r>
                       <a:endParaRPr lang="en-US" sz="900" dirty="0">
                         <a:latin typeface="Arial" charset="0"/>
@@ -14535,7 +14535,7 @@
                           <a:ea typeface="Arial" pitchFamily="34" charset="-122"/>
                           <a:cs typeface="Arial" pitchFamily="34" charset="-120"/>
                         </a:rPr>
-                        <a:t>設備の老朽化</a:t>
+                        <a:t>臭い・匂い</a:t>
                       </a:r>
                       <a:endParaRPr lang="en-US" sz="900" dirty="0">
                         <a:latin typeface="Arial" charset="0"/>
@@ -14603,7 +14603,7 @@
                           <a:ea typeface="Arial" pitchFamily="34" charset="-122"/>
                           <a:cs typeface="Arial" pitchFamily="34" charset="-120"/>
                         </a:rPr>
-                        <a:t>ただホテル自体が年数が経ってるせいかちょっと古さ加減があったけど全然気にならない程度でした</a:t>
+                        <a:t>改修中ということで朝食は弁当でしたが、美味しくなかった、 部屋が薬品のような臭いが強くて、しばらく寝られなかった ...</a:t>
                       </a:r>
                       <a:endParaRPr lang="en-US" sz="900" dirty="0">
                         <a:latin typeface="Arial" charset="0"/>
@@ -14671,7 +14671,7 @@
                           <a:ea typeface="Arial" pitchFamily="34" charset="-122"/>
                           <a:cs typeface="Arial" pitchFamily="34" charset="-120"/>
                         </a:rPr>
-                        <a:t>3件</a:t>
+                        <a:t>2件</a:t>
                       </a:r>
                       <a:endParaRPr lang="en-US" sz="900" dirty="0">
                         <a:latin typeface="Arial" charset="0"/>

--- a/納品レポート/ホテル別レポート/comfort_yokohama_kannai_口コミ分析レポート.pptx
+++ b/納品レポート/ホテル別レポート/comfort_yokohama_kannai_口コミ分析レポート.pptx
@@ -208,19 +208,19 @@
                 <c:formatCode>General</c:formatCode>
                 <c:ptCount val="6"/>
                 <c:pt idx="0">
-                  <c:v>8.68</c:v>
+                  <c:v>8.65</c:v>
                 </c:pt>
                 <c:pt idx="1">
-                  <c:v>7.9</c:v>
+                  <c:v>7.85</c:v>
                 </c:pt>
                 <c:pt idx="2">
                   <c:v>7.43</c:v>
                 </c:pt>
                 <c:pt idx="3">
-                  <c:v>7.43</c:v>
+                  <c:v>7.42</c:v>
                 </c:pt>
                 <c:pt idx="4">
-                  <c:v>7.2</c:v>
+                  <c:v>6.95</c:v>
                 </c:pt>
                 <c:pt idx="5">
                   <c:v>6.62</c:v>
@@ -566,13 +566,13 @@
               <c:numCache>
                 <c:ptCount val="3"/>
                 <c:pt idx="0">
-                  <c:v>100</c:v>
+                  <c:v>98</c:v>
                 </c:pt>
                 <c:pt idx="1">
-                  <c:v>22</c:v>
+                  <c:v>23</c:v>
                 </c:pt>
                 <c:pt idx="2">
-                  <c:v>16</c:v>
+                  <c:v>17</c:v>
                 </c:pt>
               </c:numCache>
             </c:numRef>
@@ -823,7 +823,7 @@
                 <c:formatCode>General</c:formatCode>
                 <c:ptCount val="9"/>
                 <c:pt idx="0">
-                  <c:v>33</c:v>
+                  <c:v>31</c:v>
                 </c:pt>
                 <c:pt idx="1">
                   <c:v>9</c:v>
@@ -832,7 +832,7 @@
                   <c:v>58</c:v>
                 </c:pt>
                 <c:pt idx="3">
-                  <c:v>4</c:v>
+                  <c:v>5</c:v>
                 </c:pt>
                 <c:pt idx="4">
                   <c:v>12</c:v>
@@ -847,7 +847,7 @@
                   <c:v>1</c:v>
                 </c:pt>
                 <c:pt idx="8">
-                  <c:v>6</c:v>
+                  <c:v>7</c:v>
                 </c:pt>
               </c:numCache>
             </c:numRef>
@@ -2818,7 +2818,7 @@
                 <a:ea typeface="Arial" pitchFamily="34" charset="-122"/>
                 <a:cs typeface="Arial" pitchFamily="34" charset="-120"/>
               </a:rPr>
-              <a:t>作成日：2026年3月18日</a:t>
+              <a:t>作成日：2026年3月19日</a:t>
             </a:r>
             <a:endParaRPr lang="en-US" sz="1000" dirty="0"/>
           </a:p>
@@ -3364,7 +3364,7 @@
                           <a:ea typeface="Arial" pitchFamily="34" charset="-122"/>
                           <a:cs typeface="Arial" pitchFamily="34" charset="-120"/>
                         </a:rPr>
-                        <a:t>7.65点</a:t>
+                        <a:t>7.57点</a:t>
                       </a:r>
                       <a:endParaRPr lang="en-US" sz="1000" dirty="0">
                         <a:latin typeface="Arial" charset="0"/>
@@ -3432,7 +3432,7 @@
                           <a:ea typeface="Arial" pitchFamily="34" charset="-122"/>
                           <a:cs typeface="Arial" pitchFamily="34" charset="-120"/>
                         </a:rPr>
-                        <a:t>8.2点以上</a:t>
+                        <a:t>8.1点以上</a:t>
                       </a:r>
                       <a:endParaRPr lang="en-US" sz="1000" dirty="0">
                         <a:latin typeface="Arial" charset="0"/>
@@ -3638,7 +3638,7 @@
                           <a:ea typeface="Arial" pitchFamily="34" charset="-122"/>
                           <a:cs typeface="Arial" pitchFamily="34" charset="-120"/>
                         </a:rPr>
-                        <a:t>72.5%</a:t>
+                        <a:t>71.0%</a:t>
                       </a:r>
                       <a:endParaRPr lang="en-US" sz="1000" dirty="0">
                         <a:latin typeface="Arial" charset="0"/>
@@ -3706,7 +3706,7 @@
                           <a:ea typeface="Arial" pitchFamily="34" charset="-122"/>
                           <a:cs typeface="Arial" pitchFamily="34" charset="-120"/>
                         </a:rPr>
-                        <a:t>78%以上</a:t>
+                        <a:t>76%以上</a:t>
                       </a:r>
                       <a:endParaRPr lang="en-US" sz="1000" dirty="0">
                         <a:latin typeface="Arial" charset="0"/>
@@ -3912,7 +3912,7 @@
                           <a:ea typeface="Arial" pitchFamily="34" charset="-122"/>
                           <a:cs typeface="Arial" pitchFamily="34" charset="-120"/>
                         </a:rPr>
-                        <a:t>11.6%</a:t>
+                        <a:t>12.3%</a:t>
                       </a:r>
                       <a:endParaRPr lang="en-US" sz="1000" dirty="0">
                         <a:latin typeface="Arial" charset="0"/>
@@ -4734,7 +4734,7 @@
                           <a:ea typeface="Arial" pitchFamily="34" charset="-122"/>
                           <a:cs typeface="Arial" pitchFamily="34" charset="-120"/>
                         </a:rPr>
-                        <a:t>約22件/期間</a:t>
+                        <a:t>約23件/期間</a:t>
                       </a:r>
                       <a:endParaRPr lang="en-US" sz="1000" dirty="0">
                         <a:latin typeface="Arial" charset="0"/>
@@ -5373,7 +5373,7 @@
                 <a:ea typeface="Arial" pitchFamily="34" charset="-122"/>
                 <a:cs typeface="Arial" pitchFamily="34" charset="-120"/>
               </a:rPr>
-              <a:t>7.65</a:t>
+              <a:t>7.57</a:t>
             </a:r>
             <a:endParaRPr lang="en-US" sz="3200" dirty="0"/>
           </a:p>
@@ -5498,7 +5498,7 @@
                 <a:ea typeface="Arial" pitchFamily="34" charset="-122"/>
                 <a:cs typeface="Arial" pitchFamily="34" charset="-120"/>
               </a:rPr>
-              <a:t>72.5%</a:t>
+              <a:t>71.0%</a:t>
             </a:r>
             <a:endParaRPr lang="en-US" sz="3200" dirty="0"/>
           </a:p>
@@ -5623,7 +5623,7 @@
                 <a:ea typeface="Arial" pitchFamily="34" charset="-122"/>
                 <a:cs typeface="Arial" pitchFamily="34" charset="-120"/>
               </a:rPr>
-              <a:t>11.6%</a:t>
+              <a:t>12.3%</a:t>
             </a:r>
             <a:endParaRPr lang="en-US" sz="3200" dirty="0"/>
           </a:p>
@@ -5896,7 +5896,7 @@
                 <a:ea typeface="Arial" pitchFamily="34" charset="-122"/>
                 <a:cs typeface="Arial" pitchFamily="34" charset="-120"/>
               </a:rPr>
-              <a:t>  が改装中で提供された朝ごはん（お弁当）が残念でした</a:t>
+              <a:t>  ただし，今回は改装工事でカフェが利用出来ず、朝食もおにぎり弁当の一択で残念</a:t>
             </a:r>
             <a:endParaRPr lang="en-US" sz="1100" dirty="0"/>
           </a:p>
@@ -5936,7 +5936,7 @@
                 <a:ea typeface="Arial" pitchFamily="34" charset="-122"/>
                 <a:cs typeface="Arial" pitchFamily="34" charset="-120"/>
               </a:rPr>
-              <a:t>  立地だけのホテル 朝食ブュッフェが楽しめるというから選んだのに、改装工事ということでクッソ不味い弁当であしらわれた</a:t>
+              <a:t>  横浜市営地下鉄の駅が近く便利</a:t>
             </a:r>
             <a:endParaRPr lang="en-US" sz="1100" dirty="0"/>
           </a:p>
@@ -5976,7 +5976,7 @@
                 <a:ea typeface="Arial" pitchFamily="34" charset="-122"/>
                 <a:cs typeface="Arial" pitchFamily="34" charset="-120"/>
               </a:rPr>
-              <a:t>  施設を良くするためのリニューアル工事は仕方ないにしても、対応が残念</a:t>
+              <a:t>  朝食弁当はまずいし、朝食がパン派の人は対応なし</a:t>
             </a:r>
             <a:endParaRPr lang="en-US" sz="1100" dirty="0"/>
           </a:p>
@@ -6124,7 +6124,7 @@
                 <a:ea typeface="Arial" pitchFamily="34" charset="-122"/>
                 <a:cs typeface="Arial" pitchFamily="34" charset="-120"/>
               </a:rPr>
-              <a:t>  が改装中で提供された朝ごはん（お弁当）が残念でした</a:t>
+              <a:t>  ただし，今回は改装工事でカフェが利用出来ず、朝食もおにぎり弁当の一択で残念</a:t>
             </a:r>
             <a:endParaRPr lang="en-US" sz="1100" dirty="0"/>
           </a:p>
@@ -6557,7 +6557,7 @@
                 <a:ea typeface="Arial" pitchFamily="34" charset="-122"/>
                 <a:cs typeface="Arial" pitchFamily="34" charset="-120"/>
               </a:rPr>
-              <a:t>7.65</a:t>
+              <a:t>7.57</a:t>
             </a:r>
             <a:endParaRPr lang="en-US" sz="3200" dirty="0"/>
           </a:p>
@@ -6682,7 +6682,7 @@
                 <a:ea typeface="Arial" pitchFamily="34" charset="-122"/>
                 <a:cs typeface="Arial" pitchFamily="34" charset="-120"/>
               </a:rPr>
-              <a:t>72.5%</a:t>
+              <a:t>71.0%</a:t>
             </a:r>
             <a:endParaRPr lang="en-US" sz="3200" dirty="0"/>
           </a:p>
@@ -6807,7 +6807,7 @@
                 <a:ea typeface="Arial" pitchFamily="34" charset="-122"/>
                 <a:cs typeface="Arial" pitchFamily="34" charset="-120"/>
               </a:rPr>
-              <a:t>11.6%</a:t>
+              <a:t>12.3%</a:t>
             </a:r>
             <a:endParaRPr lang="en-US" sz="3200" dirty="0"/>
           </a:p>
@@ -7353,7 +7353,7 @@
                 <a:ea typeface="Arial" pitchFamily="34" charset="-122"/>
                 <a:cs typeface="Arial" pitchFamily="34" charset="-120"/>
               </a:rPr>
-              <a:t>Trip.com(8.68)が最高スコア。</a:t>
+              <a:t>Trip.com(8.65)が最高スコア。</a:t>
             </a:r>
             <a:endParaRPr lang="en-US" sz="1100" dirty="0"/>
           </a:p>
@@ -7911,7 +7911,7 @@
                           <a:ea typeface="Arial" pitchFamily="34" charset="-122"/>
                           <a:cs typeface="Arial" pitchFamily="34" charset="-120"/>
                         </a:rPr>
-                        <a:t>22</a:t>
+                        <a:t>20</a:t>
                       </a:r>
                       <a:endParaRPr lang="en-US" sz="900" dirty="0">
                         <a:latin typeface="Arial" charset="0"/>
@@ -7979,7 +7979,7 @@
                           <a:ea typeface="Arial" pitchFamily="34" charset="-122"/>
                           <a:cs typeface="Arial" pitchFamily="34" charset="-120"/>
                         </a:rPr>
-                        <a:t>8.68</a:t>
+                        <a:t>8.65</a:t>
                       </a:r>
                       <a:endParaRPr lang="en-US" sz="900" dirty="0">
                         <a:latin typeface="Arial" charset="0"/>
@@ -8115,7 +8115,7 @@
                           <a:ea typeface="Arial" pitchFamily="34" charset="-122"/>
                           <a:cs typeface="Arial" pitchFamily="34" charset="-120"/>
                         </a:rPr>
-                        <a:t>8.68</a:t>
+                        <a:t>8.65</a:t>
                       </a:r>
                       <a:endParaRPr lang="en-US" sz="900" dirty="0">
                         <a:latin typeface="Arial" charset="0"/>
@@ -8321,7 +8321,7 @@
                           <a:ea typeface="Arial" pitchFamily="34" charset="-122"/>
                           <a:cs typeface="Arial" pitchFamily="34" charset="-120"/>
                         </a:rPr>
-                        <a:t>3.95</a:t>
+                        <a:t>3.92</a:t>
                       </a:r>
                       <a:endParaRPr lang="en-US" sz="900" dirty="0">
                         <a:latin typeface="Arial" charset="0"/>
@@ -8457,7 +8457,7 @@
                           <a:ea typeface="Arial" pitchFamily="34" charset="-122"/>
                           <a:cs typeface="Arial" pitchFamily="34" charset="-120"/>
                         </a:rPr>
-                        <a:t>7.9</a:t>
+                        <a:t>7.85</a:t>
                       </a:r>
                       <a:endParaRPr lang="en-US" sz="900" dirty="0">
                         <a:latin typeface="Arial" charset="0"/>
@@ -8937,7 +8937,7 @@
                           <a:ea typeface="Arial" pitchFamily="34" charset="-122"/>
                           <a:cs typeface="Arial" pitchFamily="34" charset="-120"/>
                         </a:rPr>
-                        <a:t>30</a:t>
+                        <a:t>31</a:t>
                       </a:r>
                       <a:endParaRPr lang="en-US" sz="900" dirty="0">
                         <a:latin typeface="Arial" charset="0"/>
@@ -9005,7 +9005,7 @@
                           <a:ea typeface="Arial" pitchFamily="34" charset="-122"/>
                           <a:cs typeface="Arial" pitchFamily="34" charset="-120"/>
                         </a:rPr>
-                        <a:t>7.43</a:t>
+                        <a:t>7.42</a:t>
                       </a:r>
                       <a:endParaRPr lang="en-US" sz="900" dirty="0">
                         <a:latin typeface="Arial" charset="0"/>
@@ -9141,7 +9141,7 @@
                           <a:ea typeface="Arial" pitchFamily="34" charset="-122"/>
                           <a:cs typeface="Arial" pitchFamily="34" charset="-120"/>
                         </a:rPr>
-                        <a:t>7.43</a:t>
+                        <a:t>7.42</a:t>
                       </a:r>
                       <a:endParaRPr lang="en-US" sz="900" dirty="0">
                         <a:latin typeface="Arial" charset="0"/>
@@ -9279,7 +9279,7 @@
                           <a:ea typeface="Arial" pitchFamily="34" charset="-122"/>
                           <a:cs typeface="Arial" pitchFamily="34" charset="-120"/>
                         </a:rPr>
-                        <a:t>20</a:t>
+                        <a:t>21</a:t>
                       </a:r>
                       <a:endParaRPr lang="en-US" sz="900" dirty="0">
                         <a:latin typeface="Arial" charset="0"/>
@@ -9347,7 +9347,7 @@
                           <a:ea typeface="Arial" pitchFamily="34" charset="-122"/>
                           <a:cs typeface="Arial" pitchFamily="34" charset="-120"/>
                         </a:rPr>
-                        <a:t>3.6</a:t>
+                        <a:t>3.48</a:t>
                       </a:r>
                       <a:endParaRPr lang="en-US" sz="900" dirty="0">
                         <a:latin typeface="Arial" charset="0"/>
@@ -9483,7 +9483,7 @@
                           <a:ea typeface="Arial" pitchFamily="34" charset="-122"/>
                           <a:cs typeface="Arial" pitchFamily="34" charset="-120"/>
                         </a:rPr>
-                        <a:t>7.2</a:t>
+                        <a:t>6.95</a:t>
                       </a:r>
                       <a:endParaRPr lang="en-US" sz="900" dirty="0">
                         <a:latin typeface="Arial" charset="0"/>
@@ -10233,7 +10233,7 @@
                 <a:ea typeface="Arial" pitchFamily="34" charset="-122"/>
                 <a:cs typeface="Arial" pitchFamily="34" charset="-120"/>
               </a:rPr>
-              <a:t>100件（72.5%）</a:t>
+              <a:t>98件（71.0%）</a:t>
             </a:r>
             <a:endParaRPr lang="en-US" sz="1100" dirty="0"/>
           </a:p>
@@ -10331,7 +10331,7 @@
                 <a:ea typeface="Arial" pitchFamily="34" charset="-122"/>
                 <a:cs typeface="Arial" pitchFamily="34" charset="-120"/>
               </a:rPr>
-              <a:t>22件（15.9%）</a:t>
+              <a:t>23件（16.7%）</a:t>
             </a:r>
             <a:endParaRPr lang="en-US" sz="1100" dirty="0"/>
           </a:p>
@@ -10429,7 +10429,7 @@
                 <a:ea typeface="Arial" pitchFamily="34" charset="-122"/>
                 <a:cs typeface="Arial" pitchFamily="34" charset="-120"/>
               </a:rPr>
-              <a:t>16件（11.6%）</a:t>
+              <a:t>17件（12.3%）</a:t>
             </a:r>
             <a:endParaRPr lang="en-US" sz="1100" dirty="0"/>
           </a:p>
@@ -10841,7 +10841,7 @@
                 <a:ea typeface="Arial" pitchFamily="34" charset="-122"/>
                 <a:cs typeface="Arial" pitchFamily="34" charset="-120"/>
               </a:rPr>
-              <a:t>が改装中で提供された朝ごはん（お弁当）が残念でした</a:t>
+              <a:t>ただし，今回は改装工事でカフェが利用出来ず、朝食もおにぎり弁当の一択で残念</a:t>
             </a:r>
             <a:endParaRPr lang="en-US" sz="900" dirty="0"/>
           </a:p>
@@ -10856,6 +10856,229 @@
         <p:spPr>
           <a:xfrm>
             <a:off x="594360" y="1828800"/>
+            <a:ext cx="2377440" cy="640080"/>
+          </a:xfrm>
+          <a:prstGeom prst="rect">
+            <a:avLst/>
+          </a:prstGeom>
+          <a:noFill/>
+          <a:ln/>
+        </p:spPr>
+        <p:txBody>
+          <a:bodyPr wrap="square" lIns="0" tIns="0" rIns="0" bIns="0" rtlCol="0" anchor="ctr"/>
+          <a:lstStyle/>
+          <a:p>
+            <a:pPr indent="0" marL="0">
+              <a:buNone/>
+            </a:pPr>
+            <a:r>
+              <a:rPr lang="en-US" sz="900" i="1" dirty="0">
+                <a:solidFill>
+                  <a:srgbClr val="3B7DD8"/>
+                </a:solidFill>
+                <a:latin typeface="Arial" pitchFamily="34" charset="0"/>
+                <a:ea typeface="Arial" pitchFamily="34" charset="-122"/>
+                <a:cs typeface="Arial" pitchFamily="34" charset="-120"/>
+              </a:rPr>
+              <a:t>「が改装中で提供された朝ごはん（お弁当）が残念でした」</a:t>
+            </a:r>
+            <a:endParaRPr lang="en-US" sz="900" dirty="0"/>
+          </a:p>
+        </p:txBody>
+      </p:sp>
+      <p:sp>
+        <p:nvSpPr>
+          <p:cNvPr id="12" name="Shape 10"/>
+          <p:cNvSpPr/>
+          <p:nvPr/>
+        </p:nvSpPr>
+        <p:spPr>
+          <a:xfrm>
+            <a:off x="3291840" y="1051560"/>
+            <a:ext cx="2651760" cy="1600200"/>
+          </a:xfrm>
+          <a:prstGeom prst="rect">
+            <a:avLst/>
+          </a:prstGeom>
+          <a:solidFill>
+            <a:srgbClr val="FFFFFF"/>
+          </a:solidFill>
+          <a:ln/>
+          <a:effectLst>
+            <a:outerShdw sx="100000" sy="100000" kx="0" ky="0" algn="bl" rotWithShape="0" blurRad="50800" dist="25400" dir="8100000">
+              <a:srgbClr val="000000">
+                <a:alpha val="10000"/>
+              </a:srgbClr>
+            </a:outerShdw>
+          </a:effectLst>
+        </p:spPr>
+      </p:sp>
+      <p:sp>
+        <p:nvSpPr>
+          <p:cNvPr id="13" name="Shape 11"/>
+          <p:cNvSpPr/>
+          <p:nvPr/>
+        </p:nvSpPr>
+        <p:spPr>
+          <a:xfrm>
+            <a:off x="3291840" y="1051560"/>
+            <a:ext cx="54864" cy="1600200"/>
+          </a:xfrm>
+          <a:prstGeom prst="rect">
+            <a:avLst/>
+          </a:prstGeom>
+          <a:solidFill>
+            <a:srgbClr val="16A34A"/>
+          </a:solidFill>
+          <a:ln/>
+        </p:spPr>
+      </p:sp>
+      <p:sp>
+        <p:nvSpPr>
+          <p:cNvPr id="14" name="Shape 12"/>
+          <p:cNvSpPr/>
+          <p:nvPr/>
+        </p:nvSpPr>
+        <p:spPr>
+          <a:xfrm>
+            <a:off x="5120640" y="1124712"/>
+            <a:ext cx="658368" cy="228600"/>
+          </a:xfrm>
+          <a:prstGeom prst="rect">
+            <a:avLst/>
+          </a:prstGeom>
+          <a:solidFill>
+            <a:srgbClr val="DCFCE7"/>
+          </a:solidFill>
+          <a:ln/>
+        </p:spPr>
+      </p:sp>
+      <p:sp>
+        <p:nvSpPr>
+          <p:cNvPr id="15" name="Text 13"/>
+          <p:cNvSpPr/>
+          <p:nvPr/>
+        </p:nvSpPr>
+        <p:spPr>
+          <a:xfrm>
+            <a:off x="5120640" y="1124712"/>
+            <a:ext cx="658368" cy="228600"/>
+          </a:xfrm>
+          <a:prstGeom prst="rect">
+            <a:avLst/>
+          </a:prstGeom>
+          <a:noFill/>
+          <a:ln/>
+        </p:spPr>
+        <p:txBody>
+          <a:bodyPr wrap="square" lIns="0" tIns="0" rIns="0" bIns="0" rtlCol="0" anchor="ctr"/>
+          <a:lstStyle/>
+          <a:p>
+            <a:pPr algn="ctr" indent="0" marL="0">
+              <a:buNone/>
+            </a:pPr>
+            <a:r>
+              <a:rPr lang="en-US" sz="900" b="1" dirty="0">
+                <a:solidFill>
+                  <a:srgbClr val="16A34A"/>
+                </a:solidFill>
+                <a:latin typeface="Arial" pitchFamily="34" charset="0"/>
+                <a:ea typeface="Arial" pitchFamily="34" charset="-122"/>
+                <a:cs typeface="Arial" pitchFamily="34" charset="-120"/>
+              </a:rPr>
+              <a:t>20件+</a:t>
+            </a:r>
+            <a:endParaRPr lang="en-US" sz="900" dirty="0"/>
+          </a:p>
+        </p:txBody>
+      </p:sp>
+      <p:sp>
+        <p:nvSpPr>
+          <p:cNvPr id="16" name="Text 14"/>
+          <p:cNvSpPr/>
+          <p:nvPr/>
+        </p:nvSpPr>
+        <p:spPr>
+          <a:xfrm>
+            <a:off x="3429000" y="1124712"/>
+            <a:ext cx="1645920" cy="274320"/>
+          </a:xfrm>
+          <a:prstGeom prst="rect">
+            <a:avLst/>
+          </a:prstGeom>
+          <a:noFill/>
+          <a:ln/>
+        </p:spPr>
+        <p:txBody>
+          <a:bodyPr wrap="square" lIns="0" tIns="0" rIns="0" bIns="0" rtlCol="0" anchor="ctr"/>
+          <a:lstStyle/>
+          <a:p>
+            <a:pPr indent="0" marL="0">
+              <a:buNone/>
+            </a:pPr>
+            <a:r>
+              <a:rPr lang="en-US" sz="1300" b="1" dirty="0">
+                <a:solidFill>
+                  <a:srgbClr val="1A2744"/>
+                </a:solidFill>
+                <a:latin typeface="Arial" pitchFamily="34" charset="0"/>
+                <a:ea typeface="Arial" pitchFamily="34" charset="-122"/>
+                <a:cs typeface="Arial" pitchFamily="34" charset="-120"/>
+              </a:rPr>
+              <a:t>立地・アクセス</a:t>
+            </a:r>
+            <a:endParaRPr lang="en-US" sz="1300" dirty="0"/>
+          </a:p>
+        </p:txBody>
+      </p:sp>
+      <p:sp>
+        <p:nvSpPr>
+          <p:cNvPr id="17" name="Text 15"/>
+          <p:cNvSpPr/>
+          <p:nvPr/>
+        </p:nvSpPr>
+        <p:spPr>
+          <a:xfrm>
+            <a:off x="3429000" y="1417320"/>
+            <a:ext cx="2377440" cy="365760"/>
+          </a:xfrm>
+          <a:prstGeom prst="rect">
+            <a:avLst/>
+          </a:prstGeom>
+          <a:noFill/>
+          <a:ln/>
+        </p:spPr>
+        <p:txBody>
+          <a:bodyPr wrap="square" lIns="0" tIns="0" rIns="0" bIns="0" rtlCol="0" anchor="ctr"/>
+          <a:lstStyle/>
+          <a:p>
+            <a:pPr indent="0" marL="0">
+              <a:buNone/>
+            </a:pPr>
+            <a:r>
+              <a:rPr lang="en-US" sz="900" dirty="0">
+                <a:solidFill>
+                  <a:srgbClr val="64748B"/>
+                </a:solidFill>
+                <a:latin typeface="Arial" pitchFamily="34" charset="0"/>
+                <a:ea typeface="Arial" pitchFamily="34" charset="-122"/>
+                <a:cs typeface="Arial" pitchFamily="34" charset="-120"/>
+              </a:rPr>
+              <a:t>横浜市営地下鉄の駅が近く便利</a:t>
+            </a:r>
+            <a:endParaRPr lang="en-US" sz="900" dirty="0"/>
+          </a:p>
+        </p:txBody>
+      </p:sp>
+      <p:sp>
+        <p:nvSpPr>
+          <p:cNvPr id="18" name="Text 16"/>
+          <p:cNvSpPr/>
+          <p:nvPr/>
+        </p:nvSpPr>
+        <p:spPr>
+          <a:xfrm>
+            <a:off x="3429000" y="1828800"/>
             <a:ext cx="2377440" cy="640080"/>
           </a:xfrm>
           <a:prstGeom prst="rect">
@@ -10888,13 +11111,13 @@
       </p:sp>
       <p:sp>
         <p:nvSpPr>
-          <p:cNvPr id="12" name="Shape 10"/>
-          <p:cNvSpPr/>
-          <p:nvPr/>
-        </p:nvSpPr>
-        <p:spPr>
-          <a:xfrm>
-            <a:off x="3291840" y="1051560"/>
+          <p:cNvPr id="19" name="Shape 17"/>
+          <p:cNvSpPr/>
+          <p:nvPr/>
+        </p:nvSpPr>
+        <p:spPr>
+          <a:xfrm>
+            <a:off x="6126480" y="1051560"/>
             <a:ext cx="2651760" cy="1600200"/>
           </a:xfrm>
           <a:prstGeom prst="rect">
@@ -10915,13 +11138,13 @@
       </p:sp>
       <p:sp>
         <p:nvSpPr>
-          <p:cNvPr id="13" name="Shape 11"/>
-          <p:cNvSpPr/>
-          <p:nvPr/>
-        </p:nvSpPr>
-        <p:spPr>
-          <a:xfrm>
-            <a:off x="3291840" y="1051560"/>
+          <p:cNvPr id="20" name="Shape 18"/>
+          <p:cNvSpPr/>
+          <p:nvPr/>
+        </p:nvSpPr>
+        <p:spPr>
+          <a:xfrm>
+            <a:off x="6126480" y="1051560"/>
             <a:ext cx="54864" cy="1600200"/>
           </a:xfrm>
           <a:prstGeom prst="rect">
@@ -10935,13 +11158,13 @@
       </p:sp>
       <p:sp>
         <p:nvSpPr>
-          <p:cNvPr id="14" name="Shape 12"/>
-          <p:cNvSpPr/>
-          <p:nvPr/>
-        </p:nvSpPr>
-        <p:spPr>
-          <a:xfrm>
-            <a:off x="5120640" y="1124712"/>
+          <p:cNvPr id="21" name="Shape 19"/>
+          <p:cNvSpPr/>
+          <p:nvPr/>
+        </p:nvSpPr>
+        <p:spPr>
+          <a:xfrm>
+            <a:off x="7955280" y="1124712"/>
             <a:ext cx="658368" cy="228600"/>
           </a:xfrm>
           <a:prstGeom prst="rect">
@@ -10955,13 +11178,13 @@
       </p:sp>
       <p:sp>
         <p:nvSpPr>
-          <p:cNvPr id="15" name="Text 13"/>
-          <p:cNvSpPr/>
-          <p:nvPr/>
-        </p:nvSpPr>
-        <p:spPr>
-          <a:xfrm>
-            <a:off x="5120640" y="1124712"/>
+          <p:cNvPr id="22" name="Text 20"/>
+          <p:cNvSpPr/>
+          <p:nvPr/>
+        </p:nvSpPr>
+        <p:spPr>
+          <a:xfrm>
+            <a:off x="7955280" y="1124712"/>
             <a:ext cx="658368" cy="228600"/>
           </a:xfrm>
           <a:prstGeom prst="rect">
@@ -10994,229 +11217,6 @@
       </p:sp>
       <p:sp>
         <p:nvSpPr>
-          <p:cNvPr id="16" name="Text 14"/>
-          <p:cNvSpPr/>
-          <p:nvPr/>
-        </p:nvSpPr>
-        <p:spPr>
-          <a:xfrm>
-            <a:off x="3429000" y="1124712"/>
-            <a:ext cx="1645920" cy="274320"/>
-          </a:xfrm>
-          <a:prstGeom prst="rect">
-            <a:avLst/>
-          </a:prstGeom>
-          <a:noFill/>
-          <a:ln/>
-        </p:spPr>
-        <p:txBody>
-          <a:bodyPr wrap="square" lIns="0" tIns="0" rIns="0" bIns="0" rtlCol="0" anchor="ctr"/>
-          <a:lstStyle/>
-          <a:p>
-            <a:pPr indent="0" marL="0">
-              <a:buNone/>
-            </a:pPr>
-            <a:r>
-              <a:rPr lang="en-US" sz="1300" b="1" dirty="0">
-                <a:solidFill>
-                  <a:srgbClr val="1A2744"/>
-                </a:solidFill>
-                <a:latin typeface="Arial" pitchFamily="34" charset="0"/>
-                <a:ea typeface="Arial" pitchFamily="34" charset="-122"/>
-                <a:cs typeface="Arial" pitchFamily="34" charset="-120"/>
-              </a:rPr>
-              <a:t>立地・アクセス</a:t>
-            </a:r>
-            <a:endParaRPr lang="en-US" sz="1300" dirty="0"/>
-          </a:p>
-        </p:txBody>
-      </p:sp>
-      <p:sp>
-        <p:nvSpPr>
-          <p:cNvPr id="17" name="Text 15"/>
-          <p:cNvSpPr/>
-          <p:nvPr/>
-        </p:nvSpPr>
-        <p:spPr>
-          <a:xfrm>
-            <a:off x="3429000" y="1417320"/>
-            <a:ext cx="2377440" cy="365760"/>
-          </a:xfrm>
-          <a:prstGeom prst="rect">
-            <a:avLst/>
-          </a:prstGeom>
-          <a:noFill/>
-          <a:ln/>
-        </p:spPr>
-        <p:txBody>
-          <a:bodyPr wrap="square" lIns="0" tIns="0" rIns="0" bIns="0" rtlCol="0" anchor="ctr"/>
-          <a:lstStyle/>
-          <a:p>
-            <a:pPr indent="0" marL="0">
-              <a:buNone/>
-            </a:pPr>
-            <a:r>
-              <a:rPr lang="en-US" sz="900" dirty="0">
-                <a:solidFill>
-                  <a:srgbClr val="64748B"/>
-                </a:solidFill>
-                <a:latin typeface="Arial" pitchFamily="34" charset="0"/>
-                <a:ea typeface="Arial" pitchFamily="34" charset="-122"/>
-                <a:cs typeface="Arial" pitchFamily="34" charset="-120"/>
-              </a:rPr>
-              <a:t>立地だけのホテル 朝食ブュッフェが楽しめるというから選んだのに、改装工事ということでクッソ不味い弁当であしらわれた</a:t>
-            </a:r>
-            <a:endParaRPr lang="en-US" sz="900" dirty="0"/>
-          </a:p>
-        </p:txBody>
-      </p:sp>
-      <p:sp>
-        <p:nvSpPr>
-          <p:cNvPr id="18" name="Text 16"/>
-          <p:cNvSpPr/>
-          <p:nvPr/>
-        </p:nvSpPr>
-        <p:spPr>
-          <a:xfrm>
-            <a:off x="3429000" y="1828800"/>
-            <a:ext cx="2377440" cy="640080"/>
-          </a:xfrm>
-          <a:prstGeom prst="rect">
-            <a:avLst/>
-          </a:prstGeom>
-          <a:noFill/>
-          <a:ln/>
-        </p:spPr>
-        <p:txBody>
-          <a:bodyPr wrap="square" lIns="0" tIns="0" rIns="0" bIns="0" rtlCol="0" anchor="ctr"/>
-          <a:lstStyle/>
-          <a:p>
-            <a:pPr indent="0" marL="0">
-              <a:buNone/>
-            </a:pPr>
-            <a:r>
-              <a:rPr lang="en-US" sz="900" i="1" dirty="0">
-                <a:solidFill>
-                  <a:srgbClr val="3B7DD8"/>
-                </a:solidFill>
-                <a:latin typeface="Arial" pitchFamily="34" charset="0"/>
-                <a:ea typeface="Arial" pitchFamily="34" charset="-122"/>
-                <a:cs typeface="Arial" pitchFamily="34" charset="-120"/>
-              </a:rPr>
-              <a:t>「２泊しましたが立地もよくご飯に困りませんでした」</a:t>
-            </a:r>
-            <a:endParaRPr lang="en-US" sz="900" dirty="0"/>
-          </a:p>
-        </p:txBody>
-      </p:sp>
-      <p:sp>
-        <p:nvSpPr>
-          <p:cNvPr id="19" name="Shape 17"/>
-          <p:cNvSpPr/>
-          <p:nvPr/>
-        </p:nvSpPr>
-        <p:spPr>
-          <a:xfrm>
-            <a:off x="6126480" y="1051560"/>
-            <a:ext cx="2651760" cy="1600200"/>
-          </a:xfrm>
-          <a:prstGeom prst="rect">
-            <a:avLst/>
-          </a:prstGeom>
-          <a:solidFill>
-            <a:srgbClr val="FFFFFF"/>
-          </a:solidFill>
-          <a:ln/>
-          <a:effectLst>
-            <a:outerShdw sx="100000" sy="100000" kx="0" ky="0" algn="bl" rotWithShape="0" blurRad="50800" dist="25400" dir="8100000">
-              <a:srgbClr val="000000">
-                <a:alpha val="10000"/>
-              </a:srgbClr>
-            </a:outerShdw>
-          </a:effectLst>
-        </p:spPr>
-      </p:sp>
-      <p:sp>
-        <p:nvSpPr>
-          <p:cNvPr id="20" name="Shape 18"/>
-          <p:cNvSpPr/>
-          <p:nvPr/>
-        </p:nvSpPr>
-        <p:spPr>
-          <a:xfrm>
-            <a:off x="6126480" y="1051560"/>
-            <a:ext cx="54864" cy="1600200"/>
-          </a:xfrm>
-          <a:prstGeom prst="rect">
-            <a:avLst/>
-          </a:prstGeom>
-          <a:solidFill>
-            <a:srgbClr val="16A34A"/>
-          </a:solidFill>
-          <a:ln/>
-        </p:spPr>
-      </p:sp>
-      <p:sp>
-        <p:nvSpPr>
-          <p:cNvPr id="21" name="Shape 19"/>
-          <p:cNvSpPr/>
-          <p:nvPr/>
-        </p:nvSpPr>
-        <p:spPr>
-          <a:xfrm>
-            <a:off x="7955280" y="1124712"/>
-            <a:ext cx="658368" cy="228600"/>
-          </a:xfrm>
-          <a:prstGeom prst="rect">
-            <a:avLst/>
-          </a:prstGeom>
-          <a:solidFill>
-            <a:srgbClr val="DCFCE7"/>
-          </a:solidFill>
-          <a:ln/>
-        </p:spPr>
-      </p:sp>
-      <p:sp>
-        <p:nvSpPr>
-          <p:cNvPr id="22" name="Text 20"/>
-          <p:cNvSpPr/>
-          <p:nvPr/>
-        </p:nvSpPr>
-        <p:spPr>
-          <a:xfrm>
-            <a:off x="7955280" y="1124712"/>
-            <a:ext cx="658368" cy="228600"/>
-          </a:xfrm>
-          <a:prstGeom prst="rect">
-            <a:avLst/>
-          </a:prstGeom>
-          <a:noFill/>
-          <a:ln/>
-        </p:spPr>
-        <p:txBody>
-          <a:bodyPr wrap="square" lIns="0" tIns="0" rIns="0" bIns="0" rtlCol="0" anchor="ctr"/>
-          <a:lstStyle/>
-          <a:p>
-            <a:pPr algn="ctr" indent="0" marL="0">
-              <a:buNone/>
-            </a:pPr>
-            <a:r>
-              <a:rPr lang="en-US" sz="900" b="1" dirty="0">
-                <a:solidFill>
-                  <a:srgbClr val="16A34A"/>
-                </a:solidFill>
-                <a:latin typeface="Arial" pitchFamily="34" charset="0"/>
-                <a:ea typeface="Arial" pitchFamily="34" charset="-122"/>
-                <a:cs typeface="Arial" pitchFamily="34" charset="-120"/>
-              </a:rPr>
-              <a:t>20件+</a:t>
-            </a:r>
-            <a:endParaRPr lang="en-US" sz="900" dirty="0"/>
-          </a:p>
-        </p:txBody>
-      </p:sp>
-      <p:sp>
-        <p:nvSpPr>
           <p:cNvPr id="23" name="Text 21"/>
           <p:cNvSpPr/>
           <p:nvPr/>
@@ -11287,7 +11287,7 @@
                 <a:ea typeface="Arial" pitchFamily="34" charset="-122"/>
                 <a:cs typeface="Arial" pitchFamily="34" charset="-120"/>
               </a:rPr>
-              <a:t>施設を良くするためのリニューアル工事は仕方ないにしても、対応が残念</a:t>
+              <a:t>朝食弁当はまずいし、朝食がパン派の人は対応なし</a:t>
             </a:r>
             <a:endParaRPr lang="en-US" sz="900" dirty="0"/>
           </a:p>
@@ -11326,7 +11326,7 @@
                 <a:ea typeface="Arial" pitchFamily="34" charset="-122"/>
                 <a:cs typeface="Arial" pitchFamily="34" charset="-120"/>
               </a:rPr>
-              <a:t>「7時半のチェックアウトのとき、改装中の朝食のお弁当受け渡し業務のスタッフが5人ほどいましたが、完全にシカトで、感じ...」</a:t>
+              <a:t>「施設を良くするためのリニューアル工事は仕方ないにしても、対応が残念」</a:t>
             </a:r>
             <a:endParaRPr lang="en-US" sz="900" dirty="0"/>
           </a:p>
@@ -12685,7 +12685,7 @@
                           <a:ea typeface="Arial" pitchFamily="34" charset="-122"/>
                           <a:cs typeface="Arial" pitchFamily="34" charset="-120"/>
                         </a:rPr>
-                        <a:t>が改装中で提供された朝ごはん（お弁当）が残念でした</a:t>
+                        <a:t>ただし，今回は改装工事でカフェが利用出来ず、朝食もおにぎり弁当の一択で残念</a:t>
                       </a:r>
                       <a:endParaRPr lang="en-US" sz="900" dirty="0">
                         <a:latin typeface="Arial" charset="0"/>
@@ -12753,7 +12753,7 @@
                           <a:ea typeface="Arial" pitchFamily="34" charset="-122"/>
                           <a:cs typeface="Arial" pitchFamily="34" charset="-120"/>
                         </a:rPr>
-                        <a:t>22件</a:t>
+                        <a:t>23件</a:t>
                       </a:r>
                       <a:endParaRPr lang="en-US" sz="900" dirty="0">
                         <a:latin typeface="Arial" charset="0"/>
@@ -13713,7 +13713,7 @@
                           <a:ea typeface="Arial" pitchFamily="34" charset="-122"/>
                           <a:cs typeface="Arial" pitchFamily="34" charset="-120"/>
                         </a:rPr>
-                        <a:t>エアコン・空調</a:t>
+                        <a:t>設備の老朽化</a:t>
                       </a:r>
                       <a:endParaRPr lang="en-US" sz="900" dirty="0">
                         <a:latin typeface="Arial" charset="0"/>
@@ -13781,7 +13781,7 @@
                           <a:ea typeface="Arial" pitchFamily="34" charset="-122"/>
                           <a:cs typeface="Arial" pitchFamily="34" charset="-120"/>
                         </a:rPr>
-                        <a:t>La struttura è il classico business hotel con stanze picc...</a:t>
+                        <a:t>ただホテル自体が年数が経ってるせいかちょっと古さ加減があったけど全然気にならない程度でした</a:t>
                       </a:r>
                       <a:endParaRPr lang="en-US" sz="900" dirty="0">
                         <a:latin typeface="Arial" charset="0"/>
@@ -13849,7 +13849,7 @@
                           <a:ea typeface="Arial" pitchFamily="34" charset="-122"/>
                           <a:cs typeface="Arial" pitchFamily="34" charset="-120"/>
                         </a:rPr>
-                        <a:t>4件</a:t>
+                        <a:t>3件</a:t>
                       </a:r>
                       <a:endParaRPr lang="en-US" sz="900" dirty="0">
                         <a:latin typeface="Arial" charset="0"/>
@@ -13987,7 +13987,7 @@
                           <a:ea typeface="Arial" pitchFamily="34" charset="-122"/>
                           <a:cs typeface="Arial" pitchFamily="34" charset="-120"/>
                         </a:rPr>
-                        <a:t>設備の老朽化</a:t>
+                        <a:t>朝食の改善要望</a:t>
                       </a:r>
                       <a:endParaRPr lang="en-US" sz="900" dirty="0">
                         <a:latin typeface="Arial" charset="0"/>
@@ -14055,7 +14055,7 @@
                           <a:ea typeface="Arial" pitchFamily="34" charset="-122"/>
                           <a:cs typeface="Arial" pitchFamily="34" charset="-120"/>
                         </a:rPr>
-                        <a:t>ただホテル自体が年数が経ってるせいかちょっと古さ加減があったけど全然気にならない程度でした</a:t>
+                        <a:t>ビュッフェスタイルの朝食は廃止され、お弁当とおにぎりに置き換えられました。改装工事中で、一部は工事現場のようです。...</a:t>
                       </a:r>
                       <a:endParaRPr lang="en-US" sz="900" dirty="0">
                         <a:latin typeface="Arial" charset="0"/>
@@ -14261,7 +14261,7 @@
                           <a:ea typeface="Arial" pitchFamily="34" charset="-122"/>
                           <a:cs typeface="Arial" pitchFamily="34" charset="-120"/>
                         </a:rPr>
-                        <a:t>朝食の改善要望</a:t>
+                        <a:t>エアコン・空調</a:t>
                       </a:r>
                       <a:endParaRPr lang="en-US" sz="900" dirty="0">
                         <a:latin typeface="Arial" charset="0"/>
@@ -14329,7 +14329,7 @@
                           <a:ea typeface="Arial" pitchFamily="34" charset="-122"/>
                           <a:cs typeface="Arial" pitchFamily="34" charset="-120"/>
                         </a:rPr>
-                        <a:t>The breakfast was also very delicious. I booked and check...</a:t>
+                        <a:t>La struttura è il classico business hotel con stanze picc...</a:t>
                       </a:r>
                       <a:endParaRPr lang="en-US" sz="900" dirty="0">
                         <a:latin typeface="Arial" charset="0"/>
@@ -14719,6 +14719,280 @@
                     </a:lnB>
                     <a:solidFill>
                       <a:srgbClr val="FFFFFF"/>
+                    </a:solidFill>
+                  </a:tcPr>
+                </a:tc>
+              </a:tr>
+              <a:tr h="320040">
+                <a:tc>
+                  <a:txBody>
+                    <a:bodyPr/>
+                    <a:lstStyle/>
+                    <a:p>
+                      <a:pPr algn="ctr" indent="0" marL="0">
+                        <a:buNone/>
+                      </a:pPr>
+                      <a:r>
+                        <a:rPr lang="en-US" sz="1200" b="1" dirty="0">
+                          <a:solidFill>
+                            <a:srgbClr val="94A3B8"/>
+                          </a:solidFill>
+                          <a:latin typeface="Arial" pitchFamily="34" charset="0"/>
+                          <a:ea typeface="Arial" pitchFamily="34" charset="-122"/>
+                          <a:cs typeface="Arial" pitchFamily="34" charset="-120"/>
+                        </a:rPr>
+                        <a:t>C</a:t>
+                      </a:r>
+                      <a:endParaRPr lang="en-US" sz="1200" dirty="0">
+                        <a:latin typeface="Arial" charset="0"/>
+                        <a:ea typeface="Arial" charset="0"/>
+                        <a:cs typeface="Arial" charset="0"/>
+                      </a:endParaRPr>
+                    </a:p>
+                  </a:txBody>
+                  <a:tcPr marL="91440" marR="91440" marT="45720" marB="45720">
+                    <a:lnL w="6350" cap="flat" cmpd="sng" algn="ctr">
+                      <a:solidFill>
+                        <a:srgbClr val="CBD5E1"/>
+                      </a:solidFill>
+                      <a:prstDash val="solid"/>
+                      <a:round/>
+                      <a:headEnd type="none" w="med" len="med"/>
+                      <a:tailEnd type="none" w="med" len="med"/>
+                    </a:lnL>
+                    <a:lnR w="6350" cap="flat" cmpd="sng" algn="ctr">
+                      <a:solidFill>
+                        <a:srgbClr val="CBD5E1"/>
+                      </a:solidFill>
+                      <a:prstDash val="solid"/>
+                      <a:round/>
+                      <a:headEnd type="none" w="med" len="med"/>
+                      <a:tailEnd type="none" w="med" len="med"/>
+                    </a:lnR>
+                    <a:lnT w="6350" cap="flat" cmpd="sng" algn="ctr">
+                      <a:solidFill>
+                        <a:srgbClr val="CBD5E1"/>
+                      </a:solidFill>
+                      <a:prstDash val="solid"/>
+                      <a:round/>
+                      <a:headEnd type="none" w="med" len="med"/>
+                      <a:tailEnd type="none" w="med" len="med"/>
+                    </a:lnT>
+                    <a:lnB w="6350" cap="flat" cmpd="sng" algn="ctr">
+                      <a:solidFill>
+                        <a:srgbClr val="CBD5E1"/>
+                      </a:solidFill>
+                      <a:prstDash val="solid"/>
+                      <a:round/>
+                      <a:headEnd type="none" w="med" len="med"/>
+                      <a:tailEnd type="none" w="med" len="med"/>
+                    </a:lnB>
+                    <a:solidFill>
+                      <a:srgbClr val="E8EFF8"/>
+                    </a:solidFill>
+                  </a:tcPr>
+                </a:tc>
+                <a:tc>
+                  <a:txBody>
+                    <a:bodyPr/>
+                    <a:lstStyle/>
+                    <a:p>
+                      <a:pPr indent="0" marL="0">
+                        <a:buNone/>
+                      </a:pPr>
+                      <a:r>
+                        <a:rPr lang="en-US" sz="900" b="1" dirty="0">
+                          <a:solidFill>
+                            <a:srgbClr val="334155"/>
+                          </a:solidFill>
+                          <a:latin typeface="Arial" pitchFamily="34" charset="0"/>
+                          <a:ea typeface="Arial" pitchFamily="34" charset="-122"/>
+                          <a:cs typeface="Arial" pitchFamily="34" charset="-120"/>
+                        </a:rPr>
+                        <a:t>窓・採光</a:t>
+                      </a:r>
+                      <a:endParaRPr lang="en-US" sz="900" dirty="0">
+                        <a:latin typeface="Arial" charset="0"/>
+                        <a:ea typeface="Arial" charset="0"/>
+                        <a:cs typeface="Arial" charset="0"/>
+                      </a:endParaRPr>
+                    </a:p>
+                  </a:txBody>
+                  <a:tcPr marL="91440" marR="91440" marT="45720" marB="45720">
+                    <a:lnL w="6350" cap="flat" cmpd="sng" algn="ctr">
+                      <a:solidFill>
+                        <a:srgbClr val="CBD5E1"/>
+                      </a:solidFill>
+                      <a:prstDash val="solid"/>
+                      <a:round/>
+                      <a:headEnd type="none" w="med" len="med"/>
+                      <a:tailEnd type="none" w="med" len="med"/>
+                    </a:lnL>
+                    <a:lnR w="6350" cap="flat" cmpd="sng" algn="ctr">
+                      <a:solidFill>
+                        <a:srgbClr val="CBD5E1"/>
+                      </a:solidFill>
+                      <a:prstDash val="solid"/>
+                      <a:round/>
+                      <a:headEnd type="none" w="med" len="med"/>
+                      <a:tailEnd type="none" w="med" len="med"/>
+                    </a:lnR>
+                    <a:lnT w="6350" cap="flat" cmpd="sng" algn="ctr">
+                      <a:solidFill>
+                        <a:srgbClr val="CBD5E1"/>
+                      </a:solidFill>
+                      <a:prstDash val="solid"/>
+                      <a:round/>
+                      <a:headEnd type="none" w="med" len="med"/>
+                      <a:tailEnd type="none" w="med" len="med"/>
+                    </a:lnT>
+                    <a:lnB w="6350" cap="flat" cmpd="sng" algn="ctr">
+                      <a:solidFill>
+                        <a:srgbClr val="CBD5E1"/>
+                      </a:solidFill>
+                      <a:prstDash val="solid"/>
+                      <a:round/>
+                      <a:headEnd type="none" w="med" len="med"/>
+                      <a:tailEnd type="none" w="med" len="med"/>
+                    </a:lnB>
+                    <a:solidFill>
+                      <a:srgbClr val="E8EFF8"/>
+                    </a:solidFill>
+                  </a:tcPr>
+                </a:tc>
+                <a:tc>
+                  <a:txBody>
+                    <a:bodyPr/>
+                    <a:lstStyle/>
+                    <a:p>
+                      <a:pPr indent="0" marL="0">
+                        <a:buNone/>
+                      </a:pPr>
+                      <a:r>
+                        <a:rPr lang="en-US" sz="900" dirty="0">
+                          <a:solidFill>
+                            <a:srgbClr val="64748B"/>
+                          </a:solidFill>
+                          <a:latin typeface="Arial" pitchFamily="34" charset="0"/>
+                          <a:ea typeface="Arial" pitchFamily="34" charset="-122"/>
+                          <a:cs typeface="Arial" pitchFamily="34" charset="-120"/>
+                        </a:rPr>
+                        <a:t>窓から富士山が見えました</a:t>
+                      </a:r>
+                      <a:endParaRPr lang="en-US" sz="900" dirty="0">
+                        <a:latin typeface="Arial" charset="0"/>
+                        <a:ea typeface="Arial" charset="0"/>
+                        <a:cs typeface="Arial" charset="0"/>
+                      </a:endParaRPr>
+                    </a:p>
+                  </a:txBody>
+                  <a:tcPr marL="91440" marR="91440" marT="45720" marB="45720">
+                    <a:lnL w="6350" cap="flat" cmpd="sng" algn="ctr">
+                      <a:solidFill>
+                        <a:srgbClr val="CBD5E1"/>
+                      </a:solidFill>
+                      <a:prstDash val="solid"/>
+                      <a:round/>
+                      <a:headEnd type="none" w="med" len="med"/>
+                      <a:tailEnd type="none" w="med" len="med"/>
+                    </a:lnL>
+                    <a:lnR w="6350" cap="flat" cmpd="sng" algn="ctr">
+                      <a:solidFill>
+                        <a:srgbClr val="CBD5E1"/>
+                      </a:solidFill>
+                      <a:prstDash val="solid"/>
+                      <a:round/>
+                      <a:headEnd type="none" w="med" len="med"/>
+                      <a:tailEnd type="none" w="med" len="med"/>
+                    </a:lnR>
+                    <a:lnT w="6350" cap="flat" cmpd="sng" algn="ctr">
+                      <a:solidFill>
+                        <a:srgbClr val="CBD5E1"/>
+                      </a:solidFill>
+                      <a:prstDash val="solid"/>
+                      <a:round/>
+                      <a:headEnd type="none" w="med" len="med"/>
+                      <a:tailEnd type="none" w="med" len="med"/>
+                    </a:lnT>
+                    <a:lnB w="6350" cap="flat" cmpd="sng" algn="ctr">
+                      <a:solidFill>
+                        <a:srgbClr val="CBD5E1"/>
+                      </a:solidFill>
+                      <a:prstDash val="solid"/>
+                      <a:round/>
+                      <a:headEnd type="none" w="med" len="med"/>
+                      <a:tailEnd type="none" w="med" len="med"/>
+                    </a:lnB>
+                    <a:solidFill>
+                      <a:srgbClr val="E8EFF8"/>
+                    </a:solidFill>
+                  </a:tcPr>
+                </a:tc>
+                <a:tc>
+                  <a:txBody>
+                    <a:bodyPr/>
+                    <a:lstStyle/>
+                    <a:p>
+                      <a:pPr algn="ctr" indent="0" marL="0">
+                        <a:buNone/>
+                      </a:pPr>
+                      <a:r>
+                        <a:rPr lang="en-US" sz="900" dirty="0">
+                          <a:solidFill>
+                            <a:srgbClr val="334155"/>
+                          </a:solidFill>
+                          <a:latin typeface="Arial" pitchFamily="34" charset="0"/>
+                          <a:ea typeface="Arial" pitchFamily="34" charset="-122"/>
+                          <a:cs typeface="Arial" pitchFamily="34" charset="-120"/>
+                        </a:rPr>
+                        <a:t>1件</a:t>
+                      </a:r>
+                      <a:endParaRPr lang="en-US" sz="900" dirty="0">
+                        <a:latin typeface="Arial" charset="0"/>
+                        <a:ea typeface="Arial" charset="0"/>
+                        <a:cs typeface="Arial" charset="0"/>
+                      </a:endParaRPr>
+                    </a:p>
+                  </a:txBody>
+                  <a:tcPr marL="91440" marR="91440" marT="45720" marB="45720">
+                    <a:lnL w="6350" cap="flat" cmpd="sng" algn="ctr">
+                      <a:solidFill>
+                        <a:srgbClr val="CBD5E1"/>
+                      </a:solidFill>
+                      <a:prstDash val="solid"/>
+                      <a:round/>
+                      <a:headEnd type="none" w="med" len="med"/>
+                      <a:tailEnd type="none" w="med" len="med"/>
+                    </a:lnL>
+                    <a:lnR w="6350" cap="flat" cmpd="sng" algn="ctr">
+                      <a:solidFill>
+                        <a:srgbClr val="CBD5E1"/>
+                      </a:solidFill>
+                      <a:prstDash val="solid"/>
+                      <a:round/>
+                      <a:headEnd type="none" w="med" len="med"/>
+                      <a:tailEnd type="none" w="med" len="med"/>
+                    </a:lnR>
+                    <a:lnT w="6350" cap="flat" cmpd="sng" algn="ctr">
+                      <a:solidFill>
+                        <a:srgbClr val="CBD5E1"/>
+                      </a:solidFill>
+                      <a:prstDash val="solid"/>
+                      <a:round/>
+                      <a:headEnd type="none" w="med" len="med"/>
+                      <a:tailEnd type="none" w="med" len="med"/>
+                    </a:lnT>
+                    <a:lnB w="6350" cap="flat" cmpd="sng" algn="ctr">
+                      <a:solidFill>
+                        <a:srgbClr val="CBD5E1"/>
+                      </a:solidFill>
+                      <a:prstDash val="solid"/>
+                      <a:round/>
+                      <a:headEnd type="none" w="med" len="med"/>
+                      <a:tailEnd type="none" w="med" len="med"/>
+                    </a:lnB>
+                    <a:solidFill>
+                      <a:srgbClr val="E8EFF8"/>
                     </a:solidFill>
                   </a:tcPr>
                 </a:tc>
@@ -16410,7 +16684,7 @@
                 <a:ea typeface="Arial" pitchFamily="34" charset="-122"/>
                 <a:cs typeface="Arial" pitchFamily="34" charset="-120"/>
               </a:rPr>
-              <a:t>口コミ返信体制の構築</a:t>
+              <a:t>窓・採光環境の改善</a:t>
             </a:r>
             <a:endParaRPr lang="en-US" sz="1000" dirty="0"/>
           </a:p>
@@ -16425,7 +16699,7 @@
         <p:spPr>
           <a:xfrm>
             <a:off x="640080" y="3803904"/>
-            <a:ext cx="3474720" cy="493776"/>
+            <a:ext cx="3474720" cy="694944"/>
           </a:xfrm>
           <a:prstGeom prst="rect">
             <a:avLst/>
@@ -16453,7 +16727,7 @@
                 <a:ea typeface="Arial" pitchFamily="34" charset="-122"/>
                 <a:cs typeface="Arial" pitchFamily="34" charset="-120"/>
               </a:rPr>
-              <a:t>全サイトの口コミに48時間以内の返信を目標に設定</a:t>
+              <a:t>遮光カーテンとレースカーテンの品質見直し</a:t>
             </a:r>
             <a:endParaRPr lang="en-US" sz="900" dirty="0"/>
           </a:p>
@@ -16474,7 +16748,28 @@
                 <a:ea typeface="Arial" pitchFamily="34" charset="-122"/>
                 <a:cs typeface="Arial" pitchFamily="34" charset="-120"/>
               </a:rPr>
-              <a:t>特に低評価レビューへのフォローアップ強化</a:t>
+              <a:t>窓の開閉可否に関する事前案内の徹底</a:t>
+            </a:r>
+            <a:endParaRPr lang="en-US" sz="900" dirty="0"/>
+          </a:p>
+          <a:p>
+            <a:pPr marL="342900" indent="-342900">
+              <a:spcAft>
+                <a:spcPts val="200"/>
+              </a:spcAft>
+              <a:buSzPct val="100000"/>
+              <a:buChar char="•"/>
+            </a:pPr>
+            <a:r>
+              <a:rPr lang="en-US" sz="900" dirty="0">
+                <a:solidFill>
+                  <a:srgbClr val="64748B"/>
+                </a:solidFill>
+                <a:latin typeface="Arial" pitchFamily="34" charset="0"/>
+                <a:ea typeface="Arial" pitchFamily="34" charset="-122"/>
+                <a:cs typeface="Arial" pitchFamily="34" charset="-120"/>
+              </a:rPr>
+              <a:t>採光の良い客室の優先割り当てルール整備</a:t>
             </a:r>
             <a:endParaRPr lang="en-US" sz="900" dirty="0"/>
           </a:p>

--- a/納品レポート/ホテル別レポート/comfort_yokohama_kannai_口コミ分析レポート.pptx
+++ b/納品レポート/ホテル別レポート/comfort_yokohama_kannai_口コミ分析レポート.pptx
@@ -208,7 +208,7 @@
                 <c:formatCode>General</c:formatCode>
                 <c:ptCount val="6"/>
                 <c:pt idx="0">
-                  <c:v>8.65</c:v>
+                  <c:v>8.58</c:v>
                 </c:pt>
                 <c:pt idx="1">
                   <c:v>7.85</c:v>
@@ -217,7 +217,7 @@
                   <c:v>7.43</c:v>
                 </c:pt>
                 <c:pt idx="3">
-                  <c:v>7.42</c:v>
+                  <c:v>7.31</c:v>
                 </c:pt>
                 <c:pt idx="4">
                   <c:v>6.95</c:v>
@@ -566,13 +566,13 @@
               <c:numCache>
                 <c:ptCount val="3"/>
                 <c:pt idx="0">
-                  <c:v>98</c:v>
+                  <c:v>97</c:v>
                 </c:pt>
                 <c:pt idx="1">
                   <c:v>23</c:v>
                 </c:pt>
                 <c:pt idx="2">
-                  <c:v>17</c:v>
+                  <c:v>18</c:v>
                 </c:pt>
               </c:numCache>
             </c:numRef>
@@ -823,7 +823,7 @@
                 <c:formatCode>General</c:formatCode>
                 <c:ptCount val="9"/>
                 <c:pt idx="0">
-                  <c:v>31</c:v>
+                  <c:v>30</c:v>
                 </c:pt>
                 <c:pt idx="1">
                   <c:v>9</c:v>
@@ -841,7 +841,7 @@
                   <c:v>6</c:v>
                 </c:pt>
                 <c:pt idx="6">
-                  <c:v>9</c:v>
+                  <c:v>10</c:v>
                 </c:pt>
                 <c:pt idx="7">
                   <c:v>1</c:v>
@@ -2818,7 +2818,7 @@
                 <a:ea typeface="Arial" pitchFamily="34" charset="-122"/>
                 <a:cs typeface="Arial" pitchFamily="34" charset="-120"/>
               </a:rPr>
-              <a:t>作成日：2026年3月19日</a:t>
+              <a:t>作成日：2026年3月20日</a:t>
             </a:r>
             <a:endParaRPr lang="en-US" sz="1000" dirty="0"/>
           </a:p>
@@ -3364,7 +3364,7 @@
                           <a:ea typeface="Arial" pitchFamily="34" charset="-122"/>
                           <a:cs typeface="Arial" pitchFamily="34" charset="-120"/>
                         </a:rPr>
-                        <a:t>7.57点</a:t>
+                        <a:t>7.53点</a:t>
                       </a:r>
                       <a:endParaRPr lang="en-US" sz="1000" dirty="0">
                         <a:latin typeface="Arial" charset="0"/>
@@ -3432,7 +3432,7 @@
                           <a:ea typeface="Arial" pitchFamily="34" charset="-122"/>
                           <a:cs typeface="Arial" pitchFamily="34" charset="-120"/>
                         </a:rPr>
-                        <a:t>8.1点以上</a:t>
+                        <a:t>8.0点以上</a:t>
                       </a:r>
                       <a:endParaRPr lang="en-US" sz="1000" dirty="0">
                         <a:latin typeface="Arial" charset="0"/>
@@ -3638,7 +3638,7 @@
                           <a:ea typeface="Arial" pitchFamily="34" charset="-122"/>
                           <a:cs typeface="Arial" pitchFamily="34" charset="-120"/>
                         </a:rPr>
-                        <a:t>71.0%</a:t>
+                        <a:t>70.3%</a:t>
                       </a:r>
                       <a:endParaRPr lang="en-US" sz="1000" dirty="0">
                         <a:latin typeface="Arial" charset="0"/>
@@ -3706,7 +3706,7 @@
                           <a:ea typeface="Arial" pitchFamily="34" charset="-122"/>
                           <a:cs typeface="Arial" pitchFamily="34" charset="-120"/>
                         </a:rPr>
-                        <a:t>76%以上</a:t>
+                        <a:t>75%以上</a:t>
                       </a:r>
                       <a:endParaRPr lang="en-US" sz="1000" dirty="0">
                         <a:latin typeface="Arial" charset="0"/>
@@ -3912,7 +3912,7 @@
                           <a:ea typeface="Arial" pitchFamily="34" charset="-122"/>
                           <a:cs typeface="Arial" pitchFamily="34" charset="-120"/>
                         </a:rPr>
-                        <a:t>12.3%</a:t>
+                        <a:t>13.0%</a:t>
                       </a:r>
                       <a:endParaRPr lang="en-US" sz="1000" dirty="0">
                         <a:latin typeface="Arial" charset="0"/>
@@ -3980,7 +3980,7 @@
                           <a:ea typeface="Arial" pitchFamily="34" charset="-122"/>
                           <a:cs typeface="Arial" pitchFamily="34" charset="-120"/>
                         </a:rPr>
-                        <a:t>7%以下</a:t>
+                        <a:t>8%以下</a:t>
                       </a:r>
                       <a:endParaRPr lang="en-US" sz="1000" dirty="0">
                         <a:latin typeface="Arial" charset="0"/>
@@ -5373,7 +5373,7 @@
                 <a:ea typeface="Arial" pitchFamily="34" charset="-122"/>
                 <a:cs typeface="Arial" pitchFamily="34" charset="-120"/>
               </a:rPr>
-              <a:t>7.57</a:t>
+              <a:t>7.53</a:t>
             </a:r>
             <a:endParaRPr lang="en-US" sz="3200" dirty="0"/>
           </a:p>
@@ -5498,7 +5498,7 @@
                 <a:ea typeface="Arial" pitchFamily="34" charset="-122"/>
                 <a:cs typeface="Arial" pitchFamily="34" charset="-120"/>
               </a:rPr>
-              <a:t>71.0%</a:t>
+              <a:t>70.3%</a:t>
             </a:r>
             <a:endParaRPr lang="en-US" sz="3200" dirty="0"/>
           </a:p>
@@ -5623,7 +5623,7 @@
                 <a:ea typeface="Arial" pitchFamily="34" charset="-122"/>
                 <a:cs typeface="Arial" pitchFamily="34" charset="-120"/>
               </a:rPr>
-              <a:t>12.3%</a:t>
+              <a:t>13.0%</a:t>
             </a:r>
             <a:endParaRPr lang="en-US" sz="3200" dirty="0"/>
           </a:p>
@@ -5896,7 +5896,7 @@
                 <a:ea typeface="Arial" pitchFamily="34" charset="-122"/>
                 <a:cs typeface="Arial" pitchFamily="34" charset="-120"/>
               </a:rPr>
-              <a:t>  ただし，今回は改装工事でカフェが利用出来ず、朝食もおにぎり弁当の一択で残念</a:t>
+              <a:t>  朝食は、ビュッフェ形式でなかった</a:t>
             </a:r>
             <a:endParaRPr lang="en-US" sz="1100" dirty="0"/>
           </a:p>
@@ -6557,7 +6557,7 @@
                 <a:ea typeface="Arial" pitchFamily="34" charset="-122"/>
                 <a:cs typeface="Arial" pitchFamily="34" charset="-120"/>
               </a:rPr>
-              <a:t>7.57</a:t>
+              <a:t>7.53</a:t>
             </a:r>
             <a:endParaRPr lang="en-US" sz="3200" dirty="0"/>
           </a:p>
@@ -6682,7 +6682,7 @@
                 <a:ea typeface="Arial" pitchFamily="34" charset="-122"/>
                 <a:cs typeface="Arial" pitchFamily="34" charset="-120"/>
               </a:rPr>
-              <a:t>71.0%</a:t>
+              <a:t>70.3%</a:t>
             </a:r>
             <a:endParaRPr lang="en-US" sz="3200" dirty="0"/>
           </a:p>
@@ -6807,7 +6807,7 @@
                 <a:ea typeface="Arial" pitchFamily="34" charset="-122"/>
                 <a:cs typeface="Arial" pitchFamily="34" charset="-120"/>
               </a:rPr>
-              <a:t>12.3%</a:t>
+              <a:t>13.0%</a:t>
             </a:r>
             <a:endParaRPr lang="en-US" sz="3200" dirty="0"/>
           </a:p>
@@ -7353,7 +7353,7 @@
                 <a:ea typeface="Arial" pitchFamily="34" charset="-122"/>
                 <a:cs typeface="Arial" pitchFamily="34" charset="-120"/>
               </a:rPr>
-              <a:t>Trip.com(8.65)が最高スコア。</a:t>
+              <a:t>Trip.com(8.58)が最高スコア。</a:t>
             </a:r>
             <a:endParaRPr lang="en-US" sz="1100" dirty="0"/>
           </a:p>
@@ -7911,7 +7911,7 @@
                           <a:ea typeface="Arial" pitchFamily="34" charset="-122"/>
                           <a:cs typeface="Arial" pitchFamily="34" charset="-120"/>
                         </a:rPr>
-                        <a:t>20</a:t>
+                        <a:t>19</a:t>
                       </a:r>
                       <a:endParaRPr lang="en-US" sz="900" dirty="0">
                         <a:latin typeface="Arial" charset="0"/>
@@ -7979,7 +7979,7 @@
                           <a:ea typeface="Arial" pitchFamily="34" charset="-122"/>
                           <a:cs typeface="Arial" pitchFamily="34" charset="-120"/>
                         </a:rPr>
-                        <a:t>8.65</a:t>
+                        <a:t>8.58</a:t>
                       </a:r>
                       <a:endParaRPr lang="en-US" sz="900" dirty="0">
                         <a:latin typeface="Arial" charset="0"/>
@@ -8115,7 +8115,7 @@
                           <a:ea typeface="Arial" pitchFamily="34" charset="-122"/>
                           <a:cs typeface="Arial" pitchFamily="34" charset="-120"/>
                         </a:rPr>
-                        <a:t>8.65</a:t>
+                        <a:t>8.58</a:t>
                       </a:r>
                       <a:endParaRPr lang="en-US" sz="900" dirty="0">
                         <a:latin typeface="Arial" charset="0"/>
@@ -8937,7 +8937,7 @@
                           <a:ea typeface="Arial" pitchFamily="34" charset="-122"/>
                           <a:cs typeface="Arial" pitchFamily="34" charset="-120"/>
                         </a:rPr>
-                        <a:t>31</a:t>
+                        <a:t>32</a:t>
                       </a:r>
                       <a:endParaRPr lang="en-US" sz="900" dirty="0">
                         <a:latin typeface="Arial" charset="0"/>
@@ -9005,7 +9005,7 @@
                           <a:ea typeface="Arial" pitchFamily="34" charset="-122"/>
                           <a:cs typeface="Arial" pitchFamily="34" charset="-120"/>
                         </a:rPr>
-                        <a:t>7.42</a:t>
+                        <a:t>7.31</a:t>
                       </a:r>
                       <a:endParaRPr lang="en-US" sz="900" dirty="0">
                         <a:latin typeface="Arial" charset="0"/>
@@ -9141,7 +9141,7 @@
                           <a:ea typeface="Arial" pitchFamily="34" charset="-122"/>
                           <a:cs typeface="Arial" pitchFamily="34" charset="-120"/>
                         </a:rPr>
-                        <a:t>7.42</a:t>
+                        <a:t>7.31</a:t>
                       </a:r>
                       <a:endParaRPr lang="en-US" sz="900" dirty="0">
                         <a:latin typeface="Arial" charset="0"/>
@@ -10233,7 +10233,7 @@
                 <a:ea typeface="Arial" pitchFamily="34" charset="-122"/>
                 <a:cs typeface="Arial" pitchFamily="34" charset="-120"/>
               </a:rPr>
-              <a:t>98件（71.0%）</a:t>
+              <a:t>97件（70.3%）</a:t>
             </a:r>
             <a:endParaRPr lang="en-US" sz="1100" dirty="0"/>
           </a:p>
@@ -10429,7 +10429,7 @@
                 <a:ea typeface="Arial" pitchFamily="34" charset="-122"/>
                 <a:cs typeface="Arial" pitchFamily="34" charset="-120"/>
               </a:rPr>
-              <a:t>17件（12.3%）</a:t>
+              <a:t>18件（13.0%）</a:t>
             </a:r>
             <a:endParaRPr lang="en-US" sz="1100" dirty="0"/>
           </a:p>
@@ -10841,7 +10841,7 @@
                 <a:ea typeface="Arial" pitchFamily="34" charset="-122"/>
                 <a:cs typeface="Arial" pitchFamily="34" charset="-120"/>
               </a:rPr>
-              <a:t>ただし，今回は改装工事でカフェが利用出来ず、朝食もおにぎり弁当の一択で残念</a:t>
+              <a:t>朝食は、ビュッフェ形式でなかった</a:t>
             </a:r>
             <a:endParaRPr lang="en-US" sz="900" dirty="0"/>
           </a:p>
@@ -10880,7 +10880,7 @@
                 <a:ea typeface="Arial" pitchFamily="34" charset="-122"/>
                 <a:cs typeface="Arial" pitchFamily="34" charset="-120"/>
               </a:rPr>
-              <a:t>「が改装中で提供された朝ごはん（お弁当）が残念でした」</a:t>
+              <a:t>「ただし，今回は改装工事でカフェが利用出来ず、朝食もおにぎり弁当の一択で残念」</a:t>
             </a:r>
             <a:endParaRPr lang="en-US" sz="900" dirty="0"/>
           </a:p>

--- a/納品レポート/ホテル別レポート/comfort_yokohama_kannai_口コミ分析レポート.pptx
+++ b/納品レポート/ホテル別レポート/comfort_yokohama_kannai_口コミ分析レポート.pptx
@@ -208,22 +208,22 @@
                 <c:formatCode>General</c:formatCode>
                 <c:ptCount val="6"/>
                 <c:pt idx="0">
-                  <c:v>8.58</c:v>
+                  <c:v>8.42</c:v>
                 </c:pt>
                 <c:pt idx="1">
-                  <c:v>7.85</c:v>
+                  <c:v>7.56</c:v>
                 </c:pt>
                 <c:pt idx="2">
                   <c:v>7.43</c:v>
                 </c:pt>
                 <c:pt idx="3">
-                  <c:v>7.31</c:v>
+                  <c:v>7.42</c:v>
                 </c:pt>
                 <c:pt idx="4">
                   <c:v>6.95</c:v>
                 </c:pt>
                 <c:pt idx="5">
-                  <c:v>6.62</c:v>
+                  <c:v>6.8</c:v>
                 </c:pt>
               </c:numCache>
             </c:numRef>
@@ -566,13 +566,13 @@
               <c:numCache>
                 <c:ptCount val="3"/>
                 <c:pt idx="0">
-                  <c:v>97</c:v>
+                  <c:v>98</c:v>
                 </c:pt>
                 <c:pt idx="1">
-                  <c:v>23</c:v>
+                  <c:v>24</c:v>
                 </c:pt>
                 <c:pt idx="2">
-                  <c:v>18</c:v>
+                  <c:v>19</c:v>
                 </c:pt>
               </c:numCache>
             </c:numRef>
@@ -826,28 +826,28 @@
                   <c:v>30</c:v>
                 </c:pt>
                 <c:pt idx="1">
-                  <c:v>9</c:v>
+                  <c:v>8</c:v>
                 </c:pt>
                 <c:pt idx="2">
-                  <c:v>58</c:v>
+                  <c:v>60</c:v>
                 </c:pt>
                 <c:pt idx="3">
                   <c:v>5</c:v>
                 </c:pt>
                 <c:pt idx="4">
-                  <c:v>12</c:v>
+                  <c:v>13</c:v>
                 </c:pt>
                 <c:pt idx="5">
                   <c:v>6</c:v>
                 </c:pt>
                 <c:pt idx="6">
-                  <c:v>10</c:v>
+                  <c:v>9</c:v>
                 </c:pt>
                 <c:pt idx="7">
                   <c:v>1</c:v>
                 </c:pt>
                 <c:pt idx="8">
-                  <c:v>7</c:v>
+                  <c:v>9</c:v>
                 </c:pt>
               </c:numCache>
             </c:numRef>
@@ -2798,7 +2798,7 @@
                 <a:ea typeface="Arial" pitchFamily="34" charset="-122"/>
                 <a:cs typeface="Arial" pitchFamily="34" charset="-120"/>
               </a:rPr>
-              <a:t>レビュー総数：138件（6サイト）</a:t>
+              <a:t>レビュー総数：141件（6サイト）</a:t>
             </a:r>
             <a:endParaRPr lang="en-US" sz="1000" dirty="0"/>
           </a:p>
@@ -2818,7 +2818,7 @@
                 <a:ea typeface="Arial" pitchFamily="34" charset="-122"/>
                 <a:cs typeface="Arial" pitchFamily="34" charset="-120"/>
               </a:rPr>
-              <a:t>作成日：2026年3月20日</a:t>
+              <a:t>作成日：2026年3月21日</a:t>
             </a:r>
             <a:endParaRPr lang="en-US" sz="1000" dirty="0"/>
           </a:p>
@@ -3364,7 +3364,7 @@
                           <a:ea typeface="Arial" pitchFamily="34" charset="-122"/>
                           <a:cs typeface="Arial" pitchFamily="34" charset="-120"/>
                         </a:rPr>
-                        <a:t>7.53点</a:t>
+                        <a:t>7.46点</a:t>
                       </a:r>
                       <a:endParaRPr lang="en-US" sz="1000" dirty="0">
                         <a:latin typeface="Arial" charset="0"/>
@@ -3638,7 +3638,7 @@
                           <a:ea typeface="Arial" pitchFamily="34" charset="-122"/>
                           <a:cs typeface="Arial" pitchFamily="34" charset="-120"/>
                         </a:rPr>
-                        <a:t>70.3%</a:t>
+                        <a:t>69.5%</a:t>
                       </a:r>
                       <a:endParaRPr lang="en-US" sz="1000" dirty="0">
                         <a:latin typeface="Arial" charset="0"/>
@@ -3706,7 +3706,7 @@
                           <a:ea typeface="Arial" pitchFamily="34" charset="-122"/>
                           <a:cs typeface="Arial" pitchFamily="34" charset="-120"/>
                         </a:rPr>
-                        <a:t>75%以上</a:t>
+                        <a:t>80%以上</a:t>
                       </a:r>
                       <a:endParaRPr lang="en-US" sz="1000" dirty="0">
                         <a:latin typeface="Arial" charset="0"/>
@@ -3912,7 +3912,7 @@
                           <a:ea typeface="Arial" pitchFamily="34" charset="-122"/>
                           <a:cs typeface="Arial" pitchFamily="34" charset="-120"/>
                         </a:rPr>
-                        <a:t>13.0%</a:t>
+                        <a:t>13.5%</a:t>
                       </a:r>
                       <a:endParaRPr lang="en-US" sz="1000" dirty="0">
                         <a:latin typeface="Arial" charset="0"/>
@@ -3980,7 +3980,7 @@
                           <a:ea typeface="Arial" pitchFamily="34" charset="-122"/>
                           <a:cs typeface="Arial" pitchFamily="34" charset="-120"/>
                         </a:rPr>
-                        <a:t>8%以下</a:t>
+                        <a:t>9%以下</a:t>
                       </a:r>
                       <a:endParaRPr lang="en-US" sz="1000" dirty="0">
                         <a:latin typeface="Arial" charset="0"/>
@@ -4186,7 +4186,7 @@
                           <a:ea typeface="Arial" pitchFamily="34" charset="-122"/>
                           <a:cs typeface="Arial" pitchFamily="34" charset="-120"/>
                         </a:rPr>
-                        <a:t>6.6点</a:t>
+                        <a:t>6.8点</a:t>
                       </a:r>
                       <a:endParaRPr lang="en-US" sz="1000" dirty="0">
                         <a:latin typeface="Arial" charset="0"/>
@@ -4254,7 +4254,7 @@
                           <a:ea typeface="Arial" pitchFamily="34" charset="-122"/>
                           <a:cs typeface="Arial" pitchFamily="34" charset="-120"/>
                         </a:rPr>
-                        <a:t>7.6点以上</a:t>
+                        <a:t>7.8点以上</a:t>
                       </a:r>
                       <a:endParaRPr lang="en-US" sz="1000" dirty="0">
                         <a:latin typeface="Arial" charset="0"/>
@@ -4734,7 +4734,7 @@
                           <a:ea typeface="Arial" pitchFamily="34" charset="-122"/>
                           <a:cs typeface="Arial" pitchFamily="34" charset="-120"/>
                         </a:rPr>
-                        <a:t>約23件/期間</a:t>
+                        <a:t>約24件/期間</a:t>
                       </a:r>
                       <a:endParaRPr lang="en-US" sz="1000" dirty="0">
                         <a:latin typeface="Arial" charset="0"/>
@@ -4802,7 +4802,7 @@
                           <a:ea typeface="Arial" pitchFamily="34" charset="-122"/>
                           <a:cs typeface="Arial" pitchFamily="34" charset="-120"/>
                         </a:rPr>
-                        <a:t>11件以下</a:t>
+                        <a:t>12件以下</a:t>
                       </a:r>
                       <a:endParaRPr lang="en-US" sz="1000" dirty="0">
                         <a:latin typeface="Arial" charset="0"/>
@@ -5373,7 +5373,7 @@
                 <a:ea typeface="Arial" pitchFamily="34" charset="-122"/>
                 <a:cs typeface="Arial" pitchFamily="34" charset="-120"/>
               </a:rPr>
-              <a:t>7.53</a:t>
+              <a:t>7.46</a:t>
             </a:r>
             <a:endParaRPr lang="en-US" sz="3200" dirty="0"/>
           </a:p>
@@ -5498,7 +5498,7 @@
                 <a:ea typeface="Arial" pitchFamily="34" charset="-122"/>
                 <a:cs typeface="Arial" pitchFamily="34" charset="-120"/>
               </a:rPr>
-              <a:t>70.3%</a:t>
+              <a:t>69.5%</a:t>
             </a:r>
             <a:endParaRPr lang="en-US" sz="3200" dirty="0"/>
           </a:p>
@@ -5623,7 +5623,7 @@
                 <a:ea typeface="Arial" pitchFamily="34" charset="-122"/>
                 <a:cs typeface="Arial" pitchFamily="34" charset="-120"/>
               </a:rPr>
-              <a:t>13.0%</a:t>
+              <a:t>13.5%</a:t>
             </a:r>
             <a:endParaRPr lang="en-US" sz="3200" dirty="0"/>
           </a:p>
@@ -5748,7 +5748,7 @@
                 <a:ea typeface="Arial" pitchFamily="34" charset="-122"/>
                 <a:cs typeface="Arial" pitchFamily="34" charset="-120"/>
               </a:rPr>
-              <a:t>138件</a:t>
+              <a:t>141件</a:t>
             </a:r>
             <a:endParaRPr lang="en-US" sz="3200" dirty="0"/>
           </a:p>
@@ -5896,7 +5896,7 @@
                 <a:ea typeface="Arial" pitchFamily="34" charset="-122"/>
                 <a:cs typeface="Arial" pitchFamily="34" charset="-120"/>
               </a:rPr>
-              <a:t>  朝食は、ビュッフェ形式でなかった</a:t>
+              <a:t>  予約時に見落としていたこちらのミスかもしれないが、内装工事しており、その関係で音がうるさく、朝食も弁当だった</a:t>
             </a:r>
             <a:endParaRPr lang="en-US" sz="1100" dirty="0"/>
           </a:p>
@@ -5936,7 +5936,7 @@
                 <a:ea typeface="Arial" pitchFamily="34" charset="-122"/>
                 <a:cs typeface="Arial" pitchFamily="34" charset="-120"/>
               </a:rPr>
-              <a:t>  横浜市営地下鉄の駅が近く便利</a:t>
+              <a:t>  立地もいいですし、客層もまずまず</a:t>
             </a:r>
             <a:endParaRPr lang="en-US" sz="1100" dirty="0"/>
           </a:p>
@@ -5976,7 +5976,7 @@
                 <a:ea typeface="Arial" pitchFamily="34" charset="-122"/>
                 <a:cs typeface="Arial" pitchFamily="34" charset="-120"/>
               </a:rPr>
-              <a:t>  朝食弁当はまずいし、朝食がパン派の人は対応なし</a:t>
+              <a:t>  部屋は狭めで設備も古いが、スタッフの応対も丁寧でウェルカムドリンクもあります</a:t>
             </a:r>
             <a:endParaRPr lang="en-US" sz="1100" dirty="0"/>
           </a:p>
@@ -6124,7 +6124,7 @@
                 <a:ea typeface="Arial" pitchFamily="34" charset="-122"/>
                 <a:cs typeface="Arial" pitchFamily="34" charset="-120"/>
               </a:rPr>
-              <a:t>  ただし，今回は改装工事でカフェが利用出来ず、朝食もおにぎり弁当の一択で残念</a:t>
+              <a:t>  まあそれはいいのですが、本件で不愉快な思いをしている宿泊客が多数存在するのは確実なのに、それと知りながら平気で行う...</a:t>
             </a:r>
             <a:endParaRPr lang="en-US" sz="1100" dirty="0"/>
           </a:p>
@@ -6164,7 +6164,7 @@
                 <a:ea typeface="Arial" pitchFamily="34" charset="-122"/>
                 <a:cs typeface="Arial" pitchFamily="34" charset="-120"/>
               </a:rPr>
-              <a:t>  部屋は、少し狭いですが、清潔にされていました</a:t>
+              <a:t>  部屋は狭めで設備も古いが、スタッフの応対も丁寧でウェルカムドリンクもあります</a:t>
             </a:r>
             <a:endParaRPr lang="en-US" sz="1100" dirty="0"/>
           </a:p>
@@ -6184,7 +6184,7 @@
                 <a:ea typeface="Arial" pitchFamily="34" charset="-122"/>
                 <a:cs typeface="Arial" pitchFamily="34" charset="-120"/>
               </a:rPr>
-              <a:t>浴室・水回り </a:t>
+              <a:t>防音性能 </a:t>
             </a:r>
             <a:endParaRPr lang="en-US" sz="1100" dirty="0"/>
           </a:p>
@@ -6204,7 +6204,7 @@
                 <a:ea typeface="Arial" pitchFamily="34" charset="-122"/>
                 <a:cs typeface="Arial" pitchFamily="34" charset="-120"/>
               </a:rPr>
-              <a:t>  部屋着（バスローブ）はエレベーター前にあるのでそれを取って行くスタイルです</a:t>
+              <a:t>  予約時に見落としていたこちらのミスかもしれないが、内装工事しており、その関係で音がうるさく、朝食も弁当だった</a:t>
             </a:r>
             <a:endParaRPr lang="en-US" sz="1100" dirty="0"/>
           </a:p>
@@ -6557,7 +6557,7 @@
                 <a:ea typeface="Arial" pitchFamily="34" charset="-122"/>
                 <a:cs typeface="Arial" pitchFamily="34" charset="-120"/>
               </a:rPr>
-              <a:t>7.53</a:t>
+              <a:t>7.46</a:t>
             </a:r>
             <a:endParaRPr lang="en-US" sz="3200" dirty="0"/>
           </a:p>
@@ -6682,7 +6682,7 @@
                 <a:ea typeface="Arial" pitchFamily="34" charset="-122"/>
                 <a:cs typeface="Arial" pitchFamily="34" charset="-120"/>
               </a:rPr>
-              <a:t>70.3%</a:t>
+              <a:t>69.5%</a:t>
             </a:r>
             <a:endParaRPr lang="en-US" sz="3200" dirty="0"/>
           </a:p>
@@ -6807,7 +6807,7 @@
                 <a:ea typeface="Arial" pitchFamily="34" charset="-122"/>
                 <a:cs typeface="Arial" pitchFamily="34" charset="-120"/>
               </a:rPr>
-              <a:t>13.0%</a:t>
+              <a:t>13.5%</a:t>
             </a:r>
             <a:endParaRPr lang="en-US" sz="3200" dirty="0"/>
           </a:p>
@@ -6932,7 +6932,7 @@
                 <a:ea typeface="Arial" pitchFamily="34" charset="-122"/>
                 <a:cs typeface="Arial" pitchFamily="34" charset="-120"/>
               </a:rPr>
-              <a:t>138件</a:t>
+              <a:t>141件</a:t>
             </a:r>
             <a:endParaRPr lang="en-US" sz="3200" dirty="0"/>
           </a:p>
@@ -7353,7 +7353,7 @@
                 <a:ea typeface="Arial" pitchFamily="34" charset="-122"/>
                 <a:cs typeface="Arial" pitchFamily="34" charset="-120"/>
               </a:rPr>
-              <a:t>Trip.com(8.58)が最高スコア。</a:t>
+              <a:t>Trip.com(8.42)が最高スコア。</a:t>
             </a:r>
             <a:endParaRPr lang="en-US" sz="1100" dirty="0"/>
           </a:p>
@@ -7402,7 +7402,7 @@
                 <a:ea typeface="Arial" pitchFamily="34" charset="-122"/>
                 <a:cs typeface="Arial" pitchFamily="34" charset="-120"/>
               </a:rPr>
-              <a:t>Google(6.6)が相対的に低い。口コミ返信の強化が急務</a:t>
+              <a:t>Google(6.8)が相対的に低い。口コミ返信の強化が急務</a:t>
             </a:r>
             <a:endParaRPr lang="en-US" sz="1100" dirty="0"/>
           </a:p>
@@ -7979,7 +7979,7 @@
                           <a:ea typeface="Arial" pitchFamily="34" charset="-122"/>
                           <a:cs typeface="Arial" pitchFamily="34" charset="-120"/>
                         </a:rPr>
-                        <a:t>8.58</a:t>
+                        <a:t>8.42</a:t>
                       </a:r>
                       <a:endParaRPr lang="en-US" sz="900" dirty="0">
                         <a:latin typeface="Arial" charset="0"/>
@@ -8115,7 +8115,7 @@
                           <a:ea typeface="Arial" pitchFamily="34" charset="-122"/>
                           <a:cs typeface="Arial" pitchFamily="34" charset="-120"/>
                         </a:rPr>
-                        <a:t>8.58</a:t>
+                        <a:t>8.42</a:t>
                       </a:r>
                       <a:endParaRPr lang="en-US" sz="900" dirty="0">
                         <a:latin typeface="Arial" charset="0"/>
@@ -8253,7 +8253,7 @@
                           <a:ea typeface="Arial" pitchFamily="34" charset="-122"/>
                           <a:cs typeface="Arial" pitchFamily="34" charset="-120"/>
                         </a:rPr>
-                        <a:t>39</a:t>
+                        <a:t>41</a:t>
                       </a:r>
                       <a:endParaRPr lang="en-US" sz="900" dirty="0">
                         <a:latin typeface="Arial" charset="0"/>
@@ -8321,7 +8321,7 @@
                           <a:ea typeface="Arial" pitchFamily="34" charset="-122"/>
                           <a:cs typeface="Arial" pitchFamily="34" charset="-120"/>
                         </a:rPr>
-                        <a:t>3.92</a:t>
+                        <a:t>3.78</a:t>
                       </a:r>
                       <a:endParaRPr lang="en-US" sz="900" dirty="0">
                         <a:latin typeface="Arial" charset="0"/>
@@ -8457,7 +8457,7 @@
                           <a:ea typeface="Arial" pitchFamily="34" charset="-122"/>
                           <a:cs typeface="Arial" pitchFamily="34" charset="-120"/>
                         </a:rPr>
-                        <a:t>7.85</a:t>
+                        <a:t>7.56</a:t>
                       </a:r>
                       <a:endParaRPr lang="en-US" sz="900" dirty="0">
                         <a:latin typeface="Arial" charset="0"/>
@@ -8937,7 +8937,7 @@
                           <a:ea typeface="Arial" pitchFamily="34" charset="-122"/>
                           <a:cs typeface="Arial" pitchFamily="34" charset="-120"/>
                         </a:rPr>
-                        <a:t>32</a:t>
+                        <a:t>31</a:t>
                       </a:r>
                       <a:endParaRPr lang="en-US" sz="900" dirty="0">
                         <a:latin typeface="Arial" charset="0"/>
@@ -9005,7 +9005,7 @@
                           <a:ea typeface="Arial" pitchFamily="34" charset="-122"/>
                           <a:cs typeface="Arial" pitchFamily="34" charset="-120"/>
                         </a:rPr>
-                        <a:t>7.31</a:t>
+                        <a:t>7.42</a:t>
                       </a:r>
                       <a:endParaRPr lang="en-US" sz="900" dirty="0">
                         <a:latin typeface="Arial" charset="0"/>
@@ -9141,7 +9141,7 @@
                           <a:ea typeface="Arial" pitchFamily="34" charset="-122"/>
                           <a:cs typeface="Arial" pitchFamily="34" charset="-120"/>
                         </a:rPr>
-                        <a:t>7.31</a:t>
+                        <a:t>7.42</a:t>
                       </a:r>
                       <a:endParaRPr lang="en-US" sz="900" dirty="0">
                         <a:latin typeface="Arial" charset="0"/>
@@ -9621,7 +9621,7 @@
                           <a:ea typeface="Arial" pitchFamily="34" charset="-122"/>
                           <a:cs typeface="Arial" pitchFamily="34" charset="-120"/>
                         </a:rPr>
-                        <a:t>13</a:t>
+                        <a:t>15</a:t>
                       </a:r>
                       <a:endParaRPr lang="en-US" sz="900" dirty="0">
                         <a:latin typeface="Arial" charset="0"/>
@@ -9689,7 +9689,7 @@
                           <a:ea typeface="Arial" pitchFamily="34" charset="-122"/>
                           <a:cs typeface="Arial" pitchFamily="34" charset="-120"/>
                         </a:rPr>
-                        <a:t>3.31</a:t>
+                        <a:t>3.4</a:t>
                       </a:r>
                       <a:endParaRPr lang="en-US" sz="900" dirty="0">
                         <a:latin typeface="Arial" charset="0"/>
@@ -9825,7 +9825,7 @@
                           <a:ea typeface="Arial" pitchFamily="34" charset="-122"/>
                           <a:cs typeface="Arial" pitchFamily="34" charset="-120"/>
                         </a:rPr>
-                        <a:t>6.62</a:t>
+                        <a:t>6.8</a:t>
                       </a:r>
                       <a:endParaRPr lang="en-US" sz="900" dirty="0">
                         <a:latin typeface="Arial" charset="0"/>
@@ -10233,7 +10233,7 @@
                 <a:ea typeface="Arial" pitchFamily="34" charset="-122"/>
                 <a:cs typeface="Arial" pitchFamily="34" charset="-120"/>
               </a:rPr>
-              <a:t>97件（70.3%）</a:t>
+              <a:t>98件（69.5%）</a:t>
             </a:r>
             <a:endParaRPr lang="en-US" sz="1100" dirty="0"/>
           </a:p>
@@ -10331,7 +10331,7 @@
                 <a:ea typeface="Arial" pitchFamily="34" charset="-122"/>
                 <a:cs typeface="Arial" pitchFamily="34" charset="-120"/>
               </a:rPr>
-              <a:t>23件（16.7%）</a:t>
+              <a:t>24件（17.0%）</a:t>
             </a:r>
             <a:endParaRPr lang="en-US" sz="1100" dirty="0"/>
           </a:p>
@@ -10429,7 +10429,7 @@
                 <a:ea typeface="Arial" pitchFamily="34" charset="-122"/>
                 <a:cs typeface="Arial" pitchFamily="34" charset="-120"/>
               </a:rPr>
-              <a:t>18件（13.0%）</a:t>
+              <a:t>19件（13.5%）</a:t>
             </a:r>
             <a:endParaRPr lang="en-US" sz="1100" dirty="0"/>
           </a:p>
@@ -10841,7 +10841,7 @@
                 <a:ea typeface="Arial" pitchFamily="34" charset="-122"/>
                 <a:cs typeface="Arial" pitchFamily="34" charset="-120"/>
               </a:rPr>
-              <a:t>朝食は、ビュッフェ形式でなかった</a:t>
+              <a:t>予約時に見落としていたこちらのミスかもしれないが、内装工事しており、その関係で音がうるさく、朝食も弁当だった</a:t>
             </a:r>
             <a:endParaRPr lang="en-US" sz="900" dirty="0"/>
           </a:p>
@@ -10880,7 +10880,7 @@
                 <a:ea typeface="Arial" pitchFamily="34" charset="-122"/>
                 <a:cs typeface="Arial" pitchFamily="34" charset="-120"/>
               </a:rPr>
-              <a:t>「ただし，今回は改装工事でカフェが利用出来ず、朝食もおにぎり弁当の一択で残念」</a:t>
+              <a:t>「改装中のため朝食がお弁当のため味気ない為ショックだった」</a:t>
             </a:r>
             <a:endParaRPr lang="en-US" sz="900" dirty="0"/>
           </a:p>
@@ -11064,7 +11064,7 @@
                 <a:ea typeface="Arial" pitchFamily="34" charset="-122"/>
                 <a:cs typeface="Arial" pitchFamily="34" charset="-120"/>
               </a:rPr>
-              <a:t>横浜市営地下鉄の駅が近く便利</a:t>
+              <a:t>立地もいいですし、客層もまずまず</a:t>
             </a:r>
             <a:endParaRPr lang="en-US" sz="900" dirty="0"/>
           </a:p>
@@ -11103,7 +11103,7 @@
                 <a:ea typeface="Arial" pitchFamily="34" charset="-122"/>
                 <a:cs typeface="Arial" pitchFamily="34" charset="-120"/>
               </a:rPr>
-              <a:t>「立地だけのホテル 朝食ブュッフェが楽しめるというから選んだのに、改装工事ということでクッソ不味い弁当であしらわれた」</a:t>
+              <a:t>「さらに駅近で便利な立地です」</a:t>
             </a:r>
             <a:endParaRPr lang="en-US" sz="900" dirty="0"/>
           </a:p>
@@ -11287,7 +11287,7 @@
                 <a:ea typeface="Arial" pitchFamily="34" charset="-122"/>
                 <a:cs typeface="Arial" pitchFamily="34" charset="-120"/>
               </a:rPr>
-              <a:t>朝食弁当はまずいし、朝食がパン派の人は対応なし</a:t>
+              <a:t>部屋は狭めで設備も古いが、スタッフの応対も丁寧でウェルカムドリンクもあります</a:t>
             </a:r>
             <a:endParaRPr lang="en-US" sz="900" dirty="0"/>
           </a:p>
@@ -11326,7 +11326,7 @@
                 <a:ea typeface="Arial" pitchFamily="34" charset="-122"/>
                 <a:cs typeface="Arial" pitchFamily="34" charset="-120"/>
               </a:rPr>
-              <a:t>「施設を良くするためのリニューアル工事は仕方ないにしても、対応が残念」</a:t>
+              <a:t>「朝食弁当はまずいし、朝食がパン派の人は対応なし」</a:t>
             </a:r>
             <a:endParaRPr lang="en-US" sz="900" dirty="0"/>
           </a:p>
@@ -11510,7 +11510,7 @@
                 <a:ea typeface="Arial" pitchFamily="34" charset="-122"/>
                 <a:cs typeface="Arial" pitchFamily="34" charset="-120"/>
               </a:rPr>
-              <a:t>連泊なのにお部屋の清掃入られたことに驚きました</a:t>
+              <a:t>7,000円で朝食ビュッフェ付きは格安かと思います また6:30から朝食可能でしたので、出発まで時間ない人はおすす...</a:t>
             </a:r>
             <a:endParaRPr lang="en-US" sz="900" dirty="0"/>
           </a:p>
@@ -11549,7 +11549,7 @@
                 <a:ea typeface="Arial" pitchFamily="34" charset="-122"/>
                 <a:cs typeface="Arial" pitchFamily="34" charset="-120"/>
               </a:rPr>
-              <a:t>「ただリニューアル中なのでお部屋も綺麗になりつつあり好感」</a:t>
+              <a:t>「連泊なのにお部屋の清掃入られたことに驚きました」</a:t>
             </a:r>
             <a:endParaRPr lang="en-US" sz="900" dirty="0"/>
           </a:p>
@@ -11733,7 +11733,7 @@
                 <a:ea typeface="Arial" pitchFamily="34" charset="-122"/>
                 <a:cs typeface="Arial" pitchFamily="34" charset="-120"/>
               </a:rPr>
-              <a:t>Prezzo non adeguato このホテルは、小さめながら快適な客室を備えた典型的なビジネスホテルです</a:t>
+              <a:t>部屋は狭めで設備も古いが、スタッフの応対も丁寧でウェルカムドリンクもあります</a:t>
             </a:r>
             <a:endParaRPr lang="en-US" sz="900" dirty="0"/>
           </a:p>
@@ -11772,7 +11772,7 @@
                 <a:ea typeface="Arial" pitchFamily="34" charset="-122"/>
                 <a:cs typeface="Arial" pitchFamily="34" charset="-120"/>
               </a:rPr>
-              <a:t>「アメニティはビジネスホテルとしては普通だと思います」</a:t>
+              <a:t>「7,000円で朝食ビュッフェ付きは格安かと思います また6:30から朝食可能でしたので、出発まで時間ない人はおすす...」</a:t>
             </a:r>
             <a:endParaRPr lang="en-US" sz="900" dirty="0"/>
           </a:p>
@@ -11956,7 +11956,7 @@
                 <a:ea typeface="Arial" pitchFamily="34" charset="-122"/>
                 <a:cs typeface="Arial" pitchFamily="34" charset="-120"/>
               </a:rPr>
-              <a:t>m(_ _)m レストラン</a:t>
+              <a:t>道向かいにコンビニがあり、近隣に美味しい飲食店も多く、中華街や赤レンガ等の観光地まで徒歩圏内</a:t>
             </a:r>
             <a:endParaRPr lang="en-US" sz="900" dirty="0"/>
           </a:p>
@@ -11995,7 +11995,7 @@
                 <a:ea typeface="Arial" pitchFamily="34" charset="-122"/>
                 <a:cs typeface="Arial" pitchFamily="34" charset="-120"/>
               </a:rPr>
-              <a:t>「レストラン工事でお弁当だったのが残念」</a:t>
+              <a:t>「m(_ _)m レストラン」</a:t>
             </a:r>
             <a:endParaRPr lang="en-US" sz="900" dirty="0"/>
           </a:p>
@@ -12685,7 +12685,7 @@
                           <a:ea typeface="Arial" pitchFamily="34" charset="-122"/>
                           <a:cs typeface="Arial" pitchFamily="34" charset="-120"/>
                         </a:rPr>
-                        <a:t>ただし，今回は改装工事でカフェが利用出来ず、朝食もおにぎり弁当の一択で残念</a:t>
+                        <a:t>まあそれはいいのですが、本件で不愉快な思いをしている宿泊客が多数存在するのは確実なのに、それと知りながら平気で行う...</a:t>
                       </a:r>
                       <a:endParaRPr lang="en-US" sz="900" dirty="0">
                         <a:latin typeface="Arial" charset="0"/>
@@ -12753,7 +12753,7 @@
                           <a:ea typeface="Arial" pitchFamily="34" charset="-122"/>
                           <a:cs typeface="Arial" pitchFamily="34" charset="-120"/>
                         </a:rPr>
-                        <a:t>23件</a:t>
+                        <a:t>24件</a:t>
                       </a:r>
                       <a:endParaRPr lang="en-US" sz="900" dirty="0">
                         <a:latin typeface="Arial" charset="0"/>
@@ -12959,7 +12959,7 @@
                           <a:ea typeface="Arial" pitchFamily="34" charset="-122"/>
                           <a:cs typeface="Arial" pitchFamily="34" charset="-120"/>
                         </a:rPr>
-                        <a:t>部屋は、少し狭いですが、清潔にされていました</a:t>
+                        <a:t>部屋は狭めで設備も古いが、スタッフの応対も丁寧でウェルカムドリンクもあります</a:t>
                       </a:r>
                       <a:endParaRPr lang="en-US" sz="900" dirty="0">
                         <a:latin typeface="Arial" charset="0"/>
@@ -13027,7 +13027,7 @@
                           <a:ea typeface="Arial" pitchFamily="34" charset="-122"/>
                           <a:cs typeface="Arial" pitchFamily="34" charset="-120"/>
                         </a:rPr>
-                        <a:t>8件</a:t>
+                        <a:t>9件</a:t>
                       </a:r>
                       <a:endParaRPr lang="en-US" sz="900" dirty="0">
                         <a:latin typeface="Arial" charset="0"/>
@@ -13165,7 +13165,7 @@
                           <a:ea typeface="Arial" pitchFamily="34" charset="-122"/>
                           <a:cs typeface="Arial" pitchFamily="34" charset="-120"/>
                         </a:rPr>
-                        <a:t>浴室・水回り</a:t>
+                        <a:t>防音性能</a:t>
                       </a:r>
                       <a:endParaRPr lang="en-US" sz="900" dirty="0">
                         <a:latin typeface="Arial" charset="0"/>
@@ -13233,7 +13233,7 @@
                           <a:ea typeface="Arial" pitchFamily="34" charset="-122"/>
                           <a:cs typeface="Arial" pitchFamily="34" charset="-120"/>
                         </a:rPr>
-                        <a:t>部屋着（バスローブ）はエレベーター前にあるのでそれを取って行くスタイルです</a:t>
+                        <a:t>予約時に見落としていたこちらのミスかもしれないが、内装工事しており、その関係で音がうるさく、朝食も弁当だった</a:t>
                       </a:r>
                       <a:endParaRPr lang="en-US" sz="900" dirty="0">
                         <a:latin typeface="Arial" charset="0"/>
@@ -13439,7 +13439,7 @@
                           <a:ea typeface="Arial" pitchFamily="34" charset="-122"/>
                           <a:cs typeface="Arial" pitchFamily="34" charset="-120"/>
                         </a:rPr>
-                        <a:t>防音性能</a:t>
+                        <a:t>浴室・水回り</a:t>
                       </a:r>
                       <a:endParaRPr lang="en-US" sz="900" dirty="0">
                         <a:latin typeface="Arial" charset="0"/>
@@ -13507,7 +13507,7 @@
                           <a:ea typeface="Arial" pitchFamily="34" charset="-122"/>
                           <a:cs typeface="Arial" pitchFamily="34" charset="-120"/>
                         </a:rPr>
-                        <a:t>工事中のため評価の高いカフェスペースや朝食バイキングが使用不可だったのは残念でしたし、アメニティが少ない点もありま...</a:t>
+                        <a:t>部屋着（バスローブ）はエレベーター前にあるのでそれを取って行くスタイルです</a:t>
                       </a:r>
                       <a:endParaRPr lang="en-US" sz="900" dirty="0">
                         <a:latin typeface="Arial" charset="0"/>
@@ -13575,7 +13575,7 @@
                           <a:ea typeface="Arial" pitchFamily="34" charset="-122"/>
                           <a:cs typeface="Arial" pitchFamily="34" charset="-120"/>
                         </a:rPr>
-                        <a:t>5件</a:t>
+                        <a:t>6件</a:t>
                       </a:r>
                       <a:endParaRPr lang="en-US" sz="900" dirty="0">
                         <a:latin typeface="Arial" charset="0"/>
@@ -13781,7 +13781,7 @@
                           <a:ea typeface="Arial" pitchFamily="34" charset="-122"/>
                           <a:cs typeface="Arial" pitchFamily="34" charset="-120"/>
                         </a:rPr>
-                        <a:t>ただホテル自体が年数が経ってるせいかちょっと古さ加減があったけど全然気にならない程度でした</a:t>
+                        <a:t>部屋は狭めで設備も古いが、スタッフの応対も丁寧でウェルカムドリンクもあります</a:t>
                       </a:r>
                       <a:endParaRPr lang="en-US" sz="900" dirty="0">
                         <a:latin typeface="Arial" charset="0"/>
@@ -13849,7 +13849,7 @@
                           <a:ea typeface="Arial" pitchFamily="34" charset="-122"/>
                           <a:cs typeface="Arial" pitchFamily="34" charset="-120"/>
                         </a:rPr>
-                        <a:t>3件</a:t>
+                        <a:t>4件</a:t>
                       </a:r>
                       <a:endParaRPr lang="en-US" sz="900" dirty="0">
                         <a:latin typeface="Arial" charset="0"/>
@@ -14055,7 +14055,7 @@
                           <a:ea typeface="Arial" pitchFamily="34" charset="-122"/>
                           <a:cs typeface="Arial" pitchFamily="34" charset="-120"/>
                         </a:rPr>
-                        <a:t>ビュッフェスタイルの朝食は廃止され、お弁当とおにぎりに置き換えられました。改装工事中で、一部は工事現場のようです。...</a:t>
+                        <a:t>スムージーや期間限定メニュー！】などと大々的に銘打ってありましたが、実際にはチェックイン時に「工事期間のため簡単な...</a:t>
                       </a:r>
                       <a:endParaRPr lang="en-US" sz="900" dirty="0">
                         <a:latin typeface="Arial" charset="0"/>
@@ -14123,7 +14123,7 @@
                           <a:ea typeface="Arial" pitchFamily="34" charset="-122"/>
                           <a:cs typeface="Arial" pitchFamily="34" charset="-120"/>
                         </a:rPr>
-                        <a:t>3件</a:t>
+                        <a:t>4件</a:t>
                       </a:r>
                       <a:endParaRPr lang="en-US" sz="900" dirty="0">
                         <a:latin typeface="Arial" charset="0"/>
@@ -14671,7 +14671,7 @@
                           <a:ea typeface="Arial" pitchFamily="34" charset="-122"/>
                           <a:cs typeface="Arial" pitchFamily="34" charset="-120"/>
                         </a:rPr>
-                        <a:t>2件</a:t>
+                        <a:t>1件</a:t>
                       </a:r>
                       <a:endParaRPr lang="en-US" sz="900" dirty="0">
                         <a:latin typeface="Arial" charset="0"/>

--- a/納品レポート/ホテル別レポート/comfort_yokohama_kannai_口コミ分析レポート.pptx
+++ b/納品レポート/ホテル別レポート/comfort_yokohama_kannai_口コミ分析レポート.pptx
@@ -183,19 +183,19 @@
                     <c:v>Trip.com</c:v>
                   </c:pt>
                   <c:pt idx="1">
+                    <c:v>Agoda</c:v>
+                  </c:pt>
+                  <c:pt idx="2">
+                    <c:v>Google</c:v>
+                  </c:pt>
+                  <c:pt idx="3">
                     <c:v>楽天トラベル</c:v>
                   </c:pt>
-                  <c:pt idx="2">
-                    <c:v>Agoda</c:v>
-                  </c:pt>
-                  <c:pt idx="3">
+                  <c:pt idx="4">
                     <c:v>Booking.com</c:v>
                   </c:pt>
-                  <c:pt idx="4">
+                  <c:pt idx="5">
                     <c:v>じゃらん</c:v>
-                  </c:pt>
-                  <c:pt idx="5">
-                    <c:v>Google</c:v>
                   </c:pt>
                 </c:lvl>
               </c:multiLvlStrCache>
@@ -208,22 +208,22 @@
                 <c:formatCode>General</c:formatCode>
                 <c:ptCount val="6"/>
                 <c:pt idx="0">
-                  <c:v>8.42</c:v>
+                  <c:v>8.32</c:v>
                 </c:pt>
                 <c:pt idx="1">
-                  <c:v>7.56</c:v>
+                  <c:v>7.43</c:v>
                 </c:pt>
                 <c:pt idx="2">
                   <c:v>7.43</c:v>
                 </c:pt>
                 <c:pt idx="3">
-                  <c:v>7.42</c:v>
+                  <c:v>7.4</c:v>
                 </c:pt>
                 <c:pt idx="4">
-                  <c:v>6.95</c:v>
+                  <c:v>7.07</c:v>
                 </c:pt>
                 <c:pt idx="5">
-                  <c:v>6.8</c:v>
+                  <c:v>7</c:v>
                 </c:pt>
               </c:numCache>
             </c:numRef>
@@ -566,13 +566,13 @@
               <c:numCache>
                 <c:ptCount val="3"/>
                 <c:pt idx="0">
-                  <c:v>98</c:v>
+                  <c:v>96</c:v>
                 </c:pt>
                 <c:pt idx="1">
-                  <c:v>24</c:v>
+                  <c:v>26</c:v>
                 </c:pt>
                 <c:pt idx="2">
-                  <c:v>19</c:v>
+                  <c:v>20</c:v>
                 </c:pt>
               </c:numCache>
             </c:numRef>
@@ -823,25 +823,25 @@
                 <c:formatCode>General</c:formatCode>
                 <c:ptCount val="9"/>
                 <c:pt idx="0">
-                  <c:v>30</c:v>
+                  <c:v>31</c:v>
                 </c:pt>
                 <c:pt idx="1">
-                  <c:v>8</c:v>
+                  <c:v>7</c:v>
                 </c:pt>
                 <c:pt idx="2">
-                  <c:v>60</c:v>
+                  <c:v>58</c:v>
                 </c:pt>
                 <c:pt idx="3">
-                  <c:v>5</c:v>
+                  <c:v>4</c:v>
                 </c:pt>
                 <c:pt idx="4">
-                  <c:v>13</c:v>
+                  <c:v>16</c:v>
                 </c:pt>
                 <c:pt idx="5">
                   <c:v>6</c:v>
                 </c:pt>
                 <c:pt idx="6">
-                  <c:v>9</c:v>
+                  <c:v>10</c:v>
                 </c:pt>
                 <c:pt idx="7">
                   <c:v>1</c:v>
@@ -2798,7 +2798,7 @@
                 <a:ea typeface="Arial" pitchFamily="34" charset="-122"/>
                 <a:cs typeface="Arial" pitchFamily="34" charset="-120"/>
               </a:rPr>
-              <a:t>レビュー総数：141件（6サイト）</a:t>
+              <a:t>レビュー総数：142件（6サイト）</a:t>
             </a:r>
             <a:endParaRPr lang="en-US" sz="1000" dirty="0"/>
           </a:p>
@@ -2818,7 +2818,7 @@
                 <a:ea typeface="Arial" pitchFamily="34" charset="-122"/>
                 <a:cs typeface="Arial" pitchFamily="34" charset="-120"/>
               </a:rPr>
-              <a:t>作成日：2026年3月21日</a:t>
+              <a:t>作成日：2026年3月23日</a:t>
             </a:r>
             <a:endParaRPr lang="en-US" sz="1000" dirty="0"/>
           </a:p>
@@ -3364,7 +3364,7 @@
                           <a:ea typeface="Arial" pitchFamily="34" charset="-122"/>
                           <a:cs typeface="Arial" pitchFamily="34" charset="-120"/>
                         </a:rPr>
-                        <a:t>7.46点</a:t>
+                        <a:t>7.41点</a:t>
                       </a:r>
                       <a:endParaRPr lang="en-US" sz="1000" dirty="0">
                         <a:latin typeface="Arial" charset="0"/>
@@ -3432,7 +3432,7 @@
                           <a:ea typeface="Arial" pitchFamily="34" charset="-122"/>
                           <a:cs typeface="Arial" pitchFamily="34" charset="-120"/>
                         </a:rPr>
-                        <a:t>8.0点以上</a:t>
+                        <a:t>7.9点以上</a:t>
                       </a:r>
                       <a:endParaRPr lang="en-US" sz="1000" dirty="0">
                         <a:latin typeface="Arial" charset="0"/>
@@ -3638,7 +3638,7 @@
                           <a:ea typeface="Arial" pitchFamily="34" charset="-122"/>
                           <a:cs typeface="Arial" pitchFamily="34" charset="-120"/>
                         </a:rPr>
-                        <a:t>69.5%</a:t>
+                        <a:t>67.6%</a:t>
                       </a:r>
                       <a:endParaRPr lang="en-US" sz="1000" dirty="0">
                         <a:latin typeface="Arial" charset="0"/>
@@ -3706,7 +3706,7 @@
                           <a:ea typeface="Arial" pitchFamily="34" charset="-122"/>
                           <a:cs typeface="Arial" pitchFamily="34" charset="-120"/>
                         </a:rPr>
-                        <a:t>80%以上</a:t>
+                        <a:t>78%以上</a:t>
                       </a:r>
                       <a:endParaRPr lang="en-US" sz="1000" dirty="0">
                         <a:latin typeface="Arial" charset="0"/>
@@ -3912,7 +3912,7 @@
                           <a:ea typeface="Arial" pitchFamily="34" charset="-122"/>
                           <a:cs typeface="Arial" pitchFamily="34" charset="-120"/>
                         </a:rPr>
-                        <a:t>13.5%</a:t>
+                        <a:t>14.1%</a:t>
                       </a:r>
                       <a:endParaRPr lang="en-US" sz="1000" dirty="0">
                         <a:latin typeface="Arial" charset="0"/>
@@ -4118,280 +4118,6 @@
                           <a:ea typeface="Arial" pitchFamily="34" charset="-122"/>
                           <a:cs typeface="Arial" pitchFamily="34" charset="-120"/>
                         </a:rPr>
-                        <a:t>Google平均評価</a:t>
-                      </a:r>
-                      <a:endParaRPr lang="en-US" sz="1000" dirty="0">
-                        <a:latin typeface="Arial" charset="0"/>
-                        <a:ea typeface="Arial" charset="0"/>
-                        <a:cs typeface="Arial" charset="0"/>
-                      </a:endParaRPr>
-                    </a:p>
-                  </a:txBody>
-                  <a:tcPr marL="91440" marR="91440" marT="45720" marB="45720">
-                    <a:lnL w="6350" cap="flat" cmpd="sng" algn="ctr">
-                      <a:solidFill>
-                        <a:srgbClr val="CBD5E1"/>
-                      </a:solidFill>
-                      <a:prstDash val="solid"/>
-                      <a:round/>
-                      <a:headEnd type="none" w="med" len="med"/>
-                      <a:tailEnd type="none" w="med" len="med"/>
-                    </a:lnL>
-                    <a:lnR w="6350" cap="flat" cmpd="sng" algn="ctr">
-                      <a:solidFill>
-                        <a:srgbClr val="CBD5E1"/>
-                      </a:solidFill>
-                      <a:prstDash val="solid"/>
-                      <a:round/>
-                      <a:headEnd type="none" w="med" len="med"/>
-                      <a:tailEnd type="none" w="med" len="med"/>
-                    </a:lnR>
-                    <a:lnT w="6350" cap="flat" cmpd="sng" algn="ctr">
-                      <a:solidFill>
-                        <a:srgbClr val="CBD5E1"/>
-                      </a:solidFill>
-                      <a:prstDash val="solid"/>
-                      <a:round/>
-                      <a:headEnd type="none" w="med" len="med"/>
-                      <a:tailEnd type="none" w="med" len="med"/>
-                    </a:lnT>
-                    <a:lnB w="6350" cap="flat" cmpd="sng" algn="ctr">
-                      <a:solidFill>
-                        <a:srgbClr val="CBD5E1"/>
-                      </a:solidFill>
-                      <a:prstDash val="solid"/>
-                      <a:round/>
-                      <a:headEnd type="none" w="med" len="med"/>
-                      <a:tailEnd type="none" w="med" len="med"/>
-                    </a:lnB>
-                    <a:solidFill>
-                      <a:srgbClr val="FFFFFF"/>
-                    </a:solidFill>
-                  </a:tcPr>
-                </a:tc>
-                <a:tc>
-                  <a:txBody>
-                    <a:bodyPr/>
-                    <a:lstStyle/>
-                    <a:p>
-                      <a:pPr algn="ctr" indent="0" marL="0">
-                        <a:buNone/>
-                      </a:pPr>
-                      <a:r>
-                        <a:rPr lang="en-US" sz="1000" dirty="0">
-                          <a:solidFill>
-                            <a:srgbClr val="64748B"/>
-                          </a:solidFill>
-                          <a:latin typeface="Arial" pitchFamily="34" charset="0"/>
-                          <a:ea typeface="Arial" pitchFamily="34" charset="-122"/>
-                          <a:cs typeface="Arial" pitchFamily="34" charset="-120"/>
-                        </a:rPr>
-                        <a:t>6.8点</a:t>
-                      </a:r>
-                      <a:endParaRPr lang="en-US" sz="1000" dirty="0">
-                        <a:latin typeface="Arial" charset="0"/>
-                        <a:ea typeface="Arial" charset="0"/>
-                        <a:cs typeface="Arial" charset="0"/>
-                      </a:endParaRPr>
-                    </a:p>
-                  </a:txBody>
-                  <a:tcPr marL="91440" marR="91440" marT="45720" marB="45720">
-                    <a:lnL w="6350" cap="flat" cmpd="sng" algn="ctr">
-                      <a:solidFill>
-                        <a:srgbClr val="CBD5E1"/>
-                      </a:solidFill>
-                      <a:prstDash val="solid"/>
-                      <a:round/>
-                      <a:headEnd type="none" w="med" len="med"/>
-                      <a:tailEnd type="none" w="med" len="med"/>
-                    </a:lnL>
-                    <a:lnR w="6350" cap="flat" cmpd="sng" algn="ctr">
-                      <a:solidFill>
-                        <a:srgbClr val="CBD5E1"/>
-                      </a:solidFill>
-                      <a:prstDash val="solid"/>
-                      <a:round/>
-                      <a:headEnd type="none" w="med" len="med"/>
-                      <a:tailEnd type="none" w="med" len="med"/>
-                    </a:lnR>
-                    <a:lnT w="6350" cap="flat" cmpd="sng" algn="ctr">
-                      <a:solidFill>
-                        <a:srgbClr val="CBD5E1"/>
-                      </a:solidFill>
-                      <a:prstDash val="solid"/>
-                      <a:round/>
-                      <a:headEnd type="none" w="med" len="med"/>
-                      <a:tailEnd type="none" w="med" len="med"/>
-                    </a:lnT>
-                    <a:lnB w="6350" cap="flat" cmpd="sng" algn="ctr">
-                      <a:solidFill>
-                        <a:srgbClr val="CBD5E1"/>
-                      </a:solidFill>
-                      <a:prstDash val="solid"/>
-                      <a:round/>
-                      <a:headEnd type="none" w="med" len="med"/>
-                      <a:tailEnd type="none" w="med" len="med"/>
-                    </a:lnB>
-                    <a:solidFill>
-                      <a:srgbClr val="FFFFFF"/>
-                    </a:solidFill>
-                  </a:tcPr>
-                </a:tc>
-                <a:tc>
-                  <a:txBody>
-                    <a:bodyPr/>
-                    <a:lstStyle/>
-                    <a:p>
-                      <a:pPr algn="ctr" indent="0" marL="0">
-                        <a:buNone/>
-                      </a:pPr>
-                      <a:r>
-                        <a:rPr lang="en-US" sz="1000" b="1" dirty="0">
-                          <a:solidFill>
-                            <a:srgbClr val="16A34A"/>
-                          </a:solidFill>
-                          <a:latin typeface="Arial" pitchFamily="34" charset="0"/>
-                          <a:ea typeface="Arial" pitchFamily="34" charset="-122"/>
-                          <a:cs typeface="Arial" pitchFamily="34" charset="-120"/>
-                        </a:rPr>
-                        <a:t>7.8点以上</a:t>
-                      </a:r>
-                      <a:endParaRPr lang="en-US" sz="1000" dirty="0">
-                        <a:latin typeface="Arial" charset="0"/>
-                        <a:ea typeface="Arial" charset="0"/>
-                        <a:cs typeface="Arial" charset="0"/>
-                      </a:endParaRPr>
-                    </a:p>
-                  </a:txBody>
-                  <a:tcPr marL="91440" marR="91440" marT="45720" marB="45720">
-                    <a:lnL w="6350" cap="flat" cmpd="sng" algn="ctr">
-                      <a:solidFill>
-                        <a:srgbClr val="CBD5E1"/>
-                      </a:solidFill>
-                      <a:prstDash val="solid"/>
-                      <a:round/>
-                      <a:headEnd type="none" w="med" len="med"/>
-                      <a:tailEnd type="none" w="med" len="med"/>
-                    </a:lnL>
-                    <a:lnR w="6350" cap="flat" cmpd="sng" algn="ctr">
-                      <a:solidFill>
-                        <a:srgbClr val="CBD5E1"/>
-                      </a:solidFill>
-                      <a:prstDash val="solid"/>
-                      <a:round/>
-                      <a:headEnd type="none" w="med" len="med"/>
-                      <a:tailEnd type="none" w="med" len="med"/>
-                    </a:lnR>
-                    <a:lnT w="6350" cap="flat" cmpd="sng" algn="ctr">
-                      <a:solidFill>
-                        <a:srgbClr val="CBD5E1"/>
-                      </a:solidFill>
-                      <a:prstDash val="solid"/>
-                      <a:round/>
-                      <a:headEnd type="none" w="med" len="med"/>
-                      <a:tailEnd type="none" w="med" len="med"/>
-                    </a:lnT>
-                    <a:lnB w="6350" cap="flat" cmpd="sng" algn="ctr">
-                      <a:solidFill>
-                        <a:srgbClr val="CBD5E1"/>
-                      </a:solidFill>
-                      <a:prstDash val="solid"/>
-                      <a:round/>
-                      <a:headEnd type="none" w="med" len="med"/>
-                      <a:tailEnd type="none" w="med" len="med"/>
-                    </a:lnB>
-                    <a:solidFill>
-                      <a:srgbClr val="FFFFFF"/>
-                    </a:solidFill>
-                  </a:tcPr>
-                </a:tc>
-                <a:tc>
-                  <a:txBody>
-                    <a:bodyPr/>
-                    <a:lstStyle/>
-                    <a:p>
-                      <a:pPr algn="ctr" indent="0" marL="0">
-                        <a:buNone/>
-                      </a:pPr>
-                      <a:r>
-                        <a:rPr lang="en-US" sz="1000" dirty="0">
-                          <a:solidFill>
-                            <a:srgbClr val="64748B"/>
-                          </a:solidFill>
-                          <a:latin typeface="Arial" pitchFamily="34" charset="0"/>
-                          <a:ea typeface="Arial" pitchFamily="34" charset="-122"/>
-                          <a:cs typeface="Arial" pitchFamily="34" charset="-120"/>
-                        </a:rPr>
-                        <a:t>2026年9月</a:t>
-                      </a:r>
-                      <a:endParaRPr lang="en-US" sz="1000" dirty="0">
-                        <a:latin typeface="Arial" charset="0"/>
-                        <a:ea typeface="Arial" charset="0"/>
-                        <a:cs typeface="Arial" charset="0"/>
-                      </a:endParaRPr>
-                    </a:p>
-                  </a:txBody>
-                  <a:tcPr marL="91440" marR="91440" marT="45720" marB="45720">
-                    <a:lnL w="6350" cap="flat" cmpd="sng" algn="ctr">
-                      <a:solidFill>
-                        <a:srgbClr val="CBD5E1"/>
-                      </a:solidFill>
-                      <a:prstDash val="solid"/>
-                      <a:round/>
-                      <a:headEnd type="none" w="med" len="med"/>
-                      <a:tailEnd type="none" w="med" len="med"/>
-                    </a:lnL>
-                    <a:lnR w="6350" cap="flat" cmpd="sng" algn="ctr">
-                      <a:solidFill>
-                        <a:srgbClr val="CBD5E1"/>
-                      </a:solidFill>
-                      <a:prstDash val="solid"/>
-                      <a:round/>
-                      <a:headEnd type="none" w="med" len="med"/>
-                      <a:tailEnd type="none" w="med" len="med"/>
-                    </a:lnR>
-                    <a:lnT w="6350" cap="flat" cmpd="sng" algn="ctr">
-                      <a:solidFill>
-                        <a:srgbClr val="CBD5E1"/>
-                      </a:solidFill>
-                      <a:prstDash val="solid"/>
-                      <a:round/>
-                      <a:headEnd type="none" w="med" len="med"/>
-                      <a:tailEnd type="none" w="med" len="med"/>
-                    </a:lnT>
-                    <a:lnB w="6350" cap="flat" cmpd="sng" algn="ctr">
-                      <a:solidFill>
-                        <a:srgbClr val="CBD5E1"/>
-                      </a:solidFill>
-                      <a:prstDash val="solid"/>
-                      <a:round/>
-                      <a:headEnd type="none" w="med" len="med"/>
-                      <a:tailEnd type="none" w="med" len="med"/>
-                    </a:lnB>
-                    <a:solidFill>
-                      <a:srgbClr val="FFFFFF"/>
-                    </a:solidFill>
-                  </a:tcPr>
-                </a:tc>
-              </a:tr>
-              <a:tr h="320040">
-                <a:tc>
-                  <a:txBody>
-                    <a:bodyPr/>
-                    <a:lstStyle/>
-                    <a:p>
-                      <a:pPr indent="0" marL="0">
-                        <a:buNone/>
-                      </a:pPr>
-                      <a:r>
-                        <a:rPr lang="en-US" sz="1000" b="1" dirty="0">
-                          <a:solidFill>
-                            <a:srgbClr val="334155"/>
-                          </a:solidFill>
-                          <a:latin typeface="Arial" pitchFamily="34" charset="0"/>
-                          <a:ea typeface="Arial" pitchFamily="34" charset="-122"/>
-                          <a:cs typeface="Arial" pitchFamily="34" charset="-120"/>
-                        </a:rPr>
                         <a:t>口コミ返信率</a:t>
                       </a:r>
                       <a:endParaRPr lang="en-US" sz="1000" dirty="0">
@@ -4439,7 +4165,7 @@
                       <a:tailEnd type="none" w="med" len="med"/>
                     </a:lnB>
                     <a:solidFill>
-                      <a:srgbClr val="E8EFF8"/>
+                      <a:srgbClr val="FFFFFF"/>
                     </a:solidFill>
                   </a:tcPr>
                 </a:tc>
@@ -4507,7 +4233,7 @@
                       <a:tailEnd type="none" w="med" len="med"/>
                     </a:lnB>
                     <a:solidFill>
-                      <a:srgbClr val="E8EFF8"/>
+                      <a:srgbClr val="FFFFFF"/>
                     </a:solidFill>
                   </a:tcPr>
                 </a:tc>
@@ -4575,7 +4301,7 @@
                       <a:tailEnd type="none" w="med" len="med"/>
                     </a:lnB>
                     <a:solidFill>
-                      <a:srgbClr val="E8EFF8"/>
+                      <a:srgbClr val="FFFFFF"/>
                     </a:solidFill>
                   </a:tcPr>
                 </a:tc>
@@ -4643,7 +4369,7 @@
                       <a:tailEnd type="none" w="med" len="med"/>
                     </a:lnB>
                     <a:solidFill>
-                      <a:srgbClr val="E8EFF8"/>
+                      <a:srgbClr val="FFFFFF"/>
                     </a:solidFill>
                   </a:tcPr>
                 </a:tc>
@@ -4713,7 +4439,7 @@
                       <a:tailEnd type="none" w="med" len="med"/>
                     </a:lnB>
                     <a:solidFill>
-                      <a:srgbClr val="FFFFFF"/>
+                      <a:srgbClr val="E8EFF8"/>
                     </a:solidFill>
                   </a:tcPr>
                 </a:tc>
@@ -4734,7 +4460,7 @@
                           <a:ea typeface="Arial" pitchFamily="34" charset="-122"/>
                           <a:cs typeface="Arial" pitchFamily="34" charset="-120"/>
                         </a:rPr>
-                        <a:t>約24件/期間</a:t>
+                        <a:t>約28件/期間</a:t>
                       </a:r>
                       <a:endParaRPr lang="en-US" sz="1000" dirty="0">
                         <a:latin typeface="Arial" charset="0"/>
@@ -4781,7 +4507,7 @@
                       <a:tailEnd type="none" w="med" len="med"/>
                     </a:lnB>
                     <a:solidFill>
-                      <a:srgbClr val="FFFFFF"/>
+                      <a:srgbClr val="E8EFF8"/>
                     </a:solidFill>
                   </a:tcPr>
                 </a:tc>
@@ -4802,7 +4528,7 @@
                           <a:ea typeface="Arial" pitchFamily="34" charset="-122"/>
                           <a:cs typeface="Arial" pitchFamily="34" charset="-120"/>
                         </a:rPr>
-                        <a:t>12件以下</a:t>
+                        <a:t>14件以下</a:t>
                       </a:r>
                       <a:endParaRPr lang="en-US" sz="1000" dirty="0">
                         <a:latin typeface="Arial" charset="0"/>
@@ -4849,7 +4575,7 @@
                       <a:tailEnd type="none" w="med" len="med"/>
                     </a:lnB>
                     <a:solidFill>
-                      <a:srgbClr val="FFFFFF"/>
+                      <a:srgbClr val="E8EFF8"/>
                     </a:solidFill>
                   </a:tcPr>
                 </a:tc>
@@ -4917,7 +4643,7 @@
                       <a:tailEnd type="none" w="med" len="med"/>
                     </a:lnB>
                     <a:solidFill>
-                      <a:srgbClr val="FFFFFF"/>
+                      <a:srgbClr val="E8EFF8"/>
                     </a:solidFill>
                   </a:tcPr>
                 </a:tc>
@@ -4934,7 +4660,7 @@
         </p:nvSpPr>
         <p:spPr>
           <a:xfrm>
-            <a:off x="457200" y="3429000"/>
+            <a:off x="457200" y="3108960"/>
             <a:ext cx="8229600" cy="640080"/>
           </a:xfrm>
           <a:prstGeom prst="rect">
@@ -4961,7 +4687,7 @@
         </p:nvSpPr>
         <p:spPr>
           <a:xfrm>
-            <a:off x="457200" y="3429000"/>
+            <a:off x="457200" y="3108960"/>
             <a:ext cx="54864" cy="640080"/>
           </a:xfrm>
           <a:prstGeom prst="rect">
@@ -4981,7 +4707,7 @@
         </p:nvSpPr>
         <p:spPr>
           <a:xfrm>
-            <a:off x="640080" y="3429000"/>
+            <a:off x="640080" y="3108960"/>
             <a:ext cx="7863840" cy="640080"/>
           </a:xfrm>
           <a:prstGeom prst="rect">
@@ -5373,7 +5099,7 @@
                 <a:ea typeface="Arial" pitchFamily="34" charset="-122"/>
                 <a:cs typeface="Arial" pitchFamily="34" charset="-120"/>
               </a:rPr>
-              <a:t>7.46</a:t>
+              <a:t>7.41</a:t>
             </a:r>
             <a:endParaRPr lang="en-US" sz="3200" dirty="0"/>
           </a:p>
@@ -5498,7 +5224,7 @@
                 <a:ea typeface="Arial" pitchFamily="34" charset="-122"/>
                 <a:cs typeface="Arial" pitchFamily="34" charset="-120"/>
               </a:rPr>
-              <a:t>69.5%</a:t>
+              <a:t>67.6%</a:t>
             </a:r>
             <a:endParaRPr lang="en-US" sz="3200" dirty="0"/>
           </a:p>
@@ -5623,7 +5349,7 @@
                 <a:ea typeface="Arial" pitchFamily="34" charset="-122"/>
                 <a:cs typeface="Arial" pitchFamily="34" charset="-120"/>
               </a:rPr>
-              <a:t>13.5%</a:t>
+              <a:t>14.1%</a:t>
             </a:r>
             <a:endParaRPr lang="en-US" sz="3200" dirty="0"/>
           </a:p>
@@ -5748,7 +5474,7 @@
                 <a:ea typeface="Arial" pitchFamily="34" charset="-122"/>
                 <a:cs typeface="Arial" pitchFamily="34" charset="-120"/>
               </a:rPr>
-              <a:t>141件</a:t>
+              <a:t>142件</a:t>
             </a:r>
             <a:endParaRPr lang="en-US" sz="3200" dirty="0"/>
           </a:p>
@@ -5896,7 +5622,7 @@
                 <a:ea typeface="Arial" pitchFamily="34" charset="-122"/>
                 <a:cs typeface="Arial" pitchFamily="34" charset="-120"/>
               </a:rPr>
-              <a:t>  予約時に見落としていたこちらのミスかもしれないが、内装工事しており、その関係で音がうるさく、朝食も弁当だった</a:t>
+              <a:t>  部屋も広く、快適でした ホテルが改装中が残念で、朝食がバイキングでないのが、残念でした</a:t>
             </a:r>
             <a:endParaRPr lang="en-US" sz="1100" dirty="0"/>
           </a:p>
@@ -5936,7 +5662,7 @@
                 <a:ea typeface="Arial" pitchFamily="34" charset="-122"/>
                 <a:cs typeface="Arial" pitchFamily="34" charset="-120"/>
               </a:rPr>
-              <a:t>  立地もいいですし、客層もまずまず</a:t>
+              <a:t>  観光としての立地は凄くいいともう 部屋が思っていた以上に狭い  タオルかける場所がない  ユニットバスが狭すぎる ...</a:t>
             </a:r>
             <a:endParaRPr lang="en-US" sz="1100" dirty="0"/>
           </a:p>
@@ -5976,7 +5702,7 @@
                 <a:ea typeface="Arial" pitchFamily="34" charset="-122"/>
                 <a:cs typeface="Arial" pitchFamily="34" charset="-120"/>
               </a:rPr>
-              <a:t>  部屋は狭めで設備も古いが、スタッフの応対も丁寧でウェルカムドリンクもあります</a:t>
+              <a:t>  チェックインは機械で行いますが、スタッフがいつでも対応してくれるので安心です</a:t>
             </a:r>
             <a:endParaRPr lang="en-US" sz="1100" dirty="0"/>
           </a:p>
@@ -6124,7 +5850,7 @@
                 <a:ea typeface="Arial" pitchFamily="34" charset="-122"/>
                 <a:cs typeface="Arial" pitchFamily="34" charset="-120"/>
               </a:rPr>
-              <a:t>  まあそれはいいのですが、本件で不愉快な思いをしている宿泊客が多数存在するのは確実なのに、それと知りながら平気で行う...</a:t>
+              <a:t>  部屋も広く、快適でした ホテルが改装中が残念で、朝食がバイキングでないのが、残念でした</a:t>
             </a:r>
             <a:endParaRPr lang="en-US" sz="1100" dirty="0"/>
           </a:p>
@@ -6164,7 +5890,7 @@
                 <a:ea typeface="Arial" pitchFamily="34" charset="-122"/>
                 <a:cs typeface="Arial" pitchFamily="34" charset="-120"/>
               </a:rPr>
-              <a:t>  部屋は狭めで設備も古いが、スタッフの応対も丁寧でウェルカムドリンクもあります</a:t>
+              <a:t>  ダブルルーム（大型ベッド1台）でも、28インチのスーツケース2個と機内持ち込みサイズのスーツケース2個を壁際に立て...</a:t>
             </a:r>
             <a:endParaRPr lang="en-US" sz="1100" dirty="0"/>
           </a:p>
@@ -6184,7 +5910,7 @@
                 <a:ea typeface="Arial" pitchFamily="34" charset="-122"/>
                 <a:cs typeface="Arial" pitchFamily="34" charset="-120"/>
               </a:rPr>
-              <a:t>防音性能 </a:t>
+              <a:t>浴室・水回り </a:t>
             </a:r>
             <a:endParaRPr lang="en-US" sz="1100" dirty="0"/>
           </a:p>
@@ -6204,7 +5930,7 @@
                 <a:ea typeface="Arial" pitchFamily="34" charset="-122"/>
                 <a:cs typeface="Arial" pitchFamily="34" charset="-120"/>
               </a:rPr>
-              <a:t>  予約時に見落としていたこちらのミスかもしれないが、内装工事しており、その関係で音がうるさく、朝食も弁当だった</a:t>
+              <a:t>  嫌な臭いは一切なく、カーペット、カーテン、そしてバスルームまでピカピカでした</a:t>
             </a:r>
             <a:endParaRPr lang="en-US" sz="1100" dirty="0"/>
           </a:p>
@@ -6557,7 +6283,7 @@
                 <a:ea typeface="Arial" pitchFamily="34" charset="-122"/>
                 <a:cs typeface="Arial" pitchFamily="34" charset="-120"/>
               </a:rPr>
-              <a:t>7.46</a:t>
+              <a:t>7.41</a:t>
             </a:r>
             <a:endParaRPr lang="en-US" sz="3200" dirty="0"/>
           </a:p>
@@ -6682,7 +6408,7 @@
                 <a:ea typeface="Arial" pitchFamily="34" charset="-122"/>
                 <a:cs typeface="Arial" pitchFamily="34" charset="-120"/>
               </a:rPr>
-              <a:t>69.5%</a:t>
+              <a:t>67.6%</a:t>
             </a:r>
             <a:endParaRPr lang="en-US" sz="3200" dirty="0"/>
           </a:p>
@@ -6807,7 +6533,7 @@
                 <a:ea typeface="Arial" pitchFamily="34" charset="-122"/>
                 <a:cs typeface="Arial" pitchFamily="34" charset="-120"/>
               </a:rPr>
-              <a:t>13.5%</a:t>
+              <a:t>14.1%</a:t>
             </a:r>
             <a:endParaRPr lang="en-US" sz="3200" dirty="0"/>
           </a:p>
@@ -6932,7 +6658,7 @@
                 <a:ea typeface="Arial" pitchFamily="34" charset="-122"/>
                 <a:cs typeface="Arial" pitchFamily="34" charset="-120"/>
               </a:rPr>
-              <a:t>141件</a:t>
+              <a:t>142件</a:t>
             </a:r>
             <a:endParaRPr lang="en-US" sz="3200" dirty="0"/>
           </a:p>
@@ -7353,56 +7079,7 @@
                 <a:ea typeface="Arial" pitchFamily="34" charset="-122"/>
                 <a:cs typeface="Arial" pitchFamily="34" charset="-120"/>
               </a:rPr>
-              <a:t>Trip.com(8.42)が最高スコア。</a:t>
-            </a:r>
-            <a:endParaRPr lang="en-US" sz="1100" dirty="0"/>
-          </a:p>
-          <a:p>
-            <a:pPr indent="0" marL="0">
-              <a:spcAft>
-                <a:spcPts val="200"/>
-              </a:spcAft>
-              <a:buNone/>
-            </a:pPr>
-            <a:endParaRPr lang="en-US" sz="1100" dirty="0"/>
-          </a:p>
-          <a:p>
-            <a:pPr indent="0" marL="0">
-              <a:spcAft>
-                <a:spcPts val="200"/>
-              </a:spcAft>
-              <a:buNone/>
-            </a:pPr>
-            <a:r>
-              <a:rPr lang="en-US" sz="1100" b="1" dirty="0">
-                <a:solidFill>
-                  <a:srgbClr val="DC2626"/>
-                </a:solidFill>
-                <a:latin typeface="Arial" pitchFamily="34" charset="0"/>
-                <a:ea typeface="Arial" pitchFamily="34" charset="-122"/>
-                <a:cs typeface="Arial" pitchFamily="34" charset="-120"/>
-              </a:rPr>
-              <a:t>改善対象サイト</a:t>
-            </a:r>
-            <a:endParaRPr lang="en-US" sz="1100" dirty="0"/>
-          </a:p>
-          <a:p>
-            <a:pPr indent="0" marL="0">
-              <a:spcAft>
-                <a:spcPts val="200"/>
-              </a:spcAft>
-              <a:buNone/>
-            </a:pPr>
-            <a:r>
-              <a:rPr lang="en-US" sz="900" dirty="0">
-                <a:solidFill>
-                  <a:srgbClr val="64748B"/>
-                </a:solidFill>
-                <a:latin typeface="Arial" pitchFamily="34" charset="0"/>
-                <a:ea typeface="Arial" pitchFamily="34" charset="-122"/>
-                <a:cs typeface="Arial" pitchFamily="34" charset="-120"/>
-              </a:rPr>
-              <a:t>Google(6.8)が相対的に低い。口コミ返信の強化が急務</a:t>
+              <a:t>Trip.com(8.32)が最高スコア。</a:t>
             </a:r>
             <a:endParaRPr lang="en-US" sz="1100" dirty="0"/>
           </a:p>
@@ -7979,7 +7656,7 @@
                           <a:ea typeface="Arial" pitchFamily="34" charset="-122"/>
                           <a:cs typeface="Arial" pitchFamily="34" charset="-120"/>
                         </a:rPr>
-                        <a:t>8.42</a:t>
+                        <a:t>8.32</a:t>
                       </a:r>
                       <a:endParaRPr lang="en-US" sz="900" dirty="0">
                         <a:latin typeface="Arial" charset="0"/>
@@ -8115,7 +7792,691 @@
                           <a:ea typeface="Arial" pitchFamily="34" charset="-122"/>
                           <a:cs typeface="Arial" pitchFamily="34" charset="-120"/>
                         </a:rPr>
-                        <a:t>8.42</a:t>
+                        <a:t>8.32</a:t>
+                      </a:r>
+                      <a:endParaRPr lang="en-US" sz="900" dirty="0">
+                        <a:latin typeface="Arial" charset="0"/>
+                        <a:ea typeface="Arial" charset="0"/>
+                        <a:cs typeface="Arial" charset="0"/>
+                      </a:endParaRPr>
+                    </a:p>
+                  </a:txBody>
+                  <a:tcPr marL="91440" marR="91440" marT="45720" marB="45720">
+                    <a:lnL w="6350" cap="flat" cmpd="sng" algn="ctr">
+                      <a:solidFill>
+                        <a:srgbClr val="CBD5E1"/>
+                      </a:solidFill>
+                      <a:prstDash val="solid"/>
+                      <a:round/>
+                      <a:headEnd type="none" w="med" len="med"/>
+                      <a:tailEnd type="none" w="med" len="med"/>
+                    </a:lnL>
+                    <a:lnR w="6350" cap="flat" cmpd="sng" algn="ctr">
+                      <a:solidFill>
+                        <a:srgbClr val="CBD5E1"/>
+                      </a:solidFill>
+                      <a:prstDash val="solid"/>
+                      <a:round/>
+                      <a:headEnd type="none" w="med" len="med"/>
+                      <a:tailEnd type="none" w="med" len="med"/>
+                    </a:lnR>
+                    <a:lnT w="6350" cap="flat" cmpd="sng" algn="ctr">
+                      <a:solidFill>
+                        <a:srgbClr val="CBD5E1"/>
+                      </a:solidFill>
+                      <a:prstDash val="solid"/>
+                      <a:round/>
+                      <a:headEnd type="none" w="med" len="med"/>
+                      <a:tailEnd type="none" w="med" len="med"/>
+                    </a:lnT>
+                    <a:lnB w="6350" cap="flat" cmpd="sng" algn="ctr">
+                      <a:solidFill>
+                        <a:srgbClr val="CBD5E1"/>
+                      </a:solidFill>
+                      <a:prstDash val="solid"/>
+                      <a:round/>
+                      <a:headEnd type="none" w="med" len="med"/>
+                      <a:tailEnd type="none" w="med" len="med"/>
+                    </a:lnB>
+                    <a:solidFill>
+                      <a:srgbClr val="E8EFF8"/>
+                    </a:solidFill>
+                  </a:tcPr>
+                </a:tc>
+              </a:tr>
+              <a:tr h="201168">
+                <a:tc>
+                  <a:txBody>
+                    <a:bodyPr/>
+                    <a:lstStyle/>
+                    <a:p>
+                      <a:pPr algn="ctr" indent="0" marL="0">
+                        <a:buNone/>
+                      </a:pPr>
+                      <a:r>
+                        <a:rPr lang="en-US" sz="900" dirty="0">
+                          <a:solidFill>
+                            <a:srgbClr val="000000"/>
+                          </a:solidFill>
+                          <a:latin typeface="Arial" pitchFamily="34" charset="0"/>
+                          <a:ea typeface="Arial" pitchFamily="34" charset="-122"/>
+                          <a:cs typeface="Arial" pitchFamily="34" charset="-120"/>
+                        </a:rPr>
+                        <a:t>Agoda</a:t>
+                      </a:r>
+                      <a:endParaRPr lang="en-US" sz="900" dirty="0">
+                        <a:latin typeface="Arial" charset="0"/>
+                        <a:ea typeface="Arial" charset="0"/>
+                        <a:cs typeface="Arial" charset="0"/>
+                      </a:endParaRPr>
+                    </a:p>
+                  </a:txBody>
+                  <a:tcPr marL="91440" marR="91440" marT="45720" marB="45720">
+                    <a:lnL w="6350" cap="flat" cmpd="sng" algn="ctr">
+                      <a:solidFill>
+                        <a:srgbClr val="CBD5E1"/>
+                      </a:solidFill>
+                      <a:prstDash val="solid"/>
+                      <a:round/>
+                      <a:headEnd type="none" w="med" len="med"/>
+                      <a:tailEnd type="none" w="med" len="med"/>
+                    </a:lnL>
+                    <a:lnR w="6350" cap="flat" cmpd="sng" algn="ctr">
+                      <a:solidFill>
+                        <a:srgbClr val="CBD5E1"/>
+                      </a:solidFill>
+                      <a:prstDash val="solid"/>
+                      <a:round/>
+                      <a:headEnd type="none" w="med" len="med"/>
+                      <a:tailEnd type="none" w="med" len="med"/>
+                    </a:lnR>
+                    <a:lnT w="6350" cap="flat" cmpd="sng" algn="ctr">
+                      <a:solidFill>
+                        <a:srgbClr val="CBD5E1"/>
+                      </a:solidFill>
+                      <a:prstDash val="solid"/>
+                      <a:round/>
+                      <a:headEnd type="none" w="med" len="med"/>
+                      <a:tailEnd type="none" w="med" len="med"/>
+                    </a:lnT>
+                    <a:lnB w="6350" cap="flat" cmpd="sng" algn="ctr">
+                      <a:solidFill>
+                        <a:srgbClr val="CBD5E1"/>
+                      </a:solidFill>
+                      <a:prstDash val="solid"/>
+                      <a:round/>
+                      <a:headEnd type="none" w="med" len="med"/>
+                      <a:tailEnd type="none" w="med" len="med"/>
+                    </a:lnB>
+                    <a:solidFill>
+                      <a:srgbClr val="FFFFFF"/>
+                    </a:solidFill>
+                  </a:tcPr>
+                </a:tc>
+                <a:tc>
+                  <a:txBody>
+                    <a:bodyPr/>
+                    <a:lstStyle/>
+                    <a:p>
+                      <a:pPr algn="ctr" indent="0" marL="0">
+                        <a:buNone/>
+                      </a:pPr>
+                      <a:r>
+                        <a:rPr lang="en-US" sz="900" dirty="0">
+                          <a:solidFill>
+                            <a:srgbClr val="000000"/>
+                          </a:solidFill>
+                          <a:latin typeface="Arial" pitchFamily="34" charset="0"/>
+                          <a:ea typeface="Arial" pitchFamily="34" charset="-122"/>
+                          <a:cs typeface="Arial" pitchFamily="34" charset="-120"/>
+                        </a:rPr>
+                        <a:t>14</a:t>
+                      </a:r>
+                      <a:endParaRPr lang="en-US" sz="900" dirty="0">
+                        <a:latin typeface="Arial" charset="0"/>
+                        <a:ea typeface="Arial" charset="0"/>
+                        <a:cs typeface="Arial" charset="0"/>
+                      </a:endParaRPr>
+                    </a:p>
+                  </a:txBody>
+                  <a:tcPr marL="91440" marR="91440" marT="45720" marB="45720">
+                    <a:lnL w="6350" cap="flat" cmpd="sng" algn="ctr">
+                      <a:solidFill>
+                        <a:srgbClr val="CBD5E1"/>
+                      </a:solidFill>
+                      <a:prstDash val="solid"/>
+                      <a:round/>
+                      <a:headEnd type="none" w="med" len="med"/>
+                      <a:tailEnd type="none" w="med" len="med"/>
+                    </a:lnL>
+                    <a:lnR w="6350" cap="flat" cmpd="sng" algn="ctr">
+                      <a:solidFill>
+                        <a:srgbClr val="CBD5E1"/>
+                      </a:solidFill>
+                      <a:prstDash val="solid"/>
+                      <a:round/>
+                      <a:headEnd type="none" w="med" len="med"/>
+                      <a:tailEnd type="none" w="med" len="med"/>
+                    </a:lnR>
+                    <a:lnT w="6350" cap="flat" cmpd="sng" algn="ctr">
+                      <a:solidFill>
+                        <a:srgbClr val="CBD5E1"/>
+                      </a:solidFill>
+                      <a:prstDash val="solid"/>
+                      <a:round/>
+                      <a:headEnd type="none" w="med" len="med"/>
+                      <a:tailEnd type="none" w="med" len="med"/>
+                    </a:lnT>
+                    <a:lnB w="6350" cap="flat" cmpd="sng" algn="ctr">
+                      <a:solidFill>
+                        <a:srgbClr val="CBD5E1"/>
+                      </a:solidFill>
+                      <a:prstDash val="solid"/>
+                      <a:round/>
+                      <a:headEnd type="none" w="med" len="med"/>
+                      <a:tailEnd type="none" w="med" len="med"/>
+                    </a:lnB>
+                    <a:solidFill>
+                      <a:srgbClr val="FFFFFF"/>
+                    </a:solidFill>
+                  </a:tcPr>
+                </a:tc>
+                <a:tc>
+                  <a:txBody>
+                    <a:bodyPr/>
+                    <a:lstStyle/>
+                    <a:p>
+                      <a:pPr algn="ctr" indent="0" marL="0">
+                        <a:buNone/>
+                      </a:pPr>
+                      <a:r>
+                        <a:rPr lang="en-US" sz="900" dirty="0">
+                          <a:solidFill>
+                            <a:srgbClr val="000000"/>
+                          </a:solidFill>
+                          <a:latin typeface="Arial" pitchFamily="34" charset="0"/>
+                          <a:ea typeface="Arial" pitchFamily="34" charset="-122"/>
+                          <a:cs typeface="Arial" pitchFamily="34" charset="-120"/>
+                        </a:rPr>
+                        <a:t>7.43</a:t>
+                      </a:r>
+                      <a:endParaRPr lang="en-US" sz="900" dirty="0">
+                        <a:latin typeface="Arial" charset="0"/>
+                        <a:ea typeface="Arial" charset="0"/>
+                        <a:cs typeface="Arial" charset="0"/>
+                      </a:endParaRPr>
+                    </a:p>
+                  </a:txBody>
+                  <a:tcPr marL="91440" marR="91440" marT="45720" marB="45720">
+                    <a:lnL w="6350" cap="flat" cmpd="sng" algn="ctr">
+                      <a:solidFill>
+                        <a:srgbClr val="CBD5E1"/>
+                      </a:solidFill>
+                      <a:prstDash val="solid"/>
+                      <a:round/>
+                      <a:headEnd type="none" w="med" len="med"/>
+                      <a:tailEnd type="none" w="med" len="med"/>
+                    </a:lnL>
+                    <a:lnR w="6350" cap="flat" cmpd="sng" algn="ctr">
+                      <a:solidFill>
+                        <a:srgbClr val="CBD5E1"/>
+                      </a:solidFill>
+                      <a:prstDash val="solid"/>
+                      <a:round/>
+                      <a:headEnd type="none" w="med" len="med"/>
+                      <a:tailEnd type="none" w="med" len="med"/>
+                    </a:lnR>
+                    <a:lnT w="6350" cap="flat" cmpd="sng" algn="ctr">
+                      <a:solidFill>
+                        <a:srgbClr val="CBD5E1"/>
+                      </a:solidFill>
+                      <a:prstDash val="solid"/>
+                      <a:round/>
+                      <a:headEnd type="none" w="med" len="med"/>
+                      <a:tailEnd type="none" w="med" len="med"/>
+                    </a:lnT>
+                    <a:lnB w="6350" cap="flat" cmpd="sng" algn="ctr">
+                      <a:solidFill>
+                        <a:srgbClr val="CBD5E1"/>
+                      </a:solidFill>
+                      <a:prstDash val="solid"/>
+                      <a:round/>
+                      <a:headEnd type="none" w="med" len="med"/>
+                      <a:tailEnd type="none" w="med" len="med"/>
+                    </a:lnB>
+                    <a:solidFill>
+                      <a:srgbClr val="FFFFFF"/>
+                    </a:solidFill>
+                  </a:tcPr>
+                </a:tc>
+                <a:tc>
+                  <a:txBody>
+                    <a:bodyPr/>
+                    <a:lstStyle/>
+                    <a:p>
+                      <a:pPr algn="ctr" indent="0" marL="0">
+                        <a:buNone/>
+                      </a:pPr>
+                      <a:r>
+                        <a:rPr lang="en-US" sz="900" dirty="0">
+                          <a:solidFill>
+                            <a:srgbClr val="000000"/>
+                          </a:solidFill>
+                          <a:latin typeface="Arial" pitchFamily="34" charset="0"/>
+                          <a:ea typeface="Arial" pitchFamily="34" charset="-122"/>
+                          <a:cs typeface="Arial" pitchFamily="34" charset="-120"/>
+                        </a:rPr>
+                        <a:t>/10</a:t>
+                      </a:r>
+                      <a:endParaRPr lang="en-US" sz="900" dirty="0">
+                        <a:latin typeface="Arial" charset="0"/>
+                        <a:ea typeface="Arial" charset="0"/>
+                        <a:cs typeface="Arial" charset="0"/>
+                      </a:endParaRPr>
+                    </a:p>
+                  </a:txBody>
+                  <a:tcPr marL="91440" marR="91440" marT="45720" marB="45720">
+                    <a:lnL w="6350" cap="flat" cmpd="sng" algn="ctr">
+                      <a:solidFill>
+                        <a:srgbClr val="CBD5E1"/>
+                      </a:solidFill>
+                      <a:prstDash val="solid"/>
+                      <a:round/>
+                      <a:headEnd type="none" w="med" len="med"/>
+                      <a:tailEnd type="none" w="med" len="med"/>
+                    </a:lnL>
+                    <a:lnR w="6350" cap="flat" cmpd="sng" algn="ctr">
+                      <a:solidFill>
+                        <a:srgbClr val="CBD5E1"/>
+                      </a:solidFill>
+                      <a:prstDash val="solid"/>
+                      <a:round/>
+                      <a:headEnd type="none" w="med" len="med"/>
+                      <a:tailEnd type="none" w="med" len="med"/>
+                    </a:lnR>
+                    <a:lnT w="6350" cap="flat" cmpd="sng" algn="ctr">
+                      <a:solidFill>
+                        <a:srgbClr val="CBD5E1"/>
+                      </a:solidFill>
+                      <a:prstDash val="solid"/>
+                      <a:round/>
+                      <a:headEnd type="none" w="med" len="med"/>
+                      <a:tailEnd type="none" w="med" len="med"/>
+                    </a:lnT>
+                    <a:lnB w="6350" cap="flat" cmpd="sng" algn="ctr">
+                      <a:solidFill>
+                        <a:srgbClr val="CBD5E1"/>
+                      </a:solidFill>
+                      <a:prstDash val="solid"/>
+                      <a:round/>
+                      <a:headEnd type="none" w="med" len="med"/>
+                      <a:tailEnd type="none" w="med" len="med"/>
+                    </a:lnB>
+                    <a:solidFill>
+                      <a:srgbClr val="FFFFFF"/>
+                    </a:solidFill>
+                  </a:tcPr>
+                </a:tc>
+                <a:tc>
+                  <a:txBody>
+                    <a:bodyPr/>
+                    <a:lstStyle/>
+                    <a:p>
+                      <a:pPr algn="ctr" indent="0" marL="0">
+                        <a:buNone/>
+                      </a:pPr>
+                      <a:r>
+                        <a:rPr lang="en-US" sz="900" dirty="0">
+                          <a:solidFill>
+                            <a:srgbClr val="000000"/>
+                          </a:solidFill>
+                          <a:latin typeface="Arial" pitchFamily="34" charset="0"/>
+                          <a:ea typeface="Arial" pitchFamily="34" charset="-122"/>
+                          <a:cs typeface="Arial" pitchFamily="34" charset="-120"/>
+                        </a:rPr>
+                        <a:t>7.43</a:t>
+                      </a:r>
+                      <a:endParaRPr lang="en-US" sz="900" dirty="0">
+                        <a:latin typeface="Arial" charset="0"/>
+                        <a:ea typeface="Arial" charset="0"/>
+                        <a:cs typeface="Arial" charset="0"/>
+                      </a:endParaRPr>
+                    </a:p>
+                  </a:txBody>
+                  <a:tcPr marL="91440" marR="91440" marT="45720" marB="45720">
+                    <a:lnL w="6350" cap="flat" cmpd="sng" algn="ctr">
+                      <a:solidFill>
+                        <a:srgbClr val="CBD5E1"/>
+                      </a:solidFill>
+                      <a:prstDash val="solid"/>
+                      <a:round/>
+                      <a:headEnd type="none" w="med" len="med"/>
+                      <a:tailEnd type="none" w="med" len="med"/>
+                    </a:lnL>
+                    <a:lnR w="6350" cap="flat" cmpd="sng" algn="ctr">
+                      <a:solidFill>
+                        <a:srgbClr val="CBD5E1"/>
+                      </a:solidFill>
+                      <a:prstDash val="solid"/>
+                      <a:round/>
+                      <a:headEnd type="none" w="med" len="med"/>
+                      <a:tailEnd type="none" w="med" len="med"/>
+                    </a:lnR>
+                    <a:lnT w="6350" cap="flat" cmpd="sng" algn="ctr">
+                      <a:solidFill>
+                        <a:srgbClr val="CBD5E1"/>
+                      </a:solidFill>
+                      <a:prstDash val="solid"/>
+                      <a:round/>
+                      <a:headEnd type="none" w="med" len="med"/>
+                      <a:tailEnd type="none" w="med" len="med"/>
+                    </a:lnT>
+                    <a:lnB w="6350" cap="flat" cmpd="sng" algn="ctr">
+                      <a:solidFill>
+                        <a:srgbClr val="CBD5E1"/>
+                      </a:solidFill>
+                      <a:prstDash val="solid"/>
+                      <a:round/>
+                      <a:headEnd type="none" w="med" len="med"/>
+                      <a:tailEnd type="none" w="med" len="med"/>
+                    </a:lnB>
+                    <a:solidFill>
+                      <a:srgbClr val="FFFFFF"/>
+                    </a:solidFill>
+                  </a:tcPr>
+                </a:tc>
+              </a:tr>
+              <a:tr h="201168">
+                <a:tc>
+                  <a:txBody>
+                    <a:bodyPr/>
+                    <a:lstStyle/>
+                    <a:p>
+                      <a:pPr algn="ctr" indent="0" marL="0">
+                        <a:buNone/>
+                      </a:pPr>
+                      <a:r>
+                        <a:rPr lang="en-US" sz="900" dirty="0">
+                          <a:solidFill>
+                            <a:srgbClr val="000000"/>
+                          </a:solidFill>
+                          <a:latin typeface="Arial" pitchFamily="34" charset="0"/>
+                          <a:ea typeface="Arial" pitchFamily="34" charset="-122"/>
+                          <a:cs typeface="Arial" pitchFamily="34" charset="-120"/>
+                        </a:rPr>
+                        <a:t>Google</a:t>
+                      </a:r>
+                      <a:endParaRPr lang="en-US" sz="900" dirty="0">
+                        <a:latin typeface="Arial" charset="0"/>
+                        <a:ea typeface="Arial" charset="0"/>
+                        <a:cs typeface="Arial" charset="0"/>
+                      </a:endParaRPr>
+                    </a:p>
+                  </a:txBody>
+                  <a:tcPr marL="91440" marR="91440" marT="45720" marB="45720">
+                    <a:lnL w="6350" cap="flat" cmpd="sng" algn="ctr">
+                      <a:solidFill>
+                        <a:srgbClr val="CBD5E1"/>
+                      </a:solidFill>
+                      <a:prstDash val="solid"/>
+                      <a:round/>
+                      <a:headEnd type="none" w="med" len="med"/>
+                      <a:tailEnd type="none" w="med" len="med"/>
+                    </a:lnL>
+                    <a:lnR w="6350" cap="flat" cmpd="sng" algn="ctr">
+                      <a:solidFill>
+                        <a:srgbClr val="CBD5E1"/>
+                      </a:solidFill>
+                      <a:prstDash val="solid"/>
+                      <a:round/>
+                      <a:headEnd type="none" w="med" len="med"/>
+                      <a:tailEnd type="none" w="med" len="med"/>
+                    </a:lnR>
+                    <a:lnT w="6350" cap="flat" cmpd="sng" algn="ctr">
+                      <a:solidFill>
+                        <a:srgbClr val="CBD5E1"/>
+                      </a:solidFill>
+                      <a:prstDash val="solid"/>
+                      <a:round/>
+                      <a:headEnd type="none" w="med" len="med"/>
+                      <a:tailEnd type="none" w="med" len="med"/>
+                    </a:lnT>
+                    <a:lnB w="6350" cap="flat" cmpd="sng" algn="ctr">
+                      <a:solidFill>
+                        <a:srgbClr val="CBD5E1"/>
+                      </a:solidFill>
+                      <a:prstDash val="solid"/>
+                      <a:round/>
+                      <a:headEnd type="none" w="med" len="med"/>
+                      <a:tailEnd type="none" w="med" len="med"/>
+                    </a:lnB>
+                    <a:solidFill>
+                      <a:srgbClr val="E8EFF8"/>
+                    </a:solidFill>
+                  </a:tcPr>
+                </a:tc>
+                <a:tc>
+                  <a:txBody>
+                    <a:bodyPr/>
+                    <a:lstStyle/>
+                    <a:p>
+                      <a:pPr algn="ctr" indent="0" marL="0">
+                        <a:buNone/>
+                      </a:pPr>
+                      <a:r>
+                        <a:rPr lang="en-US" sz="900" dirty="0">
+                          <a:solidFill>
+                            <a:srgbClr val="000000"/>
+                          </a:solidFill>
+                          <a:latin typeface="Arial" pitchFamily="34" charset="0"/>
+                          <a:ea typeface="Arial" pitchFamily="34" charset="-122"/>
+                          <a:cs typeface="Arial" pitchFamily="34" charset="-120"/>
+                        </a:rPr>
+                        <a:t>21</a:t>
+                      </a:r>
+                      <a:endParaRPr lang="en-US" sz="900" dirty="0">
+                        <a:latin typeface="Arial" charset="0"/>
+                        <a:ea typeface="Arial" charset="0"/>
+                        <a:cs typeface="Arial" charset="0"/>
+                      </a:endParaRPr>
+                    </a:p>
+                  </a:txBody>
+                  <a:tcPr marL="91440" marR="91440" marT="45720" marB="45720">
+                    <a:lnL w="6350" cap="flat" cmpd="sng" algn="ctr">
+                      <a:solidFill>
+                        <a:srgbClr val="CBD5E1"/>
+                      </a:solidFill>
+                      <a:prstDash val="solid"/>
+                      <a:round/>
+                      <a:headEnd type="none" w="med" len="med"/>
+                      <a:tailEnd type="none" w="med" len="med"/>
+                    </a:lnL>
+                    <a:lnR w="6350" cap="flat" cmpd="sng" algn="ctr">
+                      <a:solidFill>
+                        <a:srgbClr val="CBD5E1"/>
+                      </a:solidFill>
+                      <a:prstDash val="solid"/>
+                      <a:round/>
+                      <a:headEnd type="none" w="med" len="med"/>
+                      <a:tailEnd type="none" w="med" len="med"/>
+                    </a:lnR>
+                    <a:lnT w="6350" cap="flat" cmpd="sng" algn="ctr">
+                      <a:solidFill>
+                        <a:srgbClr val="CBD5E1"/>
+                      </a:solidFill>
+                      <a:prstDash val="solid"/>
+                      <a:round/>
+                      <a:headEnd type="none" w="med" len="med"/>
+                      <a:tailEnd type="none" w="med" len="med"/>
+                    </a:lnT>
+                    <a:lnB w="6350" cap="flat" cmpd="sng" algn="ctr">
+                      <a:solidFill>
+                        <a:srgbClr val="CBD5E1"/>
+                      </a:solidFill>
+                      <a:prstDash val="solid"/>
+                      <a:round/>
+                      <a:headEnd type="none" w="med" len="med"/>
+                      <a:tailEnd type="none" w="med" len="med"/>
+                    </a:lnB>
+                    <a:solidFill>
+                      <a:srgbClr val="E8EFF8"/>
+                    </a:solidFill>
+                  </a:tcPr>
+                </a:tc>
+                <a:tc>
+                  <a:txBody>
+                    <a:bodyPr/>
+                    <a:lstStyle/>
+                    <a:p>
+                      <a:pPr algn="ctr" indent="0" marL="0">
+                        <a:buNone/>
+                      </a:pPr>
+                      <a:r>
+                        <a:rPr lang="en-US" sz="900" dirty="0">
+                          <a:solidFill>
+                            <a:srgbClr val="000000"/>
+                          </a:solidFill>
+                          <a:latin typeface="Arial" pitchFamily="34" charset="0"/>
+                          <a:ea typeface="Arial" pitchFamily="34" charset="-122"/>
+                          <a:cs typeface="Arial" pitchFamily="34" charset="-120"/>
+                        </a:rPr>
+                        <a:t>3.71</a:t>
+                      </a:r>
+                      <a:endParaRPr lang="en-US" sz="900" dirty="0">
+                        <a:latin typeface="Arial" charset="0"/>
+                        <a:ea typeface="Arial" charset="0"/>
+                        <a:cs typeface="Arial" charset="0"/>
+                      </a:endParaRPr>
+                    </a:p>
+                  </a:txBody>
+                  <a:tcPr marL="91440" marR="91440" marT="45720" marB="45720">
+                    <a:lnL w="6350" cap="flat" cmpd="sng" algn="ctr">
+                      <a:solidFill>
+                        <a:srgbClr val="CBD5E1"/>
+                      </a:solidFill>
+                      <a:prstDash val="solid"/>
+                      <a:round/>
+                      <a:headEnd type="none" w="med" len="med"/>
+                      <a:tailEnd type="none" w="med" len="med"/>
+                    </a:lnL>
+                    <a:lnR w="6350" cap="flat" cmpd="sng" algn="ctr">
+                      <a:solidFill>
+                        <a:srgbClr val="CBD5E1"/>
+                      </a:solidFill>
+                      <a:prstDash val="solid"/>
+                      <a:round/>
+                      <a:headEnd type="none" w="med" len="med"/>
+                      <a:tailEnd type="none" w="med" len="med"/>
+                    </a:lnR>
+                    <a:lnT w="6350" cap="flat" cmpd="sng" algn="ctr">
+                      <a:solidFill>
+                        <a:srgbClr val="CBD5E1"/>
+                      </a:solidFill>
+                      <a:prstDash val="solid"/>
+                      <a:round/>
+                      <a:headEnd type="none" w="med" len="med"/>
+                      <a:tailEnd type="none" w="med" len="med"/>
+                    </a:lnT>
+                    <a:lnB w="6350" cap="flat" cmpd="sng" algn="ctr">
+                      <a:solidFill>
+                        <a:srgbClr val="CBD5E1"/>
+                      </a:solidFill>
+                      <a:prstDash val="solid"/>
+                      <a:round/>
+                      <a:headEnd type="none" w="med" len="med"/>
+                      <a:tailEnd type="none" w="med" len="med"/>
+                    </a:lnB>
+                    <a:solidFill>
+                      <a:srgbClr val="E8EFF8"/>
+                    </a:solidFill>
+                  </a:tcPr>
+                </a:tc>
+                <a:tc>
+                  <a:txBody>
+                    <a:bodyPr/>
+                    <a:lstStyle/>
+                    <a:p>
+                      <a:pPr algn="ctr" indent="0" marL="0">
+                        <a:buNone/>
+                      </a:pPr>
+                      <a:r>
+                        <a:rPr lang="en-US" sz="900" dirty="0">
+                          <a:solidFill>
+                            <a:srgbClr val="000000"/>
+                          </a:solidFill>
+                          <a:latin typeface="Arial" pitchFamily="34" charset="0"/>
+                          <a:ea typeface="Arial" pitchFamily="34" charset="-122"/>
+                          <a:cs typeface="Arial" pitchFamily="34" charset="-120"/>
+                        </a:rPr>
+                        <a:t>/5 (×2)</a:t>
+                      </a:r>
+                      <a:endParaRPr lang="en-US" sz="900" dirty="0">
+                        <a:latin typeface="Arial" charset="0"/>
+                        <a:ea typeface="Arial" charset="0"/>
+                        <a:cs typeface="Arial" charset="0"/>
+                      </a:endParaRPr>
+                    </a:p>
+                  </a:txBody>
+                  <a:tcPr marL="91440" marR="91440" marT="45720" marB="45720">
+                    <a:lnL w="6350" cap="flat" cmpd="sng" algn="ctr">
+                      <a:solidFill>
+                        <a:srgbClr val="CBD5E1"/>
+                      </a:solidFill>
+                      <a:prstDash val="solid"/>
+                      <a:round/>
+                      <a:headEnd type="none" w="med" len="med"/>
+                      <a:tailEnd type="none" w="med" len="med"/>
+                    </a:lnL>
+                    <a:lnR w="6350" cap="flat" cmpd="sng" algn="ctr">
+                      <a:solidFill>
+                        <a:srgbClr val="CBD5E1"/>
+                      </a:solidFill>
+                      <a:prstDash val="solid"/>
+                      <a:round/>
+                      <a:headEnd type="none" w="med" len="med"/>
+                      <a:tailEnd type="none" w="med" len="med"/>
+                    </a:lnR>
+                    <a:lnT w="6350" cap="flat" cmpd="sng" algn="ctr">
+                      <a:solidFill>
+                        <a:srgbClr val="CBD5E1"/>
+                      </a:solidFill>
+                      <a:prstDash val="solid"/>
+                      <a:round/>
+                      <a:headEnd type="none" w="med" len="med"/>
+                      <a:tailEnd type="none" w="med" len="med"/>
+                    </a:lnT>
+                    <a:lnB w="6350" cap="flat" cmpd="sng" algn="ctr">
+                      <a:solidFill>
+                        <a:srgbClr val="CBD5E1"/>
+                      </a:solidFill>
+                      <a:prstDash val="solid"/>
+                      <a:round/>
+                      <a:headEnd type="none" w="med" len="med"/>
+                      <a:tailEnd type="none" w="med" len="med"/>
+                    </a:lnB>
+                    <a:solidFill>
+                      <a:srgbClr val="E8EFF8"/>
+                    </a:solidFill>
+                  </a:tcPr>
+                </a:tc>
+                <a:tc>
+                  <a:txBody>
+                    <a:bodyPr/>
+                    <a:lstStyle/>
+                    <a:p>
+                      <a:pPr algn="ctr" indent="0" marL="0">
+                        <a:buNone/>
+                      </a:pPr>
+                      <a:r>
+                        <a:rPr lang="en-US" sz="900" dirty="0">
+                          <a:solidFill>
+                            <a:srgbClr val="000000"/>
+                          </a:solidFill>
+                          <a:latin typeface="Arial" pitchFamily="34" charset="0"/>
+                          <a:ea typeface="Arial" pitchFamily="34" charset="-122"/>
+                          <a:cs typeface="Arial" pitchFamily="34" charset="-120"/>
+                        </a:rPr>
+                        <a:t>7.43</a:t>
                       </a:r>
                       <a:endParaRPr lang="en-US" sz="900" dirty="0">
                         <a:latin typeface="Arial" charset="0"/>
@@ -8253,7 +8614,7 @@
                           <a:ea typeface="Arial" pitchFamily="34" charset="-122"/>
                           <a:cs typeface="Arial" pitchFamily="34" charset="-120"/>
                         </a:rPr>
-                        <a:t>41</a:t>
+                        <a:t>40</a:t>
                       </a:r>
                       <a:endParaRPr lang="en-US" sz="900" dirty="0">
                         <a:latin typeface="Arial" charset="0"/>
@@ -8321,7 +8682,7 @@
                           <a:ea typeface="Arial" pitchFamily="34" charset="-122"/>
                           <a:cs typeface="Arial" pitchFamily="34" charset="-120"/>
                         </a:rPr>
-                        <a:t>3.78</a:t>
+                        <a:t>3.7</a:t>
                       </a:r>
                       <a:endParaRPr lang="en-US" sz="900" dirty="0">
                         <a:latin typeface="Arial" charset="0"/>
@@ -8457,7 +8818,7 @@
                           <a:ea typeface="Arial" pitchFamily="34" charset="-122"/>
                           <a:cs typeface="Arial" pitchFamily="34" charset="-120"/>
                         </a:rPr>
-                        <a:t>7.56</a:t>
+                        <a:t>7.4</a:t>
                       </a:r>
                       <a:endParaRPr lang="en-US" sz="900" dirty="0">
                         <a:latin typeface="Arial" charset="0"/>
@@ -8527,7 +8888,7 @@
                           <a:ea typeface="Arial" pitchFamily="34" charset="-122"/>
                           <a:cs typeface="Arial" pitchFamily="34" charset="-120"/>
                         </a:rPr>
-                        <a:t>Agoda</a:t>
+                        <a:t>Booking.com</a:t>
                       </a:r>
                       <a:endParaRPr lang="en-US" sz="900" dirty="0">
                         <a:latin typeface="Arial" charset="0"/>
@@ -8595,7 +8956,7 @@
                           <a:ea typeface="Arial" pitchFamily="34" charset="-122"/>
                           <a:cs typeface="Arial" pitchFamily="34" charset="-120"/>
                         </a:rPr>
-                        <a:t>14</a:t>
+                        <a:t>28</a:t>
                       </a:r>
                       <a:endParaRPr lang="en-US" sz="900" dirty="0">
                         <a:latin typeface="Arial" charset="0"/>
@@ -8663,7 +9024,7 @@
                           <a:ea typeface="Arial" pitchFamily="34" charset="-122"/>
                           <a:cs typeface="Arial" pitchFamily="34" charset="-120"/>
                         </a:rPr>
-                        <a:t>7.43</a:t>
+                        <a:t>7.07</a:t>
                       </a:r>
                       <a:endParaRPr lang="en-US" sz="900" dirty="0">
                         <a:latin typeface="Arial" charset="0"/>
@@ -8799,7 +9160,7 @@
                           <a:ea typeface="Arial" pitchFamily="34" charset="-122"/>
                           <a:cs typeface="Arial" pitchFamily="34" charset="-120"/>
                         </a:rPr>
-                        <a:t>7.43</a:t>
+                        <a:t>7.07</a:t>
                       </a:r>
                       <a:endParaRPr lang="en-US" sz="900" dirty="0">
                         <a:latin typeface="Arial" charset="0"/>
@@ -8847,348 +9208,6 @@
                     </a:lnB>
                     <a:solidFill>
                       <a:srgbClr val="E8EFF8"/>
-                    </a:solidFill>
-                  </a:tcPr>
-                </a:tc>
-              </a:tr>
-              <a:tr h="201168">
-                <a:tc>
-                  <a:txBody>
-                    <a:bodyPr/>
-                    <a:lstStyle/>
-                    <a:p>
-                      <a:pPr algn="ctr" indent="0" marL="0">
-                        <a:buNone/>
-                      </a:pPr>
-                      <a:r>
-                        <a:rPr lang="en-US" sz="900" dirty="0">
-                          <a:solidFill>
-                            <a:srgbClr val="000000"/>
-                          </a:solidFill>
-                          <a:latin typeface="Arial" pitchFamily="34" charset="0"/>
-                          <a:ea typeface="Arial" pitchFamily="34" charset="-122"/>
-                          <a:cs typeface="Arial" pitchFamily="34" charset="-120"/>
-                        </a:rPr>
-                        <a:t>Booking.com</a:t>
-                      </a:r>
-                      <a:endParaRPr lang="en-US" sz="900" dirty="0">
-                        <a:latin typeface="Arial" charset="0"/>
-                        <a:ea typeface="Arial" charset="0"/>
-                        <a:cs typeface="Arial" charset="0"/>
-                      </a:endParaRPr>
-                    </a:p>
-                  </a:txBody>
-                  <a:tcPr marL="91440" marR="91440" marT="45720" marB="45720">
-                    <a:lnL w="6350" cap="flat" cmpd="sng" algn="ctr">
-                      <a:solidFill>
-                        <a:srgbClr val="CBD5E1"/>
-                      </a:solidFill>
-                      <a:prstDash val="solid"/>
-                      <a:round/>
-                      <a:headEnd type="none" w="med" len="med"/>
-                      <a:tailEnd type="none" w="med" len="med"/>
-                    </a:lnL>
-                    <a:lnR w="6350" cap="flat" cmpd="sng" algn="ctr">
-                      <a:solidFill>
-                        <a:srgbClr val="CBD5E1"/>
-                      </a:solidFill>
-                      <a:prstDash val="solid"/>
-                      <a:round/>
-                      <a:headEnd type="none" w="med" len="med"/>
-                      <a:tailEnd type="none" w="med" len="med"/>
-                    </a:lnR>
-                    <a:lnT w="6350" cap="flat" cmpd="sng" algn="ctr">
-                      <a:solidFill>
-                        <a:srgbClr val="CBD5E1"/>
-                      </a:solidFill>
-                      <a:prstDash val="solid"/>
-                      <a:round/>
-                      <a:headEnd type="none" w="med" len="med"/>
-                      <a:tailEnd type="none" w="med" len="med"/>
-                    </a:lnT>
-                    <a:lnB w="6350" cap="flat" cmpd="sng" algn="ctr">
-                      <a:solidFill>
-                        <a:srgbClr val="CBD5E1"/>
-                      </a:solidFill>
-                      <a:prstDash val="solid"/>
-                      <a:round/>
-                      <a:headEnd type="none" w="med" len="med"/>
-                      <a:tailEnd type="none" w="med" len="med"/>
-                    </a:lnB>
-                    <a:solidFill>
-                      <a:srgbClr val="FFFFFF"/>
-                    </a:solidFill>
-                  </a:tcPr>
-                </a:tc>
-                <a:tc>
-                  <a:txBody>
-                    <a:bodyPr/>
-                    <a:lstStyle/>
-                    <a:p>
-                      <a:pPr algn="ctr" indent="0" marL="0">
-                        <a:buNone/>
-                      </a:pPr>
-                      <a:r>
-                        <a:rPr lang="en-US" sz="900" dirty="0">
-                          <a:solidFill>
-                            <a:srgbClr val="000000"/>
-                          </a:solidFill>
-                          <a:latin typeface="Arial" pitchFamily="34" charset="0"/>
-                          <a:ea typeface="Arial" pitchFamily="34" charset="-122"/>
-                          <a:cs typeface="Arial" pitchFamily="34" charset="-120"/>
-                        </a:rPr>
-                        <a:t>31</a:t>
-                      </a:r>
-                      <a:endParaRPr lang="en-US" sz="900" dirty="0">
-                        <a:latin typeface="Arial" charset="0"/>
-                        <a:ea typeface="Arial" charset="0"/>
-                        <a:cs typeface="Arial" charset="0"/>
-                      </a:endParaRPr>
-                    </a:p>
-                  </a:txBody>
-                  <a:tcPr marL="91440" marR="91440" marT="45720" marB="45720">
-                    <a:lnL w="6350" cap="flat" cmpd="sng" algn="ctr">
-                      <a:solidFill>
-                        <a:srgbClr val="CBD5E1"/>
-                      </a:solidFill>
-                      <a:prstDash val="solid"/>
-                      <a:round/>
-                      <a:headEnd type="none" w="med" len="med"/>
-                      <a:tailEnd type="none" w="med" len="med"/>
-                    </a:lnL>
-                    <a:lnR w="6350" cap="flat" cmpd="sng" algn="ctr">
-                      <a:solidFill>
-                        <a:srgbClr val="CBD5E1"/>
-                      </a:solidFill>
-                      <a:prstDash val="solid"/>
-                      <a:round/>
-                      <a:headEnd type="none" w="med" len="med"/>
-                      <a:tailEnd type="none" w="med" len="med"/>
-                    </a:lnR>
-                    <a:lnT w="6350" cap="flat" cmpd="sng" algn="ctr">
-                      <a:solidFill>
-                        <a:srgbClr val="CBD5E1"/>
-                      </a:solidFill>
-                      <a:prstDash val="solid"/>
-                      <a:round/>
-                      <a:headEnd type="none" w="med" len="med"/>
-                      <a:tailEnd type="none" w="med" len="med"/>
-                    </a:lnT>
-                    <a:lnB w="6350" cap="flat" cmpd="sng" algn="ctr">
-                      <a:solidFill>
-                        <a:srgbClr val="CBD5E1"/>
-                      </a:solidFill>
-                      <a:prstDash val="solid"/>
-                      <a:round/>
-                      <a:headEnd type="none" w="med" len="med"/>
-                      <a:tailEnd type="none" w="med" len="med"/>
-                    </a:lnB>
-                    <a:solidFill>
-                      <a:srgbClr val="FFFFFF"/>
-                    </a:solidFill>
-                  </a:tcPr>
-                </a:tc>
-                <a:tc>
-                  <a:txBody>
-                    <a:bodyPr/>
-                    <a:lstStyle/>
-                    <a:p>
-                      <a:pPr algn="ctr" indent="0" marL="0">
-                        <a:buNone/>
-                      </a:pPr>
-                      <a:r>
-                        <a:rPr lang="en-US" sz="900" dirty="0">
-                          <a:solidFill>
-                            <a:srgbClr val="000000"/>
-                          </a:solidFill>
-                          <a:latin typeface="Arial" pitchFamily="34" charset="0"/>
-                          <a:ea typeface="Arial" pitchFamily="34" charset="-122"/>
-                          <a:cs typeface="Arial" pitchFamily="34" charset="-120"/>
-                        </a:rPr>
-                        <a:t>7.42</a:t>
-                      </a:r>
-                      <a:endParaRPr lang="en-US" sz="900" dirty="0">
-                        <a:latin typeface="Arial" charset="0"/>
-                        <a:ea typeface="Arial" charset="0"/>
-                        <a:cs typeface="Arial" charset="0"/>
-                      </a:endParaRPr>
-                    </a:p>
-                  </a:txBody>
-                  <a:tcPr marL="91440" marR="91440" marT="45720" marB="45720">
-                    <a:lnL w="6350" cap="flat" cmpd="sng" algn="ctr">
-                      <a:solidFill>
-                        <a:srgbClr val="CBD5E1"/>
-                      </a:solidFill>
-                      <a:prstDash val="solid"/>
-                      <a:round/>
-                      <a:headEnd type="none" w="med" len="med"/>
-                      <a:tailEnd type="none" w="med" len="med"/>
-                    </a:lnL>
-                    <a:lnR w="6350" cap="flat" cmpd="sng" algn="ctr">
-                      <a:solidFill>
-                        <a:srgbClr val="CBD5E1"/>
-                      </a:solidFill>
-                      <a:prstDash val="solid"/>
-                      <a:round/>
-                      <a:headEnd type="none" w="med" len="med"/>
-                      <a:tailEnd type="none" w="med" len="med"/>
-                    </a:lnR>
-                    <a:lnT w="6350" cap="flat" cmpd="sng" algn="ctr">
-                      <a:solidFill>
-                        <a:srgbClr val="CBD5E1"/>
-                      </a:solidFill>
-                      <a:prstDash val="solid"/>
-                      <a:round/>
-                      <a:headEnd type="none" w="med" len="med"/>
-                      <a:tailEnd type="none" w="med" len="med"/>
-                    </a:lnT>
-                    <a:lnB w="6350" cap="flat" cmpd="sng" algn="ctr">
-                      <a:solidFill>
-                        <a:srgbClr val="CBD5E1"/>
-                      </a:solidFill>
-                      <a:prstDash val="solid"/>
-                      <a:round/>
-                      <a:headEnd type="none" w="med" len="med"/>
-                      <a:tailEnd type="none" w="med" len="med"/>
-                    </a:lnB>
-                    <a:solidFill>
-                      <a:srgbClr val="FFFFFF"/>
-                    </a:solidFill>
-                  </a:tcPr>
-                </a:tc>
-                <a:tc>
-                  <a:txBody>
-                    <a:bodyPr/>
-                    <a:lstStyle/>
-                    <a:p>
-                      <a:pPr algn="ctr" indent="0" marL="0">
-                        <a:buNone/>
-                      </a:pPr>
-                      <a:r>
-                        <a:rPr lang="en-US" sz="900" dirty="0">
-                          <a:solidFill>
-                            <a:srgbClr val="000000"/>
-                          </a:solidFill>
-                          <a:latin typeface="Arial" pitchFamily="34" charset="0"/>
-                          <a:ea typeface="Arial" pitchFamily="34" charset="-122"/>
-                          <a:cs typeface="Arial" pitchFamily="34" charset="-120"/>
-                        </a:rPr>
-                        <a:t>/10</a:t>
-                      </a:r>
-                      <a:endParaRPr lang="en-US" sz="900" dirty="0">
-                        <a:latin typeface="Arial" charset="0"/>
-                        <a:ea typeface="Arial" charset="0"/>
-                        <a:cs typeface="Arial" charset="0"/>
-                      </a:endParaRPr>
-                    </a:p>
-                  </a:txBody>
-                  <a:tcPr marL="91440" marR="91440" marT="45720" marB="45720">
-                    <a:lnL w="6350" cap="flat" cmpd="sng" algn="ctr">
-                      <a:solidFill>
-                        <a:srgbClr val="CBD5E1"/>
-                      </a:solidFill>
-                      <a:prstDash val="solid"/>
-                      <a:round/>
-                      <a:headEnd type="none" w="med" len="med"/>
-                      <a:tailEnd type="none" w="med" len="med"/>
-                    </a:lnL>
-                    <a:lnR w="6350" cap="flat" cmpd="sng" algn="ctr">
-                      <a:solidFill>
-                        <a:srgbClr val="CBD5E1"/>
-                      </a:solidFill>
-                      <a:prstDash val="solid"/>
-                      <a:round/>
-                      <a:headEnd type="none" w="med" len="med"/>
-                      <a:tailEnd type="none" w="med" len="med"/>
-                    </a:lnR>
-                    <a:lnT w="6350" cap="flat" cmpd="sng" algn="ctr">
-                      <a:solidFill>
-                        <a:srgbClr val="CBD5E1"/>
-                      </a:solidFill>
-                      <a:prstDash val="solid"/>
-                      <a:round/>
-                      <a:headEnd type="none" w="med" len="med"/>
-                      <a:tailEnd type="none" w="med" len="med"/>
-                    </a:lnT>
-                    <a:lnB w="6350" cap="flat" cmpd="sng" algn="ctr">
-                      <a:solidFill>
-                        <a:srgbClr val="CBD5E1"/>
-                      </a:solidFill>
-                      <a:prstDash val="solid"/>
-                      <a:round/>
-                      <a:headEnd type="none" w="med" len="med"/>
-                      <a:tailEnd type="none" w="med" len="med"/>
-                    </a:lnB>
-                    <a:solidFill>
-                      <a:srgbClr val="FFFFFF"/>
-                    </a:solidFill>
-                  </a:tcPr>
-                </a:tc>
-                <a:tc>
-                  <a:txBody>
-                    <a:bodyPr/>
-                    <a:lstStyle/>
-                    <a:p>
-                      <a:pPr algn="ctr" indent="0" marL="0">
-                        <a:buNone/>
-                      </a:pPr>
-                      <a:r>
-                        <a:rPr lang="en-US" sz="900" dirty="0">
-                          <a:solidFill>
-                            <a:srgbClr val="000000"/>
-                          </a:solidFill>
-                          <a:latin typeface="Arial" pitchFamily="34" charset="0"/>
-                          <a:ea typeface="Arial" pitchFamily="34" charset="-122"/>
-                          <a:cs typeface="Arial" pitchFamily="34" charset="-120"/>
-                        </a:rPr>
-                        <a:t>7.42</a:t>
-                      </a:r>
-                      <a:endParaRPr lang="en-US" sz="900" dirty="0">
-                        <a:latin typeface="Arial" charset="0"/>
-                        <a:ea typeface="Arial" charset="0"/>
-                        <a:cs typeface="Arial" charset="0"/>
-                      </a:endParaRPr>
-                    </a:p>
-                  </a:txBody>
-                  <a:tcPr marL="91440" marR="91440" marT="45720" marB="45720">
-                    <a:lnL w="6350" cap="flat" cmpd="sng" algn="ctr">
-                      <a:solidFill>
-                        <a:srgbClr val="CBD5E1"/>
-                      </a:solidFill>
-                      <a:prstDash val="solid"/>
-                      <a:round/>
-                      <a:headEnd type="none" w="med" len="med"/>
-                      <a:tailEnd type="none" w="med" len="med"/>
-                    </a:lnL>
-                    <a:lnR w="6350" cap="flat" cmpd="sng" algn="ctr">
-                      <a:solidFill>
-                        <a:srgbClr val="CBD5E1"/>
-                      </a:solidFill>
-                      <a:prstDash val="solid"/>
-                      <a:round/>
-                      <a:headEnd type="none" w="med" len="med"/>
-                      <a:tailEnd type="none" w="med" len="med"/>
-                    </a:lnR>
-                    <a:lnT w="6350" cap="flat" cmpd="sng" algn="ctr">
-                      <a:solidFill>
-                        <a:srgbClr val="CBD5E1"/>
-                      </a:solidFill>
-                      <a:prstDash val="solid"/>
-                      <a:round/>
-                      <a:headEnd type="none" w="med" len="med"/>
-                      <a:tailEnd type="none" w="med" len="med"/>
-                    </a:lnT>
-                    <a:lnB w="6350" cap="flat" cmpd="sng" algn="ctr">
-                      <a:solidFill>
-                        <a:srgbClr val="CBD5E1"/>
-                      </a:solidFill>
-                      <a:prstDash val="solid"/>
-                      <a:round/>
-                      <a:headEnd type="none" w="med" len="med"/>
-                      <a:tailEnd type="none" w="med" len="med"/>
-                    </a:lnB>
-                    <a:solidFill>
-                      <a:srgbClr val="FFFFFF"/>
                     </a:solidFill>
                   </a:tcPr>
                 </a:tc>
@@ -9258,7 +9277,7 @@
                       <a:tailEnd type="none" w="med" len="med"/>
                     </a:lnB>
                     <a:solidFill>
-                      <a:srgbClr val="E8EFF8"/>
+                      <a:srgbClr val="FFFFFF"/>
                     </a:solidFill>
                   </a:tcPr>
                 </a:tc>
@@ -9279,281 +9298,7 @@
                           <a:ea typeface="Arial" pitchFamily="34" charset="-122"/>
                           <a:cs typeface="Arial" pitchFamily="34" charset="-120"/>
                         </a:rPr>
-                        <a:t>21</a:t>
-                      </a:r>
-                      <a:endParaRPr lang="en-US" sz="900" dirty="0">
-                        <a:latin typeface="Arial" charset="0"/>
-                        <a:ea typeface="Arial" charset="0"/>
-                        <a:cs typeface="Arial" charset="0"/>
-                      </a:endParaRPr>
-                    </a:p>
-                  </a:txBody>
-                  <a:tcPr marL="91440" marR="91440" marT="45720" marB="45720">
-                    <a:lnL w="6350" cap="flat" cmpd="sng" algn="ctr">
-                      <a:solidFill>
-                        <a:srgbClr val="CBD5E1"/>
-                      </a:solidFill>
-                      <a:prstDash val="solid"/>
-                      <a:round/>
-                      <a:headEnd type="none" w="med" len="med"/>
-                      <a:tailEnd type="none" w="med" len="med"/>
-                    </a:lnL>
-                    <a:lnR w="6350" cap="flat" cmpd="sng" algn="ctr">
-                      <a:solidFill>
-                        <a:srgbClr val="CBD5E1"/>
-                      </a:solidFill>
-                      <a:prstDash val="solid"/>
-                      <a:round/>
-                      <a:headEnd type="none" w="med" len="med"/>
-                      <a:tailEnd type="none" w="med" len="med"/>
-                    </a:lnR>
-                    <a:lnT w="6350" cap="flat" cmpd="sng" algn="ctr">
-                      <a:solidFill>
-                        <a:srgbClr val="CBD5E1"/>
-                      </a:solidFill>
-                      <a:prstDash val="solid"/>
-                      <a:round/>
-                      <a:headEnd type="none" w="med" len="med"/>
-                      <a:tailEnd type="none" w="med" len="med"/>
-                    </a:lnT>
-                    <a:lnB w="6350" cap="flat" cmpd="sng" algn="ctr">
-                      <a:solidFill>
-                        <a:srgbClr val="CBD5E1"/>
-                      </a:solidFill>
-                      <a:prstDash val="solid"/>
-                      <a:round/>
-                      <a:headEnd type="none" w="med" len="med"/>
-                      <a:tailEnd type="none" w="med" len="med"/>
-                    </a:lnB>
-                    <a:solidFill>
-                      <a:srgbClr val="E8EFF8"/>
-                    </a:solidFill>
-                  </a:tcPr>
-                </a:tc>
-                <a:tc>
-                  <a:txBody>
-                    <a:bodyPr/>
-                    <a:lstStyle/>
-                    <a:p>
-                      <a:pPr algn="ctr" indent="0" marL="0">
-                        <a:buNone/>
-                      </a:pPr>
-                      <a:r>
-                        <a:rPr lang="en-US" sz="900" dirty="0">
-                          <a:solidFill>
-                            <a:srgbClr val="000000"/>
-                          </a:solidFill>
-                          <a:latin typeface="Arial" pitchFamily="34" charset="0"/>
-                          <a:ea typeface="Arial" pitchFamily="34" charset="-122"/>
-                          <a:cs typeface="Arial" pitchFamily="34" charset="-120"/>
-                        </a:rPr>
-                        <a:t>3.48</a:t>
-                      </a:r>
-                      <a:endParaRPr lang="en-US" sz="900" dirty="0">
-                        <a:latin typeface="Arial" charset="0"/>
-                        <a:ea typeface="Arial" charset="0"/>
-                        <a:cs typeface="Arial" charset="0"/>
-                      </a:endParaRPr>
-                    </a:p>
-                  </a:txBody>
-                  <a:tcPr marL="91440" marR="91440" marT="45720" marB="45720">
-                    <a:lnL w="6350" cap="flat" cmpd="sng" algn="ctr">
-                      <a:solidFill>
-                        <a:srgbClr val="CBD5E1"/>
-                      </a:solidFill>
-                      <a:prstDash val="solid"/>
-                      <a:round/>
-                      <a:headEnd type="none" w="med" len="med"/>
-                      <a:tailEnd type="none" w="med" len="med"/>
-                    </a:lnL>
-                    <a:lnR w="6350" cap="flat" cmpd="sng" algn="ctr">
-                      <a:solidFill>
-                        <a:srgbClr val="CBD5E1"/>
-                      </a:solidFill>
-                      <a:prstDash val="solid"/>
-                      <a:round/>
-                      <a:headEnd type="none" w="med" len="med"/>
-                      <a:tailEnd type="none" w="med" len="med"/>
-                    </a:lnR>
-                    <a:lnT w="6350" cap="flat" cmpd="sng" algn="ctr">
-                      <a:solidFill>
-                        <a:srgbClr val="CBD5E1"/>
-                      </a:solidFill>
-                      <a:prstDash val="solid"/>
-                      <a:round/>
-                      <a:headEnd type="none" w="med" len="med"/>
-                      <a:tailEnd type="none" w="med" len="med"/>
-                    </a:lnT>
-                    <a:lnB w="6350" cap="flat" cmpd="sng" algn="ctr">
-                      <a:solidFill>
-                        <a:srgbClr val="CBD5E1"/>
-                      </a:solidFill>
-                      <a:prstDash val="solid"/>
-                      <a:round/>
-                      <a:headEnd type="none" w="med" len="med"/>
-                      <a:tailEnd type="none" w="med" len="med"/>
-                    </a:lnB>
-                    <a:solidFill>
-                      <a:srgbClr val="E8EFF8"/>
-                    </a:solidFill>
-                  </a:tcPr>
-                </a:tc>
-                <a:tc>
-                  <a:txBody>
-                    <a:bodyPr/>
-                    <a:lstStyle/>
-                    <a:p>
-                      <a:pPr algn="ctr" indent="0" marL="0">
-                        <a:buNone/>
-                      </a:pPr>
-                      <a:r>
-                        <a:rPr lang="en-US" sz="900" dirty="0">
-                          <a:solidFill>
-                            <a:srgbClr val="000000"/>
-                          </a:solidFill>
-                          <a:latin typeface="Arial" pitchFamily="34" charset="0"/>
-                          <a:ea typeface="Arial" pitchFamily="34" charset="-122"/>
-                          <a:cs typeface="Arial" pitchFamily="34" charset="-120"/>
-                        </a:rPr>
-                        <a:t>/5 (×2)</a:t>
-                      </a:r>
-                      <a:endParaRPr lang="en-US" sz="900" dirty="0">
-                        <a:latin typeface="Arial" charset="0"/>
-                        <a:ea typeface="Arial" charset="0"/>
-                        <a:cs typeface="Arial" charset="0"/>
-                      </a:endParaRPr>
-                    </a:p>
-                  </a:txBody>
-                  <a:tcPr marL="91440" marR="91440" marT="45720" marB="45720">
-                    <a:lnL w="6350" cap="flat" cmpd="sng" algn="ctr">
-                      <a:solidFill>
-                        <a:srgbClr val="CBD5E1"/>
-                      </a:solidFill>
-                      <a:prstDash val="solid"/>
-                      <a:round/>
-                      <a:headEnd type="none" w="med" len="med"/>
-                      <a:tailEnd type="none" w="med" len="med"/>
-                    </a:lnL>
-                    <a:lnR w="6350" cap="flat" cmpd="sng" algn="ctr">
-                      <a:solidFill>
-                        <a:srgbClr val="CBD5E1"/>
-                      </a:solidFill>
-                      <a:prstDash val="solid"/>
-                      <a:round/>
-                      <a:headEnd type="none" w="med" len="med"/>
-                      <a:tailEnd type="none" w="med" len="med"/>
-                    </a:lnR>
-                    <a:lnT w="6350" cap="flat" cmpd="sng" algn="ctr">
-                      <a:solidFill>
-                        <a:srgbClr val="CBD5E1"/>
-                      </a:solidFill>
-                      <a:prstDash val="solid"/>
-                      <a:round/>
-                      <a:headEnd type="none" w="med" len="med"/>
-                      <a:tailEnd type="none" w="med" len="med"/>
-                    </a:lnT>
-                    <a:lnB w="6350" cap="flat" cmpd="sng" algn="ctr">
-                      <a:solidFill>
-                        <a:srgbClr val="CBD5E1"/>
-                      </a:solidFill>
-                      <a:prstDash val="solid"/>
-                      <a:round/>
-                      <a:headEnd type="none" w="med" len="med"/>
-                      <a:tailEnd type="none" w="med" len="med"/>
-                    </a:lnB>
-                    <a:solidFill>
-                      <a:srgbClr val="E8EFF8"/>
-                    </a:solidFill>
-                  </a:tcPr>
-                </a:tc>
-                <a:tc>
-                  <a:txBody>
-                    <a:bodyPr/>
-                    <a:lstStyle/>
-                    <a:p>
-                      <a:pPr algn="ctr" indent="0" marL="0">
-                        <a:buNone/>
-                      </a:pPr>
-                      <a:r>
-                        <a:rPr lang="en-US" sz="900" dirty="0">
-                          <a:solidFill>
-                            <a:srgbClr val="000000"/>
-                          </a:solidFill>
-                          <a:latin typeface="Arial" pitchFamily="34" charset="0"/>
-                          <a:ea typeface="Arial" pitchFamily="34" charset="-122"/>
-                          <a:cs typeface="Arial" pitchFamily="34" charset="-120"/>
-                        </a:rPr>
-                        <a:t>6.95</a:t>
-                      </a:r>
-                      <a:endParaRPr lang="en-US" sz="900" dirty="0">
-                        <a:latin typeface="Arial" charset="0"/>
-                        <a:ea typeface="Arial" charset="0"/>
-                        <a:cs typeface="Arial" charset="0"/>
-                      </a:endParaRPr>
-                    </a:p>
-                  </a:txBody>
-                  <a:tcPr marL="91440" marR="91440" marT="45720" marB="45720">
-                    <a:lnL w="6350" cap="flat" cmpd="sng" algn="ctr">
-                      <a:solidFill>
-                        <a:srgbClr val="CBD5E1"/>
-                      </a:solidFill>
-                      <a:prstDash val="solid"/>
-                      <a:round/>
-                      <a:headEnd type="none" w="med" len="med"/>
-                      <a:tailEnd type="none" w="med" len="med"/>
-                    </a:lnL>
-                    <a:lnR w="6350" cap="flat" cmpd="sng" algn="ctr">
-                      <a:solidFill>
-                        <a:srgbClr val="CBD5E1"/>
-                      </a:solidFill>
-                      <a:prstDash val="solid"/>
-                      <a:round/>
-                      <a:headEnd type="none" w="med" len="med"/>
-                      <a:tailEnd type="none" w="med" len="med"/>
-                    </a:lnR>
-                    <a:lnT w="6350" cap="flat" cmpd="sng" algn="ctr">
-                      <a:solidFill>
-                        <a:srgbClr val="CBD5E1"/>
-                      </a:solidFill>
-                      <a:prstDash val="solid"/>
-                      <a:round/>
-                      <a:headEnd type="none" w="med" len="med"/>
-                      <a:tailEnd type="none" w="med" len="med"/>
-                    </a:lnT>
-                    <a:lnB w="6350" cap="flat" cmpd="sng" algn="ctr">
-                      <a:solidFill>
-                        <a:srgbClr val="CBD5E1"/>
-                      </a:solidFill>
-                      <a:prstDash val="solid"/>
-                      <a:round/>
-                      <a:headEnd type="none" w="med" len="med"/>
-                      <a:tailEnd type="none" w="med" len="med"/>
-                    </a:lnB>
-                    <a:solidFill>
-                      <a:srgbClr val="E8EFF8"/>
-                    </a:solidFill>
-                  </a:tcPr>
-                </a:tc>
-              </a:tr>
-              <a:tr h="201168">
-                <a:tc>
-                  <a:txBody>
-                    <a:bodyPr/>
-                    <a:lstStyle/>
-                    <a:p>
-                      <a:pPr algn="ctr" indent="0" marL="0">
-                        <a:buNone/>
-                      </a:pPr>
-                      <a:r>
-                        <a:rPr lang="en-US" sz="900" dirty="0">
-                          <a:solidFill>
-                            <a:srgbClr val="000000"/>
-                          </a:solidFill>
-                          <a:latin typeface="Arial" pitchFamily="34" charset="0"/>
-                          <a:ea typeface="Arial" pitchFamily="34" charset="-122"/>
-                          <a:cs typeface="Arial" pitchFamily="34" charset="-120"/>
-                        </a:rPr>
-                        <a:t>Google</a:t>
+                        <a:t>20</a:t>
                       </a:r>
                       <a:endParaRPr lang="en-US" sz="900" dirty="0">
                         <a:latin typeface="Arial" charset="0"/>
@@ -9621,75 +9366,7 @@
                           <a:ea typeface="Arial" pitchFamily="34" charset="-122"/>
                           <a:cs typeface="Arial" pitchFamily="34" charset="-120"/>
                         </a:rPr>
-                        <a:t>15</a:t>
-                      </a:r>
-                      <a:endParaRPr lang="en-US" sz="900" dirty="0">
-                        <a:latin typeface="Arial" charset="0"/>
-                        <a:ea typeface="Arial" charset="0"/>
-                        <a:cs typeface="Arial" charset="0"/>
-                      </a:endParaRPr>
-                    </a:p>
-                  </a:txBody>
-                  <a:tcPr marL="91440" marR="91440" marT="45720" marB="45720">
-                    <a:lnL w="6350" cap="flat" cmpd="sng" algn="ctr">
-                      <a:solidFill>
-                        <a:srgbClr val="CBD5E1"/>
-                      </a:solidFill>
-                      <a:prstDash val="solid"/>
-                      <a:round/>
-                      <a:headEnd type="none" w="med" len="med"/>
-                      <a:tailEnd type="none" w="med" len="med"/>
-                    </a:lnL>
-                    <a:lnR w="6350" cap="flat" cmpd="sng" algn="ctr">
-                      <a:solidFill>
-                        <a:srgbClr val="CBD5E1"/>
-                      </a:solidFill>
-                      <a:prstDash val="solid"/>
-                      <a:round/>
-                      <a:headEnd type="none" w="med" len="med"/>
-                      <a:tailEnd type="none" w="med" len="med"/>
-                    </a:lnR>
-                    <a:lnT w="6350" cap="flat" cmpd="sng" algn="ctr">
-                      <a:solidFill>
-                        <a:srgbClr val="CBD5E1"/>
-                      </a:solidFill>
-                      <a:prstDash val="solid"/>
-                      <a:round/>
-                      <a:headEnd type="none" w="med" len="med"/>
-                      <a:tailEnd type="none" w="med" len="med"/>
-                    </a:lnT>
-                    <a:lnB w="6350" cap="flat" cmpd="sng" algn="ctr">
-                      <a:solidFill>
-                        <a:srgbClr val="CBD5E1"/>
-                      </a:solidFill>
-                      <a:prstDash val="solid"/>
-                      <a:round/>
-                      <a:headEnd type="none" w="med" len="med"/>
-                      <a:tailEnd type="none" w="med" len="med"/>
-                    </a:lnB>
-                    <a:solidFill>
-                      <a:srgbClr val="FFFFFF"/>
-                    </a:solidFill>
-                  </a:tcPr>
-                </a:tc>
-                <a:tc>
-                  <a:txBody>
-                    <a:bodyPr/>
-                    <a:lstStyle/>
-                    <a:p>
-                      <a:pPr algn="ctr" indent="0" marL="0">
-                        <a:buNone/>
-                      </a:pPr>
-                      <a:r>
-                        <a:rPr lang="en-US" sz="900" dirty="0">
-                          <a:solidFill>
-                            <a:srgbClr val="000000"/>
-                          </a:solidFill>
-                          <a:latin typeface="Arial" pitchFamily="34" charset="0"/>
-                          <a:ea typeface="Arial" pitchFamily="34" charset="-122"/>
-                          <a:cs typeface="Arial" pitchFamily="34" charset="-120"/>
-                        </a:rPr>
-                        <a:t>3.4</a:t>
+                        <a:t>3.5</a:t>
                       </a:r>
                       <a:endParaRPr lang="en-US" sz="900" dirty="0">
                         <a:latin typeface="Arial" charset="0"/>
@@ -9825,7 +9502,7 @@
                           <a:ea typeface="Arial" pitchFamily="34" charset="-122"/>
                           <a:cs typeface="Arial" pitchFamily="34" charset="-120"/>
                         </a:rPr>
-                        <a:t>6.8</a:t>
+                        <a:t>7</a:t>
                       </a:r>
                       <a:endParaRPr lang="en-US" sz="900" dirty="0">
                         <a:latin typeface="Arial" charset="0"/>
@@ -10233,7 +9910,7 @@
                 <a:ea typeface="Arial" pitchFamily="34" charset="-122"/>
                 <a:cs typeface="Arial" pitchFamily="34" charset="-120"/>
               </a:rPr>
-              <a:t>98件（69.5%）</a:t>
+              <a:t>96件（67.6%）</a:t>
             </a:r>
             <a:endParaRPr lang="en-US" sz="1100" dirty="0"/>
           </a:p>
@@ -10331,7 +10008,7 @@
                 <a:ea typeface="Arial" pitchFamily="34" charset="-122"/>
                 <a:cs typeface="Arial" pitchFamily="34" charset="-120"/>
               </a:rPr>
-              <a:t>24件（17.0%）</a:t>
+              <a:t>26件（18.3%）</a:t>
             </a:r>
             <a:endParaRPr lang="en-US" sz="1100" dirty="0"/>
           </a:p>
@@ -10429,7 +10106,7 @@
                 <a:ea typeface="Arial" pitchFamily="34" charset="-122"/>
                 <a:cs typeface="Arial" pitchFamily="34" charset="-120"/>
               </a:rPr>
-              <a:t>19件（13.5%）</a:t>
+              <a:t>20件（14.1%）</a:t>
             </a:r>
             <a:endParaRPr lang="en-US" sz="1100" dirty="0"/>
           </a:p>
@@ -10841,7 +10518,7 @@
                 <a:ea typeface="Arial" pitchFamily="34" charset="-122"/>
                 <a:cs typeface="Arial" pitchFamily="34" charset="-120"/>
               </a:rPr>
-              <a:t>予約時に見落としていたこちらのミスかもしれないが、内装工事しており、その関係で音がうるさく、朝食も弁当だった</a:t>
+              <a:t>部屋も広く、快適でした ホテルが改装中が残念で、朝食がバイキングでないのが、残念でした</a:t>
             </a:r>
             <a:endParaRPr lang="en-US" sz="900" dirty="0"/>
           </a:p>
@@ -10880,7 +10557,7 @@
                 <a:ea typeface="Arial" pitchFamily="34" charset="-122"/>
                 <a:cs typeface="Arial" pitchFamily="34" charset="-120"/>
               </a:rPr>
-              <a:t>「改装中のため朝食がお弁当のため味気ない為ショックだった」</a:t>
+              <a:t>「朝食は通常通りです🍽️🥐🧇  改装工事が完了しました👷🏻‍♂️  お手頃価格で美味しい」</a:t>
             </a:r>
             <a:endParaRPr lang="en-US" sz="900" dirty="0"/>
           </a:p>
@@ -11064,7 +10741,7 @@
                 <a:ea typeface="Arial" pitchFamily="34" charset="-122"/>
                 <a:cs typeface="Arial" pitchFamily="34" charset="-120"/>
               </a:rPr>
-              <a:t>立地もいいですし、客層もまずまず</a:t>
+              <a:t>観光としての立地は凄くいいともう 部屋が思っていた以上に狭い  タオルかける場所がない  ユニットバスが狭すぎる ...</a:t>
             </a:r>
             <a:endParaRPr lang="en-US" sz="900" dirty="0"/>
           </a:p>
@@ -11103,7 +10780,7 @@
                 <a:ea typeface="Arial" pitchFamily="34" charset="-122"/>
                 <a:cs typeface="Arial" pitchFamily="34" charset="-120"/>
               </a:rPr>
-              <a:t>「さらに駅近で便利な立地です」</a:t>
+              <a:t>「近くのスタッフに料理の追加について質問をしたのですが、厨房にいる料理人に直接聞いてくださいと言われたのがビックリしました」</a:t>
             </a:r>
             <a:endParaRPr lang="en-US" sz="900" dirty="0"/>
           </a:p>
@@ -11287,7 +10964,7 @@
                 <a:ea typeface="Arial" pitchFamily="34" charset="-122"/>
                 <a:cs typeface="Arial" pitchFamily="34" charset="-120"/>
               </a:rPr>
-              <a:t>部屋は狭めで設備も古いが、スタッフの応対も丁寧でウェルカムドリンクもあります</a:t>
+              <a:t>チェックインは機械で行いますが、スタッフがいつでも対応してくれるので安心です</a:t>
             </a:r>
             <a:endParaRPr lang="en-US" sz="900" dirty="0"/>
           </a:p>
@@ -11326,7 +11003,7 @@
                 <a:ea typeface="Arial" pitchFamily="34" charset="-122"/>
                 <a:cs typeface="Arial" pitchFamily="34" charset="-120"/>
               </a:rPr>
-              <a:t>「朝食弁当はまずいし、朝食がパン派の人は対応なし」</a:t>
+              <a:t>「近くのスタッフに料理の追加について質問をしたのですが、厨房にいる料理人に直接聞いてくださいと言われたのがビックリしました」</a:t>
             </a:r>
             <a:endParaRPr lang="en-US" sz="900" dirty="0"/>
           </a:p>
@@ -11510,7 +11187,7 @@
                 <a:ea typeface="Arial" pitchFamily="34" charset="-122"/>
                 <a:cs typeface="Arial" pitchFamily="34" charset="-120"/>
               </a:rPr>
-              <a:t>7,000円で朝食ビュッフェ付きは格安かと思います また6:30から朝食可能でしたので、出発まで時間ない人はおすす...</a:t>
+              <a:t>新しく改装されたばかりの店内は清潔で明るく、テーブルや椅子が配置され、居心地の良い雰囲気です</a:t>
             </a:r>
             <a:endParaRPr lang="en-US" sz="900" dirty="0"/>
           </a:p>
@@ -11549,7 +11226,7 @@
                 <a:ea typeface="Arial" pitchFamily="34" charset="-122"/>
                 <a:cs typeface="Arial" pitchFamily="34" charset="-120"/>
               </a:rPr>
-              <a:t>「連泊なのにお部屋の清掃入られたことに驚きました」</a:t>
+              <a:t>「やっと食べようとしたら、横で机のアルコール清掃をされて、少しかかってしまった」</a:t>
             </a:r>
             <a:endParaRPr lang="en-US" sz="900" dirty="0"/>
           </a:p>
@@ -11733,7 +11410,7 @@
                 <a:ea typeface="Arial" pitchFamily="34" charset="-122"/>
                 <a:cs typeface="Arial" pitchFamily="34" charset="-120"/>
               </a:rPr>
-              <a:t>部屋は狭めで設備も古いが、スタッフの応対も丁寧でウェルカムドリンクもあります</a:t>
+              <a:t>部屋も広く、快適でした ホテルが改装中が残念で、朝食がバイキングでないのが、残念でした</a:t>
             </a:r>
             <a:endParaRPr lang="en-US" sz="900" dirty="0"/>
           </a:p>
@@ -11772,7 +11449,7 @@
                 <a:ea typeface="Arial" pitchFamily="34" charset="-122"/>
                 <a:cs typeface="Arial" pitchFamily="34" charset="-120"/>
               </a:rPr>
-              <a:t>「7,000円で朝食ビュッフェ付きは格安かと思います また6:30から朝食可能でしたので、出発まで時間ない人はおすす...」</a:t>
+              <a:t>「2階のカフェ兼ブックルームは明るく快適です🍀」</a:t>
             </a:r>
             <a:endParaRPr lang="en-US" sz="900" dirty="0"/>
           </a:p>
@@ -11956,7 +11633,7 @@
                 <a:ea typeface="Arial" pitchFamily="34" charset="-122"/>
                 <a:cs typeface="Arial" pitchFamily="34" charset="-120"/>
               </a:rPr>
-              <a:t>道向かいにコンビニがあり、近隣に美味しい飲食店も多く、中華街や赤レンガ等の観光地まで徒歩圏内</a:t>
+              <a:t>もし気が乗らなければ、ざっと見て階下のローソンかセブンイレブンに行こうと思っていたほどです</a:t>
             </a:r>
             <a:endParaRPr lang="en-US" sz="900" dirty="0"/>
           </a:p>
@@ -11995,7 +11672,7 @@
                 <a:ea typeface="Arial" pitchFamily="34" charset="-122"/>
                 <a:cs typeface="Arial" pitchFamily="34" charset="-120"/>
               </a:rPr>
-              <a:t>「m(_ _)m レストラン」</a:t>
+              <a:t>「正直なところ、朝食にはあまり期待していませんでしたし、もしそこで食べる気がしなかったら、ざっと見て階下のローソンか...」</a:t>
             </a:r>
             <a:endParaRPr lang="en-US" sz="900" dirty="0"/>
           </a:p>
@@ -12685,7 +12362,7 @@
                           <a:ea typeface="Arial" pitchFamily="34" charset="-122"/>
                           <a:cs typeface="Arial" pitchFamily="34" charset="-120"/>
                         </a:rPr>
-                        <a:t>まあそれはいいのですが、本件で不愉快な思いをしている宿泊客が多数存在するのは確実なのに、それと知りながら平気で行う...</a:t>
+                        <a:t>部屋も広く、快適でした ホテルが改装中が残念で、朝食がバイキングでないのが、残念でした</a:t>
                       </a:r>
                       <a:endParaRPr lang="en-US" sz="900" dirty="0">
                         <a:latin typeface="Arial" charset="0"/>
@@ -12753,7 +12430,7 @@
                           <a:ea typeface="Arial" pitchFamily="34" charset="-122"/>
                           <a:cs typeface="Arial" pitchFamily="34" charset="-120"/>
                         </a:rPr>
-                        <a:t>24件</a:t>
+                        <a:t>28件</a:t>
                       </a:r>
                       <a:endParaRPr lang="en-US" sz="900" dirty="0">
                         <a:latin typeface="Arial" charset="0"/>
@@ -12959,7 +12636,7 @@
                           <a:ea typeface="Arial" pitchFamily="34" charset="-122"/>
                           <a:cs typeface="Arial" pitchFamily="34" charset="-120"/>
                         </a:rPr>
-                        <a:t>部屋は狭めで設備も古いが、スタッフの応対も丁寧でウェルカムドリンクもあります</a:t>
+                        <a:t>ダブルルーム（大型ベッド1台）でも、28インチのスーツケース2個と機内持ち込みサイズのスーツケース2個を壁際に立て...</a:t>
                       </a:r>
                       <a:endParaRPr lang="en-US" sz="900" dirty="0">
                         <a:latin typeface="Arial" charset="0"/>
@@ -13027,7 +12704,7 @@
                           <a:ea typeface="Arial" pitchFamily="34" charset="-122"/>
                           <a:cs typeface="Arial" pitchFamily="34" charset="-120"/>
                         </a:rPr>
-                        <a:t>9件</a:t>
+                        <a:t>12件</a:t>
                       </a:r>
                       <a:endParaRPr lang="en-US" sz="900" dirty="0">
                         <a:latin typeface="Arial" charset="0"/>
@@ -13165,7 +12842,7 @@
                           <a:ea typeface="Arial" pitchFamily="34" charset="-122"/>
                           <a:cs typeface="Arial" pitchFamily="34" charset="-120"/>
                         </a:rPr>
-                        <a:t>防音性能</a:t>
+                        <a:t>浴室・水回り</a:t>
                       </a:r>
                       <a:endParaRPr lang="en-US" sz="900" dirty="0">
                         <a:latin typeface="Arial" charset="0"/>
@@ -13233,7 +12910,7 @@
                           <a:ea typeface="Arial" pitchFamily="34" charset="-122"/>
                           <a:cs typeface="Arial" pitchFamily="34" charset="-120"/>
                         </a:rPr>
-                        <a:t>予約時に見落としていたこちらのミスかもしれないが、内装工事しており、その関係で音がうるさく、朝食も弁当だった</a:t>
+                        <a:t>嫌な臭いは一切なく、カーペット、カーテン、そしてバスルームまでピカピカでした</a:t>
                       </a:r>
                       <a:endParaRPr lang="en-US" sz="900" dirty="0">
                         <a:latin typeface="Arial" charset="0"/>
@@ -13301,7 +12978,7 @@
                           <a:ea typeface="Arial" pitchFamily="34" charset="-122"/>
                           <a:cs typeface="Arial" pitchFamily="34" charset="-120"/>
                         </a:rPr>
-                        <a:t>7件</a:t>
+                        <a:t>10件</a:t>
                       </a:r>
                       <a:endParaRPr lang="en-US" sz="900" dirty="0">
                         <a:latin typeface="Arial" charset="0"/>
@@ -13439,7 +13116,7 @@
                           <a:ea typeface="Arial" pitchFamily="34" charset="-122"/>
                           <a:cs typeface="Arial" pitchFamily="34" charset="-120"/>
                         </a:rPr>
-                        <a:t>浴室・水回り</a:t>
+                        <a:t>防音性能</a:t>
                       </a:r>
                       <a:endParaRPr lang="en-US" sz="900" dirty="0">
                         <a:latin typeface="Arial" charset="0"/>
@@ -13507,7 +13184,7 @@
                           <a:ea typeface="Arial" pitchFamily="34" charset="-122"/>
                           <a:cs typeface="Arial" pitchFamily="34" charset="-120"/>
                         </a:rPr>
-                        <a:t>部屋着（バスローブ）はエレベーター前にあるのでそれを取って行くスタイルです</a:t>
+                        <a:t>予約時に見落としていたこちらのミスかもしれないが、内装工事しており、その関係で音がうるさく、朝食も弁当だった</a:t>
                       </a:r>
                       <a:endParaRPr lang="en-US" sz="900" dirty="0">
                         <a:latin typeface="Arial" charset="0"/>
@@ -13713,7 +13390,7 @@
                           <a:ea typeface="Arial" pitchFamily="34" charset="-122"/>
                           <a:cs typeface="Arial" pitchFamily="34" charset="-120"/>
                         </a:rPr>
-                        <a:t>設備の老朽化</a:t>
+                        <a:t>窓・採光</a:t>
                       </a:r>
                       <a:endParaRPr lang="en-US" sz="900" dirty="0">
                         <a:latin typeface="Arial" charset="0"/>
@@ -13781,7 +13458,7 @@
                           <a:ea typeface="Arial" pitchFamily="34" charset="-122"/>
                           <a:cs typeface="Arial" pitchFamily="34" charset="-120"/>
                         </a:rPr>
-                        <a:t>部屋は狭めで設備も古いが、スタッフの応対も丁寧でウェルカムドリンクもあります</a:t>
+                        <a:t>2階のカフェ兼ブックルームは明るく快適です🍀</a:t>
                       </a:r>
                       <a:endParaRPr lang="en-US" sz="900" dirty="0">
                         <a:latin typeface="Arial" charset="0"/>
@@ -13849,7 +13526,7 @@
                           <a:ea typeface="Arial" pitchFamily="34" charset="-122"/>
                           <a:cs typeface="Arial" pitchFamily="34" charset="-120"/>
                         </a:rPr>
-                        <a:t>4件</a:t>
+                        <a:t>5件</a:t>
                       </a:r>
                       <a:endParaRPr lang="en-US" sz="900" dirty="0">
                         <a:latin typeface="Arial" charset="0"/>
@@ -14261,7 +13938,7 @@
                           <a:ea typeface="Arial" pitchFamily="34" charset="-122"/>
                           <a:cs typeface="Arial" pitchFamily="34" charset="-120"/>
                         </a:rPr>
-                        <a:t>エアコン・空調</a:t>
+                        <a:t>設備の老朽化</a:t>
                       </a:r>
                       <a:endParaRPr lang="en-US" sz="900" dirty="0">
                         <a:latin typeface="Arial" charset="0"/>
@@ -14329,7 +14006,7 @@
                           <a:ea typeface="Arial" pitchFamily="34" charset="-122"/>
                           <a:cs typeface="Arial" pitchFamily="34" charset="-120"/>
                         </a:rPr>
-                        <a:t>La struttura è il classico business hotel con stanze picc...</a:t>
+                        <a:t>部屋は狭めで設備も古いが、スタッフの応対も丁寧でウェルカムドリンクもあります</a:t>
                       </a:r>
                       <a:endParaRPr lang="en-US" sz="900" dirty="0">
                         <a:latin typeface="Arial" charset="0"/>
@@ -14535,7 +14212,7 @@
                           <a:ea typeface="Arial" pitchFamily="34" charset="-122"/>
                           <a:cs typeface="Arial" pitchFamily="34" charset="-120"/>
                         </a:rPr>
-                        <a:t>臭い・匂い</a:t>
+                        <a:t>エアコン・空調</a:t>
                       </a:r>
                       <a:endParaRPr lang="en-US" sz="900" dirty="0">
                         <a:latin typeface="Arial" charset="0"/>
@@ -14603,7 +14280,7 @@
                           <a:ea typeface="Arial" pitchFamily="34" charset="-122"/>
                           <a:cs typeface="Arial" pitchFamily="34" charset="-120"/>
                         </a:rPr>
-                        <a:t>改修中ということで朝食は弁当でしたが、美味しくなかった、 部屋が薬品のような臭いが強くて、しばらく寝られなかった ...</a:t>
+                        <a:t>La struttura è il classico business hotel con stanze picc...</a:t>
                       </a:r>
                       <a:endParaRPr lang="en-US" sz="900" dirty="0">
                         <a:latin typeface="Arial" charset="0"/>
@@ -14671,7 +14348,7 @@
                           <a:ea typeface="Arial" pitchFamily="34" charset="-122"/>
                           <a:cs typeface="Arial" pitchFamily="34" charset="-120"/>
                         </a:rPr>
-                        <a:t>1件</a:t>
+                        <a:t>3件</a:t>
                       </a:r>
                       <a:endParaRPr lang="en-US" sz="900" dirty="0">
                         <a:latin typeface="Arial" charset="0"/>
@@ -14809,7 +14486,7 @@
                           <a:ea typeface="Arial" pitchFamily="34" charset="-122"/>
                           <a:cs typeface="Arial" pitchFamily="34" charset="-120"/>
                         </a:rPr>
-                        <a:t>窓・採光</a:t>
+                        <a:t>臭い・匂い</a:t>
                       </a:r>
                       <a:endParaRPr lang="en-US" sz="900" dirty="0">
                         <a:latin typeface="Arial" charset="0"/>
@@ -14877,7 +14554,7 @@
                           <a:ea typeface="Arial" pitchFamily="34" charset="-122"/>
                           <a:cs typeface="Arial" pitchFamily="34" charset="-120"/>
                         </a:rPr>
-                        <a:t>窓から富士山が見えました</a:t>
+                        <a:t>嫌な臭いは一切なく、カーペット、カーテン、そしてバスルームまでピカピカでした</a:t>
                       </a:r>
                       <a:endParaRPr lang="en-US" sz="900" dirty="0">
                         <a:latin typeface="Arial" charset="0"/>
@@ -14945,7 +14622,7 @@
                           <a:ea typeface="Arial" pitchFamily="34" charset="-122"/>
                           <a:cs typeface="Arial" pitchFamily="34" charset="-120"/>
                         </a:rPr>
-                        <a:t>1件</a:t>
+                        <a:t>2件</a:t>
                       </a:r>
                       <a:endParaRPr lang="en-US" sz="900" dirty="0">
                         <a:latin typeface="Arial" charset="0"/>

--- a/納品レポート/ホテル別レポート/comfort_yokohama_kannai_口コミ分析レポート.pptx
+++ b/納品レポート/ホテル別レポート/comfort_yokohama_kannai_口コミ分析レポート.pptx
@@ -208,16 +208,16 @@
                 <c:formatCode>General</c:formatCode>
                 <c:ptCount val="6"/>
                 <c:pt idx="0">
-                  <c:v>8.32</c:v>
+                  <c:v>8.28</c:v>
                 </c:pt>
                 <c:pt idx="1">
-                  <c:v>7.43</c:v>
+                  <c:v>7.85</c:v>
                 </c:pt>
                 <c:pt idx="2">
                   <c:v>7.43</c:v>
                 </c:pt>
                 <c:pt idx="3">
-                  <c:v>7.4</c:v>
+                  <c:v>7.38</c:v>
                 </c:pt>
                 <c:pt idx="4">
                   <c:v>7.07</c:v>
@@ -823,10 +823,10 @@
                 <c:formatCode>General</c:formatCode>
                 <c:ptCount val="9"/>
                 <c:pt idx="0">
-                  <c:v>31</c:v>
+                  <c:v>32</c:v>
                 </c:pt>
                 <c:pt idx="1">
-                  <c:v>7</c:v>
+                  <c:v>6</c:v>
                 </c:pt>
                 <c:pt idx="2">
                   <c:v>58</c:v>
@@ -841,13 +841,13 @@
                   <c:v>6</c:v>
                 </c:pt>
                 <c:pt idx="6">
-                  <c:v>10</c:v>
+                  <c:v>11</c:v>
                 </c:pt>
                 <c:pt idx="7">
                   <c:v>1</c:v>
                 </c:pt>
                 <c:pt idx="8">
-                  <c:v>9</c:v>
+                  <c:v>8</c:v>
                 </c:pt>
               </c:numCache>
             </c:numRef>
@@ -2818,7 +2818,7 @@
                 <a:ea typeface="Arial" pitchFamily="34" charset="-122"/>
                 <a:cs typeface="Arial" pitchFamily="34" charset="-120"/>
               </a:rPr>
-              <a:t>作成日：2026年3月23日</a:t>
+              <a:t>作成日：2026年3月24日</a:t>
             </a:r>
             <a:endParaRPr lang="en-US" sz="1000" dirty="0"/>
           </a:p>
@@ -3364,7 +3364,7 @@
                           <a:ea typeface="Arial" pitchFamily="34" charset="-122"/>
                           <a:cs typeface="Arial" pitchFamily="34" charset="-120"/>
                         </a:rPr>
-                        <a:t>7.41点</a:t>
+                        <a:t>7.43点</a:t>
                       </a:r>
                       <a:endParaRPr lang="en-US" sz="1000" dirty="0">
                         <a:latin typeface="Arial" charset="0"/>
@@ -5099,7 +5099,7 @@
                 <a:ea typeface="Arial" pitchFamily="34" charset="-122"/>
                 <a:cs typeface="Arial" pitchFamily="34" charset="-120"/>
               </a:rPr>
-              <a:t>7.41</a:t>
+              <a:t>7.43</a:t>
             </a:r>
             <a:endParaRPr lang="en-US" sz="3200" dirty="0"/>
           </a:p>
@@ -5622,7 +5622,7 @@
                 <a:ea typeface="Arial" pitchFamily="34" charset="-122"/>
                 <a:cs typeface="Arial" pitchFamily="34" charset="-120"/>
               </a:rPr>
-              <a:t>  部屋も広く、快適でした ホテルが改装中が残念で、朝食がバイキングでないのが、残念でした</a:t>
+              <a:t>  今回は朝食は食べていませんが、改装中とのことで、無料の朝食は弁当を配ってくれていたようです</a:t>
             </a:r>
             <a:endParaRPr lang="en-US" sz="1100" dirty="0"/>
           </a:p>
@@ -5662,7 +5662,7 @@
                 <a:ea typeface="Arial" pitchFamily="34" charset="-122"/>
                 <a:cs typeface="Arial" pitchFamily="34" charset="-120"/>
               </a:rPr>
-              <a:t>  観光としての立地は凄くいいともう 部屋が思っていた以上に狭い  タオルかける場所がない  ユニットバスが狭すぎる ...</a:t>
+              <a:t>  アクセス的には駅から近く、行きやすかったです</a:t>
             </a:r>
             <a:endParaRPr lang="en-US" sz="1100" dirty="0"/>
           </a:p>
@@ -5702,7 +5702,7 @@
                 <a:ea typeface="Arial" pitchFamily="34" charset="-122"/>
                 <a:cs typeface="Arial" pitchFamily="34" charset="-120"/>
               </a:rPr>
-              <a:t>  チェックインは機械で行いますが、スタッフがいつでも対応してくれるので安心です</a:t>
+              <a:t>  受付のスタッフの方達はとても丁寧でした</a:t>
             </a:r>
             <a:endParaRPr lang="en-US" sz="1100" dirty="0"/>
           </a:p>
@@ -6283,7 +6283,7 @@
                 <a:ea typeface="Arial" pitchFamily="34" charset="-122"/>
                 <a:cs typeface="Arial" pitchFamily="34" charset="-120"/>
               </a:rPr>
-              <a:t>7.41</a:t>
+              <a:t>7.43</a:t>
             </a:r>
             <a:endParaRPr lang="en-US" sz="3200" dirty="0"/>
           </a:p>
@@ -7079,7 +7079,7 @@
                 <a:ea typeface="Arial" pitchFamily="34" charset="-122"/>
                 <a:cs typeface="Arial" pitchFamily="34" charset="-120"/>
               </a:rPr>
-              <a:t>Trip.com(8.32)が最高スコア。</a:t>
+              <a:t>Trip.com(8.28)が最高スコア。</a:t>
             </a:r>
             <a:endParaRPr lang="en-US" sz="1100" dirty="0"/>
           </a:p>
@@ -7588,7 +7588,7 @@
                           <a:ea typeface="Arial" pitchFamily="34" charset="-122"/>
                           <a:cs typeface="Arial" pitchFamily="34" charset="-120"/>
                         </a:rPr>
-                        <a:t>19</a:t>
+                        <a:t>18</a:t>
                       </a:r>
                       <a:endParaRPr lang="en-US" sz="900" dirty="0">
                         <a:latin typeface="Arial" charset="0"/>
@@ -7656,7 +7656,7 @@
                           <a:ea typeface="Arial" pitchFamily="34" charset="-122"/>
                           <a:cs typeface="Arial" pitchFamily="34" charset="-120"/>
                         </a:rPr>
-                        <a:t>8.32</a:t>
+                        <a:t>8.28</a:t>
                       </a:r>
                       <a:endParaRPr lang="en-US" sz="900" dirty="0">
                         <a:latin typeface="Arial" charset="0"/>
@@ -7792,7 +7792,7 @@
                           <a:ea typeface="Arial" pitchFamily="34" charset="-122"/>
                           <a:cs typeface="Arial" pitchFamily="34" charset="-120"/>
                         </a:rPr>
-                        <a:t>8.32</a:t>
+                        <a:t>8.28</a:t>
                       </a:r>
                       <a:endParaRPr lang="en-US" sz="900" dirty="0">
                         <a:latin typeface="Arial" charset="0"/>
@@ -7930,7 +7930,7 @@
                           <a:ea typeface="Arial" pitchFamily="34" charset="-122"/>
                           <a:cs typeface="Arial" pitchFamily="34" charset="-120"/>
                         </a:rPr>
-                        <a:t>14</a:t>
+                        <a:t>13</a:t>
                       </a:r>
                       <a:endParaRPr lang="en-US" sz="900" dirty="0">
                         <a:latin typeface="Arial" charset="0"/>
@@ -7998,7 +7998,7 @@
                           <a:ea typeface="Arial" pitchFamily="34" charset="-122"/>
                           <a:cs typeface="Arial" pitchFamily="34" charset="-120"/>
                         </a:rPr>
-                        <a:t>7.43</a:t>
+                        <a:t>7.85</a:t>
                       </a:r>
                       <a:endParaRPr lang="en-US" sz="900" dirty="0">
                         <a:latin typeface="Arial" charset="0"/>
@@ -8134,7 +8134,7 @@
                           <a:ea typeface="Arial" pitchFamily="34" charset="-122"/>
                           <a:cs typeface="Arial" pitchFamily="34" charset="-120"/>
                         </a:rPr>
-                        <a:t>7.43</a:t>
+                        <a:t>7.85</a:t>
                       </a:r>
                       <a:endParaRPr lang="en-US" sz="900" dirty="0">
                         <a:latin typeface="Arial" charset="0"/>
@@ -8614,7 +8614,7 @@
                           <a:ea typeface="Arial" pitchFamily="34" charset="-122"/>
                           <a:cs typeface="Arial" pitchFamily="34" charset="-120"/>
                         </a:rPr>
-                        <a:t>40</a:t>
+                        <a:t>42</a:t>
                       </a:r>
                       <a:endParaRPr lang="en-US" sz="900" dirty="0">
                         <a:latin typeface="Arial" charset="0"/>
@@ -8682,7 +8682,7 @@
                           <a:ea typeface="Arial" pitchFamily="34" charset="-122"/>
                           <a:cs typeface="Arial" pitchFamily="34" charset="-120"/>
                         </a:rPr>
-                        <a:t>3.7</a:t>
+                        <a:t>3.69</a:t>
                       </a:r>
                       <a:endParaRPr lang="en-US" sz="900" dirty="0">
                         <a:latin typeface="Arial" charset="0"/>
@@ -8818,7 +8818,7 @@
                           <a:ea typeface="Arial" pitchFamily="34" charset="-122"/>
                           <a:cs typeface="Arial" pitchFamily="34" charset="-120"/>
                         </a:rPr>
-                        <a:t>7.4</a:t>
+                        <a:t>7.38</a:t>
                       </a:r>
                       <a:endParaRPr lang="en-US" sz="900" dirty="0">
                         <a:latin typeface="Arial" charset="0"/>
@@ -10518,7 +10518,7 @@
                 <a:ea typeface="Arial" pitchFamily="34" charset="-122"/>
                 <a:cs typeface="Arial" pitchFamily="34" charset="-120"/>
               </a:rPr>
-              <a:t>部屋も広く、快適でした ホテルが改装中が残念で、朝食がバイキングでないのが、残念でした</a:t>
+              <a:t>今回は朝食は食べていませんが、改装中とのことで、無料の朝食は弁当を配ってくれていたようです</a:t>
             </a:r>
             <a:endParaRPr lang="en-US" sz="900" dirty="0"/>
           </a:p>
@@ -10557,7 +10557,7 @@
                 <a:ea typeface="Arial" pitchFamily="34" charset="-122"/>
                 <a:cs typeface="Arial" pitchFamily="34" charset="-120"/>
               </a:rPr>
-              <a:t>「朝食は通常通りです🍽️🥐🧇  改装工事が完了しました👷🏻‍♂️  お手頃価格で美味しい」</a:t>
+              <a:t>「部屋も広く、快適でした ホテルが改装中が残念で、朝食がバイキングでないのが、残念でした」</a:t>
             </a:r>
             <a:endParaRPr lang="en-US" sz="900" dirty="0"/>
           </a:p>
@@ -10741,7 +10741,7 @@
                 <a:ea typeface="Arial" pitchFamily="34" charset="-122"/>
                 <a:cs typeface="Arial" pitchFamily="34" charset="-120"/>
               </a:rPr>
-              <a:t>観光としての立地は凄くいいともう 部屋が思っていた以上に狭い  タオルかける場所がない  ユニットバスが狭すぎる ...</a:t>
+              <a:t>アクセス的には駅から近く、行きやすかったです</a:t>
             </a:r>
             <a:endParaRPr lang="en-US" sz="900" dirty="0"/>
           </a:p>
@@ -10780,7 +10780,7 @@
                 <a:ea typeface="Arial" pitchFamily="34" charset="-122"/>
                 <a:cs typeface="Arial" pitchFamily="34" charset="-120"/>
               </a:rPr>
-              <a:t>「近くのスタッフに料理の追加について質問をしたのですが、厨房にいる料理人に直接聞いてくださいと言われたのがビックリしました」</a:t>
+              <a:t>「観光としての立地は凄くいいともう 部屋が思っていた以上に狭い  タオルかける場所がない  ユニットバスが狭すぎる ...」</a:t>
             </a:r>
             <a:endParaRPr lang="en-US" sz="900" dirty="0"/>
           </a:p>
@@ -10964,7 +10964,7 @@
                 <a:ea typeface="Arial" pitchFamily="34" charset="-122"/>
                 <a:cs typeface="Arial" pitchFamily="34" charset="-120"/>
               </a:rPr>
-              <a:t>チェックインは機械で行いますが、スタッフがいつでも対応してくれるので安心です</a:t>
+              <a:t>受付のスタッフの方達はとても丁寧でした</a:t>
             </a:r>
             <a:endParaRPr lang="en-US" sz="900" dirty="0"/>
           </a:p>
@@ -11003,7 +11003,7 @@
                 <a:ea typeface="Arial" pitchFamily="34" charset="-122"/>
                 <a:cs typeface="Arial" pitchFamily="34" charset="-120"/>
               </a:rPr>
-              <a:t>「近くのスタッフに料理の追加について質問をしたのですが、厨房にいる料理人に直接聞いてくださいと言われたのがビックリしました」</a:t>
+              <a:t>「チェックイン時、やり方が分からずモタモタしてしまった際、受付の方の対応があまり丁寧では無く、後ろに並んでいる人がい...」</a:t>
             </a:r>
             <a:endParaRPr lang="en-US" sz="900" dirty="0"/>
           </a:p>
@@ -11187,7 +11187,7 @@
                 <a:ea typeface="Arial" pitchFamily="34" charset="-122"/>
                 <a:cs typeface="Arial" pitchFamily="34" charset="-120"/>
               </a:rPr>
-              <a:t>新しく改装されたばかりの店内は清潔で明るく、テーブルや椅子が配置され、居心地の良い雰囲気です</a:t>
+              <a:t>部屋も綺麗だったと思います</a:t>
             </a:r>
             <a:endParaRPr lang="en-US" sz="900" dirty="0"/>
           </a:p>
@@ -11226,7 +11226,7 @@
                 <a:ea typeface="Arial" pitchFamily="34" charset="-122"/>
                 <a:cs typeface="Arial" pitchFamily="34" charset="-120"/>
               </a:rPr>
-              <a:t>「やっと食べようとしたら、横で机のアルコール清掃をされて、少しかかってしまった」</a:t>
+              <a:t>「新しく改装されたばかりの店内は清潔で明るく、テーブルや椅子が配置され、居心地の良い雰囲気です」</a:t>
             </a:r>
             <a:endParaRPr lang="en-US" sz="900" dirty="0"/>
           </a:p>
@@ -11410,7 +11410,7 @@
                 <a:ea typeface="Arial" pitchFamily="34" charset="-122"/>
                 <a:cs typeface="Arial" pitchFamily="34" charset="-120"/>
               </a:rPr>
-              <a:t>部屋も広く、快適でした ホテルが改装中が残念で、朝食がバイキングでないのが、残念でした</a:t>
+              <a:t>アメニティーなどの種類も少なすぎて、お値段の割に、サービス的には不親切だな、と感じました</a:t>
             </a:r>
             <a:endParaRPr lang="en-US" sz="900" dirty="0"/>
           </a:p>
@@ -11449,7 +11449,7 @@
                 <a:ea typeface="Arial" pitchFamily="34" charset="-122"/>
                 <a:cs typeface="Arial" pitchFamily="34" charset="-120"/>
               </a:rPr>
-              <a:t>「2階のカフェ兼ブックルームは明るく快適です🍀」</a:t>
+              <a:t>「部屋も広く、快適でした ホテルが改装中が残念で、朝食がバイキングでないのが、残念でした」</a:t>
             </a:r>
             <a:endParaRPr lang="en-US" sz="900" dirty="0"/>
           </a:p>
@@ -11633,7 +11633,7 @@
                 <a:ea typeface="Arial" pitchFamily="34" charset="-122"/>
                 <a:cs typeface="Arial" pitchFamily="34" charset="-120"/>
               </a:rPr>
-              <a:t>もし気が乗らなければ、ざっと見て階下のローソンかセブンイレブンに行こうと思っていたほどです</a:t>
+              <a:t>近くにスーパーやコンビニがあるのでとても便利でした</a:t>
             </a:r>
             <a:endParaRPr lang="en-US" sz="900" dirty="0"/>
           </a:p>
@@ -11672,7 +11672,7 @@
                 <a:ea typeface="Arial" pitchFamily="34" charset="-122"/>
                 <a:cs typeface="Arial" pitchFamily="34" charset="-120"/>
               </a:rPr>
-              <a:t>「正直なところ、朝食にはあまり期待していませんでしたし、もしそこで食べる気がしなかったら、ざっと見て階下のローソンか...」</a:t>
+              <a:t>「もし気が乗らなければ、ざっと見て階下のローソンかセブンイレブンに行こうと思っていたほどです」</a:t>
             </a:r>
             <a:endParaRPr lang="en-US" sz="900" dirty="0"/>
           </a:p>
@@ -12978,7 +12978,7 @@
                           <a:ea typeface="Arial" pitchFamily="34" charset="-122"/>
                           <a:cs typeface="Arial" pitchFamily="34" charset="-120"/>
                         </a:rPr>
-                        <a:t>10件</a:t>
+                        <a:t>9件</a:t>
                       </a:r>
                       <a:endParaRPr lang="en-US" sz="900" dirty="0">
                         <a:latin typeface="Arial" charset="0"/>

--- a/納品レポート/ホテル別レポート/comfort_yokohama_kannai_口コミ分析レポート.pptx
+++ b/納品レポート/ホテル別レポート/comfort_yokohama_kannai_口コミ分析レポート.pptx
@@ -192,10 +192,10 @@
                     <c:v>楽天トラベル</c:v>
                   </c:pt>
                   <c:pt idx="4">
-                    <c:v>Booking.com</c:v>
+                    <c:v>じゃらん</c:v>
                   </c:pt>
                   <c:pt idx="5">
-                    <c:v>じゃらん</c:v>
+                    <c:v>Booking.com</c:v>
                   </c:pt>
                 </c:lvl>
               </c:multiLvlStrCache>
@@ -214,16 +214,16 @@
                   <c:v>7.85</c:v>
                 </c:pt>
                 <c:pt idx="2">
-                  <c:v>7.43</c:v>
+                  <c:v>7.4</c:v>
                 </c:pt>
                 <c:pt idx="3">
-                  <c:v>7.38</c:v>
+                  <c:v>7.35</c:v>
                 </c:pt>
                 <c:pt idx="4">
-                  <c:v>7.07</c:v>
+                  <c:v>7.14</c:v>
                 </c:pt>
                 <c:pt idx="5">
-                  <c:v>7</c:v>
+                  <c:v>7.07</c:v>
                 </c:pt>
               </c:numCache>
             </c:numRef>
@@ -569,7 +569,7 @@
                   <c:v>96</c:v>
                 </c:pt>
                 <c:pt idx="1">
-                  <c:v>26</c:v>
+                  <c:v>27</c:v>
                 </c:pt>
                 <c:pt idx="2">
                   <c:v>20</c:v>
@@ -823,19 +823,19 @@
                 <c:formatCode>General</c:formatCode>
                 <c:ptCount val="9"/>
                 <c:pt idx="0">
-                  <c:v>32</c:v>
+                  <c:v>33</c:v>
                 </c:pt>
                 <c:pt idx="1">
                   <c:v>6</c:v>
                 </c:pt>
                 <c:pt idx="2">
-                  <c:v>58</c:v>
+                  <c:v>57</c:v>
                 </c:pt>
                 <c:pt idx="3">
                   <c:v>4</c:v>
                 </c:pt>
                 <c:pt idx="4">
-                  <c:v>16</c:v>
+                  <c:v>17</c:v>
                 </c:pt>
                 <c:pt idx="5">
                   <c:v>6</c:v>
@@ -2798,7 +2798,7 @@
                 <a:ea typeface="Arial" pitchFamily="34" charset="-122"/>
                 <a:cs typeface="Arial" pitchFamily="34" charset="-120"/>
               </a:rPr>
-              <a:t>レビュー総数：142件（6サイト）</a:t>
+              <a:t>レビュー総数：143件（6サイト）</a:t>
             </a:r>
             <a:endParaRPr lang="en-US" sz="1000" dirty="0"/>
           </a:p>
@@ -2818,7 +2818,7 @@
                 <a:ea typeface="Arial" pitchFamily="34" charset="-122"/>
                 <a:cs typeface="Arial" pitchFamily="34" charset="-120"/>
               </a:rPr>
-              <a:t>作成日：2026年3月24日</a:t>
+              <a:t>作成日：2026年3月25日</a:t>
             </a:r>
             <a:endParaRPr lang="en-US" sz="1000" dirty="0"/>
           </a:p>
@@ -3638,7 +3638,7 @@
                           <a:ea typeface="Arial" pitchFamily="34" charset="-122"/>
                           <a:cs typeface="Arial" pitchFamily="34" charset="-120"/>
                         </a:rPr>
-                        <a:t>67.6%</a:t>
+                        <a:t>67.1%</a:t>
                       </a:r>
                       <a:endParaRPr lang="en-US" sz="1000" dirty="0">
                         <a:latin typeface="Arial" charset="0"/>
@@ -3706,7 +3706,7 @@
                           <a:ea typeface="Arial" pitchFamily="34" charset="-122"/>
                           <a:cs typeface="Arial" pitchFamily="34" charset="-120"/>
                         </a:rPr>
-                        <a:t>78%以上</a:t>
+                        <a:t>77%以上</a:t>
                       </a:r>
                       <a:endParaRPr lang="en-US" sz="1000" dirty="0">
                         <a:latin typeface="Arial" charset="0"/>
@@ -3912,7 +3912,7 @@
                           <a:ea typeface="Arial" pitchFamily="34" charset="-122"/>
                           <a:cs typeface="Arial" pitchFamily="34" charset="-120"/>
                         </a:rPr>
-                        <a:t>14.1%</a:t>
+                        <a:t>14.0%</a:t>
                       </a:r>
                       <a:endParaRPr lang="en-US" sz="1000" dirty="0">
                         <a:latin typeface="Arial" charset="0"/>
@@ -5224,7 +5224,7 @@
                 <a:ea typeface="Arial" pitchFamily="34" charset="-122"/>
                 <a:cs typeface="Arial" pitchFamily="34" charset="-120"/>
               </a:rPr>
-              <a:t>67.6%</a:t>
+              <a:t>67.1%</a:t>
             </a:r>
             <a:endParaRPr lang="en-US" sz="3200" dirty="0"/>
           </a:p>
@@ -5349,7 +5349,7 @@
                 <a:ea typeface="Arial" pitchFamily="34" charset="-122"/>
                 <a:cs typeface="Arial" pitchFamily="34" charset="-120"/>
               </a:rPr>
-              <a:t>14.1%</a:t>
+              <a:t>14.0%</a:t>
             </a:r>
             <a:endParaRPr lang="en-US" sz="3200" dirty="0"/>
           </a:p>
@@ -5474,7 +5474,7 @@
                 <a:ea typeface="Arial" pitchFamily="34" charset="-122"/>
                 <a:cs typeface="Arial" pitchFamily="34" charset="-120"/>
               </a:rPr>
-              <a:t>142件</a:t>
+              <a:t>143件</a:t>
             </a:r>
             <a:endParaRPr lang="en-US" sz="3200" dirty="0"/>
           </a:p>
@@ -5622,7 +5622,7 @@
                 <a:ea typeface="Arial" pitchFamily="34" charset="-122"/>
                 <a:cs typeface="Arial" pitchFamily="34" charset="-120"/>
               </a:rPr>
-              <a:t>  今回は朝食は食べていませんが、改装中とのことで、無料の朝食は弁当を配ってくれていたようです</a:t>
+              <a:t>  朝食無料です</a:t>
             </a:r>
             <a:endParaRPr lang="en-US" sz="1100" dirty="0"/>
           </a:p>
@@ -5662,7 +5662,7 @@
                 <a:ea typeface="Arial" pitchFamily="34" charset="-122"/>
                 <a:cs typeface="Arial" pitchFamily="34" charset="-120"/>
               </a:rPr>
-              <a:t>  アクセス的には駅から近く、行きやすかったです</a:t>
+              <a:t>  駅からも近いし、横浜観光のアクセスにはもってこいの場所だと思います</a:t>
             </a:r>
             <a:endParaRPr lang="en-US" sz="1100" dirty="0"/>
           </a:p>
@@ -6408,7 +6408,7 @@
                 <a:ea typeface="Arial" pitchFamily="34" charset="-122"/>
                 <a:cs typeface="Arial" pitchFamily="34" charset="-120"/>
               </a:rPr>
-              <a:t>67.6%</a:t>
+              <a:t>67.1%</a:t>
             </a:r>
             <a:endParaRPr lang="en-US" sz="3200" dirty="0"/>
           </a:p>
@@ -6533,7 +6533,7 @@
                 <a:ea typeface="Arial" pitchFamily="34" charset="-122"/>
                 <a:cs typeface="Arial" pitchFamily="34" charset="-120"/>
               </a:rPr>
-              <a:t>14.1%</a:t>
+              <a:t>14.0%</a:t>
             </a:r>
             <a:endParaRPr lang="en-US" sz="3200" dirty="0"/>
           </a:p>
@@ -6658,7 +6658,7 @@
                 <a:ea typeface="Arial" pitchFamily="34" charset="-122"/>
                 <a:cs typeface="Arial" pitchFamily="34" charset="-120"/>
               </a:rPr>
-              <a:t>142件</a:t>
+              <a:t>143件</a:t>
             </a:r>
             <a:endParaRPr lang="en-US" sz="3200" dirty="0"/>
           </a:p>
@@ -8272,7 +8272,7 @@
                           <a:ea typeface="Arial" pitchFamily="34" charset="-122"/>
                           <a:cs typeface="Arial" pitchFamily="34" charset="-120"/>
                         </a:rPr>
-                        <a:t>21</a:t>
+                        <a:t>20</a:t>
                       </a:r>
                       <a:endParaRPr lang="en-US" sz="900" dirty="0">
                         <a:latin typeface="Arial" charset="0"/>
@@ -8340,7 +8340,7 @@
                           <a:ea typeface="Arial" pitchFamily="34" charset="-122"/>
                           <a:cs typeface="Arial" pitchFamily="34" charset="-120"/>
                         </a:rPr>
-                        <a:t>3.71</a:t>
+                        <a:t>3.7</a:t>
                       </a:r>
                       <a:endParaRPr lang="en-US" sz="900" dirty="0">
                         <a:latin typeface="Arial" charset="0"/>
@@ -8476,7 +8476,7 @@
                           <a:ea typeface="Arial" pitchFamily="34" charset="-122"/>
                           <a:cs typeface="Arial" pitchFamily="34" charset="-120"/>
                         </a:rPr>
-                        <a:t>7.43</a:t>
+                        <a:t>7.4</a:t>
                       </a:r>
                       <a:endParaRPr lang="en-US" sz="900" dirty="0">
                         <a:latin typeface="Arial" charset="0"/>
@@ -8614,7 +8614,7 @@
                           <a:ea typeface="Arial" pitchFamily="34" charset="-122"/>
                           <a:cs typeface="Arial" pitchFamily="34" charset="-120"/>
                         </a:rPr>
-                        <a:t>42</a:t>
+                        <a:t>43</a:t>
                       </a:r>
                       <a:endParaRPr lang="en-US" sz="900" dirty="0">
                         <a:latin typeface="Arial" charset="0"/>
@@ -8682,7 +8682,7 @@
                           <a:ea typeface="Arial" pitchFamily="34" charset="-122"/>
                           <a:cs typeface="Arial" pitchFamily="34" charset="-120"/>
                         </a:rPr>
-                        <a:t>3.69</a:t>
+                        <a:t>3.67</a:t>
                       </a:r>
                       <a:endParaRPr lang="en-US" sz="900" dirty="0">
                         <a:latin typeface="Arial" charset="0"/>
@@ -8818,7 +8818,7 @@
                           <a:ea typeface="Arial" pitchFamily="34" charset="-122"/>
                           <a:cs typeface="Arial" pitchFamily="34" charset="-120"/>
                         </a:rPr>
-                        <a:t>7.38</a:t>
+                        <a:t>7.35</a:t>
                       </a:r>
                       <a:endParaRPr lang="en-US" sz="900" dirty="0">
                         <a:latin typeface="Arial" charset="0"/>
@@ -8866,6 +8866,348 @@
                     </a:lnB>
                     <a:solidFill>
                       <a:srgbClr val="FFFFFF"/>
+                    </a:solidFill>
+                  </a:tcPr>
+                </a:tc>
+              </a:tr>
+              <a:tr h="201168">
+                <a:tc>
+                  <a:txBody>
+                    <a:bodyPr/>
+                    <a:lstStyle/>
+                    <a:p>
+                      <a:pPr algn="ctr" indent="0" marL="0">
+                        <a:buNone/>
+                      </a:pPr>
+                      <a:r>
+                        <a:rPr lang="en-US" sz="900" dirty="0">
+                          <a:solidFill>
+                            <a:srgbClr val="000000"/>
+                          </a:solidFill>
+                          <a:latin typeface="Arial" pitchFamily="34" charset="0"/>
+                          <a:ea typeface="Arial" pitchFamily="34" charset="-122"/>
+                          <a:cs typeface="Arial" pitchFamily="34" charset="-120"/>
+                        </a:rPr>
+                        <a:t>じゃらん</a:t>
+                      </a:r>
+                      <a:endParaRPr lang="en-US" sz="900" dirty="0">
+                        <a:latin typeface="Arial" charset="0"/>
+                        <a:ea typeface="Arial" charset="0"/>
+                        <a:cs typeface="Arial" charset="0"/>
+                      </a:endParaRPr>
+                    </a:p>
+                  </a:txBody>
+                  <a:tcPr marL="91440" marR="91440" marT="45720" marB="45720">
+                    <a:lnL w="6350" cap="flat" cmpd="sng" algn="ctr">
+                      <a:solidFill>
+                        <a:srgbClr val="CBD5E1"/>
+                      </a:solidFill>
+                      <a:prstDash val="solid"/>
+                      <a:round/>
+                      <a:headEnd type="none" w="med" len="med"/>
+                      <a:tailEnd type="none" w="med" len="med"/>
+                    </a:lnL>
+                    <a:lnR w="6350" cap="flat" cmpd="sng" algn="ctr">
+                      <a:solidFill>
+                        <a:srgbClr val="CBD5E1"/>
+                      </a:solidFill>
+                      <a:prstDash val="solid"/>
+                      <a:round/>
+                      <a:headEnd type="none" w="med" len="med"/>
+                      <a:tailEnd type="none" w="med" len="med"/>
+                    </a:lnR>
+                    <a:lnT w="6350" cap="flat" cmpd="sng" algn="ctr">
+                      <a:solidFill>
+                        <a:srgbClr val="CBD5E1"/>
+                      </a:solidFill>
+                      <a:prstDash val="solid"/>
+                      <a:round/>
+                      <a:headEnd type="none" w="med" len="med"/>
+                      <a:tailEnd type="none" w="med" len="med"/>
+                    </a:lnT>
+                    <a:lnB w="6350" cap="flat" cmpd="sng" algn="ctr">
+                      <a:solidFill>
+                        <a:srgbClr val="CBD5E1"/>
+                      </a:solidFill>
+                      <a:prstDash val="solid"/>
+                      <a:round/>
+                      <a:headEnd type="none" w="med" len="med"/>
+                      <a:tailEnd type="none" w="med" len="med"/>
+                    </a:lnB>
+                    <a:solidFill>
+                      <a:srgbClr val="E8EFF8"/>
+                    </a:solidFill>
+                  </a:tcPr>
+                </a:tc>
+                <a:tc>
+                  <a:txBody>
+                    <a:bodyPr/>
+                    <a:lstStyle/>
+                    <a:p>
+                      <a:pPr algn="ctr" indent="0" marL="0">
+                        <a:buNone/>
+                      </a:pPr>
+                      <a:r>
+                        <a:rPr lang="en-US" sz="900" dirty="0">
+                          <a:solidFill>
+                            <a:srgbClr val="000000"/>
+                          </a:solidFill>
+                          <a:latin typeface="Arial" pitchFamily="34" charset="0"/>
+                          <a:ea typeface="Arial" pitchFamily="34" charset="-122"/>
+                          <a:cs typeface="Arial" pitchFamily="34" charset="-120"/>
+                        </a:rPr>
+                        <a:t>21</a:t>
+                      </a:r>
+                      <a:endParaRPr lang="en-US" sz="900" dirty="0">
+                        <a:latin typeface="Arial" charset="0"/>
+                        <a:ea typeface="Arial" charset="0"/>
+                        <a:cs typeface="Arial" charset="0"/>
+                      </a:endParaRPr>
+                    </a:p>
+                  </a:txBody>
+                  <a:tcPr marL="91440" marR="91440" marT="45720" marB="45720">
+                    <a:lnL w="6350" cap="flat" cmpd="sng" algn="ctr">
+                      <a:solidFill>
+                        <a:srgbClr val="CBD5E1"/>
+                      </a:solidFill>
+                      <a:prstDash val="solid"/>
+                      <a:round/>
+                      <a:headEnd type="none" w="med" len="med"/>
+                      <a:tailEnd type="none" w="med" len="med"/>
+                    </a:lnL>
+                    <a:lnR w="6350" cap="flat" cmpd="sng" algn="ctr">
+                      <a:solidFill>
+                        <a:srgbClr val="CBD5E1"/>
+                      </a:solidFill>
+                      <a:prstDash val="solid"/>
+                      <a:round/>
+                      <a:headEnd type="none" w="med" len="med"/>
+                      <a:tailEnd type="none" w="med" len="med"/>
+                    </a:lnR>
+                    <a:lnT w="6350" cap="flat" cmpd="sng" algn="ctr">
+                      <a:solidFill>
+                        <a:srgbClr val="CBD5E1"/>
+                      </a:solidFill>
+                      <a:prstDash val="solid"/>
+                      <a:round/>
+                      <a:headEnd type="none" w="med" len="med"/>
+                      <a:tailEnd type="none" w="med" len="med"/>
+                    </a:lnT>
+                    <a:lnB w="6350" cap="flat" cmpd="sng" algn="ctr">
+                      <a:solidFill>
+                        <a:srgbClr val="CBD5E1"/>
+                      </a:solidFill>
+                      <a:prstDash val="solid"/>
+                      <a:round/>
+                      <a:headEnd type="none" w="med" len="med"/>
+                      <a:tailEnd type="none" w="med" len="med"/>
+                    </a:lnB>
+                    <a:solidFill>
+                      <a:srgbClr val="E8EFF8"/>
+                    </a:solidFill>
+                  </a:tcPr>
+                </a:tc>
+                <a:tc>
+                  <a:txBody>
+                    <a:bodyPr/>
+                    <a:lstStyle/>
+                    <a:p>
+                      <a:pPr algn="ctr" indent="0" marL="0">
+                        <a:buNone/>
+                      </a:pPr>
+                      <a:r>
+                        <a:rPr lang="en-US" sz="900" dirty="0">
+                          <a:solidFill>
+                            <a:srgbClr val="000000"/>
+                          </a:solidFill>
+                          <a:latin typeface="Arial" pitchFamily="34" charset="0"/>
+                          <a:ea typeface="Arial" pitchFamily="34" charset="-122"/>
+                          <a:cs typeface="Arial" pitchFamily="34" charset="-120"/>
+                        </a:rPr>
+                        <a:t>3.57</a:t>
+                      </a:r>
+                      <a:endParaRPr lang="en-US" sz="900" dirty="0">
+                        <a:latin typeface="Arial" charset="0"/>
+                        <a:ea typeface="Arial" charset="0"/>
+                        <a:cs typeface="Arial" charset="0"/>
+                      </a:endParaRPr>
+                    </a:p>
+                  </a:txBody>
+                  <a:tcPr marL="91440" marR="91440" marT="45720" marB="45720">
+                    <a:lnL w="6350" cap="flat" cmpd="sng" algn="ctr">
+                      <a:solidFill>
+                        <a:srgbClr val="CBD5E1"/>
+                      </a:solidFill>
+                      <a:prstDash val="solid"/>
+                      <a:round/>
+                      <a:headEnd type="none" w="med" len="med"/>
+                      <a:tailEnd type="none" w="med" len="med"/>
+                    </a:lnL>
+                    <a:lnR w="6350" cap="flat" cmpd="sng" algn="ctr">
+                      <a:solidFill>
+                        <a:srgbClr val="CBD5E1"/>
+                      </a:solidFill>
+                      <a:prstDash val="solid"/>
+                      <a:round/>
+                      <a:headEnd type="none" w="med" len="med"/>
+                      <a:tailEnd type="none" w="med" len="med"/>
+                    </a:lnR>
+                    <a:lnT w="6350" cap="flat" cmpd="sng" algn="ctr">
+                      <a:solidFill>
+                        <a:srgbClr val="CBD5E1"/>
+                      </a:solidFill>
+                      <a:prstDash val="solid"/>
+                      <a:round/>
+                      <a:headEnd type="none" w="med" len="med"/>
+                      <a:tailEnd type="none" w="med" len="med"/>
+                    </a:lnT>
+                    <a:lnB w="6350" cap="flat" cmpd="sng" algn="ctr">
+                      <a:solidFill>
+                        <a:srgbClr val="CBD5E1"/>
+                      </a:solidFill>
+                      <a:prstDash val="solid"/>
+                      <a:round/>
+                      <a:headEnd type="none" w="med" len="med"/>
+                      <a:tailEnd type="none" w="med" len="med"/>
+                    </a:lnB>
+                    <a:solidFill>
+                      <a:srgbClr val="E8EFF8"/>
+                    </a:solidFill>
+                  </a:tcPr>
+                </a:tc>
+                <a:tc>
+                  <a:txBody>
+                    <a:bodyPr/>
+                    <a:lstStyle/>
+                    <a:p>
+                      <a:pPr algn="ctr" indent="0" marL="0">
+                        <a:buNone/>
+                      </a:pPr>
+                      <a:r>
+                        <a:rPr lang="en-US" sz="900" dirty="0">
+                          <a:solidFill>
+                            <a:srgbClr val="000000"/>
+                          </a:solidFill>
+                          <a:latin typeface="Arial" pitchFamily="34" charset="0"/>
+                          <a:ea typeface="Arial" pitchFamily="34" charset="-122"/>
+                          <a:cs typeface="Arial" pitchFamily="34" charset="-120"/>
+                        </a:rPr>
+                        <a:t>/5 (×2)</a:t>
+                      </a:r>
+                      <a:endParaRPr lang="en-US" sz="900" dirty="0">
+                        <a:latin typeface="Arial" charset="0"/>
+                        <a:ea typeface="Arial" charset="0"/>
+                        <a:cs typeface="Arial" charset="0"/>
+                      </a:endParaRPr>
+                    </a:p>
+                  </a:txBody>
+                  <a:tcPr marL="91440" marR="91440" marT="45720" marB="45720">
+                    <a:lnL w="6350" cap="flat" cmpd="sng" algn="ctr">
+                      <a:solidFill>
+                        <a:srgbClr val="CBD5E1"/>
+                      </a:solidFill>
+                      <a:prstDash val="solid"/>
+                      <a:round/>
+                      <a:headEnd type="none" w="med" len="med"/>
+                      <a:tailEnd type="none" w="med" len="med"/>
+                    </a:lnL>
+                    <a:lnR w="6350" cap="flat" cmpd="sng" algn="ctr">
+                      <a:solidFill>
+                        <a:srgbClr val="CBD5E1"/>
+                      </a:solidFill>
+                      <a:prstDash val="solid"/>
+                      <a:round/>
+                      <a:headEnd type="none" w="med" len="med"/>
+                      <a:tailEnd type="none" w="med" len="med"/>
+                    </a:lnR>
+                    <a:lnT w="6350" cap="flat" cmpd="sng" algn="ctr">
+                      <a:solidFill>
+                        <a:srgbClr val="CBD5E1"/>
+                      </a:solidFill>
+                      <a:prstDash val="solid"/>
+                      <a:round/>
+                      <a:headEnd type="none" w="med" len="med"/>
+                      <a:tailEnd type="none" w="med" len="med"/>
+                    </a:lnT>
+                    <a:lnB w="6350" cap="flat" cmpd="sng" algn="ctr">
+                      <a:solidFill>
+                        <a:srgbClr val="CBD5E1"/>
+                      </a:solidFill>
+                      <a:prstDash val="solid"/>
+                      <a:round/>
+                      <a:headEnd type="none" w="med" len="med"/>
+                      <a:tailEnd type="none" w="med" len="med"/>
+                    </a:lnB>
+                    <a:solidFill>
+                      <a:srgbClr val="E8EFF8"/>
+                    </a:solidFill>
+                  </a:tcPr>
+                </a:tc>
+                <a:tc>
+                  <a:txBody>
+                    <a:bodyPr/>
+                    <a:lstStyle/>
+                    <a:p>
+                      <a:pPr algn="ctr" indent="0" marL="0">
+                        <a:buNone/>
+                      </a:pPr>
+                      <a:r>
+                        <a:rPr lang="en-US" sz="900" dirty="0">
+                          <a:solidFill>
+                            <a:srgbClr val="000000"/>
+                          </a:solidFill>
+                          <a:latin typeface="Arial" pitchFamily="34" charset="0"/>
+                          <a:ea typeface="Arial" pitchFamily="34" charset="-122"/>
+                          <a:cs typeface="Arial" pitchFamily="34" charset="-120"/>
+                        </a:rPr>
+                        <a:t>7.14</a:t>
+                      </a:r>
+                      <a:endParaRPr lang="en-US" sz="900" dirty="0">
+                        <a:latin typeface="Arial" charset="0"/>
+                        <a:ea typeface="Arial" charset="0"/>
+                        <a:cs typeface="Arial" charset="0"/>
+                      </a:endParaRPr>
+                    </a:p>
+                  </a:txBody>
+                  <a:tcPr marL="91440" marR="91440" marT="45720" marB="45720">
+                    <a:lnL w="6350" cap="flat" cmpd="sng" algn="ctr">
+                      <a:solidFill>
+                        <a:srgbClr val="CBD5E1"/>
+                      </a:solidFill>
+                      <a:prstDash val="solid"/>
+                      <a:round/>
+                      <a:headEnd type="none" w="med" len="med"/>
+                      <a:tailEnd type="none" w="med" len="med"/>
+                    </a:lnL>
+                    <a:lnR w="6350" cap="flat" cmpd="sng" algn="ctr">
+                      <a:solidFill>
+                        <a:srgbClr val="CBD5E1"/>
+                      </a:solidFill>
+                      <a:prstDash val="solid"/>
+                      <a:round/>
+                      <a:headEnd type="none" w="med" len="med"/>
+                      <a:tailEnd type="none" w="med" len="med"/>
+                    </a:lnR>
+                    <a:lnT w="6350" cap="flat" cmpd="sng" algn="ctr">
+                      <a:solidFill>
+                        <a:srgbClr val="CBD5E1"/>
+                      </a:solidFill>
+                      <a:prstDash val="solid"/>
+                      <a:round/>
+                      <a:headEnd type="none" w="med" len="med"/>
+                      <a:tailEnd type="none" w="med" len="med"/>
+                    </a:lnT>
+                    <a:lnB w="6350" cap="flat" cmpd="sng" algn="ctr">
+                      <a:solidFill>
+                        <a:srgbClr val="CBD5E1"/>
+                      </a:solidFill>
+                      <a:prstDash val="solid"/>
+                      <a:round/>
+                      <a:headEnd type="none" w="med" len="med"/>
+                      <a:tailEnd type="none" w="med" len="med"/>
+                    </a:lnB>
+                    <a:solidFill>
+                      <a:srgbClr val="E8EFF8"/>
                     </a:solidFill>
                   </a:tcPr>
                 </a:tc>
@@ -8935,7 +9277,7 @@
                       <a:tailEnd type="none" w="med" len="med"/>
                     </a:lnB>
                     <a:solidFill>
-                      <a:srgbClr val="E8EFF8"/>
+                      <a:srgbClr val="FFFFFF"/>
                     </a:solidFill>
                   </a:tcPr>
                 </a:tc>
@@ -9003,7 +9345,7 @@
                       <a:tailEnd type="none" w="med" len="med"/>
                     </a:lnB>
                     <a:solidFill>
-                      <a:srgbClr val="E8EFF8"/>
+                      <a:srgbClr val="FFFFFF"/>
                     </a:solidFill>
                   </a:tcPr>
                 </a:tc>
@@ -9071,7 +9413,7 @@
                       <a:tailEnd type="none" w="med" len="med"/>
                     </a:lnB>
                     <a:solidFill>
-                      <a:srgbClr val="E8EFF8"/>
+                      <a:srgbClr val="FFFFFF"/>
                     </a:solidFill>
                   </a:tcPr>
                 </a:tc>
@@ -9139,7 +9481,7 @@
                       <a:tailEnd type="none" w="med" len="med"/>
                     </a:lnB>
                     <a:solidFill>
-                      <a:srgbClr val="E8EFF8"/>
+                      <a:srgbClr val="FFFFFF"/>
                     </a:solidFill>
                   </a:tcPr>
                 </a:tc>
@@ -9161,348 +9503,6 @@
                           <a:cs typeface="Arial" pitchFamily="34" charset="-120"/>
                         </a:rPr>
                         <a:t>7.07</a:t>
-                      </a:r>
-                      <a:endParaRPr lang="en-US" sz="900" dirty="0">
-                        <a:latin typeface="Arial" charset="0"/>
-                        <a:ea typeface="Arial" charset="0"/>
-                        <a:cs typeface="Arial" charset="0"/>
-                      </a:endParaRPr>
-                    </a:p>
-                  </a:txBody>
-                  <a:tcPr marL="91440" marR="91440" marT="45720" marB="45720">
-                    <a:lnL w="6350" cap="flat" cmpd="sng" algn="ctr">
-                      <a:solidFill>
-                        <a:srgbClr val="CBD5E1"/>
-                      </a:solidFill>
-                      <a:prstDash val="solid"/>
-                      <a:round/>
-                      <a:headEnd type="none" w="med" len="med"/>
-                      <a:tailEnd type="none" w="med" len="med"/>
-                    </a:lnL>
-                    <a:lnR w="6350" cap="flat" cmpd="sng" algn="ctr">
-                      <a:solidFill>
-                        <a:srgbClr val="CBD5E1"/>
-                      </a:solidFill>
-                      <a:prstDash val="solid"/>
-                      <a:round/>
-                      <a:headEnd type="none" w="med" len="med"/>
-                      <a:tailEnd type="none" w="med" len="med"/>
-                    </a:lnR>
-                    <a:lnT w="6350" cap="flat" cmpd="sng" algn="ctr">
-                      <a:solidFill>
-                        <a:srgbClr val="CBD5E1"/>
-                      </a:solidFill>
-                      <a:prstDash val="solid"/>
-                      <a:round/>
-                      <a:headEnd type="none" w="med" len="med"/>
-                      <a:tailEnd type="none" w="med" len="med"/>
-                    </a:lnT>
-                    <a:lnB w="6350" cap="flat" cmpd="sng" algn="ctr">
-                      <a:solidFill>
-                        <a:srgbClr val="CBD5E1"/>
-                      </a:solidFill>
-                      <a:prstDash val="solid"/>
-                      <a:round/>
-                      <a:headEnd type="none" w="med" len="med"/>
-                      <a:tailEnd type="none" w="med" len="med"/>
-                    </a:lnB>
-                    <a:solidFill>
-                      <a:srgbClr val="E8EFF8"/>
-                    </a:solidFill>
-                  </a:tcPr>
-                </a:tc>
-              </a:tr>
-              <a:tr h="201168">
-                <a:tc>
-                  <a:txBody>
-                    <a:bodyPr/>
-                    <a:lstStyle/>
-                    <a:p>
-                      <a:pPr algn="ctr" indent="0" marL="0">
-                        <a:buNone/>
-                      </a:pPr>
-                      <a:r>
-                        <a:rPr lang="en-US" sz="900" dirty="0">
-                          <a:solidFill>
-                            <a:srgbClr val="000000"/>
-                          </a:solidFill>
-                          <a:latin typeface="Arial" pitchFamily="34" charset="0"/>
-                          <a:ea typeface="Arial" pitchFamily="34" charset="-122"/>
-                          <a:cs typeface="Arial" pitchFamily="34" charset="-120"/>
-                        </a:rPr>
-                        <a:t>じゃらん</a:t>
-                      </a:r>
-                      <a:endParaRPr lang="en-US" sz="900" dirty="0">
-                        <a:latin typeface="Arial" charset="0"/>
-                        <a:ea typeface="Arial" charset="0"/>
-                        <a:cs typeface="Arial" charset="0"/>
-                      </a:endParaRPr>
-                    </a:p>
-                  </a:txBody>
-                  <a:tcPr marL="91440" marR="91440" marT="45720" marB="45720">
-                    <a:lnL w="6350" cap="flat" cmpd="sng" algn="ctr">
-                      <a:solidFill>
-                        <a:srgbClr val="CBD5E1"/>
-                      </a:solidFill>
-                      <a:prstDash val="solid"/>
-                      <a:round/>
-                      <a:headEnd type="none" w="med" len="med"/>
-                      <a:tailEnd type="none" w="med" len="med"/>
-                    </a:lnL>
-                    <a:lnR w="6350" cap="flat" cmpd="sng" algn="ctr">
-                      <a:solidFill>
-                        <a:srgbClr val="CBD5E1"/>
-                      </a:solidFill>
-                      <a:prstDash val="solid"/>
-                      <a:round/>
-                      <a:headEnd type="none" w="med" len="med"/>
-                      <a:tailEnd type="none" w="med" len="med"/>
-                    </a:lnR>
-                    <a:lnT w="6350" cap="flat" cmpd="sng" algn="ctr">
-                      <a:solidFill>
-                        <a:srgbClr val="CBD5E1"/>
-                      </a:solidFill>
-                      <a:prstDash val="solid"/>
-                      <a:round/>
-                      <a:headEnd type="none" w="med" len="med"/>
-                      <a:tailEnd type="none" w="med" len="med"/>
-                    </a:lnT>
-                    <a:lnB w="6350" cap="flat" cmpd="sng" algn="ctr">
-                      <a:solidFill>
-                        <a:srgbClr val="CBD5E1"/>
-                      </a:solidFill>
-                      <a:prstDash val="solid"/>
-                      <a:round/>
-                      <a:headEnd type="none" w="med" len="med"/>
-                      <a:tailEnd type="none" w="med" len="med"/>
-                    </a:lnB>
-                    <a:solidFill>
-                      <a:srgbClr val="FFFFFF"/>
-                    </a:solidFill>
-                  </a:tcPr>
-                </a:tc>
-                <a:tc>
-                  <a:txBody>
-                    <a:bodyPr/>
-                    <a:lstStyle/>
-                    <a:p>
-                      <a:pPr algn="ctr" indent="0" marL="0">
-                        <a:buNone/>
-                      </a:pPr>
-                      <a:r>
-                        <a:rPr lang="en-US" sz="900" dirty="0">
-                          <a:solidFill>
-                            <a:srgbClr val="000000"/>
-                          </a:solidFill>
-                          <a:latin typeface="Arial" pitchFamily="34" charset="0"/>
-                          <a:ea typeface="Arial" pitchFamily="34" charset="-122"/>
-                          <a:cs typeface="Arial" pitchFamily="34" charset="-120"/>
-                        </a:rPr>
-                        <a:t>20</a:t>
-                      </a:r>
-                      <a:endParaRPr lang="en-US" sz="900" dirty="0">
-                        <a:latin typeface="Arial" charset="0"/>
-                        <a:ea typeface="Arial" charset="0"/>
-                        <a:cs typeface="Arial" charset="0"/>
-                      </a:endParaRPr>
-                    </a:p>
-                  </a:txBody>
-                  <a:tcPr marL="91440" marR="91440" marT="45720" marB="45720">
-                    <a:lnL w="6350" cap="flat" cmpd="sng" algn="ctr">
-                      <a:solidFill>
-                        <a:srgbClr val="CBD5E1"/>
-                      </a:solidFill>
-                      <a:prstDash val="solid"/>
-                      <a:round/>
-                      <a:headEnd type="none" w="med" len="med"/>
-                      <a:tailEnd type="none" w="med" len="med"/>
-                    </a:lnL>
-                    <a:lnR w="6350" cap="flat" cmpd="sng" algn="ctr">
-                      <a:solidFill>
-                        <a:srgbClr val="CBD5E1"/>
-                      </a:solidFill>
-                      <a:prstDash val="solid"/>
-                      <a:round/>
-                      <a:headEnd type="none" w="med" len="med"/>
-                      <a:tailEnd type="none" w="med" len="med"/>
-                    </a:lnR>
-                    <a:lnT w="6350" cap="flat" cmpd="sng" algn="ctr">
-                      <a:solidFill>
-                        <a:srgbClr val="CBD5E1"/>
-                      </a:solidFill>
-                      <a:prstDash val="solid"/>
-                      <a:round/>
-                      <a:headEnd type="none" w="med" len="med"/>
-                      <a:tailEnd type="none" w="med" len="med"/>
-                    </a:lnT>
-                    <a:lnB w="6350" cap="flat" cmpd="sng" algn="ctr">
-                      <a:solidFill>
-                        <a:srgbClr val="CBD5E1"/>
-                      </a:solidFill>
-                      <a:prstDash val="solid"/>
-                      <a:round/>
-                      <a:headEnd type="none" w="med" len="med"/>
-                      <a:tailEnd type="none" w="med" len="med"/>
-                    </a:lnB>
-                    <a:solidFill>
-                      <a:srgbClr val="FFFFFF"/>
-                    </a:solidFill>
-                  </a:tcPr>
-                </a:tc>
-                <a:tc>
-                  <a:txBody>
-                    <a:bodyPr/>
-                    <a:lstStyle/>
-                    <a:p>
-                      <a:pPr algn="ctr" indent="0" marL="0">
-                        <a:buNone/>
-                      </a:pPr>
-                      <a:r>
-                        <a:rPr lang="en-US" sz="900" dirty="0">
-                          <a:solidFill>
-                            <a:srgbClr val="000000"/>
-                          </a:solidFill>
-                          <a:latin typeface="Arial" pitchFamily="34" charset="0"/>
-                          <a:ea typeface="Arial" pitchFamily="34" charset="-122"/>
-                          <a:cs typeface="Arial" pitchFamily="34" charset="-120"/>
-                        </a:rPr>
-                        <a:t>3.5</a:t>
-                      </a:r>
-                      <a:endParaRPr lang="en-US" sz="900" dirty="0">
-                        <a:latin typeface="Arial" charset="0"/>
-                        <a:ea typeface="Arial" charset="0"/>
-                        <a:cs typeface="Arial" charset="0"/>
-                      </a:endParaRPr>
-                    </a:p>
-                  </a:txBody>
-                  <a:tcPr marL="91440" marR="91440" marT="45720" marB="45720">
-                    <a:lnL w="6350" cap="flat" cmpd="sng" algn="ctr">
-                      <a:solidFill>
-                        <a:srgbClr val="CBD5E1"/>
-                      </a:solidFill>
-                      <a:prstDash val="solid"/>
-                      <a:round/>
-                      <a:headEnd type="none" w="med" len="med"/>
-                      <a:tailEnd type="none" w="med" len="med"/>
-                    </a:lnL>
-                    <a:lnR w="6350" cap="flat" cmpd="sng" algn="ctr">
-                      <a:solidFill>
-                        <a:srgbClr val="CBD5E1"/>
-                      </a:solidFill>
-                      <a:prstDash val="solid"/>
-                      <a:round/>
-                      <a:headEnd type="none" w="med" len="med"/>
-                      <a:tailEnd type="none" w="med" len="med"/>
-                    </a:lnR>
-                    <a:lnT w="6350" cap="flat" cmpd="sng" algn="ctr">
-                      <a:solidFill>
-                        <a:srgbClr val="CBD5E1"/>
-                      </a:solidFill>
-                      <a:prstDash val="solid"/>
-                      <a:round/>
-                      <a:headEnd type="none" w="med" len="med"/>
-                      <a:tailEnd type="none" w="med" len="med"/>
-                    </a:lnT>
-                    <a:lnB w="6350" cap="flat" cmpd="sng" algn="ctr">
-                      <a:solidFill>
-                        <a:srgbClr val="CBD5E1"/>
-                      </a:solidFill>
-                      <a:prstDash val="solid"/>
-                      <a:round/>
-                      <a:headEnd type="none" w="med" len="med"/>
-                      <a:tailEnd type="none" w="med" len="med"/>
-                    </a:lnB>
-                    <a:solidFill>
-                      <a:srgbClr val="FFFFFF"/>
-                    </a:solidFill>
-                  </a:tcPr>
-                </a:tc>
-                <a:tc>
-                  <a:txBody>
-                    <a:bodyPr/>
-                    <a:lstStyle/>
-                    <a:p>
-                      <a:pPr algn="ctr" indent="0" marL="0">
-                        <a:buNone/>
-                      </a:pPr>
-                      <a:r>
-                        <a:rPr lang="en-US" sz="900" dirty="0">
-                          <a:solidFill>
-                            <a:srgbClr val="000000"/>
-                          </a:solidFill>
-                          <a:latin typeface="Arial" pitchFamily="34" charset="0"/>
-                          <a:ea typeface="Arial" pitchFamily="34" charset="-122"/>
-                          <a:cs typeface="Arial" pitchFamily="34" charset="-120"/>
-                        </a:rPr>
-                        <a:t>/5 (×2)</a:t>
-                      </a:r>
-                      <a:endParaRPr lang="en-US" sz="900" dirty="0">
-                        <a:latin typeface="Arial" charset="0"/>
-                        <a:ea typeface="Arial" charset="0"/>
-                        <a:cs typeface="Arial" charset="0"/>
-                      </a:endParaRPr>
-                    </a:p>
-                  </a:txBody>
-                  <a:tcPr marL="91440" marR="91440" marT="45720" marB="45720">
-                    <a:lnL w="6350" cap="flat" cmpd="sng" algn="ctr">
-                      <a:solidFill>
-                        <a:srgbClr val="CBD5E1"/>
-                      </a:solidFill>
-                      <a:prstDash val="solid"/>
-                      <a:round/>
-                      <a:headEnd type="none" w="med" len="med"/>
-                      <a:tailEnd type="none" w="med" len="med"/>
-                    </a:lnL>
-                    <a:lnR w="6350" cap="flat" cmpd="sng" algn="ctr">
-                      <a:solidFill>
-                        <a:srgbClr val="CBD5E1"/>
-                      </a:solidFill>
-                      <a:prstDash val="solid"/>
-                      <a:round/>
-                      <a:headEnd type="none" w="med" len="med"/>
-                      <a:tailEnd type="none" w="med" len="med"/>
-                    </a:lnR>
-                    <a:lnT w="6350" cap="flat" cmpd="sng" algn="ctr">
-                      <a:solidFill>
-                        <a:srgbClr val="CBD5E1"/>
-                      </a:solidFill>
-                      <a:prstDash val="solid"/>
-                      <a:round/>
-                      <a:headEnd type="none" w="med" len="med"/>
-                      <a:tailEnd type="none" w="med" len="med"/>
-                    </a:lnT>
-                    <a:lnB w="6350" cap="flat" cmpd="sng" algn="ctr">
-                      <a:solidFill>
-                        <a:srgbClr val="CBD5E1"/>
-                      </a:solidFill>
-                      <a:prstDash val="solid"/>
-                      <a:round/>
-                      <a:headEnd type="none" w="med" len="med"/>
-                      <a:tailEnd type="none" w="med" len="med"/>
-                    </a:lnB>
-                    <a:solidFill>
-                      <a:srgbClr val="FFFFFF"/>
-                    </a:solidFill>
-                  </a:tcPr>
-                </a:tc>
-                <a:tc>
-                  <a:txBody>
-                    <a:bodyPr/>
-                    <a:lstStyle/>
-                    <a:p>
-                      <a:pPr algn="ctr" indent="0" marL="0">
-                        <a:buNone/>
-                      </a:pPr>
-                      <a:r>
-                        <a:rPr lang="en-US" sz="900" dirty="0">
-                          <a:solidFill>
-                            <a:srgbClr val="000000"/>
-                          </a:solidFill>
-                          <a:latin typeface="Arial" pitchFamily="34" charset="0"/>
-                          <a:ea typeface="Arial" pitchFamily="34" charset="-122"/>
-                          <a:cs typeface="Arial" pitchFamily="34" charset="-120"/>
-                        </a:rPr>
-                        <a:t>7</a:t>
                       </a:r>
                       <a:endParaRPr lang="en-US" sz="900" dirty="0">
                         <a:latin typeface="Arial" charset="0"/>
@@ -9910,7 +9910,7 @@
                 <a:ea typeface="Arial" pitchFamily="34" charset="-122"/>
                 <a:cs typeface="Arial" pitchFamily="34" charset="-120"/>
               </a:rPr>
-              <a:t>96件（67.6%）</a:t>
+              <a:t>96件（67.1%）</a:t>
             </a:r>
             <a:endParaRPr lang="en-US" sz="1100" dirty="0"/>
           </a:p>
@@ -10008,7 +10008,7 @@
                 <a:ea typeface="Arial" pitchFamily="34" charset="-122"/>
                 <a:cs typeface="Arial" pitchFamily="34" charset="-120"/>
               </a:rPr>
-              <a:t>26件（18.3%）</a:t>
+              <a:t>27件（18.9%）</a:t>
             </a:r>
             <a:endParaRPr lang="en-US" sz="1100" dirty="0"/>
           </a:p>
@@ -10106,7 +10106,7 @@
                 <a:ea typeface="Arial" pitchFamily="34" charset="-122"/>
                 <a:cs typeface="Arial" pitchFamily="34" charset="-120"/>
               </a:rPr>
-              <a:t>20件（14.1%）</a:t>
+              <a:t>20件（14.0%）</a:t>
             </a:r>
             <a:endParaRPr lang="en-US" sz="1100" dirty="0"/>
           </a:p>
@@ -10518,7 +10518,7 @@
                 <a:ea typeface="Arial" pitchFamily="34" charset="-122"/>
                 <a:cs typeface="Arial" pitchFamily="34" charset="-120"/>
               </a:rPr>
-              <a:t>今回は朝食は食べていませんが、改装中とのことで、無料の朝食は弁当を配ってくれていたようです</a:t>
+              <a:t>朝食無料です</a:t>
             </a:r>
             <a:endParaRPr lang="en-US" sz="900" dirty="0"/>
           </a:p>
@@ -10557,7 +10557,7 @@
                 <a:ea typeface="Arial" pitchFamily="34" charset="-122"/>
                 <a:cs typeface="Arial" pitchFamily="34" charset="-120"/>
               </a:rPr>
-              <a:t>「部屋も広く、快適でした ホテルが改装中が残念で、朝食がバイキングでないのが、残念でした」</a:t>
+              <a:t>「今回は朝食は食べていませんが、改装中とのことで、無料の朝食は弁当を配ってくれていたようです」</a:t>
             </a:r>
             <a:endParaRPr lang="en-US" sz="900" dirty="0"/>
           </a:p>
@@ -10639,6 +10639,229 @@
         <p:spPr>
           <a:xfrm>
             <a:off x="5120640" y="1124712"/>
+            <a:ext cx="658368" cy="228600"/>
+          </a:xfrm>
+          <a:prstGeom prst="rect">
+            <a:avLst/>
+          </a:prstGeom>
+          <a:noFill/>
+          <a:ln/>
+        </p:spPr>
+        <p:txBody>
+          <a:bodyPr wrap="square" lIns="0" tIns="0" rIns="0" bIns="0" rtlCol="0" anchor="ctr"/>
+          <a:lstStyle/>
+          <a:p>
+            <a:pPr algn="ctr" indent="0" marL="0">
+              <a:buNone/>
+            </a:pPr>
+            <a:r>
+              <a:rPr lang="en-US" sz="900" b="1" dirty="0">
+                <a:solidFill>
+                  <a:srgbClr val="16A34A"/>
+                </a:solidFill>
+                <a:latin typeface="Arial" pitchFamily="34" charset="0"/>
+                <a:ea typeface="Arial" pitchFamily="34" charset="-122"/>
+                <a:cs typeface="Arial" pitchFamily="34" charset="-120"/>
+              </a:rPr>
+              <a:t>50件+</a:t>
+            </a:r>
+            <a:endParaRPr lang="en-US" sz="900" dirty="0"/>
+          </a:p>
+        </p:txBody>
+      </p:sp>
+      <p:sp>
+        <p:nvSpPr>
+          <p:cNvPr id="16" name="Text 14"/>
+          <p:cNvSpPr/>
+          <p:nvPr/>
+        </p:nvSpPr>
+        <p:spPr>
+          <a:xfrm>
+            <a:off x="3429000" y="1124712"/>
+            <a:ext cx="1645920" cy="274320"/>
+          </a:xfrm>
+          <a:prstGeom prst="rect">
+            <a:avLst/>
+          </a:prstGeom>
+          <a:noFill/>
+          <a:ln/>
+        </p:spPr>
+        <p:txBody>
+          <a:bodyPr wrap="square" lIns="0" tIns="0" rIns="0" bIns="0" rtlCol="0" anchor="ctr"/>
+          <a:lstStyle/>
+          <a:p>
+            <a:pPr indent="0" marL="0">
+              <a:buNone/>
+            </a:pPr>
+            <a:r>
+              <a:rPr lang="en-US" sz="1300" b="1" dirty="0">
+                <a:solidFill>
+                  <a:srgbClr val="1A2744"/>
+                </a:solidFill>
+                <a:latin typeface="Arial" pitchFamily="34" charset="0"/>
+                <a:ea typeface="Arial" pitchFamily="34" charset="-122"/>
+                <a:cs typeface="Arial" pitchFamily="34" charset="-120"/>
+              </a:rPr>
+              <a:t>立地・アクセス</a:t>
+            </a:r>
+            <a:endParaRPr lang="en-US" sz="1300" dirty="0"/>
+          </a:p>
+        </p:txBody>
+      </p:sp>
+      <p:sp>
+        <p:nvSpPr>
+          <p:cNvPr id="17" name="Text 15"/>
+          <p:cNvSpPr/>
+          <p:nvPr/>
+        </p:nvSpPr>
+        <p:spPr>
+          <a:xfrm>
+            <a:off x="3429000" y="1417320"/>
+            <a:ext cx="2377440" cy="365760"/>
+          </a:xfrm>
+          <a:prstGeom prst="rect">
+            <a:avLst/>
+          </a:prstGeom>
+          <a:noFill/>
+          <a:ln/>
+        </p:spPr>
+        <p:txBody>
+          <a:bodyPr wrap="square" lIns="0" tIns="0" rIns="0" bIns="0" rtlCol="0" anchor="ctr"/>
+          <a:lstStyle/>
+          <a:p>
+            <a:pPr indent="0" marL="0">
+              <a:buNone/>
+            </a:pPr>
+            <a:r>
+              <a:rPr lang="en-US" sz="900" dirty="0">
+                <a:solidFill>
+                  <a:srgbClr val="64748B"/>
+                </a:solidFill>
+                <a:latin typeface="Arial" pitchFamily="34" charset="0"/>
+                <a:ea typeface="Arial" pitchFamily="34" charset="-122"/>
+                <a:cs typeface="Arial" pitchFamily="34" charset="-120"/>
+              </a:rPr>
+              <a:t>駅からも近いし、横浜観光のアクセスにはもってこいの場所だと思います</a:t>
+            </a:r>
+            <a:endParaRPr lang="en-US" sz="900" dirty="0"/>
+          </a:p>
+        </p:txBody>
+      </p:sp>
+      <p:sp>
+        <p:nvSpPr>
+          <p:cNvPr id="18" name="Text 16"/>
+          <p:cNvSpPr/>
+          <p:nvPr/>
+        </p:nvSpPr>
+        <p:spPr>
+          <a:xfrm>
+            <a:off x="3429000" y="1828800"/>
+            <a:ext cx="2377440" cy="640080"/>
+          </a:xfrm>
+          <a:prstGeom prst="rect">
+            <a:avLst/>
+          </a:prstGeom>
+          <a:noFill/>
+          <a:ln/>
+        </p:spPr>
+        <p:txBody>
+          <a:bodyPr wrap="square" lIns="0" tIns="0" rIns="0" bIns="0" rtlCol="0" anchor="ctr"/>
+          <a:lstStyle/>
+          <a:p>
+            <a:pPr indent="0" marL="0">
+              <a:buNone/>
+            </a:pPr>
+            <a:r>
+              <a:rPr lang="en-US" sz="900" i="1" dirty="0">
+                <a:solidFill>
+                  <a:srgbClr val="3B7DD8"/>
+                </a:solidFill>
+                <a:latin typeface="Arial" pitchFamily="34" charset="0"/>
+                <a:ea typeface="Arial" pitchFamily="34" charset="-122"/>
+                <a:cs typeface="Arial" pitchFamily="34" charset="-120"/>
+              </a:rPr>
+              <a:t>「アクセス的には駅から近く、行きやすかったです」</a:t>
+            </a:r>
+            <a:endParaRPr lang="en-US" sz="900" dirty="0"/>
+          </a:p>
+        </p:txBody>
+      </p:sp>
+      <p:sp>
+        <p:nvSpPr>
+          <p:cNvPr id="19" name="Shape 17"/>
+          <p:cNvSpPr/>
+          <p:nvPr/>
+        </p:nvSpPr>
+        <p:spPr>
+          <a:xfrm>
+            <a:off x="6126480" y="1051560"/>
+            <a:ext cx="2651760" cy="1600200"/>
+          </a:xfrm>
+          <a:prstGeom prst="rect">
+            <a:avLst/>
+          </a:prstGeom>
+          <a:solidFill>
+            <a:srgbClr val="FFFFFF"/>
+          </a:solidFill>
+          <a:ln/>
+          <a:effectLst>
+            <a:outerShdw sx="100000" sy="100000" kx="0" ky="0" algn="bl" rotWithShape="0" blurRad="50800" dist="25400" dir="8100000">
+              <a:srgbClr val="000000">
+                <a:alpha val="10000"/>
+              </a:srgbClr>
+            </a:outerShdw>
+          </a:effectLst>
+        </p:spPr>
+      </p:sp>
+      <p:sp>
+        <p:nvSpPr>
+          <p:cNvPr id="20" name="Shape 18"/>
+          <p:cNvSpPr/>
+          <p:nvPr/>
+        </p:nvSpPr>
+        <p:spPr>
+          <a:xfrm>
+            <a:off x="6126480" y="1051560"/>
+            <a:ext cx="54864" cy="1600200"/>
+          </a:xfrm>
+          <a:prstGeom prst="rect">
+            <a:avLst/>
+          </a:prstGeom>
+          <a:solidFill>
+            <a:srgbClr val="16A34A"/>
+          </a:solidFill>
+          <a:ln/>
+        </p:spPr>
+      </p:sp>
+      <p:sp>
+        <p:nvSpPr>
+          <p:cNvPr id="21" name="Shape 19"/>
+          <p:cNvSpPr/>
+          <p:nvPr/>
+        </p:nvSpPr>
+        <p:spPr>
+          <a:xfrm>
+            <a:off x="7955280" y="1124712"/>
+            <a:ext cx="658368" cy="228600"/>
+          </a:xfrm>
+          <a:prstGeom prst="rect">
+            <a:avLst/>
+          </a:prstGeom>
+          <a:solidFill>
+            <a:srgbClr val="DCFCE7"/>
+          </a:solidFill>
+          <a:ln/>
+        </p:spPr>
+      </p:sp>
+      <p:sp>
+        <p:nvSpPr>
+          <p:cNvPr id="22" name="Text 20"/>
+          <p:cNvSpPr/>
+          <p:nvPr/>
+        </p:nvSpPr>
+        <p:spPr>
+          <a:xfrm>
+            <a:off x="7955280" y="1124712"/>
             <a:ext cx="658368" cy="228600"/>
           </a:xfrm>
           <a:prstGeom prst="rect">
@@ -10671,13 +10894,13 @@
       </p:sp>
       <p:sp>
         <p:nvSpPr>
-          <p:cNvPr id="16" name="Text 14"/>
-          <p:cNvSpPr/>
-          <p:nvPr/>
-        </p:nvSpPr>
-        <p:spPr>
-          <a:xfrm>
-            <a:off x="3429000" y="1124712"/>
+          <p:cNvPr id="23" name="Text 21"/>
+          <p:cNvSpPr/>
+          <p:nvPr/>
+        </p:nvSpPr>
+        <p:spPr>
+          <a:xfrm>
+            <a:off x="6263640" y="1124712"/>
             <a:ext cx="1645920" cy="274320"/>
           </a:xfrm>
           <a:prstGeom prst="rect">
@@ -10702,7 +10925,7 @@
                 <a:ea typeface="Arial" pitchFamily="34" charset="-122"/>
                 <a:cs typeface="Arial" pitchFamily="34" charset="-120"/>
               </a:rPr>
-              <a:t>立地・アクセス</a:t>
+              <a:t>スタッフの対応</a:t>
             </a:r>
             <a:endParaRPr lang="en-US" sz="1300" dirty="0"/>
           </a:p>
@@ -10710,13 +10933,13 @@
       </p:sp>
       <p:sp>
         <p:nvSpPr>
-          <p:cNvPr id="17" name="Text 15"/>
-          <p:cNvSpPr/>
-          <p:nvPr/>
-        </p:nvSpPr>
-        <p:spPr>
-          <a:xfrm>
-            <a:off x="3429000" y="1417320"/>
+          <p:cNvPr id="24" name="Text 22"/>
+          <p:cNvSpPr/>
+          <p:nvPr/>
+        </p:nvSpPr>
+        <p:spPr>
+          <a:xfrm>
+            <a:off x="6263640" y="1417320"/>
             <a:ext cx="2377440" cy="365760"/>
           </a:xfrm>
           <a:prstGeom prst="rect">
@@ -10741,7 +10964,7 @@
                 <a:ea typeface="Arial" pitchFamily="34" charset="-122"/>
                 <a:cs typeface="Arial" pitchFamily="34" charset="-120"/>
               </a:rPr>
-              <a:t>アクセス的には駅から近く、行きやすかったです</a:t>
+              <a:t>受付のスタッフの方達はとても丁寧でした</a:t>
             </a:r>
             <a:endParaRPr lang="en-US" sz="900" dirty="0"/>
           </a:p>
@@ -10749,13 +10972,13 @@
       </p:sp>
       <p:sp>
         <p:nvSpPr>
-          <p:cNvPr id="18" name="Text 16"/>
-          <p:cNvSpPr/>
-          <p:nvPr/>
-        </p:nvSpPr>
-        <p:spPr>
-          <a:xfrm>
-            <a:off x="3429000" y="1828800"/>
+          <p:cNvPr id="25" name="Text 23"/>
+          <p:cNvSpPr/>
+          <p:nvPr/>
+        </p:nvSpPr>
+        <p:spPr>
+          <a:xfrm>
+            <a:off x="6263640" y="1828800"/>
             <a:ext cx="2377440" cy="640080"/>
           </a:xfrm>
           <a:prstGeom prst="rect">
@@ -10780,7 +11003,7 @@
                 <a:ea typeface="Arial" pitchFamily="34" charset="-122"/>
                 <a:cs typeface="Arial" pitchFamily="34" charset="-120"/>
               </a:rPr>
-              <a:t>「観光としての立地は凄くいいともう 部屋が思っていた以上に狭い  タオルかける場所がない  ユニットバスが狭すぎる ...」</a:t>
+              <a:t>「チェックイン時、やり方が分からずモタモタしてしまった際、受付の方の対応があまり丁寧では無く、後ろに並んでいる人がい...」</a:t>
             </a:r>
             <a:endParaRPr lang="en-US" sz="900" dirty="0"/>
           </a:p>
@@ -10788,13 +11011,13 @@
       </p:sp>
       <p:sp>
         <p:nvSpPr>
-          <p:cNvPr id="19" name="Shape 17"/>
-          <p:cNvSpPr/>
-          <p:nvPr/>
-        </p:nvSpPr>
-        <p:spPr>
-          <a:xfrm>
-            <a:off x="6126480" y="1051560"/>
+          <p:cNvPr id="26" name="Shape 24"/>
+          <p:cNvSpPr/>
+          <p:nvPr/>
+        </p:nvSpPr>
+        <p:spPr>
+          <a:xfrm>
+            <a:off x="457200" y="2880360"/>
             <a:ext cx="2651760" cy="1600200"/>
           </a:xfrm>
           <a:prstGeom prst="rect">
@@ -10815,13 +11038,13 @@
       </p:sp>
       <p:sp>
         <p:nvSpPr>
-          <p:cNvPr id="20" name="Shape 18"/>
-          <p:cNvSpPr/>
-          <p:nvPr/>
-        </p:nvSpPr>
-        <p:spPr>
-          <a:xfrm>
-            <a:off x="6126480" y="1051560"/>
+          <p:cNvPr id="27" name="Shape 25"/>
+          <p:cNvSpPr/>
+          <p:nvPr/>
+        </p:nvSpPr>
+        <p:spPr>
+          <a:xfrm>
+            <a:off x="457200" y="2880360"/>
             <a:ext cx="54864" cy="1600200"/>
           </a:xfrm>
           <a:prstGeom prst="rect">
@@ -10835,13 +11058,13 @@
       </p:sp>
       <p:sp>
         <p:nvSpPr>
-          <p:cNvPr id="21" name="Shape 19"/>
-          <p:cNvSpPr/>
-          <p:nvPr/>
-        </p:nvSpPr>
-        <p:spPr>
-          <a:xfrm>
-            <a:off x="7955280" y="1124712"/>
+          <p:cNvPr id="28" name="Shape 26"/>
+          <p:cNvSpPr/>
+          <p:nvPr/>
+        </p:nvSpPr>
+        <p:spPr>
+          <a:xfrm>
+            <a:off x="2286000" y="2953512"/>
             <a:ext cx="658368" cy="228600"/>
           </a:xfrm>
           <a:prstGeom prst="rect">
@@ -10855,13 +11078,13 @@
       </p:sp>
       <p:sp>
         <p:nvSpPr>
-          <p:cNvPr id="22" name="Text 20"/>
-          <p:cNvSpPr/>
-          <p:nvPr/>
-        </p:nvSpPr>
-        <p:spPr>
-          <a:xfrm>
-            <a:off x="7955280" y="1124712"/>
+          <p:cNvPr id="29" name="Text 27"/>
+          <p:cNvSpPr/>
+          <p:nvPr/>
+        </p:nvSpPr>
+        <p:spPr>
+          <a:xfrm>
+            <a:off x="2286000" y="2953512"/>
             <a:ext cx="658368" cy="228600"/>
           </a:xfrm>
           <a:prstGeom prst="rect">
@@ -10894,13 +11117,13 @@
       </p:sp>
       <p:sp>
         <p:nvSpPr>
-          <p:cNvPr id="23" name="Text 21"/>
-          <p:cNvSpPr/>
-          <p:nvPr/>
-        </p:nvSpPr>
-        <p:spPr>
-          <a:xfrm>
-            <a:off x="6263640" y="1124712"/>
+          <p:cNvPr id="30" name="Text 28"/>
+          <p:cNvSpPr/>
+          <p:nvPr/>
+        </p:nvSpPr>
+        <p:spPr>
+          <a:xfrm>
+            <a:off x="594360" y="2953512"/>
             <a:ext cx="1645920" cy="274320"/>
           </a:xfrm>
           <a:prstGeom prst="rect">
@@ -10925,7 +11148,7 @@
                 <a:ea typeface="Arial" pitchFamily="34" charset="-122"/>
                 <a:cs typeface="Arial" pitchFamily="34" charset="-120"/>
               </a:rPr>
-              <a:t>スタッフの対応</a:t>
+              <a:t>清潔さ・清掃</a:t>
             </a:r>
             <a:endParaRPr lang="en-US" sz="1300" dirty="0"/>
           </a:p>
@@ -10933,13 +11156,13 @@
       </p:sp>
       <p:sp>
         <p:nvSpPr>
-          <p:cNvPr id="24" name="Text 22"/>
-          <p:cNvSpPr/>
-          <p:nvPr/>
-        </p:nvSpPr>
-        <p:spPr>
-          <a:xfrm>
-            <a:off x="6263640" y="1417320"/>
+          <p:cNvPr id="31" name="Text 29"/>
+          <p:cNvSpPr/>
+          <p:nvPr/>
+        </p:nvSpPr>
+        <p:spPr>
+          <a:xfrm>
+            <a:off x="594360" y="3246120"/>
             <a:ext cx="2377440" cy="365760"/>
           </a:xfrm>
           <a:prstGeom prst="rect">
@@ -10964,7 +11187,7 @@
                 <a:ea typeface="Arial" pitchFamily="34" charset="-122"/>
                 <a:cs typeface="Arial" pitchFamily="34" charset="-120"/>
               </a:rPr>
-              <a:t>受付のスタッフの方達はとても丁寧でした</a:t>
+              <a:t>部屋も綺麗だったと思います</a:t>
             </a:r>
             <a:endParaRPr lang="en-US" sz="900" dirty="0"/>
           </a:p>
@@ -10972,13 +11195,13 @@
       </p:sp>
       <p:sp>
         <p:nvSpPr>
-          <p:cNvPr id="25" name="Text 23"/>
-          <p:cNvSpPr/>
-          <p:nvPr/>
-        </p:nvSpPr>
-        <p:spPr>
-          <a:xfrm>
-            <a:off x="6263640" y="1828800"/>
+          <p:cNvPr id="32" name="Text 30"/>
+          <p:cNvSpPr/>
+          <p:nvPr/>
+        </p:nvSpPr>
+        <p:spPr>
+          <a:xfrm>
+            <a:off x="594360" y="3657600"/>
             <a:ext cx="2377440" cy="640080"/>
           </a:xfrm>
           <a:prstGeom prst="rect">
@@ -11003,7 +11226,7 @@
                 <a:ea typeface="Arial" pitchFamily="34" charset="-122"/>
                 <a:cs typeface="Arial" pitchFamily="34" charset="-120"/>
               </a:rPr>
-              <a:t>「チェックイン時、やり方が分からずモタモタしてしまった際、受付の方の対応があまり丁寧では無く、後ろに並んでいる人がい...」</a:t>
+              <a:t>「新しく改装されたばかりの店内は清潔で明るく、テーブルや椅子が配置され、居心地の良い雰囲気です」</a:t>
             </a:r>
             <a:endParaRPr lang="en-US" sz="900" dirty="0"/>
           </a:p>
@@ -11011,13 +11234,13 @@
       </p:sp>
       <p:sp>
         <p:nvSpPr>
-          <p:cNvPr id="26" name="Shape 24"/>
-          <p:cNvSpPr/>
-          <p:nvPr/>
-        </p:nvSpPr>
-        <p:spPr>
-          <a:xfrm>
-            <a:off x="457200" y="2880360"/>
+          <p:cNvPr id="33" name="Shape 31"/>
+          <p:cNvSpPr/>
+          <p:nvPr/>
+        </p:nvSpPr>
+        <p:spPr>
+          <a:xfrm>
+            <a:off x="3291840" y="2880360"/>
             <a:ext cx="2651760" cy="1600200"/>
           </a:xfrm>
           <a:prstGeom prst="rect">
@@ -11038,13 +11261,13 @@
       </p:sp>
       <p:sp>
         <p:nvSpPr>
-          <p:cNvPr id="27" name="Shape 25"/>
-          <p:cNvSpPr/>
-          <p:nvPr/>
-        </p:nvSpPr>
-        <p:spPr>
-          <a:xfrm>
-            <a:off x="457200" y="2880360"/>
+          <p:cNvPr id="34" name="Shape 32"/>
+          <p:cNvSpPr/>
+          <p:nvPr/>
+        </p:nvSpPr>
+        <p:spPr>
+          <a:xfrm>
+            <a:off x="3291840" y="2880360"/>
             <a:ext cx="54864" cy="1600200"/>
           </a:xfrm>
           <a:prstGeom prst="rect">
@@ -11058,13 +11281,13 @@
       </p:sp>
       <p:sp>
         <p:nvSpPr>
-          <p:cNvPr id="28" name="Shape 26"/>
-          <p:cNvSpPr/>
-          <p:nvPr/>
-        </p:nvSpPr>
-        <p:spPr>
-          <a:xfrm>
-            <a:off x="2286000" y="2953512"/>
+          <p:cNvPr id="35" name="Shape 33"/>
+          <p:cNvSpPr/>
+          <p:nvPr/>
+        </p:nvSpPr>
+        <p:spPr>
+          <a:xfrm>
+            <a:off x="5120640" y="2953512"/>
             <a:ext cx="658368" cy="228600"/>
           </a:xfrm>
           <a:prstGeom prst="rect">
@@ -11078,13 +11301,13 @@
       </p:sp>
       <p:sp>
         <p:nvSpPr>
-          <p:cNvPr id="29" name="Text 27"/>
-          <p:cNvSpPr/>
-          <p:nvPr/>
-        </p:nvSpPr>
-        <p:spPr>
-          <a:xfrm>
-            <a:off x="2286000" y="2953512"/>
+          <p:cNvPr id="36" name="Text 34"/>
+          <p:cNvSpPr/>
+          <p:nvPr/>
+        </p:nvSpPr>
+        <p:spPr>
+          <a:xfrm>
+            <a:off x="5120640" y="2953512"/>
             <a:ext cx="658368" cy="228600"/>
           </a:xfrm>
           <a:prstGeom prst="rect">
@@ -11117,229 +11340,6 @@
       </p:sp>
       <p:sp>
         <p:nvSpPr>
-          <p:cNvPr id="30" name="Text 28"/>
-          <p:cNvSpPr/>
-          <p:nvPr/>
-        </p:nvSpPr>
-        <p:spPr>
-          <a:xfrm>
-            <a:off x="594360" y="2953512"/>
-            <a:ext cx="1645920" cy="274320"/>
-          </a:xfrm>
-          <a:prstGeom prst="rect">
-            <a:avLst/>
-          </a:prstGeom>
-          <a:noFill/>
-          <a:ln/>
-        </p:spPr>
-        <p:txBody>
-          <a:bodyPr wrap="square" lIns="0" tIns="0" rIns="0" bIns="0" rtlCol="0" anchor="ctr"/>
-          <a:lstStyle/>
-          <a:p>
-            <a:pPr indent="0" marL="0">
-              <a:buNone/>
-            </a:pPr>
-            <a:r>
-              <a:rPr lang="en-US" sz="1300" b="1" dirty="0">
-                <a:solidFill>
-                  <a:srgbClr val="1A2744"/>
-                </a:solidFill>
-                <a:latin typeface="Arial" pitchFamily="34" charset="0"/>
-                <a:ea typeface="Arial" pitchFamily="34" charset="-122"/>
-                <a:cs typeface="Arial" pitchFamily="34" charset="-120"/>
-              </a:rPr>
-              <a:t>清潔さ・清掃</a:t>
-            </a:r>
-            <a:endParaRPr lang="en-US" sz="1300" dirty="0"/>
-          </a:p>
-        </p:txBody>
-      </p:sp>
-      <p:sp>
-        <p:nvSpPr>
-          <p:cNvPr id="31" name="Text 29"/>
-          <p:cNvSpPr/>
-          <p:nvPr/>
-        </p:nvSpPr>
-        <p:spPr>
-          <a:xfrm>
-            <a:off x="594360" y="3246120"/>
-            <a:ext cx="2377440" cy="365760"/>
-          </a:xfrm>
-          <a:prstGeom prst="rect">
-            <a:avLst/>
-          </a:prstGeom>
-          <a:noFill/>
-          <a:ln/>
-        </p:spPr>
-        <p:txBody>
-          <a:bodyPr wrap="square" lIns="0" tIns="0" rIns="0" bIns="0" rtlCol="0" anchor="ctr"/>
-          <a:lstStyle/>
-          <a:p>
-            <a:pPr indent="0" marL="0">
-              <a:buNone/>
-            </a:pPr>
-            <a:r>
-              <a:rPr lang="en-US" sz="900" dirty="0">
-                <a:solidFill>
-                  <a:srgbClr val="64748B"/>
-                </a:solidFill>
-                <a:latin typeface="Arial" pitchFamily="34" charset="0"/>
-                <a:ea typeface="Arial" pitchFamily="34" charset="-122"/>
-                <a:cs typeface="Arial" pitchFamily="34" charset="-120"/>
-              </a:rPr>
-              <a:t>部屋も綺麗だったと思います</a:t>
-            </a:r>
-            <a:endParaRPr lang="en-US" sz="900" dirty="0"/>
-          </a:p>
-        </p:txBody>
-      </p:sp>
-      <p:sp>
-        <p:nvSpPr>
-          <p:cNvPr id="32" name="Text 30"/>
-          <p:cNvSpPr/>
-          <p:nvPr/>
-        </p:nvSpPr>
-        <p:spPr>
-          <a:xfrm>
-            <a:off x="594360" y="3657600"/>
-            <a:ext cx="2377440" cy="640080"/>
-          </a:xfrm>
-          <a:prstGeom prst="rect">
-            <a:avLst/>
-          </a:prstGeom>
-          <a:noFill/>
-          <a:ln/>
-        </p:spPr>
-        <p:txBody>
-          <a:bodyPr wrap="square" lIns="0" tIns="0" rIns="0" bIns="0" rtlCol="0" anchor="ctr"/>
-          <a:lstStyle/>
-          <a:p>
-            <a:pPr indent="0" marL="0">
-              <a:buNone/>
-            </a:pPr>
-            <a:r>
-              <a:rPr lang="en-US" sz="900" i="1" dirty="0">
-                <a:solidFill>
-                  <a:srgbClr val="3B7DD8"/>
-                </a:solidFill>
-                <a:latin typeface="Arial" pitchFamily="34" charset="0"/>
-                <a:ea typeface="Arial" pitchFamily="34" charset="-122"/>
-                <a:cs typeface="Arial" pitchFamily="34" charset="-120"/>
-              </a:rPr>
-              <a:t>「新しく改装されたばかりの店内は清潔で明るく、テーブルや椅子が配置され、居心地の良い雰囲気です」</a:t>
-            </a:r>
-            <a:endParaRPr lang="en-US" sz="900" dirty="0"/>
-          </a:p>
-        </p:txBody>
-      </p:sp>
-      <p:sp>
-        <p:nvSpPr>
-          <p:cNvPr id="33" name="Shape 31"/>
-          <p:cNvSpPr/>
-          <p:nvPr/>
-        </p:nvSpPr>
-        <p:spPr>
-          <a:xfrm>
-            <a:off x="3291840" y="2880360"/>
-            <a:ext cx="2651760" cy="1600200"/>
-          </a:xfrm>
-          <a:prstGeom prst="rect">
-            <a:avLst/>
-          </a:prstGeom>
-          <a:solidFill>
-            <a:srgbClr val="FFFFFF"/>
-          </a:solidFill>
-          <a:ln/>
-          <a:effectLst>
-            <a:outerShdw sx="100000" sy="100000" kx="0" ky="0" algn="bl" rotWithShape="0" blurRad="50800" dist="25400" dir="8100000">
-              <a:srgbClr val="000000">
-                <a:alpha val="10000"/>
-              </a:srgbClr>
-            </a:outerShdw>
-          </a:effectLst>
-        </p:spPr>
-      </p:sp>
-      <p:sp>
-        <p:nvSpPr>
-          <p:cNvPr id="34" name="Shape 32"/>
-          <p:cNvSpPr/>
-          <p:nvPr/>
-        </p:nvSpPr>
-        <p:spPr>
-          <a:xfrm>
-            <a:off x="3291840" y="2880360"/>
-            <a:ext cx="54864" cy="1600200"/>
-          </a:xfrm>
-          <a:prstGeom prst="rect">
-            <a:avLst/>
-          </a:prstGeom>
-          <a:solidFill>
-            <a:srgbClr val="16A34A"/>
-          </a:solidFill>
-          <a:ln/>
-        </p:spPr>
-      </p:sp>
-      <p:sp>
-        <p:nvSpPr>
-          <p:cNvPr id="35" name="Shape 33"/>
-          <p:cNvSpPr/>
-          <p:nvPr/>
-        </p:nvSpPr>
-        <p:spPr>
-          <a:xfrm>
-            <a:off x="5120640" y="2953512"/>
-            <a:ext cx="658368" cy="228600"/>
-          </a:xfrm>
-          <a:prstGeom prst="rect">
-            <a:avLst/>
-          </a:prstGeom>
-          <a:solidFill>
-            <a:srgbClr val="DCFCE7"/>
-          </a:solidFill>
-          <a:ln/>
-        </p:spPr>
-      </p:sp>
-      <p:sp>
-        <p:nvSpPr>
-          <p:cNvPr id="36" name="Text 34"/>
-          <p:cNvSpPr/>
-          <p:nvPr/>
-        </p:nvSpPr>
-        <p:spPr>
-          <a:xfrm>
-            <a:off x="5120640" y="2953512"/>
-            <a:ext cx="658368" cy="228600"/>
-          </a:xfrm>
-          <a:prstGeom prst="rect">
-            <a:avLst/>
-          </a:prstGeom>
-          <a:noFill/>
-          <a:ln/>
-        </p:spPr>
-        <p:txBody>
-          <a:bodyPr wrap="square" lIns="0" tIns="0" rIns="0" bIns="0" rtlCol="0" anchor="ctr"/>
-          <a:lstStyle/>
-          <a:p>
-            <a:pPr algn="ctr" indent="0" marL="0">
-              <a:buNone/>
-            </a:pPr>
-            <a:r>
-              <a:rPr lang="en-US" sz="900" b="1" dirty="0">
-                <a:solidFill>
-                  <a:srgbClr val="16A34A"/>
-                </a:solidFill>
-                <a:latin typeface="Arial" pitchFamily="34" charset="0"/>
-                <a:ea typeface="Arial" pitchFamily="34" charset="-122"/>
-                <a:cs typeface="Arial" pitchFamily="34" charset="-120"/>
-              </a:rPr>
-              <a:t>20件+</a:t>
-            </a:r>
-            <a:endParaRPr lang="en-US" sz="900" dirty="0"/>
-          </a:p>
-        </p:txBody>
-      </p:sp>
-      <p:sp>
-        <p:nvSpPr>
           <p:cNvPr id="37" name="Text 35"/>
           <p:cNvSpPr/>
           <p:nvPr/>
@@ -11410,7 +11410,7 @@
                 <a:ea typeface="Arial" pitchFamily="34" charset="-122"/>
                 <a:cs typeface="Arial" pitchFamily="34" charset="-120"/>
               </a:rPr>
-              <a:t>アメニティーなどの種類も少なすぎて、お値段の割に、サービス的には不親切だな、と感じました</a:t>
+              <a:t>設備は必要最低限ですが特に不満は無いです</a:t>
             </a:r>
             <a:endParaRPr lang="en-US" sz="900" dirty="0"/>
           </a:p>
@@ -11449,7 +11449,7 @@
                 <a:ea typeface="Arial" pitchFamily="34" charset="-122"/>
                 <a:cs typeface="Arial" pitchFamily="34" charset="-120"/>
               </a:rPr>
-              <a:t>「部屋も広く、快適でした ホテルが改装中が残念で、朝食がバイキングでないのが、残念でした」</a:t>
+              <a:t>「アメニティーなどの種類も少なすぎて、お値段の割に、サービス的には不親切だな、と感じました」</a:t>
             </a:r>
             <a:endParaRPr lang="en-US" sz="900" dirty="0"/>
           </a:p>

--- a/納品レポート/ホテル別レポート/comfort_yokohama_kannai_口コミ分析レポート.pptx
+++ b/納品レポート/ホテル別レポート/comfort_yokohama_kannai_口コミ分析レポート.pptx
@@ -192,10 +192,10 @@
                     <c:v>楽天トラベル</c:v>
                   </c:pt>
                   <c:pt idx="4">
-                    <c:v>じゃらん</c:v>
+                    <c:v>Booking.com</c:v>
                   </c:pt>
                   <c:pt idx="5">
-                    <c:v>Booking.com</c:v>
+                    <c:v>じゃらん</c:v>
                   </c:pt>
                 </c:lvl>
               </c:multiLvlStrCache>
@@ -208,10 +208,10 @@
                 <c:formatCode>General</c:formatCode>
                 <c:ptCount val="6"/>
                 <c:pt idx="0">
-                  <c:v>8.28</c:v>
+                  <c:v>8.32</c:v>
                 </c:pt>
                 <c:pt idx="1">
-                  <c:v>7.85</c:v>
+                  <c:v>7.79</c:v>
                 </c:pt>
                 <c:pt idx="2">
                   <c:v>7.4</c:v>
@@ -220,10 +220,10 @@
                   <c:v>7.35</c:v>
                 </c:pt>
                 <c:pt idx="4">
-                  <c:v>7.14</c:v>
+                  <c:v>7.07</c:v>
                 </c:pt>
                 <c:pt idx="5">
-                  <c:v>7.07</c:v>
+                  <c:v>7.05</c:v>
                 </c:pt>
               </c:numCache>
             </c:numRef>
@@ -566,10 +566,10 @@
               <c:numCache>
                 <c:ptCount val="3"/>
                 <c:pt idx="0">
-                  <c:v>96</c:v>
+                  <c:v>95</c:v>
                 </c:pt>
                 <c:pt idx="1">
-                  <c:v>27</c:v>
+                  <c:v>28</c:v>
                 </c:pt>
                 <c:pt idx="2">
                   <c:v>20</c:v>
@@ -826,13 +826,13 @@
                   <c:v>33</c:v>
                 </c:pt>
                 <c:pt idx="1">
-                  <c:v>6</c:v>
+                  <c:v>7</c:v>
                 </c:pt>
                 <c:pt idx="2">
-                  <c:v>57</c:v>
+                  <c:v>55</c:v>
                 </c:pt>
                 <c:pt idx="3">
-                  <c:v>4</c:v>
+                  <c:v>5</c:v>
                 </c:pt>
                 <c:pt idx="4">
                   <c:v>17</c:v>
@@ -2818,7 +2818,7 @@
                 <a:ea typeface="Arial" pitchFamily="34" charset="-122"/>
                 <a:cs typeface="Arial" pitchFamily="34" charset="-120"/>
               </a:rPr>
-              <a:t>作成日：2026年3月25日</a:t>
+              <a:t>作成日：2026年3月26日</a:t>
             </a:r>
             <a:endParaRPr lang="en-US" sz="1000" dirty="0"/>
           </a:p>
@@ -3638,7 +3638,7 @@
                           <a:ea typeface="Arial" pitchFamily="34" charset="-122"/>
                           <a:cs typeface="Arial" pitchFamily="34" charset="-120"/>
                         </a:rPr>
-                        <a:t>67.1%</a:t>
+                        <a:t>66.4%</a:t>
                       </a:r>
                       <a:endParaRPr lang="en-US" sz="1000" dirty="0">
                         <a:latin typeface="Arial" charset="0"/>
@@ -3706,7 +3706,7 @@
                           <a:ea typeface="Arial" pitchFamily="34" charset="-122"/>
                           <a:cs typeface="Arial" pitchFamily="34" charset="-120"/>
                         </a:rPr>
-                        <a:t>77%以上</a:t>
+                        <a:t>76%以上</a:t>
                       </a:r>
                       <a:endParaRPr lang="en-US" sz="1000" dirty="0">
                         <a:latin typeface="Arial" charset="0"/>
@@ -4460,7 +4460,7 @@
                           <a:ea typeface="Arial" pitchFamily="34" charset="-122"/>
                           <a:cs typeface="Arial" pitchFamily="34" charset="-120"/>
                         </a:rPr>
-                        <a:t>約28件/期間</a:t>
+                        <a:t>約27件/期間</a:t>
                       </a:r>
                       <a:endParaRPr lang="en-US" sz="1000" dirty="0">
                         <a:latin typeface="Arial" charset="0"/>
@@ -4528,7 +4528,7 @@
                           <a:ea typeface="Arial" pitchFamily="34" charset="-122"/>
                           <a:cs typeface="Arial" pitchFamily="34" charset="-120"/>
                         </a:rPr>
-                        <a:t>14件以下</a:t>
+                        <a:t>13件以下</a:t>
                       </a:r>
                       <a:endParaRPr lang="en-US" sz="1000" dirty="0">
                         <a:latin typeface="Arial" charset="0"/>
@@ -5224,7 +5224,7 @@
                 <a:ea typeface="Arial" pitchFamily="34" charset="-122"/>
                 <a:cs typeface="Arial" pitchFamily="34" charset="-120"/>
               </a:rPr>
-              <a:t>67.1%</a:t>
+              <a:t>66.4%</a:t>
             </a:r>
             <a:endParaRPr lang="en-US" sz="3200" dirty="0"/>
           </a:p>
@@ -5622,7 +5622,7 @@
                 <a:ea typeface="Arial" pitchFamily="34" charset="-122"/>
                 <a:cs typeface="Arial" pitchFamily="34" charset="-120"/>
               </a:rPr>
-              <a:t>  朝食無料です</a:t>
+              <a:t>  朝食が程よい味付けです</a:t>
             </a:r>
             <a:endParaRPr lang="en-US" sz="1100" dirty="0"/>
           </a:p>
@@ -5662,7 +5662,7 @@
                 <a:ea typeface="Arial" pitchFamily="34" charset="-122"/>
                 <a:cs typeface="Arial" pitchFamily="34" charset="-120"/>
               </a:rPr>
-              <a:t>  駅からも近いし、横浜観光のアクセスにはもってこいの場所だと思います</a:t>
+              <a:t>  横浜スタジアムや中華街も徒歩圏内で、周りにはスーパーやコンビニ、飲食店も沢山あって便利^_^ 駐車場も隣接してあり</a:t>
             </a:r>
             <a:endParaRPr lang="en-US" sz="1100" dirty="0"/>
           </a:p>
@@ -5702,7 +5702,7 @@
                 <a:ea typeface="Arial" pitchFamily="34" charset="-122"/>
                 <a:cs typeface="Arial" pitchFamily="34" charset="-120"/>
               </a:rPr>
-              <a:t>  受付のスタッフの方達はとても丁寧でした</a:t>
+              <a:t>  出し入れ自由 ロービー横にはドリンクサービス、 無料朝食もあり、メニューも豊富で美味しかったです</a:t>
             </a:r>
             <a:endParaRPr lang="en-US" sz="1100" dirty="0"/>
           </a:p>
@@ -6408,7 +6408,7 @@
                 <a:ea typeface="Arial" pitchFamily="34" charset="-122"/>
                 <a:cs typeface="Arial" pitchFamily="34" charset="-120"/>
               </a:rPr>
-              <a:t>67.1%</a:t>
+              <a:t>66.4%</a:t>
             </a:r>
             <a:endParaRPr lang="en-US" sz="3200" dirty="0"/>
           </a:p>
@@ -7079,7 +7079,7 @@
                 <a:ea typeface="Arial" pitchFamily="34" charset="-122"/>
                 <a:cs typeface="Arial" pitchFamily="34" charset="-120"/>
               </a:rPr>
-              <a:t>Trip.com(8.28)が最高スコア。</a:t>
+              <a:t>Trip.com(8.32)が最高スコア。</a:t>
             </a:r>
             <a:endParaRPr lang="en-US" sz="1100" dirty="0"/>
           </a:p>
@@ -7588,7 +7588,7 @@
                           <a:ea typeface="Arial" pitchFamily="34" charset="-122"/>
                           <a:cs typeface="Arial" pitchFamily="34" charset="-120"/>
                         </a:rPr>
-                        <a:t>18</a:t>
+                        <a:t>19</a:t>
                       </a:r>
                       <a:endParaRPr lang="en-US" sz="900" dirty="0">
                         <a:latin typeface="Arial" charset="0"/>
@@ -7656,7 +7656,7 @@
                           <a:ea typeface="Arial" pitchFamily="34" charset="-122"/>
                           <a:cs typeface="Arial" pitchFamily="34" charset="-120"/>
                         </a:rPr>
-                        <a:t>8.28</a:t>
+                        <a:t>8.32</a:t>
                       </a:r>
                       <a:endParaRPr lang="en-US" sz="900" dirty="0">
                         <a:latin typeface="Arial" charset="0"/>
@@ -7792,7 +7792,7 @@
                           <a:ea typeface="Arial" pitchFamily="34" charset="-122"/>
                           <a:cs typeface="Arial" pitchFamily="34" charset="-120"/>
                         </a:rPr>
-                        <a:t>8.28</a:t>
+                        <a:t>8.32</a:t>
                       </a:r>
                       <a:endParaRPr lang="en-US" sz="900" dirty="0">
                         <a:latin typeface="Arial" charset="0"/>
@@ -7930,7 +7930,7 @@
                           <a:ea typeface="Arial" pitchFamily="34" charset="-122"/>
                           <a:cs typeface="Arial" pitchFamily="34" charset="-120"/>
                         </a:rPr>
-                        <a:t>13</a:t>
+                        <a:t>14</a:t>
                       </a:r>
                       <a:endParaRPr lang="en-US" sz="900" dirty="0">
                         <a:latin typeface="Arial" charset="0"/>
@@ -7998,7 +7998,7 @@
                           <a:ea typeface="Arial" pitchFamily="34" charset="-122"/>
                           <a:cs typeface="Arial" pitchFamily="34" charset="-120"/>
                         </a:rPr>
-                        <a:t>7.85</a:t>
+                        <a:t>7.79</a:t>
                       </a:r>
                       <a:endParaRPr lang="en-US" sz="900" dirty="0">
                         <a:latin typeface="Arial" charset="0"/>
@@ -8134,7 +8134,7 @@
                           <a:ea typeface="Arial" pitchFamily="34" charset="-122"/>
                           <a:cs typeface="Arial" pitchFamily="34" charset="-120"/>
                         </a:rPr>
-                        <a:t>7.85</a:t>
+                        <a:t>7.79</a:t>
                       </a:r>
                       <a:endParaRPr lang="en-US" sz="900" dirty="0">
                         <a:latin typeface="Arial" charset="0"/>
@@ -8888,7 +8888,7 @@
                           <a:ea typeface="Arial" pitchFamily="34" charset="-122"/>
                           <a:cs typeface="Arial" pitchFamily="34" charset="-120"/>
                         </a:rPr>
-                        <a:t>じゃらん</a:t>
+                        <a:t>Booking.com</a:t>
                       </a:r>
                       <a:endParaRPr lang="en-US" sz="900" dirty="0">
                         <a:latin typeface="Arial" charset="0"/>
@@ -8956,7 +8956,7 @@
                           <a:ea typeface="Arial" pitchFamily="34" charset="-122"/>
                           <a:cs typeface="Arial" pitchFamily="34" charset="-120"/>
                         </a:rPr>
-                        <a:t>21</a:t>
+                        <a:t>28</a:t>
                       </a:r>
                       <a:endParaRPr lang="en-US" sz="900" dirty="0">
                         <a:latin typeface="Arial" charset="0"/>
@@ -9024,7 +9024,7 @@
                           <a:ea typeface="Arial" pitchFamily="34" charset="-122"/>
                           <a:cs typeface="Arial" pitchFamily="34" charset="-120"/>
                         </a:rPr>
-                        <a:t>3.57</a:t>
+                        <a:t>7.07</a:t>
                       </a:r>
                       <a:endParaRPr lang="en-US" sz="900" dirty="0">
                         <a:latin typeface="Arial" charset="0"/>
@@ -9072,6 +9072,348 @@
                     </a:lnB>
                     <a:solidFill>
                       <a:srgbClr val="E8EFF8"/>
+                    </a:solidFill>
+                  </a:tcPr>
+                </a:tc>
+                <a:tc>
+                  <a:txBody>
+                    <a:bodyPr/>
+                    <a:lstStyle/>
+                    <a:p>
+                      <a:pPr algn="ctr" indent="0" marL="0">
+                        <a:buNone/>
+                      </a:pPr>
+                      <a:r>
+                        <a:rPr lang="en-US" sz="900" dirty="0">
+                          <a:solidFill>
+                            <a:srgbClr val="000000"/>
+                          </a:solidFill>
+                          <a:latin typeface="Arial" pitchFamily="34" charset="0"/>
+                          <a:ea typeface="Arial" pitchFamily="34" charset="-122"/>
+                          <a:cs typeface="Arial" pitchFamily="34" charset="-120"/>
+                        </a:rPr>
+                        <a:t>/10</a:t>
+                      </a:r>
+                      <a:endParaRPr lang="en-US" sz="900" dirty="0">
+                        <a:latin typeface="Arial" charset="0"/>
+                        <a:ea typeface="Arial" charset="0"/>
+                        <a:cs typeface="Arial" charset="0"/>
+                      </a:endParaRPr>
+                    </a:p>
+                  </a:txBody>
+                  <a:tcPr marL="91440" marR="91440" marT="45720" marB="45720">
+                    <a:lnL w="6350" cap="flat" cmpd="sng" algn="ctr">
+                      <a:solidFill>
+                        <a:srgbClr val="CBD5E1"/>
+                      </a:solidFill>
+                      <a:prstDash val="solid"/>
+                      <a:round/>
+                      <a:headEnd type="none" w="med" len="med"/>
+                      <a:tailEnd type="none" w="med" len="med"/>
+                    </a:lnL>
+                    <a:lnR w="6350" cap="flat" cmpd="sng" algn="ctr">
+                      <a:solidFill>
+                        <a:srgbClr val="CBD5E1"/>
+                      </a:solidFill>
+                      <a:prstDash val="solid"/>
+                      <a:round/>
+                      <a:headEnd type="none" w="med" len="med"/>
+                      <a:tailEnd type="none" w="med" len="med"/>
+                    </a:lnR>
+                    <a:lnT w="6350" cap="flat" cmpd="sng" algn="ctr">
+                      <a:solidFill>
+                        <a:srgbClr val="CBD5E1"/>
+                      </a:solidFill>
+                      <a:prstDash val="solid"/>
+                      <a:round/>
+                      <a:headEnd type="none" w="med" len="med"/>
+                      <a:tailEnd type="none" w="med" len="med"/>
+                    </a:lnT>
+                    <a:lnB w="6350" cap="flat" cmpd="sng" algn="ctr">
+                      <a:solidFill>
+                        <a:srgbClr val="CBD5E1"/>
+                      </a:solidFill>
+                      <a:prstDash val="solid"/>
+                      <a:round/>
+                      <a:headEnd type="none" w="med" len="med"/>
+                      <a:tailEnd type="none" w="med" len="med"/>
+                    </a:lnB>
+                    <a:solidFill>
+                      <a:srgbClr val="E8EFF8"/>
+                    </a:solidFill>
+                  </a:tcPr>
+                </a:tc>
+                <a:tc>
+                  <a:txBody>
+                    <a:bodyPr/>
+                    <a:lstStyle/>
+                    <a:p>
+                      <a:pPr algn="ctr" indent="0" marL="0">
+                        <a:buNone/>
+                      </a:pPr>
+                      <a:r>
+                        <a:rPr lang="en-US" sz="900" dirty="0">
+                          <a:solidFill>
+                            <a:srgbClr val="000000"/>
+                          </a:solidFill>
+                          <a:latin typeface="Arial" pitchFamily="34" charset="0"/>
+                          <a:ea typeface="Arial" pitchFamily="34" charset="-122"/>
+                          <a:cs typeface="Arial" pitchFamily="34" charset="-120"/>
+                        </a:rPr>
+                        <a:t>7.07</a:t>
+                      </a:r>
+                      <a:endParaRPr lang="en-US" sz="900" dirty="0">
+                        <a:latin typeface="Arial" charset="0"/>
+                        <a:ea typeface="Arial" charset="0"/>
+                        <a:cs typeface="Arial" charset="0"/>
+                      </a:endParaRPr>
+                    </a:p>
+                  </a:txBody>
+                  <a:tcPr marL="91440" marR="91440" marT="45720" marB="45720">
+                    <a:lnL w="6350" cap="flat" cmpd="sng" algn="ctr">
+                      <a:solidFill>
+                        <a:srgbClr val="CBD5E1"/>
+                      </a:solidFill>
+                      <a:prstDash val="solid"/>
+                      <a:round/>
+                      <a:headEnd type="none" w="med" len="med"/>
+                      <a:tailEnd type="none" w="med" len="med"/>
+                    </a:lnL>
+                    <a:lnR w="6350" cap="flat" cmpd="sng" algn="ctr">
+                      <a:solidFill>
+                        <a:srgbClr val="CBD5E1"/>
+                      </a:solidFill>
+                      <a:prstDash val="solid"/>
+                      <a:round/>
+                      <a:headEnd type="none" w="med" len="med"/>
+                      <a:tailEnd type="none" w="med" len="med"/>
+                    </a:lnR>
+                    <a:lnT w="6350" cap="flat" cmpd="sng" algn="ctr">
+                      <a:solidFill>
+                        <a:srgbClr val="CBD5E1"/>
+                      </a:solidFill>
+                      <a:prstDash val="solid"/>
+                      <a:round/>
+                      <a:headEnd type="none" w="med" len="med"/>
+                      <a:tailEnd type="none" w="med" len="med"/>
+                    </a:lnT>
+                    <a:lnB w="6350" cap="flat" cmpd="sng" algn="ctr">
+                      <a:solidFill>
+                        <a:srgbClr val="CBD5E1"/>
+                      </a:solidFill>
+                      <a:prstDash val="solid"/>
+                      <a:round/>
+                      <a:headEnd type="none" w="med" len="med"/>
+                      <a:tailEnd type="none" w="med" len="med"/>
+                    </a:lnB>
+                    <a:solidFill>
+                      <a:srgbClr val="E8EFF8"/>
+                    </a:solidFill>
+                  </a:tcPr>
+                </a:tc>
+              </a:tr>
+              <a:tr h="201168">
+                <a:tc>
+                  <a:txBody>
+                    <a:bodyPr/>
+                    <a:lstStyle/>
+                    <a:p>
+                      <a:pPr algn="ctr" indent="0" marL="0">
+                        <a:buNone/>
+                      </a:pPr>
+                      <a:r>
+                        <a:rPr lang="en-US" sz="900" dirty="0">
+                          <a:solidFill>
+                            <a:srgbClr val="000000"/>
+                          </a:solidFill>
+                          <a:latin typeface="Arial" pitchFamily="34" charset="0"/>
+                          <a:ea typeface="Arial" pitchFamily="34" charset="-122"/>
+                          <a:cs typeface="Arial" pitchFamily="34" charset="-120"/>
+                        </a:rPr>
+                        <a:t>じゃらん</a:t>
+                      </a:r>
+                      <a:endParaRPr lang="en-US" sz="900" dirty="0">
+                        <a:latin typeface="Arial" charset="0"/>
+                        <a:ea typeface="Arial" charset="0"/>
+                        <a:cs typeface="Arial" charset="0"/>
+                      </a:endParaRPr>
+                    </a:p>
+                  </a:txBody>
+                  <a:tcPr marL="91440" marR="91440" marT="45720" marB="45720">
+                    <a:lnL w="6350" cap="flat" cmpd="sng" algn="ctr">
+                      <a:solidFill>
+                        <a:srgbClr val="CBD5E1"/>
+                      </a:solidFill>
+                      <a:prstDash val="solid"/>
+                      <a:round/>
+                      <a:headEnd type="none" w="med" len="med"/>
+                      <a:tailEnd type="none" w="med" len="med"/>
+                    </a:lnL>
+                    <a:lnR w="6350" cap="flat" cmpd="sng" algn="ctr">
+                      <a:solidFill>
+                        <a:srgbClr val="CBD5E1"/>
+                      </a:solidFill>
+                      <a:prstDash val="solid"/>
+                      <a:round/>
+                      <a:headEnd type="none" w="med" len="med"/>
+                      <a:tailEnd type="none" w="med" len="med"/>
+                    </a:lnR>
+                    <a:lnT w="6350" cap="flat" cmpd="sng" algn="ctr">
+                      <a:solidFill>
+                        <a:srgbClr val="CBD5E1"/>
+                      </a:solidFill>
+                      <a:prstDash val="solid"/>
+                      <a:round/>
+                      <a:headEnd type="none" w="med" len="med"/>
+                      <a:tailEnd type="none" w="med" len="med"/>
+                    </a:lnT>
+                    <a:lnB w="6350" cap="flat" cmpd="sng" algn="ctr">
+                      <a:solidFill>
+                        <a:srgbClr val="CBD5E1"/>
+                      </a:solidFill>
+                      <a:prstDash val="solid"/>
+                      <a:round/>
+                      <a:headEnd type="none" w="med" len="med"/>
+                      <a:tailEnd type="none" w="med" len="med"/>
+                    </a:lnB>
+                    <a:solidFill>
+                      <a:srgbClr val="FFFFFF"/>
+                    </a:solidFill>
+                  </a:tcPr>
+                </a:tc>
+                <a:tc>
+                  <a:txBody>
+                    <a:bodyPr/>
+                    <a:lstStyle/>
+                    <a:p>
+                      <a:pPr algn="ctr" indent="0" marL="0">
+                        <a:buNone/>
+                      </a:pPr>
+                      <a:r>
+                        <a:rPr lang="en-US" sz="900" dirty="0">
+                          <a:solidFill>
+                            <a:srgbClr val="000000"/>
+                          </a:solidFill>
+                          <a:latin typeface="Arial" pitchFamily="34" charset="0"/>
+                          <a:ea typeface="Arial" pitchFamily="34" charset="-122"/>
+                          <a:cs typeface="Arial" pitchFamily="34" charset="-120"/>
+                        </a:rPr>
+                        <a:t>19</a:t>
+                      </a:r>
+                      <a:endParaRPr lang="en-US" sz="900" dirty="0">
+                        <a:latin typeface="Arial" charset="0"/>
+                        <a:ea typeface="Arial" charset="0"/>
+                        <a:cs typeface="Arial" charset="0"/>
+                      </a:endParaRPr>
+                    </a:p>
+                  </a:txBody>
+                  <a:tcPr marL="91440" marR="91440" marT="45720" marB="45720">
+                    <a:lnL w="6350" cap="flat" cmpd="sng" algn="ctr">
+                      <a:solidFill>
+                        <a:srgbClr val="CBD5E1"/>
+                      </a:solidFill>
+                      <a:prstDash val="solid"/>
+                      <a:round/>
+                      <a:headEnd type="none" w="med" len="med"/>
+                      <a:tailEnd type="none" w="med" len="med"/>
+                    </a:lnL>
+                    <a:lnR w="6350" cap="flat" cmpd="sng" algn="ctr">
+                      <a:solidFill>
+                        <a:srgbClr val="CBD5E1"/>
+                      </a:solidFill>
+                      <a:prstDash val="solid"/>
+                      <a:round/>
+                      <a:headEnd type="none" w="med" len="med"/>
+                      <a:tailEnd type="none" w="med" len="med"/>
+                    </a:lnR>
+                    <a:lnT w="6350" cap="flat" cmpd="sng" algn="ctr">
+                      <a:solidFill>
+                        <a:srgbClr val="CBD5E1"/>
+                      </a:solidFill>
+                      <a:prstDash val="solid"/>
+                      <a:round/>
+                      <a:headEnd type="none" w="med" len="med"/>
+                      <a:tailEnd type="none" w="med" len="med"/>
+                    </a:lnT>
+                    <a:lnB w="6350" cap="flat" cmpd="sng" algn="ctr">
+                      <a:solidFill>
+                        <a:srgbClr val="CBD5E1"/>
+                      </a:solidFill>
+                      <a:prstDash val="solid"/>
+                      <a:round/>
+                      <a:headEnd type="none" w="med" len="med"/>
+                      <a:tailEnd type="none" w="med" len="med"/>
+                    </a:lnB>
+                    <a:solidFill>
+                      <a:srgbClr val="FFFFFF"/>
+                    </a:solidFill>
+                  </a:tcPr>
+                </a:tc>
+                <a:tc>
+                  <a:txBody>
+                    <a:bodyPr/>
+                    <a:lstStyle/>
+                    <a:p>
+                      <a:pPr algn="ctr" indent="0" marL="0">
+                        <a:buNone/>
+                      </a:pPr>
+                      <a:r>
+                        <a:rPr lang="en-US" sz="900" dirty="0">
+                          <a:solidFill>
+                            <a:srgbClr val="000000"/>
+                          </a:solidFill>
+                          <a:latin typeface="Arial" pitchFamily="34" charset="0"/>
+                          <a:ea typeface="Arial" pitchFamily="34" charset="-122"/>
+                          <a:cs typeface="Arial" pitchFamily="34" charset="-120"/>
+                        </a:rPr>
+                        <a:t>3.53</a:t>
+                      </a:r>
+                      <a:endParaRPr lang="en-US" sz="900" dirty="0">
+                        <a:latin typeface="Arial" charset="0"/>
+                        <a:ea typeface="Arial" charset="0"/>
+                        <a:cs typeface="Arial" charset="0"/>
+                      </a:endParaRPr>
+                    </a:p>
+                  </a:txBody>
+                  <a:tcPr marL="91440" marR="91440" marT="45720" marB="45720">
+                    <a:lnL w="6350" cap="flat" cmpd="sng" algn="ctr">
+                      <a:solidFill>
+                        <a:srgbClr val="CBD5E1"/>
+                      </a:solidFill>
+                      <a:prstDash val="solid"/>
+                      <a:round/>
+                      <a:headEnd type="none" w="med" len="med"/>
+                      <a:tailEnd type="none" w="med" len="med"/>
+                    </a:lnL>
+                    <a:lnR w="6350" cap="flat" cmpd="sng" algn="ctr">
+                      <a:solidFill>
+                        <a:srgbClr val="CBD5E1"/>
+                      </a:solidFill>
+                      <a:prstDash val="solid"/>
+                      <a:round/>
+                      <a:headEnd type="none" w="med" len="med"/>
+                      <a:tailEnd type="none" w="med" len="med"/>
+                    </a:lnR>
+                    <a:lnT w="6350" cap="flat" cmpd="sng" algn="ctr">
+                      <a:solidFill>
+                        <a:srgbClr val="CBD5E1"/>
+                      </a:solidFill>
+                      <a:prstDash val="solid"/>
+                      <a:round/>
+                      <a:headEnd type="none" w="med" len="med"/>
+                      <a:tailEnd type="none" w="med" len="med"/>
+                    </a:lnT>
+                    <a:lnB w="6350" cap="flat" cmpd="sng" algn="ctr">
+                      <a:solidFill>
+                        <a:srgbClr val="CBD5E1"/>
+                      </a:solidFill>
+                      <a:prstDash val="solid"/>
+                      <a:round/>
+                      <a:headEnd type="none" w="med" len="med"/>
+                      <a:tailEnd type="none" w="med" len="med"/>
+                    </a:lnB>
+                    <a:solidFill>
+                      <a:srgbClr val="FFFFFF"/>
                     </a:solidFill>
                   </a:tcPr>
                 </a:tc>
@@ -9139,144 +9481,6 @@
                       <a:tailEnd type="none" w="med" len="med"/>
                     </a:lnB>
                     <a:solidFill>
-                      <a:srgbClr val="E8EFF8"/>
-                    </a:solidFill>
-                  </a:tcPr>
-                </a:tc>
-                <a:tc>
-                  <a:txBody>
-                    <a:bodyPr/>
-                    <a:lstStyle/>
-                    <a:p>
-                      <a:pPr algn="ctr" indent="0" marL="0">
-                        <a:buNone/>
-                      </a:pPr>
-                      <a:r>
-                        <a:rPr lang="en-US" sz="900" dirty="0">
-                          <a:solidFill>
-                            <a:srgbClr val="000000"/>
-                          </a:solidFill>
-                          <a:latin typeface="Arial" pitchFamily="34" charset="0"/>
-                          <a:ea typeface="Arial" pitchFamily="34" charset="-122"/>
-                          <a:cs typeface="Arial" pitchFamily="34" charset="-120"/>
-                        </a:rPr>
-                        <a:t>7.14</a:t>
-                      </a:r>
-                      <a:endParaRPr lang="en-US" sz="900" dirty="0">
-                        <a:latin typeface="Arial" charset="0"/>
-                        <a:ea typeface="Arial" charset="0"/>
-                        <a:cs typeface="Arial" charset="0"/>
-                      </a:endParaRPr>
-                    </a:p>
-                  </a:txBody>
-                  <a:tcPr marL="91440" marR="91440" marT="45720" marB="45720">
-                    <a:lnL w="6350" cap="flat" cmpd="sng" algn="ctr">
-                      <a:solidFill>
-                        <a:srgbClr val="CBD5E1"/>
-                      </a:solidFill>
-                      <a:prstDash val="solid"/>
-                      <a:round/>
-                      <a:headEnd type="none" w="med" len="med"/>
-                      <a:tailEnd type="none" w="med" len="med"/>
-                    </a:lnL>
-                    <a:lnR w="6350" cap="flat" cmpd="sng" algn="ctr">
-                      <a:solidFill>
-                        <a:srgbClr val="CBD5E1"/>
-                      </a:solidFill>
-                      <a:prstDash val="solid"/>
-                      <a:round/>
-                      <a:headEnd type="none" w="med" len="med"/>
-                      <a:tailEnd type="none" w="med" len="med"/>
-                    </a:lnR>
-                    <a:lnT w="6350" cap="flat" cmpd="sng" algn="ctr">
-                      <a:solidFill>
-                        <a:srgbClr val="CBD5E1"/>
-                      </a:solidFill>
-                      <a:prstDash val="solid"/>
-                      <a:round/>
-                      <a:headEnd type="none" w="med" len="med"/>
-                      <a:tailEnd type="none" w="med" len="med"/>
-                    </a:lnT>
-                    <a:lnB w="6350" cap="flat" cmpd="sng" algn="ctr">
-                      <a:solidFill>
-                        <a:srgbClr val="CBD5E1"/>
-                      </a:solidFill>
-                      <a:prstDash val="solid"/>
-                      <a:round/>
-                      <a:headEnd type="none" w="med" len="med"/>
-                      <a:tailEnd type="none" w="med" len="med"/>
-                    </a:lnB>
-                    <a:solidFill>
-                      <a:srgbClr val="E8EFF8"/>
-                    </a:solidFill>
-                  </a:tcPr>
-                </a:tc>
-              </a:tr>
-              <a:tr h="201168">
-                <a:tc>
-                  <a:txBody>
-                    <a:bodyPr/>
-                    <a:lstStyle/>
-                    <a:p>
-                      <a:pPr algn="ctr" indent="0" marL="0">
-                        <a:buNone/>
-                      </a:pPr>
-                      <a:r>
-                        <a:rPr lang="en-US" sz="900" dirty="0">
-                          <a:solidFill>
-                            <a:srgbClr val="000000"/>
-                          </a:solidFill>
-                          <a:latin typeface="Arial" pitchFamily="34" charset="0"/>
-                          <a:ea typeface="Arial" pitchFamily="34" charset="-122"/>
-                          <a:cs typeface="Arial" pitchFamily="34" charset="-120"/>
-                        </a:rPr>
-                        <a:t>Booking.com</a:t>
-                      </a:r>
-                      <a:endParaRPr lang="en-US" sz="900" dirty="0">
-                        <a:latin typeface="Arial" charset="0"/>
-                        <a:ea typeface="Arial" charset="0"/>
-                        <a:cs typeface="Arial" charset="0"/>
-                      </a:endParaRPr>
-                    </a:p>
-                  </a:txBody>
-                  <a:tcPr marL="91440" marR="91440" marT="45720" marB="45720">
-                    <a:lnL w="6350" cap="flat" cmpd="sng" algn="ctr">
-                      <a:solidFill>
-                        <a:srgbClr val="CBD5E1"/>
-                      </a:solidFill>
-                      <a:prstDash val="solid"/>
-                      <a:round/>
-                      <a:headEnd type="none" w="med" len="med"/>
-                      <a:tailEnd type="none" w="med" len="med"/>
-                    </a:lnL>
-                    <a:lnR w="6350" cap="flat" cmpd="sng" algn="ctr">
-                      <a:solidFill>
-                        <a:srgbClr val="CBD5E1"/>
-                      </a:solidFill>
-                      <a:prstDash val="solid"/>
-                      <a:round/>
-                      <a:headEnd type="none" w="med" len="med"/>
-                      <a:tailEnd type="none" w="med" len="med"/>
-                    </a:lnR>
-                    <a:lnT w="6350" cap="flat" cmpd="sng" algn="ctr">
-                      <a:solidFill>
-                        <a:srgbClr val="CBD5E1"/>
-                      </a:solidFill>
-                      <a:prstDash val="solid"/>
-                      <a:round/>
-                      <a:headEnd type="none" w="med" len="med"/>
-                      <a:tailEnd type="none" w="med" len="med"/>
-                    </a:lnT>
-                    <a:lnB w="6350" cap="flat" cmpd="sng" algn="ctr">
-                      <a:solidFill>
-                        <a:srgbClr val="CBD5E1"/>
-                      </a:solidFill>
-                      <a:prstDash val="solid"/>
-                      <a:round/>
-                      <a:headEnd type="none" w="med" len="med"/>
-                      <a:tailEnd type="none" w="med" len="med"/>
-                    </a:lnB>
-                    <a:solidFill>
                       <a:srgbClr val="FFFFFF"/>
                     </a:solidFill>
                   </a:tcPr>
@@ -9298,211 +9502,7 @@
                           <a:ea typeface="Arial" pitchFamily="34" charset="-122"/>
                           <a:cs typeface="Arial" pitchFamily="34" charset="-120"/>
                         </a:rPr>
-                        <a:t>28</a:t>
-                      </a:r>
-                      <a:endParaRPr lang="en-US" sz="900" dirty="0">
-                        <a:latin typeface="Arial" charset="0"/>
-                        <a:ea typeface="Arial" charset="0"/>
-                        <a:cs typeface="Arial" charset="0"/>
-                      </a:endParaRPr>
-                    </a:p>
-                  </a:txBody>
-                  <a:tcPr marL="91440" marR="91440" marT="45720" marB="45720">
-                    <a:lnL w="6350" cap="flat" cmpd="sng" algn="ctr">
-                      <a:solidFill>
-                        <a:srgbClr val="CBD5E1"/>
-                      </a:solidFill>
-                      <a:prstDash val="solid"/>
-                      <a:round/>
-                      <a:headEnd type="none" w="med" len="med"/>
-                      <a:tailEnd type="none" w="med" len="med"/>
-                    </a:lnL>
-                    <a:lnR w="6350" cap="flat" cmpd="sng" algn="ctr">
-                      <a:solidFill>
-                        <a:srgbClr val="CBD5E1"/>
-                      </a:solidFill>
-                      <a:prstDash val="solid"/>
-                      <a:round/>
-                      <a:headEnd type="none" w="med" len="med"/>
-                      <a:tailEnd type="none" w="med" len="med"/>
-                    </a:lnR>
-                    <a:lnT w="6350" cap="flat" cmpd="sng" algn="ctr">
-                      <a:solidFill>
-                        <a:srgbClr val="CBD5E1"/>
-                      </a:solidFill>
-                      <a:prstDash val="solid"/>
-                      <a:round/>
-                      <a:headEnd type="none" w="med" len="med"/>
-                      <a:tailEnd type="none" w="med" len="med"/>
-                    </a:lnT>
-                    <a:lnB w="6350" cap="flat" cmpd="sng" algn="ctr">
-                      <a:solidFill>
-                        <a:srgbClr val="CBD5E1"/>
-                      </a:solidFill>
-                      <a:prstDash val="solid"/>
-                      <a:round/>
-                      <a:headEnd type="none" w="med" len="med"/>
-                      <a:tailEnd type="none" w="med" len="med"/>
-                    </a:lnB>
-                    <a:solidFill>
-                      <a:srgbClr val="FFFFFF"/>
-                    </a:solidFill>
-                  </a:tcPr>
-                </a:tc>
-                <a:tc>
-                  <a:txBody>
-                    <a:bodyPr/>
-                    <a:lstStyle/>
-                    <a:p>
-                      <a:pPr algn="ctr" indent="0" marL="0">
-                        <a:buNone/>
-                      </a:pPr>
-                      <a:r>
-                        <a:rPr lang="en-US" sz="900" dirty="0">
-                          <a:solidFill>
-                            <a:srgbClr val="000000"/>
-                          </a:solidFill>
-                          <a:latin typeface="Arial" pitchFamily="34" charset="0"/>
-                          <a:ea typeface="Arial" pitchFamily="34" charset="-122"/>
-                          <a:cs typeface="Arial" pitchFamily="34" charset="-120"/>
-                        </a:rPr>
-                        <a:t>7.07</a:t>
-                      </a:r>
-                      <a:endParaRPr lang="en-US" sz="900" dirty="0">
-                        <a:latin typeface="Arial" charset="0"/>
-                        <a:ea typeface="Arial" charset="0"/>
-                        <a:cs typeface="Arial" charset="0"/>
-                      </a:endParaRPr>
-                    </a:p>
-                  </a:txBody>
-                  <a:tcPr marL="91440" marR="91440" marT="45720" marB="45720">
-                    <a:lnL w="6350" cap="flat" cmpd="sng" algn="ctr">
-                      <a:solidFill>
-                        <a:srgbClr val="CBD5E1"/>
-                      </a:solidFill>
-                      <a:prstDash val="solid"/>
-                      <a:round/>
-                      <a:headEnd type="none" w="med" len="med"/>
-                      <a:tailEnd type="none" w="med" len="med"/>
-                    </a:lnL>
-                    <a:lnR w="6350" cap="flat" cmpd="sng" algn="ctr">
-                      <a:solidFill>
-                        <a:srgbClr val="CBD5E1"/>
-                      </a:solidFill>
-                      <a:prstDash val="solid"/>
-                      <a:round/>
-                      <a:headEnd type="none" w="med" len="med"/>
-                      <a:tailEnd type="none" w="med" len="med"/>
-                    </a:lnR>
-                    <a:lnT w="6350" cap="flat" cmpd="sng" algn="ctr">
-                      <a:solidFill>
-                        <a:srgbClr val="CBD5E1"/>
-                      </a:solidFill>
-                      <a:prstDash val="solid"/>
-                      <a:round/>
-                      <a:headEnd type="none" w="med" len="med"/>
-                      <a:tailEnd type="none" w="med" len="med"/>
-                    </a:lnT>
-                    <a:lnB w="6350" cap="flat" cmpd="sng" algn="ctr">
-                      <a:solidFill>
-                        <a:srgbClr val="CBD5E1"/>
-                      </a:solidFill>
-                      <a:prstDash val="solid"/>
-                      <a:round/>
-                      <a:headEnd type="none" w="med" len="med"/>
-                      <a:tailEnd type="none" w="med" len="med"/>
-                    </a:lnB>
-                    <a:solidFill>
-                      <a:srgbClr val="FFFFFF"/>
-                    </a:solidFill>
-                  </a:tcPr>
-                </a:tc>
-                <a:tc>
-                  <a:txBody>
-                    <a:bodyPr/>
-                    <a:lstStyle/>
-                    <a:p>
-                      <a:pPr algn="ctr" indent="0" marL="0">
-                        <a:buNone/>
-                      </a:pPr>
-                      <a:r>
-                        <a:rPr lang="en-US" sz="900" dirty="0">
-                          <a:solidFill>
-                            <a:srgbClr val="000000"/>
-                          </a:solidFill>
-                          <a:latin typeface="Arial" pitchFamily="34" charset="0"/>
-                          <a:ea typeface="Arial" pitchFamily="34" charset="-122"/>
-                          <a:cs typeface="Arial" pitchFamily="34" charset="-120"/>
-                        </a:rPr>
-                        <a:t>/10</a:t>
-                      </a:r>
-                      <a:endParaRPr lang="en-US" sz="900" dirty="0">
-                        <a:latin typeface="Arial" charset="0"/>
-                        <a:ea typeface="Arial" charset="0"/>
-                        <a:cs typeface="Arial" charset="0"/>
-                      </a:endParaRPr>
-                    </a:p>
-                  </a:txBody>
-                  <a:tcPr marL="91440" marR="91440" marT="45720" marB="45720">
-                    <a:lnL w="6350" cap="flat" cmpd="sng" algn="ctr">
-                      <a:solidFill>
-                        <a:srgbClr val="CBD5E1"/>
-                      </a:solidFill>
-                      <a:prstDash val="solid"/>
-                      <a:round/>
-                      <a:headEnd type="none" w="med" len="med"/>
-                      <a:tailEnd type="none" w="med" len="med"/>
-                    </a:lnL>
-                    <a:lnR w="6350" cap="flat" cmpd="sng" algn="ctr">
-                      <a:solidFill>
-                        <a:srgbClr val="CBD5E1"/>
-                      </a:solidFill>
-                      <a:prstDash val="solid"/>
-                      <a:round/>
-                      <a:headEnd type="none" w="med" len="med"/>
-                      <a:tailEnd type="none" w="med" len="med"/>
-                    </a:lnR>
-                    <a:lnT w="6350" cap="flat" cmpd="sng" algn="ctr">
-                      <a:solidFill>
-                        <a:srgbClr val="CBD5E1"/>
-                      </a:solidFill>
-                      <a:prstDash val="solid"/>
-                      <a:round/>
-                      <a:headEnd type="none" w="med" len="med"/>
-                      <a:tailEnd type="none" w="med" len="med"/>
-                    </a:lnT>
-                    <a:lnB w="6350" cap="flat" cmpd="sng" algn="ctr">
-                      <a:solidFill>
-                        <a:srgbClr val="CBD5E1"/>
-                      </a:solidFill>
-                      <a:prstDash val="solid"/>
-                      <a:round/>
-                      <a:headEnd type="none" w="med" len="med"/>
-                      <a:tailEnd type="none" w="med" len="med"/>
-                    </a:lnB>
-                    <a:solidFill>
-                      <a:srgbClr val="FFFFFF"/>
-                    </a:solidFill>
-                  </a:tcPr>
-                </a:tc>
-                <a:tc>
-                  <a:txBody>
-                    <a:bodyPr/>
-                    <a:lstStyle/>
-                    <a:p>
-                      <a:pPr algn="ctr" indent="0" marL="0">
-                        <a:buNone/>
-                      </a:pPr>
-                      <a:r>
-                        <a:rPr lang="en-US" sz="900" dirty="0">
-                          <a:solidFill>
-                            <a:srgbClr val="000000"/>
-                          </a:solidFill>
-                          <a:latin typeface="Arial" pitchFamily="34" charset="0"/>
-                          <a:ea typeface="Arial" pitchFamily="34" charset="-122"/>
-                          <a:cs typeface="Arial" pitchFamily="34" charset="-120"/>
-                        </a:rPr>
-                        <a:t>7.07</a:t>
+                        <a:t>7.05</a:t>
                       </a:r>
                       <a:endParaRPr lang="en-US" sz="900" dirty="0">
                         <a:latin typeface="Arial" charset="0"/>
@@ -9910,7 +9910,7 @@
                 <a:ea typeface="Arial" pitchFamily="34" charset="-122"/>
                 <a:cs typeface="Arial" pitchFamily="34" charset="-120"/>
               </a:rPr>
-              <a:t>96件（67.1%）</a:t>
+              <a:t>95件（66.4%）</a:t>
             </a:r>
             <a:endParaRPr lang="en-US" sz="1100" dirty="0"/>
           </a:p>
@@ -10008,7 +10008,7 @@
                 <a:ea typeface="Arial" pitchFamily="34" charset="-122"/>
                 <a:cs typeface="Arial" pitchFamily="34" charset="-120"/>
               </a:rPr>
-              <a:t>27件（18.9%）</a:t>
+              <a:t>28件（19.6%）</a:t>
             </a:r>
             <a:endParaRPr lang="en-US" sz="1100" dirty="0"/>
           </a:p>
@@ -10518,7 +10518,7 @@
                 <a:ea typeface="Arial" pitchFamily="34" charset="-122"/>
                 <a:cs typeface="Arial" pitchFamily="34" charset="-120"/>
               </a:rPr>
-              <a:t>朝食無料です</a:t>
+              <a:t>朝食が程よい味付けです</a:t>
             </a:r>
             <a:endParaRPr lang="en-US" sz="900" dirty="0"/>
           </a:p>
@@ -10557,7 +10557,7 @@
                 <a:ea typeface="Arial" pitchFamily="34" charset="-122"/>
                 <a:cs typeface="Arial" pitchFamily="34" charset="-120"/>
               </a:rPr>
-              <a:t>「今回は朝食は食べていませんが、改装中とのことで、無料の朝食は弁当を配ってくれていたようです」</a:t>
+              <a:t>「出し入れ自由 ロービー横にはドリンクサービス、 無料朝食もあり、メニューも豊富で美味しかったです」</a:t>
             </a:r>
             <a:endParaRPr lang="en-US" sz="900" dirty="0"/>
           </a:p>
@@ -10741,7 +10741,7 @@
                 <a:ea typeface="Arial" pitchFamily="34" charset="-122"/>
                 <a:cs typeface="Arial" pitchFamily="34" charset="-120"/>
               </a:rPr>
-              <a:t>駅からも近いし、横浜観光のアクセスにはもってこいの場所だと思います</a:t>
+              <a:t>横浜スタジアムや中華街も徒歩圏内で、周りにはスーパーやコンビニ、飲食店も沢山あって便利^_^ 駐車場も隣接してあり</a:t>
             </a:r>
             <a:endParaRPr lang="en-US" sz="900" dirty="0"/>
           </a:p>
@@ -10780,7 +10780,7 @@
                 <a:ea typeface="Arial" pitchFamily="34" charset="-122"/>
                 <a:cs typeface="Arial" pitchFamily="34" charset="-120"/>
               </a:rPr>
-              <a:t>「アクセス的には駅から近く、行きやすかったです」</a:t>
+              <a:t>「駅からも近いし、横浜観光のアクセスにはもってこいの場所だと思います」</a:t>
             </a:r>
             <a:endParaRPr lang="en-US" sz="900" dirty="0"/>
           </a:p>
@@ -10964,7 +10964,7 @@
                 <a:ea typeface="Arial" pitchFamily="34" charset="-122"/>
                 <a:cs typeface="Arial" pitchFamily="34" charset="-120"/>
               </a:rPr>
-              <a:t>受付のスタッフの方達はとても丁寧でした</a:t>
+              <a:t>出し入れ自由 ロービー横にはドリンクサービス、 無料朝食もあり、メニューも豊富で美味しかったです</a:t>
             </a:r>
             <a:endParaRPr lang="en-US" sz="900" dirty="0"/>
           </a:p>
@@ -11003,7 +11003,7 @@
                 <a:ea typeface="Arial" pitchFamily="34" charset="-122"/>
                 <a:cs typeface="Arial" pitchFamily="34" charset="-120"/>
               </a:rPr>
-              <a:t>「チェックイン時、やり方が分からずモタモタしてしまった際、受付の方の対応があまり丁寧では無く、後ろに並んでいる人がい...」</a:t>
+              <a:t>「受付のスタッフの方達はとても丁寧でした」</a:t>
             </a:r>
             <a:endParaRPr lang="en-US" sz="900" dirty="0"/>
           </a:p>
@@ -11410,7 +11410,7 @@
                 <a:ea typeface="Arial" pitchFamily="34" charset="-122"/>
                 <a:cs typeface="Arial" pitchFamily="34" charset="-120"/>
               </a:rPr>
-              <a:t>設備は必要最低限ですが特に不満は無いです</a:t>
+              <a:t>子連れで2連泊しましたが、料金も安く、快適に過ごせました</a:t>
             </a:r>
             <a:endParaRPr lang="en-US" sz="900" dirty="0"/>
           </a:p>
@@ -11449,7 +11449,7 @@
                 <a:ea typeface="Arial" pitchFamily="34" charset="-122"/>
                 <a:cs typeface="Arial" pitchFamily="34" charset="-120"/>
               </a:rPr>
-              <a:t>「アメニティーなどの種類も少なすぎて、お値段の割に、サービス的には不親切だな、と感じました」</a:t>
+              <a:t>「設備は必要最低限ですが特に不満は無いです」</a:t>
             </a:r>
             <a:endParaRPr lang="en-US" sz="900" dirty="0"/>
           </a:p>
@@ -11633,7 +11633,7 @@
                 <a:ea typeface="Arial" pitchFamily="34" charset="-122"/>
                 <a:cs typeface="Arial" pitchFamily="34" charset="-120"/>
               </a:rPr>
-              <a:t>近くにスーパーやコンビニがあるのでとても便利でした</a:t>
+              <a:t>横浜スタジアムや中華街も徒歩圏内で、周りにはスーパーやコンビニ、飲食店も沢山あって便利^_^ 駐車場も隣接してあり</a:t>
             </a:r>
             <a:endParaRPr lang="en-US" sz="900" dirty="0"/>
           </a:p>
@@ -11672,7 +11672,7 @@
                 <a:ea typeface="Arial" pitchFamily="34" charset="-122"/>
                 <a:cs typeface="Arial" pitchFamily="34" charset="-120"/>
               </a:rPr>
-              <a:t>「もし気が乗らなければ、ざっと見て階下のローソンかセブンイレブンに行こうと思っていたほどです」</a:t>
+              <a:t>「近くにスーパーやコンビニがあるのでとても便利でした」</a:t>
             </a:r>
             <a:endParaRPr lang="en-US" sz="900" dirty="0"/>
           </a:p>
@@ -12430,7 +12430,7 @@
                           <a:ea typeface="Arial" pitchFamily="34" charset="-122"/>
                           <a:cs typeface="Arial" pitchFamily="34" charset="-120"/>
                         </a:rPr>
-                        <a:t>28件</a:t>
+                        <a:t>27件</a:t>
                       </a:r>
                       <a:endParaRPr lang="en-US" sz="900" dirty="0">
                         <a:latin typeface="Arial" charset="0"/>
@@ -13252,7 +13252,7 @@
                           <a:ea typeface="Arial" pitchFamily="34" charset="-122"/>
                           <a:cs typeface="Arial" pitchFamily="34" charset="-120"/>
                         </a:rPr>
-                        <a:t>6件</a:t>
+                        <a:t>5件</a:t>
                       </a:r>
                       <a:endParaRPr lang="en-US" sz="900" dirty="0">
                         <a:latin typeface="Arial" charset="0"/>
@@ -13664,7 +13664,7 @@
                           <a:ea typeface="Arial" pitchFamily="34" charset="-122"/>
                           <a:cs typeface="Arial" pitchFamily="34" charset="-120"/>
                         </a:rPr>
-                        <a:t>朝食の改善要望</a:t>
+                        <a:t>設備の老朽化</a:t>
                       </a:r>
                       <a:endParaRPr lang="en-US" sz="900" dirty="0">
                         <a:latin typeface="Arial" charset="0"/>
@@ -13732,7 +13732,7 @@
                           <a:ea typeface="Arial" pitchFamily="34" charset="-122"/>
                           <a:cs typeface="Arial" pitchFamily="34" charset="-120"/>
                         </a:rPr>
-                        <a:t>スムージーや期間限定メニュー！】などと大々的に銘打ってありましたが、実際にはチェックイン時に「工事期間のため簡単な...</a:t>
+                        <a:t>部屋は狭めで設備も古いが、スタッフの応対も丁寧でウェルカムドリンクもあります</a:t>
                       </a:r>
                       <a:endParaRPr lang="en-US" sz="900" dirty="0">
                         <a:latin typeface="Arial" charset="0"/>
@@ -13800,7 +13800,7 @@
                           <a:ea typeface="Arial" pitchFamily="34" charset="-122"/>
                           <a:cs typeface="Arial" pitchFamily="34" charset="-120"/>
                         </a:rPr>
-                        <a:t>4件</a:t>
+                        <a:t>3件</a:t>
                       </a:r>
                       <a:endParaRPr lang="en-US" sz="900" dirty="0">
                         <a:latin typeface="Arial" charset="0"/>
@@ -13938,7 +13938,7 @@
                           <a:ea typeface="Arial" pitchFamily="34" charset="-122"/>
                           <a:cs typeface="Arial" pitchFamily="34" charset="-120"/>
                         </a:rPr>
-                        <a:t>設備の老朽化</a:t>
+                        <a:t>朝食の改善要望</a:t>
                       </a:r>
                       <a:endParaRPr lang="en-US" sz="900" dirty="0">
                         <a:latin typeface="Arial" charset="0"/>
@@ -14006,7 +14006,7 @@
                           <a:ea typeface="Arial" pitchFamily="34" charset="-122"/>
                           <a:cs typeface="Arial" pitchFamily="34" charset="-120"/>
                         </a:rPr>
-                        <a:t>部屋は狭めで設備も古いが、スタッフの応対も丁寧でウェルカムドリンクもあります</a:t>
+                        <a:t>スムージーや期間限定メニュー！】などと大々的に銘打ってありましたが、実際にはチェックイン時に「工事期間のため簡単な...</a:t>
                       </a:r>
                       <a:endParaRPr lang="en-US" sz="900" dirty="0">
                         <a:latin typeface="Arial" charset="0"/>

--- a/納品レポート/ホテル別レポート/comfort_yokohama_kannai_口コミ分析レポート.pptx
+++ b/納品レポート/ホテル別レポート/comfort_yokohama_kannai_口コミ分析レポート.pptx
@@ -186,16 +186,16 @@
                     <c:v>Agoda</c:v>
                   </c:pt>
                   <c:pt idx="2">
+                    <c:v>楽天トラベル</c:v>
+                  </c:pt>
+                  <c:pt idx="3">
                     <c:v>Google</c:v>
                   </c:pt>
-                  <c:pt idx="3">
-                    <c:v>楽天トラベル</c:v>
-                  </c:pt>
                   <c:pt idx="4">
-                    <c:v>Booking.com</c:v>
+                    <c:v>じゃらん</c:v>
                   </c:pt>
                   <c:pt idx="5">
-                    <c:v>じゃらん</c:v>
+                    <c:v>Booking.com</c:v>
                   </c:pt>
                 </c:lvl>
               </c:multiLvlStrCache>
@@ -211,19 +211,19 @@
                   <c:v>8.32</c:v>
                 </c:pt>
                 <c:pt idx="1">
-                  <c:v>7.79</c:v>
+                  <c:v>8</c:v>
                 </c:pt>
                 <c:pt idx="2">
-                  <c:v>7.4</c:v>
+                  <c:v>7.48</c:v>
                 </c:pt>
                 <c:pt idx="3">
-                  <c:v>7.35</c:v>
+                  <c:v>7.36</c:v>
                 </c:pt>
                 <c:pt idx="4">
-                  <c:v>7.07</c:v>
+                  <c:v>7.1</c:v>
                 </c:pt>
                 <c:pt idx="5">
-                  <c:v>7.05</c:v>
+                  <c:v>6.96</c:v>
                 </c:pt>
               </c:numCache>
             </c:numRef>
@@ -569,10 +569,10 @@
                   <c:v>95</c:v>
                 </c:pt>
                 <c:pt idx="1">
-                  <c:v>28</c:v>
+                  <c:v>29</c:v>
                 </c:pt>
                 <c:pt idx="2">
-                  <c:v>20</c:v>
+                  <c:v>19</c:v>
                 </c:pt>
               </c:numCache>
             </c:numRef>
@@ -823,22 +823,22 @@
                 <c:formatCode>General</c:formatCode>
                 <c:ptCount val="9"/>
                 <c:pt idx="0">
-                  <c:v>33</c:v>
+                  <c:v>32</c:v>
                 </c:pt>
                 <c:pt idx="1">
                   <c:v>7</c:v>
                 </c:pt>
                 <c:pt idx="2">
-                  <c:v>55</c:v>
+                  <c:v>56</c:v>
                 </c:pt>
                 <c:pt idx="3">
-                  <c:v>5</c:v>
+                  <c:v>6</c:v>
                 </c:pt>
                 <c:pt idx="4">
-                  <c:v>17</c:v>
+                  <c:v>18</c:v>
                 </c:pt>
                 <c:pt idx="5">
-                  <c:v>6</c:v>
+                  <c:v>5</c:v>
                 </c:pt>
                 <c:pt idx="6">
                   <c:v>11</c:v>
@@ -847,7 +847,7 @@
                   <c:v>1</c:v>
                 </c:pt>
                 <c:pt idx="8">
-                  <c:v>8</c:v>
+                  <c:v>7</c:v>
                 </c:pt>
               </c:numCache>
             </c:numRef>
@@ -2818,7 +2818,7 @@
                 <a:ea typeface="Arial" pitchFamily="34" charset="-122"/>
                 <a:cs typeface="Arial" pitchFamily="34" charset="-120"/>
               </a:rPr>
-              <a:t>作成日：2026年3月26日</a:t>
+              <a:t>作成日：2026年3月27日</a:t>
             </a:r>
             <a:endParaRPr lang="en-US" sz="1000" dirty="0"/>
           </a:p>
@@ -3364,7 +3364,7 @@
                           <a:ea typeface="Arial" pitchFamily="34" charset="-122"/>
                           <a:cs typeface="Arial" pitchFamily="34" charset="-120"/>
                         </a:rPr>
-                        <a:t>7.43点</a:t>
+                        <a:t>7.46点</a:t>
                       </a:r>
                       <a:endParaRPr lang="en-US" sz="1000" dirty="0">
                         <a:latin typeface="Arial" charset="0"/>
@@ -3432,7 +3432,7 @@
                           <a:ea typeface="Arial" pitchFamily="34" charset="-122"/>
                           <a:cs typeface="Arial" pitchFamily="34" charset="-120"/>
                         </a:rPr>
-                        <a:t>7.9点以上</a:t>
+                        <a:t>8.0点以上</a:t>
                       </a:r>
                       <a:endParaRPr lang="en-US" sz="1000" dirty="0">
                         <a:latin typeface="Arial" charset="0"/>
@@ -3912,7 +3912,7 @@
                           <a:ea typeface="Arial" pitchFamily="34" charset="-122"/>
                           <a:cs typeface="Arial" pitchFamily="34" charset="-120"/>
                         </a:rPr>
-                        <a:t>14.0%</a:t>
+                        <a:t>13.3%</a:t>
                       </a:r>
                       <a:endParaRPr lang="en-US" sz="1000" dirty="0">
                         <a:latin typeface="Arial" charset="0"/>
@@ -3980,7 +3980,7 @@
                           <a:ea typeface="Arial" pitchFamily="34" charset="-122"/>
                           <a:cs typeface="Arial" pitchFamily="34" charset="-120"/>
                         </a:rPr>
-                        <a:t>9%以下</a:t>
+                        <a:t>8%以下</a:t>
                       </a:r>
                       <a:endParaRPr lang="en-US" sz="1000" dirty="0">
                         <a:latin typeface="Arial" charset="0"/>
@@ -4460,7 +4460,7 @@
                           <a:ea typeface="Arial" pitchFamily="34" charset="-122"/>
                           <a:cs typeface="Arial" pitchFamily="34" charset="-120"/>
                         </a:rPr>
-                        <a:t>約27件/期間</a:t>
+                        <a:t>約26件/期間</a:t>
                       </a:r>
                       <a:endParaRPr lang="en-US" sz="1000" dirty="0">
                         <a:latin typeface="Arial" charset="0"/>
@@ -5099,7 +5099,7 @@
                 <a:ea typeface="Arial" pitchFamily="34" charset="-122"/>
                 <a:cs typeface="Arial" pitchFamily="34" charset="-120"/>
               </a:rPr>
-              <a:t>7.43</a:t>
+              <a:t>7.46</a:t>
             </a:r>
             <a:endParaRPr lang="en-US" sz="3200" dirty="0"/>
           </a:p>
@@ -5349,7 +5349,7 @@
                 <a:ea typeface="Arial" pitchFamily="34" charset="-122"/>
                 <a:cs typeface="Arial" pitchFamily="34" charset="-120"/>
               </a:rPr>
-              <a:t>14.0%</a:t>
+              <a:t>13.3%</a:t>
             </a:r>
             <a:endParaRPr lang="en-US" sz="3200" dirty="0"/>
           </a:p>
@@ -5622,7 +5622,7 @@
                 <a:ea typeface="Arial" pitchFamily="34" charset="-122"/>
                 <a:cs typeface="Arial" pitchFamily="34" charset="-120"/>
               </a:rPr>
-              <a:t>  朝食が程よい味付けです</a:t>
+              <a:t>  エアコンが古い、カードキータイプだが部屋にはカード入れがなく忘れそう、風呂の体を洗うタオルなし、朝食は団体客がいる...</a:t>
             </a:r>
             <a:endParaRPr lang="en-US" sz="1100" dirty="0"/>
           </a:p>
@@ -5702,7 +5702,7 @@
                 <a:ea typeface="Arial" pitchFamily="34" charset="-122"/>
                 <a:cs typeface="Arial" pitchFamily="34" charset="-120"/>
               </a:rPr>
-              <a:t>  出し入れ自由 ロービー横にはドリンクサービス、 無料朝食もあり、メニューも豊富で美味しかったです</a:t>
+              <a:t>  スタッフの方みんな一生懸命でした</a:t>
             </a:r>
             <a:endParaRPr lang="en-US" sz="1100" dirty="0"/>
           </a:p>
@@ -5850,7 +5850,7 @@
                 <a:ea typeface="Arial" pitchFamily="34" charset="-122"/>
                 <a:cs typeface="Arial" pitchFamily="34" charset="-120"/>
               </a:rPr>
-              <a:t>  部屋も広く、快適でした ホテルが改装中が残念で、朝食がバイキングでないのが、残念でした</a:t>
+              <a:t>  ヨーグルトが👌 設備にちょい残念な点が… シャワーヘッドの元のあたりから水もれあり</a:t>
             </a:r>
             <a:endParaRPr lang="en-US" sz="1100" dirty="0"/>
           </a:p>
@@ -5930,7 +5930,7 @@
                 <a:ea typeface="Arial" pitchFamily="34" charset="-122"/>
                 <a:cs typeface="Arial" pitchFamily="34" charset="-120"/>
               </a:rPr>
-              <a:t>  嫌な臭いは一切なく、カーペット、カーテン、そしてバスルームまでピカピカでした</a:t>
+              <a:t>  ヨーグルトが👌 設備にちょい残念な点が… シャワーヘッドの元のあたりから水もれあり</a:t>
             </a:r>
             <a:endParaRPr lang="en-US" sz="1100" dirty="0"/>
           </a:p>
@@ -6283,7 +6283,7 @@
                 <a:ea typeface="Arial" pitchFamily="34" charset="-122"/>
                 <a:cs typeface="Arial" pitchFamily="34" charset="-120"/>
               </a:rPr>
-              <a:t>7.43</a:t>
+              <a:t>7.46</a:t>
             </a:r>
             <a:endParaRPr lang="en-US" sz="3200" dirty="0"/>
           </a:p>
@@ -6533,7 +6533,7 @@
                 <a:ea typeface="Arial" pitchFamily="34" charset="-122"/>
                 <a:cs typeface="Arial" pitchFamily="34" charset="-120"/>
               </a:rPr>
-              <a:t>14.0%</a:t>
+              <a:t>13.3%</a:t>
             </a:r>
             <a:endParaRPr lang="en-US" sz="3200" dirty="0"/>
           </a:p>
@@ -7930,7 +7930,7 @@
                           <a:ea typeface="Arial" pitchFamily="34" charset="-122"/>
                           <a:cs typeface="Arial" pitchFamily="34" charset="-120"/>
                         </a:rPr>
-                        <a:t>14</a:t>
+                        <a:t>12</a:t>
                       </a:r>
                       <a:endParaRPr lang="en-US" sz="900" dirty="0">
                         <a:latin typeface="Arial" charset="0"/>
@@ -7998,7 +7998,7 @@
                           <a:ea typeface="Arial" pitchFamily="34" charset="-122"/>
                           <a:cs typeface="Arial" pitchFamily="34" charset="-120"/>
                         </a:rPr>
-                        <a:t>7.79</a:t>
+                        <a:t>8</a:t>
                       </a:r>
                       <a:endParaRPr lang="en-US" sz="900" dirty="0">
                         <a:latin typeface="Arial" charset="0"/>
@@ -8134,7 +8134,7 @@
                           <a:ea typeface="Arial" pitchFamily="34" charset="-122"/>
                           <a:cs typeface="Arial" pitchFamily="34" charset="-120"/>
                         </a:rPr>
-                        <a:t>7.79</a:t>
+                        <a:t>8</a:t>
                       </a:r>
                       <a:endParaRPr lang="en-US" sz="900" dirty="0">
                         <a:latin typeface="Arial" charset="0"/>
@@ -8204,7 +8204,691 @@
                           <a:ea typeface="Arial" pitchFamily="34" charset="-122"/>
                           <a:cs typeface="Arial" pitchFamily="34" charset="-120"/>
                         </a:rPr>
+                        <a:t>楽天トラベル</a:t>
+                      </a:r>
+                      <a:endParaRPr lang="en-US" sz="900" dirty="0">
+                        <a:latin typeface="Arial" charset="0"/>
+                        <a:ea typeface="Arial" charset="0"/>
+                        <a:cs typeface="Arial" charset="0"/>
+                      </a:endParaRPr>
+                    </a:p>
+                  </a:txBody>
+                  <a:tcPr marL="91440" marR="91440" marT="45720" marB="45720">
+                    <a:lnL w="6350" cap="flat" cmpd="sng" algn="ctr">
+                      <a:solidFill>
+                        <a:srgbClr val="CBD5E1"/>
+                      </a:solidFill>
+                      <a:prstDash val="solid"/>
+                      <a:round/>
+                      <a:headEnd type="none" w="med" len="med"/>
+                      <a:tailEnd type="none" w="med" len="med"/>
+                    </a:lnL>
+                    <a:lnR w="6350" cap="flat" cmpd="sng" algn="ctr">
+                      <a:solidFill>
+                        <a:srgbClr val="CBD5E1"/>
+                      </a:solidFill>
+                      <a:prstDash val="solid"/>
+                      <a:round/>
+                      <a:headEnd type="none" w="med" len="med"/>
+                      <a:tailEnd type="none" w="med" len="med"/>
+                    </a:lnR>
+                    <a:lnT w="6350" cap="flat" cmpd="sng" algn="ctr">
+                      <a:solidFill>
+                        <a:srgbClr val="CBD5E1"/>
+                      </a:solidFill>
+                      <a:prstDash val="solid"/>
+                      <a:round/>
+                      <a:headEnd type="none" w="med" len="med"/>
+                      <a:tailEnd type="none" w="med" len="med"/>
+                    </a:lnT>
+                    <a:lnB w="6350" cap="flat" cmpd="sng" algn="ctr">
+                      <a:solidFill>
+                        <a:srgbClr val="CBD5E1"/>
+                      </a:solidFill>
+                      <a:prstDash val="solid"/>
+                      <a:round/>
+                      <a:headEnd type="none" w="med" len="med"/>
+                      <a:tailEnd type="none" w="med" len="med"/>
+                    </a:lnB>
+                    <a:solidFill>
+                      <a:srgbClr val="E8EFF8"/>
+                    </a:solidFill>
+                  </a:tcPr>
+                </a:tc>
+                <a:tc>
+                  <a:txBody>
+                    <a:bodyPr/>
+                    <a:lstStyle/>
+                    <a:p>
+                      <a:pPr algn="ctr" indent="0" marL="0">
+                        <a:buNone/>
+                      </a:pPr>
+                      <a:r>
+                        <a:rPr lang="en-US" sz="900" dirty="0">
+                          <a:solidFill>
+                            <a:srgbClr val="000000"/>
+                          </a:solidFill>
+                          <a:latin typeface="Arial" pitchFamily="34" charset="0"/>
+                          <a:ea typeface="Arial" pitchFamily="34" charset="-122"/>
+                          <a:cs typeface="Arial" pitchFamily="34" charset="-120"/>
+                        </a:rPr>
+                        <a:t>42</a:t>
+                      </a:r>
+                      <a:endParaRPr lang="en-US" sz="900" dirty="0">
+                        <a:latin typeface="Arial" charset="0"/>
+                        <a:ea typeface="Arial" charset="0"/>
+                        <a:cs typeface="Arial" charset="0"/>
+                      </a:endParaRPr>
+                    </a:p>
+                  </a:txBody>
+                  <a:tcPr marL="91440" marR="91440" marT="45720" marB="45720">
+                    <a:lnL w="6350" cap="flat" cmpd="sng" algn="ctr">
+                      <a:solidFill>
+                        <a:srgbClr val="CBD5E1"/>
+                      </a:solidFill>
+                      <a:prstDash val="solid"/>
+                      <a:round/>
+                      <a:headEnd type="none" w="med" len="med"/>
+                      <a:tailEnd type="none" w="med" len="med"/>
+                    </a:lnL>
+                    <a:lnR w="6350" cap="flat" cmpd="sng" algn="ctr">
+                      <a:solidFill>
+                        <a:srgbClr val="CBD5E1"/>
+                      </a:solidFill>
+                      <a:prstDash val="solid"/>
+                      <a:round/>
+                      <a:headEnd type="none" w="med" len="med"/>
+                      <a:tailEnd type="none" w="med" len="med"/>
+                    </a:lnR>
+                    <a:lnT w="6350" cap="flat" cmpd="sng" algn="ctr">
+                      <a:solidFill>
+                        <a:srgbClr val="CBD5E1"/>
+                      </a:solidFill>
+                      <a:prstDash val="solid"/>
+                      <a:round/>
+                      <a:headEnd type="none" w="med" len="med"/>
+                      <a:tailEnd type="none" w="med" len="med"/>
+                    </a:lnT>
+                    <a:lnB w="6350" cap="flat" cmpd="sng" algn="ctr">
+                      <a:solidFill>
+                        <a:srgbClr val="CBD5E1"/>
+                      </a:solidFill>
+                      <a:prstDash val="solid"/>
+                      <a:round/>
+                      <a:headEnd type="none" w="med" len="med"/>
+                      <a:tailEnd type="none" w="med" len="med"/>
+                    </a:lnB>
+                    <a:solidFill>
+                      <a:srgbClr val="E8EFF8"/>
+                    </a:solidFill>
+                  </a:tcPr>
+                </a:tc>
+                <a:tc>
+                  <a:txBody>
+                    <a:bodyPr/>
+                    <a:lstStyle/>
+                    <a:p>
+                      <a:pPr algn="ctr" indent="0" marL="0">
+                        <a:buNone/>
+                      </a:pPr>
+                      <a:r>
+                        <a:rPr lang="en-US" sz="900" dirty="0">
+                          <a:solidFill>
+                            <a:srgbClr val="000000"/>
+                          </a:solidFill>
+                          <a:latin typeface="Arial" pitchFamily="34" charset="0"/>
+                          <a:ea typeface="Arial" pitchFamily="34" charset="-122"/>
+                          <a:cs typeface="Arial" pitchFamily="34" charset="-120"/>
+                        </a:rPr>
+                        <a:t>3.74</a:t>
+                      </a:r>
+                      <a:endParaRPr lang="en-US" sz="900" dirty="0">
+                        <a:latin typeface="Arial" charset="0"/>
+                        <a:ea typeface="Arial" charset="0"/>
+                        <a:cs typeface="Arial" charset="0"/>
+                      </a:endParaRPr>
+                    </a:p>
+                  </a:txBody>
+                  <a:tcPr marL="91440" marR="91440" marT="45720" marB="45720">
+                    <a:lnL w="6350" cap="flat" cmpd="sng" algn="ctr">
+                      <a:solidFill>
+                        <a:srgbClr val="CBD5E1"/>
+                      </a:solidFill>
+                      <a:prstDash val="solid"/>
+                      <a:round/>
+                      <a:headEnd type="none" w="med" len="med"/>
+                      <a:tailEnd type="none" w="med" len="med"/>
+                    </a:lnL>
+                    <a:lnR w="6350" cap="flat" cmpd="sng" algn="ctr">
+                      <a:solidFill>
+                        <a:srgbClr val="CBD5E1"/>
+                      </a:solidFill>
+                      <a:prstDash val="solid"/>
+                      <a:round/>
+                      <a:headEnd type="none" w="med" len="med"/>
+                      <a:tailEnd type="none" w="med" len="med"/>
+                    </a:lnR>
+                    <a:lnT w="6350" cap="flat" cmpd="sng" algn="ctr">
+                      <a:solidFill>
+                        <a:srgbClr val="CBD5E1"/>
+                      </a:solidFill>
+                      <a:prstDash val="solid"/>
+                      <a:round/>
+                      <a:headEnd type="none" w="med" len="med"/>
+                      <a:tailEnd type="none" w="med" len="med"/>
+                    </a:lnT>
+                    <a:lnB w="6350" cap="flat" cmpd="sng" algn="ctr">
+                      <a:solidFill>
+                        <a:srgbClr val="CBD5E1"/>
+                      </a:solidFill>
+                      <a:prstDash val="solid"/>
+                      <a:round/>
+                      <a:headEnd type="none" w="med" len="med"/>
+                      <a:tailEnd type="none" w="med" len="med"/>
+                    </a:lnB>
+                    <a:solidFill>
+                      <a:srgbClr val="E8EFF8"/>
+                    </a:solidFill>
+                  </a:tcPr>
+                </a:tc>
+                <a:tc>
+                  <a:txBody>
+                    <a:bodyPr/>
+                    <a:lstStyle/>
+                    <a:p>
+                      <a:pPr algn="ctr" indent="0" marL="0">
+                        <a:buNone/>
+                      </a:pPr>
+                      <a:r>
+                        <a:rPr lang="en-US" sz="900" dirty="0">
+                          <a:solidFill>
+                            <a:srgbClr val="000000"/>
+                          </a:solidFill>
+                          <a:latin typeface="Arial" pitchFamily="34" charset="0"/>
+                          <a:ea typeface="Arial" pitchFamily="34" charset="-122"/>
+                          <a:cs typeface="Arial" pitchFamily="34" charset="-120"/>
+                        </a:rPr>
+                        <a:t>/5 (×2)</a:t>
+                      </a:r>
+                      <a:endParaRPr lang="en-US" sz="900" dirty="0">
+                        <a:latin typeface="Arial" charset="0"/>
+                        <a:ea typeface="Arial" charset="0"/>
+                        <a:cs typeface="Arial" charset="0"/>
+                      </a:endParaRPr>
+                    </a:p>
+                  </a:txBody>
+                  <a:tcPr marL="91440" marR="91440" marT="45720" marB="45720">
+                    <a:lnL w="6350" cap="flat" cmpd="sng" algn="ctr">
+                      <a:solidFill>
+                        <a:srgbClr val="CBD5E1"/>
+                      </a:solidFill>
+                      <a:prstDash val="solid"/>
+                      <a:round/>
+                      <a:headEnd type="none" w="med" len="med"/>
+                      <a:tailEnd type="none" w="med" len="med"/>
+                    </a:lnL>
+                    <a:lnR w="6350" cap="flat" cmpd="sng" algn="ctr">
+                      <a:solidFill>
+                        <a:srgbClr val="CBD5E1"/>
+                      </a:solidFill>
+                      <a:prstDash val="solid"/>
+                      <a:round/>
+                      <a:headEnd type="none" w="med" len="med"/>
+                      <a:tailEnd type="none" w="med" len="med"/>
+                    </a:lnR>
+                    <a:lnT w="6350" cap="flat" cmpd="sng" algn="ctr">
+                      <a:solidFill>
+                        <a:srgbClr val="CBD5E1"/>
+                      </a:solidFill>
+                      <a:prstDash val="solid"/>
+                      <a:round/>
+                      <a:headEnd type="none" w="med" len="med"/>
+                      <a:tailEnd type="none" w="med" len="med"/>
+                    </a:lnT>
+                    <a:lnB w="6350" cap="flat" cmpd="sng" algn="ctr">
+                      <a:solidFill>
+                        <a:srgbClr val="CBD5E1"/>
+                      </a:solidFill>
+                      <a:prstDash val="solid"/>
+                      <a:round/>
+                      <a:headEnd type="none" w="med" len="med"/>
+                      <a:tailEnd type="none" w="med" len="med"/>
+                    </a:lnB>
+                    <a:solidFill>
+                      <a:srgbClr val="E8EFF8"/>
+                    </a:solidFill>
+                  </a:tcPr>
+                </a:tc>
+                <a:tc>
+                  <a:txBody>
+                    <a:bodyPr/>
+                    <a:lstStyle/>
+                    <a:p>
+                      <a:pPr algn="ctr" indent="0" marL="0">
+                        <a:buNone/>
+                      </a:pPr>
+                      <a:r>
+                        <a:rPr lang="en-US" sz="900" dirty="0">
+                          <a:solidFill>
+                            <a:srgbClr val="000000"/>
+                          </a:solidFill>
+                          <a:latin typeface="Arial" pitchFamily="34" charset="0"/>
+                          <a:ea typeface="Arial" pitchFamily="34" charset="-122"/>
+                          <a:cs typeface="Arial" pitchFamily="34" charset="-120"/>
+                        </a:rPr>
+                        <a:t>7.48</a:t>
+                      </a:r>
+                      <a:endParaRPr lang="en-US" sz="900" dirty="0">
+                        <a:latin typeface="Arial" charset="0"/>
+                        <a:ea typeface="Arial" charset="0"/>
+                        <a:cs typeface="Arial" charset="0"/>
+                      </a:endParaRPr>
+                    </a:p>
+                  </a:txBody>
+                  <a:tcPr marL="91440" marR="91440" marT="45720" marB="45720">
+                    <a:lnL w="6350" cap="flat" cmpd="sng" algn="ctr">
+                      <a:solidFill>
+                        <a:srgbClr val="CBD5E1"/>
+                      </a:solidFill>
+                      <a:prstDash val="solid"/>
+                      <a:round/>
+                      <a:headEnd type="none" w="med" len="med"/>
+                      <a:tailEnd type="none" w="med" len="med"/>
+                    </a:lnL>
+                    <a:lnR w="6350" cap="flat" cmpd="sng" algn="ctr">
+                      <a:solidFill>
+                        <a:srgbClr val="CBD5E1"/>
+                      </a:solidFill>
+                      <a:prstDash val="solid"/>
+                      <a:round/>
+                      <a:headEnd type="none" w="med" len="med"/>
+                      <a:tailEnd type="none" w="med" len="med"/>
+                    </a:lnR>
+                    <a:lnT w="6350" cap="flat" cmpd="sng" algn="ctr">
+                      <a:solidFill>
+                        <a:srgbClr val="CBD5E1"/>
+                      </a:solidFill>
+                      <a:prstDash val="solid"/>
+                      <a:round/>
+                      <a:headEnd type="none" w="med" len="med"/>
+                      <a:tailEnd type="none" w="med" len="med"/>
+                    </a:lnT>
+                    <a:lnB w="6350" cap="flat" cmpd="sng" algn="ctr">
+                      <a:solidFill>
+                        <a:srgbClr val="CBD5E1"/>
+                      </a:solidFill>
+                      <a:prstDash val="solid"/>
+                      <a:round/>
+                      <a:headEnd type="none" w="med" len="med"/>
+                      <a:tailEnd type="none" w="med" len="med"/>
+                    </a:lnB>
+                    <a:solidFill>
+                      <a:srgbClr val="E8EFF8"/>
+                    </a:solidFill>
+                  </a:tcPr>
+                </a:tc>
+              </a:tr>
+              <a:tr h="201168">
+                <a:tc>
+                  <a:txBody>
+                    <a:bodyPr/>
+                    <a:lstStyle/>
+                    <a:p>
+                      <a:pPr algn="ctr" indent="0" marL="0">
+                        <a:buNone/>
+                      </a:pPr>
+                      <a:r>
+                        <a:rPr lang="en-US" sz="900" dirty="0">
+                          <a:solidFill>
+                            <a:srgbClr val="000000"/>
+                          </a:solidFill>
+                          <a:latin typeface="Arial" pitchFamily="34" charset="0"/>
+                          <a:ea typeface="Arial" pitchFamily="34" charset="-122"/>
+                          <a:cs typeface="Arial" pitchFamily="34" charset="-120"/>
+                        </a:rPr>
                         <a:t>Google</a:t>
+                      </a:r>
+                      <a:endParaRPr lang="en-US" sz="900" dirty="0">
+                        <a:latin typeface="Arial" charset="0"/>
+                        <a:ea typeface="Arial" charset="0"/>
+                        <a:cs typeface="Arial" charset="0"/>
+                      </a:endParaRPr>
+                    </a:p>
+                  </a:txBody>
+                  <a:tcPr marL="91440" marR="91440" marT="45720" marB="45720">
+                    <a:lnL w="6350" cap="flat" cmpd="sng" algn="ctr">
+                      <a:solidFill>
+                        <a:srgbClr val="CBD5E1"/>
+                      </a:solidFill>
+                      <a:prstDash val="solid"/>
+                      <a:round/>
+                      <a:headEnd type="none" w="med" len="med"/>
+                      <a:tailEnd type="none" w="med" len="med"/>
+                    </a:lnL>
+                    <a:lnR w="6350" cap="flat" cmpd="sng" algn="ctr">
+                      <a:solidFill>
+                        <a:srgbClr val="CBD5E1"/>
+                      </a:solidFill>
+                      <a:prstDash val="solid"/>
+                      <a:round/>
+                      <a:headEnd type="none" w="med" len="med"/>
+                      <a:tailEnd type="none" w="med" len="med"/>
+                    </a:lnR>
+                    <a:lnT w="6350" cap="flat" cmpd="sng" algn="ctr">
+                      <a:solidFill>
+                        <a:srgbClr val="CBD5E1"/>
+                      </a:solidFill>
+                      <a:prstDash val="solid"/>
+                      <a:round/>
+                      <a:headEnd type="none" w="med" len="med"/>
+                      <a:tailEnd type="none" w="med" len="med"/>
+                    </a:lnT>
+                    <a:lnB w="6350" cap="flat" cmpd="sng" algn="ctr">
+                      <a:solidFill>
+                        <a:srgbClr val="CBD5E1"/>
+                      </a:solidFill>
+                      <a:prstDash val="solid"/>
+                      <a:round/>
+                      <a:headEnd type="none" w="med" len="med"/>
+                      <a:tailEnd type="none" w="med" len="med"/>
+                    </a:lnB>
+                    <a:solidFill>
+                      <a:srgbClr val="FFFFFF"/>
+                    </a:solidFill>
+                  </a:tcPr>
+                </a:tc>
+                <a:tc>
+                  <a:txBody>
+                    <a:bodyPr/>
+                    <a:lstStyle/>
+                    <a:p>
+                      <a:pPr algn="ctr" indent="0" marL="0">
+                        <a:buNone/>
+                      </a:pPr>
+                      <a:r>
+                        <a:rPr lang="en-US" sz="900" dirty="0">
+                          <a:solidFill>
+                            <a:srgbClr val="000000"/>
+                          </a:solidFill>
+                          <a:latin typeface="Arial" pitchFamily="34" charset="0"/>
+                          <a:ea typeface="Arial" pitchFamily="34" charset="-122"/>
+                          <a:cs typeface="Arial" pitchFamily="34" charset="-120"/>
+                        </a:rPr>
+                        <a:t>22</a:t>
+                      </a:r>
+                      <a:endParaRPr lang="en-US" sz="900" dirty="0">
+                        <a:latin typeface="Arial" charset="0"/>
+                        <a:ea typeface="Arial" charset="0"/>
+                        <a:cs typeface="Arial" charset="0"/>
+                      </a:endParaRPr>
+                    </a:p>
+                  </a:txBody>
+                  <a:tcPr marL="91440" marR="91440" marT="45720" marB="45720">
+                    <a:lnL w="6350" cap="flat" cmpd="sng" algn="ctr">
+                      <a:solidFill>
+                        <a:srgbClr val="CBD5E1"/>
+                      </a:solidFill>
+                      <a:prstDash val="solid"/>
+                      <a:round/>
+                      <a:headEnd type="none" w="med" len="med"/>
+                      <a:tailEnd type="none" w="med" len="med"/>
+                    </a:lnL>
+                    <a:lnR w="6350" cap="flat" cmpd="sng" algn="ctr">
+                      <a:solidFill>
+                        <a:srgbClr val="CBD5E1"/>
+                      </a:solidFill>
+                      <a:prstDash val="solid"/>
+                      <a:round/>
+                      <a:headEnd type="none" w="med" len="med"/>
+                      <a:tailEnd type="none" w="med" len="med"/>
+                    </a:lnR>
+                    <a:lnT w="6350" cap="flat" cmpd="sng" algn="ctr">
+                      <a:solidFill>
+                        <a:srgbClr val="CBD5E1"/>
+                      </a:solidFill>
+                      <a:prstDash val="solid"/>
+                      <a:round/>
+                      <a:headEnd type="none" w="med" len="med"/>
+                      <a:tailEnd type="none" w="med" len="med"/>
+                    </a:lnT>
+                    <a:lnB w="6350" cap="flat" cmpd="sng" algn="ctr">
+                      <a:solidFill>
+                        <a:srgbClr val="CBD5E1"/>
+                      </a:solidFill>
+                      <a:prstDash val="solid"/>
+                      <a:round/>
+                      <a:headEnd type="none" w="med" len="med"/>
+                      <a:tailEnd type="none" w="med" len="med"/>
+                    </a:lnB>
+                    <a:solidFill>
+                      <a:srgbClr val="FFFFFF"/>
+                    </a:solidFill>
+                  </a:tcPr>
+                </a:tc>
+                <a:tc>
+                  <a:txBody>
+                    <a:bodyPr/>
+                    <a:lstStyle/>
+                    <a:p>
+                      <a:pPr algn="ctr" indent="0" marL="0">
+                        <a:buNone/>
+                      </a:pPr>
+                      <a:r>
+                        <a:rPr lang="en-US" sz="900" dirty="0">
+                          <a:solidFill>
+                            <a:srgbClr val="000000"/>
+                          </a:solidFill>
+                          <a:latin typeface="Arial" pitchFamily="34" charset="0"/>
+                          <a:ea typeface="Arial" pitchFamily="34" charset="-122"/>
+                          <a:cs typeface="Arial" pitchFamily="34" charset="-120"/>
+                        </a:rPr>
+                        <a:t>3.68</a:t>
+                      </a:r>
+                      <a:endParaRPr lang="en-US" sz="900" dirty="0">
+                        <a:latin typeface="Arial" charset="0"/>
+                        <a:ea typeface="Arial" charset="0"/>
+                        <a:cs typeface="Arial" charset="0"/>
+                      </a:endParaRPr>
+                    </a:p>
+                  </a:txBody>
+                  <a:tcPr marL="91440" marR="91440" marT="45720" marB="45720">
+                    <a:lnL w="6350" cap="flat" cmpd="sng" algn="ctr">
+                      <a:solidFill>
+                        <a:srgbClr val="CBD5E1"/>
+                      </a:solidFill>
+                      <a:prstDash val="solid"/>
+                      <a:round/>
+                      <a:headEnd type="none" w="med" len="med"/>
+                      <a:tailEnd type="none" w="med" len="med"/>
+                    </a:lnL>
+                    <a:lnR w="6350" cap="flat" cmpd="sng" algn="ctr">
+                      <a:solidFill>
+                        <a:srgbClr val="CBD5E1"/>
+                      </a:solidFill>
+                      <a:prstDash val="solid"/>
+                      <a:round/>
+                      <a:headEnd type="none" w="med" len="med"/>
+                      <a:tailEnd type="none" w="med" len="med"/>
+                    </a:lnR>
+                    <a:lnT w="6350" cap="flat" cmpd="sng" algn="ctr">
+                      <a:solidFill>
+                        <a:srgbClr val="CBD5E1"/>
+                      </a:solidFill>
+                      <a:prstDash val="solid"/>
+                      <a:round/>
+                      <a:headEnd type="none" w="med" len="med"/>
+                      <a:tailEnd type="none" w="med" len="med"/>
+                    </a:lnT>
+                    <a:lnB w="6350" cap="flat" cmpd="sng" algn="ctr">
+                      <a:solidFill>
+                        <a:srgbClr val="CBD5E1"/>
+                      </a:solidFill>
+                      <a:prstDash val="solid"/>
+                      <a:round/>
+                      <a:headEnd type="none" w="med" len="med"/>
+                      <a:tailEnd type="none" w="med" len="med"/>
+                    </a:lnB>
+                    <a:solidFill>
+                      <a:srgbClr val="FFFFFF"/>
+                    </a:solidFill>
+                  </a:tcPr>
+                </a:tc>
+                <a:tc>
+                  <a:txBody>
+                    <a:bodyPr/>
+                    <a:lstStyle/>
+                    <a:p>
+                      <a:pPr algn="ctr" indent="0" marL="0">
+                        <a:buNone/>
+                      </a:pPr>
+                      <a:r>
+                        <a:rPr lang="en-US" sz="900" dirty="0">
+                          <a:solidFill>
+                            <a:srgbClr val="000000"/>
+                          </a:solidFill>
+                          <a:latin typeface="Arial" pitchFamily="34" charset="0"/>
+                          <a:ea typeface="Arial" pitchFamily="34" charset="-122"/>
+                          <a:cs typeface="Arial" pitchFamily="34" charset="-120"/>
+                        </a:rPr>
+                        <a:t>/5 (×2)</a:t>
+                      </a:r>
+                      <a:endParaRPr lang="en-US" sz="900" dirty="0">
+                        <a:latin typeface="Arial" charset="0"/>
+                        <a:ea typeface="Arial" charset="0"/>
+                        <a:cs typeface="Arial" charset="0"/>
+                      </a:endParaRPr>
+                    </a:p>
+                  </a:txBody>
+                  <a:tcPr marL="91440" marR="91440" marT="45720" marB="45720">
+                    <a:lnL w="6350" cap="flat" cmpd="sng" algn="ctr">
+                      <a:solidFill>
+                        <a:srgbClr val="CBD5E1"/>
+                      </a:solidFill>
+                      <a:prstDash val="solid"/>
+                      <a:round/>
+                      <a:headEnd type="none" w="med" len="med"/>
+                      <a:tailEnd type="none" w="med" len="med"/>
+                    </a:lnL>
+                    <a:lnR w="6350" cap="flat" cmpd="sng" algn="ctr">
+                      <a:solidFill>
+                        <a:srgbClr val="CBD5E1"/>
+                      </a:solidFill>
+                      <a:prstDash val="solid"/>
+                      <a:round/>
+                      <a:headEnd type="none" w="med" len="med"/>
+                      <a:tailEnd type="none" w="med" len="med"/>
+                    </a:lnR>
+                    <a:lnT w="6350" cap="flat" cmpd="sng" algn="ctr">
+                      <a:solidFill>
+                        <a:srgbClr val="CBD5E1"/>
+                      </a:solidFill>
+                      <a:prstDash val="solid"/>
+                      <a:round/>
+                      <a:headEnd type="none" w="med" len="med"/>
+                      <a:tailEnd type="none" w="med" len="med"/>
+                    </a:lnT>
+                    <a:lnB w="6350" cap="flat" cmpd="sng" algn="ctr">
+                      <a:solidFill>
+                        <a:srgbClr val="CBD5E1"/>
+                      </a:solidFill>
+                      <a:prstDash val="solid"/>
+                      <a:round/>
+                      <a:headEnd type="none" w="med" len="med"/>
+                      <a:tailEnd type="none" w="med" len="med"/>
+                    </a:lnB>
+                    <a:solidFill>
+                      <a:srgbClr val="FFFFFF"/>
+                    </a:solidFill>
+                  </a:tcPr>
+                </a:tc>
+                <a:tc>
+                  <a:txBody>
+                    <a:bodyPr/>
+                    <a:lstStyle/>
+                    <a:p>
+                      <a:pPr algn="ctr" indent="0" marL="0">
+                        <a:buNone/>
+                      </a:pPr>
+                      <a:r>
+                        <a:rPr lang="en-US" sz="900" dirty="0">
+                          <a:solidFill>
+                            <a:srgbClr val="000000"/>
+                          </a:solidFill>
+                          <a:latin typeface="Arial" pitchFamily="34" charset="0"/>
+                          <a:ea typeface="Arial" pitchFamily="34" charset="-122"/>
+                          <a:cs typeface="Arial" pitchFamily="34" charset="-120"/>
+                        </a:rPr>
+                        <a:t>7.36</a:t>
+                      </a:r>
+                      <a:endParaRPr lang="en-US" sz="900" dirty="0">
+                        <a:latin typeface="Arial" charset="0"/>
+                        <a:ea typeface="Arial" charset="0"/>
+                        <a:cs typeface="Arial" charset="0"/>
+                      </a:endParaRPr>
+                    </a:p>
+                  </a:txBody>
+                  <a:tcPr marL="91440" marR="91440" marT="45720" marB="45720">
+                    <a:lnL w="6350" cap="flat" cmpd="sng" algn="ctr">
+                      <a:solidFill>
+                        <a:srgbClr val="CBD5E1"/>
+                      </a:solidFill>
+                      <a:prstDash val="solid"/>
+                      <a:round/>
+                      <a:headEnd type="none" w="med" len="med"/>
+                      <a:tailEnd type="none" w="med" len="med"/>
+                    </a:lnL>
+                    <a:lnR w="6350" cap="flat" cmpd="sng" algn="ctr">
+                      <a:solidFill>
+                        <a:srgbClr val="CBD5E1"/>
+                      </a:solidFill>
+                      <a:prstDash val="solid"/>
+                      <a:round/>
+                      <a:headEnd type="none" w="med" len="med"/>
+                      <a:tailEnd type="none" w="med" len="med"/>
+                    </a:lnR>
+                    <a:lnT w="6350" cap="flat" cmpd="sng" algn="ctr">
+                      <a:solidFill>
+                        <a:srgbClr val="CBD5E1"/>
+                      </a:solidFill>
+                      <a:prstDash val="solid"/>
+                      <a:round/>
+                      <a:headEnd type="none" w="med" len="med"/>
+                      <a:tailEnd type="none" w="med" len="med"/>
+                    </a:lnT>
+                    <a:lnB w="6350" cap="flat" cmpd="sng" algn="ctr">
+                      <a:solidFill>
+                        <a:srgbClr val="CBD5E1"/>
+                      </a:solidFill>
+                      <a:prstDash val="solid"/>
+                      <a:round/>
+                      <a:headEnd type="none" w="med" len="med"/>
+                      <a:tailEnd type="none" w="med" len="med"/>
+                    </a:lnB>
+                    <a:solidFill>
+                      <a:srgbClr val="FFFFFF"/>
+                    </a:solidFill>
+                  </a:tcPr>
+                </a:tc>
+              </a:tr>
+              <a:tr h="201168">
+                <a:tc>
+                  <a:txBody>
+                    <a:bodyPr/>
+                    <a:lstStyle/>
+                    <a:p>
+                      <a:pPr algn="ctr" indent="0" marL="0">
+                        <a:buNone/>
+                      </a:pPr>
+                      <a:r>
+                        <a:rPr lang="en-US" sz="900" dirty="0">
+                          <a:solidFill>
+                            <a:srgbClr val="000000"/>
+                          </a:solidFill>
+                          <a:latin typeface="Arial" pitchFamily="34" charset="0"/>
+                          <a:ea typeface="Arial" pitchFamily="34" charset="-122"/>
+                          <a:cs typeface="Arial" pitchFamily="34" charset="-120"/>
+                        </a:rPr>
+                        <a:t>じゃらん</a:t>
                       </a:r>
                       <a:endParaRPr lang="en-US" sz="900" dirty="0">
                         <a:latin typeface="Arial" charset="0"/>
@@ -8340,7 +9024,7 @@
                           <a:ea typeface="Arial" pitchFamily="34" charset="-122"/>
                           <a:cs typeface="Arial" pitchFamily="34" charset="-120"/>
                         </a:rPr>
-                        <a:t>3.7</a:t>
+                        <a:t>3.55</a:t>
                       </a:r>
                       <a:endParaRPr lang="en-US" sz="900" dirty="0">
                         <a:latin typeface="Arial" charset="0"/>
@@ -8476,7 +9160,7 @@
                           <a:ea typeface="Arial" pitchFamily="34" charset="-122"/>
                           <a:cs typeface="Arial" pitchFamily="34" charset="-120"/>
                         </a:rPr>
-                        <a:t>7.4</a:t>
+                        <a:t>7.1</a:t>
                       </a:r>
                       <a:endParaRPr lang="en-US" sz="900" dirty="0">
                         <a:latin typeface="Arial" charset="0"/>
@@ -8524,348 +9208,6 @@
                     </a:lnB>
                     <a:solidFill>
                       <a:srgbClr val="E8EFF8"/>
-                    </a:solidFill>
-                  </a:tcPr>
-                </a:tc>
-              </a:tr>
-              <a:tr h="201168">
-                <a:tc>
-                  <a:txBody>
-                    <a:bodyPr/>
-                    <a:lstStyle/>
-                    <a:p>
-                      <a:pPr algn="ctr" indent="0" marL="0">
-                        <a:buNone/>
-                      </a:pPr>
-                      <a:r>
-                        <a:rPr lang="en-US" sz="900" dirty="0">
-                          <a:solidFill>
-                            <a:srgbClr val="000000"/>
-                          </a:solidFill>
-                          <a:latin typeface="Arial" pitchFamily="34" charset="0"/>
-                          <a:ea typeface="Arial" pitchFamily="34" charset="-122"/>
-                          <a:cs typeface="Arial" pitchFamily="34" charset="-120"/>
-                        </a:rPr>
-                        <a:t>楽天トラベル</a:t>
-                      </a:r>
-                      <a:endParaRPr lang="en-US" sz="900" dirty="0">
-                        <a:latin typeface="Arial" charset="0"/>
-                        <a:ea typeface="Arial" charset="0"/>
-                        <a:cs typeface="Arial" charset="0"/>
-                      </a:endParaRPr>
-                    </a:p>
-                  </a:txBody>
-                  <a:tcPr marL="91440" marR="91440" marT="45720" marB="45720">
-                    <a:lnL w="6350" cap="flat" cmpd="sng" algn="ctr">
-                      <a:solidFill>
-                        <a:srgbClr val="CBD5E1"/>
-                      </a:solidFill>
-                      <a:prstDash val="solid"/>
-                      <a:round/>
-                      <a:headEnd type="none" w="med" len="med"/>
-                      <a:tailEnd type="none" w="med" len="med"/>
-                    </a:lnL>
-                    <a:lnR w="6350" cap="flat" cmpd="sng" algn="ctr">
-                      <a:solidFill>
-                        <a:srgbClr val="CBD5E1"/>
-                      </a:solidFill>
-                      <a:prstDash val="solid"/>
-                      <a:round/>
-                      <a:headEnd type="none" w="med" len="med"/>
-                      <a:tailEnd type="none" w="med" len="med"/>
-                    </a:lnR>
-                    <a:lnT w="6350" cap="flat" cmpd="sng" algn="ctr">
-                      <a:solidFill>
-                        <a:srgbClr val="CBD5E1"/>
-                      </a:solidFill>
-                      <a:prstDash val="solid"/>
-                      <a:round/>
-                      <a:headEnd type="none" w="med" len="med"/>
-                      <a:tailEnd type="none" w="med" len="med"/>
-                    </a:lnT>
-                    <a:lnB w="6350" cap="flat" cmpd="sng" algn="ctr">
-                      <a:solidFill>
-                        <a:srgbClr val="CBD5E1"/>
-                      </a:solidFill>
-                      <a:prstDash val="solid"/>
-                      <a:round/>
-                      <a:headEnd type="none" w="med" len="med"/>
-                      <a:tailEnd type="none" w="med" len="med"/>
-                    </a:lnB>
-                    <a:solidFill>
-                      <a:srgbClr val="FFFFFF"/>
-                    </a:solidFill>
-                  </a:tcPr>
-                </a:tc>
-                <a:tc>
-                  <a:txBody>
-                    <a:bodyPr/>
-                    <a:lstStyle/>
-                    <a:p>
-                      <a:pPr algn="ctr" indent="0" marL="0">
-                        <a:buNone/>
-                      </a:pPr>
-                      <a:r>
-                        <a:rPr lang="en-US" sz="900" dirty="0">
-                          <a:solidFill>
-                            <a:srgbClr val="000000"/>
-                          </a:solidFill>
-                          <a:latin typeface="Arial" pitchFamily="34" charset="0"/>
-                          <a:ea typeface="Arial" pitchFamily="34" charset="-122"/>
-                          <a:cs typeface="Arial" pitchFamily="34" charset="-120"/>
-                        </a:rPr>
-                        <a:t>43</a:t>
-                      </a:r>
-                      <a:endParaRPr lang="en-US" sz="900" dirty="0">
-                        <a:latin typeface="Arial" charset="0"/>
-                        <a:ea typeface="Arial" charset="0"/>
-                        <a:cs typeface="Arial" charset="0"/>
-                      </a:endParaRPr>
-                    </a:p>
-                  </a:txBody>
-                  <a:tcPr marL="91440" marR="91440" marT="45720" marB="45720">
-                    <a:lnL w="6350" cap="flat" cmpd="sng" algn="ctr">
-                      <a:solidFill>
-                        <a:srgbClr val="CBD5E1"/>
-                      </a:solidFill>
-                      <a:prstDash val="solid"/>
-                      <a:round/>
-                      <a:headEnd type="none" w="med" len="med"/>
-                      <a:tailEnd type="none" w="med" len="med"/>
-                    </a:lnL>
-                    <a:lnR w="6350" cap="flat" cmpd="sng" algn="ctr">
-                      <a:solidFill>
-                        <a:srgbClr val="CBD5E1"/>
-                      </a:solidFill>
-                      <a:prstDash val="solid"/>
-                      <a:round/>
-                      <a:headEnd type="none" w="med" len="med"/>
-                      <a:tailEnd type="none" w="med" len="med"/>
-                    </a:lnR>
-                    <a:lnT w="6350" cap="flat" cmpd="sng" algn="ctr">
-                      <a:solidFill>
-                        <a:srgbClr val="CBD5E1"/>
-                      </a:solidFill>
-                      <a:prstDash val="solid"/>
-                      <a:round/>
-                      <a:headEnd type="none" w="med" len="med"/>
-                      <a:tailEnd type="none" w="med" len="med"/>
-                    </a:lnT>
-                    <a:lnB w="6350" cap="flat" cmpd="sng" algn="ctr">
-                      <a:solidFill>
-                        <a:srgbClr val="CBD5E1"/>
-                      </a:solidFill>
-                      <a:prstDash val="solid"/>
-                      <a:round/>
-                      <a:headEnd type="none" w="med" len="med"/>
-                      <a:tailEnd type="none" w="med" len="med"/>
-                    </a:lnB>
-                    <a:solidFill>
-                      <a:srgbClr val="FFFFFF"/>
-                    </a:solidFill>
-                  </a:tcPr>
-                </a:tc>
-                <a:tc>
-                  <a:txBody>
-                    <a:bodyPr/>
-                    <a:lstStyle/>
-                    <a:p>
-                      <a:pPr algn="ctr" indent="0" marL="0">
-                        <a:buNone/>
-                      </a:pPr>
-                      <a:r>
-                        <a:rPr lang="en-US" sz="900" dirty="0">
-                          <a:solidFill>
-                            <a:srgbClr val="000000"/>
-                          </a:solidFill>
-                          <a:latin typeface="Arial" pitchFamily="34" charset="0"/>
-                          <a:ea typeface="Arial" pitchFamily="34" charset="-122"/>
-                          <a:cs typeface="Arial" pitchFamily="34" charset="-120"/>
-                        </a:rPr>
-                        <a:t>3.67</a:t>
-                      </a:r>
-                      <a:endParaRPr lang="en-US" sz="900" dirty="0">
-                        <a:latin typeface="Arial" charset="0"/>
-                        <a:ea typeface="Arial" charset="0"/>
-                        <a:cs typeface="Arial" charset="0"/>
-                      </a:endParaRPr>
-                    </a:p>
-                  </a:txBody>
-                  <a:tcPr marL="91440" marR="91440" marT="45720" marB="45720">
-                    <a:lnL w="6350" cap="flat" cmpd="sng" algn="ctr">
-                      <a:solidFill>
-                        <a:srgbClr val="CBD5E1"/>
-                      </a:solidFill>
-                      <a:prstDash val="solid"/>
-                      <a:round/>
-                      <a:headEnd type="none" w="med" len="med"/>
-                      <a:tailEnd type="none" w="med" len="med"/>
-                    </a:lnL>
-                    <a:lnR w="6350" cap="flat" cmpd="sng" algn="ctr">
-                      <a:solidFill>
-                        <a:srgbClr val="CBD5E1"/>
-                      </a:solidFill>
-                      <a:prstDash val="solid"/>
-                      <a:round/>
-                      <a:headEnd type="none" w="med" len="med"/>
-                      <a:tailEnd type="none" w="med" len="med"/>
-                    </a:lnR>
-                    <a:lnT w="6350" cap="flat" cmpd="sng" algn="ctr">
-                      <a:solidFill>
-                        <a:srgbClr val="CBD5E1"/>
-                      </a:solidFill>
-                      <a:prstDash val="solid"/>
-                      <a:round/>
-                      <a:headEnd type="none" w="med" len="med"/>
-                      <a:tailEnd type="none" w="med" len="med"/>
-                    </a:lnT>
-                    <a:lnB w="6350" cap="flat" cmpd="sng" algn="ctr">
-                      <a:solidFill>
-                        <a:srgbClr val="CBD5E1"/>
-                      </a:solidFill>
-                      <a:prstDash val="solid"/>
-                      <a:round/>
-                      <a:headEnd type="none" w="med" len="med"/>
-                      <a:tailEnd type="none" w="med" len="med"/>
-                    </a:lnB>
-                    <a:solidFill>
-                      <a:srgbClr val="FFFFFF"/>
-                    </a:solidFill>
-                  </a:tcPr>
-                </a:tc>
-                <a:tc>
-                  <a:txBody>
-                    <a:bodyPr/>
-                    <a:lstStyle/>
-                    <a:p>
-                      <a:pPr algn="ctr" indent="0" marL="0">
-                        <a:buNone/>
-                      </a:pPr>
-                      <a:r>
-                        <a:rPr lang="en-US" sz="900" dirty="0">
-                          <a:solidFill>
-                            <a:srgbClr val="000000"/>
-                          </a:solidFill>
-                          <a:latin typeface="Arial" pitchFamily="34" charset="0"/>
-                          <a:ea typeface="Arial" pitchFamily="34" charset="-122"/>
-                          <a:cs typeface="Arial" pitchFamily="34" charset="-120"/>
-                        </a:rPr>
-                        <a:t>/5 (×2)</a:t>
-                      </a:r>
-                      <a:endParaRPr lang="en-US" sz="900" dirty="0">
-                        <a:latin typeface="Arial" charset="0"/>
-                        <a:ea typeface="Arial" charset="0"/>
-                        <a:cs typeface="Arial" charset="0"/>
-                      </a:endParaRPr>
-                    </a:p>
-                  </a:txBody>
-                  <a:tcPr marL="91440" marR="91440" marT="45720" marB="45720">
-                    <a:lnL w="6350" cap="flat" cmpd="sng" algn="ctr">
-                      <a:solidFill>
-                        <a:srgbClr val="CBD5E1"/>
-                      </a:solidFill>
-                      <a:prstDash val="solid"/>
-                      <a:round/>
-                      <a:headEnd type="none" w="med" len="med"/>
-                      <a:tailEnd type="none" w="med" len="med"/>
-                    </a:lnL>
-                    <a:lnR w="6350" cap="flat" cmpd="sng" algn="ctr">
-                      <a:solidFill>
-                        <a:srgbClr val="CBD5E1"/>
-                      </a:solidFill>
-                      <a:prstDash val="solid"/>
-                      <a:round/>
-                      <a:headEnd type="none" w="med" len="med"/>
-                      <a:tailEnd type="none" w="med" len="med"/>
-                    </a:lnR>
-                    <a:lnT w="6350" cap="flat" cmpd="sng" algn="ctr">
-                      <a:solidFill>
-                        <a:srgbClr val="CBD5E1"/>
-                      </a:solidFill>
-                      <a:prstDash val="solid"/>
-                      <a:round/>
-                      <a:headEnd type="none" w="med" len="med"/>
-                      <a:tailEnd type="none" w="med" len="med"/>
-                    </a:lnT>
-                    <a:lnB w="6350" cap="flat" cmpd="sng" algn="ctr">
-                      <a:solidFill>
-                        <a:srgbClr val="CBD5E1"/>
-                      </a:solidFill>
-                      <a:prstDash val="solid"/>
-                      <a:round/>
-                      <a:headEnd type="none" w="med" len="med"/>
-                      <a:tailEnd type="none" w="med" len="med"/>
-                    </a:lnB>
-                    <a:solidFill>
-                      <a:srgbClr val="FFFFFF"/>
-                    </a:solidFill>
-                  </a:tcPr>
-                </a:tc>
-                <a:tc>
-                  <a:txBody>
-                    <a:bodyPr/>
-                    <a:lstStyle/>
-                    <a:p>
-                      <a:pPr algn="ctr" indent="0" marL="0">
-                        <a:buNone/>
-                      </a:pPr>
-                      <a:r>
-                        <a:rPr lang="en-US" sz="900" dirty="0">
-                          <a:solidFill>
-                            <a:srgbClr val="000000"/>
-                          </a:solidFill>
-                          <a:latin typeface="Arial" pitchFamily="34" charset="0"/>
-                          <a:ea typeface="Arial" pitchFamily="34" charset="-122"/>
-                          <a:cs typeface="Arial" pitchFamily="34" charset="-120"/>
-                        </a:rPr>
-                        <a:t>7.35</a:t>
-                      </a:r>
-                      <a:endParaRPr lang="en-US" sz="900" dirty="0">
-                        <a:latin typeface="Arial" charset="0"/>
-                        <a:ea typeface="Arial" charset="0"/>
-                        <a:cs typeface="Arial" charset="0"/>
-                      </a:endParaRPr>
-                    </a:p>
-                  </a:txBody>
-                  <a:tcPr marL="91440" marR="91440" marT="45720" marB="45720">
-                    <a:lnL w="6350" cap="flat" cmpd="sng" algn="ctr">
-                      <a:solidFill>
-                        <a:srgbClr val="CBD5E1"/>
-                      </a:solidFill>
-                      <a:prstDash val="solid"/>
-                      <a:round/>
-                      <a:headEnd type="none" w="med" len="med"/>
-                      <a:tailEnd type="none" w="med" len="med"/>
-                    </a:lnL>
-                    <a:lnR w="6350" cap="flat" cmpd="sng" algn="ctr">
-                      <a:solidFill>
-                        <a:srgbClr val="CBD5E1"/>
-                      </a:solidFill>
-                      <a:prstDash val="solid"/>
-                      <a:round/>
-                      <a:headEnd type="none" w="med" len="med"/>
-                      <a:tailEnd type="none" w="med" len="med"/>
-                    </a:lnR>
-                    <a:lnT w="6350" cap="flat" cmpd="sng" algn="ctr">
-                      <a:solidFill>
-                        <a:srgbClr val="CBD5E1"/>
-                      </a:solidFill>
-                      <a:prstDash val="solid"/>
-                      <a:round/>
-                      <a:headEnd type="none" w="med" len="med"/>
-                      <a:tailEnd type="none" w="med" len="med"/>
-                    </a:lnT>
-                    <a:lnB w="6350" cap="flat" cmpd="sng" algn="ctr">
-                      <a:solidFill>
-                        <a:srgbClr val="CBD5E1"/>
-                      </a:solidFill>
-                      <a:prstDash val="solid"/>
-                      <a:round/>
-                      <a:headEnd type="none" w="med" len="med"/>
-                      <a:tailEnd type="none" w="med" len="med"/>
-                    </a:lnB>
-                    <a:solidFill>
-                      <a:srgbClr val="FFFFFF"/>
                     </a:solidFill>
                   </a:tcPr>
                 </a:tc>
@@ -8935,7 +9277,7 @@
                       <a:tailEnd type="none" w="med" len="med"/>
                     </a:lnB>
                     <a:solidFill>
-                      <a:srgbClr val="E8EFF8"/>
+                      <a:srgbClr val="FFFFFF"/>
                     </a:solidFill>
                   </a:tcPr>
                 </a:tc>
@@ -9003,7 +9345,7 @@
                       <a:tailEnd type="none" w="med" len="med"/>
                     </a:lnB>
                     <a:solidFill>
-                      <a:srgbClr val="E8EFF8"/>
+                      <a:srgbClr val="FFFFFF"/>
                     </a:solidFill>
                   </a:tcPr>
                 </a:tc>
@@ -9024,7 +9366,7 @@
                           <a:ea typeface="Arial" pitchFamily="34" charset="-122"/>
                           <a:cs typeface="Arial" pitchFamily="34" charset="-120"/>
                         </a:rPr>
-                        <a:t>7.07</a:t>
+                        <a:t>6.96</a:t>
                       </a:r>
                       <a:endParaRPr lang="en-US" sz="900" dirty="0">
                         <a:latin typeface="Arial" charset="0"/>
@@ -9071,7 +9413,7 @@
                       <a:tailEnd type="none" w="med" len="med"/>
                     </a:lnB>
                     <a:solidFill>
-                      <a:srgbClr val="E8EFF8"/>
+                      <a:srgbClr val="FFFFFF"/>
                     </a:solidFill>
                   </a:tcPr>
                 </a:tc>
@@ -9139,144 +9481,6 @@
                       <a:tailEnd type="none" w="med" len="med"/>
                     </a:lnB>
                     <a:solidFill>
-                      <a:srgbClr val="E8EFF8"/>
-                    </a:solidFill>
-                  </a:tcPr>
-                </a:tc>
-                <a:tc>
-                  <a:txBody>
-                    <a:bodyPr/>
-                    <a:lstStyle/>
-                    <a:p>
-                      <a:pPr algn="ctr" indent="0" marL="0">
-                        <a:buNone/>
-                      </a:pPr>
-                      <a:r>
-                        <a:rPr lang="en-US" sz="900" dirty="0">
-                          <a:solidFill>
-                            <a:srgbClr val="000000"/>
-                          </a:solidFill>
-                          <a:latin typeface="Arial" pitchFamily="34" charset="0"/>
-                          <a:ea typeface="Arial" pitchFamily="34" charset="-122"/>
-                          <a:cs typeface="Arial" pitchFamily="34" charset="-120"/>
-                        </a:rPr>
-                        <a:t>7.07</a:t>
-                      </a:r>
-                      <a:endParaRPr lang="en-US" sz="900" dirty="0">
-                        <a:latin typeface="Arial" charset="0"/>
-                        <a:ea typeface="Arial" charset="0"/>
-                        <a:cs typeface="Arial" charset="0"/>
-                      </a:endParaRPr>
-                    </a:p>
-                  </a:txBody>
-                  <a:tcPr marL="91440" marR="91440" marT="45720" marB="45720">
-                    <a:lnL w="6350" cap="flat" cmpd="sng" algn="ctr">
-                      <a:solidFill>
-                        <a:srgbClr val="CBD5E1"/>
-                      </a:solidFill>
-                      <a:prstDash val="solid"/>
-                      <a:round/>
-                      <a:headEnd type="none" w="med" len="med"/>
-                      <a:tailEnd type="none" w="med" len="med"/>
-                    </a:lnL>
-                    <a:lnR w="6350" cap="flat" cmpd="sng" algn="ctr">
-                      <a:solidFill>
-                        <a:srgbClr val="CBD5E1"/>
-                      </a:solidFill>
-                      <a:prstDash val="solid"/>
-                      <a:round/>
-                      <a:headEnd type="none" w="med" len="med"/>
-                      <a:tailEnd type="none" w="med" len="med"/>
-                    </a:lnR>
-                    <a:lnT w="6350" cap="flat" cmpd="sng" algn="ctr">
-                      <a:solidFill>
-                        <a:srgbClr val="CBD5E1"/>
-                      </a:solidFill>
-                      <a:prstDash val="solid"/>
-                      <a:round/>
-                      <a:headEnd type="none" w="med" len="med"/>
-                      <a:tailEnd type="none" w="med" len="med"/>
-                    </a:lnT>
-                    <a:lnB w="6350" cap="flat" cmpd="sng" algn="ctr">
-                      <a:solidFill>
-                        <a:srgbClr val="CBD5E1"/>
-                      </a:solidFill>
-                      <a:prstDash val="solid"/>
-                      <a:round/>
-                      <a:headEnd type="none" w="med" len="med"/>
-                      <a:tailEnd type="none" w="med" len="med"/>
-                    </a:lnB>
-                    <a:solidFill>
-                      <a:srgbClr val="E8EFF8"/>
-                    </a:solidFill>
-                  </a:tcPr>
-                </a:tc>
-              </a:tr>
-              <a:tr h="201168">
-                <a:tc>
-                  <a:txBody>
-                    <a:bodyPr/>
-                    <a:lstStyle/>
-                    <a:p>
-                      <a:pPr algn="ctr" indent="0" marL="0">
-                        <a:buNone/>
-                      </a:pPr>
-                      <a:r>
-                        <a:rPr lang="en-US" sz="900" dirty="0">
-                          <a:solidFill>
-                            <a:srgbClr val="000000"/>
-                          </a:solidFill>
-                          <a:latin typeface="Arial" pitchFamily="34" charset="0"/>
-                          <a:ea typeface="Arial" pitchFamily="34" charset="-122"/>
-                          <a:cs typeface="Arial" pitchFamily="34" charset="-120"/>
-                        </a:rPr>
-                        <a:t>じゃらん</a:t>
-                      </a:r>
-                      <a:endParaRPr lang="en-US" sz="900" dirty="0">
-                        <a:latin typeface="Arial" charset="0"/>
-                        <a:ea typeface="Arial" charset="0"/>
-                        <a:cs typeface="Arial" charset="0"/>
-                      </a:endParaRPr>
-                    </a:p>
-                  </a:txBody>
-                  <a:tcPr marL="91440" marR="91440" marT="45720" marB="45720">
-                    <a:lnL w="6350" cap="flat" cmpd="sng" algn="ctr">
-                      <a:solidFill>
-                        <a:srgbClr val="CBD5E1"/>
-                      </a:solidFill>
-                      <a:prstDash val="solid"/>
-                      <a:round/>
-                      <a:headEnd type="none" w="med" len="med"/>
-                      <a:tailEnd type="none" w="med" len="med"/>
-                    </a:lnL>
-                    <a:lnR w="6350" cap="flat" cmpd="sng" algn="ctr">
-                      <a:solidFill>
-                        <a:srgbClr val="CBD5E1"/>
-                      </a:solidFill>
-                      <a:prstDash val="solid"/>
-                      <a:round/>
-                      <a:headEnd type="none" w="med" len="med"/>
-                      <a:tailEnd type="none" w="med" len="med"/>
-                    </a:lnR>
-                    <a:lnT w="6350" cap="flat" cmpd="sng" algn="ctr">
-                      <a:solidFill>
-                        <a:srgbClr val="CBD5E1"/>
-                      </a:solidFill>
-                      <a:prstDash val="solid"/>
-                      <a:round/>
-                      <a:headEnd type="none" w="med" len="med"/>
-                      <a:tailEnd type="none" w="med" len="med"/>
-                    </a:lnT>
-                    <a:lnB w="6350" cap="flat" cmpd="sng" algn="ctr">
-                      <a:solidFill>
-                        <a:srgbClr val="CBD5E1"/>
-                      </a:solidFill>
-                      <a:prstDash val="solid"/>
-                      <a:round/>
-                      <a:headEnd type="none" w="med" len="med"/>
-                      <a:tailEnd type="none" w="med" len="med"/>
-                    </a:lnB>
-                    <a:solidFill>
                       <a:srgbClr val="FFFFFF"/>
                     </a:solidFill>
                   </a:tcPr>
@@ -9298,211 +9502,7 @@
                           <a:ea typeface="Arial" pitchFamily="34" charset="-122"/>
                           <a:cs typeface="Arial" pitchFamily="34" charset="-120"/>
                         </a:rPr>
-                        <a:t>19</a:t>
-                      </a:r>
-                      <a:endParaRPr lang="en-US" sz="900" dirty="0">
-                        <a:latin typeface="Arial" charset="0"/>
-                        <a:ea typeface="Arial" charset="0"/>
-                        <a:cs typeface="Arial" charset="0"/>
-                      </a:endParaRPr>
-                    </a:p>
-                  </a:txBody>
-                  <a:tcPr marL="91440" marR="91440" marT="45720" marB="45720">
-                    <a:lnL w="6350" cap="flat" cmpd="sng" algn="ctr">
-                      <a:solidFill>
-                        <a:srgbClr val="CBD5E1"/>
-                      </a:solidFill>
-                      <a:prstDash val="solid"/>
-                      <a:round/>
-                      <a:headEnd type="none" w="med" len="med"/>
-                      <a:tailEnd type="none" w="med" len="med"/>
-                    </a:lnL>
-                    <a:lnR w="6350" cap="flat" cmpd="sng" algn="ctr">
-                      <a:solidFill>
-                        <a:srgbClr val="CBD5E1"/>
-                      </a:solidFill>
-                      <a:prstDash val="solid"/>
-                      <a:round/>
-                      <a:headEnd type="none" w="med" len="med"/>
-                      <a:tailEnd type="none" w="med" len="med"/>
-                    </a:lnR>
-                    <a:lnT w="6350" cap="flat" cmpd="sng" algn="ctr">
-                      <a:solidFill>
-                        <a:srgbClr val="CBD5E1"/>
-                      </a:solidFill>
-                      <a:prstDash val="solid"/>
-                      <a:round/>
-                      <a:headEnd type="none" w="med" len="med"/>
-                      <a:tailEnd type="none" w="med" len="med"/>
-                    </a:lnT>
-                    <a:lnB w="6350" cap="flat" cmpd="sng" algn="ctr">
-                      <a:solidFill>
-                        <a:srgbClr val="CBD5E1"/>
-                      </a:solidFill>
-                      <a:prstDash val="solid"/>
-                      <a:round/>
-                      <a:headEnd type="none" w="med" len="med"/>
-                      <a:tailEnd type="none" w="med" len="med"/>
-                    </a:lnB>
-                    <a:solidFill>
-                      <a:srgbClr val="FFFFFF"/>
-                    </a:solidFill>
-                  </a:tcPr>
-                </a:tc>
-                <a:tc>
-                  <a:txBody>
-                    <a:bodyPr/>
-                    <a:lstStyle/>
-                    <a:p>
-                      <a:pPr algn="ctr" indent="0" marL="0">
-                        <a:buNone/>
-                      </a:pPr>
-                      <a:r>
-                        <a:rPr lang="en-US" sz="900" dirty="0">
-                          <a:solidFill>
-                            <a:srgbClr val="000000"/>
-                          </a:solidFill>
-                          <a:latin typeface="Arial" pitchFamily="34" charset="0"/>
-                          <a:ea typeface="Arial" pitchFamily="34" charset="-122"/>
-                          <a:cs typeface="Arial" pitchFamily="34" charset="-120"/>
-                        </a:rPr>
-                        <a:t>3.53</a:t>
-                      </a:r>
-                      <a:endParaRPr lang="en-US" sz="900" dirty="0">
-                        <a:latin typeface="Arial" charset="0"/>
-                        <a:ea typeface="Arial" charset="0"/>
-                        <a:cs typeface="Arial" charset="0"/>
-                      </a:endParaRPr>
-                    </a:p>
-                  </a:txBody>
-                  <a:tcPr marL="91440" marR="91440" marT="45720" marB="45720">
-                    <a:lnL w="6350" cap="flat" cmpd="sng" algn="ctr">
-                      <a:solidFill>
-                        <a:srgbClr val="CBD5E1"/>
-                      </a:solidFill>
-                      <a:prstDash val="solid"/>
-                      <a:round/>
-                      <a:headEnd type="none" w="med" len="med"/>
-                      <a:tailEnd type="none" w="med" len="med"/>
-                    </a:lnL>
-                    <a:lnR w="6350" cap="flat" cmpd="sng" algn="ctr">
-                      <a:solidFill>
-                        <a:srgbClr val="CBD5E1"/>
-                      </a:solidFill>
-                      <a:prstDash val="solid"/>
-                      <a:round/>
-                      <a:headEnd type="none" w="med" len="med"/>
-                      <a:tailEnd type="none" w="med" len="med"/>
-                    </a:lnR>
-                    <a:lnT w="6350" cap="flat" cmpd="sng" algn="ctr">
-                      <a:solidFill>
-                        <a:srgbClr val="CBD5E1"/>
-                      </a:solidFill>
-                      <a:prstDash val="solid"/>
-                      <a:round/>
-                      <a:headEnd type="none" w="med" len="med"/>
-                      <a:tailEnd type="none" w="med" len="med"/>
-                    </a:lnT>
-                    <a:lnB w="6350" cap="flat" cmpd="sng" algn="ctr">
-                      <a:solidFill>
-                        <a:srgbClr val="CBD5E1"/>
-                      </a:solidFill>
-                      <a:prstDash val="solid"/>
-                      <a:round/>
-                      <a:headEnd type="none" w="med" len="med"/>
-                      <a:tailEnd type="none" w="med" len="med"/>
-                    </a:lnB>
-                    <a:solidFill>
-                      <a:srgbClr val="FFFFFF"/>
-                    </a:solidFill>
-                  </a:tcPr>
-                </a:tc>
-                <a:tc>
-                  <a:txBody>
-                    <a:bodyPr/>
-                    <a:lstStyle/>
-                    <a:p>
-                      <a:pPr algn="ctr" indent="0" marL="0">
-                        <a:buNone/>
-                      </a:pPr>
-                      <a:r>
-                        <a:rPr lang="en-US" sz="900" dirty="0">
-                          <a:solidFill>
-                            <a:srgbClr val="000000"/>
-                          </a:solidFill>
-                          <a:latin typeface="Arial" pitchFamily="34" charset="0"/>
-                          <a:ea typeface="Arial" pitchFamily="34" charset="-122"/>
-                          <a:cs typeface="Arial" pitchFamily="34" charset="-120"/>
-                        </a:rPr>
-                        <a:t>/5 (×2)</a:t>
-                      </a:r>
-                      <a:endParaRPr lang="en-US" sz="900" dirty="0">
-                        <a:latin typeface="Arial" charset="0"/>
-                        <a:ea typeface="Arial" charset="0"/>
-                        <a:cs typeface="Arial" charset="0"/>
-                      </a:endParaRPr>
-                    </a:p>
-                  </a:txBody>
-                  <a:tcPr marL="91440" marR="91440" marT="45720" marB="45720">
-                    <a:lnL w="6350" cap="flat" cmpd="sng" algn="ctr">
-                      <a:solidFill>
-                        <a:srgbClr val="CBD5E1"/>
-                      </a:solidFill>
-                      <a:prstDash val="solid"/>
-                      <a:round/>
-                      <a:headEnd type="none" w="med" len="med"/>
-                      <a:tailEnd type="none" w="med" len="med"/>
-                    </a:lnL>
-                    <a:lnR w="6350" cap="flat" cmpd="sng" algn="ctr">
-                      <a:solidFill>
-                        <a:srgbClr val="CBD5E1"/>
-                      </a:solidFill>
-                      <a:prstDash val="solid"/>
-                      <a:round/>
-                      <a:headEnd type="none" w="med" len="med"/>
-                      <a:tailEnd type="none" w="med" len="med"/>
-                    </a:lnR>
-                    <a:lnT w="6350" cap="flat" cmpd="sng" algn="ctr">
-                      <a:solidFill>
-                        <a:srgbClr val="CBD5E1"/>
-                      </a:solidFill>
-                      <a:prstDash val="solid"/>
-                      <a:round/>
-                      <a:headEnd type="none" w="med" len="med"/>
-                      <a:tailEnd type="none" w="med" len="med"/>
-                    </a:lnT>
-                    <a:lnB w="6350" cap="flat" cmpd="sng" algn="ctr">
-                      <a:solidFill>
-                        <a:srgbClr val="CBD5E1"/>
-                      </a:solidFill>
-                      <a:prstDash val="solid"/>
-                      <a:round/>
-                      <a:headEnd type="none" w="med" len="med"/>
-                      <a:tailEnd type="none" w="med" len="med"/>
-                    </a:lnB>
-                    <a:solidFill>
-                      <a:srgbClr val="FFFFFF"/>
-                    </a:solidFill>
-                  </a:tcPr>
-                </a:tc>
-                <a:tc>
-                  <a:txBody>
-                    <a:bodyPr/>
-                    <a:lstStyle/>
-                    <a:p>
-                      <a:pPr algn="ctr" indent="0" marL="0">
-                        <a:buNone/>
-                      </a:pPr>
-                      <a:r>
-                        <a:rPr lang="en-US" sz="900" dirty="0">
-                          <a:solidFill>
-                            <a:srgbClr val="000000"/>
-                          </a:solidFill>
-                          <a:latin typeface="Arial" pitchFamily="34" charset="0"/>
-                          <a:ea typeface="Arial" pitchFamily="34" charset="-122"/>
-                          <a:cs typeface="Arial" pitchFamily="34" charset="-120"/>
-                        </a:rPr>
-                        <a:t>7.05</a:t>
+                        <a:t>6.96</a:t>
                       </a:r>
                       <a:endParaRPr lang="en-US" sz="900" dirty="0">
                         <a:latin typeface="Arial" charset="0"/>
@@ -10008,7 +10008,7 @@
                 <a:ea typeface="Arial" pitchFamily="34" charset="-122"/>
                 <a:cs typeface="Arial" pitchFamily="34" charset="-120"/>
               </a:rPr>
-              <a:t>28件（19.6%）</a:t>
+              <a:t>29件（20.3%）</a:t>
             </a:r>
             <a:endParaRPr lang="en-US" sz="1100" dirty="0"/>
           </a:p>
@@ -10106,7 +10106,7 @@
                 <a:ea typeface="Arial" pitchFamily="34" charset="-122"/>
                 <a:cs typeface="Arial" pitchFamily="34" charset="-120"/>
               </a:rPr>
-              <a:t>20件（14.0%）</a:t>
+              <a:t>19件（13.3%）</a:t>
             </a:r>
             <a:endParaRPr lang="en-US" sz="1100" dirty="0"/>
           </a:p>
@@ -10518,7 +10518,7 @@
                 <a:ea typeface="Arial" pitchFamily="34" charset="-122"/>
                 <a:cs typeface="Arial" pitchFamily="34" charset="-120"/>
               </a:rPr>
-              <a:t>朝食が程よい味付けです</a:t>
+              <a:t>エアコンが古い、カードキータイプだが部屋にはカード入れがなく忘れそう、風呂の体を洗うタオルなし、朝食は団体客がいる...</a:t>
             </a:r>
             <a:endParaRPr lang="en-US" sz="900" dirty="0"/>
           </a:p>
@@ -10533,6 +10533,452 @@
         <p:spPr>
           <a:xfrm>
             <a:off x="594360" y="1828800"/>
+            <a:ext cx="2377440" cy="640080"/>
+          </a:xfrm>
+          <a:prstGeom prst="rect">
+            <a:avLst/>
+          </a:prstGeom>
+          <a:noFill/>
+          <a:ln/>
+        </p:spPr>
+        <p:txBody>
+          <a:bodyPr wrap="square" lIns="0" tIns="0" rIns="0" bIns="0" rtlCol="0" anchor="ctr"/>
+          <a:lstStyle/>
+          <a:p>
+            <a:pPr indent="0" marL="0">
+              <a:buNone/>
+            </a:pPr>
+            <a:r>
+              <a:rPr lang="en-US" sz="900" i="1" dirty="0">
+                <a:solidFill>
+                  <a:srgbClr val="3B7DD8"/>
+                </a:solidFill>
+                <a:latin typeface="Arial" pitchFamily="34" charset="0"/>
+                <a:ea typeface="Arial" pitchFamily="34" charset="-122"/>
+                <a:cs typeface="Arial" pitchFamily="34" charset="-120"/>
+              </a:rPr>
+              <a:t>「部屋は清潔で、朝食も期待以上」</a:t>
+            </a:r>
+            <a:endParaRPr lang="en-US" sz="900" dirty="0"/>
+          </a:p>
+        </p:txBody>
+      </p:sp>
+      <p:sp>
+        <p:nvSpPr>
+          <p:cNvPr id="12" name="Shape 10"/>
+          <p:cNvSpPr/>
+          <p:nvPr/>
+        </p:nvSpPr>
+        <p:spPr>
+          <a:xfrm>
+            <a:off x="3291840" y="1051560"/>
+            <a:ext cx="2651760" cy="1600200"/>
+          </a:xfrm>
+          <a:prstGeom prst="rect">
+            <a:avLst/>
+          </a:prstGeom>
+          <a:solidFill>
+            <a:srgbClr val="FFFFFF"/>
+          </a:solidFill>
+          <a:ln/>
+          <a:effectLst>
+            <a:outerShdw sx="100000" sy="100000" kx="0" ky="0" algn="bl" rotWithShape="0" blurRad="50800" dist="25400" dir="8100000">
+              <a:srgbClr val="000000">
+                <a:alpha val="10000"/>
+              </a:srgbClr>
+            </a:outerShdw>
+          </a:effectLst>
+        </p:spPr>
+      </p:sp>
+      <p:sp>
+        <p:nvSpPr>
+          <p:cNvPr id="13" name="Shape 11"/>
+          <p:cNvSpPr/>
+          <p:nvPr/>
+        </p:nvSpPr>
+        <p:spPr>
+          <a:xfrm>
+            <a:off x="3291840" y="1051560"/>
+            <a:ext cx="54864" cy="1600200"/>
+          </a:xfrm>
+          <a:prstGeom prst="rect">
+            <a:avLst/>
+          </a:prstGeom>
+          <a:solidFill>
+            <a:srgbClr val="16A34A"/>
+          </a:solidFill>
+          <a:ln/>
+        </p:spPr>
+      </p:sp>
+      <p:sp>
+        <p:nvSpPr>
+          <p:cNvPr id="14" name="Shape 12"/>
+          <p:cNvSpPr/>
+          <p:nvPr/>
+        </p:nvSpPr>
+        <p:spPr>
+          <a:xfrm>
+            <a:off x="5120640" y="1124712"/>
+            <a:ext cx="658368" cy="228600"/>
+          </a:xfrm>
+          <a:prstGeom prst="rect">
+            <a:avLst/>
+          </a:prstGeom>
+          <a:solidFill>
+            <a:srgbClr val="DCFCE7"/>
+          </a:solidFill>
+          <a:ln/>
+        </p:spPr>
+      </p:sp>
+      <p:sp>
+        <p:nvSpPr>
+          <p:cNvPr id="15" name="Text 13"/>
+          <p:cNvSpPr/>
+          <p:nvPr/>
+        </p:nvSpPr>
+        <p:spPr>
+          <a:xfrm>
+            <a:off x="5120640" y="1124712"/>
+            <a:ext cx="658368" cy="228600"/>
+          </a:xfrm>
+          <a:prstGeom prst="rect">
+            <a:avLst/>
+          </a:prstGeom>
+          <a:noFill/>
+          <a:ln/>
+        </p:spPr>
+        <p:txBody>
+          <a:bodyPr wrap="square" lIns="0" tIns="0" rIns="0" bIns="0" rtlCol="0" anchor="ctr"/>
+          <a:lstStyle/>
+          <a:p>
+            <a:pPr algn="ctr" indent="0" marL="0">
+              <a:buNone/>
+            </a:pPr>
+            <a:r>
+              <a:rPr lang="en-US" sz="900" b="1" dirty="0">
+                <a:solidFill>
+                  <a:srgbClr val="16A34A"/>
+                </a:solidFill>
+                <a:latin typeface="Arial" pitchFamily="34" charset="0"/>
+                <a:ea typeface="Arial" pitchFamily="34" charset="-122"/>
+                <a:cs typeface="Arial" pitchFamily="34" charset="-120"/>
+              </a:rPr>
+              <a:t>20件+</a:t>
+            </a:r>
+            <a:endParaRPr lang="en-US" sz="900" dirty="0"/>
+          </a:p>
+        </p:txBody>
+      </p:sp>
+      <p:sp>
+        <p:nvSpPr>
+          <p:cNvPr id="16" name="Text 14"/>
+          <p:cNvSpPr/>
+          <p:nvPr/>
+        </p:nvSpPr>
+        <p:spPr>
+          <a:xfrm>
+            <a:off x="3429000" y="1124712"/>
+            <a:ext cx="1645920" cy="274320"/>
+          </a:xfrm>
+          <a:prstGeom prst="rect">
+            <a:avLst/>
+          </a:prstGeom>
+          <a:noFill/>
+          <a:ln/>
+        </p:spPr>
+        <p:txBody>
+          <a:bodyPr wrap="square" lIns="0" tIns="0" rIns="0" bIns="0" rtlCol="0" anchor="ctr"/>
+          <a:lstStyle/>
+          <a:p>
+            <a:pPr indent="0" marL="0">
+              <a:buNone/>
+            </a:pPr>
+            <a:r>
+              <a:rPr lang="en-US" sz="1300" b="1" dirty="0">
+                <a:solidFill>
+                  <a:srgbClr val="1A2744"/>
+                </a:solidFill>
+                <a:latin typeface="Arial" pitchFamily="34" charset="0"/>
+                <a:ea typeface="Arial" pitchFamily="34" charset="-122"/>
+                <a:cs typeface="Arial" pitchFamily="34" charset="-120"/>
+              </a:rPr>
+              <a:t>立地・アクセス</a:t>
+            </a:r>
+            <a:endParaRPr lang="en-US" sz="1300" dirty="0"/>
+          </a:p>
+        </p:txBody>
+      </p:sp>
+      <p:sp>
+        <p:nvSpPr>
+          <p:cNvPr id="17" name="Text 15"/>
+          <p:cNvSpPr/>
+          <p:nvPr/>
+        </p:nvSpPr>
+        <p:spPr>
+          <a:xfrm>
+            <a:off x="3429000" y="1417320"/>
+            <a:ext cx="2377440" cy="365760"/>
+          </a:xfrm>
+          <a:prstGeom prst="rect">
+            <a:avLst/>
+          </a:prstGeom>
+          <a:noFill/>
+          <a:ln/>
+        </p:spPr>
+        <p:txBody>
+          <a:bodyPr wrap="square" lIns="0" tIns="0" rIns="0" bIns="0" rtlCol="0" anchor="ctr"/>
+          <a:lstStyle/>
+          <a:p>
+            <a:pPr indent="0" marL="0">
+              <a:buNone/>
+            </a:pPr>
+            <a:r>
+              <a:rPr lang="en-US" sz="900" dirty="0">
+                <a:solidFill>
+                  <a:srgbClr val="64748B"/>
+                </a:solidFill>
+                <a:latin typeface="Arial" pitchFamily="34" charset="0"/>
+                <a:ea typeface="Arial" pitchFamily="34" charset="-122"/>
+                <a:cs typeface="Arial" pitchFamily="34" charset="-120"/>
+              </a:rPr>
+              <a:t>横浜スタジアムや中華街も徒歩圏内で、周りにはスーパーやコンビニ、飲食店も沢山あって便利^_^ 駐車場も隣接してあり</a:t>
+            </a:r>
+            <a:endParaRPr lang="en-US" sz="900" dirty="0"/>
+          </a:p>
+        </p:txBody>
+      </p:sp>
+      <p:sp>
+        <p:nvSpPr>
+          <p:cNvPr id="18" name="Text 16"/>
+          <p:cNvSpPr/>
+          <p:nvPr/>
+        </p:nvSpPr>
+        <p:spPr>
+          <a:xfrm>
+            <a:off x="3429000" y="1828800"/>
+            <a:ext cx="2377440" cy="640080"/>
+          </a:xfrm>
+          <a:prstGeom prst="rect">
+            <a:avLst/>
+          </a:prstGeom>
+          <a:noFill/>
+          <a:ln/>
+        </p:spPr>
+        <p:txBody>
+          <a:bodyPr wrap="square" lIns="0" tIns="0" rIns="0" bIns="0" rtlCol="0" anchor="ctr"/>
+          <a:lstStyle/>
+          <a:p>
+            <a:pPr indent="0" marL="0">
+              <a:buNone/>
+            </a:pPr>
+            <a:r>
+              <a:rPr lang="en-US" sz="900" i="1" dirty="0">
+                <a:solidFill>
+                  <a:srgbClr val="3B7DD8"/>
+                </a:solidFill>
+                <a:latin typeface="Arial" pitchFamily="34" charset="0"/>
+                <a:ea typeface="Arial" pitchFamily="34" charset="-122"/>
+                <a:cs typeface="Arial" pitchFamily="34" charset="-120"/>
+              </a:rPr>
+              <a:t>「駅からも近いし、横浜観光のアクセスにはもってこいの場所だと思います」</a:t>
+            </a:r>
+            <a:endParaRPr lang="en-US" sz="900" dirty="0"/>
+          </a:p>
+        </p:txBody>
+      </p:sp>
+      <p:sp>
+        <p:nvSpPr>
+          <p:cNvPr id="19" name="Shape 17"/>
+          <p:cNvSpPr/>
+          <p:nvPr/>
+        </p:nvSpPr>
+        <p:spPr>
+          <a:xfrm>
+            <a:off x="6126480" y="1051560"/>
+            <a:ext cx="2651760" cy="1600200"/>
+          </a:xfrm>
+          <a:prstGeom prst="rect">
+            <a:avLst/>
+          </a:prstGeom>
+          <a:solidFill>
+            <a:srgbClr val="FFFFFF"/>
+          </a:solidFill>
+          <a:ln/>
+          <a:effectLst>
+            <a:outerShdw sx="100000" sy="100000" kx="0" ky="0" algn="bl" rotWithShape="0" blurRad="50800" dist="25400" dir="8100000">
+              <a:srgbClr val="000000">
+                <a:alpha val="10000"/>
+              </a:srgbClr>
+            </a:outerShdw>
+          </a:effectLst>
+        </p:spPr>
+      </p:sp>
+      <p:sp>
+        <p:nvSpPr>
+          <p:cNvPr id="20" name="Shape 18"/>
+          <p:cNvSpPr/>
+          <p:nvPr/>
+        </p:nvSpPr>
+        <p:spPr>
+          <a:xfrm>
+            <a:off x="6126480" y="1051560"/>
+            <a:ext cx="54864" cy="1600200"/>
+          </a:xfrm>
+          <a:prstGeom prst="rect">
+            <a:avLst/>
+          </a:prstGeom>
+          <a:solidFill>
+            <a:srgbClr val="16A34A"/>
+          </a:solidFill>
+          <a:ln/>
+        </p:spPr>
+      </p:sp>
+      <p:sp>
+        <p:nvSpPr>
+          <p:cNvPr id="21" name="Shape 19"/>
+          <p:cNvSpPr/>
+          <p:nvPr/>
+        </p:nvSpPr>
+        <p:spPr>
+          <a:xfrm>
+            <a:off x="7955280" y="1124712"/>
+            <a:ext cx="658368" cy="228600"/>
+          </a:xfrm>
+          <a:prstGeom prst="rect">
+            <a:avLst/>
+          </a:prstGeom>
+          <a:solidFill>
+            <a:srgbClr val="DCFCE7"/>
+          </a:solidFill>
+          <a:ln/>
+        </p:spPr>
+      </p:sp>
+      <p:sp>
+        <p:nvSpPr>
+          <p:cNvPr id="22" name="Text 20"/>
+          <p:cNvSpPr/>
+          <p:nvPr/>
+        </p:nvSpPr>
+        <p:spPr>
+          <a:xfrm>
+            <a:off x="7955280" y="1124712"/>
+            <a:ext cx="658368" cy="228600"/>
+          </a:xfrm>
+          <a:prstGeom prst="rect">
+            <a:avLst/>
+          </a:prstGeom>
+          <a:noFill/>
+          <a:ln/>
+        </p:spPr>
+        <p:txBody>
+          <a:bodyPr wrap="square" lIns="0" tIns="0" rIns="0" bIns="0" rtlCol="0" anchor="ctr"/>
+          <a:lstStyle/>
+          <a:p>
+            <a:pPr algn="ctr" indent="0" marL="0">
+              <a:buNone/>
+            </a:pPr>
+            <a:r>
+              <a:rPr lang="en-US" sz="900" b="1" dirty="0">
+                <a:solidFill>
+                  <a:srgbClr val="16A34A"/>
+                </a:solidFill>
+                <a:latin typeface="Arial" pitchFamily="34" charset="0"/>
+                <a:ea typeface="Arial" pitchFamily="34" charset="-122"/>
+                <a:cs typeface="Arial" pitchFamily="34" charset="-120"/>
+              </a:rPr>
+              <a:t>20件+</a:t>
+            </a:r>
+            <a:endParaRPr lang="en-US" sz="900" dirty="0"/>
+          </a:p>
+        </p:txBody>
+      </p:sp>
+      <p:sp>
+        <p:nvSpPr>
+          <p:cNvPr id="23" name="Text 21"/>
+          <p:cNvSpPr/>
+          <p:nvPr/>
+        </p:nvSpPr>
+        <p:spPr>
+          <a:xfrm>
+            <a:off x="6263640" y="1124712"/>
+            <a:ext cx="1645920" cy="274320"/>
+          </a:xfrm>
+          <a:prstGeom prst="rect">
+            <a:avLst/>
+          </a:prstGeom>
+          <a:noFill/>
+          <a:ln/>
+        </p:spPr>
+        <p:txBody>
+          <a:bodyPr wrap="square" lIns="0" tIns="0" rIns="0" bIns="0" rtlCol="0" anchor="ctr"/>
+          <a:lstStyle/>
+          <a:p>
+            <a:pPr indent="0" marL="0">
+              <a:buNone/>
+            </a:pPr>
+            <a:r>
+              <a:rPr lang="en-US" sz="1300" b="1" dirty="0">
+                <a:solidFill>
+                  <a:srgbClr val="1A2744"/>
+                </a:solidFill>
+                <a:latin typeface="Arial" pitchFamily="34" charset="0"/>
+                <a:ea typeface="Arial" pitchFamily="34" charset="-122"/>
+                <a:cs typeface="Arial" pitchFamily="34" charset="-120"/>
+              </a:rPr>
+              <a:t>スタッフの対応</a:t>
+            </a:r>
+            <a:endParaRPr lang="en-US" sz="1300" dirty="0"/>
+          </a:p>
+        </p:txBody>
+      </p:sp>
+      <p:sp>
+        <p:nvSpPr>
+          <p:cNvPr id="24" name="Text 22"/>
+          <p:cNvSpPr/>
+          <p:nvPr/>
+        </p:nvSpPr>
+        <p:spPr>
+          <a:xfrm>
+            <a:off x="6263640" y="1417320"/>
+            <a:ext cx="2377440" cy="365760"/>
+          </a:xfrm>
+          <a:prstGeom prst="rect">
+            <a:avLst/>
+          </a:prstGeom>
+          <a:noFill/>
+          <a:ln/>
+        </p:spPr>
+        <p:txBody>
+          <a:bodyPr wrap="square" lIns="0" tIns="0" rIns="0" bIns="0" rtlCol="0" anchor="ctr"/>
+          <a:lstStyle/>
+          <a:p>
+            <a:pPr indent="0" marL="0">
+              <a:buNone/>
+            </a:pPr>
+            <a:r>
+              <a:rPr lang="en-US" sz="900" dirty="0">
+                <a:solidFill>
+                  <a:srgbClr val="64748B"/>
+                </a:solidFill>
+                <a:latin typeface="Arial" pitchFamily="34" charset="0"/>
+                <a:ea typeface="Arial" pitchFamily="34" charset="-122"/>
+                <a:cs typeface="Arial" pitchFamily="34" charset="-120"/>
+              </a:rPr>
+              <a:t>スタッフの方みんな一生懸命でした</a:t>
+            </a:r>
+            <a:endParaRPr lang="en-US" sz="900" dirty="0"/>
+          </a:p>
+        </p:txBody>
+      </p:sp>
+      <p:sp>
+        <p:nvSpPr>
+          <p:cNvPr id="25" name="Text 23"/>
+          <p:cNvSpPr/>
+          <p:nvPr/>
+        </p:nvSpPr>
+        <p:spPr>
+          <a:xfrm>
+            <a:off x="6263640" y="1828800"/>
             <a:ext cx="2377440" cy="640080"/>
           </a:xfrm>
           <a:prstGeom prst="rect">
@@ -10565,13 +11011,13 @@
       </p:sp>
       <p:sp>
         <p:nvSpPr>
-          <p:cNvPr id="12" name="Shape 10"/>
-          <p:cNvSpPr/>
-          <p:nvPr/>
-        </p:nvSpPr>
-        <p:spPr>
-          <a:xfrm>
-            <a:off x="3291840" y="1051560"/>
+          <p:cNvPr id="26" name="Shape 24"/>
+          <p:cNvSpPr/>
+          <p:nvPr/>
+        </p:nvSpPr>
+        <p:spPr>
+          <a:xfrm>
+            <a:off x="457200" y="2880360"/>
             <a:ext cx="2651760" cy="1600200"/>
           </a:xfrm>
           <a:prstGeom prst="rect">
@@ -10592,13 +11038,13 @@
       </p:sp>
       <p:sp>
         <p:nvSpPr>
-          <p:cNvPr id="13" name="Shape 11"/>
-          <p:cNvSpPr/>
-          <p:nvPr/>
-        </p:nvSpPr>
-        <p:spPr>
-          <a:xfrm>
-            <a:off x="3291840" y="1051560"/>
+          <p:cNvPr id="27" name="Shape 25"/>
+          <p:cNvSpPr/>
+          <p:nvPr/>
+        </p:nvSpPr>
+        <p:spPr>
+          <a:xfrm>
+            <a:off x="457200" y="2880360"/>
             <a:ext cx="54864" cy="1600200"/>
           </a:xfrm>
           <a:prstGeom prst="rect">
@@ -10612,13 +11058,13 @@
       </p:sp>
       <p:sp>
         <p:nvSpPr>
-          <p:cNvPr id="14" name="Shape 12"/>
-          <p:cNvSpPr/>
-          <p:nvPr/>
-        </p:nvSpPr>
-        <p:spPr>
-          <a:xfrm>
-            <a:off x="5120640" y="1124712"/>
+          <p:cNvPr id="28" name="Shape 26"/>
+          <p:cNvSpPr/>
+          <p:nvPr/>
+        </p:nvSpPr>
+        <p:spPr>
+          <a:xfrm>
+            <a:off x="2286000" y="2953512"/>
             <a:ext cx="658368" cy="228600"/>
           </a:xfrm>
           <a:prstGeom prst="rect">
@@ -10632,236 +11078,13 @@
       </p:sp>
       <p:sp>
         <p:nvSpPr>
-          <p:cNvPr id="15" name="Text 13"/>
-          <p:cNvSpPr/>
-          <p:nvPr/>
-        </p:nvSpPr>
-        <p:spPr>
-          <a:xfrm>
-            <a:off x="5120640" y="1124712"/>
-            <a:ext cx="658368" cy="228600"/>
-          </a:xfrm>
-          <a:prstGeom prst="rect">
-            <a:avLst/>
-          </a:prstGeom>
-          <a:noFill/>
-          <a:ln/>
-        </p:spPr>
-        <p:txBody>
-          <a:bodyPr wrap="square" lIns="0" tIns="0" rIns="0" bIns="0" rtlCol="0" anchor="ctr"/>
-          <a:lstStyle/>
-          <a:p>
-            <a:pPr algn="ctr" indent="0" marL="0">
-              <a:buNone/>
-            </a:pPr>
-            <a:r>
-              <a:rPr lang="en-US" sz="900" b="1" dirty="0">
-                <a:solidFill>
-                  <a:srgbClr val="16A34A"/>
-                </a:solidFill>
-                <a:latin typeface="Arial" pitchFamily="34" charset="0"/>
-                <a:ea typeface="Arial" pitchFamily="34" charset="-122"/>
-                <a:cs typeface="Arial" pitchFamily="34" charset="-120"/>
-              </a:rPr>
-              <a:t>50件+</a:t>
-            </a:r>
-            <a:endParaRPr lang="en-US" sz="900" dirty="0"/>
-          </a:p>
-        </p:txBody>
-      </p:sp>
-      <p:sp>
-        <p:nvSpPr>
-          <p:cNvPr id="16" name="Text 14"/>
-          <p:cNvSpPr/>
-          <p:nvPr/>
-        </p:nvSpPr>
-        <p:spPr>
-          <a:xfrm>
-            <a:off x="3429000" y="1124712"/>
-            <a:ext cx="1645920" cy="274320"/>
-          </a:xfrm>
-          <a:prstGeom prst="rect">
-            <a:avLst/>
-          </a:prstGeom>
-          <a:noFill/>
-          <a:ln/>
-        </p:spPr>
-        <p:txBody>
-          <a:bodyPr wrap="square" lIns="0" tIns="0" rIns="0" bIns="0" rtlCol="0" anchor="ctr"/>
-          <a:lstStyle/>
-          <a:p>
-            <a:pPr indent="0" marL="0">
-              <a:buNone/>
-            </a:pPr>
-            <a:r>
-              <a:rPr lang="en-US" sz="1300" b="1" dirty="0">
-                <a:solidFill>
-                  <a:srgbClr val="1A2744"/>
-                </a:solidFill>
-                <a:latin typeface="Arial" pitchFamily="34" charset="0"/>
-                <a:ea typeface="Arial" pitchFamily="34" charset="-122"/>
-                <a:cs typeface="Arial" pitchFamily="34" charset="-120"/>
-              </a:rPr>
-              <a:t>立地・アクセス</a:t>
-            </a:r>
-            <a:endParaRPr lang="en-US" sz="1300" dirty="0"/>
-          </a:p>
-        </p:txBody>
-      </p:sp>
-      <p:sp>
-        <p:nvSpPr>
-          <p:cNvPr id="17" name="Text 15"/>
-          <p:cNvSpPr/>
-          <p:nvPr/>
-        </p:nvSpPr>
-        <p:spPr>
-          <a:xfrm>
-            <a:off x="3429000" y="1417320"/>
-            <a:ext cx="2377440" cy="365760"/>
-          </a:xfrm>
-          <a:prstGeom prst="rect">
-            <a:avLst/>
-          </a:prstGeom>
-          <a:noFill/>
-          <a:ln/>
-        </p:spPr>
-        <p:txBody>
-          <a:bodyPr wrap="square" lIns="0" tIns="0" rIns="0" bIns="0" rtlCol="0" anchor="ctr"/>
-          <a:lstStyle/>
-          <a:p>
-            <a:pPr indent="0" marL="0">
-              <a:buNone/>
-            </a:pPr>
-            <a:r>
-              <a:rPr lang="en-US" sz="900" dirty="0">
-                <a:solidFill>
-                  <a:srgbClr val="64748B"/>
-                </a:solidFill>
-                <a:latin typeface="Arial" pitchFamily="34" charset="0"/>
-                <a:ea typeface="Arial" pitchFamily="34" charset="-122"/>
-                <a:cs typeface="Arial" pitchFamily="34" charset="-120"/>
-              </a:rPr>
-              <a:t>横浜スタジアムや中華街も徒歩圏内で、周りにはスーパーやコンビニ、飲食店も沢山あって便利^_^ 駐車場も隣接してあり</a:t>
-            </a:r>
-            <a:endParaRPr lang="en-US" sz="900" dirty="0"/>
-          </a:p>
-        </p:txBody>
-      </p:sp>
-      <p:sp>
-        <p:nvSpPr>
-          <p:cNvPr id="18" name="Text 16"/>
-          <p:cNvSpPr/>
-          <p:nvPr/>
-        </p:nvSpPr>
-        <p:spPr>
-          <a:xfrm>
-            <a:off x="3429000" y="1828800"/>
-            <a:ext cx="2377440" cy="640080"/>
-          </a:xfrm>
-          <a:prstGeom prst="rect">
-            <a:avLst/>
-          </a:prstGeom>
-          <a:noFill/>
-          <a:ln/>
-        </p:spPr>
-        <p:txBody>
-          <a:bodyPr wrap="square" lIns="0" tIns="0" rIns="0" bIns="0" rtlCol="0" anchor="ctr"/>
-          <a:lstStyle/>
-          <a:p>
-            <a:pPr indent="0" marL="0">
-              <a:buNone/>
-            </a:pPr>
-            <a:r>
-              <a:rPr lang="en-US" sz="900" i="1" dirty="0">
-                <a:solidFill>
-                  <a:srgbClr val="3B7DD8"/>
-                </a:solidFill>
-                <a:latin typeface="Arial" pitchFamily="34" charset="0"/>
-                <a:ea typeface="Arial" pitchFamily="34" charset="-122"/>
-                <a:cs typeface="Arial" pitchFamily="34" charset="-120"/>
-              </a:rPr>
-              <a:t>「駅からも近いし、横浜観光のアクセスにはもってこいの場所だと思います」</a:t>
-            </a:r>
-            <a:endParaRPr lang="en-US" sz="900" dirty="0"/>
-          </a:p>
-        </p:txBody>
-      </p:sp>
-      <p:sp>
-        <p:nvSpPr>
-          <p:cNvPr id="19" name="Shape 17"/>
-          <p:cNvSpPr/>
-          <p:nvPr/>
-        </p:nvSpPr>
-        <p:spPr>
-          <a:xfrm>
-            <a:off x="6126480" y="1051560"/>
-            <a:ext cx="2651760" cy="1600200"/>
-          </a:xfrm>
-          <a:prstGeom prst="rect">
-            <a:avLst/>
-          </a:prstGeom>
-          <a:solidFill>
-            <a:srgbClr val="FFFFFF"/>
-          </a:solidFill>
-          <a:ln/>
-          <a:effectLst>
-            <a:outerShdw sx="100000" sy="100000" kx="0" ky="0" algn="bl" rotWithShape="0" blurRad="50800" dist="25400" dir="8100000">
-              <a:srgbClr val="000000">
-                <a:alpha val="10000"/>
-              </a:srgbClr>
-            </a:outerShdw>
-          </a:effectLst>
-        </p:spPr>
-      </p:sp>
-      <p:sp>
-        <p:nvSpPr>
-          <p:cNvPr id="20" name="Shape 18"/>
-          <p:cNvSpPr/>
-          <p:nvPr/>
-        </p:nvSpPr>
-        <p:spPr>
-          <a:xfrm>
-            <a:off x="6126480" y="1051560"/>
-            <a:ext cx="54864" cy="1600200"/>
-          </a:xfrm>
-          <a:prstGeom prst="rect">
-            <a:avLst/>
-          </a:prstGeom>
-          <a:solidFill>
-            <a:srgbClr val="16A34A"/>
-          </a:solidFill>
-          <a:ln/>
-        </p:spPr>
-      </p:sp>
-      <p:sp>
-        <p:nvSpPr>
-          <p:cNvPr id="21" name="Shape 19"/>
-          <p:cNvSpPr/>
-          <p:nvPr/>
-        </p:nvSpPr>
-        <p:spPr>
-          <a:xfrm>
-            <a:off x="7955280" y="1124712"/>
-            <a:ext cx="658368" cy="228600"/>
-          </a:xfrm>
-          <a:prstGeom prst="rect">
-            <a:avLst/>
-          </a:prstGeom>
-          <a:solidFill>
-            <a:srgbClr val="DCFCE7"/>
-          </a:solidFill>
-          <a:ln/>
-        </p:spPr>
-      </p:sp>
-      <p:sp>
-        <p:nvSpPr>
-          <p:cNvPr id="22" name="Text 20"/>
-          <p:cNvSpPr/>
-          <p:nvPr/>
-        </p:nvSpPr>
-        <p:spPr>
-          <a:xfrm>
-            <a:off x="7955280" y="1124712"/>
+          <p:cNvPr id="29" name="Text 27"/>
+          <p:cNvSpPr/>
+          <p:nvPr/>
+        </p:nvSpPr>
+        <p:spPr>
+          <a:xfrm>
+            <a:off x="2286000" y="2953512"/>
             <a:ext cx="658368" cy="228600"/>
           </a:xfrm>
           <a:prstGeom prst="rect">
@@ -10894,13 +11117,13 @@
       </p:sp>
       <p:sp>
         <p:nvSpPr>
-          <p:cNvPr id="23" name="Text 21"/>
-          <p:cNvSpPr/>
-          <p:nvPr/>
-        </p:nvSpPr>
-        <p:spPr>
-          <a:xfrm>
-            <a:off x="6263640" y="1124712"/>
+          <p:cNvPr id="30" name="Text 28"/>
+          <p:cNvSpPr/>
+          <p:nvPr/>
+        </p:nvSpPr>
+        <p:spPr>
+          <a:xfrm>
+            <a:off x="594360" y="2953512"/>
             <a:ext cx="1645920" cy="274320"/>
           </a:xfrm>
           <a:prstGeom prst="rect">
@@ -10925,7 +11148,7 @@
                 <a:ea typeface="Arial" pitchFamily="34" charset="-122"/>
                 <a:cs typeface="Arial" pitchFamily="34" charset="-120"/>
               </a:rPr>
-              <a:t>スタッフの対応</a:t>
+              <a:t>清潔さ・清掃</a:t>
             </a:r>
             <a:endParaRPr lang="en-US" sz="1300" dirty="0"/>
           </a:p>
@@ -10933,13 +11156,13 @@
       </p:sp>
       <p:sp>
         <p:nvSpPr>
-          <p:cNvPr id="24" name="Text 22"/>
-          <p:cNvSpPr/>
-          <p:nvPr/>
-        </p:nvSpPr>
-        <p:spPr>
-          <a:xfrm>
-            <a:off x="6263640" y="1417320"/>
+          <p:cNvPr id="31" name="Text 29"/>
+          <p:cNvSpPr/>
+          <p:nvPr/>
+        </p:nvSpPr>
+        <p:spPr>
+          <a:xfrm>
+            <a:off x="594360" y="3246120"/>
             <a:ext cx="2377440" cy="365760"/>
           </a:xfrm>
           <a:prstGeom prst="rect">
@@ -10964,7 +11187,7 @@
                 <a:ea typeface="Arial" pitchFamily="34" charset="-122"/>
                 <a:cs typeface="Arial" pitchFamily="34" charset="-120"/>
               </a:rPr>
-              <a:t>出し入れ自由 ロービー横にはドリンクサービス、 無料朝食もあり、メニューも豊富で美味しかったです</a:t>
+              <a:t>部屋は清潔で、朝食も期待以上</a:t>
             </a:r>
             <a:endParaRPr lang="en-US" sz="900" dirty="0"/>
           </a:p>
@@ -10972,13 +11195,13 @@
       </p:sp>
       <p:sp>
         <p:nvSpPr>
-          <p:cNvPr id="25" name="Text 23"/>
-          <p:cNvSpPr/>
-          <p:nvPr/>
-        </p:nvSpPr>
-        <p:spPr>
-          <a:xfrm>
-            <a:off x="6263640" y="1828800"/>
+          <p:cNvPr id="32" name="Text 30"/>
+          <p:cNvSpPr/>
+          <p:nvPr/>
+        </p:nvSpPr>
+        <p:spPr>
+          <a:xfrm>
+            <a:off x="594360" y="3657600"/>
             <a:ext cx="2377440" cy="640080"/>
           </a:xfrm>
           <a:prstGeom prst="rect">
@@ -11003,7 +11226,7 @@
                 <a:ea typeface="Arial" pitchFamily="34" charset="-122"/>
                 <a:cs typeface="Arial" pitchFamily="34" charset="-120"/>
               </a:rPr>
-              <a:t>「受付のスタッフの方達はとても丁寧でした」</a:t>
+              <a:t>「他の宿泊施設と比較すると安価に感じましたが、とても清潔な部屋でした」</a:t>
             </a:r>
             <a:endParaRPr lang="en-US" sz="900" dirty="0"/>
           </a:p>
@@ -11011,13 +11234,13 @@
       </p:sp>
       <p:sp>
         <p:nvSpPr>
-          <p:cNvPr id="26" name="Shape 24"/>
-          <p:cNvSpPr/>
-          <p:nvPr/>
-        </p:nvSpPr>
-        <p:spPr>
-          <a:xfrm>
-            <a:off x="457200" y="2880360"/>
+          <p:cNvPr id="33" name="Shape 31"/>
+          <p:cNvSpPr/>
+          <p:nvPr/>
+        </p:nvSpPr>
+        <p:spPr>
+          <a:xfrm>
+            <a:off x="3291840" y="2880360"/>
             <a:ext cx="2651760" cy="1600200"/>
           </a:xfrm>
           <a:prstGeom prst="rect">
@@ -11038,13 +11261,13 @@
       </p:sp>
       <p:sp>
         <p:nvSpPr>
-          <p:cNvPr id="27" name="Shape 25"/>
-          <p:cNvSpPr/>
-          <p:nvPr/>
-        </p:nvSpPr>
-        <p:spPr>
-          <a:xfrm>
-            <a:off x="457200" y="2880360"/>
+          <p:cNvPr id="34" name="Shape 32"/>
+          <p:cNvSpPr/>
+          <p:nvPr/>
+        </p:nvSpPr>
+        <p:spPr>
+          <a:xfrm>
+            <a:off x="3291840" y="2880360"/>
             <a:ext cx="54864" cy="1600200"/>
           </a:xfrm>
           <a:prstGeom prst="rect">
@@ -11058,13 +11281,13 @@
       </p:sp>
       <p:sp>
         <p:nvSpPr>
-          <p:cNvPr id="28" name="Shape 26"/>
-          <p:cNvSpPr/>
-          <p:nvPr/>
-        </p:nvSpPr>
-        <p:spPr>
-          <a:xfrm>
-            <a:off x="2286000" y="2953512"/>
+          <p:cNvPr id="35" name="Shape 33"/>
+          <p:cNvSpPr/>
+          <p:nvPr/>
+        </p:nvSpPr>
+        <p:spPr>
+          <a:xfrm>
+            <a:off x="5120640" y="2953512"/>
             <a:ext cx="658368" cy="228600"/>
           </a:xfrm>
           <a:prstGeom prst="rect">
@@ -11078,13 +11301,13 @@
       </p:sp>
       <p:sp>
         <p:nvSpPr>
-          <p:cNvPr id="29" name="Text 27"/>
-          <p:cNvSpPr/>
-          <p:nvPr/>
-        </p:nvSpPr>
-        <p:spPr>
-          <a:xfrm>
-            <a:off x="2286000" y="2953512"/>
+          <p:cNvPr id="36" name="Text 34"/>
+          <p:cNvSpPr/>
+          <p:nvPr/>
+        </p:nvSpPr>
+        <p:spPr>
+          <a:xfrm>
+            <a:off x="5120640" y="2953512"/>
             <a:ext cx="658368" cy="228600"/>
           </a:xfrm>
           <a:prstGeom prst="rect">
@@ -11117,229 +11340,6 @@
       </p:sp>
       <p:sp>
         <p:nvSpPr>
-          <p:cNvPr id="30" name="Text 28"/>
-          <p:cNvSpPr/>
-          <p:nvPr/>
-        </p:nvSpPr>
-        <p:spPr>
-          <a:xfrm>
-            <a:off x="594360" y="2953512"/>
-            <a:ext cx="1645920" cy="274320"/>
-          </a:xfrm>
-          <a:prstGeom prst="rect">
-            <a:avLst/>
-          </a:prstGeom>
-          <a:noFill/>
-          <a:ln/>
-        </p:spPr>
-        <p:txBody>
-          <a:bodyPr wrap="square" lIns="0" tIns="0" rIns="0" bIns="0" rtlCol="0" anchor="ctr"/>
-          <a:lstStyle/>
-          <a:p>
-            <a:pPr indent="0" marL="0">
-              <a:buNone/>
-            </a:pPr>
-            <a:r>
-              <a:rPr lang="en-US" sz="1300" b="1" dirty="0">
-                <a:solidFill>
-                  <a:srgbClr val="1A2744"/>
-                </a:solidFill>
-                <a:latin typeface="Arial" pitchFamily="34" charset="0"/>
-                <a:ea typeface="Arial" pitchFamily="34" charset="-122"/>
-                <a:cs typeface="Arial" pitchFamily="34" charset="-120"/>
-              </a:rPr>
-              <a:t>清潔さ・清掃</a:t>
-            </a:r>
-            <a:endParaRPr lang="en-US" sz="1300" dirty="0"/>
-          </a:p>
-        </p:txBody>
-      </p:sp>
-      <p:sp>
-        <p:nvSpPr>
-          <p:cNvPr id="31" name="Text 29"/>
-          <p:cNvSpPr/>
-          <p:nvPr/>
-        </p:nvSpPr>
-        <p:spPr>
-          <a:xfrm>
-            <a:off x="594360" y="3246120"/>
-            <a:ext cx="2377440" cy="365760"/>
-          </a:xfrm>
-          <a:prstGeom prst="rect">
-            <a:avLst/>
-          </a:prstGeom>
-          <a:noFill/>
-          <a:ln/>
-        </p:spPr>
-        <p:txBody>
-          <a:bodyPr wrap="square" lIns="0" tIns="0" rIns="0" bIns="0" rtlCol="0" anchor="ctr"/>
-          <a:lstStyle/>
-          <a:p>
-            <a:pPr indent="0" marL="0">
-              <a:buNone/>
-            </a:pPr>
-            <a:r>
-              <a:rPr lang="en-US" sz="900" dirty="0">
-                <a:solidFill>
-                  <a:srgbClr val="64748B"/>
-                </a:solidFill>
-                <a:latin typeface="Arial" pitchFamily="34" charset="0"/>
-                <a:ea typeface="Arial" pitchFamily="34" charset="-122"/>
-                <a:cs typeface="Arial" pitchFamily="34" charset="-120"/>
-              </a:rPr>
-              <a:t>部屋も綺麗だったと思います</a:t>
-            </a:r>
-            <a:endParaRPr lang="en-US" sz="900" dirty="0"/>
-          </a:p>
-        </p:txBody>
-      </p:sp>
-      <p:sp>
-        <p:nvSpPr>
-          <p:cNvPr id="32" name="Text 30"/>
-          <p:cNvSpPr/>
-          <p:nvPr/>
-        </p:nvSpPr>
-        <p:spPr>
-          <a:xfrm>
-            <a:off x="594360" y="3657600"/>
-            <a:ext cx="2377440" cy="640080"/>
-          </a:xfrm>
-          <a:prstGeom prst="rect">
-            <a:avLst/>
-          </a:prstGeom>
-          <a:noFill/>
-          <a:ln/>
-        </p:spPr>
-        <p:txBody>
-          <a:bodyPr wrap="square" lIns="0" tIns="0" rIns="0" bIns="0" rtlCol="0" anchor="ctr"/>
-          <a:lstStyle/>
-          <a:p>
-            <a:pPr indent="0" marL="0">
-              <a:buNone/>
-            </a:pPr>
-            <a:r>
-              <a:rPr lang="en-US" sz="900" i="1" dirty="0">
-                <a:solidFill>
-                  <a:srgbClr val="3B7DD8"/>
-                </a:solidFill>
-                <a:latin typeface="Arial" pitchFamily="34" charset="0"/>
-                <a:ea typeface="Arial" pitchFamily="34" charset="-122"/>
-                <a:cs typeface="Arial" pitchFamily="34" charset="-120"/>
-              </a:rPr>
-              <a:t>「新しく改装されたばかりの店内は清潔で明るく、テーブルや椅子が配置され、居心地の良い雰囲気です」</a:t>
-            </a:r>
-            <a:endParaRPr lang="en-US" sz="900" dirty="0"/>
-          </a:p>
-        </p:txBody>
-      </p:sp>
-      <p:sp>
-        <p:nvSpPr>
-          <p:cNvPr id="33" name="Shape 31"/>
-          <p:cNvSpPr/>
-          <p:nvPr/>
-        </p:nvSpPr>
-        <p:spPr>
-          <a:xfrm>
-            <a:off x="3291840" y="2880360"/>
-            <a:ext cx="2651760" cy="1600200"/>
-          </a:xfrm>
-          <a:prstGeom prst="rect">
-            <a:avLst/>
-          </a:prstGeom>
-          <a:solidFill>
-            <a:srgbClr val="FFFFFF"/>
-          </a:solidFill>
-          <a:ln/>
-          <a:effectLst>
-            <a:outerShdw sx="100000" sy="100000" kx="0" ky="0" algn="bl" rotWithShape="0" blurRad="50800" dist="25400" dir="8100000">
-              <a:srgbClr val="000000">
-                <a:alpha val="10000"/>
-              </a:srgbClr>
-            </a:outerShdw>
-          </a:effectLst>
-        </p:spPr>
-      </p:sp>
-      <p:sp>
-        <p:nvSpPr>
-          <p:cNvPr id="34" name="Shape 32"/>
-          <p:cNvSpPr/>
-          <p:nvPr/>
-        </p:nvSpPr>
-        <p:spPr>
-          <a:xfrm>
-            <a:off x="3291840" y="2880360"/>
-            <a:ext cx="54864" cy="1600200"/>
-          </a:xfrm>
-          <a:prstGeom prst="rect">
-            <a:avLst/>
-          </a:prstGeom>
-          <a:solidFill>
-            <a:srgbClr val="16A34A"/>
-          </a:solidFill>
-          <a:ln/>
-        </p:spPr>
-      </p:sp>
-      <p:sp>
-        <p:nvSpPr>
-          <p:cNvPr id="35" name="Shape 33"/>
-          <p:cNvSpPr/>
-          <p:nvPr/>
-        </p:nvSpPr>
-        <p:spPr>
-          <a:xfrm>
-            <a:off x="5120640" y="2953512"/>
-            <a:ext cx="658368" cy="228600"/>
-          </a:xfrm>
-          <a:prstGeom prst="rect">
-            <a:avLst/>
-          </a:prstGeom>
-          <a:solidFill>
-            <a:srgbClr val="DCFCE7"/>
-          </a:solidFill>
-          <a:ln/>
-        </p:spPr>
-      </p:sp>
-      <p:sp>
-        <p:nvSpPr>
-          <p:cNvPr id="36" name="Text 34"/>
-          <p:cNvSpPr/>
-          <p:nvPr/>
-        </p:nvSpPr>
-        <p:spPr>
-          <a:xfrm>
-            <a:off x="5120640" y="2953512"/>
-            <a:ext cx="658368" cy="228600"/>
-          </a:xfrm>
-          <a:prstGeom prst="rect">
-            <a:avLst/>
-          </a:prstGeom>
-          <a:noFill/>
-          <a:ln/>
-        </p:spPr>
-        <p:txBody>
-          <a:bodyPr wrap="square" lIns="0" tIns="0" rIns="0" bIns="0" rtlCol="0" anchor="ctr"/>
-          <a:lstStyle/>
-          <a:p>
-            <a:pPr algn="ctr" indent="0" marL="0">
-              <a:buNone/>
-            </a:pPr>
-            <a:r>
-              <a:rPr lang="en-US" sz="900" b="1" dirty="0">
-                <a:solidFill>
-                  <a:srgbClr val="16A34A"/>
-                </a:solidFill>
-                <a:latin typeface="Arial" pitchFamily="34" charset="0"/>
-                <a:ea typeface="Arial" pitchFamily="34" charset="-122"/>
-                <a:cs typeface="Arial" pitchFamily="34" charset="-120"/>
-              </a:rPr>
-              <a:t>20件+</a:t>
-            </a:r>
-            <a:endParaRPr lang="en-US" sz="900" dirty="0"/>
-          </a:p>
-        </p:txBody>
-      </p:sp>
-      <p:sp>
-        <p:nvSpPr>
           <p:cNvPr id="37" name="Text 35"/>
           <p:cNvSpPr/>
           <p:nvPr/>
@@ -11410,7 +11410,7 @@
                 <a:ea typeface="Arial" pitchFamily="34" charset="-122"/>
                 <a:cs typeface="Arial" pitchFamily="34" charset="-120"/>
               </a:rPr>
-              <a:t>子連れで2連泊しましたが、料金も安く、快適に過ごせました</a:t>
+              <a:t>トリプルベッドの設定がありがたい</a:t>
             </a:r>
             <a:endParaRPr lang="en-US" sz="900" dirty="0"/>
           </a:p>
@@ -11449,7 +11449,7 @@
                 <a:ea typeface="Arial" pitchFamily="34" charset="-122"/>
                 <a:cs typeface="Arial" pitchFamily="34" charset="-120"/>
               </a:rPr>
-              <a:t>「設備は必要最低限ですが特に不満は無いです」</a:t>
+              <a:t>「ヨーグルトが👌 設備にちょい残念な点が… シャワーヘッドの元のあたりから水もれあり」</a:t>
             </a:r>
             <a:endParaRPr lang="en-US" sz="900" dirty="0"/>
           </a:p>
@@ -12362,7 +12362,7 @@
                           <a:ea typeface="Arial" pitchFamily="34" charset="-122"/>
                           <a:cs typeface="Arial" pitchFamily="34" charset="-120"/>
                         </a:rPr>
-                        <a:t>部屋も広く、快適でした ホテルが改装中が残念で、朝食がバイキングでないのが、残念でした</a:t>
+                        <a:t>ヨーグルトが👌 設備にちょい残念な点が… シャワーヘッドの元のあたりから水もれあり</a:t>
                       </a:r>
                       <a:endParaRPr lang="en-US" sz="900" dirty="0">
                         <a:latin typeface="Arial" charset="0"/>
@@ -12430,7 +12430,7 @@
                           <a:ea typeface="Arial" pitchFamily="34" charset="-122"/>
                           <a:cs typeface="Arial" pitchFamily="34" charset="-120"/>
                         </a:rPr>
-                        <a:t>27件</a:t>
+                        <a:t>26件</a:t>
                       </a:r>
                       <a:endParaRPr lang="en-US" sz="900" dirty="0">
                         <a:latin typeface="Arial" charset="0"/>
@@ -12910,7 +12910,7 @@
                           <a:ea typeface="Arial" pitchFamily="34" charset="-122"/>
                           <a:cs typeface="Arial" pitchFamily="34" charset="-120"/>
                         </a:rPr>
-                        <a:t>嫌な臭いは一切なく、カーペット、カーテン、そしてバスルームまでピカピカでした</a:t>
+                        <a:t>ヨーグルトが👌 設備にちょい残念な点が… シャワーヘッドの元のあたりから水もれあり</a:t>
                       </a:r>
                       <a:endParaRPr lang="en-US" sz="900" dirty="0">
                         <a:latin typeface="Arial" charset="0"/>
@@ -12978,7 +12978,7 @@
                           <a:ea typeface="Arial" pitchFamily="34" charset="-122"/>
                           <a:cs typeface="Arial" pitchFamily="34" charset="-120"/>
                         </a:rPr>
-                        <a:t>9件</a:t>
+                        <a:t>10件</a:t>
                       </a:r>
                       <a:endParaRPr lang="en-US" sz="900" dirty="0">
                         <a:latin typeface="Arial" charset="0"/>
@@ -13116,7 +13116,7 @@
                           <a:ea typeface="Arial" pitchFamily="34" charset="-122"/>
                           <a:cs typeface="Arial" pitchFamily="34" charset="-120"/>
                         </a:rPr>
-                        <a:t>防音性能</a:t>
+                        <a:t>窓・採光</a:t>
                       </a:r>
                       <a:endParaRPr lang="en-US" sz="900" dirty="0">
                         <a:latin typeface="Arial" charset="0"/>
@@ -13184,7 +13184,7 @@
                           <a:ea typeface="Arial" pitchFamily="34" charset="-122"/>
                           <a:cs typeface="Arial" pitchFamily="34" charset="-120"/>
                         </a:rPr>
-                        <a:t>予約時に見落としていたこちらのミスかもしれないが、内装工事しており、その関係で音がうるさく、朝食も弁当だった</a:t>
+                        <a:t>2階のカフェ兼ブックルームは明るく快適です🍀</a:t>
                       </a:r>
                       <a:endParaRPr lang="en-US" sz="900" dirty="0">
                         <a:latin typeface="Arial" charset="0"/>
@@ -13390,7 +13390,7 @@
                           <a:ea typeface="Arial" pitchFamily="34" charset="-122"/>
                           <a:cs typeface="Arial" pitchFamily="34" charset="-120"/>
                         </a:rPr>
-                        <a:t>窓・採光</a:t>
+                        <a:t>設備の老朽化</a:t>
                       </a:r>
                       <a:endParaRPr lang="en-US" sz="900" dirty="0">
                         <a:latin typeface="Arial" charset="0"/>
@@ -13458,7 +13458,7 @@
                           <a:ea typeface="Arial" pitchFamily="34" charset="-122"/>
                           <a:cs typeface="Arial" pitchFamily="34" charset="-120"/>
                         </a:rPr>
-                        <a:t>2階のカフェ兼ブックルームは明るく快適です🍀</a:t>
+                        <a:t>エアコンが古い、カードキータイプだが部屋にはカード入れがなく忘れそう、風呂の体を洗うタオルなし、朝食は団体客がいる...</a:t>
                       </a:r>
                       <a:endParaRPr lang="en-US" sz="900" dirty="0">
                         <a:latin typeface="Arial" charset="0"/>
@@ -13526,7 +13526,7 @@
                           <a:ea typeface="Arial" pitchFamily="34" charset="-122"/>
                           <a:cs typeface="Arial" pitchFamily="34" charset="-120"/>
                         </a:rPr>
-                        <a:t>5件</a:t>
+                        <a:t>4件</a:t>
                       </a:r>
                       <a:endParaRPr lang="en-US" sz="900" dirty="0">
                         <a:latin typeface="Arial" charset="0"/>
@@ -13664,7 +13664,7 @@
                           <a:ea typeface="Arial" pitchFamily="34" charset="-122"/>
                           <a:cs typeface="Arial" pitchFamily="34" charset="-120"/>
                         </a:rPr>
-                        <a:t>設備の老朽化</a:t>
+                        <a:t>防音性能</a:t>
                       </a:r>
                       <a:endParaRPr lang="en-US" sz="900" dirty="0">
                         <a:latin typeface="Arial" charset="0"/>
@@ -13732,7 +13732,7 @@
                           <a:ea typeface="Arial" pitchFamily="34" charset="-122"/>
                           <a:cs typeface="Arial" pitchFamily="34" charset="-120"/>
                         </a:rPr>
-                        <a:t>部屋は狭めで設備も古いが、スタッフの応対も丁寧でウェルカムドリンクもあります</a:t>
+                        <a:t>予約時に見落としていたこちらのミスかもしれないが、内装工事しており、その関係で音がうるさく、朝食も弁当だった</a:t>
                       </a:r>
                       <a:endParaRPr lang="en-US" sz="900" dirty="0">
                         <a:latin typeface="Arial" charset="0"/>
@@ -13800,7 +13800,7 @@
                           <a:ea typeface="Arial" pitchFamily="34" charset="-122"/>
                           <a:cs typeface="Arial" pitchFamily="34" charset="-120"/>
                         </a:rPr>
-                        <a:t>3件</a:t>
+                        <a:t>4件</a:t>
                       </a:r>
                       <a:endParaRPr lang="en-US" sz="900" dirty="0">
                         <a:latin typeface="Arial" charset="0"/>
@@ -14074,7 +14074,7 @@
                           <a:ea typeface="Arial" pitchFamily="34" charset="-122"/>
                           <a:cs typeface="Arial" pitchFamily="34" charset="-120"/>
                         </a:rPr>
-                        <a:t>3件</a:t>
+                        <a:t>4件</a:t>
                       </a:r>
                       <a:endParaRPr lang="en-US" sz="900" dirty="0">
                         <a:latin typeface="Arial" charset="0"/>
@@ -14280,7 +14280,7 @@
                           <a:ea typeface="Arial" pitchFamily="34" charset="-122"/>
                           <a:cs typeface="Arial" pitchFamily="34" charset="-120"/>
                         </a:rPr>
-                        <a:t>La struttura è il classico business hotel con stanze picc...</a:t>
+                        <a:t>エアコンが古い、カードキータイプだが部屋にはカード入れがなく忘れそう、風呂の体を洗うタオルなし、朝食は団体客がいる...</a:t>
                       </a:r>
                       <a:endParaRPr lang="en-US" sz="900" dirty="0">
                         <a:latin typeface="Arial" charset="0"/>
@@ -14348,7 +14348,7 @@
                           <a:ea typeface="Arial" pitchFamily="34" charset="-122"/>
                           <a:cs typeface="Arial" pitchFamily="34" charset="-120"/>
                         </a:rPr>
-                        <a:t>3件</a:t>
+                        <a:t>4件</a:t>
                       </a:r>
                       <a:endParaRPr lang="en-US" sz="900" dirty="0">
                         <a:latin typeface="Arial" charset="0"/>

--- a/納品レポート/ホテル別レポート/comfort_yokohama_kannai_口コミ分析レポート.pptx
+++ b/納品レポート/ホテル別レポート/comfort_yokohama_kannai_口コミ分析レポート.pptx
@@ -186,10 +186,10 @@
                     <c:v>Agoda</c:v>
                   </c:pt>
                   <c:pt idx="2">
-                    <c:v>楽天トラベル</c:v>
+                    <c:v>Google</c:v>
                   </c:pt>
                   <c:pt idx="3">
-                    <c:v>Google</c:v>
+                    <c:v>楽天トラベル</c:v>
                   </c:pt>
                   <c:pt idx="4">
                     <c:v>じゃらん</c:v>
@@ -214,16 +214,16 @@
                   <c:v>8</c:v>
                 </c:pt>
                 <c:pt idx="2">
+                  <c:v>7.58</c:v>
+                </c:pt>
+                <c:pt idx="3">
                   <c:v>7.48</c:v>
                 </c:pt>
-                <c:pt idx="3">
-                  <c:v>7.36</c:v>
-                </c:pt>
                 <c:pt idx="4">
-                  <c:v>7.1</c:v>
+                  <c:v>7.26</c:v>
                 </c:pt>
                 <c:pt idx="5">
-                  <c:v>6.96</c:v>
+                  <c:v>7</c:v>
                 </c:pt>
               </c:numCache>
             </c:numRef>
@@ -566,13 +566,13 @@
               <c:numCache>
                 <c:ptCount val="3"/>
                 <c:pt idx="0">
-                  <c:v>95</c:v>
+                  <c:v>96</c:v>
                 </c:pt>
                 <c:pt idx="1">
                   <c:v>29</c:v>
                 </c:pt>
                 <c:pt idx="2">
-                  <c:v>19</c:v>
+                  <c:v>18</c:v>
                 </c:pt>
               </c:numCache>
             </c:numRef>
@@ -823,13 +823,13 @@
                 <c:formatCode>General</c:formatCode>
                 <c:ptCount val="9"/>
                 <c:pt idx="0">
-                  <c:v>32</c:v>
+                  <c:v>34</c:v>
                 </c:pt>
                 <c:pt idx="1">
-                  <c:v>7</c:v>
+                  <c:v>8</c:v>
                 </c:pt>
                 <c:pt idx="2">
-                  <c:v>56</c:v>
+                  <c:v>54</c:v>
                 </c:pt>
                 <c:pt idx="3">
                   <c:v>6</c:v>
@@ -841,7 +841,7 @@
                   <c:v>5</c:v>
                 </c:pt>
                 <c:pt idx="6">
-                  <c:v>11</c:v>
+                  <c:v>10</c:v>
                 </c:pt>
                 <c:pt idx="7">
                   <c:v>1</c:v>
@@ -2818,7 +2818,7 @@
                 <a:ea typeface="Arial" pitchFamily="34" charset="-122"/>
                 <a:cs typeface="Arial" pitchFamily="34" charset="-120"/>
               </a:rPr>
-              <a:t>作成日：2026年3月27日</a:t>
+              <a:t>作成日：2026年3月28日</a:t>
             </a:r>
             <a:endParaRPr lang="en-US" sz="1000" dirty="0"/>
           </a:p>
@@ -3364,7 +3364,7 @@
                           <a:ea typeface="Arial" pitchFamily="34" charset="-122"/>
                           <a:cs typeface="Arial" pitchFamily="34" charset="-120"/>
                         </a:rPr>
-                        <a:t>7.46点</a:t>
+                        <a:t>7.52点</a:t>
                       </a:r>
                       <a:endParaRPr lang="en-US" sz="1000" dirty="0">
                         <a:latin typeface="Arial" charset="0"/>
@@ -3638,7 +3638,7 @@
                           <a:ea typeface="Arial" pitchFamily="34" charset="-122"/>
                           <a:cs typeface="Arial" pitchFamily="34" charset="-120"/>
                         </a:rPr>
-                        <a:t>66.4%</a:t>
+                        <a:t>67.1%</a:t>
                       </a:r>
                       <a:endParaRPr lang="en-US" sz="1000" dirty="0">
                         <a:latin typeface="Arial" charset="0"/>
@@ -3706,7 +3706,7 @@
                           <a:ea typeface="Arial" pitchFamily="34" charset="-122"/>
                           <a:cs typeface="Arial" pitchFamily="34" charset="-120"/>
                         </a:rPr>
-                        <a:t>76%以上</a:t>
+                        <a:t>77%以上</a:t>
                       </a:r>
                       <a:endParaRPr lang="en-US" sz="1000" dirty="0">
                         <a:latin typeface="Arial" charset="0"/>
@@ -3912,7 +3912,7 @@
                           <a:ea typeface="Arial" pitchFamily="34" charset="-122"/>
                           <a:cs typeface="Arial" pitchFamily="34" charset="-120"/>
                         </a:rPr>
-                        <a:t>13.3%</a:t>
+                        <a:t>12.6%</a:t>
                       </a:r>
                       <a:endParaRPr lang="en-US" sz="1000" dirty="0">
                         <a:latin typeface="Arial" charset="0"/>
@@ -4118,6 +4118,280 @@
                           <a:ea typeface="Arial" pitchFamily="34" charset="-122"/>
                           <a:cs typeface="Arial" pitchFamily="34" charset="-120"/>
                         </a:rPr>
+                        <a:t>Booking.com平均評価</a:t>
+                      </a:r>
+                      <a:endParaRPr lang="en-US" sz="1000" dirty="0">
+                        <a:latin typeface="Arial" charset="0"/>
+                        <a:ea typeface="Arial" charset="0"/>
+                        <a:cs typeface="Arial" charset="0"/>
+                      </a:endParaRPr>
+                    </a:p>
+                  </a:txBody>
+                  <a:tcPr marL="91440" marR="91440" marT="45720" marB="45720">
+                    <a:lnL w="6350" cap="flat" cmpd="sng" algn="ctr">
+                      <a:solidFill>
+                        <a:srgbClr val="CBD5E1"/>
+                      </a:solidFill>
+                      <a:prstDash val="solid"/>
+                      <a:round/>
+                      <a:headEnd type="none" w="med" len="med"/>
+                      <a:tailEnd type="none" w="med" len="med"/>
+                    </a:lnL>
+                    <a:lnR w="6350" cap="flat" cmpd="sng" algn="ctr">
+                      <a:solidFill>
+                        <a:srgbClr val="CBD5E1"/>
+                      </a:solidFill>
+                      <a:prstDash val="solid"/>
+                      <a:round/>
+                      <a:headEnd type="none" w="med" len="med"/>
+                      <a:tailEnd type="none" w="med" len="med"/>
+                    </a:lnR>
+                    <a:lnT w="6350" cap="flat" cmpd="sng" algn="ctr">
+                      <a:solidFill>
+                        <a:srgbClr val="CBD5E1"/>
+                      </a:solidFill>
+                      <a:prstDash val="solid"/>
+                      <a:round/>
+                      <a:headEnd type="none" w="med" len="med"/>
+                      <a:tailEnd type="none" w="med" len="med"/>
+                    </a:lnT>
+                    <a:lnB w="6350" cap="flat" cmpd="sng" algn="ctr">
+                      <a:solidFill>
+                        <a:srgbClr val="CBD5E1"/>
+                      </a:solidFill>
+                      <a:prstDash val="solid"/>
+                      <a:round/>
+                      <a:headEnd type="none" w="med" len="med"/>
+                      <a:tailEnd type="none" w="med" len="med"/>
+                    </a:lnB>
+                    <a:solidFill>
+                      <a:srgbClr val="FFFFFF"/>
+                    </a:solidFill>
+                  </a:tcPr>
+                </a:tc>
+                <a:tc>
+                  <a:txBody>
+                    <a:bodyPr/>
+                    <a:lstStyle/>
+                    <a:p>
+                      <a:pPr algn="ctr" indent="0" marL="0">
+                        <a:buNone/>
+                      </a:pPr>
+                      <a:r>
+                        <a:rPr lang="en-US" sz="1000" dirty="0">
+                          <a:solidFill>
+                            <a:srgbClr val="64748B"/>
+                          </a:solidFill>
+                          <a:latin typeface="Arial" pitchFamily="34" charset="0"/>
+                          <a:ea typeface="Arial" pitchFamily="34" charset="-122"/>
+                          <a:cs typeface="Arial" pitchFamily="34" charset="-120"/>
+                        </a:rPr>
+                        <a:t>7.0点</a:t>
+                      </a:r>
+                      <a:endParaRPr lang="en-US" sz="1000" dirty="0">
+                        <a:latin typeface="Arial" charset="0"/>
+                        <a:ea typeface="Arial" charset="0"/>
+                        <a:cs typeface="Arial" charset="0"/>
+                      </a:endParaRPr>
+                    </a:p>
+                  </a:txBody>
+                  <a:tcPr marL="91440" marR="91440" marT="45720" marB="45720">
+                    <a:lnL w="6350" cap="flat" cmpd="sng" algn="ctr">
+                      <a:solidFill>
+                        <a:srgbClr val="CBD5E1"/>
+                      </a:solidFill>
+                      <a:prstDash val="solid"/>
+                      <a:round/>
+                      <a:headEnd type="none" w="med" len="med"/>
+                      <a:tailEnd type="none" w="med" len="med"/>
+                    </a:lnL>
+                    <a:lnR w="6350" cap="flat" cmpd="sng" algn="ctr">
+                      <a:solidFill>
+                        <a:srgbClr val="CBD5E1"/>
+                      </a:solidFill>
+                      <a:prstDash val="solid"/>
+                      <a:round/>
+                      <a:headEnd type="none" w="med" len="med"/>
+                      <a:tailEnd type="none" w="med" len="med"/>
+                    </a:lnR>
+                    <a:lnT w="6350" cap="flat" cmpd="sng" algn="ctr">
+                      <a:solidFill>
+                        <a:srgbClr val="CBD5E1"/>
+                      </a:solidFill>
+                      <a:prstDash val="solid"/>
+                      <a:round/>
+                      <a:headEnd type="none" w="med" len="med"/>
+                      <a:tailEnd type="none" w="med" len="med"/>
+                    </a:lnT>
+                    <a:lnB w="6350" cap="flat" cmpd="sng" algn="ctr">
+                      <a:solidFill>
+                        <a:srgbClr val="CBD5E1"/>
+                      </a:solidFill>
+                      <a:prstDash val="solid"/>
+                      <a:round/>
+                      <a:headEnd type="none" w="med" len="med"/>
+                      <a:tailEnd type="none" w="med" len="med"/>
+                    </a:lnB>
+                    <a:solidFill>
+                      <a:srgbClr val="FFFFFF"/>
+                    </a:solidFill>
+                  </a:tcPr>
+                </a:tc>
+                <a:tc>
+                  <a:txBody>
+                    <a:bodyPr/>
+                    <a:lstStyle/>
+                    <a:p>
+                      <a:pPr algn="ctr" indent="0" marL="0">
+                        <a:buNone/>
+                      </a:pPr>
+                      <a:r>
+                        <a:rPr lang="en-US" sz="1000" b="1" dirty="0">
+                          <a:solidFill>
+                            <a:srgbClr val="16A34A"/>
+                          </a:solidFill>
+                          <a:latin typeface="Arial" pitchFamily="34" charset="0"/>
+                          <a:ea typeface="Arial" pitchFamily="34" charset="-122"/>
+                          <a:cs typeface="Arial" pitchFamily="34" charset="-120"/>
+                        </a:rPr>
+                        <a:t>8.0点以上</a:t>
+                      </a:r>
+                      <a:endParaRPr lang="en-US" sz="1000" dirty="0">
+                        <a:latin typeface="Arial" charset="0"/>
+                        <a:ea typeface="Arial" charset="0"/>
+                        <a:cs typeface="Arial" charset="0"/>
+                      </a:endParaRPr>
+                    </a:p>
+                  </a:txBody>
+                  <a:tcPr marL="91440" marR="91440" marT="45720" marB="45720">
+                    <a:lnL w="6350" cap="flat" cmpd="sng" algn="ctr">
+                      <a:solidFill>
+                        <a:srgbClr val="CBD5E1"/>
+                      </a:solidFill>
+                      <a:prstDash val="solid"/>
+                      <a:round/>
+                      <a:headEnd type="none" w="med" len="med"/>
+                      <a:tailEnd type="none" w="med" len="med"/>
+                    </a:lnL>
+                    <a:lnR w="6350" cap="flat" cmpd="sng" algn="ctr">
+                      <a:solidFill>
+                        <a:srgbClr val="CBD5E1"/>
+                      </a:solidFill>
+                      <a:prstDash val="solid"/>
+                      <a:round/>
+                      <a:headEnd type="none" w="med" len="med"/>
+                      <a:tailEnd type="none" w="med" len="med"/>
+                    </a:lnR>
+                    <a:lnT w="6350" cap="flat" cmpd="sng" algn="ctr">
+                      <a:solidFill>
+                        <a:srgbClr val="CBD5E1"/>
+                      </a:solidFill>
+                      <a:prstDash val="solid"/>
+                      <a:round/>
+                      <a:headEnd type="none" w="med" len="med"/>
+                      <a:tailEnd type="none" w="med" len="med"/>
+                    </a:lnT>
+                    <a:lnB w="6350" cap="flat" cmpd="sng" algn="ctr">
+                      <a:solidFill>
+                        <a:srgbClr val="CBD5E1"/>
+                      </a:solidFill>
+                      <a:prstDash val="solid"/>
+                      <a:round/>
+                      <a:headEnd type="none" w="med" len="med"/>
+                      <a:tailEnd type="none" w="med" len="med"/>
+                    </a:lnB>
+                    <a:solidFill>
+                      <a:srgbClr val="FFFFFF"/>
+                    </a:solidFill>
+                  </a:tcPr>
+                </a:tc>
+                <a:tc>
+                  <a:txBody>
+                    <a:bodyPr/>
+                    <a:lstStyle/>
+                    <a:p>
+                      <a:pPr algn="ctr" indent="0" marL="0">
+                        <a:buNone/>
+                      </a:pPr>
+                      <a:r>
+                        <a:rPr lang="en-US" sz="1000" dirty="0">
+                          <a:solidFill>
+                            <a:srgbClr val="64748B"/>
+                          </a:solidFill>
+                          <a:latin typeface="Arial" pitchFamily="34" charset="0"/>
+                          <a:ea typeface="Arial" pitchFamily="34" charset="-122"/>
+                          <a:cs typeface="Arial" pitchFamily="34" charset="-120"/>
+                        </a:rPr>
+                        <a:t>2026年9月</a:t>
+                      </a:r>
+                      <a:endParaRPr lang="en-US" sz="1000" dirty="0">
+                        <a:latin typeface="Arial" charset="0"/>
+                        <a:ea typeface="Arial" charset="0"/>
+                        <a:cs typeface="Arial" charset="0"/>
+                      </a:endParaRPr>
+                    </a:p>
+                  </a:txBody>
+                  <a:tcPr marL="91440" marR="91440" marT="45720" marB="45720">
+                    <a:lnL w="6350" cap="flat" cmpd="sng" algn="ctr">
+                      <a:solidFill>
+                        <a:srgbClr val="CBD5E1"/>
+                      </a:solidFill>
+                      <a:prstDash val="solid"/>
+                      <a:round/>
+                      <a:headEnd type="none" w="med" len="med"/>
+                      <a:tailEnd type="none" w="med" len="med"/>
+                    </a:lnL>
+                    <a:lnR w="6350" cap="flat" cmpd="sng" algn="ctr">
+                      <a:solidFill>
+                        <a:srgbClr val="CBD5E1"/>
+                      </a:solidFill>
+                      <a:prstDash val="solid"/>
+                      <a:round/>
+                      <a:headEnd type="none" w="med" len="med"/>
+                      <a:tailEnd type="none" w="med" len="med"/>
+                    </a:lnR>
+                    <a:lnT w="6350" cap="flat" cmpd="sng" algn="ctr">
+                      <a:solidFill>
+                        <a:srgbClr val="CBD5E1"/>
+                      </a:solidFill>
+                      <a:prstDash val="solid"/>
+                      <a:round/>
+                      <a:headEnd type="none" w="med" len="med"/>
+                      <a:tailEnd type="none" w="med" len="med"/>
+                    </a:lnT>
+                    <a:lnB w="6350" cap="flat" cmpd="sng" algn="ctr">
+                      <a:solidFill>
+                        <a:srgbClr val="CBD5E1"/>
+                      </a:solidFill>
+                      <a:prstDash val="solid"/>
+                      <a:round/>
+                      <a:headEnd type="none" w="med" len="med"/>
+                      <a:tailEnd type="none" w="med" len="med"/>
+                    </a:lnB>
+                    <a:solidFill>
+                      <a:srgbClr val="FFFFFF"/>
+                    </a:solidFill>
+                  </a:tcPr>
+                </a:tc>
+              </a:tr>
+              <a:tr h="320040">
+                <a:tc>
+                  <a:txBody>
+                    <a:bodyPr/>
+                    <a:lstStyle/>
+                    <a:p>
+                      <a:pPr indent="0" marL="0">
+                        <a:buNone/>
+                      </a:pPr>
+                      <a:r>
+                        <a:rPr lang="en-US" sz="1000" b="1" dirty="0">
+                          <a:solidFill>
+                            <a:srgbClr val="334155"/>
+                          </a:solidFill>
+                          <a:latin typeface="Arial" pitchFamily="34" charset="0"/>
+                          <a:ea typeface="Arial" pitchFamily="34" charset="-122"/>
+                          <a:cs typeface="Arial" pitchFamily="34" charset="-120"/>
+                        </a:rPr>
                         <a:t>口コミ返信率</a:t>
                       </a:r>
                       <a:endParaRPr lang="en-US" sz="1000" dirty="0">
@@ -4165,7 +4439,7 @@
                       <a:tailEnd type="none" w="med" len="med"/>
                     </a:lnB>
                     <a:solidFill>
-                      <a:srgbClr val="FFFFFF"/>
+                      <a:srgbClr val="E8EFF8"/>
                     </a:solidFill>
                   </a:tcPr>
                 </a:tc>
@@ -4233,7 +4507,7 @@
                       <a:tailEnd type="none" w="med" len="med"/>
                     </a:lnB>
                     <a:solidFill>
-                      <a:srgbClr val="FFFFFF"/>
+                      <a:srgbClr val="E8EFF8"/>
                     </a:solidFill>
                   </a:tcPr>
                 </a:tc>
@@ -4301,7 +4575,7 @@
                       <a:tailEnd type="none" w="med" len="med"/>
                     </a:lnB>
                     <a:solidFill>
-                      <a:srgbClr val="FFFFFF"/>
+                      <a:srgbClr val="E8EFF8"/>
                     </a:solidFill>
                   </a:tcPr>
                 </a:tc>
@@ -4369,7 +4643,7 @@
                       <a:tailEnd type="none" w="med" len="med"/>
                     </a:lnB>
                     <a:solidFill>
-                      <a:srgbClr val="FFFFFF"/>
+                      <a:srgbClr val="E8EFF8"/>
                     </a:solidFill>
                   </a:tcPr>
                 </a:tc>
@@ -4439,7 +4713,7 @@
                       <a:tailEnd type="none" w="med" len="med"/>
                     </a:lnB>
                     <a:solidFill>
-                      <a:srgbClr val="E8EFF8"/>
+                      <a:srgbClr val="FFFFFF"/>
                     </a:solidFill>
                   </a:tcPr>
                 </a:tc>
@@ -4460,7 +4734,7 @@
                           <a:ea typeface="Arial" pitchFamily="34" charset="-122"/>
                           <a:cs typeface="Arial" pitchFamily="34" charset="-120"/>
                         </a:rPr>
-                        <a:t>約26件/期間</a:t>
+                        <a:t>約25件/期間</a:t>
                       </a:r>
                       <a:endParaRPr lang="en-US" sz="1000" dirty="0">
                         <a:latin typeface="Arial" charset="0"/>
@@ -4507,7 +4781,7 @@
                       <a:tailEnd type="none" w="med" len="med"/>
                     </a:lnB>
                     <a:solidFill>
-                      <a:srgbClr val="E8EFF8"/>
+                      <a:srgbClr val="FFFFFF"/>
                     </a:solidFill>
                   </a:tcPr>
                 </a:tc>
@@ -4528,7 +4802,7 @@
                           <a:ea typeface="Arial" pitchFamily="34" charset="-122"/>
                           <a:cs typeface="Arial" pitchFamily="34" charset="-120"/>
                         </a:rPr>
-                        <a:t>13件以下</a:t>
+                        <a:t>12件以下</a:t>
                       </a:r>
                       <a:endParaRPr lang="en-US" sz="1000" dirty="0">
                         <a:latin typeface="Arial" charset="0"/>
@@ -4575,7 +4849,7 @@
                       <a:tailEnd type="none" w="med" len="med"/>
                     </a:lnB>
                     <a:solidFill>
-                      <a:srgbClr val="E8EFF8"/>
+                      <a:srgbClr val="FFFFFF"/>
                     </a:solidFill>
                   </a:tcPr>
                 </a:tc>
@@ -4643,7 +4917,7 @@
                       <a:tailEnd type="none" w="med" len="med"/>
                     </a:lnB>
                     <a:solidFill>
-                      <a:srgbClr val="E8EFF8"/>
+                      <a:srgbClr val="FFFFFF"/>
                     </a:solidFill>
                   </a:tcPr>
                 </a:tc>
@@ -4660,7 +4934,7 @@
         </p:nvSpPr>
         <p:spPr>
           <a:xfrm>
-            <a:off x="457200" y="3108960"/>
+            <a:off x="457200" y="3429000"/>
             <a:ext cx="8229600" cy="640080"/>
           </a:xfrm>
           <a:prstGeom prst="rect">
@@ -4687,7 +4961,7 @@
         </p:nvSpPr>
         <p:spPr>
           <a:xfrm>
-            <a:off x="457200" y="3108960"/>
+            <a:off x="457200" y="3429000"/>
             <a:ext cx="54864" cy="640080"/>
           </a:xfrm>
           <a:prstGeom prst="rect">
@@ -4707,7 +4981,7 @@
         </p:nvSpPr>
         <p:spPr>
           <a:xfrm>
-            <a:off x="640080" y="3108960"/>
+            <a:off x="640080" y="3429000"/>
             <a:ext cx="7863840" cy="640080"/>
           </a:xfrm>
           <a:prstGeom prst="rect">
@@ -5099,7 +5373,7 @@
                 <a:ea typeface="Arial" pitchFamily="34" charset="-122"/>
                 <a:cs typeface="Arial" pitchFamily="34" charset="-120"/>
               </a:rPr>
-              <a:t>7.46</a:t>
+              <a:t>7.52</a:t>
             </a:r>
             <a:endParaRPr lang="en-US" sz="3200" dirty="0"/>
           </a:p>
@@ -5224,7 +5498,7 @@
                 <a:ea typeface="Arial" pitchFamily="34" charset="-122"/>
                 <a:cs typeface="Arial" pitchFamily="34" charset="-120"/>
               </a:rPr>
-              <a:t>66.4%</a:t>
+              <a:t>67.1%</a:t>
             </a:r>
             <a:endParaRPr lang="en-US" sz="3200" dirty="0"/>
           </a:p>
@@ -5349,7 +5623,7 @@
                 <a:ea typeface="Arial" pitchFamily="34" charset="-122"/>
                 <a:cs typeface="Arial" pitchFamily="34" charset="-120"/>
               </a:rPr>
-              <a:t>13.3%</a:t>
+              <a:t>12.6%</a:t>
             </a:r>
             <a:endParaRPr lang="en-US" sz="3200" dirty="0"/>
           </a:p>
@@ -5662,7 +5936,7 @@
                 <a:ea typeface="Arial" pitchFamily="34" charset="-122"/>
                 <a:cs typeface="Arial" pitchFamily="34" charset="-120"/>
               </a:rPr>
-              <a:t>  横浜スタジアムや中華街も徒歩圏内で、周りにはスーパーやコンビニ、飲食店も沢山あって便利^_^ 駐車場も隣接してあり</a:t>
+              <a:t>  最寄りの駅まではわずか5分</a:t>
             </a:r>
             <a:endParaRPr lang="en-US" sz="1100" dirty="0"/>
           </a:p>
@@ -6283,7 +6557,7 @@
                 <a:ea typeface="Arial" pitchFamily="34" charset="-122"/>
                 <a:cs typeface="Arial" pitchFamily="34" charset="-120"/>
               </a:rPr>
-              <a:t>7.46</a:t>
+              <a:t>7.52</a:t>
             </a:r>
             <a:endParaRPr lang="en-US" sz="3200" dirty="0"/>
           </a:p>
@@ -6408,7 +6682,7 @@
                 <a:ea typeface="Arial" pitchFamily="34" charset="-122"/>
                 <a:cs typeface="Arial" pitchFamily="34" charset="-120"/>
               </a:rPr>
-              <a:t>66.4%</a:t>
+              <a:t>67.1%</a:t>
             </a:r>
             <a:endParaRPr lang="en-US" sz="3200" dirty="0"/>
           </a:p>
@@ -6533,7 +6807,7 @@
                 <a:ea typeface="Arial" pitchFamily="34" charset="-122"/>
                 <a:cs typeface="Arial" pitchFamily="34" charset="-120"/>
               </a:rPr>
-              <a:t>13.3%</a:t>
+              <a:t>12.6%</a:t>
             </a:r>
             <a:endParaRPr lang="en-US" sz="3200" dirty="0"/>
           </a:p>
@@ -7080,6 +7354,55 @@
                 <a:cs typeface="Arial" pitchFamily="34" charset="-120"/>
               </a:rPr>
               <a:t>Trip.com(8.32)が最高スコア。</a:t>
+            </a:r>
+            <a:endParaRPr lang="en-US" sz="1100" dirty="0"/>
+          </a:p>
+          <a:p>
+            <a:pPr indent="0" marL="0">
+              <a:spcAft>
+                <a:spcPts val="200"/>
+              </a:spcAft>
+              <a:buNone/>
+            </a:pPr>
+            <a:endParaRPr lang="en-US" sz="1100" dirty="0"/>
+          </a:p>
+          <a:p>
+            <a:pPr indent="0" marL="0">
+              <a:spcAft>
+                <a:spcPts val="200"/>
+              </a:spcAft>
+              <a:buNone/>
+            </a:pPr>
+            <a:r>
+              <a:rPr lang="en-US" sz="1100" b="1" dirty="0">
+                <a:solidFill>
+                  <a:srgbClr val="DC2626"/>
+                </a:solidFill>
+                <a:latin typeface="Arial" pitchFamily="34" charset="0"/>
+                <a:ea typeface="Arial" pitchFamily="34" charset="-122"/>
+                <a:cs typeface="Arial" pitchFamily="34" charset="-120"/>
+              </a:rPr>
+              <a:t>改善対象サイト</a:t>
+            </a:r>
+            <a:endParaRPr lang="en-US" sz="1100" dirty="0"/>
+          </a:p>
+          <a:p>
+            <a:pPr indent="0" marL="0">
+              <a:spcAft>
+                <a:spcPts val="200"/>
+              </a:spcAft>
+              <a:buNone/>
+            </a:pPr>
+            <a:r>
+              <a:rPr lang="en-US" sz="900" dirty="0">
+                <a:solidFill>
+                  <a:srgbClr val="64748B"/>
+                </a:solidFill>
+                <a:latin typeface="Arial" pitchFamily="34" charset="0"/>
+                <a:ea typeface="Arial" pitchFamily="34" charset="-122"/>
+                <a:cs typeface="Arial" pitchFamily="34" charset="-120"/>
+              </a:rPr>
+              <a:t>Booking.com(7.0)が相対的に低い。口コミ返信の強化が急務</a:t>
             </a:r>
             <a:endParaRPr lang="en-US" sz="1100" dirty="0"/>
           </a:p>
@@ -7930,7 +8253,7 @@
                           <a:ea typeface="Arial" pitchFamily="34" charset="-122"/>
                           <a:cs typeface="Arial" pitchFamily="34" charset="-120"/>
                         </a:rPr>
-                        <a:t>12</a:t>
+                        <a:t>11</a:t>
                       </a:r>
                       <a:endParaRPr lang="en-US" sz="900" dirty="0">
                         <a:latin typeface="Arial" charset="0"/>
@@ -8204,7 +8527,7 @@
                           <a:ea typeface="Arial" pitchFamily="34" charset="-122"/>
                           <a:cs typeface="Arial" pitchFamily="34" charset="-120"/>
                         </a:rPr>
-                        <a:t>楽天トラベル</a:t>
+                        <a:t>Google</a:t>
                       </a:r>
                       <a:endParaRPr lang="en-US" sz="900" dirty="0">
                         <a:latin typeface="Arial" charset="0"/>
@@ -8272,7 +8595,7 @@
                           <a:ea typeface="Arial" pitchFamily="34" charset="-122"/>
                           <a:cs typeface="Arial" pitchFamily="34" charset="-120"/>
                         </a:rPr>
-                        <a:t>42</a:t>
+                        <a:t>24</a:t>
                       </a:r>
                       <a:endParaRPr lang="en-US" sz="900" dirty="0">
                         <a:latin typeface="Arial" charset="0"/>
@@ -8340,7 +8663,7 @@
                           <a:ea typeface="Arial" pitchFamily="34" charset="-122"/>
                           <a:cs typeface="Arial" pitchFamily="34" charset="-120"/>
                         </a:rPr>
-                        <a:t>3.74</a:t>
+                        <a:t>3.79</a:t>
                       </a:r>
                       <a:endParaRPr lang="en-US" sz="900" dirty="0">
                         <a:latin typeface="Arial" charset="0"/>
@@ -8476,7 +8799,7 @@
                           <a:ea typeface="Arial" pitchFamily="34" charset="-122"/>
                           <a:cs typeface="Arial" pitchFamily="34" charset="-120"/>
                         </a:rPr>
-                        <a:t>7.48</a:t>
+                        <a:t>7.58</a:t>
                       </a:r>
                       <a:endParaRPr lang="en-US" sz="900" dirty="0">
                         <a:latin typeface="Arial" charset="0"/>
@@ -8546,7 +8869,7 @@
                           <a:ea typeface="Arial" pitchFamily="34" charset="-122"/>
                           <a:cs typeface="Arial" pitchFamily="34" charset="-120"/>
                         </a:rPr>
-                        <a:t>Google</a:t>
+                        <a:t>楽天トラベル</a:t>
                       </a:r>
                       <a:endParaRPr lang="en-US" sz="900" dirty="0">
                         <a:latin typeface="Arial" charset="0"/>
@@ -8614,7 +8937,7 @@
                           <a:ea typeface="Arial" pitchFamily="34" charset="-122"/>
                           <a:cs typeface="Arial" pitchFamily="34" charset="-120"/>
                         </a:rPr>
-                        <a:t>22</a:t>
+                        <a:t>42</a:t>
                       </a:r>
                       <a:endParaRPr lang="en-US" sz="900" dirty="0">
                         <a:latin typeface="Arial" charset="0"/>
@@ -8682,7 +9005,7 @@
                           <a:ea typeface="Arial" pitchFamily="34" charset="-122"/>
                           <a:cs typeface="Arial" pitchFamily="34" charset="-120"/>
                         </a:rPr>
-                        <a:t>3.68</a:t>
+                        <a:t>3.74</a:t>
                       </a:r>
                       <a:endParaRPr lang="en-US" sz="900" dirty="0">
                         <a:latin typeface="Arial" charset="0"/>
@@ -8818,7 +9141,7 @@
                           <a:ea typeface="Arial" pitchFamily="34" charset="-122"/>
                           <a:cs typeface="Arial" pitchFamily="34" charset="-120"/>
                         </a:rPr>
-                        <a:t>7.36</a:t>
+                        <a:t>7.48</a:t>
                       </a:r>
                       <a:endParaRPr lang="en-US" sz="900" dirty="0">
                         <a:latin typeface="Arial" charset="0"/>
@@ -8956,7 +9279,7 @@
                           <a:ea typeface="Arial" pitchFamily="34" charset="-122"/>
                           <a:cs typeface="Arial" pitchFamily="34" charset="-120"/>
                         </a:rPr>
-                        <a:t>20</a:t>
+                        <a:t>19</a:t>
                       </a:r>
                       <a:endParaRPr lang="en-US" sz="900" dirty="0">
                         <a:latin typeface="Arial" charset="0"/>
@@ -9024,7 +9347,7 @@
                           <a:ea typeface="Arial" pitchFamily="34" charset="-122"/>
                           <a:cs typeface="Arial" pitchFamily="34" charset="-120"/>
                         </a:rPr>
-                        <a:t>3.55</a:t>
+                        <a:t>3.63</a:t>
                       </a:r>
                       <a:endParaRPr lang="en-US" sz="900" dirty="0">
                         <a:latin typeface="Arial" charset="0"/>
@@ -9160,7 +9483,7 @@
                           <a:ea typeface="Arial" pitchFamily="34" charset="-122"/>
                           <a:cs typeface="Arial" pitchFamily="34" charset="-120"/>
                         </a:rPr>
-                        <a:t>7.1</a:t>
+                        <a:t>7.26</a:t>
                       </a:r>
                       <a:endParaRPr lang="en-US" sz="900" dirty="0">
                         <a:latin typeface="Arial" charset="0"/>
@@ -9366,7 +9689,7 @@
                           <a:ea typeface="Arial" pitchFamily="34" charset="-122"/>
                           <a:cs typeface="Arial" pitchFamily="34" charset="-120"/>
                         </a:rPr>
-                        <a:t>6.96</a:t>
+                        <a:t>7</a:t>
                       </a:r>
                       <a:endParaRPr lang="en-US" sz="900" dirty="0">
                         <a:latin typeface="Arial" charset="0"/>
@@ -9502,7 +9825,7 @@
                           <a:ea typeface="Arial" pitchFamily="34" charset="-122"/>
                           <a:cs typeface="Arial" pitchFamily="34" charset="-120"/>
                         </a:rPr>
-                        <a:t>6.96</a:t>
+                        <a:t>7</a:t>
                       </a:r>
                       <a:endParaRPr lang="en-US" sz="900" dirty="0">
                         <a:latin typeface="Arial" charset="0"/>
@@ -9910,7 +10233,7 @@
                 <a:ea typeface="Arial" pitchFamily="34" charset="-122"/>
                 <a:cs typeface="Arial" pitchFamily="34" charset="-120"/>
               </a:rPr>
-              <a:t>95件（66.4%）</a:t>
+              <a:t>96件（67.1%）</a:t>
             </a:r>
             <a:endParaRPr lang="en-US" sz="1100" dirty="0"/>
           </a:p>
@@ -10106,7 +10429,7 @@
                 <a:ea typeface="Arial" pitchFamily="34" charset="-122"/>
                 <a:cs typeface="Arial" pitchFamily="34" charset="-120"/>
               </a:rPr>
-              <a:t>19件（13.3%）</a:t>
+              <a:t>18件（12.6%）</a:t>
             </a:r>
             <a:endParaRPr lang="en-US" sz="1100" dirty="0"/>
           </a:p>
@@ -10741,7 +11064,7 @@
                 <a:ea typeface="Arial" pitchFamily="34" charset="-122"/>
                 <a:cs typeface="Arial" pitchFamily="34" charset="-120"/>
               </a:rPr>
-              <a:t>横浜スタジアムや中華街も徒歩圏内で、周りにはスーパーやコンビニ、飲食店も沢山あって便利^_^ 駐車場も隣接してあり</a:t>
+              <a:t>最寄りの駅まではわずか5分</a:t>
             </a:r>
             <a:endParaRPr lang="en-US" sz="900" dirty="0"/>
           </a:p>
@@ -10780,7 +11103,7 @@
                 <a:ea typeface="Arial" pitchFamily="34" charset="-122"/>
                 <a:cs typeface="Arial" pitchFamily="34" charset="-120"/>
               </a:rPr>
-              <a:t>「駅からも近いし、横浜観光のアクセスにはもってこいの場所だと思います」</a:t>
+              <a:t>「横浜スタジアムや中華街も徒歩圏内で、周りにはスーパーやコンビニ、飲食店も沢山あって便利^_^ 駐車場も隣接してあり」</a:t>
             </a:r>
             <a:endParaRPr lang="en-US" sz="900" dirty="0"/>
           </a:p>
@@ -11633,7 +11956,7 @@
                 <a:ea typeface="Arial" pitchFamily="34" charset="-122"/>
                 <a:cs typeface="Arial" pitchFamily="34" charset="-120"/>
               </a:rPr>
-              <a:t>横浜スタジアムや中華街も徒歩圏内で、周りにはスーパーやコンビニ、飲食店も沢山あって便利^_^ 駐車場も隣接してあり</a:t>
+              <a:t>ホテルの向かいにはコンビニエンスストアがあります</a:t>
             </a:r>
             <a:endParaRPr lang="en-US" sz="900" dirty="0"/>
           </a:p>
@@ -11672,7 +11995,7 @@
                 <a:ea typeface="Arial" pitchFamily="34" charset="-122"/>
                 <a:cs typeface="Arial" pitchFamily="34" charset="-120"/>
               </a:rPr>
-              <a:t>「近くにスーパーやコンビニがあるのでとても便利でした」</a:t>
+              <a:t>「横浜スタジアムや中華街も徒歩圏内で、周りにはスーパーやコンビニ、飲食店も沢山あって便利^_^ 駐車場も隣接してあり」</a:t>
             </a:r>
             <a:endParaRPr lang="en-US" sz="900" dirty="0"/>
           </a:p>
@@ -12430,7 +12753,7 @@
                           <a:ea typeface="Arial" pitchFamily="34" charset="-122"/>
                           <a:cs typeface="Arial" pitchFamily="34" charset="-120"/>
                         </a:rPr>
-                        <a:t>26件</a:t>
+                        <a:t>25件</a:t>
                       </a:r>
                       <a:endParaRPr lang="en-US" sz="900" dirty="0">
                         <a:latin typeface="Arial" charset="0"/>
@@ -12704,7 +13027,7 @@
                           <a:ea typeface="Arial" pitchFamily="34" charset="-122"/>
                           <a:cs typeface="Arial" pitchFamily="34" charset="-120"/>
                         </a:rPr>
-                        <a:t>12件</a:t>
+                        <a:t>11件</a:t>
                       </a:r>
                       <a:endParaRPr lang="en-US" sz="900" dirty="0">
                         <a:latin typeface="Arial" charset="0"/>
@@ -13116,7 +13439,7 @@
                           <a:ea typeface="Arial" pitchFamily="34" charset="-122"/>
                           <a:cs typeface="Arial" pitchFamily="34" charset="-120"/>
                         </a:rPr>
-                        <a:t>窓・採光</a:t>
+                        <a:t>エアコン・空調</a:t>
                       </a:r>
                       <a:endParaRPr lang="en-US" sz="900" dirty="0">
                         <a:latin typeface="Arial" charset="0"/>
@@ -13184,7 +13507,7 @@
                           <a:ea typeface="Arial" pitchFamily="34" charset="-122"/>
                           <a:cs typeface="Arial" pitchFamily="34" charset="-120"/>
                         </a:rPr>
-                        <a:t>2階のカフェ兼ブックルームは明るく快適です🍀</a:t>
+                        <a:t>convenience store just opposite the hotel</a:t>
                       </a:r>
                       <a:endParaRPr lang="en-US" sz="900" dirty="0">
                         <a:latin typeface="Arial" charset="0"/>
@@ -13390,7 +13713,7 @@
                           <a:ea typeface="Arial" pitchFamily="34" charset="-122"/>
                           <a:cs typeface="Arial" pitchFamily="34" charset="-120"/>
                         </a:rPr>
-                        <a:t>設備の老朽化</a:t>
+                        <a:t>窓・採光</a:t>
                       </a:r>
                       <a:endParaRPr lang="en-US" sz="900" dirty="0">
                         <a:latin typeface="Arial" charset="0"/>
@@ -13458,7 +13781,7 @@
                           <a:ea typeface="Arial" pitchFamily="34" charset="-122"/>
                           <a:cs typeface="Arial" pitchFamily="34" charset="-120"/>
                         </a:rPr>
-                        <a:t>エアコンが古い、カードキータイプだが部屋にはカード入れがなく忘れそう、風呂の体を洗うタオルなし、朝食は団体客がいる...</a:t>
+                        <a:t>2階のカフェ兼ブックルームは明るく快適です🍀</a:t>
                       </a:r>
                       <a:endParaRPr lang="en-US" sz="900" dirty="0">
                         <a:latin typeface="Arial" charset="0"/>
@@ -13526,7 +13849,7 @@
                           <a:ea typeface="Arial" pitchFamily="34" charset="-122"/>
                           <a:cs typeface="Arial" pitchFamily="34" charset="-120"/>
                         </a:rPr>
-                        <a:t>4件</a:t>
+                        <a:t>5件</a:t>
                       </a:r>
                       <a:endParaRPr lang="en-US" sz="900" dirty="0">
                         <a:latin typeface="Arial" charset="0"/>
@@ -13664,7 +13987,7 @@
                           <a:ea typeface="Arial" pitchFamily="34" charset="-122"/>
                           <a:cs typeface="Arial" pitchFamily="34" charset="-120"/>
                         </a:rPr>
-                        <a:t>防音性能</a:t>
+                        <a:t>設備の老朽化</a:t>
                       </a:r>
                       <a:endParaRPr lang="en-US" sz="900" dirty="0">
                         <a:latin typeface="Arial" charset="0"/>
@@ -13732,7 +14055,7 @@
                           <a:ea typeface="Arial" pitchFamily="34" charset="-122"/>
                           <a:cs typeface="Arial" pitchFamily="34" charset="-120"/>
                         </a:rPr>
-                        <a:t>予約時に見落としていたこちらのミスかもしれないが、内装工事しており、その関係で音がうるさく、朝食も弁当だった</a:t>
+                        <a:t>エアコンが古い、カードキータイプだが部屋にはカード入れがなく忘れそう、風呂の体を洗うタオルなし、朝食は団体客がいる...</a:t>
                       </a:r>
                       <a:endParaRPr lang="en-US" sz="900" dirty="0">
                         <a:latin typeface="Arial" charset="0"/>
@@ -13938,7 +14261,7 @@
                           <a:ea typeface="Arial" pitchFamily="34" charset="-122"/>
                           <a:cs typeface="Arial" pitchFamily="34" charset="-120"/>
                         </a:rPr>
-                        <a:t>朝食の改善要望</a:t>
+                        <a:t>防音性能</a:t>
                       </a:r>
                       <a:endParaRPr lang="en-US" sz="900" dirty="0">
                         <a:latin typeface="Arial" charset="0"/>
@@ -14006,7 +14329,7 @@
                           <a:ea typeface="Arial" pitchFamily="34" charset="-122"/>
                           <a:cs typeface="Arial" pitchFamily="34" charset="-120"/>
                         </a:rPr>
-                        <a:t>スムージーや期間限定メニュー！】などと大々的に銘打ってありましたが、実際にはチェックイン時に「工事期間のため簡単な...</a:t>
+                        <a:t>予約時に見落としていたこちらのミスかもしれないが、内装工事しており、その関係で音がうるさく、朝食も弁当だった</a:t>
                       </a:r>
                       <a:endParaRPr lang="en-US" sz="900" dirty="0">
                         <a:latin typeface="Arial" charset="0"/>
@@ -14212,7 +14535,7 @@
                           <a:ea typeface="Arial" pitchFamily="34" charset="-122"/>
                           <a:cs typeface="Arial" pitchFamily="34" charset="-120"/>
                         </a:rPr>
-                        <a:t>エアコン・空調</a:t>
+                        <a:t>朝食の改善要望</a:t>
                       </a:r>
                       <a:endParaRPr lang="en-US" sz="900" dirty="0">
                         <a:latin typeface="Arial" charset="0"/>
@@ -14280,7 +14603,7 @@
                           <a:ea typeface="Arial" pitchFamily="34" charset="-122"/>
                           <a:cs typeface="Arial" pitchFamily="34" charset="-120"/>
                         </a:rPr>
-                        <a:t>エアコンが古い、カードキータイプだが部屋にはカード入れがなく忘れそう、風呂の体を洗うタオルなし、朝食は団体客がいる...</a:t>
+                        <a:t>スムージーや期間限定メニュー！】などと大々的に銘打ってありましたが、実際にはチェックイン時に「工事期間のため簡単な...</a:t>
                       </a:r>
                       <a:endParaRPr lang="en-US" sz="900" dirty="0">
                         <a:latin typeface="Arial" charset="0"/>

--- a/納品レポート/ホテル別レポート/comfort_yokohama_kannai_口コミ分析レポート.pptx
+++ b/納品レポート/ホテル別レポート/comfort_yokohama_kannai_口コミ分析レポート.pptx
@@ -274,7 +274,7 @@
                 <c:formatCode>General</c:formatCode>
                 <c:ptCount val="6"/>
                 <c:pt idx="0">
-                  <c:v>8.32</c:v>
+                  <c:v>8.44</c:v>
                 </c:pt>
                 <c:pt idx="1">
                   <c:v>8</c:v>
@@ -283,13 +283,13 @@
                   <c:v>7.58</c:v>
                 </c:pt>
                 <c:pt idx="3">
-                  <c:v>7.48</c:v>
+                  <c:v>7.52</c:v>
                 </c:pt>
                 <c:pt idx="4">
-                  <c:v>7.26</c:v>
+                  <c:v>7.2</c:v>
                 </c:pt>
                 <c:pt idx="5">
-                  <c:v>7</c:v>
+                  <c:v>7.1</c:v>
                 </c:pt>
               </c:numCache>
             </c:numRef>
@@ -642,7 +642,7 @@
                 <c:formatCode>General</c:formatCode>
                 <c:ptCount val="9"/>
                 <c:pt idx="0">
-                  <c:v>34</c:v>
+                  <c:v>35</c:v>
                 </c:pt>
                 <c:pt idx="1">
                   <c:v>8</c:v>
@@ -654,7 +654,7 @@
                   <c:v>6</c:v>
                 </c:pt>
                 <c:pt idx="4">
-                  <c:v>18</c:v>
+                  <c:v>17</c:v>
                 </c:pt>
                 <c:pt idx="5">
                   <c:v>5</c:v>
@@ -2834,7 +2834,7 @@
                 <a:ea typeface="Arial" pitchFamily="34" charset="-122"/>
                 <a:cs typeface="Arial" pitchFamily="34" charset="-120"/>
               </a:rPr>
-              <a:t>コンフォートホテル横浜関内は全体平均7.52点（10pt換算）、高評価率67.1%を達成しています。本レポートで示した改善施策を段階的に実施することで、さらなる顧客満足度向上が期待できます。</a:t>
+              <a:t>コンフォートホテル横浜関内は全体平均7.55点（10pt換算）、高評価率67.8%を達成しています。本レポートで示した改善施策を段階的に実施することで、さらなる顧客満足度向上が期待できます。</a:t>
             </a:r>
             <a:endParaRPr lang="en-US" sz="1200" dirty="0"/>
           </a:p>
@@ -3271,7 +3271,7 @@
                 <a:ea typeface="Arial" pitchFamily="34" charset="-122"/>
                 <a:cs typeface="Arial" pitchFamily="34" charset="-120"/>
               </a:rPr>
-              <a:t>7.52</a:t>
+              <a:t>7.55</a:t>
             </a:r>
             <a:endParaRPr lang="en-US" sz="2800" dirty="0"/>
           </a:p>
@@ -3389,7 +3389,7 @@
                 <a:ea typeface="Arial" pitchFamily="34" charset="-122"/>
                 <a:cs typeface="Arial" pitchFamily="34" charset="-120"/>
               </a:rPr>
-              <a:t>67.1%</a:t>
+              <a:t>67.8%</a:t>
             </a:r>
             <a:endParaRPr lang="en-US" sz="2800" dirty="0"/>
           </a:p>
@@ -4364,7 +4364,7 @@
                           <a:ea typeface="Arial" pitchFamily="34" charset="-122"/>
                           <a:cs typeface="Arial" pitchFamily="34" charset="-120"/>
                         </a:rPr>
-                        <a:t>19</a:t>
+                        <a:t>18</a:t>
                       </a:r>
                       <a:endParaRPr lang="en-US" sz="800" dirty="0">
                         <a:latin typeface="Arial" charset="0"/>
@@ -4432,7 +4432,7 @@
                           <a:ea typeface="Arial" pitchFamily="34" charset="-122"/>
                           <a:cs typeface="Arial" pitchFamily="34" charset="-120"/>
                         </a:rPr>
-                        <a:t>8.32/10</a:t>
+                        <a:t>8.44/10</a:t>
                       </a:r>
                       <a:endParaRPr lang="en-US" sz="800" dirty="0">
                         <a:latin typeface="Arial" charset="0"/>
@@ -4500,7 +4500,7 @@
                           <a:ea typeface="Arial" pitchFamily="34" charset="-122"/>
                           <a:cs typeface="Arial" pitchFamily="34" charset="-120"/>
                         </a:rPr>
-                        <a:t>8.32</a:t>
+                        <a:t>8.44</a:t>
                       </a:r>
                       <a:endParaRPr lang="en-US" sz="800" dirty="0">
                         <a:latin typeface="Arial" charset="0"/>
@@ -4706,7 +4706,7 @@
                           <a:ea typeface="Arial" pitchFamily="34" charset="-122"/>
                           <a:cs typeface="Arial" pitchFamily="34" charset="-120"/>
                         </a:rPr>
-                        <a:t>11</a:t>
+                        <a:t>10</a:t>
                       </a:r>
                       <a:endParaRPr lang="en-US" sz="800" dirty="0">
                         <a:latin typeface="Arial" charset="0"/>
@@ -5458,7 +5458,7 @@
                           <a:ea typeface="Arial" pitchFamily="34" charset="-122"/>
                           <a:cs typeface="Arial" pitchFamily="34" charset="-120"/>
                         </a:rPr>
-                        <a:t>3.74/5</a:t>
+                        <a:t>3.76/5</a:t>
                       </a:r>
                       <a:endParaRPr lang="en-US" sz="800" dirty="0">
                         <a:latin typeface="Arial" charset="0"/>
@@ -5526,7 +5526,7 @@
                           <a:ea typeface="Arial" pitchFamily="34" charset="-122"/>
                           <a:cs typeface="Arial" pitchFamily="34" charset="-120"/>
                         </a:rPr>
-                        <a:t>7.48</a:t>
+                        <a:t>7.52</a:t>
                       </a:r>
                       <a:endParaRPr lang="en-US" sz="800" dirty="0">
                         <a:latin typeface="Arial" charset="0"/>
@@ -5732,7 +5732,7 @@
                           <a:ea typeface="Arial" pitchFamily="34" charset="-122"/>
                           <a:cs typeface="Arial" pitchFamily="34" charset="-120"/>
                         </a:rPr>
-                        <a:t>19</a:t>
+                        <a:t>20</a:t>
                       </a:r>
                       <a:endParaRPr lang="en-US" sz="800" dirty="0">
                         <a:latin typeface="Arial" charset="0"/>
@@ -5800,7 +5800,7 @@
                           <a:ea typeface="Arial" pitchFamily="34" charset="-122"/>
                           <a:cs typeface="Arial" pitchFamily="34" charset="-120"/>
                         </a:rPr>
-                        <a:t>3.63/5</a:t>
+                        <a:t>3.60/5</a:t>
                       </a:r>
                       <a:endParaRPr lang="en-US" sz="800" dirty="0">
                         <a:latin typeface="Arial" charset="0"/>
@@ -5868,7 +5868,7 @@
                           <a:ea typeface="Arial" pitchFamily="34" charset="-122"/>
                           <a:cs typeface="Arial" pitchFamily="34" charset="-120"/>
                         </a:rPr>
-                        <a:t>7.26</a:t>
+                        <a:t>7.20</a:t>
                       </a:r>
                       <a:endParaRPr lang="en-US" sz="800" dirty="0">
                         <a:latin typeface="Arial" charset="0"/>
@@ -6074,7 +6074,7 @@
                           <a:ea typeface="Arial" pitchFamily="34" charset="-122"/>
                           <a:cs typeface="Arial" pitchFamily="34" charset="-120"/>
                         </a:rPr>
-                        <a:t>28</a:t>
+                        <a:t>29</a:t>
                       </a:r>
                       <a:endParaRPr lang="en-US" sz="800" dirty="0">
                         <a:latin typeface="Arial" charset="0"/>
@@ -6142,7 +6142,7 @@
                           <a:ea typeface="Arial" pitchFamily="34" charset="-122"/>
                           <a:cs typeface="Arial" pitchFamily="34" charset="-120"/>
                         </a:rPr>
-                        <a:t>7.00/10</a:t>
+                        <a:t>7.10/10</a:t>
                       </a:r>
                       <a:endParaRPr lang="en-US" sz="800" dirty="0">
                         <a:latin typeface="Arial" charset="0"/>
@@ -6210,7 +6210,7 @@
                           <a:ea typeface="Arial" pitchFamily="34" charset="-122"/>
                           <a:cs typeface="Arial" pitchFamily="34" charset="-120"/>
                         </a:rPr>
-                        <a:t>7.00</a:t>
+                        <a:t>7.10</a:t>
                       </a:r>
                       <a:endParaRPr lang="en-US" sz="800" dirty="0">
                         <a:latin typeface="Arial" charset="0"/>
@@ -6663,7 +6663,7 @@
                 <a:ea typeface="Arial" pitchFamily="34" charset="-122"/>
                 <a:cs typeface="Arial" pitchFamily="34" charset="-120"/>
               </a:rPr>
-              <a:t>96件（67.1%）</a:t>
+              <a:t>97件（67.8%）</a:t>
             </a:r>
             <a:endParaRPr lang="en-US" sz="1600" dirty="0"/>
           </a:p>
@@ -6761,7 +6761,7 @@
                 <a:ea typeface="Arial" pitchFamily="34" charset="-122"/>
                 <a:cs typeface="Arial" pitchFamily="34" charset="-120"/>
               </a:rPr>
-              <a:t>29件（20.3%）</a:t>
+              <a:t>28件（19.6%）</a:t>
             </a:r>
             <a:endParaRPr lang="en-US" sz="1600" dirty="0"/>
           </a:p>
@@ -7021,7 +7021,7 @@
                 <a:ea typeface="Arial" pitchFamily="34" charset="-122"/>
                 <a:cs typeface="Arial" pitchFamily="34" charset="-120"/>
               </a:rPr>
-              <a:t>高評価レビュー（8-10点: 96件）の分析から、主要な強みテーマを抽出しています。立地・アクセス、客室清潔感、スタッフ対応が高評価の中心的テーマです。</a:t>
+              <a:t>高評価レビュー（8-10点: 97件）の分析から、主要な強みテーマを抽出しています。立地・アクセス、客室清潔感、スタッフ対応が高評価の中心的テーマです。</a:t>
             </a:r>
             <a:endParaRPr lang="en-US" sz="1200" dirty="0"/>
           </a:p>
@@ -7281,7 +7281,7 @@
                 <a:ea typeface="Arial" pitchFamily="34" charset="-122"/>
                 <a:cs typeface="Arial" pitchFamily="34" charset="-120"/>
               </a:rPr>
-              <a:t>低評価・中評価レビュー（47件）から改善課題を優先度別に整理しています。S/A/B/Cの4段階で優先度を設定し、計画的な改善を推進します。</a:t>
+              <a:t>低評価・中評価レビュー（46件）から改善課題を優先度別に整理しています。S/A/B/Cの4段階で優先度を設定し、計画的な改善を推進します。</a:t>
             </a:r>
             <a:endParaRPr lang="en-US" sz="1200" dirty="0"/>
           </a:p>
@@ -8061,7 +8061,7 @@
                 <a:ea typeface="Arial" pitchFamily="34" charset="-122"/>
                 <a:cs typeface="Arial" pitchFamily="34" charset="-120"/>
               </a:rPr>
-              <a:t>全体平均 7.52点 → 目標 8.02点</a:t>
+              <a:t>全体平均 7.55点 → 目標 8.05点</a:t>
             </a:r>
             <a:endParaRPr lang="en-US" sz="1200" dirty="0"/>
           </a:p>
@@ -8078,7 +8078,7 @@
                 <a:ea typeface="Arial" pitchFamily="34" charset="-122"/>
                 <a:cs typeface="Arial" pitchFamily="34" charset="-120"/>
               </a:rPr>
-              <a:t>高評価率 67.1% → 目標 72.1%</a:t>
+              <a:t>高評価率 67.8% → 目標 72.8%</a:t>
             </a:r>
             <a:endParaRPr lang="en-US" sz="1200" dirty="0"/>
           </a:p>

--- a/納品レポート/ホテル別レポート/comfort_yokohama_kannai_口コミ分析レポート.pptx
+++ b/納品レポート/ホテル別レポート/comfort_yokohama_kannai_口コミ分析レポート.pptx
@@ -274,16 +274,16 @@
                 <c:formatCode>General</c:formatCode>
                 <c:ptCount val="6"/>
                 <c:pt idx="0">
-                  <c:v>8.44</c:v>
+                  <c:v>8.35</c:v>
                 </c:pt>
                 <c:pt idx="1">
                   <c:v>8</c:v>
                 </c:pt>
                 <c:pt idx="2">
-                  <c:v>7.58</c:v>
+                  <c:v>7.57</c:v>
                 </c:pt>
                 <c:pt idx="3">
-                  <c:v>7.52</c:v>
+                  <c:v>7.56</c:v>
                 </c:pt>
                 <c:pt idx="4">
                   <c:v>7.2</c:v>
@@ -642,31 +642,31 @@
                 <c:formatCode>General</c:formatCode>
                 <c:ptCount val="9"/>
                 <c:pt idx="0">
-                  <c:v>35</c:v>
+                  <c:v>36</c:v>
                 </c:pt>
                 <c:pt idx="1">
                   <c:v>8</c:v>
                 </c:pt>
                 <c:pt idx="2">
-                  <c:v>54</c:v>
+                  <c:v>52</c:v>
                 </c:pt>
                 <c:pt idx="3">
                   <c:v>6</c:v>
                 </c:pt>
                 <c:pt idx="4">
-                  <c:v>17</c:v>
+                  <c:v>18</c:v>
                 </c:pt>
                 <c:pt idx="5">
                   <c:v>5</c:v>
                 </c:pt>
                 <c:pt idx="6">
-                  <c:v>10</c:v>
+                  <c:v>9</c:v>
                 </c:pt>
                 <c:pt idx="7">
                   <c:v>1</c:v>
                 </c:pt>
                 <c:pt idx="8">
-                  <c:v>7</c:v>
+                  <c:v>8</c:v>
                 </c:pt>
               </c:numCache>
             </c:numRef>
@@ -2834,7 +2834,7 @@
                 <a:ea typeface="Arial" pitchFamily="34" charset="-122"/>
                 <a:cs typeface="Arial" pitchFamily="34" charset="-120"/>
               </a:rPr>
-              <a:t>コンフォートホテル横浜関内は全体平均7.55点（10pt換算）、高評価率67.8%を達成しています。本レポートで示した改善施策を段階的に実施することで、さらなる顧客満足度向上が期待できます。</a:t>
+              <a:t>コンフォートホテル横浜関内は全体平均7.54点（10pt換算）、高評価率67.1%を達成しています。本レポートで示した改善施策を段階的に実施することで、さらなる顧客満足度向上が期待できます。</a:t>
             </a:r>
             <a:endParaRPr lang="en-US" sz="1200" dirty="0"/>
           </a:p>
@@ -3271,7 +3271,7 @@
                 <a:ea typeface="Arial" pitchFamily="34" charset="-122"/>
                 <a:cs typeface="Arial" pitchFamily="34" charset="-120"/>
               </a:rPr>
-              <a:t>7.55</a:t>
+              <a:t>7.54</a:t>
             </a:r>
             <a:endParaRPr lang="en-US" sz="2800" dirty="0"/>
           </a:p>
@@ -3389,7 +3389,7 @@
                 <a:ea typeface="Arial" pitchFamily="34" charset="-122"/>
                 <a:cs typeface="Arial" pitchFamily="34" charset="-120"/>
               </a:rPr>
-              <a:t>67.8%</a:t>
+              <a:t>67.1%</a:t>
             </a:r>
             <a:endParaRPr lang="en-US" sz="2800" dirty="0"/>
           </a:p>
@@ -4364,7 +4364,7 @@
                           <a:ea typeface="Arial" pitchFamily="34" charset="-122"/>
                           <a:cs typeface="Arial" pitchFamily="34" charset="-120"/>
                         </a:rPr>
-                        <a:t>18</a:t>
+                        <a:t>17</a:t>
                       </a:r>
                       <a:endParaRPr lang="en-US" sz="800" dirty="0">
                         <a:latin typeface="Arial" charset="0"/>
@@ -4432,7 +4432,7 @@
                           <a:ea typeface="Arial" pitchFamily="34" charset="-122"/>
                           <a:cs typeface="Arial" pitchFamily="34" charset="-120"/>
                         </a:rPr>
-                        <a:t>8.44/10</a:t>
+                        <a:t>8.35/10</a:t>
                       </a:r>
                       <a:endParaRPr lang="en-US" sz="800" dirty="0">
                         <a:latin typeface="Arial" charset="0"/>
@@ -4500,7 +4500,7 @@
                           <a:ea typeface="Arial" pitchFamily="34" charset="-122"/>
                           <a:cs typeface="Arial" pitchFamily="34" charset="-120"/>
                         </a:rPr>
-                        <a:t>8.44</a:t>
+                        <a:t>8.35</a:t>
                       </a:r>
                       <a:endParaRPr lang="en-US" sz="800" dirty="0">
                         <a:latin typeface="Arial" charset="0"/>
@@ -4706,7 +4706,7 @@
                           <a:ea typeface="Arial" pitchFamily="34" charset="-122"/>
                           <a:cs typeface="Arial" pitchFamily="34" charset="-120"/>
                         </a:rPr>
-                        <a:t>10</a:t>
+                        <a:t>9</a:t>
                       </a:r>
                       <a:endParaRPr lang="en-US" sz="800" dirty="0">
                         <a:latin typeface="Arial" charset="0"/>
@@ -5048,7 +5048,7 @@
                           <a:ea typeface="Arial" pitchFamily="34" charset="-122"/>
                           <a:cs typeface="Arial" pitchFamily="34" charset="-120"/>
                         </a:rPr>
-                        <a:t>24</a:t>
+                        <a:t>23</a:t>
                       </a:r>
                       <a:endParaRPr lang="en-US" sz="800" dirty="0">
                         <a:latin typeface="Arial" charset="0"/>
@@ -5116,7 +5116,7 @@
                           <a:ea typeface="Arial" pitchFamily="34" charset="-122"/>
                           <a:cs typeface="Arial" pitchFamily="34" charset="-120"/>
                         </a:rPr>
-                        <a:t>3.79/5</a:t>
+                        <a:t>3.78/5</a:t>
                       </a:r>
                       <a:endParaRPr lang="en-US" sz="800" dirty="0">
                         <a:latin typeface="Arial" charset="0"/>
@@ -5184,7 +5184,7 @@
                           <a:ea typeface="Arial" pitchFamily="34" charset="-122"/>
                           <a:cs typeface="Arial" pitchFamily="34" charset="-120"/>
                         </a:rPr>
-                        <a:t>7.58</a:t>
+                        <a:t>7.57</a:t>
                       </a:r>
                       <a:endParaRPr lang="en-US" sz="800" dirty="0">
                         <a:latin typeface="Arial" charset="0"/>
@@ -5390,7 +5390,7 @@
                           <a:ea typeface="Arial" pitchFamily="34" charset="-122"/>
                           <a:cs typeface="Arial" pitchFamily="34" charset="-120"/>
                         </a:rPr>
-                        <a:t>42</a:t>
+                        <a:t>45</a:t>
                       </a:r>
                       <a:endParaRPr lang="en-US" sz="800" dirty="0">
                         <a:latin typeface="Arial" charset="0"/>
@@ -5458,7 +5458,7 @@
                           <a:ea typeface="Arial" pitchFamily="34" charset="-122"/>
                           <a:cs typeface="Arial" pitchFamily="34" charset="-120"/>
                         </a:rPr>
-                        <a:t>3.76/5</a:t>
+                        <a:t>3.78/5</a:t>
                       </a:r>
                       <a:endParaRPr lang="en-US" sz="800" dirty="0">
                         <a:latin typeface="Arial" charset="0"/>
@@ -5526,7 +5526,7 @@
                           <a:ea typeface="Arial" pitchFamily="34" charset="-122"/>
                           <a:cs typeface="Arial" pitchFamily="34" charset="-120"/>
                         </a:rPr>
-                        <a:t>7.52</a:t>
+                        <a:t>7.56</a:t>
                       </a:r>
                       <a:endParaRPr lang="en-US" sz="800" dirty="0">
                         <a:latin typeface="Arial" charset="0"/>
@@ -6663,7 +6663,7 @@
                 <a:ea typeface="Arial" pitchFamily="34" charset="-122"/>
                 <a:cs typeface="Arial" pitchFamily="34" charset="-120"/>
               </a:rPr>
-              <a:t>97件（67.8%）</a:t>
+              <a:t>96件（67.1%）</a:t>
             </a:r>
             <a:endParaRPr lang="en-US" sz="1600" dirty="0"/>
           </a:p>
@@ -6761,7 +6761,7 @@
                 <a:ea typeface="Arial" pitchFamily="34" charset="-122"/>
                 <a:cs typeface="Arial" pitchFamily="34" charset="-120"/>
               </a:rPr>
-              <a:t>28件（19.6%）</a:t>
+              <a:t>29件（20.3%）</a:t>
             </a:r>
             <a:endParaRPr lang="en-US" sz="1600" dirty="0"/>
           </a:p>
@@ -7021,7 +7021,7 @@
                 <a:ea typeface="Arial" pitchFamily="34" charset="-122"/>
                 <a:cs typeface="Arial" pitchFamily="34" charset="-120"/>
               </a:rPr>
-              <a:t>高評価レビュー（8-10点: 97件）の分析から、主要な強みテーマを抽出しています。立地・アクセス、客室清潔感、スタッフ対応が高評価の中心的テーマです。</a:t>
+              <a:t>高評価レビュー（8-10点: 96件）の分析から、主要な強みテーマを抽出しています。立地・アクセス、客室清潔感、スタッフ対応が高評価の中心的テーマです。</a:t>
             </a:r>
             <a:endParaRPr lang="en-US" sz="1200" dirty="0"/>
           </a:p>
@@ -7281,7 +7281,7 @@
                 <a:ea typeface="Arial" pitchFamily="34" charset="-122"/>
                 <a:cs typeface="Arial" pitchFamily="34" charset="-120"/>
               </a:rPr>
-              <a:t>低評価・中評価レビュー（46件）から改善課題を優先度別に整理しています。S/A/B/Cの4段階で優先度を設定し、計画的な改善を推進します。</a:t>
+              <a:t>低評価・中評価レビュー（47件）から改善課題を優先度別に整理しています。S/A/B/Cの4段階で優先度を設定し、計画的な改善を推進します。</a:t>
             </a:r>
             <a:endParaRPr lang="en-US" sz="1200" dirty="0"/>
           </a:p>
@@ -8061,7 +8061,7 @@
                 <a:ea typeface="Arial" pitchFamily="34" charset="-122"/>
                 <a:cs typeface="Arial" pitchFamily="34" charset="-120"/>
               </a:rPr>
-              <a:t>全体平均 7.55点 → 目標 8.05点</a:t>
+              <a:t>全体平均 7.54点 → 目標 8.04点</a:t>
             </a:r>
             <a:endParaRPr lang="en-US" sz="1200" dirty="0"/>
           </a:p>
@@ -8078,7 +8078,7 @@
                 <a:ea typeface="Arial" pitchFamily="34" charset="-122"/>
                 <a:cs typeface="Arial" pitchFamily="34" charset="-120"/>
               </a:rPr>
-              <a:t>高評価率 67.8% → 目標 72.8%</a:t>
+              <a:t>高評価率 67.1% → 目標 72.1%</a:t>
             </a:r>
             <a:endParaRPr lang="en-US" sz="1200" dirty="0"/>
           </a:p>

--- a/納品レポート/ホテル別レポート/comfort_yokohama_kannai_口コミ分析レポート.pptx
+++ b/納品レポート/ホテル別レポート/comfort_yokohama_kannai_口コミ分析レポート.pptx
@@ -258,10 +258,10 @@
                     <c:v>楽天トラベル</c:v>
                   </c:pt>
                   <c:pt idx="4">
-                    <c:v>じゃらん</c:v>
+                    <c:v>Booking.com</c:v>
                   </c:pt>
                   <c:pt idx="5">
-                    <c:v>Booking.com</c:v>
+                    <c:v>じゃらん</c:v>
                   </c:pt>
                 </c:lvl>
               </c:multiLvlStrCache>
@@ -283,13 +283,13 @@
                   <c:v>7.57</c:v>
                 </c:pt>
                 <c:pt idx="3">
-                  <c:v>7.56</c:v>
+                  <c:v>7.57</c:v>
                 </c:pt>
                 <c:pt idx="4">
-                  <c:v>7.2</c:v>
+                  <c:v>7.25</c:v>
                 </c:pt>
                 <c:pt idx="5">
-                  <c:v>7.1</c:v>
+                  <c:v>7.2</c:v>
                 </c:pt>
               </c:numCache>
             </c:numRef>
@@ -587,22 +587,11 @@
               <a:effectLst/>
             </c:spPr>
           </c:dPt>
-          <c:dPt>
-            <c:idx val="8"/>
-            <c:invertIfNegative val="0"/>
-            <c:bubble3D val="0"/>
-            <c:spPr>
-              <a:solidFill>
-                <a:srgbClr val="DC2626"/>
-              </a:solidFill>
-              <a:effectLst/>
-            </c:spPr>
-          </c:dPt>
           <c:cat>
             <c:multiLvlStrRef>
-              <c:f>Sheet1!$A$2:$A$10</c:f>
+              <c:f>Sheet1!$A$2:$A$9</c:f>
               <c:multiLvlStrCache>
-                <c:ptCount val="9"/>
+                <c:ptCount val="8"/>
                 <c:lvl>
                   <c:pt idx="0">
                     <c:v>10点</c:v>
@@ -626,9 +615,6 @@
                     <c:v>4点</c:v>
                   </c:pt>
                   <c:pt idx="7">
-                    <c:v>3点</c:v>
-                  </c:pt>
-                  <c:pt idx="8">
                     <c:v>2点</c:v>
                   </c:pt>
                 </c:lvl>
@@ -637,10 +623,10 @@
           </c:cat>
           <c:val>
             <c:numRef>
-              <c:f>Sheet1!$B$2:$B$10</c:f>
+              <c:f>Sheet1!$B$2:$B$9</c:f>
               <c:numCache>
                 <c:formatCode>General</c:formatCode>
-                <c:ptCount val="9"/>
+                <c:ptCount val="8"/>
                 <c:pt idx="0">
                   <c:v>36</c:v>
                 </c:pt>
@@ -648,7 +634,7 @@
                   <c:v>8</c:v>
                 </c:pt>
                 <c:pt idx="2">
-                  <c:v>52</c:v>
+                  <c:v>53</c:v>
                 </c:pt>
                 <c:pt idx="3">
                   <c:v>6</c:v>
@@ -663,9 +649,6 @@
                   <c:v>9</c:v>
                 </c:pt>
                 <c:pt idx="7">
-                  <c:v>1</c:v>
-                </c:pt>
-                <c:pt idx="8">
                   <c:v>8</c:v>
                 </c:pt>
               </c:numCache>
@@ -2834,7 +2817,7 @@
                 <a:ea typeface="Arial" pitchFamily="34" charset="-122"/>
                 <a:cs typeface="Arial" pitchFamily="34" charset="-120"/>
               </a:rPr>
-              <a:t>コンフォートホテル横浜関内は全体平均7.54点（10pt換算）、高評価率67.1%を達成しています。本レポートで示した改善施策を段階的に実施することで、さらなる顧客満足度向上が期待できます。</a:t>
+              <a:t>コンフォートホテル横浜関内は全体平均7.57点（10pt換算）、高評価率67.8%を達成しています。本レポートで示した改善施策を段階的に実施することで、さらなる顧客満足度向上が期待できます。</a:t>
             </a:r>
             <a:endParaRPr lang="en-US" sz="1200" dirty="0"/>
           </a:p>
@@ -3271,7 +3254,7 @@
                 <a:ea typeface="Arial" pitchFamily="34" charset="-122"/>
                 <a:cs typeface="Arial" pitchFamily="34" charset="-120"/>
               </a:rPr>
-              <a:t>7.54</a:t>
+              <a:t>7.57</a:t>
             </a:r>
             <a:endParaRPr lang="en-US" sz="2800" dirty="0"/>
           </a:p>
@@ -3389,7 +3372,7 @@
                 <a:ea typeface="Arial" pitchFamily="34" charset="-122"/>
                 <a:cs typeface="Arial" pitchFamily="34" charset="-120"/>
               </a:rPr>
-              <a:t>67.1%</a:t>
+              <a:t>67.8%</a:t>
             </a:r>
             <a:endParaRPr lang="en-US" sz="2800" dirty="0"/>
           </a:p>
@@ -3507,7 +3490,7 @@
                 <a:ea typeface="Arial" pitchFamily="34" charset="-122"/>
                 <a:cs typeface="Arial" pitchFamily="34" charset="-120"/>
               </a:rPr>
-              <a:t>12.6%</a:t>
+              <a:t>11.9%</a:t>
             </a:r>
             <a:endParaRPr lang="en-US" sz="2800" dirty="0"/>
           </a:p>
@@ -5390,7 +5373,7 @@
                           <a:ea typeface="Arial" pitchFamily="34" charset="-122"/>
                           <a:cs typeface="Arial" pitchFamily="34" charset="-120"/>
                         </a:rPr>
-                        <a:t>45</a:t>
+                        <a:t>46</a:t>
                       </a:r>
                       <a:endParaRPr lang="en-US" sz="800" dirty="0">
                         <a:latin typeface="Arial" charset="0"/>
@@ -5526,7 +5509,349 @@
                           <a:ea typeface="Arial" pitchFamily="34" charset="-122"/>
                           <a:cs typeface="Arial" pitchFamily="34" charset="-120"/>
                         </a:rPr>
-                        <a:t>7.56</a:t>
+                        <a:t>7.57</a:t>
+                      </a:r>
+                      <a:endParaRPr lang="en-US" sz="800" dirty="0">
+                        <a:latin typeface="Arial" charset="0"/>
+                        <a:ea typeface="Arial" charset="0"/>
+                        <a:cs typeface="Arial" charset="0"/>
+                      </a:endParaRPr>
+                    </a:p>
+                  </a:txBody>
+                  <a:tcPr marL="91440" marR="91440" marT="45720" marB="45720">
+                    <a:lnL w="6350" cap="flat" cmpd="sng" algn="ctr">
+                      <a:solidFill>
+                        <a:srgbClr val="CCCCCC"/>
+                      </a:solidFill>
+                      <a:prstDash val="solid"/>
+                      <a:round/>
+                      <a:headEnd type="none" w="med" len="med"/>
+                      <a:tailEnd type="none" w="med" len="med"/>
+                    </a:lnL>
+                    <a:lnR w="6350" cap="flat" cmpd="sng" algn="ctr">
+                      <a:solidFill>
+                        <a:srgbClr val="CCCCCC"/>
+                      </a:solidFill>
+                      <a:prstDash val="solid"/>
+                      <a:round/>
+                      <a:headEnd type="none" w="med" len="med"/>
+                      <a:tailEnd type="none" w="med" len="med"/>
+                    </a:lnR>
+                    <a:lnT w="6350" cap="flat" cmpd="sng" algn="ctr">
+                      <a:solidFill>
+                        <a:srgbClr val="CCCCCC"/>
+                      </a:solidFill>
+                      <a:prstDash val="solid"/>
+                      <a:round/>
+                      <a:headEnd type="none" w="med" len="med"/>
+                      <a:tailEnd type="none" w="med" len="med"/>
+                    </a:lnT>
+                    <a:lnB w="6350" cap="flat" cmpd="sng" algn="ctr">
+                      <a:solidFill>
+                        <a:srgbClr val="CCCCCC"/>
+                      </a:solidFill>
+                      <a:prstDash val="solid"/>
+                      <a:round/>
+                      <a:headEnd type="none" w="med" len="med"/>
+                      <a:tailEnd type="none" w="med" len="med"/>
+                    </a:lnB>
+                    <a:solidFill>
+                      <a:srgbClr val="FFFFFF"/>
+                    </a:solidFill>
+                  </a:tcPr>
+                </a:tc>
+                <a:tc>
+                  <a:txBody>
+                    <a:bodyPr/>
+                    <a:lstStyle/>
+                    <a:p>
+                      <a:pPr algn="ctr" indent="0" marL="0">
+                        <a:buNone/>
+                      </a:pPr>
+                      <a:r>
+                        <a:rPr lang="en-US" sz="800" dirty="0">
+                          <a:solidFill>
+                            <a:srgbClr val="000000"/>
+                          </a:solidFill>
+                          <a:latin typeface="Arial" pitchFamily="34" charset="0"/>
+                          <a:ea typeface="Arial" pitchFamily="34" charset="-122"/>
+                          <a:cs typeface="Arial" pitchFamily="34" charset="-120"/>
+                        </a:rPr>
+                        <a:t>概ね良好</a:t>
+                      </a:r>
+                      <a:endParaRPr lang="en-US" sz="800" dirty="0">
+                        <a:latin typeface="Arial" charset="0"/>
+                        <a:ea typeface="Arial" charset="0"/>
+                        <a:cs typeface="Arial" charset="0"/>
+                      </a:endParaRPr>
+                    </a:p>
+                  </a:txBody>
+                  <a:tcPr marL="91440" marR="91440" marT="45720" marB="45720">
+                    <a:lnL w="6350" cap="flat" cmpd="sng" algn="ctr">
+                      <a:solidFill>
+                        <a:srgbClr val="CCCCCC"/>
+                      </a:solidFill>
+                      <a:prstDash val="solid"/>
+                      <a:round/>
+                      <a:headEnd type="none" w="med" len="med"/>
+                      <a:tailEnd type="none" w="med" len="med"/>
+                    </a:lnL>
+                    <a:lnR w="6350" cap="flat" cmpd="sng" algn="ctr">
+                      <a:solidFill>
+                        <a:srgbClr val="CCCCCC"/>
+                      </a:solidFill>
+                      <a:prstDash val="solid"/>
+                      <a:round/>
+                      <a:headEnd type="none" w="med" len="med"/>
+                      <a:tailEnd type="none" w="med" len="med"/>
+                    </a:lnR>
+                    <a:lnT w="6350" cap="flat" cmpd="sng" algn="ctr">
+                      <a:solidFill>
+                        <a:srgbClr val="CCCCCC"/>
+                      </a:solidFill>
+                      <a:prstDash val="solid"/>
+                      <a:round/>
+                      <a:headEnd type="none" w="med" len="med"/>
+                      <a:tailEnd type="none" w="med" len="med"/>
+                    </a:lnT>
+                    <a:lnB w="6350" cap="flat" cmpd="sng" algn="ctr">
+                      <a:solidFill>
+                        <a:srgbClr val="CCCCCC"/>
+                      </a:solidFill>
+                      <a:prstDash val="solid"/>
+                      <a:round/>
+                      <a:headEnd type="none" w="med" len="med"/>
+                      <a:tailEnd type="none" w="med" len="med"/>
+                    </a:lnB>
+                    <a:solidFill>
+                      <a:srgbClr val="FFFFFF"/>
+                    </a:solidFill>
+                  </a:tcPr>
+                </a:tc>
+              </a:tr>
+              <a:tr h="0">
+                <a:tc>
+                  <a:txBody>
+                    <a:bodyPr/>
+                    <a:lstStyle/>
+                    <a:p>
+                      <a:pPr algn="ctr" indent="0" marL="0">
+                        <a:buNone/>
+                      </a:pPr>
+                      <a:r>
+                        <a:rPr lang="en-US" sz="800" dirty="0">
+                          <a:solidFill>
+                            <a:srgbClr val="000000"/>
+                          </a:solidFill>
+                          <a:latin typeface="Arial" pitchFamily="34" charset="0"/>
+                          <a:ea typeface="Arial" pitchFamily="34" charset="-122"/>
+                          <a:cs typeface="Arial" pitchFamily="34" charset="-120"/>
+                        </a:rPr>
+                        <a:t>Booking.com</a:t>
+                      </a:r>
+                      <a:endParaRPr lang="en-US" sz="800" dirty="0">
+                        <a:latin typeface="Arial" charset="0"/>
+                        <a:ea typeface="Arial" charset="0"/>
+                        <a:cs typeface="Arial" charset="0"/>
+                      </a:endParaRPr>
+                    </a:p>
+                  </a:txBody>
+                  <a:tcPr marL="91440" marR="91440" marT="45720" marB="45720">
+                    <a:lnL w="6350" cap="flat" cmpd="sng" algn="ctr">
+                      <a:solidFill>
+                        <a:srgbClr val="CCCCCC"/>
+                      </a:solidFill>
+                      <a:prstDash val="solid"/>
+                      <a:round/>
+                      <a:headEnd type="none" w="med" len="med"/>
+                      <a:tailEnd type="none" w="med" len="med"/>
+                    </a:lnL>
+                    <a:lnR w="6350" cap="flat" cmpd="sng" algn="ctr">
+                      <a:solidFill>
+                        <a:srgbClr val="CCCCCC"/>
+                      </a:solidFill>
+                      <a:prstDash val="solid"/>
+                      <a:round/>
+                      <a:headEnd type="none" w="med" len="med"/>
+                      <a:tailEnd type="none" w="med" len="med"/>
+                    </a:lnR>
+                    <a:lnT w="6350" cap="flat" cmpd="sng" algn="ctr">
+                      <a:solidFill>
+                        <a:srgbClr val="CCCCCC"/>
+                      </a:solidFill>
+                      <a:prstDash val="solid"/>
+                      <a:round/>
+                      <a:headEnd type="none" w="med" len="med"/>
+                      <a:tailEnd type="none" w="med" len="med"/>
+                    </a:lnT>
+                    <a:lnB w="6350" cap="flat" cmpd="sng" algn="ctr">
+                      <a:solidFill>
+                        <a:srgbClr val="CCCCCC"/>
+                      </a:solidFill>
+                      <a:prstDash val="solid"/>
+                      <a:round/>
+                      <a:headEnd type="none" w="med" len="med"/>
+                      <a:tailEnd type="none" w="med" len="med"/>
+                    </a:lnB>
+                    <a:solidFill>
+                      <a:srgbClr val="FFFFFF"/>
+                    </a:solidFill>
+                  </a:tcPr>
+                </a:tc>
+                <a:tc>
+                  <a:txBody>
+                    <a:bodyPr/>
+                    <a:lstStyle/>
+                    <a:p>
+                      <a:pPr algn="ctr" indent="0" marL="0">
+                        <a:buNone/>
+                      </a:pPr>
+                      <a:r>
+                        <a:rPr lang="en-US" sz="800" dirty="0">
+                          <a:solidFill>
+                            <a:srgbClr val="000000"/>
+                          </a:solidFill>
+                          <a:latin typeface="Arial" pitchFamily="34" charset="0"/>
+                          <a:ea typeface="Arial" pitchFamily="34" charset="-122"/>
+                          <a:cs typeface="Arial" pitchFamily="34" charset="-120"/>
+                        </a:rPr>
+                        <a:t>28</a:t>
+                      </a:r>
+                      <a:endParaRPr lang="en-US" sz="800" dirty="0">
+                        <a:latin typeface="Arial" charset="0"/>
+                        <a:ea typeface="Arial" charset="0"/>
+                        <a:cs typeface="Arial" charset="0"/>
+                      </a:endParaRPr>
+                    </a:p>
+                  </a:txBody>
+                  <a:tcPr marL="91440" marR="91440" marT="45720" marB="45720">
+                    <a:lnL w="6350" cap="flat" cmpd="sng" algn="ctr">
+                      <a:solidFill>
+                        <a:srgbClr val="CCCCCC"/>
+                      </a:solidFill>
+                      <a:prstDash val="solid"/>
+                      <a:round/>
+                      <a:headEnd type="none" w="med" len="med"/>
+                      <a:tailEnd type="none" w="med" len="med"/>
+                    </a:lnL>
+                    <a:lnR w="6350" cap="flat" cmpd="sng" algn="ctr">
+                      <a:solidFill>
+                        <a:srgbClr val="CCCCCC"/>
+                      </a:solidFill>
+                      <a:prstDash val="solid"/>
+                      <a:round/>
+                      <a:headEnd type="none" w="med" len="med"/>
+                      <a:tailEnd type="none" w="med" len="med"/>
+                    </a:lnR>
+                    <a:lnT w="6350" cap="flat" cmpd="sng" algn="ctr">
+                      <a:solidFill>
+                        <a:srgbClr val="CCCCCC"/>
+                      </a:solidFill>
+                      <a:prstDash val="solid"/>
+                      <a:round/>
+                      <a:headEnd type="none" w="med" len="med"/>
+                      <a:tailEnd type="none" w="med" len="med"/>
+                    </a:lnT>
+                    <a:lnB w="6350" cap="flat" cmpd="sng" algn="ctr">
+                      <a:solidFill>
+                        <a:srgbClr val="CCCCCC"/>
+                      </a:solidFill>
+                      <a:prstDash val="solid"/>
+                      <a:round/>
+                      <a:headEnd type="none" w="med" len="med"/>
+                      <a:tailEnd type="none" w="med" len="med"/>
+                    </a:lnB>
+                    <a:solidFill>
+                      <a:srgbClr val="FFFFFF"/>
+                    </a:solidFill>
+                  </a:tcPr>
+                </a:tc>
+                <a:tc>
+                  <a:txBody>
+                    <a:bodyPr/>
+                    <a:lstStyle/>
+                    <a:p>
+                      <a:pPr algn="ctr" indent="0" marL="0">
+                        <a:buNone/>
+                      </a:pPr>
+                      <a:r>
+                        <a:rPr lang="en-US" sz="800" dirty="0">
+                          <a:solidFill>
+                            <a:srgbClr val="000000"/>
+                          </a:solidFill>
+                          <a:latin typeface="Arial" pitchFamily="34" charset="0"/>
+                          <a:ea typeface="Arial" pitchFamily="34" charset="-122"/>
+                          <a:cs typeface="Arial" pitchFamily="34" charset="-120"/>
+                        </a:rPr>
+                        <a:t>7.25/10</a:t>
+                      </a:r>
+                      <a:endParaRPr lang="en-US" sz="800" dirty="0">
+                        <a:latin typeface="Arial" charset="0"/>
+                        <a:ea typeface="Arial" charset="0"/>
+                        <a:cs typeface="Arial" charset="0"/>
+                      </a:endParaRPr>
+                    </a:p>
+                  </a:txBody>
+                  <a:tcPr marL="91440" marR="91440" marT="45720" marB="45720">
+                    <a:lnL w="6350" cap="flat" cmpd="sng" algn="ctr">
+                      <a:solidFill>
+                        <a:srgbClr val="CCCCCC"/>
+                      </a:solidFill>
+                      <a:prstDash val="solid"/>
+                      <a:round/>
+                      <a:headEnd type="none" w="med" len="med"/>
+                      <a:tailEnd type="none" w="med" len="med"/>
+                    </a:lnL>
+                    <a:lnR w="6350" cap="flat" cmpd="sng" algn="ctr">
+                      <a:solidFill>
+                        <a:srgbClr val="CCCCCC"/>
+                      </a:solidFill>
+                      <a:prstDash val="solid"/>
+                      <a:round/>
+                      <a:headEnd type="none" w="med" len="med"/>
+                      <a:tailEnd type="none" w="med" len="med"/>
+                    </a:lnR>
+                    <a:lnT w="6350" cap="flat" cmpd="sng" algn="ctr">
+                      <a:solidFill>
+                        <a:srgbClr val="CCCCCC"/>
+                      </a:solidFill>
+                      <a:prstDash val="solid"/>
+                      <a:round/>
+                      <a:headEnd type="none" w="med" len="med"/>
+                      <a:tailEnd type="none" w="med" len="med"/>
+                    </a:lnT>
+                    <a:lnB w="6350" cap="flat" cmpd="sng" algn="ctr">
+                      <a:solidFill>
+                        <a:srgbClr val="CCCCCC"/>
+                      </a:solidFill>
+                      <a:prstDash val="solid"/>
+                      <a:round/>
+                      <a:headEnd type="none" w="med" len="med"/>
+                      <a:tailEnd type="none" w="med" len="med"/>
+                    </a:lnB>
+                    <a:solidFill>
+                      <a:srgbClr val="FFFFFF"/>
+                    </a:solidFill>
+                  </a:tcPr>
+                </a:tc>
+                <a:tc>
+                  <a:txBody>
+                    <a:bodyPr/>
+                    <a:lstStyle/>
+                    <a:p>
+                      <a:pPr algn="ctr" indent="0" marL="0">
+                        <a:buNone/>
+                      </a:pPr>
+                      <a:r>
+                        <a:rPr lang="en-US" sz="800" dirty="0">
+                          <a:solidFill>
+                            <a:srgbClr val="000000"/>
+                          </a:solidFill>
+                          <a:latin typeface="Arial" pitchFamily="34" charset="0"/>
+                          <a:ea typeface="Arial" pitchFamily="34" charset="-122"/>
+                          <a:cs typeface="Arial" pitchFamily="34" charset="-120"/>
+                        </a:rPr>
+                        <a:t>7.25</a:t>
                       </a:r>
                       <a:endParaRPr lang="en-US" sz="800" dirty="0">
                         <a:latin typeface="Arial" charset="0"/>
@@ -5988,348 +6313,6 @@
                   </a:tcPr>
                 </a:tc>
               </a:tr>
-              <a:tr h="0">
-                <a:tc>
-                  <a:txBody>
-                    <a:bodyPr/>
-                    <a:lstStyle/>
-                    <a:p>
-                      <a:pPr algn="ctr" indent="0" marL="0">
-                        <a:buNone/>
-                      </a:pPr>
-                      <a:r>
-                        <a:rPr lang="en-US" sz="800" dirty="0">
-                          <a:solidFill>
-                            <a:srgbClr val="000000"/>
-                          </a:solidFill>
-                          <a:latin typeface="Arial" pitchFamily="34" charset="0"/>
-                          <a:ea typeface="Arial" pitchFamily="34" charset="-122"/>
-                          <a:cs typeface="Arial" pitchFamily="34" charset="-120"/>
-                        </a:rPr>
-                        <a:t>Booking.com</a:t>
-                      </a:r>
-                      <a:endParaRPr lang="en-US" sz="800" dirty="0">
-                        <a:latin typeface="Arial" charset="0"/>
-                        <a:ea typeface="Arial" charset="0"/>
-                        <a:cs typeface="Arial" charset="0"/>
-                      </a:endParaRPr>
-                    </a:p>
-                  </a:txBody>
-                  <a:tcPr marL="91440" marR="91440" marT="45720" marB="45720">
-                    <a:lnL w="6350" cap="flat" cmpd="sng" algn="ctr">
-                      <a:solidFill>
-                        <a:srgbClr val="CCCCCC"/>
-                      </a:solidFill>
-                      <a:prstDash val="solid"/>
-                      <a:round/>
-                      <a:headEnd type="none" w="med" len="med"/>
-                      <a:tailEnd type="none" w="med" len="med"/>
-                    </a:lnL>
-                    <a:lnR w="6350" cap="flat" cmpd="sng" algn="ctr">
-                      <a:solidFill>
-                        <a:srgbClr val="CCCCCC"/>
-                      </a:solidFill>
-                      <a:prstDash val="solid"/>
-                      <a:round/>
-                      <a:headEnd type="none" w="med" len="med"/>
-                      <a:tailEnd type="none" w="med" len="med"/>
-                    </a:lnR>
-                    <a:lnT w="6350" cap="flat" cmpd="sng" algn="ctr">
-                      <a:solidFill>
-                        <a:srgbClr val="CCCCCC"/>
-                      </a:solidFill>
-                      <a:prstDash val="solid"/>
-                      <a:round/>
-                      <a:headEnd type="none" w="med" len="med"/>
-                      <a:tailEnd type="none" w="med" len="med"/>
-                    </a:lnT>
-                    <a:lnB w="6350" cap="flat" cmpd="sng" algn="ctr">
-                      <a:solidFill>
-                        <a:srgbClr val="CCCCCC"/>
-                      </a:solidFill>
-                      <a:prstDash val="solid"/>
-                      <a:round/>
-                      <a:headEnd type="none" w="med" len="med"/>
-                      <a:tailEnd type="none" w="med" len="med"/>
-                    </a:lnB>
-                    <a:solidFill>
-                      <a:srgbClr val="FFFFFF"/>
-                    </a:solidFill>
-                  </a:tcPr>
-                </a:tc>
-                <a:tc>
-                  <a:txBody>
-                    <a:bodyPr/>
-                    <a:lstStyle/>
-                    <a:p>
-                      <a:pPr algn="ctr" indent="0" marL="0">
-                        <a:buNone/>
-                      </a:pPr>
-                      <a:r>
-                        <a:rPr lang="en-US" sz="800" dirty="0">
-                          <a:solidFill>
-                            <a:srgbClr val="000000"/>
-                          </a:solidFill>
-                          <a:latin typeface="Arial" pitchFamily="34" charset="0"/>
-                          <a:ea typeface="Arial" pitchFamily="34" charset="-122"/>
-                          <a:cs typeface="Arial" pitchFamily="34" charset="-120"/>
-                        </a:rPr>
-                        <a:t>29</a:t>
-                      </a:r>
-                      <a:endParaRPr lang="en-US" sz="800" dirty="0">
-                        <a:latin typeface="Arial" charset="0"/>
-                        <a:ea typeface="Arial" charset="0"/>
-                        <a:cs typeface="Arial" charset="0"/>
-                      </a:endParaRPr>
-                    </a:p>
-                  </a:txBody>
-                  <a:tcPr marL="91440" marR="91440" marT="45720" marB="45720">
-                    <a:lnL w="6350" cap="flat" cmpd="sng" algn="ctr">
-                      <a:solidFill>
-                        <a:srgbClr val="CCCCCC"/>
-                      </a:solidFill>
-                      <a:prstDash val="solid"/>
-                      <a:round/>
-                      <a:headEnd type="none" w="med" len="med"/>
-                      <a:tailEnd type="none" w="med" len="med"/>
-                    </a:lnL>
-                    <a:lnR w="6350" cap="flat" cmpd="sng" algn="ctr">
-                      <a:solidFill>
-                        <a:srgbClr val="CCCCCC"/>
-                      </a:solidFill>
-                      <a:prstDash val="solid"/>
-                      <a:round/>
-                      <a:headEnd type="none" w="med" len="med"/>
-                      <a:tailEnd type="none" w="med" len="med"/>
-                    </a:lnR>
-                    <a:lnT w="6350" cap="flat" cmpd="sng" algn="ctr">
-                      <a:solidFill>
-                        <a:srgbClr val="CCCCCC"/>
-                      </a:solidFill>
-                      <a:prstDash val="solid"/>
-                      <a:round/>
-                      <a:headEnd type="none" w="med" len="med"/>
-                      <a:tailEnd type="none" w="med" len="med"/>
-                    </a:lnT>
-                    <a:lnB w="6350" cap="flat" cmpd="sng" algn="ctr">
-                      <a:solidFill>
-                        <a:srgbClr val="CCCCCC"/>
-                      </a:solidFill>
-                      <a:prstDash val="solid"/>
-                      <a:round/>
-                      <a:headEnd type="none" w="med" len="med"/>
-                      <a:tailEnd type="none" w="med" len="med"/>
-                    </a:lnB>
-                    <a:solidFill>
-                      <a:srgbClr val="FFFFFF"/>
-                    </a:solidFill>
-                  </a:tcPr>
-                </a:tc>
-                <a:tc>
-                  <a:txBody>
-                    <a:bodyPr/>
-                    <a:lstStyle/>
-                    <a:p>
-                      <a:pPr algn="ctr" indent="0" marL="0">
-                        <a:buNone/>
-                      </a:pPr>
-                      <a:r>
-                        <a:rPr lang="en-US" sz="800" dirty="0">
-                          <a:solidFill>
-                            <a:srgbClr val="000000"/>
-                          </a:solidFill>
-                          <a:latin typeface="Arial" pitchFamily="34" charset="0"/>
-                          <a:ea typeface="Arial" pitchFamily="34" charset="-122"/>
-                          <a:cs typeface="Arial" pitchFamily="34" charset="-120"/>
-                        </a:rPr>
-                        <a:t>7.10/10</a:t>
-                      </a:r>
-                      <a:endParaRPr lang="en-US" sz="800" dirty="0">
-                        <a:latin typeface="Arial" charset="0"/>
-                        <a:ea typeface="Arial" charset="0"/>
-                        <a:cs typeface="Arial" charset="0"/>
-                      </a:endParaRPr>
-                    </a:p>
-                  </a:txBody>
-                  <a:tcPr marL="91440" marR="91440" marT="45720" marB="45720">
-                    <a:lnL w="6350" cap="flat" cmpd="sng" algn="ctr">
-                      <a:solidFill>
-                        <a:srgbClr val="CCCCCC"/>
-                      </a:solidFill>
-                      <a:prstDash val="solid"/>
-                      <a:round/>
-                      <a:headEnd type="none" w="med" len="med"/>
-                      <a:tailEnd type="none" w="med" len="med"/>
-                    </a:lnL>
-                    <a:lnR w="6350" cap="flat" cmpd="sng" algn="ctr">
-                      <a:solidFill>
-                        <a:srgbClr val="CCCCCC"/>
-                      </a:solidFill>
-                      <a:prstDash val="solid"/>
-                      <a:round/>
-                      <a:headEnd type="none" w="med" len="med"/>
-                      <a:tailEnd type="none" w="med" len="med"/>
-                    </a:lnR>
-                    <a:lnT w="6350" cap="flat" cmpd="sng" algn="ctr">
-                      <a:solidFill>
-                        <a:srgbClr val="CCCCCC"/>
-                      </a:solidFill>
-                      <a:prstDash val="solid"/>
-                      <a:round/>
-                      <a:headEnd type="none" w="med" len="med"/>
-                      <a:tailEnd type="none" w="med" len="med"/>
-                    </a:lnT>
-                    <a:lnB w="6350" cap="flat" cmpd="sng" algn="ctr">
-                      <a:solidFill>
-                        <a:srgbClr val="CCCCCC"/>
-                      </a:solidFill>
-                      <a:prstDash val="solid"/>
-                      <a:round/>
-                      <a:headEnd type="none" w="med" len="med"/>
-                      <a:tailEnd type="none" w="med" len="med"/>
-                    </a:lnB>
-                    <a:solidFill>
-                      <a:srgbClr val="FFFFFF"/>
-                    </a:solidFill>
-                  </a:tcPr>
-                </a:tc>
-                <a:tc>
-                  <a:txBody>
-                    <a:bodyPr/>
-                    <a:lstStyle/>
-                    <a:p>
-                      <a:pPr algn="ctr" indent="0" marL="0">
-                        <a:buNone/>
-                      </a:pPr>
-                      <a:r>
-                        <a:rPr lang="en-US" sz="800" dirty="0">
-                          <a:solidFill>
-                            <a:srgbClr val="000000"/>
-                          </a:solidFill>
-                          <a:latin typeface="Arial" pitchFamily="34" charset="0"/>
-                          <a:ea typeface="Arial" pitchFamily="34" charset="-122"/>
-                          <a:cs typeface="Arial" pitchFamily="34" charset="-120"/>
-                        </a:rPr>
-                        <a:t>7.10</a:t>
-                      </a:r>
-                      <a:endParaRPr lang="en-US" sz="800" dirty="0">
-                        <a:latin typeface="Arial" charset="0"/>
-                        <a:ea typeface="Arial" charset="0"/>
-                        <a:cs typeface="Arial" charset="0"/>
-                      </a:endParaRPr>
-                    </a:p>
-                  </a:txBody>
-                  <a:tcPr marL="91440" marR="91440" marT="45720" marB="45720">
-                    <a:lnL w="6350" cap="flat" cmpd="sng" algn="ctr">
-                      <a:solidFill>
-                        <a:srgbClr val="CCCCCC"/>
-                      </a:solidFill>
-                      <a:prstDash val="solid"/>
-                      <a:round/>
-                      <a:headEnd type="none" w="med" len="med"/>
-                      <a:tailEnd type="none" w="med" len="med"/>
-                    </a:lnL>
-                    <a:lnR w="6350" cap="flat" cmpd="sng" algn="ctr">
-                      <a:solidFill>
-                        <a:srgbClr val="CCCCCC"/>
-                      </a:solidFill>
-                      <a:prstDash val="solid"/>
-                      <a:round/>
-                      <a:headEnd type="none" w="med" len="med"/>
-                      <a:tailEnd type="none" w="med" len="med"/>
-                    </a:lnR>
-                    <a:lnT w="6350" cap="flat" cmpd="sng" algn="ctr">
-                      <a:solidFill>
-                        <a:srgbClr val="CCCCCC"/>
-                      </a:solidFill>
-                      <a:prstDash val="solid"/>
-                      <a:round/>
-                      <a:headEnd type="none" w="med" len="med"/>
-                      <a:tailEnd type="none" w="med" len="med"/>
-                    </a:lnT>
-                    <a:lnB w="6350" cap="flat" cmpd="sng" algn="ctr">
-                      <a:solidFill>
-                        <a:srgbClr val="CCCCCC"/>
-                      </a:solidFill>
-                      <a:prstDash val="solid"/>
-                      <a:round/>
-                      <a:headEnd type="none" w="med" len="med"/>
-                      <a:tailEnd type="none" w="med" len="med"/>
-                    </a:lnB>
-                    <a:solidFill>
-                      <a:srgbClr val="FFFFFF"/>
-                    </a:solidFill>
-                  </a:tcPr>
-                </a:tc>
-                <a:tc>
-                  <a:txBody>
-                    <a:bodyPr/>
-                    <a:lstStyle/>
-                    <a:p>
-                      <a:pPr algn="ctr" indent="0" marL="0">
-                        <a:buNone/>
-                      </a:pPr>
-                      <a:r>
-                        <a:rPr lang="en-US" sz="800" dirty="0">
-                          <a:solidFill>
-                            <a:srgbClr val="000000"/>
-                          </a:solidFill>
-                          <a:latin typeface="Arial" pitchFamily="34" charset="0"/>
-                          <a:ea typeface="Arial" pitchFamily="34" charset="-122"/>
-                          <a:cs typeface="Arial" pitchFamily="34" charset="-120"/>
-                        </a:rPr>
-                        <a:t>概ね良好</a:t>
-                      </a:r>
-                      <a:endParaRPr lang="en-US" sz="800" dirty="0">
-                        <a:latin typeface="Arial" charset="0"/>
-                        <a:ea typeface="Arial" charset="0"/>
-                        <a:cs typeface="Arial" charset="0"/>
-                      </a:endParaRPr>
-                    </a:p>
-                  </a:txBody>
-                  <a:tcPr marL="91440" marR="91440" marT="45720" marB="45720">
-                    <a:lnL w="6350" cap="flat" cmpd="sng" algn="ctr">
-                      <a:solidFill>
-                        <a:srgbClr val="CCCCCC"/>
-                      </a:solidFill>
-                      <a:prstDash val="solid"/>
-                      <a:round/>
-                      <a:headEnd type="none" w="med" len="med"/>
-                      <a:tailEnd type="none" w="med" len="med"/>
-                    </a:lnL>
-                    <a:lnR w="6350" cap="flat" cmpd="sng" algn="ctr">
-                      <a:solidFill>
-                        <a:srgbClr val="CCCCCC"/>
-                      </a:solidFill>
-                      <a:prstDash val="solid"/>
-                      <a:round/>
-                      <a:headEnd type="none" w="med" len="med"/>
-                      <a:tailEnd type="none" w="med" len="med"/>
-                    </a:lnR>
-                    <a:lnT w="6350" cap="flat" cmpd="sng" algn="ctr">
-                      <a:solidFill>
-                        <a:srgbClr val="CCCCCC"/>
-                      </a:solidFill>
-                      <a:prstDash val="solid"/>
-                      <a:round/>
-                      <a:headEnd type="none" w="med" len="med"/>
-                      <a:tailEnd type="none" w="med" len="med"/>
-                    </a:lnT>
-                    <a:lnB w="6350" cap="flat" cmpd="sng" algn="ctr">
-                      <a:solidFill>
-                        <a:srgbClr val="CCCCCC"/>
-                      </a:solidFill>
-                      <a:prstDash val="solid"/>
-                      <a:round/>
-                      <a:headEnd type="none" w="med" len="med"/>
-                      <a:tailEnd type="none" w="med" len="med"/>
-                    </a:lnB>
-                    <a:solidFill>
-                      <a:srgbClr val="FFFFFF"/>
-                    </a:solidFill>
-                  </a:tcPr>
-                </a:tc>
-              </a:tr>
             </a:tbl>
           </a:graphicData>
         </a:graphic>
@@ -6663,7 +6646,7 @@
                 <a:ea typeface="Arial" pitchFamily="34" charset="-122"/>
                 <a:cs typeface="Arial" pitchFamily="34" charset="-120"/>
               </a:rPr>
-              <a:t>96件（67.1%）</a:t>
+              <a:t>97件（67.8%）</a:t>
             </a:r>
             <a:endParaRPr lang="en-US" sz="1600" dirty="0"/>
           </a:p>
@@ -6859,7 +6842,7 @@
                 <a:ea typeface="Arial" pitchFamily="34" charset="-122"/>
                 <a:cs typeface="Arial" pitchFamily="34" charset="-120"/>
               </a:rPr>
-              <a:t>18件（12.6%）</a:t>
+              <a:t>17件（11.9%）</a:t>
             </a:r>
             <a:endParaRPr lang="en-US" sz="1600" dirty="0"/>
           </a:p>
@@ -7021,7 +7004,7 @@
                 <a:ea typeface="Arial" pitchFamily="34" charset="-122"/>
                 <a:cs typeface="Arial" pitchFamily="34" charset="-120"/>
               </a:rPr>
-              <a:t>高評価レビュー（8-10点: 96件）の分析から、主要な強みテーマを抽出しています。立地・アクセス、客室清潔感、スタッフ対応が高評価の中心的テーマです。</a:t>
+              <a:t>高評価レビュー（8-10点: 97件）の分析から、主要な強みテーマを抽出しています。立地・アクセス、客室清潔感、スタッフ対応が高評価の中心的テーマです。</a:t>
             </a:r>
             <a:endParaRPr lang="en-US" sz="1200" dirty="0"/>
           </a:p>
@@ -7281,7 +7264,7 @@
                 <a:ea typeface="Arial" pitchFamily="34" charset="-122"/>
                 <a:cs typeface="Arial" pitchFamily="34" charset="-120"/>
               </a:rPr>
-              <a:t>低評価・中評価レビュー（47件）から改善課題を優先度別に整理しています。S/A/B/Cの4段階で優先度を設定し、計画的な改善を推進します。</a:t>
+              <a:t>低評価・中評価レビュー（46件）から改善課題を優先度別に整理しています。S/A/B/Cの4段階で優先度を設定し、計画的な改善を推進します。</a:t>
             </a:r>
             <a:endParaRPr lang="en-US" sz="1200" dirty="0"/>
           </a:p>
@@ -8061,7 +8044,7 @@
                 <a:ea typeface="Arial" pitchFamily="34" charset="-122"/>
                 <a:cs typeface="Arial" pitchFamily="34" charset="-120"/>
               </a:rPr>
-              <a:t>全体平均 7.54点 → 目標 8.04点</a:t>
+              <a:t>全体平均 7.57点 → 目標 8.07点</a:t>
             </a:r>
             <a:endParaRPr lang="en-US" sz="1200" dirty="0"/>
           </a:p>
@@ -8078,7 +8061,7 @@
                 <a:ea typeface="Arial" pitchFamily="34" charset="-122"/>
                 <a:cs typeface="Arial" pitchFamily="34" charset="-120"/>
               </a:rPr>
-              <a:t>高評価率 67.1% → 目標 72.1%</a:t>
+              <a:t>高評価率 67.8% → 目標 72.8%</a:t>
             </a:r>
             <a:endParaRPr lang="en-US" sz="1200" dirty="0"/>
           </a:p>
@@ -8095,7 +8078,7 @@
                 <a:ea typeface="Arial" pitchFamily="34" charset="-122"/>
                 <a:cs typeface="Arial" pitchFamily="34" charset="-120"/>
               </a:rPr>
-              <a:t>低評価率 12.6% → 目標 10.6%</a:t>
+              <a:t>低評価率 11.9% → 目標 9.9%</a:t>
             </a:r>
             <a:endParaRPr lang="en-US" sz="1200" dirty="0"/>
           </a:p>

--- a/納品レポート/ホテル別レポート/comfort_yokohama_kannai_口コミ分析レポート.pptx
+++ b/納品レポート/ホテル別レポート/comfort_yokohama_kannai_口コミ分析レポート.pptx
@@ -2801,7 +2801,7 @@
                 <a:ea typeface="Arial" pitchFamily="34" charset="-122"/>
                 <a:cs typeface="Arial" pitchFamily="34" charset="-120"/>
               </a:rPr>
-              <a:t>作成日：2026年4月2日</a:t>
+              <a:t>作成日：2026年4月5日</a:t>
             </a:r>
             <a:endParaRPr lang="en-US" sz="1000" dirty="0"/>
           </a:p>

--- a/納品レポート/ホテル別レポート/comfort_yokohama_kannai_口コミ分析レポート.pptx
+++ b/納品レポート/ホテル別レポート/comfort_yokohama_kannai_口コミ分析レポート.pptx
@@ -180,16 +180,16 @@
                 <c:ptCount val="6"/>
                 <c:lvl>
                   <c:pt idx="0">
+                    <c:v>Google</c:v>
+                  </c:pt>
+                  <c:pt idx="1">
                     <c:v>Trip.com</c:v>
                   </c:pt>
-                  <c:pt idx="1">
-                    <c:v>Agoda</c:v>
-                  </c:pt>
                   <c:pt idx="2">
-                    <c:v>Google</c:v>
+                    <c:v>楽天トラベル</c:v>
                   </c:pt>
                   <c:pt idx="3">
-                    <c:v>楽天トラベル</c:v>
+                    <c:v>Agoda</c:v>
                   </c:pt>
                   <c:pt idx="4">
                     <c:v>Booking.com</c:v>
@@ -208,22 +208,22 @@
                 <c:formatCode>General</c:formatCode>
                 <c:ptCount val="6"/>
                 <c:pt idx="0">
-                  <c:v>8.35</c:v>
+                  <c:v>7.68</c:v>
                 </c:pt>
                 <c:pt idx="1">
-                  <c:v>8</c:v>
+                  <c:v>7.56</c:v>
                 </c:pt>
                 <c:pt idx="2">
-                  <c:v>7.57</c:v>
+                  <c:v>7.09</c:v>
                 </c:pt>
                 <c:pt idx="3">
-                  <c:v>7.57</c:v>
+                  <c:v>7</c:v>
                 </c:pt>
                 <c:pt idx="4">
-                  <c:v>7.25</c:v>
+                  <c:v>6.7</c:v>
                 </c:pt>
                 <c:pt idx="5">
-                  <c:v>7.2</c:v>
+                  <c:v>6.6</c:v>
                 </c:pt>
               </c:numCache>
             </c:numRef>
@@ -566,13 +566,13 @@
               <c:numCache>
                 <c:ptCount val="3"/>
                 <c:pt idx="0">
-                  <c:v>97</c:v>
+                  <c:v>41</c:v>
                 </c:pt>
                 <c:pt idx="1">
-                  <c:v>29</c:v>
+                  <c:v>21</c:v>
                 </c:pt>
                 <c:pt idx="2">
-                  <c:v>17</c:v>
+                  <c:v>12</c:v>
                 </c:pt>
               </c:numCache>
             </c:numRef>
@@ -809,28 +809,28 @@
                 <c:formatCode>General</c:formatCode>
                 <c:ptCount val="8"/>
                 <c:pt idx="0">
-                  <c:v>36</c:v>
+                  <c:v>16</c:v>
                 </c:pt>
                 <c:pt idx="1">
-                  <c:v>8</c:v>
+                  <c:v>4</c:v>
                 </c:pt>
                 <c:pt idx="2">
-                  <c:v>53</c:v>
+                  <c:v>21</c:v>
                 </c:pt>
                 <c:pt idx="3">
                   <c:v>6</c:v>
                 </c:pt>
                 <c:pt idx="4">
-                  <c:v>18</c:v>
+                  <c:v>12</c:v>
                 </c:pt>
                 <c:pt idx="5">
-                  <c:v>5</c:v>
+                  <c:v>3</c:v>
                 </c:pt>
                 <c:pt idx="6">
-                  <c:v>9</c:v>
+                  <c:v>7</c:v>
                 </c:pt>
                 <c:pt idx="7">
-                  <c:v>8</c:v>
+                  <c:v>5</c:v>
                 </c:pt>
               </c:numCache>
             </c:numRef>
@@ -2761,7 +2761,7 @@
                 <a:ea typeface="Arial" pitchFamily="34" charset="-122"/>
                 <a:cs typeface="Arial" pitchFamily="34" charset="-120"/>
               </a:rPr>
-              <a:t>分析対象期間：2026年2月〜3月</a:t>
+              <a:t>分析対象期間：2026年3月</a:t>
             </a:r>
             <a:endParaRPr lang="en-US" sz="1000" dirty="0"/>
           </a:p>
@@ -2781,7 +2781,7 @@
                 <a:ea typeface="Arial" pitchFamily="34" charset="-122"/>
                 <a:cs typeface="Arial" pitchFamily="34" charset="-120"/>
               </a:rPr>
-              <a:t>レビュー総数：143件（6サイト）</a:t>
+              <a:t>レビュー総数：74件（6サイト）</a:t>
             </a:r>
             <a:endParaRPr lang="en-US" sz="1000" dirty="0"/>
           </a:p>
@@ -3347,7 +3347,7 @@
                           <a:ea typeface="Arial" pitchFamily="34" charset="-122"/>
                           <a:cs typeface="Arial" pitchFamily="34" charset="-120"/>
                         </a:rPr>
-                        <a:t>7.57点</a:t>
+                        <a:t>7.18点</a:t>
                       </a:r>
                       <a:endParaRPr lang="en-US" sz="1000" dirty="0">
                         <a:latin typeface="Arial" charset="0"/>
@@ -3415,7 +3415,7 @@
                           <a:ea typeface="Arial" pitchFamily="34" charset="-122"/>
                           <a:cs typeface="Arial" pitchFamily="34" charset="-120"/>
                         </a:rPr>
-                        <a:t>8.1点以上</a:t>
+                        <a:t>7.7点以上</a:t>
                       </a:r>
                       <a:endParaRPr lang="en-US" sz="1000" dirty="0">
                         <a:latin typeface="Arial" charset="0"/>
@@ -3621,7 +3621,7 @@
                           <a:ea typeface="Arial" pitchFamily="34" charset="-122"/>
                           <a:cs typeface="Arial" pitchFamily="34" charset="-120"/>
                         </a:rPr>
-                        <a:t>67.8%</a:t>
+                        <a:t>55.4%</a:t>
                       </a:r>
                       <a:endParaRPr lang="en-US" sz="1000" dirty="0">
                         <a:latin typeface="Arial" charset="0"/>
@@ -3689,7 +3689,7 @@
                           <a:ea typeface="Arial" pitchFamily="34" charset="-122"/>
                           <a:cs typeface="Arial" pitchFamily="34" charset="-120"/>
                         </a:rPr>
-                        <a:t>78%以上</a:t>
+                        <a:t>65%以上</a:t>
                       </a:r>
                       <a:endParaRPr lang="en-US" sz="1000" dirty="0">
                         <a:latin typeface="Arial" charset="0"/>
@@ -3895,7 +3895,7 @@
                           <a:ea typeface="Arial" pitchFamily="34" charset="-122"/>
                           <a:cs typeface="Arial" pitchFamily="34" charset="-120"/>
                         </a:rPr>
-                        <a:t>11.9%</a:t>
+                        <a:t>16.2%</a:t>
                       </a:r>
                       <a:endParaRPr lang="en-US" sz="1000" dirty="0">
                         <a:latin typeface="Arial" charset="0"/>
@@ -3963,7 +3963,7 @@
                           <a:ea typeface="Arial" pitchFamily="34" charset="-122"/>
                           <a:cs typeface="Arial" pitchFamily="34" charset="-120"/>
                         </a:rPr>
-                        <a:t>7%以下</a:t>
+                        <a:t>11%以下</a:t>
                       </a:r>
                       <a:endParaRPr lang="en-US" sz="1000" dirty="0">
                         <a:latin typeface="Arial" charset="0"/>
@@ -4101,6 +4101,280 @@
                           <a:ea typeface="Arial" pitchFamily="34" charset="-122"/>
                           <a:cs typeface="Arial" pitchFamily="34" charset="-120"/>
                         </a:rPr>
+                        <a:t>じゃらん平均評価</a:t>
+                      </a:r>
+                      <a:endParaRPr lang="en-US" sz="1000" dirty="0">
+                        <a:latin typeface="Arial" charset="0"/>
+                        <a:ea typeface="Arial" charset="0"/>
+                        <a:cs typeface="Arial" charset="0"/>
+                      </a:endParaRPr>
+                    </a:p>
+                  </a:txBody>
+                  <a:tcPr marL="91440" marR="91440" marT="45720" marB="45720">
+                    <a:lnL w="6350" cap="flat" cmpd="sng" algn="ctr">
+                      <a:solidFill>
+                        <a:srgbClr val="CBD5E1"/>
+                      </a:solidFill>
+                      <a:prstDash val="solid"/>
+                      <a:round/>
+                      <a:headEnd type="none" w="med" len="med"/>
+                      <a:tailEnd type="none" w="med" len="med"/>
+                    </a:lnL>
+                    <a:lnR w="6350" cap="flat" cmpd="sng" algn="ctr">
+                      <a:solidFill>
+                        <a:srgbClr val="CBD5E1"/>
+                      </a:solidFill>
+                      <a:prstDash val="solid"/>
+                      <a:round/>
+                      <a:headEnd type="none" w="med" len="med"/>
+                      <a:tailEnd type="none" w="med" len="med"/>
+                    </a:lnR>
+                    <a:lnT w="6350" cap="flat" cmpd="sng" algn="ctr">
+                      <a:solidFill>
+                        <a:srgbClr val="CBD5E1"/>
+                      </a:solidFill>
+                      <a:prstDash val="solid"/>
+                      <a:round/>
+                      <a:headEnd type="none" w="med" len="med"/>
+                      <a:tailEnd type="none" w="med" len="med"/>
+                    </a:lnT>
+                    <a:lnB w="6350" cap="flat" cmpd="sng" algn="ctr">
+                      <a:solidFill>
+                        <a:srgbClr val="CBD5E1"/>
+                      </a:solidFill>
+                      <a:prstDash val="solid"/>
+                      <a:round/>
+                      <a:headEnd type="none" w="med" len="med"/>
+                      <a:tailEnd type="none" w="med" len="med"/>
+                    </a:lnB>
+                    <a:solidFill>
+                      <a:srgbClr val="FFFFFF"/>
+                    </a:solidFill>
+                  </a:tcPr>
+                </a:tc>
+                <a:tc>
+                  <a:txBody>
+                    <a:bodyPr/>
+                    <a:lstStyle/>
+                    <a:p>
+                      <a:pPr algn="ctr" indent="0" marL="0">
+                        <a:buNone/>
+                      </a:pPr>
+                      <a:r>
+                        <a:rPr lang="en-US" sz="1000" dirty="0">
+                          <a:solidFill>
+                            <a:srgbClr val="64748B"/>
+                          </a:solidFill>
+                          <a:latin typeface="Arial" pitchFamily="34" charset="0"/>
+                          <a:ea typeface="Arial" pitchFamily="34" charset="-122"/>
+                          <a:cs typeface="Arial" pitchFamily="34" charset="-120"/>
+                        </a:rPr>
+                        <a:t>6.6点</a:t>
+                      </a:r>
+                      <a:endParaRPr lang="en-US" sz="1000" dirty="0">
+                        <a:latin typeface="Arial" charset="0"/>
+                        <a:ea typeface="Arial" charset="0"/>
+                        <a:cs typeface="Arial" charset="0"/>
+                      </a:endParaRPr>
+                    </a:p>
+                  </a:txBody>
+                  <a:tcPr marL="91440" marR="91440" marT="45720" marB="45720">
+                    <a:lnL w="6350" cap="flat" cmpd="sng" algn="ctr">
+                      <a:solidFill>
+                        <a:srgbClr val="CBD5E1"/>
+                      </a:solidFill>
+                      <a:prstDash val="solid"/>
+                      <a:round/>
+                      <a:headEnd type="none" w="med" len="med"/>
+                      <a:tailEnd type="none" w="med" len="med"/>
+                    </a:lnL>
+                    <a:lnR w="6350" cap="flat" cmpd="sng" algn="ctr">
+                      <a:solidFill>
+                        <a:srgbClr val="CBD5E1"/>
+                      </a:solidFill>
+                      <a:prstDash val="solid"/>
+                      <a:round/>
+                      <a:headEnd type="none" w="med" len="med"/>
+                      <a:tailEnd type="none" w="med" len="med"/>
+                    </a:lnR>
+                    <a:lnT w="6350" cap="flat" cmpd="sng" algn="ctr">
+                      <a:solidFill>
+                        <a:srgbClr val="CBD5E1"/>
+                      </a:solidFill>
+                      <a:prstDash val="solid"/>
+                      <a:round/>
+                      <a:headEnd type="none" w="med" len="med"/>
+                      <a:tailEnd type="none" w="med" len="med"/>
+                    </a:lnT>
+                    <a:lnB w="6350" cap="flat" cmpd="sng" algn="ctr">
+                      <a:solidFill>
+                        <a:srgbClr val="CBD5E1"/>
+                      </a:solidFill>
+                      <a:prstDash val="solid"/>
+                      <a:round/>
+                      <a:headEnd type="none" w="med" len="med"/>
+                      <a:tailEnd type="none" w="med" len="med"/>
+                    </a:lnB>
+                    <a:solidFill>
+                      <a:srgbClr val="FFFFFF"/>
+                    </a:solidFill>
+                  </a:tcPr>
+                </a:tc>
+                <a:tc>
+                  <a:txBody>
+                    <a:bodyPr/>
+                    <a:lstStyle/>
+                    <a:p>
+                      <a:pPr algn="ctr" indent="0" marL="0">
+                        <a:buNone/>
+                      </a:pPr>
+                      <a:r>
+                        <a:rPr lang="en-US" sz="1000" b="1" dirty="0">
+                          <a:solidFill>
+                            <a:srgbClr val="16A34A"/>
+                          </a:solidFill>
+                          <a:latin typeface="Arial" pitchFamily="34" charset="0"/>
+                          <a:ea typeface="Arial" pitchFamily="34" charset="-122"/>
+                          <a:cs typeface="Arial" pitchFamily="34" charset="-120"/>
+                        </a:rPr>
+                        <a:t>7.6点以上</a:t>
+                      </a:r>
+                      <a:endParaRPr lang="en-US" sz="1000" dirty="0">
+                        <a:latin typeface="Arial" charset="0"/>
+                        <a:ea typeface="Arial" charset="0"/>
+                        <a:cs typeface="Arial" charset="0"/>
+                      </a:endParaRPr>
+                    </a:p>
+                  </a:txBody>
+                  <a:tcPr marL="91440" marR="91440" marT="45720" marB="45720">
+                    <a:lnL w="6350" cap="flat" cmpd="sng" algn="ctr">
+                      <a:solidFill>
+                        <a:srgbClr val="CBD5E1"/>
+                      </a:solidFill>
+                      <a:prstDash val="solid"/>
+                      <a:round/>
+                      <a:headEnd type="none" w="med" len="med"/>
+                      <a:tailEnd type="none" w="med" len="med"/>
+                    </a:lnL>
+                    <a:lnR w="6350" cap="flat" cmpd="sng" algn="ctr">
+                      <a:solidFill>
+                        <a:srgbClr val="CBD5E1"/>
+                      </a:solidFill>
+                      <a:prstDash val="solid"/>
+                      <a:round/>
+                      <a:headEnd type="none" w="med" len="med"/>
+                      <a:tailEnd type="none" w="med" len="med"/>
+                    </a:lnR>
+                    <a:lnT w="6350" cap="flat" cmpd="sng" algn="ctr">
+                      <a:solidFill>
+                        <a:srgbClr val="CBD5E1"/>
+                      </a:solidFill>
+                      <a:prstDash val="solid"/>
+                      <a:round/>
+                      <a:headEnd type="none" w="med" len="med"/>
+                      <a:tailEnd type="none" w="med" len="med"/>
+                    </a:lnT>
+                    <a:lnB w="6350" cap="flat" cmpd="sng" algn="ctr">
+                      <a:solidFill>
+                        <a:srgbClr val="CBD5E1"/>
+                      </a:solidFill>
+                      <a:prstDash val="solid"/>
+                      <a:round/>
+                      <a:headEnd type="none" w="med" len="med"/>
+                      <a:tailEnd type="none" w="med" len="med"/>
+                    </a:lnB>
+                    <a:solidFill>
+                      <a:srgbClr val="FFFFFF"/>
+                    </a:solidFill>
+                  </a:tcPr>
+                </a:tc>
+                <a:tc>
+                  <a:txBody>
+                    <a:bodyPr/>
+                    <a:lstStyle/>
+                    <a:p>
+                      <a:pPr algn="ctr" indent="0" marL="0">
+                        <a:buNone/>
+                      </a:pPr>
+                      <a:r>
+                        <a:rPr lang="en-US" sz="1000" dirty="0">
+                          <a:solidFill>
+                            <a:srgbClr val="64748B"/>
+                          </a:solidFill>
+                          <a:latin typeface="Arial" pitchFamily="34" charset="0"/>
+                          <a:ea typeface="Arial" pitchFamily="34" charset="-122"/>
+                          <a:cs typeface="Arial" pitchFamily="34" charset="-120"/>
+                        </a:rPr>
+                        <a:t>2026年9月</a:t>
+                      </a:r>
+                      <a:endParaRPr lang="en-US" sz="1000" dirty="0">
+                        <a:latin typeface="Arial" charset="0"/>
+                        <a:ea typeface="Arial" charset="0"/>
+                        <a:cs typeface="Arial" charset="0"/>
+                      </a:endParaRPr>
+                    </a:p>
+                  </a:txBody>
+                  <a:tcPr marL="91440" marR="91440" marT="45720" marB="45720">
+                    <a:lnL w="6350" cap="flat" cmpd="sng" algn="ctr">
+                      <a:solidFill>
+                        <a:srgbClr val="CBD5E1"/>
+                      </a:solidFill>
+                      <a:prstDash val="solid"/>
+                      <a:round/>
+                      <a:headEnd type="none" w="med" len="med"/>
+                      <a:tailEnd type="none" w="med" len="med"/>
+                    </a:lnL>
+                    <a:lnR w="6350" cap="flat" cmpd="sng" algn="ctr">
+                      <a:solidFill>
+                        <a:srgbClr val="CBD5E1"/>
+                      </a:solidFill>
+                      <a:prstDash val="solid"/>
+                      <a:round/>
+                      <a:headEnd type="none" w="med" len="med"/>
+                      <a:tailEnd type="none" w="med" len="med"/>
+                    </a:lnR>
+                    <a:lnT w="6350" cap="flat" cmpd="sng" algn="ctr">
+                      <a:solidFill>
+                        <a:srgbClr val="CBD5E1"/>
+                      </a:solidFill>
+                      <a:prstDash val="solid"/>
+                      <a:round/>
+                      <a:headEnd type="none" w="med" len="med"/>
+                      <a:tailEnd type="none" w="med" len="med"/>
+                    </a:lnT>
+                    <a:lnB w="6350" cap="flat" cmpd="sng" algn="ctr">
+                      <a:solidFill>
+                        <a:srgbClr val="CBD5E1"/>
+                      </a:solidFill>
+                      <a:prstDash val="solid"/>
+                      <a:round/>
+                      <a:headEnd type="none" w="med" len="med"/>
+                      <a:tailEnd type="none" w="med" len="med"/>
+                    </a:lnB>
+                    <a:solidFill>
+                      <a:srgbClr val="FFFFFF"/>
+                    </a:solidFill>
+                  </a:tcPr>
+                </a:tc>
+              </a:tr>
+              <a:tr h="320040">
+                <a:tc>
+                  <a:txBody>
+                    <a:bodyPr/>
+                    <a:lstStyle/>
+                    <a:p>
+                      <a:pPr indent="0" marL="0">
+                        <a:buNone/>
+                      </a:pPr>
+                      <a:r>
+                        <a:rPr lang="en-US" sz="1000" b="1" dirty="0">
+                          <a:solidFill>
+                            <a:srgbClr val="334155"/>
+                          </a:solidFill>
+                          <a:latin typeface="Arial" pitchFamily="34" charset="0"/>
+                          <a:ea typeface="Arial" pitchFamily="34" charset="-122"/>
+                          <a:cs typeface="Arial" pitchFamily="34" charset="-120"/>
+                        </a:rPr>
                         <a:t>口コミ返信率</a:t>
                       </a:r>
                       <a:endParaRPr lang="en-US" sz="1000" dirty="0">
@@ -4148,7 +4422,7 @@
                       <a:tailEnd type="none" w="med" len="med"/>
                     </a:lnB>
                     <a:solidFill>
-                      <a:srgbClr val="FFFFFF"/>
+                      <a:srgbClr val="E8EFF8"/>
                     </a:solidFill>
                   </a:tcPr>
                 </a:tc>
@@ -4216,7 +4490,7 @@
                       <a:tailEnd type="none" w="med" len="med"/>
                     </a:lnB>
                     <a:solidFill>
-                      <a:srgbClr val="FFFFFF"/>
+                      <a:srgbClr val="E8EFF8"/>
                     </a:solidFill>
                   </a:tcPr>
                 </a:tc>
@@ -4284,7 +4558,7 @@
                       <a:tailEnd type="none" w="med" len="med"/>
                     </a:lnB>
                     <a:solidFill>
-                      <a:srgbClr val="FFFFFF"/>
+                      <a:srgbClr val="E8EFF8"/>
                     </a:solidFill>
                   </a:tcPr>
                 </a:tc>
@@ -4352,7 +4626,7 @@
                       <a:tailEnd type="none" w="med" len="med"/>
                     </a:lnB>
                     <a:solidFill>
-                      <a:srgbClr val="FFFFFF"/>
+                      <a:srgbClr val="E8EFF8"/>
                     </a:solidFill>
                   </a:tcPr>
                 </a:tc>
@@ -4422,7 +4696,7 @@
                       <a:tailEnd type="none" w="med" len="med"/>
                     </a:lnB>
                     <a:solidFill>
-                      <a:srgbClr val="E8EFF8"/>
+                      <a:srgbClr val="FFFFFF"/>
                     </a:solidFill>
                   </a:tcPr>
                 </a:tc>
@@ -4443,7 +4717,7 @@
                           <a:ea typeface="Arial" pitchFamily="34" charset="-122"/>
                           <a:cs typeface="Arial" pitchFamily="34" charset="-120"/>
                         </a:rPr>
-                        <a:t>約23件/期間</a:t>
+                        <a:t>約19件/期間</a:t>
                       </a:r>
                       <a:endParaRPr lang="en-US" sz="1000" dirty="0">
                         <a:latin typeface="Arial" charset="0"/>
@@ -4490,7 +4764,7 @@
                       <a:tailEnd type="none" w="med" len="med"/>
                     </a:lnB>
                     <a:solidFill>
-                      <a:srgbClr val="E8EFF8"/>
+                      <a:srgbClr val="FFFFFF"/>
                     </a:solidFill>
                   </a:tcPr>
                 </a:tc>
@@ -4511,7 +4785,7 @@
                           <a:ea typeface="Arial" pitchFamily="34" charset="-122"/>
                           <a:cs typeface="Arial" pitchFamily="34" charset="-120"/>
                         </a:rPr>
-                        <a:t>11件以下</a:t>
+                        <a:t>9件以下</a:t>
                       </a:r>
                       <a:endParaRPr lang="en-US" sz="1000" dirty="0">
                         <a:latin typeface="Arial" charset="0"/>
@@ -4558,7 +4832,7 @@
                       <a:tailEnd type="none" w="med" len="med"/>
                     </a:lnB>
                     <a:solidFill>
-                      <a:srgbClr val="E8EFF8"/>
+                      <a:srgbClr val="FFFFFF"/>
                     </a:solidFill>
                   </a:tcPr>
                 </a:tc>
@@ -4626,7 +4900,7 @@
                       <a:tailEnd type="none" w="med" len="med"/>
                     </a:lnB>
                     <a:solidFill>
-                      <a:srgbClr val="E8EFF8"/>
+                      <a:srgbClr val="FFFFFF"/>
                     </a:solidFill>
                   </a:tcPr>
                 </a:tc>
@@ -4643,7 +4917,7 @@
         </p:nvSpPr>
         <p:spPr>
           <a:xfrm>
-            <a:off x="457200" y="3108960"/>
+            <a:off x="457200" y="3429000"/>
             <a:ext cx="8229600" cy="640080"/>
           </a:xfrm>
           <a:prstGeom prst="rect">
@@ -4670,7 +4944,7 @@
         </p:nvSpPr>
         <p:spPr>
           <a:xfrm>
-            <a:off x="457200" y="3108960"/>
+            <a:off x="457200" y="3429000"/>
             <a:ext cx="54864" cy="640080"/>
           </a:xfrm>
           <a:prstGeom prst="rect">
@@ -4690,7 +4964,7 @@
         </p:nvSpPr>
         <p:spPr>
           <a:xfrm>
-            <a:off x="640080" y="3108960"/>
+            <a:off x="640080" y="3429000"/>
             <a:ext cx="7863840" cy="640080"/>
           </a:xfrm>
           <a:prstGeom prst="rect">
@@ -5082,7 +5356,7 @@
                 <a:ea typeface="Arial" pitchFamily="34" charset="-122"/>
                 <a:cs typeface="Arial" pitchFamily="34" charset="-120"/>
               </a:rPr>
-              <a:t>7.57</a:t>
+              <a:t>7.18</a:t>
             </a:r>
             <a:endParaRPr lang="en-US" sz="3200" dirty="0"/>
           </a:p>
@@ -5207,7 +5481,7 @@
                 <a:ea typeface="Arial" pitchFamily="34" charset="-122"/>
                 <a:cs typeface="Arial" pitchFamily="34" charset="-120"/>
               </a:rPr>
-              <a:t>67.8%</a:t>
+              <a:t>55.4%</a:t>
             </a:r>
             <a:endParaRPr lang="en-US" sz="3200" dirty="0"/>
           </a:p>
@@ -5332,7 +5606,7 @@
                 <a:ea typeface="Arial" pitchFamily="34" charset="-122"/>
                 <a:cs typeface="Arial" pitchFamily="34" charset="-120"/>
               </a:rPr>
-              <a:t>11.9%</a:t>
+              <a:t>16.2%</a:t>
             </a:r>
             <a:endParaRPr lang="en-US" sz="3200" dirty="0"/>
           </a:p>
@@ -5457,7 +5731,7 @@
                 <a:ea typeface="Arial" pitchFamily="34" charset="-122"/>
                 <a:cs typeface="Arial" pitchFamily="34" charset="-120"/>
               </a:rPr>
-              <a:t>143件</a:t>
+              <a:t>74件</a:t>
             </a:r>
             <a:endParaRPr lang="en-US" sz="3200" dirty="0"/>
           </a:p>
@@ -5625,7 +5899,7 @@
                 <a:ea typeface="Arial" pitchFamily="34" charset="-122"/>
                 <a:cs typeface="Arial" pitchFamily="34" charset="-120"/>
               </a:rPr>
-              <a:t>立地・アクセス </a:t>
+              <a:t>快適さ・設備 </a:t>
             </a:r>
             <a:endParaRPr lang="en-US" sz="1100" dirty="0"/>
           </a:p>
@@ -5645,7 +5919,7 @@
                 <a:ea typeface="Arial" pitchFamily="34" charset="-122"/>
                 <a:cs typeface="Arial" pitchFamily="34" charset="-120"/>
               </a:rPr>
-              <a:t>  横浜という立地から多少の英会話くらいは出来ると思ってましたが、年配の男性が全くできず海外の方が困ってたので助けてあ...</a:t>
+              <a:t>  部屋の広さも設備も料金に見合うものだと思うが、それ以上のものではない</a:t>
             </a:r>
             <a:endParaRPr lang="en-US" sz="1100" dirty="0"/>
           </a:p>
@@ -6266,7 +6540,7 @@
                 <a:ea typeface="Arial" pitchFamily="34" charset="-122"/>
                 <a:cs typeface="Arial" pitchFamily="34" charset="-120"/>
               </a:rPr>
-              <a:t>7.57</a:t>
+              <a:t>7.18</a:t>
             </a:r>
             <a:endParaRPr lang="en-US" sz="3200" dirty="0"/>
           </a:p>
@@ -6391,7 +6665,7 @@
                 <a:ea typeface="Arial" pitchFamily="34" charset="-122"/>
                 <a:cs typeface="Arial" pitchFamily="34" charset="-120"/>
               </a:rPr>
-              <a:t>67.8%</a:t>
+              <a:t>55.4%</a:t>
             </a:r>
             <a:endParaRPr lang="en-US" sz="3200" dirty="0"/>
           </a:p>
@@ -6516,7 +6790,7 @@
                 <a:ea typeface="Arial" pitchFamily="34" charset="-122"/>
                 <a:cs typeface="Arial" pitchFamily="34" charset="-120"/>
               </a:rPr>
-              <a:t>11.9%</a:t>
+              <a:t>16.2%</a:t>
             </a:r>
             <a:endParaRPr lang="en-US" sz="3200" dirty="0"/>
           </a:p>
@@ -6641,7 +6915,7 @@
                 <a:ea typeface="Arial" pitchFamily="34" charset="-122"/>
                 <a:cs typeface="Arial" pitchFamily="34" charset="-120"/>
               </a:rPr>
-              <a:t>143件</a:t>
+              <a:t>74件</a:t>
             </a:r>
             <a:endParaRPr lang="en-US" sz="3200" dirty="0"/>
           </a:p>
@@ -7062,7 +7336,56 @@
                 <a:ea typeface="Arial" pitchFamily="34" charset="-122"/>
                 <a:cs typeface="Arial" pitchFamily="34" charset="-120"/>
               </a:rPr>
-              <a:t>Trip.com(8.35)が最高スコア。</a:t>
+              <a:t>Google(7.68)が最高スコア。</a:t>
+            </a:r>
+            <a:endParaRPr lang="en-US" sz="1100" dirty="0"/>
+          </a:p>
+          <a:p>
+            <a:pPr indent="0" marL="0">
+              <a:spcAft>
+                <a:spcPts val="200"/>
+              </a:spcAft>
+              <a:buNone/>
+            </a:pPr>
+            <a:endParaRPr lang="en-US" sz="1100" dirty="0"/>
+          </a:p>
+          <a:p>
+            <a:pPr indent="0" marL="0">
+              <a:spcAft>
+                <a:spcPts val="200"/>
+              </a:spcAft>
+              <a:buNone/>
+            </a:pPr>
+            <a:r>
+              <a:rPr lang="en-US" sz="1100" b="1" dirty="0">
+                <a:solidFill>
+                  <a:srgbClr val="DC2626"/>
+                </a:solidFill>
+                <a:latin typeface="Arial" pitchFamily="34" charset="0"/>
+                <a:ea typeface="Arial" pitchFamily="34" charset="-122"/>
+                <a:cs typeface="Arial" pitchFamily="34" charset="-120"/>
+              </a:rPr>
+              <a:t>改善対象サイト</a:t>
+            </a:r>
+            <a:endParaRPr lang="en-US" sz="1100" dirty="0"/>
+          </a:p>
+          <a:p>
+            <a:pPr indent="0" marL="0">
+              <a:spcAft>
+                <a:spcPts val="200"/>
+              </a:spcAft>
+              <a:buNone/>
+            </a:pPr>
+            <a:r>
+              <a:rPr lang="en-US" sz="900" dirty="0">
+                <a:solidFill>
+                  <a:srgbClr val="64748B"/>
+                </a:solidFill>
+                <a:latin typeface="Arial" pitchFamily="34" charset="0"/>
+                <a:ea typeface="Arial" pitchFamily="34" charset="-122"/>
+                <a:cs typeface="Arial" pitchFamily="34" charset="-120"/>
+              </a:rPr>
+              <a:t>じゃらん(6.6)が相対的に低い。口コミ返信の強化が急務</a:t>
             </a:r>
             <a:endParaRPr lang="en-US" sz="1100" dirty="0"/>
           </a:p>
@@ -7503,7 +7826,7 @@
                           <a:ea typeface="Arial" pitchFamily="34" charset="-122"/>
                           <a:cs typeface="Arial" pitchFamily="34" charset="-120"/>
                         </a:rPr>
-                        <a:t>Trip.com</a:t>
+                        <a:t>Google</a:t>
                       </a:r>
                       <a:endParaRPr lang="en-US" sz="900" dirty="0">
                         <a:latin typeface="Arial" charset="0"/>
@@ -7571,7 +7894,7 @@
                           <a:ea typeface="Arial" pitchFamily="34" charset="-122"/>
                           <a:cs typeface="Arial" pitchFamily="34" charset="-120"/>
                         </a:rPr>
-                        <a:t>17</a:t>
+                        <a:t>19</a:t>
                       </a:r>
                       <a:endParaRPr lang="en-US" sz="900" dirty="0">
                         <a:latin typeface="Arial" charset="0"/>
@@ -7639,7 +7962,7 @@
                           <a:ea typeface="Arial" pitchFamily="34" charset="-122"/>
                           <a:cs typeface="Arial" pitchFamily="34" charset="-120"/>
                         </a:rPr>
-                        <a:t>8.35</a:t>
+                        <a:t>3.84</a:t>
                       </a:r>
                       <a:endParaRPr lang="en-US" sz="900" dirty="0">
                         <a:latin typeface="Arial" charset="0"/>
@@ -7687,6 +8010,348 @@
                     </a:lnB>
                     <a:solidFill>
                       <a:srgbClr val="E8EFF8"/>
+                    </a:solidFill>
+                  </a:tcPr>
+                </a:tc>
+                <a:tc>
+                  <a:txBody>
+                    <a:bodyPr/>
+                    <a:lstStyle/>
+                    <a:p>
+                      <a:pPr algn="ctr" indent="0" marL="0">
+                        <a:buNone/>
+                      </a:pPr>
+                      <a:r>
+                        <a:rPr lang="en-US" sz="900" dirty="0">
+                          <a:solidFill>
+                            <a:srgbClr val="000000"/>
+                          </a:solidFill>
+                          <a:latin typeface="Arial" pitchFamily="34" charset="0"/>
+                          <a:ea typeface="Arial" pitchFamily="34" charset="-122"/>
+                          <a:cs typeface="Arial" pitchFamily="34" charset="-120"/>
+                        </a:rPr>
+                        <a:t>/5 (×2)</a:t>
+                      </a:r>
+                      <a:endParaRPr lang="en-US" sz="900" dirty="0">
+                        <a:latin typeface="Arial" charset="0"/>
+                        <a:ea typeface="Arial" charset="0"/>
+                        <a:cs typeface="Arial" charset="0"/>
+                      </a:endParaRPr>
+                    </a:p>
+                  </a:txBody>
+                  <a:tcPr marL="91440" marR="91440" marT="45720" marB="45720">
+                    <a:lnL w="6350" cap="flat" cmpd="sng" algn="ctr">
+                      <a:solidFill>
+                        <a:srgbClr val="CBD5E1"/>
+                      </a:solidFill>
+                      <a:prstDash val="solid"/>
+                      <a:round/>
+                      <a:headEnd type="none" w="med" len="med"/>
+                      <a:tailEnd type="none" w="med" len="med"/>
+                    </a:lnL>
+                    <a:lnR w="6350" cap="flat" cmpd="sng" algn="ctr">
+                      <a:solidFill>
+                        <a:srgbClr val="CBD5E1"/>
+                      </a:solidFill>
+                      <a:prstDash val="solid"/>
+                      <a:round/>
+                      <a:headEnd type="none" w="med" len="med"/>
+                      <a:tailEnd type="none" w="med" len="med"/>
+                    </a:lnR>
+                    <a:lnT w="6350" cap="flat" cmpd="sng" algn="ctr">
+                      <a:solidFill>
+                        <a:srgbClr val="CBD5E1"/>
+                      </a:solidFill>
+                      <a:prstDash val="solid"/>
+                      <a:round/>
+                      <a:headEnd type="none" w="med" len="med"/>
+                      <a:tailEnd type="none" w="med" len="med"/>
+                    </a:lnT>
+                    <a:lnB w="6350" cap="flat" cmpd="sng" algn="ctr">
+                      <a:solidFill>
+                        <a:srgbClr val="CBD5E1"/>
+                      </a:solidFill>
+                      <a:prstDash val="solid"/>
+                      <a:round/>
+                      <a:headEnd type="none" w="med" len="med"/>
+                      <a:tailEnd type="none" w="med" len="med"/>
+                    </a:lnB>
+                    <a:solidFill>
+                      <a:srgbClr val="E8EFF8"/>
+                    </a:solidFill>
+                  </a:tcPr>
+                </a:tc>
+                <a:tc>
+                  <a:txBody>
+                    <a:bodyPr/>
+                    <a:lstStyle/>
+                    <a:p>
+                      <a:pPr algn="ctr" indent="0" marL="0">
+                        <a:buNone/>
+                      </a:pPr>
+                      <a:r>
+                        <a:rPr lang="en-US" sz="900" dirty="0">
+                          <a:solidFill>
+                            <a:srgbClr val="000000"/>
+                          </a:solidFill>
+                          <a:latin typeface="Arial" pitchFamily="34" charset="0"/>
+                          <a:ea typeface="Arial" pitchFamily="34" charset="-122"/>
+                          <a:cs typeface="Arial" pitchFamily="34" charset="-120"/>
+                        </a:rPr>
+                        <a:t>7.68</a:t>
+                      </a:r>
+                      <a:endParaRPr lang="en-US" sz="900" dirty="0">
+                        <a:latin typeface="Arial" charset="0"/>
+                        <a:ea typeface="Arial" charset="0"/>
+                        <a:cs typeface="Arial" charset="0"/>
+                      </a:endParaRPr>
+                    </a:p>
+                  </a:txBody>
+                  <a:tcPr marL="91440" marR="91440" marT="45720" marB="45720">
+                    <a:lnL w="6350" cap="flat" cmpd="sng" algn="ctr">
+                      <a:solidFill>
+                        <a:srgbClr val="CBD5E1"/>
+                      </a:solidFill>
+                      <a:prstDash val="solid"/>
+                      <a:round/>
+                      <a:headEnd type="none" w="med" len="med"/>
+                      <a:tailEnd type="none" w="med" len="med"/>
+                    </a:lnL>
+                    <a:lnR w="6350" cap="flat" cmpd="sng" algn="ctr">
+                      <a:solidFill>
+                        <a:srgbClr val="CBD5E1"/>
+                      </a:solidFill>
+                      <a:prstDash val="solid"/>
+                      <a:round/>
+                      <a:headEnd type="none" w="med" len="med"/>
+                      <a:tailEnd type="none" w="med" len="med"/>
+                    </a:lnR>
+                    <a:lnT w="6350" cap="flat" cmpd="sng" algn="ctr">
+                      <a:solidFill>
+                        <a:srgbClr val="CBD5E1"/>
+                      </a:solidFill>
+                      <a:prstDash val="solid"/>
+                      <a:round/>
+                      <a:headEnd type="none" w="med" len="med"/>
+                      <a:tailEnd type="none" w="med" len="med"/>
+                    </a:lnT>
+                    <a:lnB w="6350" cap="flat" cmpd="sng" algn="ctr">
+                      <a:solidFill>
+                        <a:srgbClr val="CBD5E1"/>
+                      </a:solidFill>
+                      <a:prstDash val="solid"/>
+                      <a:round/>
+                      <a:headEnd type="none" w="med" len="med"/>
+                      <a:tailEnd type="none" w="med" len="med"/>
+                    </a:lnB>
+                    <a:solidFill>
+                      <a:srgbClr val="E8EFF8"/>
+                    </a:solidFill>
+                  </a:tcPr>
+                </a:tc>
+              </a:tr>
+              <a:tr h="201168">
+                <a:tc>
+                  <a:txBody>
+                    <a:bodyPr/>
+                    <a:lstStyle/>
+                    <a:p>
+                      <a:pPr algn="ctr" indent="0" marL="0">
+                        <a:buNone/>
+                      </a:pPr>
+                      <a:r>
+                        <a:rPr lang="en-US" sz="900" dirty="0">
+                          <a:solidFill>
+                            <a:srgbClr val="000000"/>
+                          </a:solidFill>
+                          <a:latin typeface="Arial" pitchFamily="34" charset="0"/>
+                          <a:ea typeface="Arial" pitchFamily="34" charset="-122"/>
+                          <a:cs typeface="Arial" pitchFamily="34" charset="-120"/>
+                        </a:rPr>
+                        <a:t>Trip.com</a:t>
+                      </a:r>
+                      <a:endParaRPr lang="en-US" sz="900" dirty="0">
+                        <a:latin typeface="Arial" charset="0"/>
+                        <a:ea typeface="Arial" charset="0"/>
+                        <a:cs typeface="Arial" charset="0"/>
+                      </a:endParaRPr>
+                    </a:p>
+                  </a:txBody>
+                  <a:tcPr marL="91440" marR="91440" marT="45720" marB="45720">
+                    <a:lnL w="6350" cap="flat" cmpd="sng" algn="ctr">
+                      <a:solidFill>
+                        <a:srgbClr val="CBD5E1"/>
+                      </a:solidFill>
+                      <a:prstDash val="solid"/>
+                      <a:round/>
+                      <a:headEnd type="none" w="med" len="med"/>
+                      <a:tailEnd type="none" w="med" len="med"/>
+                    </a:lnL>
+                    <a:lnR w="6350" cap="flat" cmpd="sng" algn="ctr">
+                      <a:solidFill>
+                        <a:srgbClr val="CBD5E1"/>
+                      </a:solidFill>
+                      <a:prstDash val="solid"/>
+                      <a:round/>
+                      <a:headEnd type="none" w="med" len="med"/>
+                      <a:tailEnd type="none" w="med" len="med"/>
+                    </a:lnR>
+                    <a:lnT w="6350" cap="flat" cmpd="sng" algn="ctr">
+                      <a:solidFill>
+                        <a:srgbClr val="CBD5E1"/>
+                      </a:solidFill>
+                      <a:prstDash val="solid"/>
+                      <a:round/>
+                      <a:headEnd type="none" w="med" len="med"/>
+                      <a:tailEnd type="none" w="med" len="med"/>
+                    </a:lnT>
+                    <a:lnB w="6350" cap="flat" cmpd="sng" algn="ctr">
+                      <a:solidFill>
+                        <a:srgbClr val="CBD5E1"/>
+                      </a:solidFill>
+                      <a:prstDash val="solid"/>
+                      <a:round/>
+                      <a:headEnd type="none" w="med" len="med"/>
+                      <a:tailEnd type="none" w="med" len="med"/>
+                    </a:lnB>
+                    <a:solidFill>
+                      <a:srgbClr val="FFFFFF"/>
+                    </a:solidFill>
+                  </a:tcPr>
+                </a:tc>
+                <a:tc>
+                  <a:txBody>
+                    <a:bodyPr/>
+                    <a:lstStyle/>
+                    <a:p>
+                      <a:pPr algn="ctr" indent="0" marL="0">
+                        <a:buNone/>
+                      </a:pPr>
+                      <a:r>
+                        <a:rPr lang="en-US" sz="900" dirty="0">
+                          <a:solidFill>
+                            <a:srgbClr val="000000"/>
+                          </a:solidFill>
+                          <a:latin typeface="Arial" pitchFamily="34" charset="0"/>
+                          <a:ea typeface="Arial" pitchFamily="34" charset="-122"/>
+                          <a:cs typeface="Arial" pitchFamily="34" charset="-120"/>
+                        </a:rPr>
+                        <a:t>9</a:t>
+                      </a:r>
+                      <a:endParaRPr lang="en-US" sz="900" dirty="0">
+                        <a:latin typeface="Arial" charset="0"/>
+                        <a:ea typeface="Arial" charset="0"/>
+                        <a:cs typeface="Arial" charset="0"/>
+                      </a:endParaRPr>
+                    </a:p>
+                  </a:txBody>
+                  <a:tcPr marL="91440" marR="91440" marT="45720" marB="45720">
+                    <a:lnL w="6350" cap="flat" cmpd="sng" algn="ctr">
+                      <a:solidFill>
+                        <a:srgbClr val="CBD5E1"/>
+                      </a:solidFill>
+                      <a:prstDash val="solid"/>
+                      <a:round/>
+                      <a:headEnd type="none" w="med" len="med"/>
+                      <a:tailEnd type="none" w="med" len="med"/>
+                    </a:lnL>
+                    <a:lnR w="6350" cap="flat" cmpd="sng" algn="ctr">
+                      <a:solidFill>
+                        <a:srgbClr val="CBD5E1"/>
+                      </a:solidFill>
+                      <a:prstDash val="solid"/>
+                      <a:round/>
+                      <a:headEnd type="none" w="med" len="med"/>
+                      <a:tailEnd type="none" w="med" len="med"/>
+                    </a:lnR>
+                    <a:lnT w="6350" cap="flat" cmpd="sng" algn="ctr">
+                      <a:solidFill>
+                        <a:srgbClr val="CBD5E1"/>
+                      </a:solidFill>
+                      <a:prstDash val="solid"/>
+                      <a:round/>
+                      <a:headEnd type="none" w="med" len="med"/>
+                      <a:tailEnd type="none" w="med" len="med"/>
+                    </a:lnT>
+                    <a:lnB w="6350" cap="flat" cmpd="sng" algn="ctr">
+                      <a:solidFill>
+                        <a:srgbClr val="CBD5E1"/>
+                      </a:solidFill>
+                      <a:prstDash val="solid"/>
+                      <a:round/>
+                      <a:headEnd type="none" w="med" len="med"/>
+                      <a:tailEnd type="none" w="med" len="med"/>
+                    </a:lnB>
+                    <a:solidFill>
+                      <a:srgbClr val="FFFFFF"/>
+                    </a:solidFill>
+                  </a:tcPr>
+                </a:tc>
+                <a:tc>
+                  <a:txBody>
+                    <a:bodyPr/>
+                    <a:lstStyle/>
+                    <a:p>
+                      <a:pPr algn="ctr" indent="0" marL="0">
+                        <a:buNone/>
+                      </a:pPr>
+                      <a:r>
+                        <a:rPr lang="en-US" sz="900" dirty="0">
+                          <a:solidFill>
+                            <a:srgbClr val="000000"/>
+                          </a:solidFill>
+                          <a:latin typeface="Arial" pitchFamily="34" charset="0"/>
+                          <a:ea typeface="Arial" pitchFamily="34" charset="-122"/>
+                          <a:cs typeface="Arial" pitchFamily="34" charset="-120"/>
+                        </a:rPr>
+                        <a:t>7.56</a:t>
+                      </a:r>
+                      <a:endParaRPr lang="en-US" sz="900" dirty="0">
+                        <a:latin typeface="Arial" charset="0"/>
+                        <a:ea typeface="Arial" charset="0"/>
+                        <a:cs typeface="Arial" charset="0"/>
+                      </a:endParaRPr>
+                    </a:p>
+                  </a:txBody>
+                  <a:tcPr marL="91440" marR="91440" marT="45720" marB="45720">
+                    <a:lnL w="6350" cap="flat" cmpd="sng" algn="ctr">
+                      <a:solidFill>
+                        <a:srgbClr val="CBD5E1"/>
+                      </a:solidFill>
+                      <a:prstDash val="solid"/>
+                      <a:round/>
+                      <a:headEnd type="none" w="med" len="med"/>
+                      <a:tailEnd type="none" w="med" len="med"/>
+                    </a:lnL>
+                    <a:lnR w="6350" cap="flat" cmpd="sng" algn="ctr">
+                      <a:solidFill>
+                        <a:srgbClr val="CBD5E1"/>
+                      </a:solidFill>
+                      <a:prstDash val="solid"/>
+                      <a:round/>
+                      <a:headEnd type="none" w="med" len="med"/>
+                      <a:tailEnd type="none" w="med" len="med"/>
+                    </a:lnR>
+                    <a:lnT w="6350" cap="flat" cmpd="sng" algn="ctr">
+                      <a:solidFill>
+                        <a:srgbClr val="CBD5E1"/>
+                      </a:solidFill>
+                      <a:prstDash val="solid"/>
+                      <a:round/>
+                      <a:headEnd type="none" w="med" len="med"/>
+                      <a:tailEnd type="none" w="med" len="med"/>
+                    </a:lnT>
+                    <a:lnB w="6350" cap="flat" cmpd="sng" algn="ctr">
+                      <a:solidFill>
+                        <a:srgbClr val="CBD5E1"/>
+                      </a:solidFill>
+                      <a:prstDash val="solid"/>
+                      <a:round/>
+                      <a:headEnd type="none" w="med" len="med"/>
+                      <a:tailEnd type="none" w="med" len="med"/>
+                    </a:lnB>
+                    <a:solidFill>
+                      <a:srgbClr val="FFFFFF"/>
                     </a:solidFill>
                   </a:tcPr>
                 </a:tc>
@@ -7754,6 +8419,144 @@
                       <a:tailEnd type="none" w="med" len="med"/>
                     </a:lnB>
                     <a:solidFill>
+                      <a:srgbClr val="FFFFFF"/>
+                    </a:solidFill>
+                  </a:tcPr>
+                </a:tc>
+                <a:tc>
+                  <a:txBody>
+                    <a:bodyPr/>
+                    <a:lstStyle/>
+                    <a:p>
+                      <a:pPr algn="ctr" indent="0" marL="0">
+                        <a:buNone/>
+                      </a:pPr>
+                      <a:r>
+                        <a:rPr lang="en-US" sz="900" dirty="0">
+                          <a:solidFill>
+                            <a:srgbClr val="000000"/>
+                          </a:solidFill>
+                          <a:latin typeface="Arial" pitchFamily="34" charset="0"/>
+                          <a:ea typeface="Arial" pitchFamily="34" charset="-122"/>
+                          <a:cs typeface="Arial" pitchFamily="34" charset="-120"/>
+                        </a:rPr>
+                        <a:t>7.56</a:t>
+                      </a:r>
+                      <a:endParaRPr lang="en-US" sz="900" dirty="0">
+                        <a:latin typeface="Arial" charset="0"/>
+                        <a:ea typeface="Arial" charset="0"/>
+                        <a:cs typeface="Arial" charset="0"/>
+                      </a:endParaRPr>
+                    </a:p>
+                  </a:txBody>
+                  <a:tcPr marL="91440" marR="91440" marT="45720" marB="45720">
+                    <a:lnL w="6350" cap="flat" cmpd="sng" algn="ctr">
+                      <a:solidFill>
+                        <a:srgbClr val="CBD5E1"/>
+                      </a:solidFill>
+                      <a:prstDash val="solid"/>
+                      <a:round/>
+                      <a:headEnd type="none" w="med" len="med"/>
+                      <a:tailEnd type="none" w="med" len="med"/>
+                    </a:lnL>
+                    <a:lnR w="6350" cap="flat" cmpd="sng" algn="ctr">
+                      <a:solidFill>
+                        <a:srgbClr val="CBD5E1"/>
+                      </a:solidFill>
+                      <a:prstDash val="solid"/>
+                      <a:round/>
+                      <a:headEnd type="none" w="med" len="med"/>
+                      <a:tailEnd type="none" w="med" len="med"/>
+                    </a:lnR>
+                    <a:lnT w="6350" cap="flat" cmpd="sng" algn="ctr">
+                      <a:solidFill>
+                        <a:srgbClr val="CBD5E1"/>
+                      </a:solidFill>
+                      <a:prstDash val="solid"/>
+                      <a:round/>
+                      <a:headEnd type="none" w="med" len="med"/>
+                      <a:tailEnd type="none" w="med" len="med"/>
+                    </a:lnT>
+                    <a:lnB w="6350" cap="flat" cmpd="sng" algn="ctr">
+                      <a:solidFill>
+                        <a:srgbClr val="CBD5E1"/>
+                      </a:solidFill>
+                      <a:prstDash val="solid"/>
+                      <a:round/>
+                      <a:headEnd type="none" w="med" len="med"/>
+                      <a:tailEnd type="none" w="med" len="med"/>
+                    </a:lnB>
+                    <a:solidFill>
+                      <a:srgbClr val="FFFFFF"/>
+                    </a:solidFill>
+                  </a:tcPr>
+                </a:tc>
+              </a:tr>
+              <a:tr h="201168">
+                <a:tc>
+                  <a:txBody>
+                    <a:bodyPr/>
+                    <a:lstStyle/>
+                    <a:p>
+                      <a:pPr algn="ctr" indent="0" marL="0">
+                        <a:buNone/>
+                      </a:pPr>
+                      <a:r>
+                        <a:rPr lang="en-US" sz="900" dirty="0">
+                          <a:solidFill>
+                            <a:srgbClr val="000000"/>
+                          </a:solidFill>
+                          <a:latin typeface="Arial" pitchFamily="34" charset="0"/>
+                          <a:ea typeface="Arial" pitchFamily="34" charset="-122"/>
+                          <a:cs typeface="Arial" pitchFamily="34" charset="-120"/>
+                        </a:rPr>
+                        <a:t>楽天トラベル</a:t>
+                      </a:r>
+                      <a:endParaRPr lang="en-US" sz="900" dirty="0">
+                        <a:latin typeface="Arial" charset="0"/>
+                        <a:ea typeface="Arial" charset="0"/>
+                        <a:cs typeface="Arial" charset="0"/>
+                      </a:endParaRPr>
+                    </a:p>
+                  </a:txBody>
+                  <a:tcPr marL="91440" marR="91440" marT="45720" marB="45720">
+                    <a:lnL w="6350" cap="flat" cmpd="sng" algn="ctr">
+                      <a:solidFill>
+                        <a:srgbClr val="CBD5E1"/>
+                      </a:solidFill>
+                      <a:prstDash val="solid"/>
+                      <a:round/>
+                      <a:headEnd type="none" w="med" len="med"/>
+                      <a:tailEnd type="none" w="med" len="med"/>
+                    </a:lnL>
+                    <a:lnR w="6350" cap="flat" cmpd="sng" algn="ctr">
+                      <a:solidFill>
+                        <a:srgbClr val="CBD5E1"/>
+                      </a:solidFill>
+                      <a:prstDash val="solid"/>
+                      <a:round/>
+                      <a:headEnd type="none" w="med" len="med"/>
+                      <a:tailEnd type="none" w="med" len="med"/>
+                    </a:lnR>
+                    <a:lnT w="6350" cap="flat" cmpd="sng" algn="ctr">
+                      <a:solidFill>
+                        <a:srgbClr val="CBD5E1"/>
+                      </a:solidFill>
+                      <a:prstDash val="solid"/>
+                      <a:round/>
+                      <a:headEnd type="none" w="med" len="med"/>
+                      <a:tailEnd type="none" w="med" len="med"/>
+                    </a:lnT>
+                    <a:lnB w="6350" cap="flat" cmpd="sng" algn="ctr">
+                      <a:solidFill>
+                        <a:srgbClr val="CBD5E1"/>
+                      </a:solidFill>
+                      <a:prstDash val="solid"/>
+                      <a:round/>
+                      <a:headEnd type="none" w="med" len="med"/>
+                      <a:tailEnd type="none" w="med" len="med"/>
+                    </a:lnB>
+                    <a:solidFill>
                       <a:srgbClr val="E8EFF8"/>
                     </a:solidFill>
                   </a:tcPr>
@@ -7775,7 +8578,211 @@
                           <a:ea typeface="Arial" pitchFamily="34" charset="-122"/>
                           <a:cs typeface="Arial" pitchFamily="34" charset="-120"/>
                         </a:rPr>
-                        <a:t>8.35</a:t>
+                        <a:t>22</a:t>
+                      </a:r>
+                      <a:endParaRPr lang="en-US" sz="900" dirty="0">
+                        <a:latin typeface="Arial" charset="0"/>
+                        <a:ea typeface="Arial" charset="0"/>
+                        <a:cs typeface="Arial" charset="0"/>
+                      </a:endParaRPr>
+                    </a:p>
+                  </a:txBody>
+                  <a:tcPr marL="91440" marR="91440" marT="45720" marB="45720">
+                    <a:lnL w="6350" cap="flat" cmpd="sng" algn="ctr">
+                      <a:solidFill>
+                        <a:srgbClr val="CBD5E1"/>
+                      </a:solidFill>
+                      <a:prstDash val="solid"/>
+                      <a:round/>
+                      <a:headEnd type="none" w="med" len="med"/>
+                      <a:tailEnd type="none" w="med" len="med"/>
+                    </a:lnL>
+                    <a:lnR w="6350" cap="flat" cmpd="sng" algn="ctr">
+                      <a:solidFill>
+                        <a:srgbClr val="CBD5E1"/>
+                      </a:solidFill>
+                      <a:prstDash val="solid"/>
+                      <a:round/>
+                      <a:headEnd type="none" w="med" len="med"/>
+                      <a:tailEnd type="none" w="med" len="med"/>
+                    </a:lnR>
+                    <a:lnT w="6350" cap="flat" cmpd="sng" algn="ctr">
+                      <a:solidFill>
+                        <a:srgbClr val="CBD5E1"/>
+                      </a:solidFill>
+                      <a:prstDash val="solid"/>
+                      <a:round/>
+                      <a:headEnd type="none" w="med" len="med"/>
+                      <a:tailEnd type="none" w="med" len="med"/>
+                    </a:lnT>
+                    <a:lnB w="6350" cap="flat" cmpd="sng" algn="ctr">
+                      <a:solidFill>
+                        <a:srgbClr val="CBD5E1"/>
+                      </a:solidFill>
+                      <a:prstDash val="solid"/>
+                      <a:round/>
+                      <a:headEnd type="none" w="med" len="med"/>
+                      <a:tailEnd type="none" w="med" len="med"/>
+                    </a:lnB>
+                    <a:solidFill>
+                      <a:srgbClr val="E8EFF8"/>
+                    </a:solidFill>
+                  </a:tcPr>
+                </a:tc>
+                <a:tc>
+                  <a:txBody>
+                    <a:bodyPr/>
+                    <a:lstStyle/>
+                    <a:p>
+                      <a:pPr algn="ctr" indent="0" marL="0">
+                        <a:buNone/>
+                      </a:pPr>
+                      <a:r>
+                        <a:rPr lang="en-US" sz="900" dirty="0">
+                          <a:solidFill>
+                            <a:srgbClr val="000000"/>
+                          </a:solidFill>
+                          <a:latin typeface="Arial" pitchFamily="34" charset="0"/>
+                          <a:ea typeface="Arial" pitchFamily="34" charset="-122"/>
+                          <a:cs typeface="Arial" pitchFamily="34" charset="-120"/>
+                        </a:rPr>
+                        <a:t>3.55</a:t>
+                      </a:r>
+                      <a:endParaRPr lang="en-US" sz="900" dirty="0">
+                        <a:latin typeface="Arial" charset="0"/>
+                        <a:ea typeface="Arial" charset="0"/>
+                        <a:cs typeface="Arial" charset="0"/>
+                      </a:endParaRPr>
+                    </a:p>
+                  </a:txBody>
+                  <a:tcPr marL="91440" marR="91440" marT="45720" marB="45720">
+                    <a:lnL w="6350" cap="flat" cmpd="sng" algn="ctr">
+                      <a:solidFill>
+                        <a:srgbClr val="CBD5E1"/>
+                      </a:solidFill>
+                      <a:prstDash val="solid"/>
+                      <a:round/>
+                      <a:headEnd type="none" w="med" len="med"/>
+                      <a:tailEnd type="none" w="med" len="med"/>
+                    </a:lnL>
+                    <a:lnR w="6350" cap="flat" cmpd="sng" algn="ctr">
+                      <a:solidFill>
+                        <a:srgbClr val="CBD5E1"/>
+                      </a:solidFill>
+                      <a:prstDash val="solid"/>
+                      <a:round/>
+                      <a:headEnd type="none" w="med" len="med"/>
+                      <a:tailEnd type="none" w="med" len="med"/>
+                    </a:lnR>
+                    <a:lnT w="6350" cap="flat" cmpd="sng" algn="ctr">
+                      <a:solidFill>
+                        <a:srgbClr val="CBD5E1"/>
+                      </a:solidFill>
+                      <a:prstDash val="solid"/>
+                      <a:round/>
+                      <a:headEnd type="none" w="med" len="med"/>
+                      <a:tailEnd type="none" w="med" len="med"/>
+                    </a:lnT>
+                    <a:lnB w="6350" cap="flat" cmpd="sng" algn="ctr">
+                      <a:solidFill>
+                        <a:srgbClr val="CBD5E1"/>
+                      </a:solidFill>
+                      <a:prstDash val="solid"/>
+                      <a:round/>
+                      <a:headEnd type="none" w="med" len="med"/>
+                      <a:tailEnd type="none" w="med" len="med"/>
+                    </a:lnB>
+                    <a:solidFill>
+                      <a:srgbClr val="E8EFF8"/>
+                    </a:solidFill>
+                  </a:tcPr>
+                </a:tc>
+                <a:tc>
+                  <a:txBody>
+                    <a:bodyPr/>
+                    <a:lstStyle/>
+                    <a:p>
+                      <a:pPr algn="ctr" indent="0" marL="0">
+                        <a:buNone/>
+                      </a:pPr>
+                      <a:r>
+                        <a:rPr lang="en-US" sz="900" dirty="0">
+                          <a:solidFill>
+                            <a:srgbClr val="000000"/>
+                          </a:solidFill>
+                          <a:latin typeface="Arial" pitchFamily="34" charset="0"/>
+                          <a:ea typeface="Arial" pitchFamily="34" charset="-122"/>
+                          <a:cs typeface="Arial" pitchFamily="34" charset="-120"/>
+                        </a:rPr>
+                        <a:t>/5 (×2)</a:t>
+                      </a:r>
+                      <a:endParaRPr lang="en-US" sz="900" dirty="0">
+                        <a:latin typeface="Arial" charset="0"/>
+                        <a:ea typeface="Arial" charset="0"/>
+                        <a:cs typeface="Arial" charset="0"/>
+                      </a:endParaRPr>
+                    </a:p>
+                  </a:txBody>
+                  <a:tcPr marL="91440" marR="91440" marT="45720" marB="45720">
+                    <a:lnL w="6350" cap="flat" cmpd="sng" algn="ctr">
+                      <a:solidFill>
+                        <a:srgbClr val="CBD5E1"/>
+                      </a:solidFill>
+                      <a:prstDash val="solid"/>
+                      <a:round/>
+                      <a:headEnd type="none" w="med" len="med"/>
+                      <a:tailEnd type="none" w="med" len="med"/>
+                    </a:lnL>
+                    <a:lnR w="6350" cap="flat" cmpd="sng" algn="ctr">
+                      <a:solidFill>
+                        <a:srgbClr val="CBD5E1"/>
+                      </a:solidFill>
+                      <a:prstDash val="solid"/>
+                      <a:round/>
+                      <a:headEnd type="none" w="med" len="med"/>
+                      <a:tailEnd type="none" w="med" len="med"/>
+                    </a:lnR>
+                    <a:lnT w="6350" cap="flat" cmpd="sng" algn="ctr">
+                      <a:solidFill>
+                        <a:srgbClr val="CBD5E1"/>
+                      </a:solidFill>
+                      <a:prstDash val="solid"/>
+                      <a:round/>
+                      <a:headEnd type="none" w="med" len="med"/>
+                      <a:tailEnd type="none" w="med" len="med"/>
+                    </a:lnT>
+                    <a:lnB w="6350" cap="flat" cmpd="sng" algn="ctr">
+                      <a:solidFill>
+                        <a:srgbClr val="CBD5E1"/>
+                      </a:solidFill>
+                      <a:prstDash val="solid"/>
+                      <a:round/>
+                      <a:headEnd type="none" w="med" len="med"/>
+                      <a:tailEnd type="none" w="med" len="med"/>
+                    </a:lnB>
+                    <a:solidFill>
+                      <a:srgbClr val="E8EFF8"/>
+                    </a:solidFill>
+                  </a:tcPr>
+                </a:tc>
+                <a:tc>
+                  <a:txBody>
+                    <a:bodyPr/>
+                    <a:lstStyle/>
+                    <a:p>
+                      <a:pPr algn="ctr" indent="0" marL="0">
+                        <a:buNone/>
+                      </a:pPr>
+                      <a:r>
+                        <a:rPr lang="en-US" sz="900" dirty="0">
+                          <a:solidFill>
+                            <a:srgbClr val="000000"/>
+                          </a:solidFill>
+                          <a:latin typeface="Arial" pitchFamily="34" charset="0"/>
+                          <a:ea typeface="Arial" pitchFamily="34" charset="-122"/>
+                          <a:cs typeface="Arial" pitchFamily="34" charset="-120"/>
+                        </a:rPr>
+                        <a:t>7.09</a:t>
                       </a:r>
                       <a:endParaRPr lang="en-US" sz="900" dirty="0">
                         <a:latin typeface="Arial" charset="0"/>
@@ -7913,7 +8920,7 @@
                           <a:ea typeface="Arial" pitchFamily="34" charset="-122"/>
                           <a:cs typeface="Arial" pitchFamily="34" charset="-120"/>
                         </a:rPr>
-                        <a:t>9</a:t>
+                        <a:t>4</a:t>
                       </a:r>
                       <a:endParaRPr lang="en-US" sz="900" dirty="0">
                         <a:latin typeface="Arial" charset="0"/>
@@ -7981,7 +8988,7 @@
                           <a:ea typeface="Arial" pitchFamily="34" charset="-122"/>
                           <a:cs typeface="Arial" pitchFamily="34" charset="-120"/>
                         </a:rPr>
-                        <a:t>8</a:t>
+                        <a:t>7</a:t>
                       </a:r>
                       <a:endParaRPr lang="en-US" sz="900" dirty="0">
                         <a:latin typeface="Arial" charset="0"/>
@@ -8117,691 +9124,7 @@
                           <a:ea typeface="Arial" pitchFamily="34" charset="-122"/>
                           <a:cs typeface="Arial" pitchFamily="34" charset="-120"/>
                         </a:rPr>
-                        <a:t>8</a:t>
-                      </a:r>
-                      <a:endParaRPr lang="en-US" sz="900" dirty="0">
-                        <a:latin typeface="Arial" charset="0"/>
-                        <a:ea typeface="Arial" charset="0"/>
-                        <a:cs typeface="Arial" charset="0"/>
-                      </a:endParaRPr>
-                    </a:p>
-                  </a:txBody>
-                  <a:tcPr marL="91440" marR="91440" marT="45720" marB="45720">
-                    <a:lnL w="6350" cap="flat" cmpd="sng" algn="ctr">
-                      <a:solidFill>
-                        <a:srgbClr val="CBD5E1"/>
-                      </a:solidFill>
-                      <a:prstDash val="solid"/>
-                      <a:round/>
-                      <a:headEnd type="none" w="med" len="med"/>
-                      <a:tailEnd type="none" w="med" len="med"/>
-                    </a:lnL>
-                    <a:lnR w="6350" cap="flat" cmpd="sng" algn="ctr">
-                      <a:solidFill>
-                        <a:srgbClr val="CBD5E1"/>
-                      </a:solidFill>
-                      <a:prstDash val="solid"/>
-                      <a:round/>
-                      <a:headEnd type="none" w="med" len="med"/>
-                      <a:tailEnd type="none" w="med" len="med"/>
-                    </a:lnR>
-                    <a:lnT w="6350" cap="flat" cmpd="sng" algn="ctr">
-                      <a:solidFill>
-                        <a:srgbClr val="CBD5E1"/>
-                      </a:solidFill>
-                      <a:prstDash val="solid"/>
-                      <a:round/>
-                      <a:headEnd type="none" w="med" len="med"/>
-                      <a:tailEnd type="none" w="med" len="med"/>
-                    </a:lnT>
-                    <a:lnB w="6350" cap="flat" cmpd="sng" algn="ctr">
-                      <a:solidFill>
-                        <a:srgbClr val="CBD5E1"/>
-                      </a:solidFill>
-                      <a:prstDash val="solid"/>
-                      <a:round/>
-                      <a:headEnd type="none" w="med" len="med"/>
-                      <a:tailEnd type="none" w="med" len="med"/>
-                    </a:lnB>
-                    <a:solidFill>
-                      <a:srgbClr val="FFFFFF"/>
-                    </a:solidFill>
-                  </a:tcPr>
-                </a:tc>
-              </a:tr>
-              <a:tr h="201168">
-                <a:tc>
-                  <a:txBody>
-                    <a:bodyPr/>
-                    <a:lstStyle/>
-                    <a:p>
-                      <a:pPr algn="ctr" indent="0" marL="0">
-                        <a:buNone/>
-                      </a:pPr>
-                      <a:r>
-                        <a:rPr lang="en-US" sz="900" dirty="0">
-                          <a:solidFill>
-                            <a:srgbClr val="000000"/>
-                          </a:solidFill>
-                          <a:latin typeface="Arial" pitchFamily="34" charset="0"/>
-                          <a:ea typeface="Arial" pitchFamily="34" charset="-122"/>
-                          <a:cs typeface="Arial" pitchFamily="34" charset="-120"/>
-                        </a:rPr>
-                        <a:t>Google</a:t>
-                      </a:r>
-                      <a:endParaRPr lang="en-US" sz="900" dirty="0">
-                        <a:latin typeface="Arial" charset="0"/>
-                        <a:ea typeface="Arial" charset="0"/>
-                        <a:cs typeface="Arial" charset="0"/>
-                      </a:endParaRPr>
-                    </a:p>
-                  </a:txBody>
-                  <a:tcPr marL="91440" marR="91440" marT="45720" marB="45720">
-                    <a:lnL w="6350" cap="flat" cmpd="sng" algn="ctr">
-                      <a:solidFill>
-                        <a:srgbClr val="CBD5E1"/>
-                      </a:solidFill>
-                      <a:prstDash val="solid"/>
-                      <a:round/>
-                      <a:headEnd type="none" w="med" len="med"/>
-                      <a:tailEnd type="none" w="med" len="med"/>
-                    </a:lnL>
-                    <a:lnR w="6350" cap="flat" cmpd="sng" algn="ctr">
-                      <a:solidFill>
-                        <a:srgbClr val="CBD5E1"/>
-                      </a:solidFill>
-                      <a:prstDash val="solid"/>
-                      <a:round/>
-                      <a:headEnd type="none" w="med" len="med"/>
-                      <a:tailEnd type="none" w="med" len="med"/>
-                    </a:lnR>
-                    <a:lnT w="6350" cap="flat" cmpd="sng" algn="ctr">
-                      <a:solidFill>
-                        <a:srgbClr val="CBD5E1"/>
-                      </a:solidFill>
-                      <a:prstDash val="solid"/>
-                      <a:round/>
-                      <a:headEnd type="none" w="med" len="med"/>
-                      <a:tailEnd type="none" w="med" len="med"/>
-                    </a:lnT>
-                    <a:lnB w="6350" cap="flat" cmpd="sng" algn="ctr">
-                      <a:solidFill>
-                        <a:srgbClr val="CBD5E1"/>
-                      </a:solidFill>
-                      <a:prstDash val="solid"/>
-                      <a:round/>
-                      <a:headEnd type="none" w="med" len="med"/>
-                      <a:tailEnd type="none" w="med" len="med"/>
-                    </a:lnB>
-                    <a:solidFill>
-                      <a:srgbClr val="E8EFF8"/>
-                    </a:solidFill>
-                  </a:tcPr>
-                </a:tc>
-                <a:tc>
-                  <a:txBody>
-                    <a:bodyPr/>
-                    <a:lstStyle/>
-                    <a:p>
-                      <a:pPr algn="ctr" indent="0" marL="0">
-                        <a:buNone/>
-                      </a:pPr>
-                      <a:r>
-                        <a:rPr lang="en-US" sz="900" dirty="0">
-                          <a:solidFill>
-                            <a:srgbClr val="000000"/>
-                          </a:solidFill>
-                          <a:latin typeface="Arial" pitchFamily="34" charset="0"/>
-                          <a:ea typeface="Arial" pitchFamily="34" charset="-122"/>
-                          <a:cs typeface="Arial" pitchFamily="34" charset="-120"/>
-                        </a:rPr>
-                        <a:t>23</a:t>
-                      </a:r>
-                      <a:endParaRPr lang="en-US" sz="900" dirty="0">
-                        <a:latin typeface="Arial" charset="0"/>
-                        <a:ea typeface="Arial" charset="0"/>
-                        <a:cs typeface="Arial" charset="0"/>
-                      </a:endParaRPr>
-                    </a:p>
-                  </a:txBody>
-                  <a:tcPr marL="91440" marR="91440" marT="45720" marB="45720">
-                    <a:lnL w="6350" cap="flat" cmpd="sng" algn="ctr">
-                      <a:solidFill>
-                        <a:srgbClr val="CBD5E1"/>
-                      </a:solidFill>
-                      <a:prstDash val="solid"/>
-                      <a:round/>
-                      <a:headEnd type="none" w="med" len="med"/>
-                      <a:tailEnd type="none" w="med" len="med"/>
-                    </a:lnL>
-                    <a:lnR w="6350" cap="flat" cmpd="sng" algn="ctr">
-                      <a:solidFill>
-                        <a:srgbClr val="CBD5E1"/>
-                      </a:solidFill>
-                      <a:prstDash val="solid"/>
-                      <a:round/>
-                      <a:headEnd type="none" w="med" len="med"/>
-                      <a:tailEnd type="none" w="med" len="med"/>
-                    </a:lnR>
-                    <a:lnT w="6350" cap="flat" cmpd="sng" algn="ctr">
-                      <a:solidFill>
-                        <a:srgbClr val="CBD5E1"/>
-                      </a:solidFill>
-                      <a:prstDash val="solid"/>
-                      <a:round/>
-                      <a:headEnd type="none" w="med" len="med"/>
-                      <a:tailEnd type="none" w="med" len="med"/>
-                    </a:lnT>
-                    <a:lnB w="6350" cap="flat" cmpd="sng" algn="ctr">
-                      <a:solidFill>
-                        <a:srgbClr val="CBD5E1"/>
-                      </a:solidFill>
-                      <a:prstDash val="solid"/>
-                      <a:round/>
-                      <a:headEnd type="none" w="med" len="med"/>
-                      <a:tailEnd type="none" w="med" len="med"/>
-                    </a:lnB>
-                    <a:solidFill>
-                      <a:srgbClr val="E8EFF8"/>
-                    </a:solidFill>
-                  </a:tcPr>
-                </a:tc>
-                <a:tc>
-                  <a:txBody>
-                    <a:bodyPr/>
-                    <a:lstStyle/>
-                    <a:p>
-                      <a:pPr algn="ctr" indent="0" marL="0">
-                        <a:buNone/>
-                      </a:pPr>
-                      <a:r>
-                        <a:rPr lang="en-US" sz="900" dirty="0">
-                          <a:solidFill>
-                            <a:srgbClr val="000000"/>
-                          </a:solidFill>
-                          <a:latin typeface="Arial" pitchFamily="34" charset="0"/>
-                          <a:ea typeface="Arial" pitchFamily="34" charset="-122"/>
-                          <a:cs typeface="Arial" pitchFamily="34" charset="-120"/>
-                        </a:rPr>
-                        <a:t>3.78</a:t>
-                      </a:r>
-                      <a:endParaRPr lang="en-US" sz="900" dirty="0">
-                        <a:latin typeface="Arial" charset="0"/>
-                        <a:ea typeface="Arial" charset="0"/>
-                        <a:cs typeface="Arial" charset="0"/>
-                      </a:endParaRPr>
-                    </a:p>
-                  </a:txBody>
-                  <a:tcPr marL="91440" marR="91440" marT="45720" marB="45720">
-                    <a:lnL w="6350" cap="flat" cmpd="sng" algn="ctr">
-                      <a:solidFill>
-                        <a:srgbClr val="CBD5E1"/>
-                      </a:solidFill>
-                      <a:prstDash val="solid"/>
-                      <a:round/>
-                      <a:headEnd type="none" w="med" len="med"/>
-                      <a:tailEnd type="none" w="med" len="med"/>
-                    </a:lnL>
-                    <a:lnR w="6350" cap="flat" cmpd="sng" algn="ctr">
-                      <a:solidFill>
-                        <a:srgbClr val="CBD5E1"/>
-                      </a:solidFill>
-                      <a:prstDash val="solid"/>
-                      <a:round/>
-                      <a:headEnd type="none" w="med" len="med"/>
-                      <a:tailEnd type="none" w="med" len="med"/>
-                    </a:lnR>
-                    <a:lnT w="6350" cap="flat" cmpd="sng" algn="ctr">
-                      <a:solidFill>
-                        <a:srgbClr val="CBD5E1"/>
-                      </a:solidFill>
-                      <a:prstDash val="solid"/>
-                      <a:round/>
-                      <a:headEnd type="none" w="med" len="med"/>
-                      <a:tailEnd type="none" w="med" len="med"/>
-                    </a:lnT>
-                    <a:lnB w="6350" cap="flat" cmpd="sng" algn="ctr">
-                      <a:solidFill>
-                        <a:srgbClr val="CBD5E1"/>
-                      </a:solidFill>
-                      <a:prstDash val="solid"/>
-                      <a:round/>
-                      <a:headEnd type="none" w="med" len="med"/>
-                      <a:tailEnd type="none" w="med" len="med"/>
-                    </a:lnB>
-                    <a:solidFill>
-                      <a:srgbClr val="E8EFF8"/>
-                    </a:solidFill>
-                  </a:tcPr>
-                </a:tc>
-                <a:tc>
-                  <a:txBody>
-                    <a:bodyPr/>
-                    <a:lstStyle/>
-                    <a:p>
-                      <a:pPr algn="ctr" indent="0" marL="0">
-                        <a:buNone/>
-                      </a:pPr>
-                      <a:r>
-                        <a:rPr lang="en-US" sz="900" dirty="0">
-                          <a:solidFill>
-                            <a:srgbClr val="000000"/>
-                          </a:solidFill>
-                          <a:latin typeface="Arial" pitchFamily="34" charset="0"/>
-                          <a:ea typeface="Arial" pitchFamily="34" charset="-122"/>
-                          <a:cs typeface="Arial" pitchFamily="34" charset="-120"/>
-                        </a:rPr>
-                        <a:t>/5 (×2)</a:t>
-                      </a:r>
-                      <a:endParaRPr lang="en-US" sz="900" dirty="0">
-                        <a:latin typeface="Arial" charset="0"/>
-                        <a:ea typeface="Arial" charset="0"/>
-                        <a:cs typeface="Arial" charset="0"/>
-                      </a:endParaRPr>
-                    </a:p>
-                  </a:txBody>
-                  <a:tcPr marL="91440" marR="91440" marT="45720" marB="45720">
-                    <a:lnL w="6350" cap="flat" cmpd="sng" algn="ctr">
-                      <a:solidFill>
-                        <a:srgbClr val="CBD5E1"/>
-                      </a:solidFill>
-                      <a:prstDash val="solid"/>
-                      <a:round/>
-                      <a:headEnd type="none" w="med" len="med"/>
-                      <a:tailEnd type="none" w="med" len="med"/>
-                    </a:lnL>
-                    <a:lnR w="6350" cap="flat" cmpd="sng" algn="ctr">
-                      <a:solidFill>
-                        <a:srgbClr val="CBD5E1"/>
-                      </a:solidFill>
-                      <a:prstDash val="solid"/>
-                      <a:round/>
-                      <a:headEnd type="none" w="med" len="med"/>
-                      <a:tailEnd type="none" w="med" len="med"/>
-                    </a:lnR>
-                    <a:lnT w="6350" cap="flat" cmpd="sng" algn="ctr">
-                      <a:solidFill>
-                        <a:srgbClr val="CBD5E1"/>
-                      </a:solidFill>
-                      <a:prstDash val="solid"/>
-                      <a:round/>
-                      <a:headEnd type="none" w="med" len="med"/>
-                      <a:tailEnd type="none" w="med" len="med"/>
-                    </a:lnT>
-                    <a:lnB w="6350" cap="flat" cmpd="sng" algn="ctr">
-                      <a:solidFill>
-                        <a:srgbClr val="CBD5E1"/>
-                      </a:solidFill>
-                      <a:prstDash val="solid"/>
-                      <a:round/>
-                      <a:headEnd type="none" w="med" len="med"/>
-                      <a:tailEnd type="none" w="med" len="med"/>
-                    </a:lnB>
-                    <a:solidFill>
-                      <a:srgbClr val="E8EFF8"/>
-                    </a:solidFill>
-                  </a:tcPr>
-                </a:tc>
-                <a:tc>
-                  <a:txBody>
-                    <a:bodyPr/>
-                    <a:lstStyle/>
-                    <a:p>
-                      <a:pPr algn="ctr" indent="0" marL="0">
-                        <a:buNone/>
-                      </a:pPr>
-                      <a:r>
-                        <a:rPr lang="en-US" sz="900" dirty="0">
-                          <a:solidFill>
-                            <a:srgbClr val="000000"/>
-                          </a:solidFill>
-                          <a:latin typeface="Arial" pitchFamily="34" charset="0"/>
-                          <a:ea typeface="Arial" pitchFamily="34" charset="-122"/>
-                          <a:cs typeface="Arial" pitchFamily="34" charset="-120"/>
-                        </a:rPr>
-                        <a:t>7.57</a:t>
-                      </a:r>
-                      <a:endParaRPr lang="en-US" sz="900" dirty="0">
-                        <a:latin typeface="Arial" charset="0"/>
-                        <a:ea typeface="Arial" charset="0"/>
-                        <a:cs typeface="Arial" charset="0"/>
-                      </a:endParaRPr>
-                    </a:p>
-                  </a:txBody>
-                  <a:tcPr marL="91440" marR="91440" marT="45720" marB="45720">
-                    <a:lnL w="6350" cap="flat" cmpd="sng" algn="ctr">
-                      <a:solidFill>
-                        <a:srgbClr val="CBD5E1"/>
-                      </a:solidFill>
-                      <a:prstDash val="solid"/>
-                      <a:round/>
-                      <a:headEnd type="none" w="med" len="med"/>
-                      <a:tailEnd type="none" w="med" len="med"/>
-                    </a:lnL>
-                    <a:lnR w="6350" cap="flat" cmpd="sng" algn="ctr">
-                      <a:solidFill>
-                        <a:srgbClr val="CBD5E1"/>
-                      </a:solidFill>
-                      <a:prstDash val="solid"/>
-                      <a:round/>
-                      <a:headEnd type="none" w="med" len="med"/>
-                      <a:tailEnd type="none" w="med" len="med"/>
-                    </a:lnR>
-                    <a:lnT w="6350" cap="flat" cmpd="sng" algn="ctr">
-                      <a:solidFill>
-                        <a:srgbClr val="CBD5E1"/>
-                      </a:solidFill>
-                      <a:prstDash val="solid"/>
-                      <a:round/>
-                      <a:headEnd type="none" w="med" len="med"/>
-                      <a:tailEnd type="none" w="med" len="med"/>
-                    </a:lnT>
-                    <a:lnB w="6350" cap="flat" cmpd="sng" algn="ctr">
-                      <a:solidFill>
-                        <a:srgbClr val="CBD5E1"/>
-                      </a:solidFill>
-                      <a:prstDash val="solid"/>
-                      <a:round/>
-                      <a:headEnd type="none" w="med" len="med"/>
-                      <a:tailEnd type="none" w="med" len="med"/>
-                    </a:lnB>
-                    <a:solidFill>
-                      <a:srgbClr val="E8EFF8"/>
-                    </a:solidFill>
-                  </a:tcPr>
-                </a:tc>
-              </a:tr>
-              <a:tr h="201168">
-                <a:tc>
-                  <a:txBody>
-                    <a:bodyPr/>
-                    <a:lstStyle/>
-                    <a:p>
-                      <a:pPr algn="ctr" indent="0" marL="0">
-                        <a:buNone/>
-                      </a:pPr>
-                      <a:r>
-                        <a:rPr lang="en-US" sz="900" dirty="0">
-                          <a:solidFill>
-                            <a:srgbClr val="000000"/>
-                          </a:solidFill>
-                          <a:latin typeface="Arial" pitchFamily="34" charset="0"/>
-                          <a:ea typeface="Arial" pitchFamily="34" charset="-122"/>
-                          <a:cs typeface="Arial" pitchFamily="34" charset="-120"/>
-                        </a:rPr>
-                        <a:t>楽天トラベル</a:t>
-                      </a:r>
-                      <a:endParaRPr lang="en-US" sz="900" dirty="0">
-                        <a:latin typeface="Arial" charset="0"/>
-                        <a:ea typeface="Arial" charset="0"/>
-                        <a:cs typeface="Arial" charset="0"/>
-                      </a:endParaRPr>
-                    </a:p>
-                  </a:txBody>
-                  <a:tcPr marL="91440" marR="91440" marT="45720" marB="45720">
-                    <a:lnL w="6350" cap="flat" cmpd="sng" algn="ctr">
-                      <a:solidFill>
-                        <a:srgbClr val="CBD5E1"/>
-                      </a:solidFill>
-                      <a:prstDash val="solid"/>
-                      <a:round/>
-                      <a:headEnd type="none" w="med" len="med"/>
-                      <a:tailEnd type="none" w="med" len="med"/>
-                    </a:lnL>
-                    <a:lnR w="6350" cap="flat" cmpd="sng" algn="ctr">
-                      <a:solidFill>
-                        <a:srgbClr val="CBD5E1"/>
-                      </a:solidFill>
-                      <a:prstDash val="solid"/>
-                      <a:round/>
-                      <a:headEnd type="none" w="med" len="med"/>
-                      <a:tailEnd type="none" w="med" len="med"/>
-                    </a:lnR>
-                    <a:lnT w="6350" cap="flat" cmpd="sng" algn="ctr">
-                      <a:solidFill>
-                        <a:srgbClr val="CBD5E1"/>
-                      </a:solidFill>
-                      <a:prstDash val="solid"/>
-                      <a:round/>
-                      <a:headEnd type="none" w="med" len="med"/>
-                      <a:tailEnd type="none" w="med" len="med"/>
-                    </a:lnT>
-                    <a:lnB w="6350" cap="flat" cmpd="sng" algn="ctr">
-                      <a:solidFill>
-                        <a:srgbClr val="CBD5E1"/>
-                      </a:solidFill>
-                      <a:prstDash val="solid"/>
-                      <a:round/>
-                      <a:headEnd type="none" w="med" len="med"/>
-                      <a:tailEnd type="none" w="med" len="med"/>
-                    </a:lnB>
-                    <a:solidFill>
-                      <a:srgbClr val="FFFFFF"/>
-                    </a:solidFill>
-                  </a:tcPr>
-                </a:tc>
-                <a:tc>
-                  <a:txBody>
-                    <a:bodyPr/>
-                    <a:lstStyle/>
-                    <a:p>
-                      <a:pPr algn="ctr" indent="0" marL="0">
-                        <a:buNone/>
-                      </a:pPr>
-                      <a:r>
-                        <a:rPr lang="en-US" sz="900" dirty="0">
-                          <a:solidFill>
-                            <a:srgbClr val="000000"/>
-                          </a:solidFill>
-                          <a:latin typeface="Arial" pitchFamily="34" charset="0"/>
-                          <a:ea typeface="Arial" pitchFamily="34" charset="-122"/>
-                          <a:cs typeface="Arial" pitchFamily="34" charset="-120"/>
-                        </a:rPr>
-                        <a:t>46</a:t>
-                      </a:r>
-                      <a:endParaRPr lang="en-US" sz="900" dirty="0">
-                        <a:latin typeface="Arial" charset="0"/>
-                        <a:ea typeface="Arial" charset="0"/>
-                        <a:cs typeface="Arial" charset="0"/>
-                      </a:endParaRPr>
-                    </a:p>
-                  </a:txBody>
-                  <a:tcPr marL="91440" marR="91440" marT="45720" marB="45720">
-                    <a:lnL w="6350" cap="flat" cmpd="sng" algn="ctr">
-                      <a:solidFill>
-                        <a:srgbClr val="CBD5E1"/>
-                      </a:solidFill>
-                      <a:prstDash val="solid"/>
-                      <a:round/>
-                      <a:headEnd type="none" w="med" len="med"/>
-                      <a:tailEnd type="none" w="med" len="med"/>
-                    </a:lnL>
-                    <a:lnR w="6350" cap="flat" cmpd="sng" algn="ctr">
-                      <a:solidFill>
-                        <a:srgbClr val="CBD5E1"/>
-                      </a:solidFill>
-                      <a:prstDash val="solid"/>
-                      <a:round/>
-                      <a:headEnd type="none" w="med" len="med"/>
-                      <a:tailEnd type="none" w="med" len="med"/>
-                    </a:lnR>
-                    <a:lnT w="6350" cap="flat" cmpd="sng" algn="ctr">
-                      <a:solidFill>
-                        <a:srgbClr val="CBD5E1"/>
-                      </a:solidFill>
-                      <a:prstDash val="solid"/>
-                      <a:round/>
-                      <a:headEnd type="none" w="med" len="med"/>
-                      <a:tailEnd type="none" w="med" len="med"/>
-                    </a:lnT>
-                    <a:lnB w="6350" cap="flat" cmpd="sng" algn="ctr">
-                      <a:solidFill>
-                        <a:srgbClr val="CBD5E1"/>
-                      </a:solidFill>
-                      <a:prstDash val="solid"/>
-                      <a:round/>
-                      <a:headEnd type="none" w="med" len="med"/>
-                      <a:tailEnd type="none" w="med" len="med"/>
-                    </a:lnB>
-                    <a:solidFill>
-                      <a:srgbClr val="FFFFFF"/>
-                    </a:solidFill>
-                  </a:tcPr>
-                </a:tc>
-                <a:tc>
-                  <a:txBody>
-                    <a:bodyPr/>
-                    <a:lstStyle/>
-                    <a:p>
-                      <a:pPr algn="ctr" indent="0" marL="0">
-                        <a:buNone/>
-                      </a:pPr>
-                      <a:r>
-                        <a:rPr lang="en-US" sz="900" dirty="0">
-                          <a:solidFill>
-                            <a:srgbClr val="000000"/>
-                          </a:solidFill>
-                          <a:latin typeface="Arial" pitchFamily="34" charset="0"/>
-                          <a:ea typeface="Arial" pitchFamily="34" charset="-122"/>
-                          <a:cs typeface="Arial" pitchFamily="34" charset="-120"/>
-                        </a:rPr>
-                        <a:t>3.78</a:t>
-                      </a:r>
-                      <a:endParaRPr lang="en-US" sz="900" dirty="0">
-                        <a:latin typeface="Arial" charset="0"/>
-                        <a:ea typeface="Arial" charset="0"/>
-                        <a:cs typeface="Arial" charset="0"/>
-                      </a:endParaRPr>
-                    </a:p>
-                  </a:txBody>
-                  <a:tcPr marL="91440" marR="91440" marT="45720" marB="45720">
-                    <a:lnL w="6350" cap="flat" cmpd="sng" algn="ctr">
-                      <a:solidFill>
-                        <a:srgbClr val="CBD5E1"/>
-                      </a:solidFill>
-                      <a:prstDash val="solid"/>
-                      <a:round/>
-                      <a:headEnd type="none" w="med" len="med"/>
-                      <a:tailEnd type="none" w="med" len="med"/>
-                    </a:lnL>
-                    <a:lnR w="6350" cap="flat" cmpd="sng" algn="ctr">
-                      <a:solidFill>
-                        <a:srgbClr val="CBD5E1"/>
-                      </a:solidFill>
-                      <a:prstDash val="solid"/>
-                      <a:round/>
-                      <a:headEnd type="none" w="med" len="med"/>
-                      <a:tailEnd type="none" w="med" len="med"/>
-                    </a:lnR>
-                    <a:lnT w="6350" cap="flat" cmpd="sng" algn="ctr">
-                      <a:solidFill>
-                        <a:srgbClr val="CBD5E1"/>
-                      </a:solidFill>
-                      <a:prstDash val="solid"/>
-                      <a:round/>
-                      <a:headEnd type="none" w="med" len="med"/>
-                      <a:tailEnd type="none" w="med" len="med"/>
-                    </a:lnT>
-                    <a:lnB w="6350" cap="flat" cmpd="sng" algn="ctr">
-                      <a:solidFill>
-                        <a:srgbClr val="CBD5E1"/>
-                      </a:solidFill>
-                      <a:prstDash val="solid"/>
-                      <a:round/>
-                      <a:headEnd type="none" w="med" len="med"/>
-                      <a:tailEnd type="none" w="med" len="med"/>
-                    </a:lnB>
-                    <a:solidFill>
-                      <a:srgbClr val="FFFFFF"/>
-                    </a:solidFill>
-                  </a:tcPr>
-                </a:tc>
-                <a:tc>
-                  <a:txBody>
-                    <a:bodyPr/>
-                    <a:lstStyle/>
-                    <a:p>
-                      <a:pPr algn="ctr" indent="0" marL="0">
-                        <a:buNone/>
-                      </a:pPr>
-                      <a:r>
-                        <a:rPr lang="en-US" sz="900" dirty="0">
-                          <a:solidFill>
-                            <a:srgbClr val="000000"/>
-                          </a:solidFill>
-                          <a:latin typeface="Arial" pitchFamily="34" charset="0"/>
-                          <a:ea typeface="Arial" pitchFamily="34" charset="-122"/>
-                          <a:cs typeface="Arial" pitchFamily="34" charset="-120"/>
-                        </a:rPr>
-                        <a:t>/5 (×2)</a:t>
-                      </a:r>
-                      <a:endParaRPr lang="en-US" sz="900" dirty="0">
-                        <a:latin typeface="Arial" charset="0"/>
-                        <a:ea typeface="Arial" charset="0"/>
-                        <a:cs typeface="Arial" charset="0"/>
-                      </a:endParaRPr>
-                    </a:p>
-                  </a:txBody>
-                  <a:tcPr marL="91440" marR="91440" marT="45720" marB="45720">
-                    <a:lnL w="6350" cap="flat" cmpd="sng" algn="ctr">
-                      <a:solidFill>
-                        <a:srgbClr val="CBD5E1"/>
-                      </a:solidFill>
-                      <a:prstDash val="solid"/>
-                      <a:round/>
-                      <a:headEnd type="none" w="med" len="med"/>
-                      <a:tailEnd type="none" w="med" len="med"/>
-                    </a:lnL>
-                    <a:lnR w="6350" cap="flat" cmpd="sng" algn="ctr">
-                      <a:solidFill>
-                        <a:srgbClr val="CBD5E1"/>
-                      </a:solidFill>
-                      <a:prstDash val="solid"/>
-                      <a:round/>
-                      <a:headEnd type="none" w="med" len="med"/>
-                      <a:tailEnd type="none" w="med" len="med"/>
-                    </a:lnR>
-                    <a:lnT w="6350" cap="flat" cmpd="sng" algn="ctr">
-                      <a:solidFill>
-                        <a:srgbClr val="CBD5E1"/>
-                      </a:solidFill>
-                      <a:prstDash val="solid"/>
-                      <a:round/>
-                      <a:headEnd type="none" w="med" len="med"/>
-                      <a:tailEnd type="none" w="med" len="med"/>
-                    </a:lnT>
-                    <a:lnB w="6350" cap="flat" cmpd="sng" algn="ctr">
-                      <a:solidFill>
-                        <a:srgbClr val="CBD5E1"/>
-                      </a:solidFill>
-                      <a:prstDash val="solid"/>
-                      <a:round/>
-                      <a:headEnd type="none" w="med" len="med"/>
-                      <a:tailEnd type="none" w="med" len="med"/>
-                    </a:lnB>
-                    <a:solidFill>
-                      <a:srgbClr val="FFFFFF"/>
-                    </a:solidFill>
-                  </a:tcPr>
-                </a:tc>
-                <a:tc>
-                  <a:txBody>
-                    <a:bodyPr/>
-                    <a:lstStyle/>
-                    <a:p>
-                      <a:pPr algn="ctr" indent="0" marL="0">
-                        <a:buNone/>
-                      </a:pPr>
-                      <a:r>
-                        <a:rPr lang="en-US" sz="900" dirty="0">
-                          <a:solidFill>
-                            <a:srgbClr val="000000"/>
-                          </a:solidFill>
-                          <a:latin typeface="Arial" pitchFamily="34" charset="0"/>
-                          <a:ea typeface="Arial" pitchFamily="34" charset="-122"/>
-                          <a:cs typeface="Arial" pitchFamily="34" charset="-120"/>
-                        </a:rPr>
-                        <a:t>7.57</a:t>
+                        <a:t>7</a:t>
                       </a:r>
                       <a:endParaRPr lang="en-US" sz="900" dirty="0">
                         <a:latin typeface="Arial" charset="0"/>
@@ -8939,7 +9262,7 @@
                           <a:ea typeface="Arial" pitchFamily="34" charset="-122"/>
                           <a:cs typeface="Arial" pitchFamily="34" charset="-120"/>
                         </a:rPr>
-                        <a:t>28</a:t>
+                        <a:t>10</a:t>
                       </a:r>
                       <a:endParaRPr lang="en-US" sz="900" dirty="0">
                         <a:latin typeface="Arial" charset="0"/>
@@ -9007,7 +9330,7 @@
                           <a:ea typeface="Arial" pitchFamily="34" charset="-122"/>
                           <a:cs typeface="Arial" pitchFamily="34" charset="-120"/>
                         </a:rPr>
-                        <a:t>7.25</a:t>
+                        <a:t>6.7</a:t>
                       </a:r>
                       <a:endParaRPr lang="en-US" sz="900" dirty="0">
                         <a:latin typeface="Arial" charset="0"/>
@@ -9143,7 +9466,7 @@
                           <a:ea typeface="Arial" pitchFamily="34" charset="-122"/>
                           <a:cs typeface="Arial" pitchFamily="34" charset="-120"/>
                         </a:rPr>
-                        <a:t>7.25</a:t>
+                        <a:t>6.7</a:t>
                       </a:r>
                       <a:endParaRPr lang="en-US" sz="900" dirty="0">
                         <a:latin typeface="Arial" charset="0"/>
@@ -9281,7 +9604,7 @@
                           <a:ea typeface="Arial" pitchFamily="34" charset="-122"/>
                           <a:cs typeface="Arial" pitchFamily="34" charset="-120"/>
                         </a:rPr>
-                        <a:t>20</a:t>
+                        <a:t>10</a:t>
                       </a:r>
                       <a:endParaRPr lang="en-US" sz="900" dirty="0">
                         <a:latin typeface="Arial" charset="0"/>
@@ -9349,7 +9672,7 @@
                           <a:ea typeface="Arial" pitchFamily="34" charset="-122"/>
                           <a:cs typeface="Arial" pitchFamily="34" charset="-120"/>
                         </a:rPr>
-                        <a:t>3.6</a:t>
+                        <a:t>3.3</a:t>
                       </a:r>
                       <a:endParaRPr lang="en-US" sz="900" dirty="0">
                         <a:latin typeface="Arial" charset="0"/>
@@ -9485,7 +9808,7 @@
                           <a:ea typeface="Arial" pitchFamily="34" charset="-122"/>
                           <a:cs typeface="Arial" pitchFamily="34" charset="-120"/>
                         </a:rPr>
-                        <a:t>7.2</a:t>
+                        <a:t>6.6</a:t>
                       </a:r>
                       <a:endParaRPr lang="en-US" sz="900" dirty="0">
                         <a:latin typeface="Arial" charset="0"/>
@@ -9893,7 +10216,7 @@
                 <a:ea typeface="Arial" pitchFamily="34" charset="-122"/>
                 <a:cs typeface="Arial" pitchFamily="34" charset="-120"/>
               </a:rPr>
-              <a:t>97件（67.8%）</a:t>
+              <a:t>41件（55.4%）</a:t>
             </a:r>
             <a:endParaRPr lang="en-US" sz="1100" dirty="0"/>
           </a:p>
@@ -9991,7 +10314,7 @@
                 <a:ea typeface="Arial" pitchFamily="34" charset="-122"/>
                 <a:cs typeface="Arial" pitchFamily="34" charset="-120"/>
               </a:rPr>
-              <a:t>29件（20.3%）</a:t>
+              <a:t>21件（28.4%）</a:t>
             </a:r>
             <a:endParaRPr lang="en-US" sz="1100" dirty="0"/>
           </a:p>
@@ -10089,7 +10412,7 @@
                 <a:ea typeface="Arial" pitchFamily="34" charset="-122"/>
                 <a:cs typeface="Arial" pitchFamily="34" charset="-120"/>
               </a:rPr>
-              <a:t>17件（11.9%）</a:t>
+              <a:t>12件（16.2%）</a:t>
             </a:r>
             <a:endParaRPr lang="en-US" sz="1100" dirty="0"/>
           </a:p>
@@ -10646,7 +10969,7 @@
                 <a:ea typeface="Arial" pitchFamily="34" charset="-122"/>
                 <a:cs typeface="Arial" pitchFamily="34" charset="-120"/>
               </a:rPr>
-              <a:t>50件+</a:t>
+              <a:t>20件+</a:t>
             </a:r>
             <a:endParaRPr lang="en-US" sz="900" dirty="0"/>
           </a:p>
@@ -10661,6 +10984,452 @@
         <p:spPr>
           <a:xfrm>
             <a:off x="3429000" y="1124712"/>
+            <a:ext cx="1645920" cy="274320"/>
+          </a:xfrm>
+          <a:prstGeom prst="rect">
+            <a:avLst/>
+          </a:prstGeom>
+          <a:noFill/>
+          <a:ln/>
+        </p:spPr>
+        <p:txBody>
+          <a:bodyPr wrap="square" lIns="0" tIns="0" rIns="0" bIns="0" rtlCol="0" anchor="ctr"/>
+          <a:lstStyle/>
+          <a:p>
+            <a:pPr indent="0" marL="0">
+              <a:buNone/>
+            </a:pPr>
+            <a:r>
+              <a:rPr lang="en-US" sz="1300" b="1" dirty="0">
+                <a:solidFill>
+                  <a:srgbClr val="1A2744"/>
+                </a:solidFill>
+                <a:latin typeface="Arial" pitchFamily="34" charset="0"/>
+                <a:ea typeface="Arial" pitchFamily="34" charset="-122"/>
+                <a:cs typeface="Arial" pitchFamily="34" charset="-120"/>
+              </a:rPr>
+              <a:t>快適さ・設備</a:t>
+            </a:r>
+            <a:endParaRPr lang="en-US" sz="1300" dirty="0"/>
+          </a:p>
+        </p:txBody>
+      </p:sp>
+      <p:sp>
+        <p:nvSpPr>
+          <p:cNvPr id="17" name="Text 15"/>
+          <p:cNvSpPr/>
+          <p:nvPr/>
+        </p:nvSpPr>
+        <p:spPr>
+          <a:xfrm>
+            <a:off x="3429000" y="1417320"/>
+            <a:ext cx="2377440" cy="365760"/>
+          </a:xfrm>
+          <a:prstGeom prst="rect">
+            <a:avLst/>
+          </a:prstGeom>
+          <a:noFill/>
+          <a:ln/>
+        </p:spPr>
+        <p:txBody>
+          <a:bodyPr wrap="square" lIns="0" tIns="0" rIns="0" bIns="0" rtlCol="0" anchor="ctr"/>
+          <a:lstStyle/>
+          <a:p>
+            <a:pPr indent="0" marL="0">
+              <a:buNone/>
+            </a:pPr>
+            <a:r>
+              <a:rPr lang="en-US" sz="900" dirty="0">
+                <a:solidFill>
+                  <a:srgbClr val="64748B"/>
+                </a:solidFill>
+                <a:latin typeface="Arial" pitchFamily="34" charset="0"/>
+                <a:ea typeface="Arial" pitchFamily="34" charset="-122"/>
+                <a:cs typeface="Arial" pitchFamily="34" charset="-120"/>
+              </a:rPr>
+              <a:t>部屋の広さも設備も料金に見合うものだと思うが、それ以上のものではない</a:t>
+            </a:r>
+            <a:endParaRPr lang="en-US" sz="900" dirty="0"/>
+          </a:p>
+        </p:txBody>
+      </p:sp>
+      <p:sp>
+        <p:nvSpPr>
+          <p:cNvPr id="18" name="Text 16"/>
+          <p:cNvSpPr/>
+          <p:nvPr/>
+        </p:nvSpPr>
+        <p:spPr>
+          <a:xfrm>
+            <a:off x="3429000" y="1828800"/>
+            <a:ext cx="2377440" cy="640080"/>
+          </a:xfrm>
+          <a:prstGeom prst="rect">
+            <a:avLst/>
+          </a:prstGeom>
+          <a:noFill/>
+          <a:ln/>
+        </p:spPr>
+        <p:txBody>
+          <a:bodyPr wrap="square" lIns="0" tIns="0" rIns="0" bIns="0" rtlCol="0" anchor="ctr"/>
+          <a:lstStyle/>
+          <a:p>
+            <a:pPr indent="0" marL="0">
+              <a:buNone/>
+            </a:pPr>
+            <a:r>
+              <a:rPr lang="en-US" sz="900" i="1" dirty="0">
+                <a:solidFill>
+                  <a:srgbClr val="3B7DD8"/>
+                </a:solidFill>
+                <a:latin typeface="Arial" pitchFamily="34" charset="0"/>
+                <a:ea typeface="Arial" pitchFamily="34" charset="-122"/>
+                <a:cs typeface="Arial" pitchFamily="34" charset="-120"/>
+              </a:rPr>
+              <a:t>「部屋はきれいで、過不足なく快適に過ごせました」</a:t>
+            </a:r>
+            <a:endParaRPr lang="en-US" sz="900" dirty="0"/>
+          </a:p>
+        </p:txBody>
+      </p:sp>
+      <p:sp>
+        <p:nvSpPr>
+          <p:cNvPr id="19" name="Shape 17"/>
+          <p:cNvSpPr/>
+          <p:nvPr/>
+        </p:nvSpPr>
+        <p:spPr>
+          <a:xfrm>
+            <a:off x="6126480" y="1051560"/>
+            <a:ext cx="2651760" cy="1600200"/>
+          </a:xfrm>
+          <a:prstGeom prst="rect">
+            <a:avLst/>
+          </a:prstGeom>
+          <a:solidFill>
+            <a:srgbClr val="FFFFFF"/>
+          </a:solidFill>
+          <a:ln/>
+          <a:effectLst>
+            <a:outerShdw sx="100000" sy="100000" kx="0" ky="0" algn="bl" rotWithShape="0" blurRad="50800" dist="25400" dir="8100000">
+              <a:srgbClr val="000000">
+                <a:alpha val="10000"/>
+              </a:srgbClr>
+            </a:outerShdw>
+          </a:effectLst>
+        </p:spPr>
+      </p:sp>
+      <p:sp>
+        <p:nvSpPr>
+          <p:cNvPr id="20" name="Shape 18"/>
+          <p:cNvSpPr/>
+          <p:nvPr/>
+        </p:nvSpPr>
+        <p:spPr>
+          <a:xfrm>
+            <a:off x="6126480" y="1051560"/>
+            <a:ext cx="54864" cy="1600200"/>
+          </a:xfrm>
+          <a:prstGeom prst="rect">
+            <a:avLst/>
+          </a:prstGeom>
+          <a:solidFill>
+            <a:srgbClr val="16A34A"/>
+          </a:solidFill>
+          <a:ln/>
+        </p:spPr>
+      </p:sp>
+      <p:sp>
+        <p:nvSpPr>
+          <p:cNvPr id="21" name="Shape 19"/>
+          <p:cNvSpPr/>
+          <p:nvPr/>
+        </p:nvSpPr>
+        <p:spPr>
+          <a:xfrm>
+            <a:off x="7955280" y="1124712"/>
+            <a:ext cx="658368" cy="228600"/>
+          </a:xfrm>
+          <a:prstGeom prst="rect">
+            <a:avLst/>
+          </a:prstGeom>
+          <a:solidFill>
+            <a:srgbClr val="DCFCE7"/>
+          </a:solidFill>
+          <a:ln/>
+        </p:spPr>
+      </p:sp>
+      <p:sp>
+        <p:nvSpPr>
+          <p:cNvPr id="22" name="Text 20"/>
+          <p:cNvSpPr/>
+          <p:nvPr/>
+        </p:nvSpPr>
+        <p:spPr>
+          <a:xfrm>
+            <a:off x="7955280" y="1124712"/>
+            <a:ext cx="658368" cy="228600"/>
+          </a:xfrm>
+          <a:prstGeom prst="rect">
+            <a:avLst/>
+          </a:prstGeom>
+          <a:noFill/>
+          <a:ln/>
+        </p:spPr>
+        <p:txBody>
+          <a:bodyPr wrap="square" lIns="0" tIns="0" rIns="0" bIns="0" rtlCol="0" anchor="ctr"/>
+          <a:lstStyle/>
+          <a:p>
+            <a:pPr algn="ctr" indent="0" marL="0">
+              <a:buNone/>
+            </a:pPr>
+            <a:r>
+              <a:rPr lang="en-US" sz="900" b="1" dirty="0">
+                <a:solidFill>
+                  <a:srgbClr val="16A34A"/>
+                </a:solidFill>
+                <a:latin typeface="Arial" pitchFamily="34" charset="0"/>
+                <a:ea typeface="Arial" pitchFamily="34" charset="-122"/>
+                <a:cs typeface="Arial" pitchFamily="34" charset="-120"/>
+              </a:rPr>
+              <a:t>20件+</a:t>
+            </a:r>
+            <a:endParaRPr lang="en-US" sz="900" dirty="0"/>
+          </a:p>
+        </p:txBody>
+      </p:sp>
+      <p:sp>
+        <p:nvSpPr>
+          <p:cNvPr id="23" name="Text 21"/>
+          <p:cNvSpPr/>
+          <p:nvPr/>
+        </p:nvSpPr>
+        <p:spPr>
+          <a:xfrm>
+            <a:off x="6263640" y="1124712"/>
+            <a:ext cx="1645920" cy="274320"/>
+          </a:xfrm>
+          <a:prstGeom prst="rect">
+            <a:avLst/>
+          </a:prstGeom>
+          <a:noFill/>
+          <a:ln/>
+        </p:spPr>
+        <p:txBody>
+          <a:bodyPr wrap="square" lIns="0" tIns="0" rIns="0" bIns="0" rtlCol="0" anchor="ctr"/>
+          <a:lstStyle/>
+          <a:p>
+            <a:pPr indent="0" marL="0">
+              <a:buNone/>
+            </a:pPr>
+            <a:r>
+              <a:rPr lang="en-US" sz="1300" b="1" dirty="0">
+                <a:solidFill>
+                  <a:srgbClr val="1A2744"/>
+                </a:solidFill>
+                <a:latin typeface="Arial" pitchFamily="34" charset="0"/>
+                <a:ea typeface="Arial" pitchFamily="34" charset="-122"/>
+                <a:cs typeface="Arial" pitchFamily="34" charset="-120"/>
+              </a:rPr>
+              <a:t>スタッフの対応</a:t>
+            </a:r>
+            <a:endParaRPr lang="en-US" sz="1300" dirty="0"/>
+          </a:p>
+        </p:txBody>
+      </p:sp>
+      <p:sp>
+        <p:nvSpPr>
+          <p:cNvPr id="24" name="Text 22"/>
+          <p:cNvSpPr/>
+          <p:nvPr/>
+        </p:nvSpPr>
+        <p:spPr>
+          <a:xfrm>
+            <a:off x="6263640" y="1417320"/>
+            <a:ext cx="2377440" cy="365760"/>
+          </a:xfrm>
+          <a:prstGeom prst="rect">
+            <a:avLst/>
+          </a:prstGeom>
+          <a:noFill/>
+          <a:ln/>
+        </p:spPr>
+        <p:txBody>
+          <a:bodyPr wrap="square" lIns="0" tIns="0" rIns="0" bIns="0" rtlCol="0" anchor="ctr"/>
+          <a:lstStyle/>
+          <a:p>
+            <a:pPr indent="0" marL="0">
+              <a:buNone/>
+            </a:pPr>
+            <a:r>
+              <a:rPr lang="en-US" sz="900" dirty="0">
+                <a:solidFill>
+                  <a:srgbClr val="64748B"/>
+                </a:solidFill>
+                <a:latin typeface="Arial" pitchFamily="34" charset="0"/>
+                <a:ea typeface="Arial" pitchFamily="34" charset="-122"/>
+                <a:cs typeface="Arial" pitchFamily="34" charset="-120"/>
+              </a:rPr>
+              <a:t>フロントの方が不慣れなのか、他の人には伝えていたウエルカムドリンクの話や朝食、チェックアウトの時間も全くない</a:t>
+            </a:r>
+            <a:endParaRPr lang="en-US" sz="900" dirty="0"/>
+          </a:p>
+        </p:txBody>
+      </p:sp>
+      <p:sp>
+        <p:nvSpPr>
+          <p:cNvPr id="25" name="Text 23"/>
+          <p:cNvSpPr/>
+          <p:nvPr/>
+        </p:nvSpPr>
+        <p:spPr>
+          <a:xfrm>
+            <a:off x="6263640" y="1828800"/>
+            <a:ext cx="2377440" cy="640080"/>
+          </a:xfrm>
+          <a:prstGeom prst="rect">
+            <a:avLst/>
+          </a:prstGeom>
+          <a:noFill/>
+          <a:ln/>
+        </p:spPr>
+        <p:txBody>
+          <a:bodyPr wrap="square" lIns="0" tIns="0" rIns="0" bIns="0" rtlCol="0" anchor="ctr"/>
+          <a:lstStyle/>
+          <a:p>
+            <a:pPr indent="0" marL="0">
+              <a:buNone/>
+            </a:pPr>
+            <a:r>
+              <a:rPr lang="en-US" sz="900" i="1" dirty="0">
+                <a:solidFill>
+                  <a:srgbClr val="3B7DD8"/>
+                </a:solidFill>
+                <a:latin typeface="Arial" pitchFamily="34" charset="0"/>
+                <a:ea typeface="Arial" pitchFamily="34" charset="-122"/>
+                <a:cs typeface="Arial" pitchFamily="34" charset="-120"/>
+              </a:rPr>
+              <a:t>「フロントの対応もスタッフの方の対応も良かったです」</a:t>
+            </a:r>
+            <a:endParaRPr lang="en-US" sz="900" dirty="0"/>
+          </a:p>
+        </p:txBody>
+      </p:sp>
+      <p:sp>
+        <p:nvSpPr>
+          <p:cNvPr id="26" name="Shape 24"/>
+          <p:cNvSpPr/>
+          <p:nvPr/>
+        </p:nvSpPr>
+        <p:spPr>
+          <a:xfrm>
+            <a:off x="457200" y="2880360"/>
+            <a:ext cx="2651760" cy="1600200"/>
+          </a:xfrm>
+          <a:prstGeom prst="rect">
+            <a:avLst/>
+          </a:prstGeom>
+          <a:solidFill>
+            <a:srgbClr val="FFFFFF"/>
+          </a:solidFill>
+          <a:ln/>
+          <a:effectLst>
+            <a:outerShdw sx="100000" sy="100000" kx="0" ky="0" algn="bl" rotWithShape="0" blurRad="50800" dist="25400" dir="8100000">
+              <a:srgbClr val="000000">
+                <a:alpha val="10000"/>
+              </a:srgbClr>
+            </a:outerShdw>
+          </a:effectLst>
+        </p:spPr>
+      </p:sp>
+      <p:sp>
+        <p:nvSpPr>
+          <p:cNvPr id="27" name="Shape 25"/>
+          <p:cNvSpPr/>
+          <p:nvPr/>
+        </p:nvSpPr>
+        <p:spPr>
+          <a:xfrm>
+            <a:off x="457200" y="2880360"/>
+            <a:ext cx="54864" cy="1600200"/>
+          </a:xfrm>
+          <a:prstGeom prst="rect">
+            <a:avLst/>
+          </a:prstGeom>
+          <a:solidFill>
+            <a:srgbClr val="16A34A"/>
+          </a:solidFill>
+          <a:ln/>
+        </p:spPr>
+      </p:sp>
+      <p:sp>
+        <p:nvSpPr>
+          <p:cNvPr id="28" name="Shape 26"/>
+          <p:cNvSpPr/>
+          <p:nvPr/>
+        </p:nvSpPr>
+        <p:spPr>
+          <a:xfrm>
+            <a:off x="2286000" y="2953512"/>
+            <a:ext cx="658368" cy="228600"/>
+          </a:xfrm>
+          <a:prstGeom prst="rect">
+            <a:avLst/>
+          </a:prstGeom>
+          <a:solidFill>
+            <a:srgbClr val="DCFCE7"/>
+          </a:solidFill>
+          <a:ln/>
+        </p:spPr>
+      </p:sp>
+      <p:sp>
+        <p:nvSpPr>
+          <p:cNvPr id="29" name="Text 27"/>
+          <p:cNvSpPr/>
+          <p:nvPr/>
+        </p:nvSpPr>
+        <p:spPr>
+          <a:xfrm>
+            <a:off x="2286000" y="2953512"/>
+            <a:ext cx="658368" cy="228600"/>
+          </a:xfrm>
+          <a:prstGeom prst="rect">
+            <a:avLst/>
+          </a:prstGeom>
+          <a:noFill/>
+          <a:ln/>
+        </p:spPr>
+        <p:txBody>
+          <a:bodyPr wrap="square" lIns="0" tIns="0" rIns="0" bIns="0" rtlCol="0" anchor="ctr"/>
+          <a:lstStyle/>
+          <a:p>
+            <a:pPr algn="ctr" indent="0" marL="0">
+              <a:buNone/>
+            </a:pPr>
+            <a:r>
+              <a:rPr lang="en-US" sz="900" b="1" dirty="0">
+                <a:solidFill>
+                  <a:srgbClr val="16A34A"/>
+                </a:solidFill>
+                <a:latin typeface="Arial" pitchFamily="34" charset="0"/>
+                <a:ea typeface="Arial" pitchFamily="34" charset="-122"/>
+                <a:cs typeface="Arial" pitchFamily="34" charset="-120"/>
+              </a:rPr>
+              <a:t>20件+</a:t>
+            </a:r>
+            <a:endParaRPr lang="en-US" sz="900" dirty="0"/>
+          </a:p>
+        </p:txBody>
+      </p:sp>
+      <p:sp>
+        <p:nvSpPr>
+          <p:cNvPr id="30" name="Text 28"/>
+          <p:cNvSpPr/>
+          <p:nvPr/>
+        </p:nvSpPr>
+        <p:spPr>
+          <a:xfrm>
+            <a:off x="594360" y="2953512"/>
             <a:ext cx="1645920" cy="274320"/>
           </a:xfrm>
           <a:prstGeom prst="rect">
@@ -10693,13 +11462,13 @@
       </p:sp>
       <p:sp>
         <p:nvSpPr>
-          <p:cNvPr id="17" name="Text 15"/>
-          <p:cNvSpPr/>
-          <p:nvPr/>
-        </p:nvSpPr>
-        <p:spPr>
-          <a:xfrm>
-            <a:off x="3429000" y="1417320"/>
+          <p:cNvPr id="31" name="Text 29"/>
+          <p:cNvSpPr/>
+          <p:nvPr/>
+        </p:nvSpPr>
+        <p:spPr>
+          <a:xfrm>
+            <a:off x="594360" y="3246120"/>
             <a:ext cx="2377440" cy="365760"/>
           </a:xfrm>
           <a:prstGeom prst="rect">
@@ -10732,13 +11501,13 @@
       </p:sp>
       <p:sp>
         <p:nvSpPr>
-          <p:cNvPr id="18" name="Text 16"/>
-          <p:cNvSpPr/>
-          <p:nvPr/>
-        </p:nvSpPr>
-        <p:spPr>
-          <a:xfrm>
-            <a:off x="3429000" y="1828800"/>
+          <p:cNvPr id="32" name="Text 30"/>
+          <p:cNvSpPr/>
+          <p:nvPr/>
+        </p:nvSpPr>
+        <p:spPr>
+          <a:xfrm>
+            <a:off x="594360" y="3657600"/>
             <a:ext cx="2377440" cy="640080"/>
           </a:xfrm>
           <a:prstGeom prst="rect">
@@ -10771,13 +11540,13 @@
       </p:sp>
       <p:sp>
         <p:nvSpPr>
-          <p:cNvPr id="19" name="Shape 17"/>
-          <p:cNvSpPr/>
-          <p:nvPr/>
-        </p:nvSpPr>
-        <p:spPr>
-          <a:xfrm>
-            <a:off x="6126480" y="1051560"/>
+          <p:cNvPr id="33" name="Shape 31"/>
+          <p:cNvSpPr/>
+          <p:nvPr/>
+        </p:nvSpPr>
+        <p:spPr>
+          <a:xfrm>
+            <a:off x="3291840" y="2880360"/>
             <a:ext cx="2651760" cy="1600200"/>
           </a:xfrm>
           <a:prstGeom prst="rect">
@@ -10798,13 +11567,13 @@
       </p:sp>
       <p:sp>
         <p:nvSpPr>
-          <p:cNvPr id="20" name="Shape 18"/>
-          <p:cNvSpPr/>
-          <p:nvPr/>
-        </p:nvSpPr>
-        <p:spPr>
-          <a:xfrm>
-            <a:off x="6126480" y="1051560"/>
+          <p:cNvPr id="34" name="Shape 32"/>
+          <p:cNvSpPr/>
+          <p:nvPr/>
+        </p:nvSpPr>
+        <p:spPr>
+          <a:xfrm>
+            <a:off x="3291840" y="2880360"/>
             <a:ext cx="54864" cy="1600200"/>
           </a:xfrm>
           <a:prstGeom prst="rect">
@@ -10818,13 +11587,13 @@
       </p:sp>
       <p:sp>
         <p:nvSpPr>
-          <p:cNvPr id="21" name="Shape 19"/>
-          <p:cNvSpPr/>
-          <p:nvPr/>
-        </p:nvSpPr>
-        <p:spPr>
-          <a:xfrm>
-            <a:off x="7955280" y="1124712"/>
+          <p:cNvPr id="35" name="Shape 33"/>
+          <p:cNvSpPr/>
+          <p:nvPr/>
+        </p:nvSpPr>
+        <p:spPr>
+          <a:xfrm>
+            <a:off x="5120640" y="2953512"/>
             <a:ext cx="658368" cy="228600"/>
           </a:xfrm>
           <a:prstGeom prst="rect">
@@ -10838,13 +11607,13 @@
       </p:sp>
       <p:sp>
         <p:nvSpPr>
-          <p:cNvPr id="22" name="Text 20"/>
-          <p:cNvSpPr/>
-          <p:nvPr/>
-        </p:nvSpPr>
-        <p:spPr>
-          <a:xfrm>
-            <a:off x="7955280" y="1124712"/>
+          <p:cNvPr id="36" name="Text 34"/>
+          <p:cNvSpPr/>
+          <p:nvPr/>
+        </p:nvSpPr>
+        <p:spPr>
+          <a:xfrm>
+            <a:off x="5120640" y="2953512"/>
             <a:ext cx="658368" cy="228600"/>
           </a:xfrm>
           <a:prstGeom prst="rect">
@@ -10869,453 +11638,7 @@
                 <a:ea typeface="Arial" pitchFamily="34" charset="-122"/>
                 <a:cs typeface="Arial" pitchFamily="34" charset="-120"/>
               </a:rPr>
-              <a:t>20件+</a:t>
-            </a:r>
-            <a:endParaRPr lang="en-US" sz="900" dirty="0"/>
-          </a:p>
-        </p:txBody>
-      </p:sp>
-      <p:sp>
-        <p:nvSpPr>
-          <p:cNvPr id="23" name="Text 21"/>
-          <p:cNvSpPr/>
-          <p:nvPr/>
-        </p:nvSpPr>
-        <p:spPr>
-          <a:xfrm>
-            <a:off x="6263640" y="1124712"/>
-            <a:ext cx="1645920" cy="274320"/>
-          </a:xfrm>
-          <a:prstGeom prst="rect">
-            <a:avLst/>
-          </a:prstGeom>
-          <a:noFill/>
-          <a:ln/>
-        </p:spPr>
-        <p:txBody>
-          <a:bodyPr wrap="square" lIns="0" tIns="0" rIns="0" bIns="0" rtlCol="0" anchor="ctr"/>
-          <a:lstStyle/>
-          <a:p>
-            <a:pPr indent="0" marL="0">
-              <a:buNone/>
-            </a:pPr>
-            <a:r>
-              <a:rPr lang="en-US" sz="1300" b="1" dirty="0">
-                <a:solidFill>
-                  <a:srgbClr val="1A2744"/>
-                </a:solidFill>
-                <a:latin typeface="Arial" pitchFamily="34" charset="0"/>
-                <a:ea typeface="Arial" pitchFamily="34" charset="-122"/>
-                <a:cs typeface="Arial" pitchFamily="34" charset="-120"/>
-              </a:rPr>
-              <a:t>スタッフの対応</a:t>
-            </a:r>
-            <a:endParaRPr lang="en-US" sz="1300" dirty="0"/>
-          </a:p>
-        </p:txBody>
-      </p:sp>
-      <p:sp>
-        <p:nvSpPr>
-          <p:cNvPr id="24" name="Text 22"/>
-          <p:cNvSpPr/>
-          <p:nvPr/>
-        </p:nvSpPr>
-        <p:spPr>
-          <a:xfrm>
-            <a:off x="6263640" y="1417320"/>
-            <a:ext cx="2377440" cy="365760"/>
-          </a:xfrm>
-          <a:prstGeom prst="rect">
-            <a:avLst/>
-          </a:prstGeom>
-          <a:noFill/>
-          <a:ln/>
-        </p:spPr>
-        <p:txBody>
-          <a:bodyPr wrap="square" lIns="0" tIns="0" rIns="0" bIns="0" rtlCol="0" anchor="ctr"/>
-          <a:lstStyle/>
-          <a:p>
-            <a:pPr indent="0" marL="0">
-              <a:buNone/>
-            </a:pPr>
-            <a:r>
-              <a:rPr lang="en-US" sz="900" dirty="0">
-                <a:solidFill>
-                  <a:srgbClr val="64748B"/>
-                </a:solidFill>
-                <a:latin typeface="Arial" pitchFamily="34" charset="0"/>
-                <a:ea typeface="Arial" pitchFamily="34" charset="-122"/>
-                <a:cs typeface="Arial" pitchFamily="34" charset="-120"/>
-              </a:rPr>
-              <a:t>フロントの方が不慣れなのか、他の人には伝えていたウエルカムドリンクの話や朝食、チェックアウトの時間も全くない</a:t>
-            </a:r>
-            <a:endParaRPr lang="en-US" sz="900" dirty="0"/>
-          </a:p>
-        </p:txBody>
-      </p:sp>
-      <p:sp>
-        <p:nvSpPr>
-          <p:cNvPr id="25" name="Text 23"/>
-          <p:cNvSpPr/>
-          <p:nvPr/>
-        </p:nvSpPr>
-        <p:spPr>
-          <a:xfrm>
-            <a:off x="6263640" y="1828800"/>
-            <a:ext cx="2377440" cy="640080"/>
-          </a:xfrm>
-          <a:prstGeom prst="rect">
-            <a:avLst/>
-          </a:prstGeom>
-          <a:noFill/>
-          <a:ln/>
-        </p:spPr>
-        <p:txBody>
-          <a:bodyPr wrap="square" lIns="0" tIns="0" rIns="0" bIns="0" rtlCol="0" anchor="ctr"/>
-          <a:lstStyle/>
-          <a:p>
-            <a:pPr indent="0" marL="0">
-              <a:buNone/>
-            </a:pPr>
-            <a:r>
-              <a:rPr lang="en-US" sz="900" i="1" dirty="0">
-                <a:solidFill>
-                  <a:srgbClr val="3B7DD8"/>
-                </a:solidFill>
-                <a:latin typeface="Arial" pitchFamily="34" charset="0"/>
-                <a:ea typeface="Arial" pitchFamily="34" charset="-122"/>
-                <a:cs typeface="Arial" pitchFamily="34" charset="-120"/>
-              </a:rPr>
-              <a:t>「フロントの対応もスタッフの方の対応も良かったです」</a:t>
-            </a:r>
-            <a:endParaRPr lang="en-US" sz="900" dirty="0"/>
-          </a:p>
-        </p:txBody>
-      </p:sp>
-      <p:sp>
-        <p:nvSpPr>
-          <p:cNvPr id="26" name="Shape 24"/>
-          <p:cNvSpPr/>
-          <p:nvPr/>
-        </p:nvSpPr>
-        <p:spPr>
-          <a:xfrm>
-            <a:off x="457200" y="2880360"/>
-            <a:ext cx="2651760" cy="1600200"/>
-          </a:xfrm>
-          <a:prstGeom prst="rect">
-            <a:avLst/>
-          </a:prstGeom>
-          <a:solidFill>
-            <a:srgbClr val="FFFFFF"/>
-          </a:solidFill>
-          <a:ln/>
-          <a:effectLst>
-            <a:outerShdw sx="100000" sy="100000" kx="0" ky="0" algn="bl" rotWithShape="0" blurRad="50800" dist="25400" dir="8100000">
-              <a:srgbClr val="000000">
-                <a:alpha val="10000"/>
-              </a:srgbClr>
-            </a:outerShdw>
-          </a:effectLst>
-        </p:spPr>
-      </p:sp>
-      <p:sp>
-        <p:nvSpPr>
-          <p:cNvPr id="27" name="Shape 25"/>
-          <p:cNvSpPr/>
-          <p:nvPr/>
-        </p:nvSpPr>
-        <p:spPr>
-          <a:xfrm>
-            <a:off x="457200" y="2880360"/>
-            <a:ext cx="54864" cy="1600200"/>
-          </a:xfrm>
-          <a:prstGeom prst="rect">
-            <a:avLst/>
-          </a:prstGeom>
-          <a:solidFill>
-            <a:srgbClr val="16A34A"/>
-          </a:solidFill>
-          <a:ln/>
-        </p:spPr>
-      </p:sp>
-      <p:sp>
-        <p:nvSpPr>
-          <p:cNvPr id="28" name="Shape 26"/>
-          <p:cNvSpPr/>
-          <p:nvPr/>
-        </p:nvSpPr>
-        <p:spPr>
-          <a:xfrm>
-            <a:off x="2286000" y="2953512"/>
-            <a:ext cx="658368" cy="228600"/>
-          </a:xfrm>
-          <a:prstGeom prst="rect">
-            <a:avLst/>
-          </a:prstGeom>
-          <a:solidFill>
-            <a:srgbClr val="DCFCE7"/>
-          </a:solidFill>
-          <a:ln/>
-        </p:spPr>
-      </p:sp>
-      <p:sp>
-        <p:nvSpPr>
-          <p:cNvPr id="29" name="Text 27"/>
-          <p:cNvSpPr/>
-          <p:nvPr/>
-        </p:nvSpPr>
-        <p:spPr>
-          <a:xfrm>
-            <a:off x="2286000" y="2953512"/>
-            <a:ext cx="658368" cy="228600"/>
-          </a:xfrm>
-          <a:prstGeom prst="rect">
-            <a:avLst/>
-          </a:prstGeom>
-          <a:noFill/>
-          <a:ln/>
-        </p:spPr>
-        <p:txBody>
-          <a:bodyPr wrap="square" lIns="0" tIns="0" rIns="0" bIns="0" rtlCol="0" anchor="ctr"/>
-          <a:lstStyle/>
-          <a:p>
-            <a:pPr algn="ctr" indent="0" marL="0">
-              <a:buNone/>
-            </a:pPr>
-            <a:r>
-              <a:rPr lang="en-US" sz="900" b="1" dirty="0">
-                <a:solidFill>
-                  <a:srgbClr val="16A34A"/>
-                </a:solidFill>
-                <a:latin typeface="Arial" pitchFamily="34" charset="0"/>
-                <a:ea typeface="Arial" pitchFamily="34" charset="-122"/>
-                <a:cs typeface="Arial" pitchFamily="34" charset="-120"/>
-              </a:rPr>
-              <a:t>20件+</a:t>
-            </a:r>
-            <a:endParaRPr lang="en-US" sz="900" dirty="0"/>
-          </a:p>
-        </p:txBody>
-      </p:sp>
-      <p:sp>
-        <p:nvSpPr>
-          <p:cNvPr id="30" name="Text 28"/>
-          <p:cNvSpPr/>
-          <p:nvPr/>
-        </p:nvSpPr>
-        <p:spPr>
-          <a:xfrm>
-            <a:off x="594360" y="2953512"/>
-            <a:ext cx="1645920" cy="274320"/>
-          </a:xfrm>
-          <a:prstGeom prst="rect">
-            <a:avLst/>
-          </a:prstGeom>
-          <a:noFill/>
-          <a:ln/>
-        </p:spPr>
-        <p:txBody>
-          <a:bodyPr wrap="square" lIns="0" tIns="0" rIns="0" bIns="0" rtlCol="0" anchor="ctr"/>
-          <a:lstStyle/>
-          <a:p>
-            <a:pPr indent="0" marL="0">
-              <a:buNone/>
-            </a:pPr>
-            <a:r>
-              <a:rPr lang="en-US" sz="1300" b="1" dirty="0">
-                <a:solidFill>
-                  <a:srgbClr val="1A2744"/>
-                </a:solidFill>
-                <a:latin typeface="Arial" pitchFamily="34" charset="0"/>
-                <a:ea typeface="Arial" pitchFamily="34" charset="-122"/>
-                <a:cs typeface="Arial" pitchFamily="34" charset="-120"/>
-              </a:rPr>
-              <a:t>快適さ・設備</a:t>
-            </a:r>
-            <a:endParaRPr lang="en-US" sz="1300" dirty="0"/>
-          </a:p>
-        </p:txBody>
-      </p:sp>
-      <p:sp>
-        <p:nvSpPr>
-          <p:cNvPr id="31" name="Text 29"/>
-          <p:cNvSpPr/>
-          <p:nvPr/>
-        </p:nvSpPr>
-        <p:spPr>
-          <a:xfrm>
-            <a:off x="594360" y="3246120"/>
-            <a:ext cx="2377440" cy="365760"/>
-          </a:xfrm>
-          <a:prstGeom prst="rect">
-            <a:avLst/>
-          </a:prstGeom>
-          <a:noFill/>
-          <a:ln/>
-        </p:spPr>
-        <p:txBody>
-          <a:bodyPr wrap="square" lIns="0" tIns="0" rIns="0" bIns="0" rtlCol="0" anchor="ctr"/>
-          <a:lstStyle/>
-          <a:p>
-            <a:pPr indent="0" marL="0">
-              <a:buNone/>
-            </a:pPr>
-            <a:r>
-              <a:rPr lang="en-US" sz="900" dirty="0">
-                <a:solidFill>
-                  <a:srgbClr val="64748B"/>
-                </a:solidFill>
-                <a:latin typeface="Arial" pitchFamily="34" charset="0"/>
-                <a:ea typeface="Arial" pitchFamily="34" charset="-122"/>
-                <a:cs typeface="Arial" pitchFamily="34" charset="-120"/>
-              </a:rPr>
-              <a:t>部屋の広さも設備も料金に見合うものだと思うが、それ以上のものではない</a:t>
-            </a:r>
-            <a:endParaRPr lang="en-US" sz="900" dirty="0"/>
-          </a:p>
-        </p:txBody>
-      </p:sp>
-      <p:sp>
-        <p:nvSpPr>
-          <p:cNvPr id="32" name="Text 30"/>
-          <p:cNvSpPr/>
-          <p:nvPr/>
-        </p:nvSpPr>
-        <p:spPr>
-          <a:xfrm>
-            <a:off x="594360" y="3657600"/>
-            <a:ext cx="2377440" cy="640080"/>
-          </a:xfrm>
-          <a:prstGeom prst="rect">
-            <a:avLst/>
-          </a:prstGeom>
-          <a:noFill/>
-          <a:ln/>
-        </p:spPr>
-        <p:txBody>
-          <a:bodyPr wrap="square" lIns="0" tIns="0" rIns="0" bIns="0" rtlCol="0" anchor="ctr"/>
-          <a:lstStyle/>
-          <a:p>
-            <a:pPr indent="0" marL="0">
-              <a:buNone/>
-            </a:pPr>
-            <a:r>
-              <a:rPr lang="en-US" sz="900" i="1" dirty="0">
-                <a:solidFill>
-                  <a:srgbClr val="3B7DD8"/>
-                </a:solidFill>
-                <a:latin typeface="Arial" pitchFamily="34" charset="0"/>
-                <a:ea typeface="Arial" pitchFamily="34" charset="-122"/>
-                <a:cs typeface="Arial" pitchFamily="34" charset="-120"/>
-              </a:rPr>
-              <a:t>「部屋はきれいで、過不足なく快適に過ごせました」</a:t>
-            </a:r>
-            <a:endParaRPr lang="en-US" sz="900" dirty="0"/>
-          </a:p>
-        </p:txBody>
-      </p:sp>
-      <p:sp>
-        <p:nvSpPr>
-          <p:cNvPr id="33" name="Shape 31"/>
-          <p:cNvSpPr/>
-          <p:nvPr/>
-        </p:nvSpPr>
-        <p:spPr>
-          <a:xfrm>
-            <a:off x="3291840" y="2880360"/>
-            <a:ext cx="2651760" cy="1600200"/>
-          </a:xfrm>
-          <a:prstGeom prst="rect">
-            <a:avLst/>
-          </a:prstGeom>
-          <a:solidFill>
-            <a:srgbClr val="FFFFFF"/>
-          </a:solidFill>
-          <a:ln/>
-          <a:effectLst>
-            <a:outerShdw sx="100000" sy="100000" kx="0" ky="0" algn="bl" rotWithShape="0" blurRad="50800" dist="25400" dir="8100000">
-              <a:srgbClr val="000000">
-                <a:alpha val="10000"/>
-              </a:srgbClr>
-            </a:outerShdw>
-          </a:effectLst>
-        </p:spPr>
-      </p:sp>
-      <p:sp>
-        <p:nvSpPr>
-          <p:cNvPr id="34" name="Shape 32"/>
-          <p:cNvSpPr/>
-          <p:nvPr/>
-        </p:nvSpPr>
-        <p:spPr>
-          <a:xfrm>
-            <a:off x="3291840" y="2880360"/>
-            <a:ext cx="54864" cy="1600200"/>
-          </a:xfrm>
-          <a:prstGeom prst="rect">
-            <a:avLst/>
-          </a:prstGeom>
-          <a:solidFill>
-            <a:srgbClr val="16A34A"/>
-          </a:solidFill>
-          <a:ln/>
-        </p:spPr>
-      </p:sp>
-      <p:sp>
-        <p:nvSpPr>
-          <p:cNvPr id="35" name="Shape 33"/>
-          <p:cNvSpPr/>
-          <p:nvPr/>
-        </p:nvSpPr>
-        <p:spPr>
-          <a:xfrm>
-            <a:off x="5120640" y="2953512"/>
-            <a:ext cx="658368" cy="228600"/>
-          </a:xfrm>
-          <a:prstGeom prst="rect">
-            <a:avLst/>
-          </a:prstGeom>
-          <a:solidFill>
-            <a:srgbClr val="DCFCE7"/>
-          </a:solidFill>
-          <a:ln/>
-        </p:spPr>
-      </p:sp>
-      <p:sp>
-        <p:nvSpPr>
-          <p:cNvPr id="36" name="Text 34"/>
-          <p:cNvSpPr/>
-          <p:nvPr/>
-        </p:nvSpPr>
-        <p:spPr>
-          <a:xfrm>
-            <a:off x="5120640" y="2953512"/>
-            <a:ext cx="658368" cy="228600"/>
-          </a:xfrm>
-          <a:prstGeom prst="rect">
-            <a:avLst/>
-          </a:prstGeom>
-          <a:noFill/>
-          <a:ln/>
-        </p:spPr>
-        <p:txBody>
-          <a:bodyPr wrap="square" lIns="0" tIns="0" rIns="0" bIns="0" rtlCol="0" anchor="ctr"/>
-          <a:lstStyle/>
-          <a:p>
-            <a:pPr algn="ctr" indent="0" marL="0">
-              <a:buNone/>
-            </a:pPr>
-            <a:r>
-              <a:rPr lang="en-US" sz="900" b="1" dirty="0">
-                <a:solidFill>
-                  <a:srgbClr val="16A34A"/>
-                </a:solidFill>
-                <a:latin typeface="Arial" pitchFamily="34" charset="0"/>
-                <a:ea typeface="Arial" pitchFamily="34" charset="-122"/>
-                <a:cs typeface="Arial" pitchFamily="34" charset="-120"/>
-              </a:rPr>
-              <a:t>20件+</a:t>
+              <a:t>10件+</a:t>
             </a:r>
             <a:endParaRPr lang="en-US" sz="900" dirty="0"/>
           </a:p>
@@ -12413,7 +12736,7 @@
                           <a:ea typeface="Arial" pitchFamily="34" charset="-122"/>
                           <a:cs typeface="Arial" pitchFamily="34" charset="-120"/>
                         </a:rPr>
-                        <a:t>23件</a:t>
+                        <a:t>19件</a:t>
                       </a:r>
                       <a:endParaRPr lang="en-US" sz="900" dirty="0">
                         <a:latin typeface="Arial" charset="0"/>
@@ -12687,7 +13010,7 @@
                           <a:ea typeface="Arial" pitchFamily="34" charset="-122"/>
                           <a:cs typeface="Arial" pitchFamily="34" charset="-120"/>
                         </a:rPr>
-                        <a:t>15件</a:t>
+                        <a:t>10件</a:t>
                       </a:r>
                       <a:endParaRPr lang="en-US" sz="900" dirty="0">
                         <a:latin typeface="Arial" charset="0"/>
@@ -12961,7 +13284,7 @@
                           <a:ea typeface="Arial" pitchFamily="34" charset="-122"/>
                           <a:cs typeface="Arial" pitchFamily="34" charset="-120"/>
                         </a:rPr>
-                        <a:t>11件</a:t>
+                        <a:t>7件</a:t>
                       </a:r>
                       <a:endParaRPr lang="en-US" sz="900" dirty="0">
                         <a:latin typeface="Arial" charset="0"/>
@@ -13099,7 +13422,7 @@
                           <a:ea typeface="Arial" pitchFamily="34" charset="-122"/>
                           <a:cs typeface="Arial" pitchFamily="34" charset="-120"/>
                         </a:rPr>
-                        <a:t>朝食の改善要望</a:t>
+                        <a:t>窓・採光</a:t>
                       </a:r>
                       <a:endParaRPr lang="en-US" sz="900" dirty="0">
                         <a:latin typeface="Arial" charset="0"/>
@@ -13167,7 +13490,7 @@
                           <a:ea typeface="Arial" pitchFamily="34" charset="-122"/>
                           <a:cs typeface="Arial" pitchFamily="34" charset="-120"/>
                         </a:rPr>
-                        <a:t>会場が狭めで品数も多くはありませんが、パンもシリアルもありよかったです</a:t>
+                        <a:t>空調が暖房•送風のみだったため、室温調整に窓を開けざるをなかった</a:t>
                       </a:r>
                       <a:endParaRPr lang="en-US" sz="900" dirty="0">
                         <a:latin typeface="Arial" charset="0"/>
@@ -13235,7 +13558,7 @@
                           <a:ea typeface="Arial" pitchFamily="34" charset="-122"/>
                           <a:cs typeface="Arial" pitchFamily="34" charset="-120"/>
                         </a:rPr>
-                        <a:t>7件</a:t>
+                        <a:t>6件</a:t>
                       </a:r>
                       <a:endParaRPr lang="en-US" sz="900" dirty="0">
                         <a:latin typeface="Arial" charset="0"/>
@@ -13509,7 +13832,7 @@
                           <a:ea typeface="Arial" pitchFamily="34" charset="-122"/>
                           <a:cs typeface="Arial" pitchFamily="34" charset="-120"/>
                         </a:rPr>
-                        <a:t>6件</a:t>
+                        <a:t>5件</a:t>
                       </a:r>
                       <a:endParaRPr lang="en-US" sz="900" dirty="0">
                         <a:latin typeface="Arial" charset="0"/>
@@ -13647,7 +13970,7 @@
                           <a:ea typeface="Arial" pitchFamily="34" charset="-122"/>
                           <a:cs typeface="Arial" pitchFamily="34" charset="-120"/>
                         </a:rPr>
-                        <a:t>エアコン・空調</a:t>
+                        <a:t>朝食の改善要望</a:t>
                       </a:r>
                       <a:endParaRPr lang="en-US" sz="900" dirty="0">
                         <a:latin typeface="Arial" charset="0"/>
@@ -13715,7 +14038,7 @@
                           <a:ea typeface="Arial" pitchFamily="34" charset="-122"/>
                           <a:cs typeface="Arial" pitchFamily="34" charset="-120"/>
                         </a:rPr>
-                        <a:t>空調が暖房•送風のみだったため、室温調整に窓を開けざるをなかった</a:t>
+                        <a:t>会場が狭めで品数も多くはありませんが、パンもシリアルもありよかったです</a:t>
                       </a:r>
                       <a:endParaRPr lang="en-US" sz="900" dirty="0">
                         <a:latin typeface="Arial" charset="0"/>
@@ -13783,7 +14106,7 @@
                           <a:ea typeface="Arial" pitchFamily="34" charset="-122"/>
                           <a:cs typeface="Arial" pitchFamily="34" charset="-120"/>
                         </a:rPr>
-                        <a:t>6件</a:t>
+                        <a:t>5件</a:t>
                       </a:r>
                       <a:endParaRPr lang="en-US" sz="900" dirty="0">
                         <a:latin typeface="Arial" charset="0"/>
@@ -13921,7 +14244,7 @@
                           <a:ea typeface="Arial" pitchFamily="34" charset="-122"/>
                           <a:cs typeface="Arial" pitchFamily="34" charset="-120"/>
                         </a:rPr>
-                        <a:t>窓・採光</a:t>
+                        <a:t>エアコン・空調</a:t>
                       </a:r>
                       <a:endParaRPr lang="en-US" sz="900" dirty="0">
                         <a:latin typeface="Arial" charset="0"/>
@@ -14057,7 +14380,7 @@
                           <a:ea typeface="Arial" pitchFamily="34" charset="-122"/>
                           <a:cs typeface="Arial" pitchFamily="34" charset="-120"/>
                         </a:rPr>
-                        <a:t>6件</a:t>
+                        <a:t>4件</a:t>
                       </a:r>
                       <a:endParaRPr lang="en-US" sz="900" dirty="0">
                         <a:latin typeface="Arial" charset="0"/>
@@ -14331,7 +14654,7 @@
                           <a:ea typeface="Arial" pitchFamily="34" charset="-122"/>
                           <a:cs typeface="Arial" pitchFamily="34" charset="-120"/>
                         </a:rPr>
-                        <a:t>4件</a:t>
+                        <a:t>2件</a:t>
                       </a:r>
                       <a:endParaRPr lang="en-US" sz="900" dirty="0">
                         <a:latin typeface="Arial" charset="0"/>

--- a/納品レポート/ホテル別レポート/comfort_yokohama_kannai_口コミ分析レポート.pptx
+++ b/納品レポート/ホテル別レポート/comfort_yokohama_kannai_口コミ分析レポート.pptx
@@ -180,16 +180,16 @@
                 <c:ptCount val="6"/>
                 <c:lvl>
                   <c:pt idx="0">
+                    <c:v>Trip.com</c:v>
+                  </c:pt>
+                  <c:pt idx="1">
+                    <c:v>Agoda</c:v>
+                  </c:pt>
+                  <c:pt idx="2">
                     <c:v>Google</c:v>
                   </c:pt>
-                  <c:pt idx="1">
-                    <c:v>Trip.com</c:v>
-                  </c:pt>
-                  <c:pt idx="2">
+                  <c:pt idx="3">
                     <c:v>楽天トラベル</c:v>
-                  </c:pt>
-                  <c:pt idx="3">
-                    <c:v>Agoda</c:v>
                   </c:pt>
                   <c:pt idx="4">
                     <c:v>Booking.com</c:v>
@@ -208,22 +208,22 @@
                 <c:formatCode>General</c:formatCode>
                 <c:ptCount val="6"/>
                 <c:pt idx="0">
-                  <c:v>7.68</c:v>
+                  <c:v>8.35</c:v>
                 </c:pt>
                 <c:pt idx="1">
-                  <c:v>7.56</c:v>
+                  <c:v>8</c:v>
                 </c:pt>
                 <c:pt idx="2">
-                  <c:v>7.09</c:v>
+                  <c:v>7.57</c:v>
                 </c:pt>
                 <c:pt idx="3">
-                  <c:v>7</c:v>
+                  <c:v>7.57</c:v>
                 </c:pt>
                 <c:pt idx="4">
-                  <c:v>6.7</c:v>
+                  <c:v>7.25</c:v>
                 </c:pt>
                 <c:pt idx="5">
-                  <c:v>6.6</c:v>
+                  <c:v>7.2</c:v>
                 </c:pt>
               </c:numCache>
             </c:numRef>
@@ -566,13 +566,13 @@
               <c:numCache>
                 <c:ptCount val="3"/>
                 <c:pt idx="0">
-                  <c:v>41</c:v>
+                  <c:v>97</c:v>
                 </c:pt>
                 <c:pt idx="1">
-                  <c:v>21</c:v>
+                  <c:v>29</c:v>
                 </c:pt>
                 <c:pt idx="2">
-                  <c:v>12</c:v>
+                  <c:v>17</c:v>
                 </c:pt>
               </c:numCache>
             </c:numRef>
@@ -809,28 +809,28 @@
                 <c:formatCode>General</c:formatCode>
                 <c:ptCount val="8"/>
                 <c:pt idx="0">
-                  <c:v>16</c:v>
+                  <c:v>36</c:v>
                 </c:pt>
                 <c:pt idx="1">
-                  <c:v>4</c:v>
+                  <c:v>8</c:v>
                 </c:pt>
                 <c:pt idx="2">
-                  <c:v>21</c:v>
+                  <c:v>53</c:v>
                 </c:pt>
                 <c:pt idx="3">
                   <c:v>6</c:v>
                 </c:pt>
                 <c:pt idx="4">
-                  <c:v>12</c:v>
+                  <c:v>18</c:v>
                 </c:pt>
                 <c:pt idx="5">
-                  <c:v>3</c:v>
+                  <c:v>5</c:v>
                 </c:pt>
                 <c:pt idx="6">
-                  <c:v>7</c:v>
+                  <c:v>9</c:v>
                 </c:pt>
                 <c:pt idx="7">
-                  <c:v>5</c:v>
+                  <c:v>8</c:v>
                 </c:pt>
               </c:numCache>
             </c:numRef>
@@ -2761,7 +2761,7 @@
                 <a:ea typeface="Arial" pitchFamily="34" charset="-122"/>
                 <a:cs typeface="Arial" pitchFamily="34" charset="-120"/>
               </a:rPr>
-              <a:t>分析対象期間：2026年3月</a:t>
+              <a:t>分析対象期間：2026年2月〜3月</a:t>
             </a:r>
             <a:endParaRPr lang="en-US" sz="1000" dirty="0"/>
           </a:p>
@@ -2781,7 +2781,7 @@
                 <a:ea typeface="Arial" pitchFamily="34" charset="-122"/>
                 <a:cs typeface="Arial" pitchFamily="34" charset="-120"/>
               </a:rPr>
-              <a:t>レビュー総数：74件（6サイト）</a:t>
+              <a:t>レビュー総数：143件（6サイト）</a:t>
             </a:r>
             <a:endParaRPr lang="en-US" sz="1000" dirty="0"/>
           </a:p>
@@ -3347,7 +3347,7 @@
                           <a:ea typeface="Arial" pitchFamily="34" charset="-122"/>
                           <a:cs typeface="Arial" pitchFamily="34" charset="-120"/>
                         </a:rPr>
-                        <a:t>7.18点</a:t>
+                        <a:t>7.57点</a:t>
                       </a:r>
                       <a:endParaRPr lang="en-US" sz="1000" dirty="0">
                         <a:latin typeface="Arial" charset="0"/>
@@ -3415,7 +3415,7 @@
                           <a:ea typeface="Arial" pitchFamily="34" charset="-122"/>
                           <a:cs typeface="Arial" pitchFamily="34" charset="-120"/>
                         </a:rPr>
-                        <a:t>7.7点以上</a:t>
+                        <a:t>8.1点以上</a:t>
                       </a:r>
                       <a:endParaRPr lang="en-US" sz="1000" dirty="0">
                         <a:latin typeface="Arial" charset="0"/>
@@ -3621,7 +3621,7 @@
                           <a:ea typeface="Arial" pitchFamily="34" charset="-122"/>
                           <a:cs typeface="Arial" pitchFamily="34" charset="-120"/>
                         </a:rPr>
-                        <a:t>55.4%</a:t>
+                        <a:t>67.8%</a:t>
                       </a:r>
                       <a:endParaRPr lang="en-US" sz="1000" dirty="0">
                         <a:latin typeface="Arial" charset="0"/>
@@ -3689,7 +3689,7 @@
                           <a:ea typeface="Arial" pitchFamily="34" charset="-122"/>
                           <a:cs typeface="Arial" pitchFamily="34" charset="-120"/>
                         </a:rPr>
-                        <a:t>65%以上</a:t>
+                        <a:t>78%以上</a:t>
                       </a:r>
                       <a:endParaRPr lang="en-US" sz="1000" dirty="0">
                         <a:latin typeface="Arial" charset="0"/>
@@ -3895,7 +3895,7 @@
                           <a:ea typeface="Arial" pitchFamily="34" charset="-122"/>
                           <a:cs typeface="Arial" pitchFamily="34" charset="-120"/>
                         </a:rPr>
-                        <a:t>16.2%</a:t>
+                        <a:t>11.9%</a:t>
                       </a:r>
                       <a:endParaRPr lang="en-US" sz="1000" dirty="0">
                         <a:latin typeface="Arial" charset="0"/>
@@ -3963,7 +3963,7 @@
                           <a:ea typeface="Arial" pitchFamily="34" charset="-122"/>
                           <a:cs typeface="Arial" pitchFamily="34" charset="-120"/>
                         </a:rPr>
-                        <a:t>11%以下</a:t>
+                        <a:t>7%以下</a:t>
                       </a:r>
                       <a:endParaRPr lang="en-US" sz="1000" dirty="0">
                         <a:latin typeface="Arial" charset="0"/>
@@ -4101,280 +4101,6 @@
                           <a:ea typeface="Arial" pitchFamily="34" charset="-122"/>
                           <a:cs typeface="Arial" pitchFamily="34" charset="-120"/>
                         </a:rPr>
-                        <a:t>じゃらん平均評価</a:t>
-                      </a:r>
-                      <a:endParaRPr lang="en-US" sz="1000" dirty="0">
-                        <a:latin typeface="Arial" charset="0"/>
-                        <a:ea typeface="Arial" charset="0"/>
-                        <a:cs typeface="Arial" charset="0"/>
-                      </a:endParaRPr>
-                    </a:p>
-                  </a:txBody>
-                  <a:tcPr marL="91440" marR="91440" marT="45720" marB="45720">
-                    <a:lnL w="6350" cap="flat" cmpd="sng" algn="ctr">
-                      <a:solidFill>
-                        <a:srgbClr val="CBD5E1"/>
-                      </a:solidFill>
-                      <a:prstDash val="solid"/>
-                      <a:round/>
-                      <a:headEnd type="none" w="med" len="med"/>
-                      <a:tailEnd type="none" w="med" len="med"/>
-                    </a:lnL>
-                    <a:lnR w="6350" cap="flat" cmpd="sng" algn="ctr">
-                      <a:solidFill>
-                        <a:srgbClr val="CBD5E1"/>
-                      </a:solidFill>
-                      <a:prstDash val="solid"/>
-                      <a:round/>
-                      <a:headEnd type="none" w="med" len="med"/>
-                      <a:tailEnd type="none" w="med" len="med"/>
-                    </a:lnR>
-                    <a:lnT w="6350" cap="flat" cmpd="sng" algn="ctr">
-                      <a:solidFill>
-                        <a:srgbClr val="CBD5E1"/>
-                      </a:solidFill>
-                      <a:prstDash val="solid"/>
-                      <a:round/>
-                      <a:headEnd type="none" w="med" len="med"/>
-                      <a:tailEnd type="none" w="med" len="med"/>
-                    </a:lnT>
-                    <a:lnB w="6350" cap="flat" cmpd="sng" algn="ctr">
-                      <a:solidFill>
-                        <a:srgbClr val="CBD5E1"/>
-                      </a:solidFill>
-                      <a:prstDash val="solid"/>
-                      <a:round/>
-                      <a:headEnd type="none" w="med" len="med"/>
-                      <a:tailEnd type="none" w="med" len="med"/>
-                    </a:lnB>
-                    <a:solidFill>
-                      <a:srgbClr val="FFFFFF"/>
-                    </a:solidFill>
-                  </a:tcPr>
-                </a:tc>
-                <a:tc>
-                  <a:txBody>
-                    <a:bodyPr/>
-                    <a:lstStyle/>
-                    <a:p>
-                      <a:pPr algn="ctr" indent="0" marL="0">
-                        <a:buNone/>
-                      </a:pPr>
-                      <a:r>
-                        <a:rPr lang="en-US" sz="1000" dirty="0">
-                          <a:solidFill>
-                            <a:srgbClr val="64748B"/>
-                          </a:solidFill>
-                          <a:latin typeface="Arial" pitchFamily="34" charset="0"/>
-                          <a:ea typeface="Arial" pitchFamily="34" charset="-122"/>
-                          <a:cs typeface="Arial" pitchFamily="34" charset="-120"/>
-                        </a:rPr>
-                        <a:t>6.6点</a:t>
-                      </a:r>
-                      <a:endParaRPr lang="en-US" sz="1000" dirty="0">
-                        <a:latin typeface="Arial" charset="0"/>
-                        <a:ea typeface="Arial" charset="0"/>
-                        <a:cs typeface="Arial" charset="0"/>
-                      </a:endParaRPr>
-                    </a:p>
-                  </a:txBody>
-                  <a:tcPr marL="91440" marR="91440" marT="45720" marB="45720">
-                    <a:lnL w="6350" cap="flat" cmpd="sng" algn="ctr">
-                      <a:solidFill>
-                        <a:srgbClr val="CBD5E1"/>
-                      </a:solidFill>
-                      <a:prstDash val="solid"/>
-                      <a:round/>
-                      <a:headEnd type="none" w="med" len="med"/>
-                      <a:tailEnd type="none" w="med" len="med"/>
-                    </a:lnL>
-                    <a:lnR w="6350" cap="flat" cmpd="sng" algn="ctr">
-                      <a:solidFill>
-                        <a:srgbClr val="CBD5E1"/>
-                      </a:solidFill>
-                      <a:prstDash val="solid"/>
-                      <a:round/>
-                      <a:headEnd type="none" w="med" len="med"/>
-                      <a:tailEnd type="none" w="med" len="med"/>
-                    </a:lnR>
-                    <a:lnT w="6350" cap="flat" cmpd="sng" algn="ctr">
-                      <a:solidFill>
-                        <a:srgbClr val="CBD5E1"/>
-                      </a:solidFill>
-                      <a:prstDash val="solid"/>
-                      <a:round/>
-                      <a:headEnd type="none" w="med" len="med"/>
-                      <a:tailEnd type="none" w="med" len="med"/>
-                    </a:lnT>
-                    <a:lnB w="6350" cap="flat" cmpd="sng" algn="ctr">
-                      <a:solidFill>
-                        <a:srgbClr val="CBD5E1"/>
-                      </a:solidFill>
-                      <a:prstDash val="solid"/>
-                      <a:round/>
-                      <a:headEnd type="none" w="med" len="med"/>
-                      <a:tailEnd type="none" w="med" len="med"/>
-                    </a:lnB>
-                    <a:solidFill>
-                      <a:srgbClr val="FFFFFF"/>
-                    </a:solidFill>
-                  </a:tcPr>
-                </a:tc>
-                <a:tc>
-                  <a:txBody>
-                    <a:bodyPr/>
-                    <a:lstStyle/>
-                    <a:p>
-                      <a:pPr algn="ctr" indent="0" marL="0">
-                        <a:buNone/>
-                      </a:pPr>
-                      <a:r>
-                        <a:rPr lang="en-US" sz="1000" b="1" dirty="0">
-                          <a:solidFill>
-                            <a:srgbClr val="16A34A"/>
-                          </a:solidFill>
-                          <a:latin typeface="Arial" pitchFamily="34" charset="0"/>
-                          <a:ea typeface="Arial" pitchFamily="34" charset="-122"/>
-                          <a:cs typeface="Arial" pitchFamily="34" charset="-120"/>
-                        </a:rPr>
-                        <a:t>7.6点以上</a:t>
-                      </a:r>
-                      <a:endParaRPr lang="en-US" sz="1000" dirty="0">
-                        <a:latin typeface="Arial" charset="0"/>
-                        <a:ea typeface="Arial" charset="0"/>
-                        <a:cs typeface="Arial" charset="0"/>
-                      </a:endParaRPr>
-                    </a:p>
-                  </a:txBody>
-                  <a:tcPr marL="91440" marR="91440" marT="45720" marB="45720">
-                    <a:lnL w="6350" cap="flat" cmpd="sng" algn="ctr">
-                      <a:solidFill>
-                        <a:srgbClr val="CBD5E1"/>
-                      </a:solidFill>
-                      <a:prstDash val="solid"/>
-                      <a:round/>
-                      <a:headEnd type="none" w="med" len="med"/>
-                      <a:tailEnd type="none" w="med" len="med"/>
-                    </a:lnL>
-                    <a:lnR w="6350" cap="flat" cmpd="sng" algn="ctr">
-                      <a:solidFill>
-                        <a:srgbClr val="CBD5E1"/>
-                      </a:solidFill>
-                      <a:prstDash val="solid"/>
-                      <a:round/>
-                      <a:headEnd type="none" w="med" len="med"/>
-                      <a:tailEnd type="none" w="med" len="med"/>
-                    </a:lnR>
-                    <a:lnT w="6350" cap="flat" cmpd="sng" algn="ctr">
-                      <a:solidFill>
-                        <a:srgbClr val="CBD5E1"/>
-                      </a:solidFill>
-                      <a:prstDash val="solid"/>
-                      <a:round/>
-                      <a:headEnd type="none" w="med" len="med"/>
-                      <a:tailEnd type="none" w="med" len="med"/>
-                    </a:lnT>
-                    <a:lnB w="6350" cap="flat" cmpd="sng" algn="ctr">
-                      <a:solidFill>
-                        <a:srgbClr val="CBD5E1"/>
-                      </a:solidFill>
-                      <a:prstDash val="solid"/>
-                      <a:round/>
-                      <a:headEnd type="none" w="med" len="med"/>
-                      <a:tailEnd type="none" w="med" len="med"/>
-                    </a:lnB>
-                    <a:solidFill>
-                      <a:srgbClr val="FFFFFF"/>
-                    </a:solidFill>
-                  </a:tcPr>
-                </a:tc>
-                <a:tc>
-                  <a:txBody>
-                    <a:bodyPr/>
-                    <a:lstStyle/>
-                    <a:p>
-                      <a:pPr algn="ctr" indent="0" marL="0">
-                        <a:buNone/>
-                      </a:pPr>
-                      <a:r>
-                        <a:rPr lang="en-US" sz="1000" dirty="0">
-                          <a:solidFill>
-                            <a:srgbClr val="64748B"/>
-                          </a:solidFill>
-                          <a:latin typeface="Arial" pitchFamily="34" charset="0"/>
-                          <a:ea typeface="Arial" pitchFamily="34" charset="-122"/>
-                          <a:cs typeface="Arial" pitchFamily="34" charset="-120"/>
-                        </a:rPr>
-                        <a:t>2026年9月</a:t>
-                      </a:r>
-                      <a:endParaRPr lang="en-US" sz="1000" dirty="0">
-                        <a:latin typeface="Arial" charset="0"/>
-                        <a:ea typeface="Arial" charset="0"/>
-                        <a:cs typeface="Arial" charset="0"/>
-                      </a:endParaRPr>
-                    </a:p>
-                  </a:txBody>
-                  <a:tcPr marL="91440" marR="91440" marT="45720" marB="45720">
-                    <a:lnL w="6350" cap="flat" cmpd="sng" algn="ctr">
-                      <a:solidFill>
-                        <a:srgbClr val="CBD5E1"/>
-                      </a:solidFill>
-                      <a:prstDash val="solid"/>
-                      <a:round/>
-                      <a:headEnd type="none" w="med" len="med"/>
-                      <a:tailEnd type="none" w="med" len="med"/>
-                    </a:lnL>
-                    <a:lnR w="6350" cap="flat" cmpd="sng" algn="ctr">
-                      <a:solidFill>
-                        <a:srgbClr val="CBD5E1"/>
-                      </a:solidFill>
-                      <a:prstDash val="solid"/>
-                      <a:round/>
-                      <a:headEnd type="none" w="med" len="med"/>
-                      <a:tailEnd type="none" w="med" len="med"/>
-                    </a:lnR>
-                    <a:lnT w="6350" cap="flat" cmpd="sng" algn="ctr">
-                      <a:solidFill>
-                        <a:srgbClr val="CBD5E1"/>
-                      </a:solidFill>
-                      <a:prstDash val="solid"/>
-                      <a:round/>
-                      <a:headEnd type="none" w="med" len="med"/>
-                      <a:tailEnd type="none" w="med" len="med"/>
-                    </a:lnT>
-                    <a:lnB w="6350" cap="flat" cmpd="sng" algn="ctr">
-                      <a:solidFill>
-                        <a:srgbClr val="CBD5E1"/>
-                      </a:solidFill>
-                      <a:prstDash val="solid"/>
-                      <a:round/>
-                      <a:headEnd type="none" w="med" len="med"/>
-                      <a:tailEnd type="none" w="med" len="med"/>
-                    </a:lnB>
-                    <a:solidFill>
-                      <a:srgbClr val="FFFFFF"/>
-                    </a:solidFill>
-                  </a:tcPr>
-                </a:tc>
-              </a:tr>
-              <a:tr h="320040">
-                <a:tc>
-                  <a:txBody>
-                    <a:bodyPr/>
-                    <a:lstStyle/>
-                    <a:p>
-                      <a:pPr indent="0" marL="0">
-                        <a:buNone/>
-                      </a:pPr>
-                      <a:r>
-                        <a:rPr lang="en-US" sz="1000" b="1" dirty="0">
-                          <a:solidFill>
-                            <a:srgbClr val="334155"/>
-                          </a:solidFill>
-                          <a:latin typeface="Arial" pitchFamily="34" charset="0"/>
-                          <a:ea typeface="Arial" pitchFamily="34" charset="-122"/>
-                          <a:cs typeface="Arial" pitchFamily="34" charset="-120"/>
-                        </a:rPr>
                         <a:t>口コミ返信率</a:t>
                       </a:r>
                       <a:endParaRPr lang="en-US" sz="1000" dirty="0">
@@ -4422,7 +4148,7 @@
                       <a:tailEnd type="none" w="med" len="med"/>
                     </a:lnB>
                     <a:solidFill>
-                      <a:srgbClr val="E8EFF8"/>
+                      <a:srgbClr val="FFFFFF"/>
                     </a:solidFill>
                   </a:tcPr>
                 </a:tc>
@@ -4490,7 +4216,7 @@
                       <a:tailEnd type="none" w="med" len="med"/>
                     </a:lnB>
                     <a:solidFill>
-                      <a:srgbClr val="E8EFF8"/>
+                      <a:srgbClr val="FFFFFF"/>
                     </a:solidFill>
                   </a:tcPr>
                 </a:tc>
@@ -4558,7 +4284,7 @@
                       <a:tailEnd type="none" w="med" len="med"/>
                     </a:lnB>
                     <a:solidFill>
-                      <a:srgbClr val="E8EFF8"/>
+                      <a:srgbClr val="FFFFFF"/>
                     </a:solidFill>
                   </a:tcPr>
                 </a:tc>
@@ -4626,7 +4352,7 @@
                       <a:tailEnd type="none" w="med" len="med"/>
                     </a:lnB>
                     <a:solidFill>
-                      <a:srgbClr val="E8EFF8"/>
+                      <a:srgbClr val="FFFFFF"/>
                     </a:solidFill>
                   </a:tcPr>
                 </a:tc>
@@ -4696,7 +4422,7 @@
                       <a:tailEnd type="none" w="med" len="med"/>
                     </a:lnB>
                     <a:solidFill>
-                      <a:srgbClr val="FFFFFF"/>
+                      <a:srgbClr val="E8EFF8"/>
                     </a:solidFill>
                   </a:tcPr>
                 </a:tc>
@@ -4717,7 +4443,7 @@
                           <a:ea typeface="Arial" pitchFamily="34" charset="-122"/>
                           <a:cs typeface="Arial" pitchFamily="34" charset="-120"/>
                         </a:rPr>
-                        <a:t>約19件/期間</a:t>
+                        <a:t>約23件/期間</a:t>
                       </a:r>
                       <a:endParaRPr lang="en-US" sz="1000" dirty="0">
                         <a:latin typeface="Arial" charset="0"/>
@@ -4764,7 +4490,7 @@
                       <a:tailEnd type="none" w="med" len="med"/>
                     </a:lnB>
                     <a:solidFill>
-                      <a:srgbClr val="FFFFFF"/>
+                      <a:srgbClr val="E8EFF8"/>
                     </a:solidFill>
                   </a:tcPr>
                 </a:tc>
@@ -4785,7 +4511,7 @@
                           <a:ea typeface="Arial" pitchFamily="34" charset="-122"/>
                           <a:cs typeface="Arial" pitchFamily="34" charset="-120"/>
                         </a:rPr>
-                        <a:t>9件以下</a:t>
+                        <a:t>11件以下</a:t>
                       </a:r>
                       <a:endParaRPr lang="en-US" sz="1000" dirty="0">
                         <a:latin typeface="Arial" charset="0"/>
@@ -4832,7 +4558,7 @@
                       <a:tailEnd type="none" w="med" len="med"/>
                     </a:lnB>
                     <a:solidFill>
-                      <a:srgbClr val="FFFFFF"/>
+                      <a:srgbClr val="E8EFF8"/>
                     </a:solidFill>
                   </a:tcPr>
                 </a:tc>
@@ -4900,7 +4626,7 @@
                       <a:tailEnd type="none" w="med" len="med"/>
                     </a:lnB>
                     <a:solidFill>
-                      <a:srgbClr val="FFFFFF"/>
+                      <a:srgbClr val="E8EFF8"/>
                     </a:solidFill>
                   </a:tcPr>
                 </a:tc>
@@ -4917,7 +4643,7 @@
         </p:nvSpPr>
         <p:spPr>
           <a:xfrm>
-            <a:off x="457200" y="3429000"/>
+            <a:off x="457200" y="3108960"/>
             <a:ext cx="8229600" cy="640080"/>
           </a:xfrm>
           <a:prstGeom prst="rect">
@@ -4944,7 +4670,7 @@
         </p:nvSpPr>
         <p:spPr>
           <a:xfrm>
-            <a:off x="457200" y="3429000"/>
+            <a:off x="457200" y="3108960"/>
             <a:ext cx="54864" cy="640080"/>
           </a:xfrm>
           <a:prstGeom prst="rect">
@@ -4964,7 +4690,7 @@
         </p:nvSpPr>
         <p:spPr>
           <a:xfrm>
-            <a:off x="640080" y="3429000"/>
+            <a:off x="640080" y="3108960"/>
             <a:ext cx="7863840" cy="640080"/>
           </a:xfrm>
           <a:prstGeom prst="rect">
@@ -5356,7 +5082,7 @@
                 <a:ea typeface="Arial" pitchFamily="34" charset="-122"/>
                 <a:cs typeface="Arial" pitchFamily="34" charset="-120"/>
               </a:rPr>
-              <a:t>7.18</a:t>
+              <a:t>7.57</a:t>
             </a:r>
             <a:endParaRPr lang="en-US" sz="3200" dirty="0"/>
           </a:p>
@@ -5481,7 +5207,7 @@
                 <a:ea typeface="Arial" pitchFamily="34" charset="-122"/>
                 <a:cs typeface="Arial" pitchFamily="34" charset="-120"/>
               </a:rPr>
-              <a:t>55.4%</a:t>
+              <a:t>67.8%</a:t>
             </a:r>
             <a:endParaRPr lang="en-US" sz="3200" dirty="0"/>
           </a:p>
@@ -5606,7 +5332,7 @@
                 <a:ea typeface="Arial" pitchFamily="34" charset="-122"/>
                 <a:cs typeface="Arial" pitchFamily="34" charset="-120"/>
               </a:rPr>
-              <a:t>16.2%</a:t>
+              <a:t>11.9%</a:t>
             </a:r>
             <a:endParaRPr lang="en-US" sz="3200" dirty="0"/>
           </a:p>
@@ -5731,7 +5457,7 @@
                 <a:ea typeface="Arial" pitchFamily="34" charset="-122"/>
                 <a:cs typeface="Arial" pitchFamily="34" charset="-120"/>
               </a:rPr>
-              <a:t>74件</a:t>
+              <a:t>143件</a:t>
             </a:r>
             <a:endParaRPr lang="en-US" sz="3200" dirty="0"/>
           </a:p>
@@ -5899,7 +5625,7 @@
                 <a:ea typeface="Arial" pitchFamily="34" charset="-122"/>
                 <a:cs typeface="Arial" pitchFamily="34" charset="-120"/>
               </a:rPr>
-              <a:t>快適さ・設備 </a:t>
+              <a:t>立地・アクセス </a:t>
             </a:r>
             <a:endParaRPr lang="en-US" sz="1100" dirty="0"/>
           </a:p>
@@ -5919,7 +5645,7 @@
                 <a:ea typeface="Arial" pitchFamily="34" charset="-122"/>
                 <a:cs typeface="Arial" pitchFamily="34" charset="-120"/>
               </a:rPr>
-              <a:t>  部屋の広さも設備も料金に見合うものだと思うが、それ以上のものではない</a:t>
+              <a:t>  横浜という立地から多少の英会話くらいは出来ると思ってましたが、年配の男性が全くできず海外の方が困ってたので助けてあ...</a:t>
             </a:r>
             <a:endParaRPr lang="en-US" sz="1100" dirty="0"/>
           </a:p>
@@ -6540,7 +6266,7 @@
                 <a:ea typeface="Arial" pitchFamily="34" charset="-122"/>
                 <a:cs typeface="Arial" pitchFamily="34" charset="-120"/>
               </a:rPr>
-              <a:t>7.18</a:t>
+              <a:t>7.57</a:t>
             </a:r>
             <a:endParaRPr lang="en-US" sz="3200" dirty="0"/>
           </a:p>
@@ -6665,7 +6391,7 @@
                 <a:ea typeface="Arial" pitchFamily="34" charset="-122"/>
                 <a:cs typeface="Arial" pitchFamily="34" charset="-120"/>
               </a:rPr>
-              <a:t>55.4%</a:t>
+              <a:t>67.8%</a:t>
             </a:r>
             <a:endParaRPr lang="en-US" sz="3200" dirty="0"/>
           </a:p>
@@ -6790,7 +6516,7 @@
                 <a:ea typeface="Arial" pitchFamily="34" charset="-122"/>
                 <a:cs typeface="Arial" pitchFamily="34" charset="-120"/>
               </a:rPr>
-              <a:t>16.2%</a:t>
+              <a:t>11.9%</a:t>
             </a:r>
             <a:endParaRPr lang="en-US" sz="3200" dirty="0"/>
           </a:p>
@@ -6915,7 +6641,7 @@
                 <a:ea typeface="Arial" pitchFamily="34" charset="-122"/>
                 <a:cs typeface="Arial" pitchFamily="34" charset="-120"/>
               </a:rPr>
-              <a:t>74件</a:t>
+              <a:t>143件</a:t>
             </a:r>
             <a:endParaRPr lang="en-US" sz="3200" dirty="0"/>
           </a:p>
@@ -7336,56 +7062,7 @@
                 <a:ea typeface="Arial" pitchFamily="34" charset="-122"/>
                 <a:cs typeface="Arial" pitchFamily="34" charset="-120"/>
               </a:rPr>
-              <a:t>Google(7.68)が最高スコア。</a:t>
-            </a:r>
-            <a:endParaRPr lang="en-US" sz="1100" dirty="0"/>
-          </a:p>
-          <a:p>
-            <a:pPr indent="0" marL="0">
-              <a:spcAft>
-                <a:spcPts val="200"/>
-              </a:spcAft>
-              <a:buNone/>
-            </a:pPr>
-            <a:endParaRPr lang="en-US" sz="1100" dirty="0"/>
-          </a:p>
-          <a:p>
-            <a:pPr indent="0" marL="0">
-              <a:spcAft>
-                <a:spcPts val="200"/>
-              </a:spcAft>
-              <a:buNone/>
-            </a:pPr>
-            <a:r>
-              <a:rPr lang="en-US" sz="1100" b="1" dirty="0">
-                <a:solidFill>
-                  <a:srgbClr val="DC2626"/>
-                </a:solidFill>
-                <a:latin typeface="Arial" pitchFamily="34" charset="0"/>
-                <a:ea typeface="Arial" pitchFamily="34" charset="-122"/>
-                <a:cs typeface="Arial" pitchFamily="34" charset="-120"/>
-              </a:rPr>
-              <a:t>改善対象サイト</a:t>
-            </a:r>
-            <a:endParaRPr lang="en-US" sz="1100" dirty="0"/>
-          </a:p>
-          <a:p>
-            <a:pPr indent="0" marL="0">
-              <a:spcAft>
-                <a:spcPts val="200"/>
-              </a:spcAft>
-              <a:buNone/>
-            </a:pPr>
-            <a:r>
-              <a:rPr lang="en-US" sz="900" dirty="0">
-                <a:solidFill>
-                  <a:srgbClr val="64748B"/>
-                </a:solidFill>
-                <a:latin typeface="Arial" pitchFamily="34" charset="0"/>
-                <a:ea typeface="Arial" pitchFamily="34" charset="-122"/>
-                <a:cs typeface="Arial" pitchFamily="34" charset="-120"/>
-              </a:rPr>
-              <a:t>じゃらん(6.6)が相対的に低い。口コミ返信の強化が急務</a:t>
+              <a:t>Trip.com(8.35)が最高スコア。</a:t>
             </a:r>
             <a:endParaRPr lang="en-US" sz="1100" dirty="0"/>
           </a:p>
@@ -7826,7 +7503,7 @@
                           <a:ea typeface="Arial" pitchFamily="34" charset="-122"/>
                           <a:cs typeface="Arial" pitchFamily="34" charset="-120"/>
                         </a:rPr>
-                        <a:t>Google</a:t>
+                        <a:t>Trip.com</a:t>
                       </a:r>
                       <a:endParaRPr lang="en-US" sz="900" dirty="0">
                         <a:latin typeface="Arial" charset="0"/>
@@ -7894,7 +7571,7 @@
                           <a:ea typeface="Arial" pitchFamily="34" charset="-122"/>
                           <a:cs typeface="Arial" pitchFamily="34" charset="-120"/>
                         </a:rPr>
-                        <a:t>19</a:t>
+                        <a:t>17</a:t>
                       </a:r>
                       <a:endParaRPr lang="en-US" sz="900" dirty="0">
                         <a:latin typeface="Arial" charset="0"/>
@@ -7962,7 +7639,7 @@
                           <a:ea typeface="Arial" pitchFamily="34" charset="-122"/>
                           <a:cs typeface="Arial" pitchFamily="34" charset="-120"/>
                         </a:rPr>
-                        <a:t>3.84</a:t>
+                        <a:t>8.35</a:t>
                       </a:r>
                       <a:endParaRPr lang="en-US" sz="900" dirty="0">
                         <a:latin typeface="Arial" charset="0"/>
@@ -8010,348 +7687,6 @@
                     </a:lnB>
                     <a:solidFill>
                       <a:srgbClr val="E8EFF8"/>
-                    </a:solidFill>
-                  </a:tcPr>
-                </a:tc>
-                <a:tc>
-                  <a:txBody>
-                    <a:bodyPr/>
-                    <a:lstStyle/>
-                    <a:p>
-                      <a:pPr algn="ctr" indent="0" marL="0">
-                        <a:buNone/>
-                      </a:pPr>
-                      <a:r>
-                        <a:rPr lang="en-US" sz="900" dirty="0">
-                          <a:solidFill>
-                            <a:srgbClr val="000000"/>
-                          </a:solidFill>
-                          <a:latin typeface="Arial" pitchFamily="34" charset="0"/>
-                          <a:ea typeface="Arial" pitchFamily="34" charset="-122"/>
-                          <a:cs typeface="Arial" pitchFamily="34" charset="-120"/>
-                        </a:rPr>
-                        <a:t>/5 (×2)</a:t>
-                      </a:r>
-                      <a:endParaRPr lang="en-US" sz="900" dirty="0">
-                        <a:latin typeface="Arial" charset="0"/>
-                        <a:ea typeface="Arial" charset="0"/>
-                        <a:cs typeface="Arial" charset="0"/>
-                      </a:endParaRPr>
-                    </a:p>
-                  </a:txBody>
-                  <a:tcPr marL="91440" marR="91440" marT="45720" marB="45720">
-                    <a:lnL w="6350" cap="flat" cmpd="sng" algn="ctr">
-                      <a:solidFill>
-                        <a:srgbClr val="CBD5E1"/>
-                      </a:solidFill>
-                      <a:prstDash val="solid"/>
-                      <a:round/>
-                      <a:headEnd type="none" w="med" len="med"/>
-                      <a:tailEnd type="none" w="med" len="med"/>
-                    </a:lnL>
-                    <a:lnR w="6350" cap="flat" cmpd="sng" algn="ctr">
-                      <a:solidFill>
-                        <a:srgbClr val="CBD5E1"/>
-                      </a:solidFill>
-                      <a:prstDash val="solid"/>
-                      <a:round/>
-                      <a:headEnd type="none" w="med" len="med"/>
-                      <a:tailEnd type="none" w="med" len="med"/>
-                    </a:lnR>
-                    <a:lnT w="6350" cap="flat" cmpd="sng" algn="ctr">
-                      <a:solidFill>
-                        <a:srgbClr val="CBD5E1"/>
-                      </a:solidFill>
-                      <a:prstDash val="solid"/>
-                      <a:round/>
-                      <a:headEnd type="none" w="med" len="med"/>
-                      <a:tailEnd type="none" w="med" len="med"/>
-                    </a:lnT>
-                    <a:lnB w="6350" cap="flat" cmpd="sng" algn="ctr">
-                      <a:solidFill>
-                        <a:srgbClr val="CBD5E1"/>
-                      </a:solidFill>
-                      <a:prstDash val="solid"/>
-                      <a:round/>
-                      <a:headEnd type="none" w="med" len="med"/>
-                      <a:tailEnd type="none" w="med" len="med"/>
-                    </a:lnB>
-                    <a:solidFill>
-                      <a:srgbClr val="E8EFF8"/>
-                    </a:solidFill>
-                  </a:tcPr>
-                </a:tc>
-                <a:tc>
-                  <a:txBody>
-                    <a:bodyPr/>
-                    <a:lstStyle/>
-                    <a:p>
-                      <a:pPr algn="ctr" indent="0" marL="0">
-                        <a:buNone/>
-                      </a:pPr>
-                      <a:r>
-                        <a:rPr lang="en-US" sz="900" dirty="0">
-                          <a:solidFill>
-                            <a:srgbClr val="000000"/>
-                          </a:solidFill>
-                          <a:latin typeface="Arial" pitchFamily="34" charset="0"/>
-                          <a:ea typeface="Arial" pitchFamily="34" charset="-122"/>
-                          <a:cs typeface="Arial" pitchFamily="34" charset="-120"/>
-                        </a:rPr>
-                        <a:t>7.68</a:t>
-                      </a:r>
-                      <a:endParaRPr lang="en-US" sz="900" dirty="0">
-                        <a:latin typeface="Arial" charset="0"/>
-                        <a:ea typeface="Arial" charset="0"/>
-                        <a:cs typeface="Arial" charset="0"/>
-                      </a:endParaRPr>
-                    </a:p>
-                  </a:txBody>
-                  <a:tcPr marL="91440" marR="91440" marT="45720" marB="45720">
-                    <a:lnL w="6350" cap="flat" cmpd="sng" algn="ctr">
-                      <a:solidFill>
-                        <a:srgbClr val="CBD5E1"/>
-                      </a:solidFill>
-                      <a:prstDash val="solid"/>
-                      <a:round/>
-                      <a:headEnd type="none" w="med" len="med"/>
-                      <a:tailEnd type="none" w="med" len="med"/>
-                    </a:lnL>
-                    <a:lnR w="6350" cap="flat" cmpd="sng" algn="ctr">
-                      <a:solidFill>
-                        <a:srgbClr val="CBD5E1"/>
-                      </a:solidFill>
-                      <a:prstDash val="solid"/>
-                      <a:round/>
-                      <a:headEnd type="none" w="med" len="med"/>
-                      <a:tailEnd type="none" w="med" len="med"/>
-                    </a:lnR>
-                    <a:lnT w="6350" cap="flat" cmpd="sng" algn="ctr">
-                      <a:solidFill>
-                        <a:srgbClr val="CBD5E1"/>
-                      </a:solidFill>
-                      <a:prstDash val="solid"/>
-                      <a:round/>
-                      <a:headEnd type="none" w="med" len="med"/>
-                      <a:tailEnd type="none" w="med" len="med"/>
-                    </a:lnT>
-                    <a:lnB w="6350" cap="flat" cmpd="sng" algn="ctr">
-                      <a:solidFill>
-                        <a:srgbClr val="CBD5E1"/>
-                      </a:solidFill>
-                      <a:prstDash val="solid"/>
-                      <a:round/>
-                      <a:headEnd type="none" w="med" len="med"/>
-                      <a:tailEnd type="none" w="med" len="med"/>
-                    </a:lnB>
-                    <a:solidFill>
-                      <a:srgbClr val="E8EFF8"/>
-                    </a:solidFill>
-                  </a:tcPr>
-                </a:tc>
-              </a:tr>
-              <a:tr h="201168">
-                <a:tc>
-                  <a:txBody>
-                    <a:bodyPr/>
-                    <a:lstStyle/>
-                    <a:p>
-                      <a:pPr algn="ctr" indent="0" marL="0">
-                        <a:buNone/>
-                      </a:pPr>
-                      <a:r>
-                        <a:rPr lang="en-US" sz="900" dirty="0">
-                          <a:solidFill>
-                            <a:srgbClr val="000000"/>
-                          </a:solidFill>
-                          <a:latin typeface="Arial" pitchFamily="34" charset="0"/>
-                          <a:ea typeface="Arial" pitchFamily="34" charset="-122"/>
-                          <a:cs typeface="Arial" pitchFamily="34" charset="-120"/>
-                        </a:rPr>
-                        <a:t>Trip.com</a:t>
-                      </a:r>
-                      <a:endParaRPr lang="en-US" sz="900" dirty="0">
-                        <a:latin typeface="Arial" charset="0"/>
-                        <a:ea typeface="Arial" charset="0"/>
-                        <a:cs typeface="Arial" charset="0"/>
-                      </a:endParaRPr>
-                    </a:p>
-                  </a:txBody>
-                  <a:tcPr marL="91440" marR="91440" marT="45720" marB="45720">
-                    <a:lnL w="6350" cap="flat" cmpd="sng" algn="ctr">
-                      <a:solidFill>
-                        <a:srgbClr val="CBD5E1"/>
-                      </a:solidFill>
-                      <a:prstDash val="solid"/>
-                      <a:round/>
-                      <a:headEnd type="none" w="med" len="med"/>
-                      <a:tailEnd type="none" w="med" len="med"/>
-                    </a:lnL>
-                    <a:lnR w="6350" cap="flat" cmpd="sng" algn="ctr">
-                      <a:solidFill>
-                        <a:srgbClr val="CBD5E1"/>
-                      </a:solidFill>
-                      <a:prstDash val="solid"/>
-                      <a:round/>
-                      <a:headEnd type="none" w="med" len="med"/>
-                      <a:tailEnd type="none" w="med" len="med"/>
-                    </a:lnR>
-                    <a:lnT w="6350" cap="flat" cmpd="sng" algn="ctr">
-                      <a:solidFill>
-                        <a:srgbClr val="CBD5E1"/>
-                      </a:solidFill>
-                      <a:prstDash val="solid"/>
-                      <a:round/>
-                      <a:headEnd type="none" w="med" len="med"/>
-                      <a:tailEnd type="none" w="med" len="med"/>
-                    </a:lnT>
-                    <a:lnB w="6350" cap="flat" cmpd="sng" algn="ctr">
-                      <a:solidFill>
-                        <a:srgbClr val="CBD5E1"/>
-                      </a:solidFill>
-                      <a:prstDash val="solid"/>
-                      <a:round/>
-                      <a:headEnd type="none" w="med" len="med"/>
-                      <a:tailEnd type="none" w="med" len="med"/>
-                    </a:lnB>
-                    <a:solidFill>
-                      <a:srgbClr val="FFFFFF"/>
-                    </a:solidFill>
-                  </a:tcPr>
-                </a:tc>
-                <a:tc>
-                  <a:txBody>
-                    <a:bodyPr/>
-                    <a:lstStyle/>
-                    <a:p>
-                      <a:pPr algn="ctr" indent="0" marL="0">
-                        <a:buNone/>
-                      </a:pPr>
-                      <a:r>
-                        <a:rPr lang="en-US" sz="900" dirty="0">
-                          <a:solidFill>
-                            <a:srgbClr val="000000"/>
-                          </a:solidFill>
-                          <a:latin typeface="Arial" pitchFamily="34" charset="0"/>
-                          <a:ea typeface="Arial" pitchFamily="34" charset="-122"/>
-                          <a:cs typeface="Arial" pitchFamily="34" charset="-120"/>
-                        </a:rPr>
-                        <a:t>9</a:t>
-                      </a:r>
-                      <a:endParaRPr lang="en-US" sz="900" dirty="0">
-                        <a:latin typeface="Arial" charset="0"/>
-                        <a:ea typeface="Arial" charset="0"/>
-                        <a:cs typeface="Arial" charset="0"/>
-                      </a:endParaRPr>
-                    </a:p>
-                  </a:txBody>
-                  <a:tcPr marL="91440" marR="91440" marT="45720" marB="45720">
-                    <a:lnL w="6350" cap="flat" cmpd="sng" algn="ctr">
-                      <a:solidFill>
-                        <a:srgbClr val="CBD5E1"/>
-                      </a:solidFill>
-                      <a:prstDash val="solid"/>
-                      <a:round/>
-                      <a:headEnd type="none" w="med" len="med"/>
-                      <a:tailEnd type="none" w="med" len="med"/>
-                    </a:lnL>
-                    <a:lnR w="6350" cap="flat" cmpd="sng" algn="ctr">
-                      <a:solidFill>
-                        <a:srgbClr val="CBD5E1"/>
-                      </a:solidFill>
-                      <a:prstDash val="solid"/>
-                      <a:round/>
-                      <a:headEnd type="none" w="med" len="med"/>
-                      <a:tailEnd type="none" w="med" len="med"/>
-                    </a:lnR>
-                    <a:lnT w="6350" cap="flat" cmpd="sng" algn="ctr">
-                      <a:solidFill>
-                        <a:srgbClr val="CBD5E1"/>
-                      </a:solidFill>
-                      <a:prstDash val="solid"/>
-                      <a:round/>
-                      <a:headEnd type="none" w="med" len="med"/>
-                      <a:tailEnd type="none" w="med" len="med"/>
-                    </a:lnT>
-                    <a:lnB w="6350" cap="flat" cmpd="sng" algn="ctr">
-                      <a:solidFill>
-                        <a:srgbClr val="CBD5E1"/>
-                      </a:solidFill>
-                      <a:prstDash val="solid"/>
-                      <a:round/>
-                      <a:headEnd type="none" w="med" len="med"/>
-                      <a:tailEnd type="none" w="med" len="med"/>
-                    </a:lnB>
-                    <a:solidFill>
-                      <a:srgbClr val="FFFFFF"/>
-                    </a:solidFill>
-                  </a:tcPr>
-                </a:tc>
-                <a:tc>
-                  <a:txBody>
-                    <a:bodyPr/>
-                    <a:lstStyle/>
-                    <a:p>
-                      <a:pPr algn="ctr" indent="0" marL="0">
-                        <a:buNone/>
-                      </a:pPr>
-                      <a:r>
-                        <a:rPr lang="en-US" sz="900" dirty="0">
-                          <a:solidFill>
-                            <a:srgbClr val="000000"/>
-                          </a:solidFill>
-                          <a:latin typeface="Arial" pitchFamily="34" charset="0"/>
-                          <a:ea typeface="Arial" pitchFamily="34" charset="-122"/>
-                          <a:cs typeface="Arial" pitchFamily="34" charset="-120"/>
-                        </a:rPr>
-                        <a:t>7.56</a:t>
-                      </a:r>
-                      <a:endParaRPr lang="en-US" sz="900" dirty="0">
-                        <a:latin typeface="Arial" charset="0"/>
-                        <a:ea typeface="Arial" charset="0"/>
-                        <a:cs typeface="Arial" charset="0"/>
-                      </a:endParaRPr>
-                    </a:p>
-                  </a:txBody>
-                  <a:tcPr marL="91440" marR="91440" marT="45720" marB="45720">
-                    <a:lnL w="6350" cap="flat" cmpd="sng" algn="ctr">
-                      <a:solidFill>
-                        <a:srgbClr val="CBD5E1"/>
-                      </a:solidFill>
-                      <a:prstDash val="solid"/>
-                      <a:round/>
-                      <a:headEnd type="none" w="med" len="med"/>
-                      <a:tailEnd type="none" w="med" len="med"/>
-                    </a:lnL>
-                    <a:lnR w="6350" cap="flat" cmpd="sng" algn="ctr">
-                      <a:solidFill>
-                        <a:srgbClr val="CBD5E1"/>
-                      </a:solidFill>
-                      <a:prstDash val="solid"/>
-                      <a:round/>
-                      <a:headEnd type="none" w="med" len="med"/>
-                      <a:tailEnd type="none" w="med" len="med"/>
-                    </a:lnR>
-                    <a:lnT w="6350" cap="flat" cmpd="sng" algn="ctr">
-                      <a:solidFill>
-                        <a:srgbClr val="CBD5E1"/>
-                      </a:solidFill>
-                      <a:prstDash val="solid"/>
-                      <a:round/>
-                      <a:headEnd type="none" w="med" len="med"/>
-                      <a:tailEnd type="none" w="med" len="med"/>
-                    </a:lnT>
-                    <a:lnB w="6350" cap="flat" cmpd="sng" algn="ctr">
-                      <a:solidFill>
-                        <a:srgbClr val="CBD5E1"/>
-                      </a:solidFill>
-                      <a:prstDash val="solid"/>
-                      <a:round/>
-                      <a:headEnd type="none" w="med" len="med"/>
-                      <a:tailEnd type="none" w="med" len="med"/>
-                    </a:lnB>
-                    <a:solidFill>
-                      <a:srgbClr val="FFFFFF"/>
                     </a:solidFill>
                   </a:tcPr>
                 </a:tc>
@@ -8419,144 +7754,6 @@
                       <a:tailEnd type="none" w="med" len="med"/>
                     </a:lnB>
                     <a:solidFill>
-                      <a:srgbClr val="FFFFFF"/>
-                    </a:solidFill>
-                  </a:tcPr>
-                </a:tc>
-                <a:tc>
-                  <a:txBody>
-                    <a:bodyPr/>
-                    <a:lstStyle/>
-                    <a:p>
-                      <a:pPr algn="ctr" indent="0" marL="0">
-                        <a:buNone/>
-                      </a:pPr>
-                      <a:r>
-                        <a:rPr lang="en-US" sz="900" dirty="0">
-                          <a:solidFill>
-                            <a:srgbClr val="000000"/>
-                          </a:solidFill>
-                          <a:latin typeface="Arial" pitchFamily="34" charset="0"/>
-                          <a:ea typeface="Arial" pitchFamily="34" charset="-122"/>
-                          <a:cs typeface="Arial" pitchFamily="34" charset="-120"/>
-                        </a:rPr>
-                        <a:t>7.56</a:t>
-                      </a:r>
-                      <a:endParaRPr lang="en-US" sz="900" dirty="0">
-                        <a:latin typeface="Arial" charset="0"/>
-                        <a:ea typeface="Arial" charset="0"/>
-                        <a:cs typeface="Arial" charset="0"/>
-                      </a:endParaRPr>
-                    </a:p>
-                  </a:txBody>
-                  <a:tcPr marL="91440" marR="91440" marT="45720" marB="45720">
-                    <a:lnL w="6350" cap="flat" cmpd="sng" algn="ctr">
-                      <a:solidFill>
-                        <a:srgbClr val="CBD5E1"/>
-                      </a:solidFill>
-                      <a:prstDash val="solid"/>
-                      <a:round/>
-                      <a:headEnd type="none" w="med" len="med"/>
-                      <a:tailEnd type="none" w="med" len="med"/>
-                    </a:lnL>
-                    <a:lnR w="6350" cap="flat" cmpd="sng" algn="ctr">
-                      <a:solidFill>
-                        <a:srgbClr val="CBD5E1"/>
-                      </a:solidFill>
-                      <a:prstDash val="solid"/>
-                      <a:round/>
-                      <a:headEnd type="none" w="med" len="med"/>
-                      <a:tailEnd type="none" w="med" len="med"/>
-                    </a:lnR>
-                    <a:lnT w="6350" cap="flat" cmpd="sng" algn="ctr">
-                      <a:solidFill>
-                        <a:srgbClr val="CBD5E1"/>
-                      </a:solidFill>
-                      <a:prstDash val="solid"/>
-                      <a:round/>
-                      <a:headEnd type="none" w="med" len="med"/>
-                      <a:tailEnd type="none" w="med" len="med"/>
-                    </a:lnT>
-                    <a:lnB w="6350" cap="flat" cmpd="sng" algn="ctr">
-                      <a:solidFill>
-                        <a:srgbClr val="CBD5E1"/>
-                      </a:solidFill>
-                      <a:prstDash val="solid"/>
-                      <a:round/>
-                      <a:headEnd type="none" w="med" len="med"/>
-                      <a:tailEnd type="none" w="med" len="med"/>
-                    </a:lnB>
-                    <a:solidFill>
-                      <a:srgbClr val="FFFFFF"/>
-                    </a:solidFill>
-                  </a:tcPr>
-                </a:tc>
-              </a:tr>
-              <a:tr h="201168">
-                <a:tc>
-                  <a:txBody>
-                    <a:bodyPr/>
-                    <a:lstStyle/>
-                    <a:p>
-                      <a:pPr algn="ctr" indent="0" marL="0">
-                        <a:buNone/>
-                      </a:pPr>
-                      <a:r>
-                        <a:rPr lang="en-US" sz="900" dirty="0">
-                          <a:solidFill>
-                            <a:srgbClr val="000000"/>
-                          </a:solidFill>
-                          <a:latin typeface="Arial" pitchFamily="34" charset="0"/>
-                          <a:ea typeface="Arial" pitchFamily="34" charset="-122"/>
-                          <a:cs typeface="Arial" pitchFamily="34" charset="-120"/>
-                        </a:rPr>
-                        <a:t>楽天トラベル</a:t>
-                      </a:r>
-                      <a:endParaRPr lang="en-US" sz="900" dirty="0">
-                        <a:latin typeface="Arial" charset="0"/>
-                        <a:ea typeface="Arial" charset="0"/>
-                        <a:cs typeface="Arial" charset="0"/>
-                      </a:endParaRPr>
-                    </a:p>
-                  </a:txBody>
-                  <a:tcPr marL="91440" marR="91440" marT="45720" marB="45720">
-                    <a:lnL w="6350" cap="flat" cmpd="sng" algn="ctr">
-                      <a:solidFill>
-                        <a:srgbClr val="CBD5E1"/>
-                      </a:solidFill>
-                      <a:prstDash val="solid"/>
-                      <a:round/>
-                      <a:headEnd type="none" w="med" len="med"/>
-                      <a:tailEnd type="none" w="med" len="med"/>
-                    </a:lnL>
-                    <a:lnR w="6350" cap="flat" cmpd="sng" algn="ctr">
-                      <a:solidFill>
-                        <a:srgbClr val="CBD5E1"/>
-                      </a:solidFill>
-                      <a:prstDash val="solid"/>
-                      <a:round/>
-                      <a:headEnd type="none" w="med" len="med"/>
-                      <a:tailEnd type="none" w="med" len="med"/>
-                    </a:lnR>
-                    <a:lnT w="6350" cap="flat" cmpd="sng" algn="ctr">
-                      <a:solidFill>
-                        <a:srgbClr val="CBD5E1"/>
-                      </a:solidFill>
-                      <a:prstDash val="solid"/>
-                      <a:round/>
-                      <a:headEnd type="none" w="med" len="med"/>
-                      <a:tailEnd type="none" w="med" len="med"/>
-                    </a:lnT>
-                    <a:lnB w="6350" cap="flat" cmpd="sng" algn="ctr">
-                      <a:solidFill>
-                        <a:srgbClr val="CBD5E1"/>
-                      </a:solidFill>
-                      <a:prstDash val="solid"/>
-                      <a:round/>
-                      <a:headEnd type="none" w="med" len="med"/>
-                      <a:tailEnd type="none" w="med" len="med"/>
-                    </a:lnB>
-                    <a:solidFill>
                       <a:srgbClr val="E8EFF8"/>
                     </a:solidFill>
                   </a:tcPr>
@@ -8578,211 +7775,7 @@
                           <a:ea typeface="Arial" pitchFamily="34" charset="-122"/>
                           <a:cs typeface="Arial" pitchFamily="34" charset="-120"/>
                         </a:rPr>
-                        <a:t>22</a:t>
-                      </a:r>
-                      <a:endParaRPr lang="en-US" sz="900" dirty="0">
-                        <a:latin typeface="Arial" charset="0"/>
-                        <a:ea typeface="Arial" charset="0"/>
-                        <a:cs typeface="Arial" charset="0"/>
-                      </a:endParaRPr>
-                    </a:p>
-                  </a:txBody>
-                  <a:tcPr marL="91440" marR="91440" marT="45720" marB="45720">
-                    <a:lnL w="6350" cap="flat" cmpd="sng" algn="ctr">
-                      <a:solidFill>
-                        <a:srgbClr val="CBD5E1"/>
-                      </a:solidFill>
-                      <a:prstDash val="solid"/>
-                      <a:round/>
-                      <a:headEnd type="none" w="med" len="med"/>
-                      <a:tailEnd type="none" w="med" len="med"/>
-                    </a:lnL>
-                    <a:lnR w="6350" cap="flat" cmpd="sng" algn="ctr">
-                      <a:solidFill>
-                        <a:srgbClr val="CBD5E1"/>
-                      </a:solidFill>
-                      <a:prstDash val="solid"/>
-                      <a:round/>
-                      <a:headEnd type="none" w="med" len="med"/>
-                      <a:tailEnd type="none" w="med" len="med"/>
-                    </a:lnR>
-                    <a:lnT w="6350" cap="flat" cmpd="sng" algn="ctr">
-                      <a:solidFill>
-                        <a:srgbClr val="CBD5E1"/>
-                      </a:solidFill>
-                      <a:prstDash val="solid"/>
-                      <a:round/>
-                      <a:headEnd type="none" w="med" len="med"/>
-                      <a:tailEnd type="none" w="med" len="med"/>
-                    </a:lnT>
-                    <a:lnB w="6350" cap="flat" cmpd="sng" algn="ctr">
-                      <a:solidFill>
-                        <a:srgbClr val="CBD5E1"/>
-                      </a:solidFill>
-                      <a:prstDash val="solid"/>
-                      <a:round/>
-                      <a:headEnd type="none" w="med" len="med"/>
-                      <a:tailEnd type="none" w="med" len="med"/>
-                    </a:lnB>
-                    <a:solidFill>
-                      <a:srgbClr val="E8EFF8"/>
-                    </a:solidFill>
-                  </a:tcPr>
-                </a:tc>
-                <a:tc>
-                  <a:txBody>
-                    <a:bodyPr/>
-                    <a:lstStyle/>
-                    <a:p>
-                      <a:pPr algn="ctr" indent="0" marL="0">
-                        <a:buNone/>
-                      </a:pPr>
-                      <a:r>
-                        <a:rPr lang="en-US" sz="900" dirty="0">
-                          <a:solidFill>
-                            <a:srgbClr val="000000"/>
-                          </a:solidFill>
-                          <a:latin typeface="Arial" pitchFamily="34" charset="0"/>
-                          <a:ea typeface="Arial" pitchFamily="34" charset="-122"/>
-                          <a:cs typeface="Arial" pitchFamily="34" charset="-120"/>
-                        </a:rPr>
-                        <a:t>3.55</a:t>
-                      </a:r>
-                      <a:endParaRPr lang="en-US" sz="900" dirty="0">
-                        <a:latin typeface="Arial" charset="0"/>
-                        <a:ea typeface="Arial" charset="0"/>
-                        <a:cs typeface="Arial" charset="0"/>
-                      </a:endParaRPr>
-                    </a:p>
-                  </a:txBody>
-                  <a:tcPr marL="91440" marR="91440" marT="45720" marB="45720">
-                    <a:lnL w="6350" cap="flat" cmpd="sng" algn="ctr">
-                      <a:solidFill>
-                        <a:srgbClr val="CBD5E1"/>
-                      </a:solidFill>
-                      <a:prstDash val="solid"/>
-                      <a:round/>
-                      <a:headEnd type="none" w="med" len="med"/>
-                      <a:tailEnd type="none" w="med" len="med"/>
-                    </a:lnL>
-                    <a:lnR w="6350" cap="flat" cmpd="sng" algn="ctr">
-                      <a:solidFill>
-                        <a:srgbClr val="CBD5E1"/>
-                      </a:solidFill>
-                      <a:prstDash val="solid"/>
-                      <a:round/>
-                      <a:headEnd type="none" w="med" len="med"/>
-                      <a:tailEnd type="none" w="med" len="med"/>
-                    </a:lnR>
-                    <a:lnT w="6350" cap="flat" cmpd="sng" algn="ctr">
-                      <a:solidFill>
-                        <a:srgbClr val="CBD5E1"/>
-                      </a:solidFill>
-                      <a:prstDash val="solid"/>
-                      <a:round/>
-                      <a:headEnd type="none" w="med" len="med"/>
-                      <a:tailEnd type="none" w="med" len="med"/>
-                    </a:lnT>
-                    <a:lnB w="6350" cap="flat" cmpd="sng" algn="ctr">
-                      <a:solidFill>
-                        <a:srgbClr val="CBD5E1"/>
-                      </a:solidFill>
-                      <a:prstDash val="solid"/>
-                      <a:round/>
-                      <a:headEnd type="none" w="med" len="med"/>
-                      <a:tailEnd type="none" w="med" len="med"/>
-                    </a:lnB>
-                    <a:solidFill>
-                      <a:srgbClr val="E8EFF8"/>
-                    </a:solidFill>
-                  </a:tcPr>
-                </a:tc>
-                <a:tc>
-                  <a:txBody>
-                    <a:bodyPr/>
-                    <a:lstStyle/>
-                    <a:p>
-                      <a:pPr algn="ctr" indent="0" marL="0">
-                        <a:buNone/>
-                      </a:pPr>
-                      <a:r>
-                        <a:rPr lang="en-US" sz="900" dirty="0">
-                          <a:solidFill>
-                            <a:srgbClr val="000000"/>
-                          </a:solidFill>
-                          <a:latin typeface="Arial" pitchFamily="34" charset="0"/>
-                          <a:ea typeface="Arial" pitchFamily="34" charset="-122"/>
-                          <a:cs typeface="Arial" pitchFamily="34" charset="-120"/>
-                        </a:rPr>
-                        <a:t>/5 (×2)</a:t>
-                      </a:r>
-                      <a:endParaRPr lang="en-US" sz="900" dirty="0">
-                        <a:latin typeface="Arial" charset="0"/>
-                        <a:ea typeface="Arial" charset="0"/>
-                        <a:cs typeface="Arial" charset="0"/>
-                      </a:endParaRPr>
-                    </a:p>
-                  </a:txBody>
-                  <a:tcPr marL="91440" marR="91440" marT="45720" marB="45720">
-                    <a:lnL w="6350" cap="flat" cmpd="sng" algn="ctr">
-                      <a:solidFill>
-                        <a:srgbClr val="CBD5E1"/>
-                      </a:solidFill>
-                      <a:prstDash val="solid"/>
-                      <a:round/>
-                      <a:headEnd type="none" w="med" len="med"/>
-                      <a:tailEnd type="none" w="med" len="med"/>
-                    </a:lnL>
-                    <a:lnR w="6350" cap="flat" cmpd="sng" algn="ctr">
-                      <a:solidFill>
-                        <a:srgbClr val="CBD5E1"/>
-                      </a:solidFill>
-                      <a:prstDash val="solid"/>
-                      <a:round/>
-                      <a:headEnd type="none" w="med" len="med"/>
-                      <a:tailEnd type="none" w="med" len="med"/>
-                    </a:lnR>
-                    <a:lnT w="6350" cap="flat" cmpd="sng" algn="ctr">
-                      <a:solidFill>
-                        <a:srgbClr val="CBD5E1"/>
-                      </a:solidFill>
-                      <a:prstDash val="solid"/>
-                      <a:round/>
-                      <a:headEnd type="none" w="med" len="med"/>
-                      <a:tailEnd type="none" w="med" len="med"/>
-                    </a:lnT>
-                    <a:lnB w="6350" cap="flat" cmpd="sng" algn="ctr">
-                      <a:solidFill>
-                        <a:srgbClr val="CBD5E1"/>
-                      </a:solidFill>
-                      <a:prstDash val="solid"/>
-                      <a:round/>
-                      <a:headEnd type="none" w="med" len="med"/>
-                      <a:tailEnd type="none" w="med" len="med"/>
-                    </a:lnB>
-                    <a:solidFill>
-                      <a:srgbClr val="E8EFF8"/>
-                    </a:solidFill>
-                  </a:tcPr>
-                </a:tc>
-                <a:tc>
-                  <a:txBody>
-                    <a:bodyPr/>
-                    <a:lstStyle/>
-                    <a:p>
-                      <a:pPr algn="ctr" indent="0" marL="0">
-                        <a:buNone/>
-                      </a:pPr>
-                      <a:r>
-                        <a:rPr lang="en-US" sz="900" dirty="0">
-                          <a:solidFill>
-                            <a:srgbClr val="000000"/>
-                          </a:solidFill>
-                          <a:latin typeface="Arial" pitchFamily="34" charset="0"/>
-                          <a:ea typeface="Arial" pitchFamily="34" charset="-122"/>
-                          <a:cs typeface="Arial" pitchFamily="34" charset="-120"/>
-                        </a:rPr>
-                        <a:t>7.09</a:t>
+                        <a:t>8.35</a:t>
                       </a:r>
                       <a:endParaRPr lang="en-US" sz="900" dirty="0">
                         <a:latin typeface="Arial" charset="0"/>
@@ -8920,7 +7913,7 @@
                           <a:ea typeface="Arial" pitchFamily="34" charset="-122"/>
                           <a:cs typeface="Arial" pitchFamily="34" charset="-120"/>
                         </a:rPr>
-                        <a:t>4</a:t>
+                        <a:t>9</a:t>
                       </a:r>
                       <a:endParaRPr lang="en-US" sz="900" dirty="0">
                         <a:latin typeface="Arial" charset="0"/>
@@ -8988,7 +7981,7 @@
                           <a:ea typeface="Arial" pitchFamily="34" charset="-122"/>
                           <a:cs typeface="Arial" pitchFamily="34" charset="-120"/>
                         </a:rPr>
-                        <a:t>7</a:t>
+                        <a:t>8</a:t>
                       </a:r>
                       <a:endParaRPr lang="en-US" sz="900" dirty="0">
                         <a:latin typeface="Arial" charset="0"/>
@@ -9124,7 +8117,691 @@
                           <a:ea typeface="Arial" pitchFamily="34" charset="-122"/>
                           <a:cs typeface="Arial" pitchFamily="34" charset="-120"/>
                         </a:rPr>
-                        <a:t>7</a:t>
+                        <a:t>8</a:t>
+                      </a:r>
+                      <a:endParaRPr lang="en-US" sz="900" dirty="0">
+                        <a:latin typeface="Arial" charset="0"/>
+                        <a:ea typeface="Arial" charset="0"/>
+                        <a:cs typeface="Arial" charset="0"/>
+                      </a:endParaRPr>
+                    </a:p>
+                  </a:txBody>
+                  <a:tcPr marL="91440" marR="91440" marT="45720" marB="45720">
+                    <a:lnL w="6350" cap="flat" cmpd="sng" algn="ctr">
+                      <a:solidFill>
+                        <a:srgbClr val="CBD5E1"/>
+                      </a:solidFill>
+                      <a:prstDash val="solid"/>
+                      <a:round/>
+                      <a:headEnd type="none" w="med" len="med"/>
+                      <a:tailEnd type="none" w="med" len="med"/>
+                    </a:lnL>
+                    <a:lnR w="6350" cap="flat" cmpd="sng" algn="ctr">
+                      <a:solidFill>
+                        <a:srgbClr val="CBD5E1"/>
+                      </a:solidFill>
+                      <a:prstDash val="solid"/>
+                      <a:round/>
+                      <a:headEnd type="none" w="med" len="med"/>
+                      <a:tailEnd type="none" w="med" len="med"/>
+                    </a:lnR>
+                    <a:lnT w="6350" cap="flat" cmpd="sng" algn="ctr">
+                      <a:solidFill>
+                        <a:srgbClr val="CBD5E1"/>
+                      </a:solidFill>
+                      <a:prstDash val="solid"/>
+                      <a:round/>
+                      <a:headEnd type="none" w="med" len="med"/>
+                      <a:tailEnd type="none" w="med" len="med"/>
+                    </a:lnT>
+                    <a:lnB w="6350" cap="flat" cmpd="sng" algn="ctr">
+                      <a:solidFill>
+                        <a:srgbClr val="CBD5E1"/>
+                      </a:solidFill>
+                      <a:prstDash val="solid"/>
+                      <a:round/>
+                      <a:headEnd type="none" w="med" len="med"/>
+                      <a:tailEnd type="none" w="med" len="med"/>
+                    </a:lnB>
+                    <a:solidFill>
+                      <a:srgbClr val="FFFFFF"/>
+                    </a:solidFill>
+                  </a:tcPr>
+                </a:tc>
+              </a:tr>
+              <a:tr h="201168">
+                <a:tc>
+                  <a:txBody>
+                    <a:bodyPr/>
+                    <a:lstStyle/>
+                    <a:p>
+                      <a:pPr algn="ctr" indent="0" marL="0">
+                        <a:buNone/>
+                      </a:pPr>
+                      <a:r>
+                        <a:rPr lang="en-US" sz="900" dirty="0">
+                          <a:solidFill>
+                            <a:srgbClr val="000000"/>
+                          </a:solidFill>
+                          <a:latin typeface="Arial" pitchFamily="34" charset="0"/>
+                          <a:ea typeface="Arial" pitchFamily="34" charset="-122"/>
+                          <a:cs typeface="Arial" pitchFamily="34" charset="-120"/>
+                        </a:rPr>
+                        <a:t>Google</a:t>
+                      </a:r>
+                      <a:endParaRPr lang="en-US" sz="900" dirty="0">
+                        <a:latin typeface="Arial" charset="0"/>
+                        <a:ea typeface="Arial" charset="0"/>
+                        <a:cs typeface="Arial" charset="0"/>
+                      </a:endParaRPr>
+                    </a:p>
+                  </a:txBody>
+                  <a:tcPr marL="91440" marR="91440" marT="45720" marB="45720">
+                    <a:lnL w="6350" cap="flat" cmpd="sng" algn="ctr">
+                      <a:solidFill>
+                        <a:srgbClr val="CBD5E1"/>
+                      </a:solidFill>
+                      <a:prstDash val="solid"/>
+                      <a:round/>
+                      <a:headEnd type="none" w="med" len="med"/>
+                      <a:tailEnd type="none" w="med" len="med"/>
+                    </a:lnL>
+                    <a:lnR w="6350" cap="flat" cmpd="sng" algn="ctr">
+                      <a:solidFill>
+                        <a:srgbClr val="CBD5E1"/>
+                      </a:solidFill>
+                      <a:prstDash val="solid"/>
+                      <a:round/>
+                      <a:headEnd type="none" w="med" len="med"/>
+                      <a:tailEnd type="none" w="med" len="med"/>
+                    </a:lnR>
+                    <a:lnT w="6350" cap="flat" cmpd="sng" algn="ctr">
+                      <a:solidFill>
+                        <a:srgbClr val="CBD5E1"/>
+                      </a:solidFill>
+                      <a:prstDash val="solid"/>
+                      <a:round/>
+                      <a:headEnd type="none" w="med" len="med"/>
+                      <a:tailEnd type="none" w="med" len="med"/>
+                    </a:lnT>
+                    <a:lnB w="6350" cap="flat" cmpd="sng" algn="ctr">
+                      <a:solidFill>
+                        <a:srgbClr val="CBD5E1"/>
+                      </a:solidFill>
+                      <a:prstDash val="solid"/>
+                      <a:round/>
+                      <a:headEnd type="none" w="med" len="med"/>
+                      <a:tailEnd type="none" w="med" len="med"/>
+                    </a:lnB>
+                    <a:solidFill>
+                      <a:srgbClr val="E8EFF8"/>
+                    </a:solidFill>
+                  </a:tcPr>
+                </a:tc>
+                <a:tc>
+                  <a:txBody>
+                    <a:bodyPr/>
+                    <a:lstStyle/>
+                    <a:p>
+                      <a:pPr algn="ctr" indent="0" marL="0">
+                        <a:buNone/>
+                      </a:pPr>
+                      <a:r>
+                        <a:rPr lang="en-US" sz="900" dirty="0">
+                          <a:solidFill>
+                            <a:srgbClr val="000000"/>
+                          </a:solidFill>
+                          <a:latin typeface="Arial" pitchFamily="34" charset="0"/>
+                          <a:ea typeface="Arial" pitchFamily="34" charset="-122"/>
+                          <a:cs typeface="Arial" pitchFamily="34" charset="-120"/>
+                        </a:rPr>
+                        <a:t>23</a:t>
+                      </a:r>
+                      <a:endParaRPr lang="en-US" sz="900" dirty="0">
+                        <a:latin typeface="Arial" charset="0"/>
+                        <a:ea typeface="Arial" charset="0"/>
+                        <a:cs typeface="Arial" charset="0"/>
+                      </a:endParaRPr>
+                    </a:p>
+                  </a:txBody>
+                  <a:tcPr marL="91440" marR="91440" marT="45720" marB="45720">
+                    <a:lnL w="6350" cap="flat" cmpd="sng" algn="ctr">
+                      <a:solidFill>
+                        <a:srgbClr val="CBD5E1"/>
+                      </a:solidFill>
+                      <a:prstDash val="solid"/>
+                      <a:round/>
+                      <a:headEnd type="none" w="med" len="med"/>
+                      <a:tailEnd type="none" w="med" len="med"/>
+                    </a:lnL>
+                    <a:lnR w="6350" cap="flat" cmpd="sng" algn="ctr">
+                      <a:solidFill>
+                        <a:srgbClr val="CBD5E1"/>
+                      </a:solidFill>
+                      <a:prstDash val="solid"/>
+                      <a:round/>
+                      <a:headEnd type="none" w="med" len="med"/>
+                      <a:tailEnd type="none" w="med" len="med"/>
+                    </a:lnR>
+                    <a:lnT w="6350" cap="flat" cmpd="sng" algn="ctr">
+                      <a:solidFill>
+                        <a:srgbClr val="CBD5E1"/>
+                      </a:solidFill>
+                      <a:prstDash val="solid"/>
+                      <a:round/>
+                      <a:headEnd type="none" w="med" len="med"/>
+                      <a:tailEnd type="none" w="med" len="med"/>
+                    </a:lnT>
+                    <a:lnB w="6350" cap="flat" cmpd="sng" algn="ctr">
+                      <a:solidFill>
+                        <a:srgbClr val="CBD5E1"/>
+                      </a:solidFill>
+                      <a:prstDash val="solid"/>
+                      <a:round/>
+                      <a:headEnd type="none" w="med" len="med"/>
+                      <a:tailEnd type="none" w="med" len="med"/>
+                    </a:lnB>
+                    <a:solidFill>
+                      <a:srgbClr val="E8EFF8"/>
+                    </a:solidFill>
+                  </a:tcPr>
+                </a:tc>
+                <a:tc>
+                  <a:txBody>
+                    <a:bodyPr/>
+                    <a:lstStyle/>
+                    <a:p>
+                      <a:pPr algn="ctr" indent="0" marL="0">
+                        <a:buNone/>
+                      </a:pPr>
+                      <a:r>
+                        <a:rPr lang="en-US" sz="900" dirty="0">
+                          <a:solidFill>
+                            <a:srgbClr val="000000"/>
+                          </a:solidFill>
+                          <a:latin typeface="Arial" pitchFamily="34" charset="0"/>
+                          <a:ea typeface="Arial" pitchFamily="34" charset="-122"/>
+                          <a:cs typeface="Arial" pitchFamily="34" charset="-120"/>
+                        </a:rPr>
+                        <a:t>3.78</a:t>
+                      </a:r>
+                      <a:endParaRPr lang="en-US" sz="900" dirty="0">
+                        <a:latin typeface="Arial" charset="0"/>
+                        <a:ea typeface="Arial" charset="0"/>
+                        <a:cs typeface="Arial" charset="0"/>
+                      </a:endParaRPr>
+                    </a:p>
+                  </a:txBody>
+                  <a:tcPr marL="91440" marR="91440" marT="45720" marB="45720">
+                    <a:lnL w="6350" cap="flat" cmpd="sng" algn="ctr">
+                      <a:solidFill>
+                        <a:srgbClr val="CBD5E1"/>
+                      </a:solidFill>
+                      <a:prstDash val="solid"/>
+                      <a:round/>
+                      <a:headEnd type="none" w="med" len="med"/>
+                      <a:tailEnd type="none" w="med" len="med"/>
+                    </a:lnL>
+                    <a:lnR w="6350" cap="flat" cmpd="sng" algn="ctr">
+                      <a:solidFill>
+                        <a:srgbClr val="CBD5E1"/>
+                      </a:solidFill>
+                      <a:prstDash val="solid"/>
+                      <a:round/>
+                      <a:headEnd type="none" w="med" len="med"/>
+                      <a:tailEnd type="none" w="med" len="med"/>
+                    </a:lnR>
+                    <a:lnT w="6350" cap="flat" cmpd="sng" algn="ctr">
+                      <a:solidFill>
+                        <a:srgbClr val="CBD5E1"/>
+                      </a:solidFill>
+                      <a:prstDash val="solid"/>
+                      <a:round/>
+                      <a:headEnd type="none" w="med" len="med"/>
+                      <a:tailEnd type="none" w="med" len="med"/>
+                    </a:lnT>
+                    <a:lnB w="6350" cap="flat" cmpd="sng" algn="ctr">
+                      <a:solidFill>
+                        <a:srgbClr val="CBD5E1"/>
+                      </a:solidFill>
+                      <a:prstDash val="solid"/>
+                      <a:round/>
+                      <a:headEnd type="none" w="med" len="med"/>
+                      <a:tailEnd type="none" w="med" len="med"/>
+                    </a:lnB>
+                    <a:solidFill>
+                      <a:srgbClr val="E8EFF8"/>
+                    </a:solidFill>
+                  </a:tcPr>
+                </a:tc>
+                <a:tc>
+                  <a:txBody>
+                    <a:bodyPr/>
+                    <a:lstStyle/>
+                    <a:p>
+                      <a:pPr algn="ctr" indent="0" marL="0">
+                        <a:buNone/>
+                      </a:pPr>
+                      <a:r>
+                        <a:rPr lang="en-US" sz="900" dirty="0">
+                          <a:solidFill>
+                            <a:srgbClr val="000000"/>
+                          </a:solidFill>
+                          <a:latin typeface="Arial" pitchFamily="34" charset="0"/>
+                          <a:ea typeface="Arial" pitchFamily="34" charset="-122"/>
+                          <a:cs typeface="Arial" pitchFamily="34" charset="-120"/>
+                        </a:rPr>
+                        <a:t>/5 (×2)</a:t>
+                      </a:r>
+                      <a:endParaRPr lang="en-US" sz="900" dirty="0">
+                        <a:latin typeface="Arial" charset="0"/>
+                        <a:ea typeface="Arial" charset="0"/>
+                        <a:cs typeface="Arial" charset="0"/>
+                      </a:endParaRPr>
+                    </a:p>
+                  </a:txBody>
+                  <a:tcPr marL="91440" marR="91440" marT="45720" marB="45720">
+                    <a:lnL w="6350" cap="flat" cmpd="sng" algn="ctr">
+                      <a:solidFill>
+                        <a:srgbClr val="CBD5E1"/>
+                      </a:solidFill>
+                      <a:prstDash val="solid"/>
+                      <a:round/>
+                      <a:headEnd type="none" w="med" len="med"/>
+                      <a:tailEnd type="none" w="med" len="med"/>
+                    </a:lnL>
+                    <a:lnR w="6350" cap="flat" cmpd="sng" algn="ctr">
+                      <a:solidFill>
+                        <a:srgbClr val="CBD5E1"/>
+                      </a:solidFill>
+                      <a:prstDash val="solid"/>
+                      <a:round/>
+                      <a:headEnd type="none" w="med" len="med"/>
+                      <a:tailEnd type="none" w="med" len="med"/>
+                    </a:lnR>
+                    <a:lnT w="6350" cap="flat" cmpd="sng" algn="ctr">
+                      <a:solidFill>
+                        <a:srgbClr val="CBD5E1"/>
+                      </a:solidFill>
+                      <a:prstDash val="solid"/>
+                      <a:round/>
+                      <a:headEnd type="none" w="med" len="med"/>
+                      <a:tailEnd type="none" w="med" len="med"/>
+                    </a:lnT>
+                    <a:lnB w="6350" cap="flat" cmpd="sng" algn="ctr">
+                      <a:solidFill>
+                        <a:srgbClr val="CBD5E1"/>
+                      </a:solidFill>
+                      <a:prstDash val="solid"/>
+                      <a:round/>
+                      <a:headEnd type="none" w="med" len="med"/>
+                      <a:tailEnd type="none" w="med" len="med"/>
+                    </a:lnB>
+                    <a:solidFill>
+                      <a:srgbClr val="E8EFF8"/>
+                    </a:solidFill>
+                  </a:tcPr>
+                </a:tc>
+                <a:tc>
+                  <a:txBody>
+                    <a:bodyPr/>
+                    <a:lstStyle/>
+                    <a:p>
+                      <a:pPr algn="ctr" indent="0" marL="0">
+                        <a:buNone/>
+                      </a:pPr>
+                      <a:r>
+                        <a:rPr lang="en-US" sz="900" dirty="0">
+                          <a:solidFill>
+                            <a:srgbClr val="000000"/>
+                          </a:solidFill>
+                          <a:latin typeface="Arial" pitchFamily="34" charset="0"/>
+                          <a:ea typeface="Arial" pitchFamily="34" charset="-122"/>
+                          <a:cs typeface="Arial" pitchFamily="34" charset="-120"/>
+                        </a:rPr>
+                        <a:t>7.57</a:t>
+                      </a:r>
+                      <a:endParaRPr lang="en-US" sz="900" dirty="0">
+                        <a:latin typeface="Arial" charset="0"/>
+                        <a:ea typeface="Arial" charset="0"/>
+                        <a:cs typeface="Arial" charset="0"/>
+                      </a:endParaRPr>
+                    </a:p>
+                  </a:txBody>
+                  <a:tcPr marL="91440" marR="91440" marT="45720" marB="45720">
+                    <a:lnL w="6350" cap="flat" cmpd="sng" algn="ctr">
+                      <a:solidFill>
+                        <a:srgbClr val="CBD5E1"/>
+                      </a:solidFill>
+                      <a:prstDash val="solid"/>
+                      <a:round/>
+                      <a:headEnd type="none" w="med" len="med"/>
+                      <a:tailEnd type="none" w="med" len="med"/>
+                    </a:lnL>
+                    <a:lnR w="6350" cap="flat" cmpd="sng" algn="ctr">
+                      <a:solidFill>
+                        <a:srgbClr val="CBD5E1"/>
+                      </a:solidFill>
+                      <a:prstDash val="solid"/>
+                      <a:round/>
+                      <a:headEnd type="none" w="med" len="med"/>
+                      <a:tailEnd type="none" w="med" len="med"/>
+                    </a:lnR>
+                    <a:lnT w="6350" cap="flat" cmpd="sng" algn="ctr">
+                      <a:solidFill>
+                        <a:srgbClr val="CBD5E1"/>
+                      </a:solidFill>
+                      <a:prstDash val="solid"/>
+                      <a:round/>
+                      <a:headEnd type="none" w="med" len="med"/>
+                      <a:tailEnd type="none" w="med" len="med"/>
+                    </a:lnT>
+                    <a:lnB w="6350" cap="flat" cmpd="sng" algn="ctr">
+                      <a:solidFill>
+                        <a:srgbClr val="CBD5E1"/>
+                      </a:solidFill>
+                      <a:prstDash val="solid"/>
+                      <a:round/>
+                      <a:headEnd type="none" w="med" len="med"/>
+                      <a:tailEnd type="none" w="med" len="med"/>
+                    </a:lnB>
+                    <a:solidFill>
+                      <a:srgbClr val="E8EFF8"/>
+                    </a:solidFill>
+                  </a:tcPr>
+                </a:tc>
+              </a:tr>
+              <a:tr h="201168">
+                <a:tc>
+                  <a:txBody>
+                    <a:bodyPr/>
+                    <a:lstStyle/>
+                    <a:p>
+                      <a:pPr algn="ctr" indent="0" marL="0">
+                        <a:buNone/>
+                      </a:pPr>
+                      <a:r>
+                        <a:rPr lang="en-US" sz="900" dirty="0">
+                          <a:solidFill>
+                            <a:srgbClr val="000000"/>
+                          </a:solidFill>
+                          <a:latin typeface="Arial" pitchFamily="34" charset="0"/>
+                          <a:ea typeface="Arial" pitchFamily="34" charset="-122"/>
+                          <a:cs typeface="Arial" pitchFamily="34" charset="-120"/>
+                        </a:rPr>
+                        <a:t>楽天トラベル</a:t>
+                      </a:r>
+                      <a:endParaRPr lang="en-US" sz="900" dirty="0">
+                        <a:latin typeface="Arial" charset="0"/>
+                        <a:ea typeface="Arial" charset="0"/>
+                        <a:cs typeface="Arial" charset="0"/>
+                      </a:endParaRPr>
+                    </a:p>
+                  </a:txBody>
+                  <a:tcPr marL="91440" marR="91440" marT="45720" marB="45720">
+                    <a:lnL w="6350" cap="flat" cmpd="sng" algn="ctr">
+                      <a:solidFill>
+                        <a:srgbClr val="CBD5E1"/>
+                      </a:solidFill>
+                      <a:prstDash val="solid"/>
+                      <a:round/>
+                      <a:headEnd type="none" w="med" len="med"/>
+                      <a:tailEnd type="none" w="med" len="med"/>
+                    </a:lnL>
+                    <a:lnR w="6350" cap="flat" cmpd="sng" algn="ctr">
+                      <a:solidFill>
+                        <a:srgbClr val="CBD5E1"/>
+                      </a:solidFill>
+                      <a:prstDash val="solid"/>
+                      <a:round/>
+                      <a:headEnd type="none" w="med" len="med"/>
+                      <a:tailEnd type="none" w="med" len="med"/>
+                    </a:lnR>
+                    <a:lnT w="6350" cap="flat" cmpd="sng" algn="ctr">
+                      <a:solidFill>
+                        <a:srgbClr val="CBD5E1"/>
+                      </a:solidFill>
+                      <a:prstDash val="solid"/>
+                      <a:round/>
+                      <a:headEnd type="none" w="med" len="med"/>
+                      <a:tailEnd type="none" w="med" len="med"/>
+                    </a:lnT>
+                    <a:lnB w="6350" cap="flat" cmpd="sng" algn="ctr">
+                      <a:solidFill>
+                        <a:srgbClr val="CBD5E1"/>
+                      </a:solidFill>
+                      <a:prstDash val="solid"/>
+                      <a:round/>
+                      <a:headEnd type="none" w="med" len="med"/>
+                      <a:tailEnd type="none" w="med" len="med"/>
+                    </a:lnB>
+                    <a:solidFill>
+                      <a:srgbClr val="FFFFFF"/>
+                    </a:solidFill>
+                  </a:tcPr>
+                </a:tc>
+                <a:tc>
+                  <a:txBody>
+                    <a:bodyPr/>
+                    <a:lstStyle/>
+                    <a:p>
+                      <a:pPr algn="ctr" indent="0" marL="0">
+                        <a:buNone/>
+                      </a:pPr>
+                      <a:r>
+                        <a:rPr lang="en-US" sz="900" dirty="0">
+                          <a:solidFill>
+                            <a:srgbClr val="000000"/>
+                          </a:solidFill>
+                          <a:latin typeface="Arial" pitchFamily="34" charset="0"/>
+                          <a:ea typeface="Arial" pitchFamily="34" charset="-122"/>
+                          <a:cs typeface="Arial" pitchFamily="34" charset="-120"/>
+                        </a:rPr>
+                        <a:t>46</a:t>
+                      </a:r>
+                      <a:endParaRPr lang="en-US" sz="900" dirty="0">
+                        <a:latin typeface="Arial" charset="0"/>
+                        <a:ea typeface="Arial" charset="0"/>
+                        <a:cs typeface="Arial" charset="0"/>
+                      </a:endParaRPr>
+                    </a:p>
+                  </a:txBody>
+                  <a:tcPr marL="91440" marR="91440" marT="45720" marB="45720">
+                    <a:lnL w="6350" cap="flat" cmpd="sng" algn="ctr">
+                      <a:solidFill>
+                        <a:srgbClr val="CBD5E1"/>
+                      </a:solidFill>
+                      <a:prstDash val="solid"/>
+                      <a:round/>
+                      <a:headEnd type="none" w="med" len="med"/>
+                      <a:tailEnd type="none" w="med" len="med"/>
+                    </a:lnL>
+                    <a:lnR w="6350" cap="flat" cmpd="sng" algn="ctr">
+                      <a:solidFill>
+                        <a:srgbClr val="CBD5E1"/>
+                      </a:solidFill>
+                      <a:prstDash val="solid"/>
+                      <a:round/>
+                      <a:headEnd type="none" w="med" len="med"/>
+                      <a:tailEnd type="none" w="med" len="med"/>
+                    </a:lnR>
+                    <a:lnT w="6350" cap="flat" cmpd="sng" algn="ctr">
+                      <a:solidFill>
+                        <a:srgbClr val="CBD5E1"/>
+                      </a:solidFill>
+                      <a:prstDash val="solid"/>
+                      <a:round/>
+                      <a:headEnd type="none" w="med" len="med"/>
+                      <a:tailEnd type="none" w="med" len="med"/>
+                    </a:lnT>
+                    <a:lnB w="6350" cap="flat" cmpd="sng" algn="ctr">
+                      <a:solidFill>
+                        <a:srgbClr val="CBD5E1"/>
+                      </a:solidFill>
+                      <a:prstDash val="solid"/>
+                      <a:round/>
+                      <a:headEnd type="none" w="med" len="med"/>
+                      <a:tailEnd type="none" w="med" len="med"/>
+                    </a:lnB>
+                    <a:solidFill>
+                      <a:srgbClr val="FFFFFF"/>
+                    </a:solidFill>
+                  </a:tcPr>
+                </a:tc>
+                <a:tc>
+                  <a:txBody>
+                    <a:bodyPr/>
+                    <a:lstStyle/>
+                    <a:p>
+                      <a:pPr algn="ctr" indent="0" marL="0">
+                        <a:buNone/>
+                      </a:pPr>
+                      <a:r>
+                        <a:rPr lang="en-US" sz="900" dirty="0">
+                          <a:solidFill>
+                            <a:srgbClr val="000000"/>
+                          </a:solidFill>
+                          <a:latin typeface="Arial" pitchFamily="34" charset="0"/>
+                          <a:ea typeface="Arial" pitchFamily="34" charset="-122"/>
+                          <a:cs typeface="Arial" pitchFamily="34" charset="-120"/>
+                        </a:rPr>
+                        <a:t>3.78</a:t>
+                      </a:r>
+                      <a:endParaRPr lang="en-US" sz="900" dirty="0">
+                        <a:latin typeface="Arial" charset="0"/>
+                        <a:ea typeface="Arial" charset="0"/>
+                        <a:cs typeface="Arial" charset="0"/>
+                      </a:endParaRPr>
+                    </a:p>
+                  </a:txBody>
+                  <a:tcPr marL="91440" marR="91440" marT="45720" marB="45720">
+                    <a:lnL w="6350" cap="flat" cmpd="sng" algn="ctr">
+                      <a:solidFill>
+                        <a:srgbClr val="CBD5E1"/>
+                      </a:solidFill>
+                      <a:prstDash val="solid"/>
+                      <a:round/>
+                      <a:headEnd type="none" w="med" len="med"/>
+                      <a:tailEnd type="none" w="med" len="med"/>
+                    </a:lnL>
+                    <a:lnR w="6350" cap="flat" cmpd="sng" algn="ctr">
+                      <a:solidFill>
+                        <a:srgbClr val="CBD5E1"/>
+                      </a:solidFill>
+                      <a:prstDash val="solid"/>
+                      <a:round/>
+                      <a:headEnd type="none" w="med" len="med"/>
+                      <a:tailEnd type="none" w="med" len="med"/>
+                    </a:lnR>
+                    <a:lnT w="6350" cap="flat" cmpd="sng" algn="ctr">
+                      <a:solidFill>
+                        <a:srgbClr val="CBD5E1"/>
+                      </a:solidFill>
+                      <a:prstDash val="solid"/>
+                      <a:round/>
+                      <a:headEnd type="none" w="med" len="med"/>
+                      <a:tailEnd type="none" w="med" len="med"/>
+                    </a:lnT>
+                    <a:lnB w="6350" cap="flat" cmpd="sng" algn="ctr">
+                      <a:solidFill>
+                        <a:srgbClr val="CBD5E1"/>
+                      </a:solidFill>
+                      <a:prstDash val="solid"/>
+                      <a:round/>
+                      <a:headEnd type="none" w="med" len="med"/>
+                      <a:tailEnd type="none" w="med" len="med"/>
+                    </a:lnB>
+                    <a:solidFill>
+                      <a:srgbClr val="FFFFFF"/>
+                    </a:solidFill>
+                  </a:tcPr>
+                </a:tc>
+                <a:tc>
+                  <a:txBody>
+                    <a:bodyPr/>
+                    <a:lstStyle/>
+                    <a:p>
+                      <a:pPr algn="ctr" indent="0" marL="0">
+                        <a:buNone/>
+                      </a:pPr>
+                      <a:r>
+                        <a:rPr lang="en-US" sz="900" dirty="0">
+                          <a:solidFill>
+                            <a:srgbClr val="000000"/>
+                          </a:solidFill>
+                          <a:latin typeface="Arial" pitchFamily="34" charset="0"/>
+                          <a:ea typeface="Arial" pitchFamily="34" charset="-122"/>
+                          <a:cs typeface="Arial" pitchFamily="34" charset="-120"/>
+                        </a:rPr>
+                        <a:t>/5 (×2)</a:t>
+                      </a:r>
+                      <a:endParaRPr lang="en-US" sz="900" dirty="0">
+                        <a:latin typeface="Arial" charset="0"/>
+                        <a:ea typeface="Arial" charset="0"/>
+                        <a:cs typeface="Arial" charset="0"/>
+                      </a:endParaRPr>
+                    </a:p>
+                  </a:txBody>
+                  <a:tcPr marL="91440" marR="91440" marT="45720" marB="45720">
+                    <a:lnL w="6350" cap="flat" cmpd="sng" algn="ctr">
+                      <a:solidFill>
+                        <a:srgbClr val="CBD5E1"/>
+                      </a:solidFill>
+                      <a:prstDash val="solid"/>
+                      <a:round/>
+                      <a:headEnd type="none" w="med" len="med"/>
+                      <a:tailEnd type="none" w="med" len="med"/>
+                    </a:lnL>
+                    <a:lnR w="6350" cap="flat" cmpd="sng" algn="ctr">
+                      <a:solidFill>
+                        <a:srgbClr val="CBD5E1"/>
+                      </a:solidFill>
+                      <a:prstDash val="solid"/>
+                      <a:round/>
+                      <a:headEnd type="none" w="med" len="med"/>
+                      <a:tailEnd type="none" w="med" len="med"/>
+                    </a:lnR>
+                    <a:lnT w="6350" cap="flat" cmpd="sng" algn="ctr">
+                      <a:solidFill>
+                        <a:srgbClr val="CBD5E1"/>
+                      </a:solidFill>
+                      <a:prstDash val="solid"/>
+                      <a:round/>
+                      <a:headEnd type="none" w="med" len="med"/>
+                      <a:tailEnd type="none" w="med" len="med"/>
+                    </a:lnT>
+                    <a:lnB w="6350" cap="flat" cmpd="sng" algn="ctr">
+                      <a:solidFill>
+                        <a:srgbClr val="CBD5E1"/>
+                      </a:solidFill>
+                      <a:prstDash val="solid"/>
+                      <a:round/>
+                      <a:headEnd type="none" w="med" len="med"/>
+                      <a:tailEnd type="none" w="med" len="med"/>
+                    </a:lnB>
+                    <a:solidFill>
+                      <a:srgbClr val="FFFFFF"/>
+                    </a:solidFill>
+                  </a:tcPr>
+                </a:tc>
+                <a:tc>
+                  <a:txBody>
+                    <a:bodyPr/>
+                    <a:lstStyle/>
+                    <a:p>
+                      <a:pPr algn="ctr" indent="0" marL="0">
+                        <a:buNone/>
+                      </a:pPr>
+                      <a:r>
+                        <a:rPr lang="en-US" sz="900" dirty="0">
+                          <a:solidFill>
+                            <a:srgbClr val="000000"/>
+                          </a:solidFill>
+                          <a:latin typeface="Arial" pitchFamily="34" charset="0"/>
+                          <a:ea typeface="Arial" pitchFamily="34" charset="-122"/>
+                          <a:cs typeface="Arial" pitchFamily="34" charset="-120"/>
+                        </a:rPr>
+                        <a:t>7.57</a:t>
                       </a:r>
                       <a:endParaRPr lang="en-US" sz="900" dirty="0">
                         <a:latin typeface="Arial" charset="0"/>
@@ -9262,7 +8939,7 @@
                           <a:ea typeface="Arial" pitchFamily="34" charset="-122"/>
                           <a:cs typeface="Arial" pitchFamily="34" charset="-120"/>
                         </a:rPr>
-                        <a:t>10</a:t>
+                        <a:t>28</a:t>
                       </a:r>
                       <a:endParaRPr lang="en-US" sz="900" dirty="0">
                         <a:latin typeface="Arial" charset="0"/>
@@ -9330,7 +9007,7 @@
                           <a:ea typeface="Arial" pitchFamily="34" charset="-122"/>
                           <a:cs typeface="Arial" pitchFamily="34" charset="-120"/>
                         </a:rPr>
-                        <a:t>6.7</a:t>
+                        <a:t>7.25</a:t>
                       </a:r>
                       <a:endParaRPr lang="en-US" sz="900" dirty="0">
                         <a:latin typeface="Arial" charset="0"/>
@@ -9466,7 +9143,7 @@
                           <a:ea typeface="Arial" pitchFamily="34" charset="-122"/>
                           <a:cs typeface="Arial" pitchFamily="34" charset="-120"/>
                         </a:rPr>
-                        <a:t>6.7</a:t>
+                        <a:t>7.25</a:t>
                       </a:r>
                       <a:endParaRPr lang="en-US" sz="900" dirty="0">
                         <a:latin typeface="Arial" charset="0"/>
@@ -9604,7 +9281,7 @@
                           <a:ea typeface="Arial" pitchFamily="34" charset="-122"/>
                           <a:cs typeface="Arial" pitchFamily="34" charset="-120"/>
                         </a:rPr>
-                        <a:t>10</a:t>
+                        <a:t>20</a:t>
                       </a:r>
                       <a:endParaRPr lang="en-US" sz="900" dirty="0">
                         <a:latin typeface="Arial" charset="0"/>
@@ -9672,7 +9349,7 @@
                           <a:ea typeface="Arial" pitchFamily="34" charset="-122"/>
                           <a:cs typeface="Arial" pitchFamily="34" charset="-120"/>
                         </a:rPr>
-                        <a:t>3.3</a:t>
+                        <a:t>3.6</a:t>
                       </a:r>
                       <a:endParaRPr lang="en-US" sz="900" dirty="0">
                         <a:latin typeface="Arial" charset="0"/>
@@ -9808,7 +9485,7 @@
                           <a:ea typeface="Arial" pitchFamily="34" charset="-122"/>
                           <a:cs typeface="Arial" pitchFamily="34" charset="-120"/>
                         </a:rPr>
-                        <a:t>6.6</a:t>
+                        <a:t>7.2</a:t>
                       </a:r>
                       <a:endParaRPr lang="en-US" sz="900" dirty="0">
                         <a:latin typeface="Arial" charset="0"/>
@@ -10216,7 +9893,7 @@
                 <a:ea typeface="Arial" pitchFamily="34" charset="-122"/>
                 <a:cs typeface="Arial" pitchFamily="34" charset="-120"/>
               </a:rPr>
-              <a:t>41件（55.4%）</a:t>
+              <a:t>97件（67.8%）</a:t>
             </a:r>
             <a:endParaRPr lang="en-US" sz="1100" dirty="0"/>
           </a:p>
@@ -10314,7 +9991,7 @@
                 <a:ea typeface="Arial" pitchFamily="34" charset="-122"/>
                 <a:cs typeface="Arial" pitchFamily="34" charset="-120"/>
               </a:rPr>
-              <a:t>21件（28.4%）</a:t>
+              <a:t>29件（20.3%）</a:t>
             </a:r>
             <a:endParaRPr lang="en-US" sz="1100" dirty="0"/>
           </a:p>
@@ -10412,7 +10089,7 @@
                 <a:ea typeface="Arial" pitchFamily="34" charset="-122"/>
                 <a:cs typeface="Arial" pitchFamily="34" charset="-120"/>
               </a:rPr>
-              <a:t>12件（16.2%）</a:t>
+              <a:t>17件（11.9%）</a:t>
             </a:r>
             <a:endParaRPr lang="en-US" sz="1100" dirty="0"/>
           </a:p>
@@ -10969,6 +10646,229 @@
                 <a:ea typeface="Arial" pitchFamily="34" charset="-122"/>
                 <a:cs typeface="Arial" pitchFamily="34" charset="-120"/>
               </a:rPr>
+              <a:t>50件+</a:t>
+            </a:r>
+            <a:endParaRPr lang="en-US" sz="900" dirty="0"/>
+          </a:p>
+        </p:txBody>
+      </p:sp>
+      <p:sp>
+        <p:nvSpPr>
+          <p:cNvPr id="16" name="Text 14"/>
+          <p:cNvSpPr/>
+          <p:nvPr/>
+        </p:nvSpPr>
+        <p:spPr>
+          <a:xfrm>
+            <a:off x="3429000" y="1124712"/>
+            <a:ext cx="1645920" cy="274320"/>
+          </a:xfrm>
+          <a:prstGeom prst="rect">
+            <a:avLst/>
+          </a:prstGeom>
+          <a:noFill/>
+          <a:ln/>
+        </p:spPr>
+        <p:txBody>
+          <a:bodyPr wrap="square" lIns="0" tIns="0" rIns="0" bIns="0" rtlCol="0" anchor="ctr"/>
+          <a:lstStyle/>
+          <a:p>
+            <a:pPr indent="0" marL="0">
+              <a:buNone/>
+            </a:pPr>
+            <a:r>
+              <a:rPr lang="en-US" sz="1300" b="1" dirty="0">
+                <a:solidFill>
+                  <a:srgbClr val="1A2744"/>
+                </a:solidFill>
+                <a:latin typeface="Arial" pitchFamily="34" charset="0"/>
+                <a:ea typeface="Arial" pitchFamily="34" charset="-122"/>
+                <a:cs typeface="Arial" pitchFamily="34" charset="-120"/>
+              </a:rPr>
+              <a:t>立地・アクセス</a:t>
+            </a:r>
+            <a:endParaRPr lang="en-US" sz="1300" dirty="0"/>
+          </a:p>
+        </p:txBody>
+      </p:sp>
+      <p:sp>
+        <p:nvSpPr>
+          <p:cNvPr id="17" name="Text 15"/>
+          <p:cNvSpPr/>
+          <p:nvPr/>
+        </p:nvSpPr>
+        <p:spPr>
+          <a:xfrm>
+            <a:off x="3429000" y="1417320"/>
+            <a:ext cx="2377440" cy="365760"/>
+          </a:xfrm>
+          <a:prstGeom prst="rect">
+            <a:avLst/>
+          </a:prstGeom>
+          <a:noFill/>
+          <a:ln/>
+        </p:spPr>
+        <p:txBody>
+          <a:bodyPr wrap="square" lIns="0" tIns="0" rIns="0" bIns="0" rtlCol="0" anchor="ctr"/>
+          <a:lstStyle/>
+          <a:p>
+            <a:pPr indent="0" marL="0">
+              <a:buNone/>
+            </a:pPr>
+            <a:r>
+              <a:rPr lang="en-US" sz="900" dirty="0">
+                <a:solidFill>
+                  <a:srgbClr val="64748B"/>
+                </a:solidFill>
+                <a:latin typeface="Arial" pitchFamily="34" charset="0"/>
+                <a:ea typeface="Arial" pitchFamily="34" charset="-122"/>
+                <a:cs typeface="Arial" pitchFamily="34" charset="-120"/>
+              </a:rPr>
+              <a:t>横浜という立地から多少の英会話くらいは出来ると思ってましたが、年配の男性が全くできず海外の方が困ってたので助けてあ...</a:t>
+            </a:r>
+            <a:endParaRPr lang="en-US" sz="900" dirty="0"/>
+          </a:p>
+        </p:txBody>
+      </p:sp>
+      <p:sp>
+        <p:nvSpPr>
+          <p:cNvPr id="18" name="Text 16"/>
+          <p:cNvSpPr/>
+          <p:nvPr/>
+        </p:nvSpPr>
+        <p:spPr>
+          <a:xfrm>
+            <a:off x="3429000" y="1828800"/>
+            <a:ext cx="2377440" cy="640080"/>
+          </a:xfrm>
+          <a:prstGeom prst="rect">
+            <a:avLst/>
+          </a:prstGeom>
+          <a:noFill/>
+          <a:ln/>
+        </p:spPr>
+        <p:txBody>
+          <a:bodyPr wrap="square" lIns="0" tIns="0" rIns="0" bIns="0" rtlCol="0" anchor="ctr"/>
+          <a:lstStyle/>
+          <a:p>
+            <a:pPr indent="0" marL="0">
+              <a:buNone/>
+            </a:pPr>
+            <a:r>
+              <a:rPr lang="en-US" sz="900" i="1" dirty="0">
+                <a:solidFill>
+                  <a:srgbClr val="3B7DD8"/>
+                </a:solidFill>
+                <a:latin typeface="Arial" pitchFamily="34" charset="0"/>
+                <a:ea typeface="Arial" pitchFamily="34" charset="-122"/>
+                <a:cs typeface="Arial" pitchFamily="34" charset="-120"/>
+              </a:rPr>
+              <a:t>「立地のせいもあるのと壁が薄めなのか、外や廊下の音は気になる程度には聞こえました」</a:t>
+            </a:r>
+            <a:endParaRPr lang="en-US" sz="900" dirty="0"/>
+          </a:p>
+        </p:txBody>
+      </p:sp>
+      <p:sp>
+        <p:nvSpPr>
+          <p:cNvPr id="19" name="Shape 17"/>
+          <p:cNvSpPr/>
+          <p:nvPr/>
+        </p:nvSpPr>
+        <p:spPr>
+          <a:xfrm>
+            <a:off x="6126480" y="1051560"/>
+            <a:ext cx="2651760" cy="1600200"/>
+          </a:xfrm>
+          <a:prstGeom prst="rect">
+            <a:avLst/>
+          </a:prstGeom>
+          <a:solidFill>
+            <a:srgbClr val="FFFFFF"/>
+          </a:solidFill>
+          <a:ln/>
+          <a:effectLst>
+            <a:outerShdw sx="100000" sy="100000" kx="0" ky="0" algn="bl" rotWithShape="0" blurRad="50800" dist="25400" dir="8100000">
+              <a:srgbClr val="000000">
+                <a:alpha val="10000"/>
+              </a:srgbClr>
+            </a:outerShdw>
+          </a:effectLst>
+        </p:spPr>
+      </p:sp>
+      <p:sp>
+        <p:nvSpPr>
+          <p:cNvPr id="20" name="Shape 18"/>
+          <p:cNvSpPr/>
+          <p:nvPr/>
+        </p:nvSpPr>
+        <p:spPr>
+          <a:xfrm>
+            <a:off x="6126480" y="1051560"/>
+            <a:ext cx="54864" cy="1600200"/>
+          </a:xfrm>
+          <a:prstGeom prst="rect">
+            <a:avLst/>
+          </a:prstGeom>
+          <a:solidFill>
+            <a:srgbClr val="16A34A"/>
+          </a:solidFill>
+          <a:ln/>
+        </p:spPr>
+      </p:sp>
+      <p:sp>
+        <p:nvSpPr>
+          <p:cNvPr id="21" name="Shape 19"/>
+          <p:cNvSpPr/>
+          <p:nvPr/>
+        </p:nvSpPr>
+        <p:spPr>
+          <a:xfrm>
+            <a:off x="7955280" y="1124712"/>
+            <a:ext cx="658368" cy="228600"/>
+          </a:xfrm>
+          <a:prstGeom prst="rect">
+            <a:avLst/>
+          </a:prstGeom>
+          <a:solidFill>
+            <a:srgbClr val="DCFCE7"/>
+          </a:solidFill>
+          <a:ln/>
+        </p:spPr>
+      </p:sp>
+      <p:sp>
+        <p:nvSpPr>
+          <p:cNvPr id="22" name="Text 20"/>
+          <p:cNvSpPr/>
+          <p:nvPr/>
+        </p:nvSpPr>
+        <p:spPr>
+          <a:xfrm>
+            <a:off x="7955280" y="1124712"/>
+            <a:ext cx="658368" cy="228600"/>
+          </a:xfrm>
+          <a:prstGeom prst="rect">
+            <a:avLst/>
+          </a:prstGeom>
+          <a:noFill/>
+          <a:ln/>
+        </p:spPr>
+        <p:txBody>
+          <a:bodyPr wrap="square" lIns="0" tIns="0" rIns="0" bIns="0" rtlCol="0" anchor="ctr"/>
+          <a:lstStyle/>
+          <a:p>
+            <a:pPr algn="ctr" indent="0" marL="0">
+              <a:buNone/>
+            </a:pPr>
+            <a:r>
+              <a:rPr lang="en-US" sz="900" b="1" dirty="0">
+                <a:solidFill>
+                  <a:srgbClr val="16A34A"/>
+                </a:solidFill>
+                <a:latin typeface="Arial" pitchFamily="34" charset="0"/>
+                <a:ea typeface="Arial" pitchFamily="34" charset="-122"/>
+                <a:cs typeface="Arial" pitchFamily="34" charset="-120"/>
+              </a:rPr>
               <a:t>20件+</a:t>
             </a:r>
             <a:endParaRPr lang="en-US" sz="900" dirty="0"/>
@@ -10977,13 +10877,236 @@
       </p:sp>
       <p:sp>
         <p:nvSpPr>
-          <p:cNvPr id="16" name="Text 14"/>
-          <p:cNvSpPr/>
-          <p:nvPr/>
-        </p:nvSpPr>
-        <p:spPr>
-          <a:xfrm>
-            <a:off x="3429000" y="1124712"/>
+          <p:cNvPr id="23" name="Text 21"/>
+          <p:cNvSpPr/>
+          <p:nvPr/>
+        </p:nvSpPr>
+        <p:spPr>
+          <a:xfrm>
+            <a:off x="6263640" y="1124712"/>
+            <a:ext cx="1645920" cy="274320"/>
+          </a:xfrm>
+          <a:prstGeom prst="rect">
+            <a:avLst/>
+          </a:prstGeom>
+          <a:noFill/>
+          <a:ln/>
+        </p:spPr>
+        <p:txBody>
+          <a:bodyPr wrap="square" lIns="0" tIns="0" rIns="0" bIns="0" rtlCol="0" anchor="ctr"/>
+          <a:lstStyle/>
+          <a:p>
+            <a:pPr indent="0" marL="0">
+              <a:buNone/>
+            </a:pPr>
+            <a:r>
+              <a:rPr lang="en-US" sz="1300" b="1" dirty="0">
+                <a:solidFill>
+                  <a:srgbClr val="1A2744"/>
+                </a:solidFill>
+                <a:latin typeface="Arial" pitchFamily="34" charset="0"/>
+                <a:ea typeface="Arial" pitchFamily="34" charset="-122"/>
+                <a:cs typeface="Arial" pitchFamily="34" charset="-120"/>
+              </a:rPr>
+              <a:t>スタッフの対応</a:t>
+            </a:r>
+            <a:endParaRPr lang="en-US" sz="1300" dirty="0"/>
+          </a:p>
+        </p:txBody>
+      </p:sp>
+      <p:sp>
+        <p:nvSpPr>
+          <p:cNvPr id="24" name="Text 22"/>
+          <p:cNvSpPr/>
+          <p:nvPr/>
+        </p:nvSpPr>
+        <p:spPr>
+          <a:xfrm>
+            <a:off x="6263640" y="1417320"/>
+            <a:ext cx="2377440" cy="365760"/>
+          </a:xfrm>
+          <a:prstGeom prst="rect">
+            <a:avLst/>
+          </a:prstGeom>
+          <a:noFill/>
+          <a:ln/>
+        </p:spPr>
+        <p:txBody>
+          <a:bodyPr wrap="square" lIns="0" tIns="0" rIns="0" bIns="0" rtlCol="0" anchor="ctr"/>
+          <a:lstStyle/>
+          <a:p>
+            <a:pPr indent="0" marL="0">
+              <a:buNone/>
+            </a:pPr>
+            <a:r>
+              <a:rPr lang="en-US" sz="900" dirty="0">
+                <a:solidFill>
+                  <a:srgbClr val="64748B"/>
+                </a:solidFill>
+                <a:latin typeface="Arial" pitchFamily="34" charset="0"/>
+                <a:ea typeface="Arial" pitchFamily="34" charset="-122"/>
+                <a:cs typeface="Arial" pitchFamily="34" charset="-120"/>
+              </a:rPr>
+              <a:t>フロントの方が不慣れなのか、他の人には伝えていたウエルカムドリンクの話や朝食、チェックアウトの時間も全くない</a:t>
+            </a:r>
+            <a:endParaRPr lang="en-US" sz="900" dirty="0"/>
+          </a:p>
+        </p:txBody>
+      </p:sp>
+      <p:sp>
+        <p:nvSpPr>
+          <p:cNvPr id="25" name="Text 23"/>
+          <p:cNvSpPr/>
+          <p:nvPr/>
+        </p:nvSpPr>
+        <p:spPr>
+          <a:xfrm>
+            <a:off x="6263640" y="1828800"/>
+            <a:ext cx="2377440" cy="640080"/>
+          </a:xfrm>
+          <a:prstGeom prst="rect">
+            <a:avLst/>
+          </a:prstGeom>
+          <a:noFill/>
+          <a:ln/>
+        </p:spPr>
+        <p:txBody>
+          <a:bodyPr wrap="square" lIns="0" tIns="0" rIns="0" bIns="0" rtlCol="0" anchor="ctr"/>
+          <a:lstStyle/>
+          <a:p>
+            <a:pPr indent="0" marL="0">
+              <a:buNone/>
+            </a:pPr>
+            <a:r>
+              <a:rPr lang="en-US" sz="900" i="1" dirty="0">
+                <a:solidFill>
+                  <a:srgbClr val="3B7DD8"/>
+                </a:solidFill>
+                <a:latin typeface="Arial" pitchFamily="34" charset="0"/>
+                <a:ea typeface="Arial" pitchFamily="34" charset="-122"/>
+                <a:cs typeface="Arial" pitchFamily="34" charset="-120"/>
+              </a:rPr>
+              <a:t>「フロントの対応もスタッフの方の対応も良かったです」</a:t>
+            </a:r>
+            <a:endParaRPr lang="en-US" sz="900" dirty="0"/>
+          </a:p>
+        </p:txBody>
+      </p:sp>
+      <p:sp>
+        <p:nvSpPr>
+          <p:cNvPr id="26" name="Shape 24"/>
+          <p:cNvSpPr/>
+          <p:nvPr/>
+        </p:nvSpPr>
+        <p:spPr>
+          <a:xfrm>
+            <a:off x="457200" y="2880360"/>
+            <a:ext cx="2651760" cy="1600200"/>
+          </a:xfrm>
+          <a:prstGeom prst="rect">
+            <a:avLst/>
+          </a:prstGeom>
+          <a:solidFill>
+            <a:srgbClr val="FFFFFF"/>
+          </a:solidFill>
+          <a:ln/>
+          <a:effectLst>
+            <a:outerShdw sx="100000" sy="100000" kx="0" ky="0" algn="bl" rotWithShape="0" blurRad="50800" dist="25400" dir="8100000">
+              <a:srgbClr val="000000">
+                <a:alpha val="10000"/>
+              </a:srgbClr>
+            </a:outerShdw>
+          </a:effectLst>
+        </p:spPr>
+      </p:sp>
+      <p:sp>
+        <p:nvSpPr>
+          <p:cNvPr id="27" name="Shape 25"/>
+          <p:cNvSpPr/>
+          <p:nvPr/>
+        </p:nvSpPr>
+        <p:spPr>
+          <a:xfrm>
+            <a:off x="457200" y="2880360"/>
+            <a:ext cx="54864" cy="1600200"/>
+          </a:xfrm>
+          <a:prstGeom prst="rect">
+            <a:avLst/>
+          </a:prstGeom>
+          <a:solidFill>
+            <a:srgbClr val="16A34A"/>
+          </a:solidFill>
+          <a:ln/>
+        </p:spPr>
+      </p:sp>
+      <p:sp>
+        <p:nvSpPr>
+          <p:cNvPr id="28" name="Shape 26"/>
+          <p:cNvSpPr/>
+          <p:nvPr/>
+        </p:nvSpPr>
+        <p:spPr>
+          <a:xfrm>
+            <a:off x="2286000" y="2953512"/>
+            <a:ext cx="658368" cy="228600"/>
+          </a:xfrm>
+          <a:prstGeom prst="rect">
+            <a:avLst/>
+          </a:prstGeom>
+          <a:solidFill>
+            <a:srgbClr val="DCFCE7"/>
+          </a:solidFill>
+          <a:ln/>
+        </p:spPr>
+      </p:sp>
+      <p:sp>
+        <p:nvSpPr>
+          <p:cNvPr id="29" name="Text 27"/>
+          <p:cNvSpPr/>
+          <p:nvPr/>
+        </p:nvSpPr>
+        <p:spPr>
+          <a:xfrm>
+            <a:off x="2286000" y="2953512"/>
+            <a:ext cx="658368" cy="228600"/>
+          </a:xfrm>
+          <a:prstGeom prst="rect">
+            <a:avLst/>
+          </a:prstGeom>
+          <a:noFill/>
+          <a:ln/>
+        </p:spPr>
+        <p:txBody>
+          <a:bodyPr wrap="square" lIns="0" tIns="0" rIns="0" bIns="0" rtlCol="0" anchor="ctr"/>
+          <a:lstStyle/>
+          <a:p>
+            <a:pPr algn="ctr" indent="0" marL="0">
+              <a:buNone/>
+            </a:pPr>
+            <a:r>
+              <a:rPr lang="en-US" sz="900" b="1" dirty="0">
+                <a:solidFill>
+                  <a:srgbClr val="16A34A"/>
+                </a:solidFill>
+                <a:latin typeface="Arial" pitchFamily="34" charset="0"/>
+                <a:ea typeface="Arial" pitchFamily="34" charset="-122"/>
+                <a:cs typeface="Arial" pitchFamily="34" charset="-120"/>
+              </a:rPr>
+              <a:t>20件+</a:t>
+            </a:r>
+            <a:endParaRPr lang="en-US" sz="900" dirty="0"/>
+          </a:p>
+        </p:txBody>
+      </p:sp>
+      <p:sp>
+        <p:nvSpPr>
+          <p:cNvPr id="30" name="Text 28"/>
+          <p:cNvSpPr/>
+          <p:nvPr/>
+        </p:nvSpPr>
+        <p:spPr>
+          <a:xfrm>
+            <a:off x="594360" y="2953512"/>
             <a:ext cx="1645920" cy="274320"/>
           </a:xfrm>
           <a:prstGeom prst="rect">
@@ -11016,13 +11139,13 @@
       </p:sp>
       <p:sp>
         <p:nvSpPr>
-          <p:cNvPr id="17" name="Text 15"/>
-          <p:cNvSpPr/>
-          <p:nvPr/>
-        </p:nvSpPr>
-        <p:spPr>
-          <a:xfrm>
-            <a:off x="3429000" y="1417320"/>
+          <p:cNvPr id="31" name="Text 29"/>
+          <p:cNvSpPr/>
+          <p:nvPr/>
+        </p:nvSpPr>
+        <p:spPr>
+          <a:xfrm>
+            <a:off x="594360" y="3246120"/>
             <a:ext cx="2377440" cy="365760"/>
           </a:xfrm>
           <a:prstGeom prst="rect">
@@ -11055,13 +11178,13 @@
       </p:sp>
       <p:sp>
         <p:nvSpPr>
-          <p:cNvPr id="18" name="Text 16"/>
-          <p:cNvSpPr/>
-          <p:nvPr/>
-        </p:nvSpPr>
-        <p:spPr>
-          <a:xfrm>
-            <a:off x="3429000" y="1828800"/>
+          <p:cNvPr id="32" name="Text 30"/>
+          <p:cNvSpPr/>
+          <p:nvPr/>
+        </p:nvSpPr>
+        <p:spPr>
+          <a:xfrm>
+            <a:off x="594360" y="3657600"/>
             <a:ext cx="2377440" cy="640080"/>
           </a:xfrm>
           <a:prstGeom prst="rect">
@@ -11094,13 +11217,13 @@
       </p:sp>
       <p:sp>
         <p:nvSpPr>
-          <p:cNvPr id="19" name="Shape 17"/>
-          <p:cNvSpPr/>
-          <p:nvPr/>
-        </p:nvSpPr>
-        <p:spPr>
-          <a:xfrm>
-            <a:off x="6126480" y="1051560"/>
+          <p:cNvPr id="33" name="Shape 31"/>
+          <p:cNvSpPr/>
+          <p:nvPr/>
+        </p:nvSpPr>
+        <p:spPr>
+          <a:xfrm>
+            <a:off x="3291840" y="2880360"/>
             <a:ext cx="2651760" cy="1600200"/>
           </a:xfrm>
           <a:prstGeom prst="rect">
@@ -11121,13 +11244,13 @@
       </p:sp>
       <p:sp>
         <p:nvSpPr>
-          <p:cNvPr id="20" name="Shape 18"/>
-          <p:cNvSpPr/>
-          <p:nvPr/>
-        </p:nvSpPr>
-        <p:spPr>
-          <a:xfrm>
-            <a:off x="6126480" y="1051560"/>
+          <p:cNvPr id="34" name="Shape 32"/>
+          <p:cNvSpPr/>
+          <p:nvPr/>
+        </p:nvSpPr>
+        <p:spPr>
+          <a:xfrm>
+            <a:off x="3291840" y="2880360"/>
             <a:ext cx="54864" cy="1600200"/>
           </a:xfrm>
           <a:prstGeom prst="rect">
@@ -11141,13 +11264,13 @@
       </p:sp>
       <p:sp>
         <p:nvSpPr>
-          <p:cNvPr id="21" name="Shape 19"/>
-          <p:cNvSpPr/>
-          <p:nvPr/>
-        </p:nvSpPr>
-        <p:spPr>
-          <a:xfrm>
-            <a:off x="7955280" y="1124712"/>
+          <p:cNvPr id="35" name="Shape 33"/>
+          <p:cNvSpPr/>
+          <p:nvPr/>
+        </p:nvSpPr>
+        <p:spPr>
+          <a:xfrm>
+            <a:off x="5120640" y="2953512"/>
             <a:ext cx="658368" cy="228600"/>
           </a:xfrm>
           <a:prstGeom prst="rect">
@@ -11161,13 +11284,13 @@
       </p:sp>
       <p:sp>
         <p:nvSpPr>
-          <p:cNvPr id="22" name="Text 20"/>
-          <p:cNvSpPr/>
-          <p:nvPr/>
-        </p:nvSpPr>
-        <p:spPr>
-          <a:xfrm>
-            <a:off x="7955280" y="1124712"/>
+          <p:cNvPr id="36" name="Text 34"/>
+          <p:cNvSpPr/>
+          <p:nvPr/>
+        </p:nvSpPr>
+        <p:spPr>
+          <a:xfrm>
+            <a:off x="5120640" y="2953512"/>
             <a:ext cx="658368" cy="228600"/>
           </a:xfrm>
           <a:prstGeom prst="rect">
@@ -11193,452 +11316,6 @@
                 <a:cs typeface="Arial" pitchFamily="34" charset="-120"/>
               </a:rPr>
               <a:t>20件+</a:t>
-            </a:r>
-            <a:endParaRPr lang="en-US" sz="900" dirty="0"/>
-          </a:p>
-        </p:txBody>
-      </p:sp>
-      <p:sp>
-        <p:nvSpPr>
-          <p:cNvPr id="23" name="Text 21"/>
-          <p:cNvSpPr/>
-          <p:nvPr/>
-        </p:nvSpPr>
-        <p:spPr>
-          <a:xfrm>
-            <a:off x="6263640" y="1124712"/>
-            <a:ext cx="1645920" cy="274320"/>
-          </a:xfrm>
-          <a:prstGeom prst="rect">
-            <a:avLst/>
-          </a:prstGeom>
-          <a:noFill/>
-          <a:ln/>
-        </p:spPr>
-        <p:txBody>
-          <a:bodyPr wrap="square" lIns="0" tIns="0" rIns="0" bIns="0" rtlCol="0" anchor="ctr"/>
-          <a:lstStyle/>
-          <a:p>
-            <a:pPr indent="0" marL="0">
-              <a:buNone/>
-            </a:pPr>
-            <a:r>
-              <a:rPr lang="en-US" sz="1300" b="1" dirty="0">
-                <a:solidFill>
-                  <a:srgbClr val="1A2744"/>
-                </a:solidFill>
-                <a:latin typeface="Arial" pitchFamily="34" charset="0"/>
-                <a:ea typeface="Arial" pitchFamily="34" charset="-122"/>
-                <a:cs typeface="Arial" pitchFamily="34" charset="-120"/>
-              </a:rPr>
-              <a:t>スタッフの対応</a:t>
-            </a:r>
-            <a:endParaRPr lang="en-US" sz="1300" dirty="0"/>
-          </a:p>
-        </p:txBody>
-      </p:sp>
-      <p:sp>
-        <p:nvSpPr>
-          <p:cNvPr id="24" name="Text 22"/>
-          <p:cNvSpPr/>
-          <p:nvPr/>
-        </p:nvSpPr>
-        <p:spPr>
-          <a:xfrm>
-            <a:off x="6263640" y="1417320"/>
-            <a:ext cx="2377440" cy="365760"/>
-          </a:xfrm>
-          <a:prstGeom prst="rect">
-            <a:avLst/>
-          </a:prstGeom>
-          <a:noFill/>
-          <a:ln/>
-        </p:spPr>
-        <p:txBody>
-          <a:bodyPr wrap="square" lIns="0" tIns="0" rIns="0" bIns="0" rtlCol="0" anchor="ctr"/>
-          <a:lstStyle/>
-          <a:p>
-            <a:pPr indent="0" marL="0">
-              <a:buNone/>
-            </a:pPr>
-            <a:r>
-              <a:rPr lang="en-US" sz="900" dirty="0">
-                <a:solidFill>
-                  <a:srgbClr val="64748B"/>
-                </a:solidFill>
-                <a:latin typeface="Arial" pitchFamily="34" charset="0"/>
-                <a:ea typeface="Arial" pitchFamily="34" charset="-122"/>
-                <a:cs typeface="Arial" pitchFamily="34" charset="-120"/>
-              </a:rPr>
-              <a:t>フロントの方が不慣れなのか、他の人には伝えていたウエルカムドリンクの話や朝食、チェックアウトの時間も全くない</a:t>
-            </a:r>
-            <a:endParaRPr lang="en-US" sz="900" dirty="0"/>
-          </a:p>
-        </p:txBody>
-      </p:sp>
-      <p:sp>
-        <p:nvSpPr>
-          <p:cNvPr id="25" name="Text 23"/>
-          <p:cNvSpPr/>
-          <p:nvPr/>
-        </p:nvSpPr>
-        <p:spPr>
-          <a:xfrm>
-            <a:off x="6263640" y="1828800"/>
-            <a:ext cx="2377440" cy="640080"/>
-          </a:xfrm>
-          <a:prstGeom prst="rect">
-            <a:avLst/>
-          </a:prstGeom>
-          <a:noFill/>
-          <a:ln/>
-        </p:spPr>
-        <p:txBody>
-          <a:bodyPr wrap="square" lIns="0" tIns="0" rIns="0" bIns="0" rtlCol="0" anchor="ctr"/>
-          <a:lstStyle/>
-          <a:p>
-            <a:pPr indent="0" marL="0">
-              <a:buNone/>
-            </a:pPr>
-            <a:r>
-              <a:rPr lang="en-US" sz="900" i="1" dirty="0">
-                <a:solidFill>
-                  <a:srgbClr val="3B7DD8"/>
-                </a:solidFill>
-                <a:latin typeface="Arial" pitchFamily="34" charset="0"/>
-                <a:ea typeface="Arial" pitchFamily="34" charset="-122"/>
-                <a:cs typeface="Arial" pitchFamily="34" charset="-120"/>
-              </a:rPr>
-              <a:t>「フロントの対応もスタッフの方の対応も良かったです」</a:t>
-            </a:r>
-            <a:endParaRPr lang="en-US" sz="900" dirty="0"/>
-          </a:p>
-        </p:txBody>
-      </p:sp>
-      <p:sp>
-        <p:nvSpPr>
-          <p:cNvPr id="26" name="Shape 24"/>
-          <p:cNvSpPr/>
-          <p:nvPr/>
-        </p:nvSpPr>
-        <p:spPr>
-          <a:xfrm>
-            <a:off x="457200" y="2880360"/>
-            <a:ext cx="2651760" cy="1600200"/>
-          </a:xfrm>
-          <a:prstGeom prst="rect">
-            <a:avLst/>
-          </a:prstGeom>
-          <a:solidFill>
-            <a:srgbClr val="FFFFFF"/>
-          </a:solidFill>
-          <a:ln/>
-          <a:effectLst>
-            <a:outerShdw sx="100000" sy="100000" kx="0" ky="0" algn="bl" rotWithShape="0" blurRad="50800" dist="25400" dir="8100000">
-              <a:srgbClr val="000000">
-                <a:alpha val="10000"/>
-              </a:srgbClr>
-            </a:outerShdw>
-          </a:effectLst>
-        </p:spPr>
-      </p:sp>
-      <p:sp>
-        <p:nvSpPr>
-          <p:cNvPr id="27" name="Shape 25"/>
-          <p:cNvSpPr/>
-          <p:nvPr/>
-        </p:nvSpPr>
-        <p:spPr>
-          <a:xfrm>
-            <a:off x="457200" y="2880360"/>
-            <a:ext cx="54864" cy="1600200"/>
-          </a:xfrm>
-          <a:prstGeom prst="rect">
-            <a:avLst/>
-          </a:prstGeom>
-          <a:solidFill>
-            <a:srgbClr val="16A34A"/>
-          </a:solidFill>
-          <a:ln/>
-        </p:spPr>
-      </p:sp>
-      <p:sp>
-        <p:nvSpPr>
-          <p:cNvPr id="28" name="Shape 26"/>
-          <p:cNvSpPr/>
-          <p:nvPr/>
-        </p:nvSpPr>
-        <p:spPr>
-          <a:xfrm>
-            <a:off x="2286000" y="2953512"/>
-            <a:ext cx="658368" cy="228600"/>
-          </a:xfrm>
-          <a:prstGeom prst="rect">
-            <a:avLst/>
-          </a:prstGeom>
-          <a:solidFill>
-            <a:srgbClr val="DCFCE7"/>
-          </a:solidFill>
-          <a:ln/>
-        </p:spPr>
-      </p:sp>
-      <p:sp>
-        <p:nvSpPr>
-          <p:cNvPr id="29" name="Text 27"/>
-          <p:cNvSpPr/>
-          <p:nvPr/>
-        </p:nvSpPr>
-        <p:spPr>
-          <a:xfrm>
-            <a:off x="2286000" y="2953512"/>
-            <a:ext cx="658368" cy="228600"/>
-          </a:xfrm>
-          <a:prstGeom prst="rect">
-            <a:avLst/>
-          </a:prstGeom>
-          <a:noFill/>
-          <a:ln/>
-        </p:spPr>
-        <p:txBody>
-          <a:bodyPr wrap="square" lIns="0" tIns="0" rIns="0" bIns="0" rtlCol="0" anchor="ctr"/>
-          <a:lstStyle/>
-          <a:p>
-            <a:pPr algn="ctr" indent="0" marL="0">
-              <a:buNone/>
-            </a:pPr>
-            <a:r>
-              <a:rPr lang="en-US" sz="900" b="1" dirty="0">
-                <a:solidFill>
-                  <a:srgbClr val="16A34A"/>
-                </a:solidFill>
-                <a:latin typeface="Arial" pitchFamily="34" charset="0"/>
-                <a:ea typeface="Arial" pitchFamily="34" charset="-122"/>
-                <a:cs typeface="Arial" pitchFamily="34" charset="-120"/>
-              </a:rPr>
-              <a:t>20件+</a:t>
-            </a:r>
-            <a:endParaRPr lang="en-US" sz="900" dirty="0"/>
-          </a:p>
-        </p:txBody>
-      </p:sp>
-      <p:sp>
-        <p:nvSpPr>
-          <p:cNvPr id="30" name="Text 28"/>
-          <p:cNvSpPr/>
-          <p:nvPr/>
-        </p:nvSpPr>
-        <p:spPr>
-          <a:xfrm>
-            <a:off x="594360" y="2953512"/>
-            <a:ext cx="1645920" cy="274320"/>
-          </a:xfrm>
-          <a:prstGeom prst="rect">
-            <a:avLst/>
-          </a:prstGeom>
-          <a:noFill/>
-          <a:ln/>
-        </p:spPr>
-        <p:txBody>
-          <a:bodyPr wrap="square" lIns="0" tIns="0" rIns="0" bIns="0" rtlCol="0" anchor="ctr"/>
-          <a:lstStyle/>
-          <a:p>
-            <a:pPr indent="0" marL="0">
-              <a:buNone/>
-            </a:pPr>
-            <a:r>
-              <a:rPr lang="en-US" sz="1300" b="1" dirty="0">
-                <a:solidFill>
-                  <a:srgbClr val="1A2744"/>
-                </a:solidFill>
-                <a:latin typeface="Arial" pitchFamily="34" charset="0"/>
-                <a:ea typeface="Arial" pitchFamily="34" charset="-122"/>
-                <a:cs typeface="Arial" pitchFamily="34" charset="-120"/>
-              </a:rPr>
-              <a:t>立地・アクセス</a:t>
-            </a:r>
-            <a:endParaRPr lang="en-US" sz="1300" dirty="0"/>
-          </a:p>
-        </p:txBody>
-      </p:sp>
-      <p:sp>
-        <p:nvSpPr>
-          <p:cNvPr id="31" name="Text 29"/>
-          <p:cNvSpPr/>
-          <p:nvPr/>
-        </p:nvSpPr>
-        <p:spPr>
-          <a:xfrm>
-            <a:off x="594360" y="3246120"/>
-            <a:ext cx="2377440" cy="365760"/>
-          </a:xfrm>
-          <a:prstGeom prst="rect">
-            <a:avLst/>
-          </a:prstGeom>
-          <a:noFill/>
-          <a:ln/>
-        </p:spPr>
-        <p:txBody>
-          <a:bodyPr wrap="square" lIns="0" tIns="0" rIns="0" bIns="0" rtlCol="0" anchor="ctr"/>
-          <a:lstStyle/>
-          <a:p>
-            <a:pPr indent="0" marL="0">
-              <a:buNone/>
-            </a:pPr>
-            <a:r>
-              <a:rPr lang="en-US" sz="900" dirty="0">
-                <a:solidFill>
-                  <a:srgbClr val="64748B"/>
-                </a:solidFill>
-                <a:latin typeface="Arial" pitchFamily="34" charset="0"/>
-                <a:ea typeface="Arial" pitchFamily="34" charset="-122"/>
-                <a:cs typeface="Arial" pitchFamily="34" charset="-120"/>
-              </a:rPr>
-              <a:t>横浜という立地から多少の英会話くらいは出来ると思ってましたが、年配の男性が全くできず海外の方が困ってたので助けてあ...</a:t>
-            </a:r>
-            <a:endParaRPr lang="en-US" sz="900" dirty="0"/>
-          </a:p>
-        </p:txBody>
-      </p:sp>
-      <p:sp>
-        <p:nvSpPr>
-          <p:cNvPr id="32" name="Text 30"/>
-          <p:cNvSpPr/>
-          <p:nvPr/>
-        </p:nvSpPr>
-        <p:spPr>
-          <a:xfrm>
-            <a:off x="594360" y="3657600"/>
-            <a:ext cx="2377440" cy="640080"/>
-          </a:xfrm>
-          <a:prstGeom prst="rect">
-            <a:avLst/>
-          </a:prstGeom>
-          <a:noFill/>
-          <a:ln/>
-        </p:spPr>
-        <p:txBody>
-          <a:bodyPr wrap="square" lIns="0" tIns="0" rIns="0" bIns="0" rtlCol="0" anchor="ctr"/>
-          <a:lstStyle/>
-          <a:p>
-            <a:pPr indent="0" marL="0">
-              <a:buNone/>
-            </a:pPr>
-            <a:r>
-              <a:rPr lang="en-US" sz="900" i="1" dirty="0">
-                <a:solidFill>
-                  <a:srgbClr val="3B7DD8"/>
-                </a:solidFill>
-                <a:latin typeface="Arial" pitchFamily="34" charset="0"/>
-                <a:ea typeface="Arial" pitchFamily="34" charset="-122"/>
-                <a:cs typeface="Arial" pitchFamily="34" charset="-120"/>
-              </a:rPr>
-              <a:t>「立地のせいもあるのと壁が薄めなのか、外や廊下の音は気になる程度には聞こえました」</a:t>
-            </a:r>
-            <a:endParaRPr lang="en-US" sz="900" dirty="0"/>
-          </a:p>
-        </p:txBody>
-      </p:sp>
-      <p:sp>
-        <p:nvSpPr>
-          <p:cNvPr id="33" name="Shape 31"/>
-          <p:cNvSpPr/>
-          <p:nvPr/>
-        </p:nvSpPr>
-        <p:spPr>
-          <a:xfrm>
-            <a:off x="3291840" y="2880360"/>
-            <a:ext cx="2651760" cy="1600200"/>
-          </a:xfrm>
-          <a:prstGeom prst="rect">
-            <a:avLst/>
-          </a:prstGeom>
-          <a:solidFill>
-            <a:srgbClr val="FFFFFF"/>
-          </a:solidFill>
-          <a:ln/>
-          <a:effectLst>
-            <a:outerShdw sx="100000" sy="100000" kx="0" ky="0" algn="bl" rotWithShape="0" blurRad="50800" dist="25400" dir="8100000">
-              <a:srgbClr val="000000">
-                <a:alpha val="10000"/>
-              </a:srgbClr>
-            </a:outerShdw>
-          </a:effectLst>
-        </p:spPr>
-      </p:sp>
-      <p:sp>
-        <p:nvSpPr>
-          <p:cNvPr id="34" name="Shape 32"/>
-          <p:cNvSpPr/>
-          <p:nvPr/>
-        </p:nvSpPr>
-        <p:spPr>
-          <a:xfrm>
-            <a:off x="3291840" y="2880360"/>
-            <a:ext cx="54864" cy="1600200"/>
-          </a:xfrm>
-          <a:prstGeom prst="rect">
-            <a:avLst/>
-          </a:prstGeom>
-          <a:solidFill>
-            <a:srgbClr val="16A34A"/>
-          </a:solidFill>
-          <a:ln/>
-        </p:spPr>
-      </p:sp>
-      <p:sp>
-        <p:nvSpPr>
-          <p:cNvPr id="35" name="Shape 33"/>
-          <p:cNvSpPr/>
-          <p:nvPr/>
-        </p:nvSpPr>
-        <p:spPr>
-          <a:xfrm>
-            <a:off x="5120640" y="2953512"/>
-            <a:ext cx="658368" cy="228600"/>
-          </a:xfrm>
-          <a:prstGeom prst="rect">
-            <a:avLst/>
-          </a:prstGeom>
-          <a:solidFill>
-            <a:srgbClr val="DCFCE7"/>
-          </a:solidFill>
-          <a:ln/>
-        </p:spPr>
-      </p:sp>
-      <p:sp>
-        <p:nvSpPr>
-          <p:cNvPr id="36" name="Text 34"/>
-          <p:cNvSpPr/>
-          <p:nvPr/>
-        </p:nvSpPr>
-        <p:spPr>
-          <a:xfrm>
-            <a:off x="5120640" y="2953512"/>
-            <a:ext cx="658368" cy="228600"/>
-          </a:xfrm>
-          <a:prstGeom prst="rect">
-            <a:avLst/>
-          </a:prstGeom>
-          <a:noFill/>
-          <a:ln/>
-        </p:spPr>
-        <p:txBody>
-          <a:bodyPr wrap="square" lIns="0" tIns="0" rIns="0" bIns="0" rtlCol="0" anchor="ctr"/>
-          <a:lstStyle/>
-          <a:p>
-            <a:pPr algn="ctr" indent="0" marL="0">
-              <a:buNone/>
-            </a:pPr>
-            <a:r>
-              <a:rPr lang="en-US" sz="900" b="1" dirty="0">
-                <a:solidFill>
-                  <a:srgbClr val="16A34A"/>
-                </a:solidFill>
-                <a:latin typeface="Arial" pitchFamily="34" charset="0"/>
-                <a:ea typeface="Arial" pitchFamily="34" charset="-122"/>
-                <a:cs typeface="Arial" pitchFamily="34" charset="-120"/>
-              </a:rPr>
-              <a:t>10件+</a:t>
             </a:r>
             <a:endParaRPr lang="en-US" sz="900" dirty="0"/>
           </a:p>
@@ -12736,7 +12413,7 @@
                           <a:ea typeface="Arial" pitchFamily="34" charset="-122"/>
                           <a:cs typeface="Arial" pitchFamily="34" charset="-120"/>
                         </a:rPr>
-                        <a:t>19件</a:t>
+                        <a:t>23件</a:t>
                       </a:r>
                       <a:endParaRPr lang="en-US" sz="900" dirty="0">
                         <a:latin typeface="Arial" charset="0"/>
@@ -13010,7 +12687,7 @@
                           <a:ea typeface="Arial" pitchFamily="34" charset="-122"/>
                           <a:cs typeface="Arial" pitchFamily="34" charset="-120"/>
                         </a:rPr>
-                        <a:t>10件</a:t>
+                        <a:t>15件</a:t>
                       </a:r>
                       <a:endParaRPr lang="en-US" sz="900" dirty="0">
                         <a:latin typeface="Arial" charset="0"/>
@@ -13284,7 +12961,7 @@
                           <a:ea typeface="Arial" pitchFamily="34" charset="-122"/>
                           <a:cs typeface="Arial" pitchFamily="34" charset="-120"/>
                         </a:rPr>
-                        <a:t>7件</a:t>
+                        <a:t>11件</a:t>
                       </a:r>
                       <a:endParaRPr lang="en-US" sz="900" dirty="0">
                         <a:latin typeface="Arial" charset="0"/>
@@ -13422,7 +13099,7 @@
                           <a:ea typeface="Arial" pitchFamily="34" charset="-122"/>
                           <a:cs typeface="Arial" pitchFamily="34" charset="-120"/>
                         </a:rPr>
-                        <a:t>窓・採光</a:t>
+                        <a:t>朝食の改善要望</a:t>
                       </a:r>
                       <a:endParaRPr lang="en-US" sz="900" dirty="0">
                         <a:latin typeface="Arial" charset="0"/>
@@ -13490,7 +13167,7 @@
                           <a:ea typeface="Arial" pitchFamily="34" charset="-122"/>
                           <a:cs typeface="Arial" pitchFamily="34" charset="-120"/>
                         </a:rPr>
-                        <a:t>空調が暖房•送風のみだったため、室温調整に窓を開けざるをなかった</a:t>
+                        <a:t>会場が狭めで品数も多くはありませんが、パンもシリアルもありよかったです</a:t>
                       </a:r>
                       <a:endParaRPr lang="en-US" sz="900" dirty="0">
                         <a:latin typeface="Arial" charset="0"/>
@@ -13558,7 +13235,7 @@
                           <a:ea typeface="Arial" pitchFamily="34" charset="-122"/>
                           <a:cs typeface="Arial" pitchFamily="34" charset="-120"/>
                         </a:rPr>
-                        <a:t>6件</a:t>
+                        <a:t>7件</a:t>
                       </a:r>
                       <a:endParaRPr lang="en-US" sz="900" dirty="0">
                         <a:latin typeface="Arial" charset="0"/>
@@ -13832,7 +13509,7 @@
                           <a:ea typeface="Arial" pitchFamily="34" charset="-122"/>
                           <a:cs typeface="Arial" pitchFamily="34" charset="-120"/>
                         </a:rPr>
-                        <a:t>5件</a:t>
+                        <a:t>6件</a:t>
                       </a:r>
                       <a:endParaRPr lang="en-US" sz="900" dirty="0">
                         <a:latin typeface="Arial" charset="0"/>
@@ -13970,7 +13647,7 @@
                           <a:ea typeface="Arial" pitchFamily="34" charset="-122"/>
                           <a:cs typeface="Arial" pitchFamily="34" charset="-120"/>
                         </a:rPr>
-                        <a:t>朝食の改善要望</a:t>
+                        <a:t>エアコン・空調</a:t>
                       </a:r>
                       <a:endParaRPr lang="en-US" sz="900" dirty="0">
                         <a:latin typeface="Arial" charset="0"/>
@@ -14038,7 +13715,7 @@
                           <a:ea typeface="Arial" pitchFamily="34" charset="-122"/>
                           <a:cs typeface="Arial" pitchFamily="34" charset="-120"/>
                         </a:rPr>
-                        <a:t>会場が狭めで品数も多くはありませんが、パンもシリアルもありよかったです</a:t>
+                        <a:t>空調が暖房•送風のみだったため、室温調整に窓を開けざるをなかった</a:t>
                       </a:r>
                       <a:endParaRPr lang="en-US" sz="900" dirty="0">
                         <a:latin typeface="Arial" charset="0"/>
@@ -14106,7 +13783,7 @@
                           <a:ea typeface="Arial" pitchFamily="34" charset="-122"/>
                           <a:cs typeface="Arial" pitchFamily="34" charset="-120"/>
                         </a:rPr>
-                        <a:t>5件</a:t>
+                        <a:t>6件</a:t>
                       </a:r>
                       <a:endParaRPr lang="en-US" sz="900" dirty="0">
                         <a:latin typeface="Arial" charset="0"/>
@@ -14244,7 +13921,7 @@
                           <a:ea typeface="Arial" pitchFamily="34" charset="-122"/>
                           <a:cs typeface="Arial" pitchFamily="34" charset="-120"/>
                         </a:rPr>
-                        <a:t>エアコン・空調</a:t>
+                        <a:t>窓・採光</a:t>
                       </a:r>
                       <a:endParaRPr lang="en-US" sz="900" dirty="0">
                         <a:latin typeface="Arial" charset="0"/>
@@ -14380,7 +14057,7 @@
                           <a:ea typeface="Arial" pitchFamily="34" charset="-122"/>
                           <a:cs typeface="Arial" pitchFamily="34" charset="-120"/>
                         </a:rPr>
-                        <a:t>4件</a:t>
+                        <a:t>6件</a:t>
                       </a:r>
                       <a:endParaRPr lang="en-US" sz="900" dirty="0">
                         <a:latin typeface="Arial" charset="0"/>
@@ -14654,7 +14331,7 @@
                           <a:ea typeface="Arial" pitchFamily="34" charset="-122"/>
                           <a:cs typeface="Arial" pitchFamily="34" charset="-120"/>
                         </a:rPr>
-                        <a:t>2件</a:t>
+                        <a:t>4件</a:t>
                       </a:r>
                       <a:endParaRPr lang="en-US" sz="900" dirty="0">
                         <a:latin typeface="Arial" charset="0"/>

--- a/納品レポート/ホテル別レポート/comfort_yokohama_kannai_口コミ分析レポート.pptx
+++ b/納品レポート/ホテル別レポート/comfort_yokohama_kannai_口コミ分析レポート.pptx
@@ -2801,7 +2801,7 @@
                 <a:ea typeface="Arial" pitchFamily="34" charset="-122"/>
                 <a:cs typeface="Arial" pitchFamily="34" charset="-120"/>
               </a:rPr>
-              <a:t>作成日：2026年4月6日</a:t>
+              <a:t>作成日：2026年4月7日</a:t>
             </a:r>
             <a:endParaRPr lang="en-US" sz="1000" dirty="0"/>
           </a:p>
@@ -13099,7 +13099,7 @@
                           <a:ea typeface="Arial" pitchFamily="34" charset="-122"/>
                           <a:cs typeface="Arial" pitchFamily="34" charset="-120"/>
                         </a:rPr>
-                        <a:t>朝食の改善要望</a:t>
+                        <a:t>防音性能</a:t>
                       </a:r>
                       <a:endParaRPr lang="en-US" sz="900" dirty="0">
                         <a:latin typeface="Arial" charset="0"/>
@@ -13167,7 +13167,7 @@
                           <a:ea typeface="Arial" pitchFamily="34" charset="-122"/>
                           <a:cs typeface="Arial" pitchFamily="34" charset="-120"/>
                         </a:rPr>
-                        <a:t>会場が狭めで品数も多くはありませんが、パンもシリアルもありよかったです</a:t>
+                        <a:t>立地のせいもあるのと壁が薄めなのか、外や廊下の音は気になる程度には聞こえました</a:t>
                       </a:r>
                       <a:endParaRPr lang="en-US" sz="900" dirty="0">
                         <a:latin typeface="Arial" charset="0"/>
@@ -13235,7 +13235,7 @@
                           <a:ea typeface="Arial" pitchFamily="34" charset="-122"/>
                           <a:cs typeface="Arial" pitchFamily="34" charset="-120"/>
                         </a:rPr>
-                        <a:t>7件</a:t>
+                        <a:t>6件</a:t>
                       </a:r>
                       <a:endParaRPr lang="en-US" sz="900" dirty="0">
                         <a:latin typeface="Arial" charset="0"/>
@@ -13373,7 +13373,7 @@
                           <a:ea typeface="Arial" pitchFamily="34" charset="-122"/>
                           <a:cs typeface="Arial" pitchFamily="34" charset="-120"/>
                         </a:rPr>
-                        <a:t>防音性能</a:t>
+                        <a:t>朝食の改善要望</a:t>
                       </a:r>
                       <a:endParaRPr lang="en-US" sz="900" dirty="0">
                         <a:latin typeface="Arial" charset="0"/>
@@ -13441,7 +13441,7 @@
                           <a:ea typeface="Arial" pitchFamily="34" charset="-122"/>
                           <a:cs typeface="Arial" pitchFamily="34" charset="-120"/>
                         </a:rPr>
-                        <a:t>立地のせいもあるのと壁が薄めなのか、外や廊下の音は気になる程度には聞こえました</a:t>
+                        <a:t>会場が狭めで品数も多くはありませんが、パンもシリアルもありよかったです</a:t>
                       </a:r>
                       <a:endParaRPr lang="en-US" sz="900" dirty="0">
                         <a:latin typeface="Arial" charset="0"/>

--- a/納品レポート/ホテル別レポート/comfort_yokohama_kannai_口コミ分析レポート.pptx
+++ b/納品レポート/ホテル別レポート/comfort_yokohama_kannai_口コミ分析レポート.pptx
@@ -2801,7 +2801,7 @@
                 <a:ea typeface="Arial" pitchFamily="34" charset="-122"/>
                 <a:cs typeface="Arial" pitchFamily="34" charset="-120"/>
               </a:rPr>
-              <a:t>作成日：2026年4月7日</a:t>
+              <a:t>作成日：2026年4月8日</a:t>
             </a:r>
             <a:endParaRPr lang="en-US" sz="1000" dirty="0"/>
           </a:p>
@@ -13099,7 +13099,7 @@
                           <a:ea typeface="Arial" pitchFamily="34" charset="-122"/>
                           <a:cs typeface="Arial" pitchFamily="34" charset="-120"/>
                         </a:rPr>
-                        <a:t>防音性能</a:t>
+                        <a:t>朝食の改善要望</a:t>
                       </a:r>
                       <a:endParaRPr lang="en-US" sz="900" dirty="0">
                         <a:latin typeface="Arial" charset="0"/>
@@ -13167,7 +13167,7 @@
                           <a:ea typeface="Arial" pitchFamily="34" charset="-122"/>
                           <a:cs typeface="Arial" pitchFamily="34" charset="-120"/>
                         </a:rPr>
-                        <a:t>立地のせいもあるのと壁が薄めなのか、外や廊下の音は気になる程度には聞こえました</a:t>
+                        <a:t>会場が狭めで品数も多くはありませんが、パンもシリアルもありよかったです</a:t>
                       </a:r>
                       <a:endParaRPr lang="en-US" sz="900" dirty="0">
                         <a:latin typeface="Arial" charset="0"/>
@@ -13235,7 +13235,7 @@
                           <a:ea typeface="Arial" pitchFamily="34" charset="-122"/>
                           <a:cs typeface="Arial" pitchFamily="34" charset="-120"/>
                         </a:rPr>
-                        <a:t>6件</a:t>
+                        <a:t>7件</a:t>
                       </a:r>
                       <a:endParaRPr lang="en-US" sz="900" dirty="0">
                         <a:latin typeface="Arial" charset="0"/>
@@ -13373,7 +13373,7 @@
                           <a:ea typeface="Arial" pitchFamily="34" charset="-122"/>
                           <a:cs typeface="Arial" pitchFamily="34" charset="-120"/>
                         </a:rPr>
-                        <a:t>朝食の改善要望</a:t>
+                        <a:t>防音性能</a:t>
                       </a:r>
                       <a:endParaRPr lang="en-US" sz="900" dirty="0">
                         <a:latin typeface="Arial" charset="0"/>
@@ -13441,7 +13441,7 @@
                           <a:ea typeface="Arial" pitchFamily="34" charset="-122"/>
                           <a:cs typeface="Arial" pitchFamily="34" charset="-120"/>
                         </a:rPr>
-                        <a:t>会場が狭めで品数も多くはありませんが、パンもシリアルもありよかったです</a:t>
+                        <a:t>立地のせいもあるのと壁が薄めなのか、外や廊下の音は気になる程度には聞こえました</a:t>
                       </a:r>
                       <a:endParaRPr lang="en-US" sz="900" dirty="0">
                         <a:latin typeface="Arial" charset="0"/>

--- a/納品レポート/ホテル別レポート/comfort_yokohama_kannai_口コミ分析レポート.pptx
+++ b/納品レポート/ホテル別レポート/comfort_yokohama_kannai_口コミ分析レポート.pptx
@@ -2801,7 +2801,7 @@
                 <a:ea typeface="Arial" pitchFamily="34" charset="-122"/>
                 <a:cs typeface="Arial" pitchFamily="34" charset="-120"/>
               </a:rPr>
-              <a:t>作成日：2026年4月10日</a:t>
+              <a:t>作成日：2026年4月11日</a:t>
             </a:r>
             <a:endParaRPr lang="en-US" sz="1000" dirty="0"/>
           </a:p>

--- a/納品レポート/ホテル別レポート/comfort_yokohama_kannai_口コミ分析レポート.pptx
+++ b/納品レポート/ホテル別レポート/comfort_yokohama_kannai_口コミ分析レポート.pptx
@@ -2801,7 +2801,7 @@
                 <a:ea typeface="Arial" pitchFamily="34" charset="-122"/>
                 <a:cs typeface="Arial" pitchFamily="34" charset="-120"/>
               </a:rPr>
-              <a:t>作成日：2026年4月11日</a:t>
+              <a:t>作成日：2026年4月13日</a:t>
             </a:r>
             <a:endParaRPr lang="en-US" sz="1000" dirty="0"/>
           </a:p>

--- a/納品レポート/ホテル別レポート/comfort_yokohama_kannai_口コミ分析レポート.pptx
+++ b/納品レポート/ホテル別レポート/comfort_yokohama_kannai_口コミ分析レポート.pptx
@@ -2801,7 +2801,7 @@
                 <a:ea typeface="Arial" pitchFamily="34" charset="-122"/>
                 <a:cs typeface="Arial" pitchFamily="34" charset="-120"/>
               </a:rPr>
-              <a:t>作成日：2026年4月13日</a:t>
+              <a:t>作成日：2026年4月15日</a:t>
             </a:r>
             <a:endParaRPr lang="en-US" sz="1000" dirty="0"/>
           </a:p>

--- a/納品レポート/ホテル別レポート/comfort_yokohama_kannai_口コミ分析レポート.pptx
+++ b/納品レポート/ホテル別レポート/comfort_yokohama_kannai_口コミ分析レポート.pptx
@@ -2801,7 +2801,7 @@
                 <a:ea typeface="Arial" pitchFamily="34" charset="-122"/>
                 <a:cs typeface="Arial" pitchFamily="34" charset="-120"/>
               </a:rPr>
-              <a:t>作成日：2026年4月16日</a:t>
+              <a:t>作成日：2026年4月20日</a:t>
             </a:r>
             <a:endParaRPr lang="en-US" sz="1000" dirty="0"/>
           </a:p>
@@ -13099,7 +13099,7 @@
                           <a:ea typeface="Arial" pitchFamily="34" charset="-122"/>
                           <a:cs typeface="Arial" pitchFamily="34" charset="-120"/>
                         </a:rPr>
-                        <a:t>防音性能</a:t>
+                        <a:t>朝食の改善要望</a:t>
                       </a:r>
                       <a:endParaRPr lang="en-US" sz="900" dirty="0">
                         <a:latin typeface="Arial" charset="0"/>
@@ -13167,7 +13167,7 @@
                           <a:ea typeface="Arial" pitchFamily="34" charset="-122"/>
                           <a:cs typeface="Arial" pitchFamily="34" charset="-120"/>
                         </a:rPr>
-                        <a:t>立地のせいもあるのと壁が薄めなのか、外や廊下の音は気になる程度には聞こえました</a:t>
+                        <a:t>会場が狭めで品数も多くはありませんが、パンもシリアルもありよかったです</a:t>
                       </a:r>
                       <a:endParaRPr lang="en-US" sz="900" dirty="0">
                         <a:latin typeface="Arial" charset="0"/>
@@ -13235,7 +13235,7 @@
                           <a:ea typeface="Arial" pitchFamily="34" charset="-122"/>
                           <a:cs typeface="Arial" pitchFamily="34" charset="-120"/>
                         </a:rPr>
-                        <a:t>6件</a:t>
+                        <a:t>7件</a:t>
                       </a:r>
                       <a:endParaRPr lang="en-US" sz="900" dirty="0">
                         <a:latin typeface="Arial" charset="0"/>
@@ -13373,7 +13373,7 @@
                           <a:ea typeface="Arial" pitchFamily="34" charset="-122"/>
                           <a:cs typeface="Arial" pitchFamily="34" charset="-120"/>
                         </a:rPr>
-                        <a:t>朝食の改善要望</a:t>
+                        <a:t>防音性能</a:t>
                       </a:r>
                       <a:endParaRPr lang="en-US" sz="900" dirty="0">
                         <a:latin typeface="Arial" charset="0"/>
@@ -13441,7 +13441,7 @@
                           <a:ea typeface="Arial" pitchFamily="34" charset="-122"/>
                           <a:cs typeface="Arial" pitchFamily="34" charset="-120"/>
                         </a:rPr>
-                        <a:t>会場が狭めで品数も多くはありませんが、パンもシリアルもありよかったです</a:t>
+                        <a:t>立地のせいもあるのと壁が薄めなのか、外や廊下の音は気になる程度には聞こえました</a:t>
                       </a:r>
                       <a:endParaRPr lang="en-US" sz="900" dirty="0">
                         <a:latin typeface="Arial" charset="0"/>

--- a/納品レポート/ホテル別レポート/comfort_yokohama_kannai_口コミ分析レポート.pptx
+++ b/納品レポート/ホテル別レポート/comfort_yokohama_kannai_口コミ分析レポート.pptx
@@ -2801,7 +2801,7 @@
                 <a:ea typeface="Arial" pitchFamily="34" charset="-122"/>
                 <a:cs typeface="Arial" pitchFamily="34" charset="-120"/>
               </a:rPr>
-              <a:t>作成日：2026年4月20日</a:t>
+              <a:t>作成日：2026年4月21日</a:t>
             </a:r>
             <a:endParaRPr lang="en-US" sz="1000" dirty="0"/>
           </a:p>

--- a/納品レポート/ホテル別レポート/comfort_yokohama_kannai_口コミ分析レポート.pptx
+++ b/納品レポート/ホテル別レポート/comfort_yokohama_kannai_口コミ分析レポート.pptx
@@ -2801,7 +2801,7 @@
                 <a:ea typeface="Arial" pitchFamily="34" charset="-122"/>
                 <a:cs typeface="Arial" pitchFamily="34" charset="-120"/>
               </a:rPr>
-              <a:t>作成日：2026年4月21日</a:t>
+              <a:t>作成日：2026年4月22日</a:t>
             </a:r>
             <a:endParaRPr lang="en-US" sz="1000" dirty="0"/>
           </a:p>
